--- a/Seminario de Sistemas/Clases/Clase 8 - Introduccion a UML/Presentacion.pptx
+++ b/Seminario de Sistemas/Clases/Clase 8 - Introduccion a UML/Presentacion.pptx
@@ -19,6 +19,11 @@
     <p:sldId id="267" r:id="rId18"/>
     <p:sldId id="268" r:id="rId19"/>
     <p:sldId id="269" r:id="rId20"/>
+    <p:sldId id="270" r:id="rId21"/>
+    <p:sldId id="271" r:id="rId22"/>
+    <p:sldId id="272" r:id="rId23"/>
+    <p:sldId id="273" r:id="rId24"/>
+    <p:sldId id="274" r:id="rId25"/>
   </p:sldIdLst>
   <p:sldSz cx="12191695" cy="6858000" type="screen4x3"/>
   <p:notesSz cx="6858000" cy="9144000"/>
@@ -3619,7 +3624,7 @@
                 </a:solidFill>
                 <a:latin typeface="Calibri"/>
               </a:rPr>
-              <a:t>Taller PI — pasos guiados</a:t>
+              <a:t>Modelo de dominio de VetCare en sintaxis Mermaid (diagrama, no codigo)</a:t>
             </a:r>
           </a:p>
         </p:txBody>
@@ -3632,8 +3637,8 @@
         </p:nvSpPr>
         <p:spPr>
           <a:xfrm>
-            <a:off x="457200" y="1234440"/>
-            <a:ext cx="11277295" cy="950976"/>
+            <a:off x="457200" y="1261872"/>
+            <a:ext cx="11277295" cy="4773168"/>
           </a:xfrm>
           <a:prstGeom prst="roundRect">
             <a:avLst>
@@ -3641,7 +3646,7 @@
             </a:avLst>
           </a:prstGeom>
           <a:solidFill>
-            <a:srgbClr val="F2F2F2"/>
+            <a:srgbClr val="1E2A38"/>
           </a:solidFill>
           <a:ln>
             <a:noFill/>
@@ -3671,19 +3676,17 @@
       </p:sp>
       <p:sp>
         <p:nvSpPr>
-          <p:cNvPr id="6" name="Rounded Rectangle 5"/>
+          <p:cNvPr id="6" name="Rectangle 5"/>
           <p:cNvSpPr/>
           <p:nvPr/>
         </p:nvSpPr>
         <p:spPr>
           <a:xfrm>
-            <a:off x="594360" y="1490472"/>
-            <a:ext cx="438912" cy="438912"/>
-          </a:xfrm>
-          <a:prstGeom prst="roundRect">
-            <a:avLst>
-              <a:gd name="adj" fmla="val 12000"/>
-            </a:avLst>
+            <a:off x="457200" y="1261872"/>
+            <a:ext cx="11277295" cy="320040"/>
+          </a:xfrm>
+          <a:prstGeom prst="rect">
+            <a:avLst/>
           </a:prstGeom>
           <a:solidFill>
             <a:srgbClr val="095292"/>
@@ -3722,8 +3725,8 @@
         </p:nvSpPr>
         <p:spPr>
           <a:xfrm>
-            <a:off x="594360" y="1490472"/>
-            <a:ext cx="438912" cy="438912"/>
+            <a:off x="685800" y="1307592"/>
+            <a:ext cx="10820095" cy="256032"/>
           </a:xfrm>
           <a:prstGeom prst="rect">
             <a:avLst/>
@@ -3734,15 +3737,14 @@
           <a:bodyPr wrap="square" anchor="ctr"/>
           <a:lstStyle/>
           <a:p>
-            <a:pPr algn="ctr"/>
-            <a:r>
-              <a:rPr sz="1600" b="1" i="0">
-                <a:solidFill>
-                  <a:srgbClr val="FFFFFF"/>
-                </a:solidFill>
-                <a:latin typeface="Calibri"/>
-              </a:rPr>
-              <a:t>1</a:t>
+            <a:r>
+              <a:rPr sz="1000" b="1" i="0">
+                <a:solidFill>
+                  <a:srgbClr val="269CCB"/>
+                </a:solidFill>
+                <a:latin typeface="Calibri"/>
+              </a:rPr>
+              <a:t>● ● ●</a:t>
             </a:r>
           </a:p>
         </p:txBody>
@@ -3755,8 +3757,8 @@
         </p:nvSpPr>
         <p:spPr>
           <a:xfrm>
-            <a:off x="1188720" y="1325880"/>
-            <a:ext cx="10271455" cy="786384"/>
+            <a:off x="777240" y="1719072"/>
+            <a:ext cx="5181447" cy="4133087"/>
           </a:xfrm>
           <a:prstGeom prst="rect">
             <a:avLst/>
@@ -3764,644 +3766,537 @@
           <a:noFill/>
         </p:spPr>
         <p:txBody>
-          <a:bodyPr wrap="square" anchor="ctr"/>
-          <a:lstStyle/>
-          <a:p>
-            <a:r>
-              <a:rPr sz="1500" b="1" i="0">
-                <a:solidFill>
-                  <a:srgbClr val="095292"/>
-                </a:solidFill>
-                <a:latin typeface="Calibri"/>
-              </a:rPr>
-              <a:t>Paso 1: subraye en el catalogo de requisitos y en el backlog los sustantivos del negocio de VetCare y arme la lista de clases candidatas, descartando las que sean pantallas, reportes o cosas tecnicas.</a:t>
-            </a:r>
-          </a:p>
-        </p:txBody>
-      </p:sp>
-      <p:sp>
-        <p:nvSpPr>
-          <p:cNvPr id="9" name="Rounded Rectangle 8"/>
-          <p:cNvSpPr/>
-          <p:nvPr/>
-        </p:nvSpPr>
-        <p:spPr>
-          <a:xfrm>
-            <a:off x="457200" y="2276856"/>
-            <a:ext cx="11277295" cy="950976"/>
-          </a:xfrm>
-          <a:prstGeom prst="roundRect">
-            <a:avLst>
-              <a:gd name="adj" fmla="val 12000"/>
-            </a:avLst>
-          </a:prstGeom>
-          <a:solidFill>
-            <a:srgbClr val="E8F4FA"/>
-          </a:solidFill>
-          <a:ln>
-            <a:noFill/>
-          </a:ln>
-        </p:spPr>
-        <p:style>
-          <a:lnRef idx="1">
-            <a:schemeClr val="accent1"/>
-          </a:lnRef>
-          <a:fillRef idx="3">
-            <a:schemeClr val="accent1"/>
-          </a:fillRef>
-          <a:effectRef idx="2">
-            <a:schemeClr val="accent1"/>
-          </a:effectRef>
-          <a:fontRef idx="minor">
-            <a:schemeClr val="lt1"/>
-          </a:fontRef>
-        </p:style>
-        <p:txBody>
-          <a:bodyPr rtlCol="0" anchor="ctr"/>
+          <a:bodyPr wrap="square">
+            <a:spAutoFit/>
+          </a:bodyPr>
+          <a:lstStyle/>
+          <a:p>
+            <a:pPr>
+              <a:spcAft>
+                <a:spcPts val="371"/>
+              </a:spcAft>
+            </a:pPr>
+            <a:r>
+              <a:rPr sz="1300" b="0" i="0">
+                <a:solidFill>
+                  <a:srgbClr val="FFFFFF"/>
+                </a:solidFill>
+                <a:latin typeface="Calibri"/>
+              </a:rPr>
+              <a:t>classDiagram</a:t>
+            </a:r>
+          </a:p>
+          <a:p>
+            <a:pPr>
+              <a:spcAft>
+                <a:spcPts val="371"/>
+              </a:spcAft>
+            </a:pPr>
+            <a:r>
+              <a:rPr sz="1300" b="0" i="0">
+                <a:solidFill>
+                  <a:srgbClr val="FFFFFF"/>
+                </a:solidFill>
+                <a:latin typeface="Calibri"/>
+              </a:rPr>
+              <a:t>  class Dueno {</a:t>
+            </a:r>
+          </a:p>
+          <a:p>
+            <a:pPr>
+              <a:spcAft>
+                <a:spcPts val="371"/>
+              </a:spcAft>
+            </a:pPr>
+            <a:r>
+              <a:rPr sz="1300" b="0" i="0">
+                <a:solidFill>
+                  <a:srgbClr val="FFFFFF"/>
+                </a:solidFill>
+                <a:latin typeface="Calibri"/>
+              </a:rPr>
+              <a:t>    -documento: String</a:t>
+            </a:r>
+          </a:p>
+          <a:p>
+            <a:pPr>
+              <a:spcAft>
+                <a:spcPts val="371"/>
+              </a:spcAft>
+            </a:pPr>
+            <a:r>
+              <a:rPr sz="1300" b="0" i="0">
+                <a:solidFill>
+                  <a:srgbClr val="FFFFFF"/>
+                </a:solidFill>
+                <a:latin typeface="Calibri"/>
+              </a:rPr>
+              <a:t>    -nombre: String</a:t>
+            </a:r>
+          </a:p>
+          <a:p>
+            <a:pPr>
+              <a:spcAft>
+                <a:spcPts val="371"/>
+              </a:spcAft>
+            </a:pPr>
+            <a:r>
+              <a:rPr sz="1300" b="0" i="0">
+                <a:solidFill>
+                  <a:srgbClr val="FFFFFF"/>
+                </a:solidFill>
+                <a:latin typeface="Calibri"/>
+              </a:rPr>
+              <a:t>    +registrarMascota(m: Mascota): void</a:t>
+            </a:r>
+          </a:p>
+          <a:p>
+            <a:pPr>
+              <a:spcAft>
+                <a:spcPts val="371"/>
+              </a:spcAft>
+            </a:pPr>
+            <a:r>
+              <a:rPr sz="1300" b="0" i="0">
+                <a:solidFill>
+                  <a:srgbClr val="FFFFFF"/>
+                </a:solidFill>
+                <a:latin typeface="Calibri"/>
+              </a:rPr>
+              <a:t>  }</a:t>
+            </a:r>
+          </a:p>
+          <a:p>
+            <a:pPr>
+              <a:spcAft>
+                <a:spcPts val="371"/>
+              </a:spcAft>
+            </a:pPr>
+            <a:r>
+              <a:rPr sz="1300" b="0" i="0">
+                <a:solidFill>
+                  <a:srgbClr val="FFFFFF"/>
+                </a:solidFill>
+                <a:latin typeface="Calibri"/>
+              </a:rPr>
+              <a:t>  class Mascota {</a:t>
+            </a:r>
+          </a:p>
+          <a:p>
+            <a:pPr>
+              <a:spcAft>
+                <a:spcPts val="371"/>
+              </a:spcAft>
+            </a:pPr>
+            <a:r>
+              <a:rPr sz="1300" b="0" i="0">
+                <a:solidFill>
+                  <a:srgbClr val="FFFFFF"/>
+                </a:solidFill>
+                <a:latin typeface="Calibri"/>
+              </a:rPr>
+              <a:t>    -codigo: String</a:t>
+            </a:r>
+          </a:p>
+          <a:p>
+            <a:pPr>
+              <a:spcAft>
+                <a:spcPts val="371"/>
+              </a:spcAft>
+            </a:pPr>
+            <a:r>
+              <a:rPr sz="1300" b="0" i="0">
+                <a:solidFill>
+                  <a:srgbClr val="FFFFFF"/>
+                </a:solidFill>
+                <a:latin typeface="Calibri"/>
+              </a:rPr>
+              <a:t>    -especie: String</a:t>
+            </a:r>
+          </a:p>
+          <a:p>
+            <a:pPr>
+              <a:spcAft>
+                <a:spcPts val="371"/>
+              </a:spcAft>
+            </a:pPr>
+            <a:r>
+              <a:rPr sz="1300" b="0" i="0">
+                <a:solidFill>
+                  <a:srgbClr val="FFFFFF"/>
+                </a:solidFill>
+                <a:latin typeface="Calibri"/>
+              </a:rPr>
+              <a:t>    -fechaNacimiento: Date</a:t>
+            </a:r>
+          </a:p>
+          <a:p>
+            <a:pPr>
+              <a:spcAft>
+                <a:spcPts val="371"/>
+              </a:spcAft>
+            </a:pPr>
+            <a:r>
+              <a:rPr sz="1300" b="0" i="0">
+                <a:solidFill>
+                  <a:srgbClr val="FFFFFF"/>
+                </a:solidFill>
+                <a:latin typeface="Calibri"/>
+              </a:rPr>
+              <a:t>    +calcularEdad(): int</a:t>
+            </a:r>
+          </a:p>
+          <a:p>
+            <a:pPr>
+              <a:spcAft>
+                <a:spcPts val="371"/>
+              </a:spcAft>
+            </a:pPr>
+            <a:r>
+              <a:rPr sz="1300" b="0" i="0">
+                <a:solidFill>
+                  <a:srgbClr val="FFFFFF"/>
+                </a:solidFill>
+                <a:latin typeface="Calibri"/>
+              </a:rPr>
+              <a:t>  }</a:t>
+            </a:r>
+          </a:p>
+          <a:p>
+            <a:pPr>
+              <a:spcAft>
+                <a:spcPts val="371"/>
+              </a:spcAft>
+            </a:pPr>
+            <a:r>
+              <a:rPr sz="1300" b="0" i="0">
+                <a:solidFill>
+                  <a:srgbClr val="FFFFFF"/>
+                </a:solidFill>
+                <a:latin typeface="Calibri"/>
+              </a:rPr>
+              <a:t>  class Veterinario {</a:t>
+            </a:r>
+          </a:p>
+          <a:p>
+            <a:pPr>
+              <a:spcAft>
+                <a:spcPts val="371"/>
+              </a:spcAft>
+            </a:pPr>
+            <a:r>
+              <a:rPr sz="1300" b="0" i="0">
+                <a:solidFill>
+                  <a:srgbClr val="FFFFFF"/>
+                </a:solidFill>
+                <a:latin typeface="Calibri"/>
+              </a:rPr>
+              <a:t>    -tarjetaProfesional: String</a:t>
+            </a:r>
+          </a:p>
+          <a:p>
+            <a:pPr>
+              <a:spcAft>
+                <a:spcPts val="371"/>
+              </a:spcAft>
+            </a:pPr>
+            <a:r>
+              <a:rPr sz="1300" b="0" i="0">
+                <a:solidFill>
+                  <a:srgbClr val="FFFFFF"/>
+                </a:solidFill>
+                <a:latin typeface="Calibri"/>
+              </a:rPr>
+              <a:t>    -especialidad: String</a:t>
+            </a:r>
+          </a:p>
+          <a:p>
+            <a:pPr>
+              <a:spcAft>
+                <a:spcPts val="371"/>
+              </a:spcAft>
+            </a:pPr>
+            <a:r>
+              <a:rPr sz="1300" b="0" i="0">
+                <a:solidFill>
+                  <a:srgbClr val="FFFFFF"/>
+                </a:solidFill>
+                <a:latin typeface="Calibri"/>
+              </a:rPr>
+              <a:t>  }</a:t>
+            </a:r>
+          </a:p>
+        </p:txBody>
+      </p:sp>
+      <p:sp>
+        <p:nvSpPr>
+          <p:cNvPr id="9" name="TextBox 8"/>
+          <p:cNvSpPr txBox="1"/>
+          <p:nvPr/>
+        </p:nvSpPr>
+        <p:spPr>
+          <a:xfrm>
+            <a:off x="6233007" y="1719072"/>
+            <a:ext cx="5181447" cy="4133087"/>
+          </a:xfrm>
+          <a:prstGeom prst="rect">
+            <a:avLst/>
+          </a:prstGeom>
+          <a:noFill/>
+        </p:spPr>
+        <p:txBody>
+          <a:bodyPr wrap="square">
+            <a:spAutoFit/>
+          </a:bodyPr>
+          <a:lstStyle/>
+          <a:p>
+            <a:pPr>
+              <a:spcAft>
+                <a:spcPts val="371"/>
+              </a:spcAft>
+            </a:pPr>
+            <a:r>
+              <a:rPr sz="1300" b="0" i="0">
+                <a:solidFill>
+                  <a:srgbClr val="FFFFFF"/>
+                </a:solidFill>
+                <a:latin typeface="Calibri"/>
+              </a:rPr>
+              <a:t>  class Cita {</a:t>
+            </a:r>
+          </a:p>
+          <a:p>
+            <a:pPr>
+              <a:spcAft>
+                <a:spcPts val="371"/>
+              </a:spcAft>
+            </a:pPr>
+            <a:r>
+              <a:rPr sz="1300" b="0" i="0">
+                <a:solidFill>
+                  <a:srgbClr val="FFFFFF"/>
+                </a:solidFill>
+                <a:latin typeface="Calibri"/>
+              </a:rPr>
+              <a:t>    -fechaHora: DateTime</a:t>
+            </a:r>
+          </a:p>
+          <a:p>
+            <a:pPr>
+              <a:spcAft>
+                <a:spcPts val="371"/>
+              </a:spcAft>
+            </a:pPr>
+            <a:r>
+              <a:rPr sz="1300" b="0" i="0">
+                <a:solidFill>
+                  <a:srgbClr val="FFFFFF"/>
+                </a:solidFill>
+                <a:latin typeface="Calibri"/>
+              </a:rPr>
+              <a:t>    -estado: String</a:t>
+            </a:r>
+          </a:p>
+          <a:p>
+            <a:pPr>
+              <a:spcAft>
+                <a:spcPts val="371"/>
+              </a:spcAft>
+            </a:pPr>
+            <a:r>
+              <a:rPr sz="1300" b="0" i="0">
+                <a:solidFill>
+                  <a:srgbClr val="FFFFFF"/>
+                </a:solidFill>
+                <a:latin typeface="Calibri"/>
+              </a:rPr>
+              <a:t>    +reprogramar(nuevaFecha: DateTime): void</a:t>
+            </a:r>
+          </a:p>
+          <a:p>
+            <a:pPr>
+              <a:spcAft>
+                <a:spcPts val="371"/>
+              </a:spcAft>
+            </a:pPr>
+            <a:r>
+              <a:rPr sz="1300" b="0" i="0">
+                <a:solidFill>
+                  <a:srgbClr val="FFFFFF"/>
+                </a:solidFill>
+                <a:latin typeface="Calibri"/>
+              </a:rPr>
+              <a:t>  }</a:t>
+            </a:r>
+          </a:p>
+          <a:p>
+            <a:pPr>
+              <a:spcAft>
+                <a:spcPts val="371"/>
+              </a:spcAft>
+            </a:pPr>
+            <a:r>
+              <a:rPr sz="1300" b="0" i="0">
+                <a:solidFill>
+                  <a:srgbClr val="FFFFFF"/>
+                </a:solidFill>
+                <a:latin typeface="Calibri"/>
+              </a:rPr>
+              <a:t>  class Atencion {</a:t>
+            </a:r>
+          </a:p>
+          <a:p>
+            <a:pPr>
+              <a:spcAft>
+                <a:spcPts val="371"/>
+              </a:spcAft>
+            </a:pPr>
+            <a:r>
+              <a:rPr sz="1300" b="0" i="0">
+                <a:solidFill>
+                  <a:srgbClr val="FFFFFF"/>
+                </a:solidFill>
+                <a:latin typeface="Calibri"/>
+              </a:rPr>
+              <a:t>    -diagnostico: String</a:t>
+            </a:r>
+          </a:p>
+          <a:p>
+            <a:pPr>
+              <a:spcAft>
+                <a:spcPts val="371"/>
+              </a:spcAft>
+            </a:pPr>
+            <a:r>
+              <a:rPr sz="1300" b="0" i="0">
+                <a:solidFill>
+                  <a:srgbClr val="FFFFFF"/>
+                </a:solidFill>
+                <a:latin typeface="Calibri"/>
+              </a:rPr>
+              <a:t>    -tratamiento: String</a:t>
+            </a:r>
+          </a:p>
+          <a:p>
+            <a:pPr>
+              <a:spcAft>
+                <a:spcPts val="371"/>
+              </a:spcAft>
+            </a:pPr>
+            <a:r>
+              <a:rPr sz="1300" b="0" i="0">
+                <a:solidFill>
+                  <a:srgbClr val="FFFFFF"/>
+                </a:solidFill>
+                <a:latin typeface="Calibri"/>
+              </a:rPr>
+              <a:t>  }</a:t>
+            </a:r>
+          </a:p>
+          <a:p>
+            <a:pPr>
+              <a:spcAft>
+                <a:spcPts val="371"/>
+              </a:spcAft>
+            </a:pPr>
+            <a:r>
+              <a:rPr sz="1300" b="0" i="0">
+                <a:solidFill>
+                  <a:srgbClr val="FFFFFF"/>
+                </a:solidFill>
+                <a:latin typeface="Calibri"/>
+              </a:rPr>
+              <a:t>  Dueno "1" --&gt; "0..*" Mascota: es dueno de</a:t>
+            </a:r>
+          </a:p>
+          <a:p>
+            <a:pPr>
+              <a:spcAft>
+                <a:spcPts val="371"/>
+              </a:spcAft>
+            </a:pPr>
+            <a:r>
+              <a:rPr sz="1300" b="0" i="0">
+                <a:solidFill>
+                  <a:srgbClr val="FFFFFF"/>
+                </a:solidFill>
+                <a:latin typeface="Calibri"/>
+              </a:rPr>
+              <a:t>  Mascota "1" --&gt; "0..*" Cita: tiene agendada</a:t>
+            </a:r>
+          </a:p>
+          <a:p>
+            <a:pPr>
+              <a:spcAft>
+                <a:spcPts val="371"/>
+              </a:spcAft>
+            </a:pPr>
+            <a:r>
+              <a:rPr sz="1300" b="0" i="0">
+                <a:solidFill>
+                  <a:srgbClr val="FFFFFF"/>
+                </a:solidFill>
+                <a:latin typeface="Calibri"/>
+              </a:rPr>
+              <a:t>  Veterinario "1" --&gt; "0..*" Cita: atiende</a:t>
+            </a:r>
+          </a:p>
+          <a:p>
+            <a:pPr>
+              <a:spcAft>
+                <a:spcPts val="371"/>
+              </a:spcAft>
+            </a:pPr>
+            <a:r>
+              <a:rPr sz="1300" b="0" i="0">
+                <a:solidFill>
+                  <a:srgbClr val="FFFFFF"/>
+                </a:solidFill>
+                <a:latin typeface="Calibri"/>
+              </a:rPr>
+              <a:t>  Cita "1" --&gt; "0..1" Atencion: genera</a:t>
+            </a:r>
+          </a:p>
+        </p:txBody>
+      </p:sp>
+      <p:sp>
+        <p:nvSpPr>
+          <p:cNvPr id="10" name="TextBox 9"/>
+          <p:cNvSpPr txBox="1"/>
+          <p:nvPr/>
+        </p:nvSpPr>
+        <p:spPr>
+          <a:xfrm>
+            <a:off x="457200" y="6080760"/>
+            <a:ext cx="11277295" cy="320040"/>
+          </a:xfrm>
+          <a:prstGeom prst="rect">
+            <a:avLst/>
+          </a:prstGeom>
+          <a:noFill/>
+        </p:spPr>
+        <p:txBody>
+          <a:bodyPr wrap="square">
+            <a:spAutoFit/>
+          </a:bodyPr>
           <a:lstStyle/>
           <a:p>
             <a:pPr algn="ctr"/>
-          </a:p>
-        </p:txBody>
-      </p:sp>
-      <p:sp>
-        <p:nvSpPr>
-          <p:cNvPr id="10" name="Rounded Rectangle 9"/>
-          <p:cNvSpPr/>
-          <p:nvPr/>
-        </p:nvSpPr>
-        <p:spPr>
-          <a:xfrm>
-            <a:off x="594360" y="2532888"/>
-            <a:ext cx="438912" cy="438912"/>
-          </a:xfrm>
-          <a:prstGeom prst="roundRect">
-            <a:avLst>
-              <a:gd name="adj" fmla="val 12000"/>
-            </a:avLst>
-          </a:prstGeom>
-          <a:solidFill>
-            <a:srgbClr val="095292"/>
-          </a:solidFill>
-          <a:ln>
-            <a:noFill/>
-          </a:ln>
-        </p:spPr>
-        <p:style>
-          <a:lnRef idx="1">
-            <a:schemeClr val="accent1"/>
-          </a:lnRef>
-          <a:fillRef idx="3">
-            <a:schemeClr val="accent1"/>
-          </a:fillRef>
-          <a:effectRef idx="2">
-            <a:schemeClr val="accent1"/>
-          </a:effectRef>
-          <a:fontRef idx="minor">
-            <a:schemeClr val="lt1"/>
-          </a:fontRef>
-        </p:style>
-        <p:txBody>
-          <a:bodyPr rtlCol="0" anchor="ctr"/>
-          <a:lstStyle/>
-          <a:p>
-            <a:pPr algn="ctr"/>
+            <a:r>
+              <a:rPr sz="1200" b="0" i="1">
+                <a:solidFill>
+                  <a:srgbClr val="666666"/>
+                </a:solidFill>
+                <a:latin typeface="Calibri"/>
+              </a:rPr>
+              <a:t>Las multiplicidades son las que contestan las preguntas que el espanol deja abiertas: un dueno, muchas mascotas.</a:t>
+            </a:r>
           </a:p>
         </p:txBody>
       </p:sp>
       <p:sp>
         <p:nvSpPr>
           <p:cNvPr id="11" name="TextBox 10"/>
-          <p:cNvSpPr txBox="1"/>
-          <p:nvPr/>
-        </p:nvSpPr>
-        <p:spPr>
-          <a:xfrm>
-            <a:off x="594360" y="2532888"/>
-            <a:ext cx="438912" cy="438912"/>
-          </a:xfrm>
-          <a:prstGeom prst="rect">
-            <a:avLst/>
-          </a:prstGeom>
-          <a:noFill/>
-        </p:spPr>
-        <p:txBody>
-          <a:bodyPr wrap="square" anchor="ctr"/>
-          <a:lstStyle/>
-          <a:p>
-            <a:pPr algn="ctr"/>
-            <a:r>
-              <a:rPr sz="1600" b="1" i="0">
-                <a:solidFill>
-                  <a:srgbClr val="FFFFFF"/>
-                </a:solidFill>
-                <a:latin typeface="Calibri"/>
-              </a:rPr>
-              <a:t>2</a:t>
-            </a:r>
-          </a:p>
-        </p:txBody>
-      </p:sp>
-      <p:sp>
-        <p:nvSpPr>
-          <p:cNvPr id="12" name="TextBox 11"/>
-          <p:cNvSpPr txBox="1"/>
-          <p:nvPr/>
-        </p:nvSpPr>
-        <p:spPr>
-          <a:xfrm>
-            <a:off x="1188720" y="2368296"/>
-            <a:ext cx="10271455" cy="786384"/>
-          </a:xfrm>
-          <a:prstGeom prst="rect">
-            <a:avLst/>
-          </a:prstGeom>
-          <a:noFill/>
-        </p:spPr>
-        <p:txBody>
-          <a:bodyPr wrap="square" anchor="ctr"/>
-          <a:lstStyle/>
-          <a:p>
-            <a:r>
-              <a:rPr sz="1500" b="1" i="0">
-                <a:solidFill>
-                  <a:srgbClr val="095292"/>
-                </a:solidFill>
-                <a:latin typeface="Calibri"/>
-              </a:rPr>
-              <a:t>Paso 2: dibuje en draw.io las cinco clases Dueno, Mascota, Cita, Veterinario y Atencion con la caja de tres compartimentos, en singular y con mayuscula inicial.</a:t>
-            </a:r>
-          </a:p>
-        </p:txBody>
-      </p:sp>
-      <p:sp>
-        <p:nvSpPr>
-          <p:cNvPr id="13" name="Rounded Rectangle 12"/>
-          <p:cNvSpPr/>
-          <p:nvPr/>
-        </p:nvSpPr>
-        <p:spPr>
-          <a:xfrm>
-            <a:off x="457200" y="3319272"/>
-            <a:ext cx="11277295" cy="950976"/>
-          </a:xfrm>
-          <a:prstGeom prst="roundRect">
-            <a:avLst>
-              <a:gd name="adj" fmla="val 12000"/>
-            </a:avLst>
-          </a:prstGeom>
-          <a:solidFill>
-            <a:srgbClr val="F2F2F2"/>
-          </a:solidFill>
-          <a:ln>
-            <a:noFill/>
-          </a:ln>
-        </p:spPr>
-        <p:style>
-          <a:lnRef idx="1">
-            <a:schemeClr val="accent1"/>
-          </a:lnRef>
-          <a:fillRef idx="3">
-            <a:schemeClr val="accent1"/>
-          </a:fillRef>
-          <a:effectRef idx="2">
-            <a:schemeClr val="accent1"/>
-          </a:effectRef>
-          <a:fontRef idx="minor">
-            <a:schemeClr val="lt1"/>
-          </a:fontRef>
-        </p:style>
-        <p:txBody>
-          <a:bodyPr rtlCol="0" anchor="ctr"/>
-          <a:lstStyle/>
-          <a:p>
-            <a:pPr algn="ctr"/>
-          </a:p>
-        </p:txBody>
-      </p:sp>
-      <p:sp>
-        <p:nvSpPr>
-          <p:cNvPr id="14" name="Rounded Rectangle 13"/>
-          <p:cNvSpPr/>
-          <p:nvPr/>
-        </p:nvSpPr>
-        <p:spPr>
-          <a:xfrm>
-            <a:off x="594360" y="3575304"/>
-            <a:ext cx="438912" cy="438912"/>
-          </a:xfrm>
-          <a:prstGeom prst="roundRect">
-            <a:avLst>
-              <a:gd name="adj" fmla="val 12000"/>
-            </a:avLst>
-          </a:prstGeom>
-          <a:solidFill>
-            <a:srgbClr val="095292"/>
-          </a:solidFill>
-          <a:ln>
-            <a:noFill/>
-          </a:ln>
-        </p:spPr>
-        <p:style>
-          <a:lnRef idx="1">
-            <a:schemeClr val="accent1"/>
-          </a:lnRef>
-          <a:fillRef idx="3">
-            <a:schemeClr val="accent1"/>
-          </a:fillRef>
-          <a:effectRef idx="2">
-            <a:schemeClr val="accent1"/>
-          </a:effectRef>
-          <a:fontRef idx="minor">
-            <a:schemeClr val="lt1"/>
-          </a:fontRef>
-        </p:style>
-        <p:txBody>
-          <a:bodyPr rtlCol="0" anchor="ctr"/>
-          <a:lstStyle/>
-          <a:p>
-            <a:pPr algn="ctr"/>
-          </a:p>
-        </p:txBody>
-      </p:sp>
-      <p:sp>
-        <p:nvSpPr>
-          <p:cNvPr id="15" name="TextBox 14"/>
-          <p:cNvSpPr txBox="1"/>
-          <p:nvPr/>
-        </p:nvSpPr>
-        <p:spPr>
-          <a:xfrm>
-            <a:off x="594360" y="3575304"/>
-            <a:ext cx="438912" cy="438912"/>
-          </a:xfrm>
-          <a:prstGeom prst="rect">
-            <a:avLst/>
-          </a:prstGeom>
-          <a:noFill/>
-        </p:spPr>
-        <p:txBody>
-          <a:bodyPr wrap="square" anchor="ctr"/>
-          <a:lstStyle/>
-          <a:p>
-            <a:pPr algn="ctr"/>
-            <a:r>
-              <a:rPr sz="1600" b="1" i="0">
-                <a:solidFill>
-                  <a:srgbClr val="FFFFFF"/>
-                </a:solidFill>
-                <a:latin typeface="Calibri"/>
-              </a:rPr>
-              <a:t>3</a:t>
-            </a:r>
-          </a:p>
-        </p:txBody>
-      </p:sp>
-      <p:sp>
-        <p:nvSpPr>
-          <p:cNvPr id="16" name="TextBox 15"/>
-          <p:cNvSpPr txBox="1"/>
-          <p:nvPr/>
-        </p:nvSpPr>
-        <p:spPr>
-          <a:xfrm>
-            <a:off x="1188720" y="3410712"/>
-            <a:ext cx="10271455" cy="786384"/>
-          </a:xfrm>
-          <a:prstGeom prst="rect">
-            <a:avLst/>
-          </a:prstGeom>
-          <a:noFill/>
-        </p:spPr>
-        <p:txBody>
-          <a:bodyPr wrap="square" anchor="ctr"/>
-          <a:lstStyle/>
-          <a:p>
-            <a:r>
-              <a:rPr sz="1500" b="1" i="0">
-                <a:solidFill>
-                  <a:srgbClr val="095292"/>
-                </a:solidFill>
-                <a:latin typeface="Calibri"/>
-              </a:rPr>
-              <a:t>Paso 3: coloque minimo cuatro atributos por clase con visibilidad y tipo (por ejemplo -documento: String, -fechaNacimiento: Date) verificando que ningun atributo este repetido en dos clases distintas.</a:t>
-            </a:r>
-          </a:p>
-        </p:txBody>
-      </p:sp>
-      <p:sp>
-        <p:nvSpPr>
-          <p:cNvPr id="17" name="Rounded Rectangle 16"/>
-          <p:cNvSpPr/>
-          <p:nvPr/>
-        </p:nvSpPr>
-        <p:spPr>
-          <a:xfrm>
-            <a:off x="457200" y="4361688"/>
-            <a:ext cx="11277295" cy="950976"/>
-          </a:xfrm>
-          <a:prstGeom prst="roundRect">
-            <a:avLst>
-              <a:gd name="adj" fmla="val 12000"/>
-            </a:avLst>
-          </a:prstGeom>
-          <a:solidFill>
-            <a:srgbClr val="E8F4FA"/>
-          </a:solidFill>
-          <a:ln>
-            <a:noFill/>
-          </a:ln>
-        </p:spPr>
-        <p:style>
-          <a:lnRef idx="1">
-            <a:schemeClr val="accent1"/>
-          </a:lnRef>
-          <a:fillRef idx="3">
-            <a:schemeClr val="accent1"/>
-          </a:fillRef>
-          <a:effectRef idx="2">
-            <a:schemeClr val="accent1"/>
-          </a:effectRef>
-          <a:fontRef idx="minor">
-            <a:schemeClr val="lt1"/>
-          </a:fontRef>
-        </p:style>
-        <p:txBody>
-          <a:bodyPr rtlCol="0" anchor="ctr"/>
-          <a:lstStyle/>
-          <a:p>
-            <a:pPr algn="ctr"/>
-          </a:p>
-        </p:txBody>
-      </p:sp>
-      <p:sp>
-        <p:nvSpPr>
-          <p:cNvPr id="18" name="Rounded Rectangle 17"/>
-          <p:cNvSpPr/>
-          <p:nvPr/>
-        </p:nvSpPr>
-        <p:spPr>
-          <a:xfrm>
-            <a:off x="594360" y="4617720"/>
-            <a:ext cx="438912" cy="438912"/>
-          </a:xfrm>
-          <a:prstGeom prst="roundRect">
-            <a:avLst>
-              <a:gd name="adj" fmla="val 12000"/>
-            </a:avLst>
-          </a:prstGeom>
-          <a:solidFill>
-            <a:srgbClr val="095292"/>
-          </a:solidFill>
-          <a:ln>
-            <a:noFill/>
-          </a:ln>
-        </p:spPr>
-        <p:style>
-          <a:lnRef idx="1">
-            <a:schemeClr val="accent1"/>
-          </a:lnRef>
-          <a:fillRef idx="3">
-            <a:schemeClr val="accent1"/>
-          </a:fillRef>
-          <a:effectRef idx="2">
-            <a:schemeClr val="accent1"/>
-          </a:effectRef>
-          <a:fontRef idx="minor">
-            <a:schemeClr val="lt1"/>
-          </a:fontRef>
-        </p:style>
-        <p:txBody>
-          <a:bodyPr rtlCol="0" anchor="ctr"/>
-          <a:lstStyle/>
-          <a:p>
-            <a:pPr algn="ctr"/>
-          </a:p>
-        </p:txBody>
-      </p:sp>
-      <p:sp>
-        <p:nvSpPr>
-          <p:cNvPr id="19" name="TextBox 18"/>
-          <p:cNvSpPr txBox="1"/>
-          <p:nvPr/>
-        </p:nvSpPr>
-        <p:spPr>
-          <a:xfrm>
-            <a:off x="594360" y="4617720"/>
-            <a:ext cx="438912" cy="438912"/>
-          </a:xfrm>
-          <a:prstGeom prst="rect">
-            <a:avLst/>
-          </a:prstGeom>
-          <a:noFill/>
-        </p:spPr>
-        <p:txBody>
-          <a:bodyPr wrap="square" anchor="ctr"/>
-          <a:lstStyle/>
-          <a:p>
-            <a:pPr algn="ctr"/>
-            <a:r>
-              <a:rPr sz="1600" b="1" i="0">
-                <a:solidFill>
-                  <a:srgbClr val="FFFFFF"/>
-                </a:solidFill>
-                <a:latin typeface="Calibri"/>
-              </a:rPr>
-              <a:t>4</a:t>
-            </a:r>
-          </a:p>
-        </p:txBody>
-      </p:sp>
-      <p:sp>
-        <p:nvSpPr>
-          <p:cNvPr id="20" name="TextBox 19"/>
-          <p:cNvSpPr txBox="1"/>
-          <p:nvPr/>
-        </p:nvSpPr>
-        <p:spPr>
-          <a:xfrm>
-            <a:off x="1188720" y="4453128"/>
-            <a:ext cx="10271455" cy="786384"/>
-          </a:xfrm>
-          <a:prstGeom prst="rect">
-            <a:avLst/>
-          </a:prstGeom>
-          <a:noFill/>
-        </p:spPr>
-        <p:txBody>
-          <a:bodyPr wrap="square" anchor="ctr"/>
-          <a:lstStyle/>
-          <a:p>
-            <a:r>
-              <a:rPr sz="1500" b="1" i="0">
-                <a:solidFill>
-                  <a:srgbClr val="095292"/>
-                </a:solidFill>
-                <a:latin typeface="Calibri"/>
-              </a:rPr>
-              <a:t>Paso 4: agregue al menos un metodo propio del dominio por clase (por ejemplo +calcularEdad(): int en Mascota, +reprogramar(nuevaFecha: Date) en Cita) y descarte metodos tecnicos como conectarBD o guardarEnDisco.</a:t>
-            </a:r>
-          </a:p>
-        </p:txBody>
-      </p:sp>
-      <p:sp>
-        <p:nvSpPr>
-          <p:cNvPr id="21" name="Rounded Rectangle 20"/>
-          <p:cNvSpPr/>
-          <p:nvPr/>
-        </p:nvSpPr>
-        <p:spPr>
-          <a:xfrm>
-            <a:off x="457200" y="5404104"/>
-            <a:ext cx="11277295" cy="950976"/>
-          </a:xfrm>
-          <a:prstGeom prst="roundRect">
-            <a:avLst>
-              <a:gd name="adj" fmla="val 12000"/>
-            </a:avLst>
-          </a:prstGeom>
-          <a:solidFill>
-            <a:srgbClr val="F2F2F2"/>
-          </a:solidFill>
-          <a:ln>
-            <a:noFill/>
-          </a:ln>
-        </p:spPr>
-        <p:style>
-          <a:lnRef idx="1">
-            <a:schemeClr val="accent1"/>
-          </a:lnRef>
-          <a:fillRef idx="3">
-            <a:schemeClr val="accent1"/>
-          </a:fillRef>
-          <a:effectRef idx="2">
-            <a:schemeClr val="accent1"/>
-          </a:effectRef>
-          <a:fontRef idx="minor">
-            <a:schemeClr val="lt1"/>
-          </a:fontRef>
-        </p:style>
-        <p:txBody>
-          <a:bodyPr rtlCol="0" anchor="ctr"/>
-          <a:lstStyle/>
-          <a:p>
-            <a:pPr algn="ctr"/>
-          </a:p>
-        </p:txBody>
-      </p:sp>
-      <p:sp>
-        <p:nvSpPr>
-          <p:cNvPr id="22" name="Rounded Rectangle 21"/>
-          <p:cNvSpPr/>
-          <p:nvPr/>
-        </p:nvSpPr>
-        <p:spPr>
-          <a:xfrm>
-            <a:off x="594360" y="5660136"/>
-            <a:ext cx="438912" cy="438912"/>
-          </a:xfrm>
-          <a:prstGeom prst="roundRect">
-            <a:avLst>
-              <a:gd name="adj" fmla="val 12000"/>
-            </a:avLst>
-          </a:prstGeom>
-          <a:solidFill>
-            <a:srgbClr val="095292"/>
-          </a:solidFill>
-          <a:ln>
-            <a:noFill/>
-          </a:ln>
-        </p:spPr>
-        <p:style>
-          <a:lnRef idx="1">
-            <a:schemeClr val="accent1"/>
-          </a:lnRef>
-          <a:fillRef idx="3">
-            <a:schemeClr val="accent1"/>
-          </a:fillRef>
-          <a:effectRef idx="2">
-            <a:schemeClr val="accent1"/>
-          </a:effectRef>
-          <a:fontRef idx="minor">
-            <a:schemeClr val="lt1"/>
-          </a:fontRef>
-        </p:style>
-        <p:txBody>
-          <a:bodyPr rtlCol="0" anchor="ctr"/>
-          <a:lstStyle/>
-          <a:p>
-            <a:pPr algn="ctr"/>
-          </a:p>
-        </p:txBody>
-      </p:sp>
-      <p:sp>
-        <p:nvSpPr>
-          <p:cNvPr id="23" name="TextBox 22"/>
-          <p:cNvSpPr txBox="1"/>
-          <p:nvPr/>
-        </p:nvSpPr>
-        <p:spPr>
-          <a:xfrm>
-            <a:off x="594360" y="5660136"/>
-            <a:ext cx="438912" cy="438912"/>
-          </a:xfrm>
-          <a:prstGeom prst="rect">
-            <a:avLst/>
-          </a:prstGeom>
-          <a:noFill/>
-        </p:spPr>
-        <p:txBody>
-          <a:bodyPr wrap="square" anchor="ctr"/>
-          <a:lstStyle/>
-          <a:p>
-            <a:pPr algn="ctr"/>
-            <a:r>
-              <a:rPr sz="1600" b="1" i="0">
-                <a:solidFill>
-                  <a:srgbClr val="FFFFFF"/>
-                </a:solidFill>
-                <a:latin typeface="Calibri"/>
-              </a:rPr>
-              <a:t>5</a:t>
-            </a:r>
-          </a:p>
-        </p:txBody>
-      </p:sp>
-      <p:sp>
-        <p:nvSpPr>
-          <p:cNvPr id="24" name="TextBox 23"/>
-          <p:cNvSpPr txBox="1"/>
-          <p:nvPr/>
-        </p:nvSpPr>
-        <p:spPr>
-          <a:xfrm>
-            <a:off x="1188720" y="5495544"/>
-            <a:ext cx="10271455" cy="786384"/>
-          </a:xfrm>
-          <a:prstGeom prst="rect">
-            <a:avLst/>
-          </a:prstGeom>
-          <a:noFill/>
-        </p:spPr>
-        <p:txBody>
-          <a:bodyPr wrap="square" anchor="ctr"/>
-          <a:lstStyle/>
-          <a:p>
-            <a:r>
-              <a:rPr sz="1500" b="1" i="0">
-                <a:solidFill>
-                  <a:srgbClr val="095292"/>
-                </a:solidFill>
-                <a:latin typeface="Calibri"/>
-              </a:rPr>
-              <a:t>Paso 5: trace las cuatro asociaciones con nombre de relacion y multiplicidad en ambos extremos, leala cada una en voz alta como frase completa, exporte a PNG y .drawio y suba ambos archivos a la plataforma del curso.</a:t>
-            </a:r>
-          </a:p>
-        </p:txBody>
-      </p:sp>
-      <p:sp>
-        <p:nvSpPr>
-          <p:cNvPr id="25" name="TextBox 24"/>
           <p:cNvSpPr txBox="1"/>
           <p:nvPr/>
         </p:nvSpPr>
@@ -4575,154 +4470,21 @@
                 </a:solidFill>
                 <a:latin typeface="Calibri"/>
               </a:rPr>
-              <a:t>Antes de entregar — autochequeo</a:t>
-            </a:r>
-          </a:p>
-        </p:txBody>
-      </p:sp>
-      <p:sp>
-        <p:nvSpPr>
-          <p:cNvPr id="5" name="Rounded Rectangle 4"/>
-          <p:cNvSpPr/>
-          <p:nvPr/>
-        </p:nvSpPr>
-        <p:spPr>
-          <a:xfrm>
-            <a:off x="457200" y="1261872"/>
-            <a:ext cx="11277295" cy="566928"/>
-          </a:xfrm>
-          <a:prstGeom prst="roundRect">
-            <a:avLst>
-              <a:gd name="adj" fmla="val 12000"/>
-            </a:avLst>
-          </a:prstGeom>
-          <a:solidFill>
-            <a:srgbClr val="F2F2F2"/>
-          </a:solidFill>
-          <a:ln>
-            <a:noFill/>
-          </a:ln>
-        </p:spPr>
-        <p:style>
-          <a:lnRef idx="1">
-            <a:schemeClr val="accent1"/>
-          </a:lnRef>
-          <a:fillRef idx="3">
-            <a:schemeClr val="accent1"/>
-          </a:fillRef>
-          <a:effectRef idx="2">
-            <a:schemeClr val="accent1"/>
-          </a:effectRef>
-          <a:fontRef idx="minor">
-            <a:schemeClr val="lt1"/>
-          </a:fontRef>
-        </p:style>
-        <p:txBody>
-          <a:bodyPr rtlCol="0" anchor="ctr"/>
-          <a:lstStyle/>
-          <a:p>
-            <a:pPr algn="ctr"/>
-          </a:p>
-        </p:txBody>
-      </p:sp>
-      <p:sp>
-        <p:nvSpPr>
-          <p:cNvPr id="6" name="Rectangle 5"/>
-          <p:cNvSpPr/>
-          <p:nvPr/>
-        </p:nvSpPr>
-        <p:spPr>
-          <a:xfrm>
-            <a:off x="640080" y="1408175"/>
-            <a:ext cx="274320" cy="274320"/>
-          </a:xfrm>
-          <a:prstGeom prst="rect">
-            <a:avLst/>
-          </a:prstGeom>
-          <a:solidFill>
-            <a:srgbClr val="FFFFFF"/>
-          </a:solidFill>
-          <a:ln>
-            <a:solidFill>
-              <a:srgbClr val="333333"/>
-            </a:solidFill>
-          </a:ln>
-        </p:spPr>
-        <p:style>
-          <a:lnRef idx="1">
-            <a:schemeClr val="accent1"/>
-          </a:lnRef>
-          <a:fillRef idx="3">
-            <a:schemeClr val="accent1"/>
-          </a:fillRef>
-          <a:effectRef idx="2">
-            <a:schemeClr val="accent1"/>
-          </a:effectRef>
-          <a:fontRef idx="minor">
-            <a:schemeClr val="lt1"/>
-          </a:fontRef>
-        </p:style>
-        <p:txBody>
-          <a:bodyPr rtlCol="0" anchor="ctr"/>
-          <a:lstStyle/>
-          <a:p>
-            <a:pPr algn="ctr"/>
-          </a:p>
-        </p:txBody>
-      </p:sp>
-      <p:sp>
-        <p:nvSpPr>
-          <p:cNvPr id="7" name="Rectangle 6"/>
-          <p:cNvSpPr/>
-          <p:nvPr/>
-        </p:nvSpPr>
-        <p:spPr>
-          <a:xfrm>
-            <a:off x="640080" y="1408175"/>
-            <a:ext cx="73152" cy="274320"/>
-          </a:xfrm>
-          <a:prstGeom prst="rect">
-            <a:avLst/>
-          </a:prstGeom>
-          <a:solidFill>
-            <a:srgbClr val="269CCB"/>
-          </a:solidFill>
-          <a:ln>
-            <a:noFill/>
-          </a:ln>
-        </p:spPr>
-        <p:style>
-          <a:lnRef idx="1">
-            <a:schemeClr val="accent1"/>
-          </a:lnRef>
-          <a:fillRef idx="3">
-            <a:schemeClr val="accent1"/>
-          </a:fillRef>
-          <a:effectRef idx="2">
-            <a:schemeClr val="accent1"/>
-          </a:effectRef>
-          <a:fontRef idx="minor">
-            <a:schemeClr val="lt1"/>
-          </a:fontRef>
-        </p:style>
-        <p:txBody>
-          <a:bodyPr rtlCol="0" anchor="ctr"/>
-          <a:lstStyle/>
-          <a:p>
-            <a:pPr algn="ctr"/>
-          </a:p>
-        </p:txBody>
-      </p:sp>
-      <p:sp>
-        <p:nvSpPr>
-          <p:cNvPr id="8" name="TextBox 7"/>
+              <a:t>Demo del dia</a:t>
+            </a:r>
+          </a:p>
+        </p:txBody>
+      </p:sp>
+      <p:sp>
+        <p:nvSpPr>
+          <p:cNvPr id="5" name="TextBox 4"/>
           <p:cNvSpPr txBox="1"/>
           <p:nvPr/>
         </p:nvSpPr>
         <p:spPr>
           <a:xfrm>
-            <a:off x="1097280" y="1353312"/>
-            <a:ext cx="10362895" cy="402336"/>
+            <a:off x="457200" y="1170432"/>
+            <a:ext cx="11277295" cy="5230368"/>
           </a:xfrm>
           <a:prstGeom prst="rect">
             <a:avLst/>
@@ -4730,354 +4492,99 @@
           <a:noFill/>
         </p:spPr>
         <p:txBody>
-          <a:bodyPr wrap="square" anchor="ctr"/>
-          <a:lstStyle/>
-          <a:p>
-            <a:r>
-              <a:rPr sz="1500" b="0" i="0">
+          <a:bodyPr wrap="square">
+            <a:spAutoFit/>
+          </a:bodyPr>
+          <a:lstStyle/>
+          <a:p>
+            <a:pPr>
+              <a:spcAft>
+                <a:spcPts val="800"/>
+              </a:spcAft>
+            </a:pPr>
+            <a:r>
+              <a:rPr sz="2000" b="0" i="0">
                 <a:solidFill>
                   <a:srgbClr val="333333"/>
                 </a:solidFill>
                 <a:latin typeface="Calibri"/>
               </a:rPr>
-              <a:t>Si leo esta relacion en voz alta con sus dos multiplicidades, la frase resultante es cierta en la clinica Huellitas o suena absurda?</a:t>
-            </a:r>
-          </a:p>
-        </p:txBody>
-      </p:sp>
-      <p:sp>
-        <p:nvSpPr>
-          <p:cNvPr id="9" name="Rounded Rectangle 8"/>
-          <p:cNvSpPr/>
-          <p:nvPr/>
-        </p:nvSpPr>
-        <p:spPr>
-          <a:xfrm>
-            <a:off x="457200" y="1938528"/>
-            <a:ext cx="11277295" cy="566928"/>
-          </a:xfrm>
-          <a:prstGeom prst="roundRect">
-            <a:avLst>
-              <a:gd name="adj" fmla="val 12000"/>
-            </a:avLst>
-          </a:prstGeom>
-          <a:solidFill>
-            <a:srgbClr val="F2F2F2"/>
-          </a:solidFill>
-          <a:ln>
-            <a:noFill/>
-          </a:ln>
-        </p:spPr>
-        <p:style>
-          <a:lnRef idx="1">
-            <a:schemeClr val="accent1"/>
-          </a:lnRef>
-          <a:fillRef idx="3">
-            <a:schemeClr val="accent1"/>
-          </a:fillRef>
-          <a:effectRef idx="2">
-            <a:schemeClr val="accent1"/>
-          </a:effectRef>
-          <a:fontRef idx="minor">
-            <a:schemeClr val="lt1"/>
-          </a:fontRef>
-        </p:style>
-        <p:txBody>
-          <a:bodyPr rtlCol="0" anchor="ctr"/>
-          <a:lstStyle/>
-          <a:p>
-            <a:pPr algn="ctr"/>
-          </a:p>
-        </p:txBody>
-      </p:sp>
-      <p:sp>
-        <p:nvSpPr>
-          <p:cNvPr id="10" name="Rectangle 9"/>
-          <p:cNvSpPr/>
-          <p:nvPr/>
-        </p:nvSpPr>
-        <p:spPr>
-          <a:xfrm>
-            <a:off x="640080" y="2084832"/>
-            <a:ext cx="274320" cy="274320"/>
-          </a:xfrm>
-          <a:prstGeom prst="rect">
-            <a:avLst/>
-          </a:prstGeom>
-          <a:solidFill>
-            <a:srgbClr val="FFFFFF"/>
-          </a:solidFill>
-          <a:ln>
-            <a:solidFill>
-              <a:srgbClr val="333333"/>
-            </a:solidFill>
-          </a:ln>
-        </p:spPr>
-        <p:style>
-          <a:lnRef idx="1">
-            <a:schemeClr val="accent1"/>
-          </a:lnRef>
-          <a:fillRef idx="3">
-            <a:schemeClr val="accent1"/>
-          </a:fillRef>
-          <a:effectRef idx="2">
-            <a:schemeClr val="accent1"/>
-          </a:effectRef>
-          <a:fontRef idx="minor">
-            <a:schemeClr val="lt1"/>
-          </a:fontRef>
-        </p:style>
-        <p:txBody>
-          <a:bodyPr rtlCol="0" anchor="ctr"/>
-          <a:lstStyle/>
-          <a:p>
-            <a:pPr algn="ctr"/>
-          </a:p>
-        </p:txBody>
-      </p:sp>
-      <p:sp>
-        <p:nvSpPr>
-          <p:cNvPr id="11" name="Rectangle 10"/>
-          <p:cNvSpPr/>
-          <p:nvPr/>
-        </p:nvSpPr>
-        <p:spPr>
-          <a:xfrm>
-            <a:off x="640080" y="2084832"/>
-            <a:ext cx="73152" cy="274320"/>
-          </a:xfrm>
-          <a:prstGeom prst="rect">
-            <a:avLst/>
-          </a:prstGeom>
-          <a:solidFill>
-            <a:srgbClr val="269CCB"/>
-          </a:solidFill>
-          <a:ln>
-            <a:noFill/>
-          </a:ln>
-        </p:spPr>
-        <p:style>
-          <a:lnRef idx="1">
-            <a:schemeClr val="accent1"/>
-          </a:lnRef>
-          <a:fillRef idx="3">
-            <a:schemeClr val="accent1"/>
-          </a:fillRef>
-          <a:effectRef idx="2">
-            <a:schemeClr val="accent1"/>
-          </a:effectRef>
-          <a:fontRef idx="minor">
-            <a:schemeClr val="lt1"/>
-          </a:fontRef>
-        </p:style>
-        <p:txBody>
-          <a:bodyPr rtlCol="0" anchor="ctr"/>
-          <a:lstStyle/>
-          <a:p>
-            <a:pPr algn="ctr"/>
-          </a:p>
-        </p:txBody>
-      </p:sp>
-      <p:sp>
-        <p:nvSpPr>
-          <p:cNvPr id="12" name="TextBox 11"/>
-          <p:cNvSpPr txBox="1"/>
-          <p:nvPr/>
-        </p:nvSpPr>
-        <p:spPr>
-          <a:xfrm>
-            <a:off x="1097280" y="2029968"/>
-            <a:ext cx="10362895" cy="402336"/>
-          </a:xfrm>
-          <a:prstGeom prst="rect">
-            <a:avLst/>
-          </a:prstGeom>
-          <a:noFill/>
-        </p:spPr>
-        <p:txBody>
-          <a:bodyPr wrap="square" anchor="ctr"/>
-          <a:lstStyle/>
-          <a:p>
-            <a:r>
-              <a:rPr sz="1500" b="0" i="0">
+              <a:t>–   </a:t>
+            </a:r>
+            <a:r>
+              <a:rPr sz="2000" b="1" i="0">
                 <a:solidFill>
                   <a:srgbClr val="333333"/>
                 </a:solidFill>
                 <a:latin typeface="Calibri"/>
               </a:rPr>
-              <a:t>Este atributo pertenece de verdad al concepto donde lo puse, o lo puse ahi solo porque en la pantalla aparecen juntos?</a:t>
-            </a:r>
-          </a:p>
-        </p:txBody>
-      </p:sp>
-      <p:sp>
-        <p:nvSpPr>
-          <p:cNvPr id="13" name="Rounded Rectangle 12"/>
-          <p:cNvSpPr/>
-          <p:nvPr/>
-        </p:nvSpPr>
-        <p:spPr>
-          <a:xfrm>
-            <a:off x="457200" y="2615184"/>
-            <a:ext cx="11277295" cy="566928"/>
-          </a:xfrm>
-          <a:prstGeom prst="roundRect">
-            <a:avLst>
-              <a:gd name="adj" fmla="val 12000"/>
-            </a:avLst>
-          </a:prstGeom>
-          <a:solidFill>
-            <a:srgbClr val="F2F2F2"/>
-          </a:solidFill>
-          <a:ln>
-            <a:noFill/>
-          </a:ln>
-        </p:spPr>
-        <p:style>
-          <a:lnRef idx="1">
-            <a:schemeClr val="accent1"/>
-          </a:lnRef>
-          <a:fillRef idx="3">
-            <a:schemeClr val="accent1"/>
-          </a:fillRef>
-          <a:effectRef idx="2">
-            <a:schemeClr val="accent1"/>
-          </a:effectRef>
-          <a:fontRef idx="minor">
-            <a:schemeClr val="lt1"/>
-          </a:fontRef>
-        </p:style>
-        <p:txBody>
-          <a:bodyPr rtlCol="0" anchor="ctr"/>
-          <a:lstStyle/>
-          <a:p>
-            <a:pPr algn="ctr"/>
-          </a:p>
-        </p:txBody>
-      </p:sp>
-      <p:sp>
-        <p:nvSpPr>
-          <p:cNvPr id="14" name="Rectangle 13"/>
-          <p:cNvSpPr/>
-          <p:nvPr/>
-        </p:nvSpPr>
-        <p:spPr>
-          <a:xfrm>
-            <a:off x="640080" y="2761488"/>
-            <a:ext cx="274320" cy="274320"/>
-          </a:xfrm>
-          <a:prstGeom prst="rect">
-            <a:avLst/>
-          </a:prstGeom>
-          <a:solidFill>
-            <a:srgbClr val="FFFFFF"/>
-          </a:solidFill>
-          <a:ln>
-            <a:solidFill>
-              <a:srgbClr val="333333"/>
-            </a:solidFill>
-          </a:ln>
-        </p:spPr>
-        <p:style>
-          <a:lnRef idx="1">
-            <a:schemeClr val="accent1"/>
-          </a:lnRef>
-          <a:fillRef idx="3">
-            <a:schemeClr val="accent1"/>
-          </a:fillRef>
-          <a:effectRef idx="2">
-            <a:schemeClr val="accent1"/>
-          </a:effectRef>
-          <a:fontRef idx="minor">
-            <a:schemeClr val="lt1"/>
-          </a:fontRef>
-        </p:style>
-        <p:txBody>
-          <a:bodyPr rtlCol="0" anchor="ctr"/>
-          <a:lstStyle/>
-          <a:p>
-            <a:pPr algn="ctr"/>
-          </a:p>
-        </p:txBody>
-      </p:sp>
-      <p:sp>
-        <p:nvSpPr>
-          <p:cNvPr id="15" name="Rectangle 14"/>
-          <p:cNvSpPr/>
-          <p:nvPr/>
-        </p:nvSpPr>
-        <p:spPr>
-          <a:xfrm>
-            <a:off x="640080" y="2761488"/>
-            <a:ext cx="73152" cy="274320"/>
-          </a:xfrm>
-          <a:prstGeom prst="rect">
-            <a:avLst/>
-          </a:prstGeom>
-          <a:solidFill>
-            <a:srgbClr val="269CCB"/>
-          </a:solidFill>
-          <a:ln>
-            <a:noFill/>
-          </a:ln>
-        </p:spPr>
-        <p:style>
-          <a:lnRef idx="1">
-            <a:schemeClr val="accent1"/>
-          </a:lnRef>
-          <a:fillRef idx="3">
-            <a:schemeClr val="accent1"/>
-          </a:fillRef>
-          <a:effectRef idx="2">
-            <a:schemeClr val="accent1"/>
-          </a:effectRef>
-          <a:fontRef idx="minor">
-            <a:schemeClr val="lt1"/>
-          </a:fontRef>
-        </p:style>
-        <p:txBody>
-          <a:bodyPr rtlCol="0" anchor="ctr"/>
-          <a:lstStyle/>
-          <a:p>
-            <a:pPr algn="ctr"/>
-          </a:p>
-        </p:txBody>
-      </p:sp>
-      <p:sp>
-        <p:nvSpPr>
-          <p:cNvPr id="16" name="TextBox 15"/>
-          <p:cNvSpPr txBox="1"/>
-          <p:nvPr/>
-        </p:nvSpPr>
-        <p:spPr>
-          <a:xfrm>
-            <a:off x="1097280" y="2706624"/>
-            <a:ext cx="10362895" cy="402336"/>
-          </a:xfrm>
-          <a:prstGeom prst="rect">
-            <a:avLst/>
-          </a:prstGeom>
-          <a:noFill/>
-        </p:spPr>
-        <p:txBody>
-          <a:bodyPr wrap="square" anchor="ctr"/>
-          <a:lstStyle/>
-          <a:p>
-            <a:r>
-              <a:rPr sz="1500" b="0" i="0">
+              <a:t>Herramienta:</a:t>
+            </a:r>
+            <a:r>
+              <a:rPr sz="2000" b="0" i="0">
                 <a:solidFill>
                   <a:srgbClr val="333333"/>
                 </a:solidFill>
                 <a:latin typeface="Calibri"/>
               </a:rPr>
-              <a:t>Esta caja es un concepto del negocio del que habla el veterinario, o es una pantalla, un reporte o algo tecnico que se me colo?</a:t>
-            </a:r>
-          </a:p>
-        </p:txBody>
-      </p:sp>
-      <p:sp>
-        <p:nvSpPr>
-          <p:cNvPr id="17" name="TextBox 16"/>
+              <a:t> draw.io · Mermaid</a:t>
+            </a:r>
+          </a:p>
+          <a:p>
+            <a:pPr>
+              <a:spcAft>
+                <a:spcPts val="800"/>
+              </a:spcAft>
+            </a:pPr>
+            <a:r>
+              <a:rPr sz="2000" b="0" i="0">
+                <a:solidFill>
+                  <a:srgbClr val="333333"/>
+                </a:solidFill>
+                <a:latin typeface="Calibri"/>
+              </a:rPr>
+              <a:t>–   </a:t>
+            </a:r>
+            <a:r>
+              <a:rPr sz="2000" b="1" i="0">
+                <a:solidFill>
+                  <a:srgbClr val="333333"/>
+                </a:solidFill>
+                <a:latin typeface="Calibri"/>
+              </a:rPr>
+              <a:t>Demo:</a:t>
+            </a:r>
+            <a:r>
+              <a:rPr sz="2000" b="0" i="0">
+                <a:solidFill>
+                  <a:srgbClr val="333333"/>
+                </a:solidFill>
+                <a:latin typeface="Calibri"/>
+              </a:rPr>
+              <a:t> El docente dibuja en vivo Dueno, Mascota y Cita en draw.io y borra tres atributos mal ubicados explicando a que clase pertenecen de verdad.</a:t>
+            </a:r>
+          </a:p>
+          <a:p>
+            <a:pPr>
+              <a:spcAft>
+                <a:spcPts val="800"/>
+              </a:spcAft>
+            </a:pPr>
+            <a:r>
+              <a:rPr sz="2000" b="0" i="0">
+                <a:solidFill>
+                  <a:srgbClr val="333333"/>
+                </a:solidFill>
+                <a:latin typeface="Calibri"/>
+              </a:rPr>
+              <a:t>–   Mismo dominio VetCare — no otro ejemplo. Aqui se diseña, no se programa.</a:t>
+            </a:r>
+          </a:p>
+        </p:txBody>
+      </p:sp>
+      <p:sp>
+        <p:nvSpPr>
+          <p:cNvPr id="6" name="TextBox 5"/>
           <p:cNvSpPr txBox="1"/>
           <p:nvPr/>
         </p:nvSpPr>
@@ -5145,7 +4652,7 @@
         <p:spPr>
           <a:xfrm>
             <a:off x="0" y="0"/>
-            <a:ext cx="12191695" cy="960120"/>
+            <a:ext cx="12191695" cy="1170432"/>
           </a:xfrm>
           <a:prstGeom prst="rect">
             <a:avLst/>
@@ -5187,7 +4694,7 @@
         </p:nvSpPr>
         <p:spPr>
           <a:xfrm>
-            <a:off x="0" y="960120"/>
+            <a:off x="0" y="1170432"/>
             <a:ext cx="12191695" cy="41148"/>
           </a:xfrm>
           <a:prstGeom prst="rect">
@@ -5231,7 +4738,7 @@
         <p:spPr>
           <a:xfrm>
             <a:off x="457200" y="164592"/>
-            <a:ext cx="11277295" cy="502920"/>
+            <a:ext cx="11277295" cy="384048"/>
           </a:xfrm>
           <a:prstGeom prst="rect">
             <a:avLst/>
@@ -5251,7 +4758,7 @@
                 </a:solidFill>
                 <a:latin typeface="Calibri"/>
               </a:rPr>
-              <a:t>Criterios de exito / entregable</a:t>
+              <a:t>Herramientas de hoy</a:t>
             </a:r>
           </a:p>
         </p:txBody>
@@ -5264,8 +4771,8 @@
         </p:nvSpPr>
         <p:spPr>
           <a:xfrm>
-            <a:off x="457200" y="1170432"/>
-            <a:ext cx="11277295" cy="5230368"/>
+            <a:off x="457200" y="566928"/>
+            <a:ext cx="11277295" cy="411480"/>
           </a:xfrm>
           <a:prstGeom prst="rect">
             <a:avLst/>
@@ -5278,214 +4785,633 @@
           </a:bodyPr>
           <a:lstStyle/>
           <a:p>
-            <a:pPr>
-              <a:spcAft>
-                <a:spcPts val="800"/>
-              </a:spcAft>
+            <a:r>
+              <a:rPr sz="1400" b="0" i="0">
+                <a:solidFill>
+                  <a:srgbClr val="B8D8EE"/>
+                </a:solidFill>
+                <a:latin typeface="Calibri"/>
+              </a:rPr>
+              <a:t>Gratis · funcionan en el navegador</a:t>
+            </a:r>
+          </a:p>
+        </p:txBody>
+      </p:sp>
+      <p:sp>
+        <p:nvSpPr>
+          <p:cNvPr id="6" name="Rounded Rectangle 5"/>
+          <p:cNvSpPr/>
+          <p:nvPr/>
+        </p:nvSpPr>
+        <p:spPr>
+          <a:xfrm>
+            <a:off x="457200" y="1591056"/>
+            <a:ext cx="3624986" cy="2331720"/>
+          </a:xfrm>
+          <a:prstGeom prst="roundRect">
+            <a:avLst>
+              <a:gd name="adj" fmla="val 12000"/>
+            </a:avLst>
+          </a:prstGeom>
+          <a:solidFill>
+            <a:srgbClr val="F2F2F2"/>
+          </a:solidFill>
+          <a:ln>
+            <a:noFill/>
+          </a:ln>
+        </p:spPr>
+        <p:style>
+          <a:lnRef idx="1">
+            <a:schemeClr val="accent1"/>
+          </a:lnRef>
+          <a:fillRef idx="3">
+            <a:schemeClr val="accent1"/>
+          </a:fillRef>
+          <a:effectRef idx="2">
+            <a:schemeClr val="accent1"/>
+          </a:effectRef>
+          <a:fontRef idx="minor">
+            <a:schemeClr val="lt1"/>
+          </a:fontRef>
+        </p:style>
+        <p:txBody>
+          <a:bodyPr rtlCol="0" anchor="ctr"/>
+          <a:lstStyle/>
+          <a:p>
+            <a:pPr algn="ctr"/>
+          </a:p>
+        </p:txBody>
+      </p:sp>
+      <p:sp>
+        <p:nvSpPr>
+          <p:cNvPr id="7" name="Rectangle 6"/>
+          <p:cNvSpPr/>
+          <p:nvPr/>
+        </p:nvSpPr>
+        <p:spPr>
+          <a:xfrm>
+            <a:off x="457200" y="1591056"/>
+            <a:ext cx="3624986" cy="64008"/>
+          </a:xfrm>
+          <a:prstGeom prst="rect">
+            <a:avLst/>
+          </a:prstGeom>
+          <a:solidFill>
+            <a:srgbClr val="095292"/>
+          </a:solidFill>
+          <a:ln>
+            <a:noFill/>
+          </a:ln>
+        </p:spPr>
+        <p:style>
+          <a:lnRef idx="1">
+            <a:schemeClr val="accent1"/>
+          </a:lnRef>
+          <a:fillRef idx="3">
+            <a:schemeClr val="accent1"/>
+          </a:fillRef>
+          <a:effectRef idx="2">
+            <a:schemeClr val="accent1"/>
+          </a:effectRef>
+          <a:fontRef idx="minor">
+            <a:schemeClr val="lt1"/>
+          </a:fontRef>
+        </p:style>
+        <p:txBody>
+          <a:bodyPr rtlCol="0" anchor="ctr"/>
+          <a:lstStyle/>
+          <a:p>
+            <a:pPr algn="ctr"/>
+          </a:p>
+        </p:txBody>
+      </p:sp>
+      <p:sp>
+        <p:nvSpPr>
+          <p:cNvPr id="8" name="Rectangle 7"/>
+          <p:cNvSpPr/>
+          <p:nvPr/>
+        </p:nvSpPr>
+        <p:spPr>
+          <a:xfrm>
+            <a:off x="457200" y="1655064"/>
+            <a:ext cx="3624986" cy="27432"/>
+          </a:xfrm>
+          <a:prstGeom prst="rect">
+            <a:avLst/>
+          </a:prstGeom>
+          <a:solidFill>
+            <a:srgbClr val="FFD000"/>
+          </a:solidFill>
+          <a:ln>
+            <a:noFill/>
+          </a:ln>
+        </p:spPr>
+        <p:style>
+          <a:lnRef idx="1">
+            <a:schemeClr val="accent1"/>
+          </a:lnRef>
+          <a:fillRef idx="3">
+            <a:schemeClr val="accent1"/>
+          </a:fillRef>
+          <a:effectRef idx="2">
+            <a:schemeClr val="accent1"/>
+          </a:effectRef>
+          <a:fontRef idx="minor">
+            <a:schemeClr val="lt1"/>
+          </a:fontRef>
+        </p:style>
+        <p:txBody>
+          <a:bodyPr rtlCol="0" anchor="ctr"/>
+          <a:lstStyle/>
+          <a:p>
+            <a:pPr algn="ctr"/>
+          </a:p>
+        </p:txBody>
+      </p:sp>
+      <p:pic>
+        <p:nvPicPr>
+          <p:cNvPr id="9" name="Picture 8" descr="drawio.png"/>
+          <p:cNvPicPr>
+            <a:picLocks noChangeAspect="1"/>
+          </p:cNvPicPr>
+          <p:nvPr/>
+        </p:nvPicPr>
+        <p:blipFill>
+          <a:blip r:embed="rId2"/>
+          <a:stretch>
+            <a:fillRect/>
+          </a:stretch>
+        </p:blipFill>
+        <p:spPr>
+          <a:xfrm>
+            <a:off x="1643329" y="1847087"/>
+            <a:ext cx="1252728" cy="1252728"/>
+          </a:xfrm>
+          <a:prstGeom prst="rect">
+            <a:avLst/>
+          </a:prstGeom>
+        </p:spPr>
+      </p:pic>
+      <p:sp>
+        <p:nvSpPr>
+          <p:cNvPr id="10" name="TextBox 9"/>
+          <p:cNvSpPr txBox="1"/>
+          <p:nvPr/>
+        </p:nvSpPr>
+        <p:spPr>
+          <a:xfrm>
+            <a:off x="530352" y="3191256"/>
+            <a:ext cx="3478682" cy="621792"/>
+          </a:xfrm>
+          <a:prstGeom prst="rect">
+            <a:avLst/>
+          </a:prstGeom>
+          <a:noFill/>
+        </p:spPr>
+        <p:txBody>
+          <a:bodyPr wrap="square" anchor="t"/>
+          <a:lstStyle/>
+          <a:p>
+            <a:pPr algn="ctr"/>
+            <a:r>
+              <a:rPr sz="1300" b="1" i="0">
+                <a:solidFill>
+                  <a:srgbClr val="095292"/>
+                </a:solidFill>
+                <a:latin typeface="Calibri"/>
+              </a:rPr>
+              <a:t>Draw.Io</a:t>
+            </a:r>
+          </a:p>
+          <a:p>
+            <a:pPr algn="ctr">
+              <a:spcBef>
+                <a:spcPts val="200"/>
+              </a:spcBef>
             </a:pPr>
             <a:r>
-              <a:rPr sz="2000" b="0" i="0">
-                <a:solidFill>
-                  <a:srgbClr val="333333"/>
-                </a:solidFill>
-                <a:latin typeface="Calibri"/>
-              </a:rPr>
-              <a:t>–   </a:t>
-            </a:r>
-            <a:r>
-              <a:rPr sz="2000" b="1" i="0">
-                <a:solidFill>
-                  <a:srgbClr val="333333"/>
-                </a:solidFill>
-                <a:latin typeface="Calibri"/>
-              </a:rPr>
-              <a:t>Entregable:</a:t>
-            </a:r>
-            <a:r>
-              <a:rPr sz="2000" b="0" i="0">
-                <a:solidFill>
-                  <a:srgbClr val="333333"/>
-                </a:solidFill>
-                <a:latin typeface="Calibri"/>
-              </a:rPr>
-              <a:t> Diagrama de clases de VetCare hecho en draw.io, exportado a PNG y al archivo .drawio, con 5 clases, atributos tipados, metodos propios y 4 asociaciones con multiplicidad y nombre de rol, subido a la plataforma del curso.</a:t>
-            </a:r>
-          </a:p>
-          <a:p>
-            <a:pPr>
-              <a:spcAft>
-                <a:spcPts val="800"/>
-              </a:spcAft>
+              <a:rPr sz="1000" b="0" i="0">
+                <a:solidFill>
+                  <a:srgbClr val="666666"/>
+                </a:solidFill>
+                <a:latin typeface="Calibri"/>
+              </a:rPr>
+              <a:t>Diagramas UML y de contexto</a:t>
+            </a:r>
+          </a:p>
+        </p:txBody>
+      </p:sp>
+      <p:sp>
+        <p:nvSpPr>
+          <p:cNvPr id="11" name="Rounded Rectangle 10"/>
+          <p:cNvSpPr/>
+          <p:nvPr/>
+        </p:nvSpPr>
+        <p:spPr>
+          <a:xfrm>
+            <a:off x="4283354" y="1591056"/>
+            <a:ext cx="3624986" cy="2331720"/>
+          </a:xfrm>
+          <a:prstGeom prst="roundRect">
+            <a:avLst>
+              <a:gd name="adj" fmla="val 12000"/>
+            </a:avLst>
+          </a:prstGeom>
+          <a:solidFill>
+            <a:srgbClr val="F2F2F2"/>
+          </a:solidFill>
+          <a:ln>
+            <a:noFill/>
+          </a:ln>
+        </p:spPr>
+        <p:style>
+          <a:lnRef idx="1">
+            <a:schemeClr val="accent1"/>
+          </a:lnRef>
+          <a:fillRef idx="3">
+            <a:schemeClr val="accent1"/>
+          </a:fillRef>
+          <a:effectRef idx="2">
+            <a:schemeClr val="accent1"/>
+          </a:effectRef>
+          <a:fontRef idx="minor">
+            <a:schemeClr val="lt1"/>
+          </a:fontRef>
+        </p:style>
+        <p:txBody>
+          <a:bodyPr rtlCol="0" anchor="ctr"/>
+          <a:lstStyle/>
+          <a:p>
+            <a:pPr algn="ctr"/>
+          </a:p>
+        </p:txBody>
+      </p:sp>
+      <p:sp>
+        <p:nvSpPr>
+          <p:cNvPr id="12" name="Rectangle 11"/>
+          <p:cNvSpPr/>
+          <p:nvPr/>
+        </p:nvSpPr>
+        <p:spPr>
+          <a:xfrm>
+            <a:off x="4283354" y="1591056"/>
+            <a:ext cx="3624986" cy="64008"/>
+          </a:xfrm>
+          <a:prstGeom prst="rect">
+            <a:avLst/>
+          </a:prstGeom>
+          <a:solidFill>
+            <a:srgbClr val="095292"/>
+          </a:solidFill>
+          <a:ln>
+            <a:noFill/>
+          </a:ln>
+        </p:spPr>
+        <p:style>
+          <a:lnRef idx="1">
+            <a:schemeClr val="accent1"/>
+          </a:lnRef>
+          <a:fillRef idx="3">
+            <a:schemeClr val="accent1"/>
+          </a:fillRef>
+          <a:effectRef idx="2">
+            <a:schemeClr val="accent1"/>
+          </a:effectRef>
+          <a:fontRef idx="minor">
+            <a:schemeClr val="lt1"/>
+          </a:fontRef>
+        </p:style>
+        <p:txBody>
+          <a:bodyPr rtlCol="0" anchor="ctr"/>
+          <a:lstStyle/>
+          <a:p>
+            <a:pPr algn="ctr"/>
+          </a:p>
+        </p:txBody>
+      </p:sp>
+      <p:sp>
+        <p:nvSpPr>
+          <p:cNvPr id="13" name="Rectangle 12"/>
+          <p:cNvSpPr/>
+          <p:nvPr/>
+        </p:nvSpPr>
+        <p:spPr>
+          <a:xfrm>
+            <a:off x="4283354" y="1655064"/>
+            <a:ext cx="3624986" cy="27432"/>
+          </a:xfrm>
+          <a:prstGeom prst="rect">
+            <a:avLst/>
+          </a:prstGeom>
+          <a:solidFill>
+            <a:srgbClr val="FFD000"/>
+          </a:solidFill>
+          <a:ln>
+            <a:noFill/>
+          </a:ln>
+        </p:spPr>
+        <p:style>
+          <a:lnRef idx="1">
+            <a:schemeClr val="accent1"/>
+          </a:lnRef>
+          <a:fillRef idx="3">
+            <a:schemeClr val="accent1"/>
+          </a:fillRef>
+          <a:effectRef idx="2">
+            <a:schemeClr val="accent1"/>
+          </a:effectRef>
+          <a:fontRef idx="minor">
+            <a:schemeClr val="lt1"/>
+          </a:fontRef>
+        </p:style>
+        <p:txBody>
+          <a:bodyPr rtlCol="0" anchor="ctr"/>
+          <a:lstStyle/>
+          <a:p>
+            <a:pPr algn="ctr"/>
+          </a:p>
+        </p:txBody>
+      </p:sp>
+      <p:pic>
+        <p:nvPicPr>
+          <p:cNvPr id="14" name="Picture 13" descr="mermaid.png"/>
+          <p:cNvPicPr>
+            <a:picLocks noChangeAspect="1"/>
+          </p:cNvPicPr>
+          <p:nvPr/>
+        </p:nvPicPr>
+        <p:blipFill>
+          <a:blip r:embed="rId3"/>
+          <a:stretch>
+            <a:fillRect/>
+          </a:stretch>
+        </p:blipFill>
+        <p:spPr>
+          <a:xfrm>
+            <a:off x="5469483" y="1847087"/>
+            <a:ext cx="1252728" cy="1252728"/>
+          </a:xfrm>
+          <a:prstGeom prst="rect">
+            <a:avLst/>
+          </a:prstGeom>
+        </p:spPr>
+      </p:pic>
+      <p:sp>
+        <p:nvSpPr>
+          <p:cNvPr id="15" name="TextBox 14"/>
+          <p:cNvSpPr txBox="1"/>
+          <p:nvPr/>
+        </p:nvSpPr>
+        <p:spPr>
+          <a:xfrm>
+            <a:off x="4356506" y="3191256"/>
+            <a:ext cx="3478682" cy="621792"/>
+          </a:xfrm>
+          <a:prstGeom prst="rect">
+            <a:avLst/>
+          </a:prstGeom>
+          <a:noFill/>
+        </p:spPr>
+        <p:txBody>
+          <a:bodyPr wrap="square" anchor="t"/>
+          <a:lstStyle/>
+          <a:p>
+            <a:pPr algn="ctr"/>
+            <a:r>
+              <a:rPr sz="1300" b="1" i="0">
+                <a:solidFill>
+                  <a:srgbClr val="095292"/>
+                </a:solidFill>
+                <a:latin typeface="Calibri"/>
+              </a:rPr>
+              <a:t>Mermaid</a:t>
+            </a:r>
+          </a:p>
+          <a:p>
+            <a:pPr algn="ctr">
+              <a:spcBef>
+                <a:spcPts val="200"/>
+              </a:spcBef>
             </a:pPr>
             <a:r>
-              <a:rPr sz="2000" b="0" i="0">
-                <a:solidFill>
-                  <a:srgbClr val="333333"/>
-                </a:solidFill>
-                <a:latin typeface="Calibri"/>
-              </a:rPr>
-              <a:t>–   </a:t>
-            </a:r>
-            <a:r>
-              <a:rPr sz="2000" b="1" i="0">
-                <a:solidFill>
-                  <a:srgbClr val="333333"/>
-                </a:solidFill>
-                <a:latin typeface="Calibri"/>
-              </a:rPr>
-              <a:t>Exito:</a:t>
-            </a:r>
-            <a:r>
-              <a:rPr sz="2000" b="0" i="0">
-                <a:solidFill>
-                  <a:srgbClr val="333333"/>
-                </a:solidFill>
-                <a:latin typeface="Calibri"/>
-              </a:rPr>
-              <a:t> El diagrama tiene las 5 clases del dominio en singular, con mayuscula inicial y sin clases tecnicas (nada de DAO, Conexion, Login o Menu).</a:t>
-            </a:r>
-          </a:p>
-          <a:p>
-            <a:pPr>
-              <a:spcAft>
-                <a:spcPts val="800"/>
-              </a:spcAft>
+              <a:rPr sz="1000" b="0" i="0">
+                <a:solidFill>
+                  <a:srgbClr val="666666"/>
+                </a:solidFill>
+                <a:latin typeface="Calibri"/>
+              </a:rPr>
+              <a:t>Diagramas como texto versionable</a:t>
+            </a:r>
+          </a:p>
+        </p:txBody>
+      </p:sp>
+      <p:sp>
+        <p:nvSpPr>
+          <p:cNvPr id="16" name="Rounded Rectangle 15"/>
+          <p:cNvSpPr/>
+          <p:nvPr/>
+        </p:nvSpPr>
+        <p:spPr>
+          <a:xfrm>
+            <a:off x="8109508" y="1591056"/>
+            <a:ext cx="3624986" cy="2331720"/>
+          </a:xfrm>
+          <a:prstGeom prst="roundRect">
+            <a:avLst>
+              <a:gd name="adj" fmla="val 12000"/>
+            </a:avLst>
+          </a:prstGeom>
+          <a:solidFill>
+            <a:srgbClr val="F2F2F2"/>
+          </a:solidFill>
+          <a:ln>
+            <a:noFill/>
+          </a:ln>
+        </p:spPr>
+        <p:style>
+          <a:lnRef idx="1">
+            <a:schemeClr val="accent1"/>
+          </a:lnRef>
+          <a:fillRef idx="3">
+            <a:schemeClr val="accent1"/>
+          </a:fillRef>
+          <a:effectRef idx="2">
+            <a:schemeClr val="accent1"/>
+          </a:effectRef>
+          <a:fontRef idx="minor">
+            <a:schemeClr val="lt1"/>
+          </a:fontRef>
+        </p:style>
+        <p:txBody>
+          <a:bodyPr rtlCol="0" anchor="ctr"/>
+          <a:lstStyle/>
+          <a:p>
+            <a:pPr algn="ctr"/>
+          </a:p>
+        </p:txBody>
+      </p:sp>
+      <p:sp>
+        <p:nvSpPr>
+          <p:cNvPr id="17" name="Rectangle 16"/>
+          <p:cNvSpPr/>
+          <p:nvPr/>
+        </p:nvSpPr>
+        <p:spPr>
+          <a:xfrm>
+            <a:off x="8109508" y="1591056"/>
+            <a:ext cx="3624986" cy="64008"/>
+          </a:xfrm>
+          <a:prstGeom prst="rect">
+            <a:avLst/>
+          </a:prstGeom>
+          <a:solidFill>
+            <a:srgbClr val="095292"/>
+          </a:solidFill>
+          <a:ln>
+            <a:noFill/>
+          </a:ln>
+        </p:spPr>
+        <p:style>
+          <a:lnRef idx="1">
+            <a:schemeClr val="accent1"/>
+          </a:lnRef>
+          <a:fillRef idx="3">
+            <a:schemeClr val="accent1"/>
+          </a:fillRef>
+          <a:effectRef idx="2">
+            <a:schemeClr val="accent1"/>
+          </a:effectRef>
+          <a:fontRef idx="minor">
+            <a:schemeClr val="lt1"/>
+          </a:fontRef>
+        </p:style>
+        <p:txBody>
+          <a:bodyPr rtlCol="0" anchor="ctr"/>
+          <a:lstStyle/>
+          <a:p>
+            <a:pPr algn="ctr"/>
+          </a:p>
+        </p:txBody>
+      </p:sp>
+      <p:sp>
+        <p:nvSpPr>
+          <p:cNvPr id="18" name="Rectangle 17"/>
+          <p:cNvSpPr/>
+          <p:nvPr/>
+        </p:nvSpPr>
+        <p:spPr>
+          <a:xfrm>
+            <a:off x="8109508" y="1655064"/>
+            <a:ext cx="3624986" cy="27432"/>
+          </a:xfrm>
+          <a:prstGeom prst="rect">
+            <a:avLst/>
+          </a:prstGeom>
+          <a:solidFill>
+            <a:srgbClr val="FFD000"/>
+          </a:solidFill>
+          <a:ln>
+            <a:noFill/>
+          </a:ln>
+        </p:spPr>
+        <p:style>
+          <a:lnRef idx="1">
+            <a:schemeClr val="accent1"/>
+          </a:lnRef>
+          <a:fillRef idx="3">
+            <a:schemeClr val="accent1"/>
+          </a:fillRef>
+          <a:effectRef idx="2">
+            <a:schemeClr val="accent1"/>
+          </a:effectRef>
+          <a:fontRef idx="minor">
+            <a:schemeClr val="lt1"/>
+          </a:fontRef>
+        </p:style>
+        <p:txBody>
+          <a:bodyPr rtlCol="0" anchor="ctr"/>
+          <a:lstStyle/>
+          <a:p>
+            <a:pPr algn="ctr"/>
+          </a:p>
+        </p:txBody>
+      </p:sp>
+      <p:pic>
+        <p:nvPicPr>
+          <p:cNvPr id="19" name="Picture 18" descr="examlab.png"/>
+          <p:cNvPicPr>
+            <a:picLocks noChangeAspect="1"/>
+          </p:cNvPicPr>
+          <p:nvPr/>
+        </p:nvPicPr>
+        <p:blipFill>
+          <a:blip r:embed="rId4"/>
+          <a:stretch>
+            <a:fillRect/>
+          </a:stretch>
+        </p:blipFill>
+        <p:spPr>
+          <a:xfrm>
+            <a:off x="9295638" y="1847087"/>
+            <a:ext cx="1252728" cy="1252728"/>
+          </a:xfrm>
+          <a:prstGeom prst="rect">
+            <a:avLst/>
+          </a:prstGeom>
+        </p:spPr>
+      </p:pic>
+      <p:sp>
+        <p:nvSpPr>
+          <p:cNvPr id="20" name="TextBox 19"/>
+          <p:cNvSpPr txBox="1"/>
+          <p:nvPr/>
+        </p:nvSpPr>
+        <p:spPr>
+          <a:xfrm>
+            <a:off x="8182660" y="3191256"/>
+            <a:ext cx="3478682" cy="621792"/>
+          </a:xfrm>
+          <a:prstGeom prst="rect">
+            <a:avLst/>
+          </a:prstGeom>
+          <a:noFill/>
+        </p:spPr>
+        <p:txBody>
+          <a:bodyPr wrap="square" anchor="t"/>
+          <a:lstStyle/>
+          <a:p>
+            <a:pPr algn="ctr"/>
+            <a:r>
+              <a:rPr sz="1300" b="1" i="0">
+                <a:solidFill>
+                  <a:srgbClr val="095292"/>
+                </a:solidFill>
+                <a:latin typeface="Calibri"/>
+              </a:rPr>
+              <a:t>la plataforma del curso</a:t>
+            </a:r>
+          </a:p>
+          <a:p>
+            <a:pPr algn="ctr">
+              <a:spcBef>
+                <a:spcPts val="200"/>
+              </a:spcBef>
             </a:pPr>
             <a:r>
-              <a:rPr sz="2000" b="0" i="0">
-                <a:solidFill>
-                  <a:srgbClr val="333333"/>
-                </a:solidFill>
-                <a:latin typeface="Calibri"/>
-              </a:rPr>
-              <a:t>–   </a:t>
-            </a:r>
-            <a:r>
-              <a:rPr sz="2000" b="1" i="0">
-                <a:solidFill>
-                  <a:srgbClr val="333333"/>
-                </a:solidFill>
-                <a:latin typeface="Calibri"/>
-              </a:rPr>
-              <a:t>Exito:</a:t>
-            </a:r>
-            <a:r>
-              <a:rPr sz="2000" b="0" i="0">
-                <a:solidFill>
-                  <a:srgbClr val="333333"/>
-                </a:solidFill>
-                <a:latin typeface="Calibri"/>
-              </a:rPr>
-              <a:t> Cada clase tiene minimo 4 atributos con visibilidad y tipo, y ningun atributo aparece duplicado en dos clases.</a:t>
-            </a:r>
-          </a:p>
-          <a:p>
-            <a:pPr>
-              <a:spcAft>
-                <a:spcPts val="800"/>
-              </a:spcAft>
-            </a:pPr>
-            <a:r>
-              <a:rPr sz="2000" b="0" i="0">
-                <a:solidFill>
-                  <a:srgbClr val="333333"/>
-                </a:solidFill>
-                <a:latin typeface="Calibri"/>
-              </a:rPr>
-              <a:t>–   </a:t>
-            </a:r>
-            <a:r>
-              <a:rPr sz="2000" b="1" i="0">
-                <a:solidFill>
-                  <a:srgbClr val="333333"/>
-                </a:solidFill>
-                <a:latin typeface="Calibri"/>
-              </a:rPr>
-              <a:t>Exito:</a:t>
-            </a:r>
-            <a:r>
-              <a:rPr sz="2000" b="0" i="0">
-                <a:solidFill>
-                  <a:srgbClr val="333333"/>
-                </a:solidFill>
-                <a:latin typeface="Calibri"/>
-              </a:rPr>
-              <a:t> Las 4 asociaciones tienen nombre de relacion y multiplicidad explicita en ambos extremos.</a:t>
-            </a:r>
-          </a:p>
-          <a:p>
-            <a:pPr>
-              <a:spcAft>
-                <a:spcPts val="800"/>
-              </a:spcAft>
-            </a:pPr>
-            <a:r>
-              <a:rPr sz="2000" b="0" i="0">
-                <a:solidFill>
-                  <a:srgbClr val="333333"/>
-                </a:solidFill>
-                <a:latin typeface="Calibri"/>
-              </a:rPr>
-              <a:t>–   </a:t>
-            </a:r>
-            <a:r>
-              <a:rPr sz="2000" b="1" i="0">
-                <a:solidFill>
-                  <a:srgbClr val="333333"/>
-                </a:solidFill>
-                <a:latin typeface="Calibri"/>
-              </a:rPr>
-              <a:t>Exito:</a:t>
-            </a:r>
-            <a:r>
-              <a:rPr sz="2000" b="0" i="0">
-                <a:solidFill>
-                  <a:srgbClr val="333333"/>
-                </a:solidFill>
-                <a:latin typeface="Calibri"/>
-              </a:rPr>
-              <a:t> Cada relacion se puede leer en voz alta como una frase verdadera del negocio de la clinica Huellitas, y cada clase se rastrea a un RF o a una historia.</a:t>
-            </a:r>
-          </a:p>
-          <a:p>
-            <a:pPr>
-              <a:spcAft>
-                <a:spcPts val="800"/>
-              </a:spcAft>
-            </a:pPr>
-            <a:r>
-              <a:rPr sz="2000" b="0" i="0">
-                <a:solidFill>
-                  <a:srgbClr val="333333"/>
-                </a:solidFill>
-                <a:latin typeface="Calibri"/>
-              </a:rPr>
-              <a:t>–   </a:t>
-            </a:r>
-            <a:r>
-              <a:rPr sz="2000" b="1" i="0">
-                <a:solidFill>
-                  <a:srgbClr val="333333"/>
-                </a:solidFill>
-                <a:latin typeface="Calibri"/>
-              </a:rPr>
-              <a:t>Entrega en la plataforma del curso</a:t>
-            </a:r>
-            <a:r>
-              <a:rPr sz="2000" b="0" i="0">
-                <a:solidFill>
-                  <a:srgbClr val="333333"/>
-                </a:solidFill>
-                <a:latin typeface="Calibri"/>
-              </a:rPr>
-              <a:t> — en la fecha que indique el docente.</a:t>
-            </a:r>
-          </a:p>
-        </p:txBody>
-      </p:sp>
-      <p:sp>
-        <p:nvSpPr>
-          <p:cNvPr id="6" name="TextBox 5"/>
+              <a:rPr sz="1000" b="0" i="0">
+                <a:solidFill>
+                  <a:srgbClr val="666666"/>
+                </a:solidFill>
+                <a:latin typeface="Calibri"/>
+              </a:rPr>
+              <a:t>Entrega del taller · en la fecha que indique el docente</a:t>
+            </a:r>
+          </a:p>
+        </p:txBody>
+      </p:sp>
+      <p:sp>
+        <p:nvSpPr>
+          <p:cNvPr id="21" name="TextBox 20"/>
           <p:cNvSpPr txBox="1"/>
           <p:nvPr/>
         </p:nvSpPr>
@@ -5659,109 +5585,21 @@
                 </a:solidFill>
                 <a:latin typeface="Calibri"/>
               </a:rPr>
-              <a:t>Para el PI esta semana</a:t>
-            </a:r>
-          </a:p>
-        </p:txBody>
-      </p:sp>
-      <p:sp>
-        <p:nvSpPr>
-          <p:cNvPr id="5" name="Rounded Rectangle 4"/>
-          <p:cNvSpPr/>
-          <p:nvPr/>
-        </p:nvSpPr>
-        <p:spPr>
-          <a:xfrm>
-            <a:off x="457200" y="1261872"/>
-            <a:ext cx="11277295" cy="1051560"/>
-          </a:xfrm>
-          <a:prstGeom prst="roundRect">
-            <a:avLst>
-              <a:gd name="adj" fmla="val 12000"/>
-            </a:avLst>
-          </a:prstGeom>
-          <a:solidFill>
-            <a:srgbClr val="E8F4FA"/>
-          </a:solidFill>
-          <a:ln>
-            <a:noFill/>
-          </a:ln>
-        </p:spPr>
-        <p:style>
-          <a:lnRef idx="1">
-            <a:schemeClr val="accent1"/>
-          </a:lnRef>
-          <a:fillRef idx="3">
-            <a:schemeClr val="accent1"/>
-          </a:fillRef>
-          <a:effectRef idx="2">
-            <a:schemeClr val="accent1"/>
-          </a:effectRef>
-          <a:fontRef idx="minor">
-            <a:schemeClr val="lt1"/>
-          </a:fontRef>
-        </p:style>
-        <p:txBody>
-          <a:bodyPr rtlCol="0" anchor="ctr"/>
-          <a:lstStyle/>
-          <a:p>
-            <a:pPr algn="ctr"/>
-          </a:p>
-        </p:txBody>
-      </p:sp>
-      <p:sp>
-        <p:nvSpPr>
-          <p:cNvPr id="6" name="Rectangle 5"/>
-          <p:cNvSpPr/>
-          <p:nvPr/>
-        </p:nvSpPr>
-        <p:spPr>
-          <a:xfrm>
-            <a:off x="457200" y="1261872"/>
-            <a:ext cx="128016" cy="1051560"/>
-          </a:xfrm>
-          <a:prstGeom prst="rect">
-            <a:avLst/>
-          </a:prstGeom>
-          <a:solidFill>
-            <a:srgbClr val="269CCB"/>
-          </a:solidFill>
-          <a:ln>
-            <a:noFill/>
-          </a:ln>
-        </p:spPr>
-        <p:style>
-          <a:lnRef idx="1">
-            <a:schemeClr val="accent1"/>
-          </a:lnRef>
-          <a:fillRef idx="3">
-            <a:schemeClr val="accent1"/>
-          </a:fillRef>
-          <a:effectRef idx="2">
-            <a:schemeClr val="accent1"/>
-          </a:effectRef>
-          <a:fontRef idx="minor">
-            <a:schemeClr val="lt1"/>
-          </a:fontRef>
-        </p:style>
-        <p:txBody>
-          <a:bodyPr rtlCol="0" anchor="ctr"/>
-          <a:lstStyle/>
-          <a:p>
-            <a:pPr algn="ctr"/>
-          </a:p>
-        </p:txBody>
-      </p:sp>
-      <p:sp>
-        <p:nvSpPr>
-          <p:cNvPr id="7" name="TextBox 6"/>
+              <a:t>Taller PI — por que importa</a:t>
+            </a:r>
+          </a:p>
+        </p:txBody>
+      </p:sp>
+      <p:sp>
+        <p:nvSpPr>
+          <p:cNvPr id="5" name="TextBox 4"/>
           <p:cNvSpPr txBox="1"/>
           <p:nvPr/>
         </p:nvSpPr>
         <p:spPr>
           <a:xfrm>
-            <a:off x="777240" y="1399031"/>
-            <a:ext cx="10774375" cy="822959"/>
+            <a:off x="457200" y="1170432"/>
+            <a:ext cx="11277295" cy="5230368"/>
           </a:xfrm>
           <a:prstGeom prst="rect">
             <a:avLst/>
@@ -5774,313 +5612,76 @@
           </a:bodyPr>
           <a:lstStyle/>
           <a:p>
-            <a:r>
-              <a:rPr sz="1200" b="1" i="0">
-                <a:solidFill>
-                  <a:srgbClr val="269CCB"/>
-                </a:solidFill>
-                <a:latin typeface="Calibri"/>
-              </a:rPr>
-              <a:t>Info</a:t>
-            </a:r>
-          </a:p>
-          <a:p>
             <a:pPr>
-              <a:spcBef>
-                <a:spcPts val="400"/>
-              </a:spcBef>
+              <a:spcAft>
+                <a:spcPts val="800"/>
+              </a:spcAft>
             </a:pPr>
             <a:r>
-              <a:rPr sz="1400" b="0" i="0">
+              <a:rPr sz="2000" b="0" i="0">
                 <a:solidFill>
                   <a:srgbClr val="333333"/>
                 </a:solidFill>
                 <a:latin typeface="Calibri"/>
               </a:rPr>
-              <a:t>Hito: Queda listo el modelo de dominio de VetCare: el diagrama de clases con Dueno, Mascota, Cita, Veterinario y Atencion.</a:t>
-            </a:r>
-          </a:p>
-        </p:txBody>
-      </p:sp>
-      <p:sp>
-        <p:nvSpPr>
-          <p:cNvPr id="8" name="Rounded Rectangle 7"/>
-          <p:cNvSpPr/>
-          <p:nvPr/>
-        </p:nvSpPr>
-        <p:spPr>
-          <a:xfrm>
-            <a:off x="457200" y="2478024"/>
-            <a:ext cx="11277295" cy="1051560"/>
-          </a:xfrm>
-          <a:prstGeom prst="roundRect">
-            <a:avLst>
-              <a:gd name="adj" fmla="val 12000"/>
-            </a:avLst>
-          </a:prstGeom>
-          <a:solidFill>
-            <a:srgbClr val="FFF8E1"/>
-          </a:solidFill>
-          <a:ln>
-            <a:noFill/>
-          </a:ln>
-        </p:spPr>
-        <p:style>
-          <a:lnRef idx="1">
-            <a:schemeClr val="accent1"/>
-          </a:lnRef>
-          <a:fillRef idx="3">
-            <a:schemeClr val="accent1"/>
-          </a:fillRef>
-          <a:effectRef idx="2">
-            <a:schemeClr val="accent1"/>
-          </a:effectRef>
-          <a:fontRef idx="minor">
-            <a:schemeClr val="lt1"/>
-          </a:fontRef>
-        </p:style>
-        <p:txBody>
-          <a:bodyPr rtlCol="0" anchor="ctr"/>
-          <a:lstStyle/>
-          <a:p>
-            <a:pPr algn="ctr"/>
-          </a:p>
-        </p:txBody>
-      </p:sp>
-      <p:sp>
-        <p:nvSpPr>
-          <p:cNvPr id="9" name="Rectangle 8"/>
-          <p:cNvSpPr/>
-          <p:nvPr/>
-        </p:nvSpPr>
-        <p:spPr>
-          <a:xfrm>
-            <a:off x="457200" y="2478024"/>
-            <a:ext cx="128016" cy="1051560"/>
-          </a:xfrm>
-          <a:prstGeom prst="rect">
-            <a:avLst/>
-          </a:prstGeom>
-          <a:solidFill>
-            <a:srgbClr val="FFD000"/>
-          </a:solidFill>
-          <a:ln>
-            <a:noFill/>
-          </a:ln>
-        </p:spPr>
-        <p:style>
-          <a:lnRef idx="1">
-            <a:schemeClr val="accent1"/>
-          </a:lnRef>
-          <a:fillRef idx="3">
-            <a:schemeClr val="accent1"/>
-          </a:fillRef>
-          <a:effectRef idx="2">
-            <a:schemeClr val="accent1"/>
-          </a:effectRef>
-          <a:fontRef idx="minor">
-            <a:schemeClr val="lt1"/>
-          </a:fontRef>
-        </p:style>
-        <p:txBody>
-          <a:bodyPr rtlCol="0" anchor="ctr"/>
-          <a:lstStyle/>
-          <a:p>
-            <a:pPr algn="ctr"/>
-          </a:p>
-        </p:txBody>
-      </p:sp>
-      <p:sp>
-        <p:nvSpPr>
-          <p:cNvPr id="10" name="TextBox 9"/>
-          <p:cNvSpPr txBox="1"/>
-          <p:nvPr/>
-        </p:nvSpPr>
-        <p:spPr>
-          <a:xfrm>
-            <a:off x="777240" y="2615184"/>
-            <a:ext cx="10774375" cy="822959"/>
-          </a:xfrm>
-          <a:prstGeom prst="rect">
-            <a:avLst/>
-          </a:prstGeom>
-          <a:noFill/>
-        </p:spPr>
-        <p:txBody>
-          <a:bodyPr wrap="square">
-            <a:spAutoFit/>
-          </a:bodyPr>
-          <a:lstStyle/>
-          <a:p>
-            <a:r>
-              <a:rPr sz="1200" b="1" i="0">
-                <a:solidFill>
-                  <a:srgbClr val="FFD000"/>
-                </a:solidFill>
-                <a:latin typeface="Calibri"/>
-              </a:rPr>
-              <a:t>Aclaración</a:t>
+              <a:t>–   </a:t>
+            </a:r>
+            <a:r>
+              <a:rPr sz="2000" b="1" i="0">
+                <a:solidFill>
+                  <a:srgbClr val="333333"/>
+                </a:solidFill>
+                <a:latin typeface="Calibri"/>
+              </a:rPr>
+              <a:t>Por que importa al PI:</a:t>
+            </a:r>
+            <a:r>
+              <a:rPr sz="2000" b="0" i="0">
+                <a:solidFill>
+                  <a:srgbClr val="333333"/>
+                </a:solidFill>
+                <a:latin typeface="Calibri"/>
+              </a:rPr>
+              <a:t> este diagrama de clases es el plano maestro de VetCare: de el salen el diccionario de datos, las tablas de la base de datos y las clases que se programan en Programacion II.</a:t>
             </a:r>
           </a:p>
           <a:p>
             <a:pPr>
-              <a:spcBef>
-                <a:spcPts val="400"/>
-              </a:spcBef>
+              <a:spcAft>
+                <a:spcPts val="800"/>
+              </a:spcAft>
             </a:pPr>
             <a:r>
-              <a:rPr sz="1400" b="0" i="0">
+              <a:rPr sz="2000" b="0" i="0">
                 <a:solidFill>
                   <a:srgbClr val="333333"/>
                 </a:solidFill>
                 <a:latin typeface="Calibri"/>
               </a:rPr>
-              <a:t>Enunciado completo: Clases/Proyecto Integrador/ (VetCare).</a:t>
-            </a:r>
-          </a:p>
-        </p:txBody>
-      </p:sp>
-      <p:sp>
-        <p:nvSpPr>
-          <p:cNvPr id="11" name="Rounded Rectangle 10"/>
-          <p:cNvSpPr/>
-          <p:nvPr/>
-        </p:nvSpPr>
-        <p:spPr>
-          <a:xfrm>
-            <a:off x="457200" y="3694176"/>
-            <a:ext cx="11277295" cy="1051560"/>
-          </a:xfrm>
-          <a:prstGeom prst="roundRect">
-            <a:avLst>
-              <a:gd name="adj" fmla="val 12000"/>
-            </a:avLst>
-          </a:prstGeom>
-          <a:solidFill>
-            <a:srgbClr val="FBE4E4"/>
-          </a:solidFill>
-          <a:ln>
-            <a:noFill/>
-          </a:ln>
-        </p:spPr>
-        <p:style>
-          <a:lnRef idx="1">
-            <a:schemeClr val="accent1"/>
-          </a:lnRef>
-          <a:fillRef idx="3">
-            <a:schemeClr val="accent1"/>
-          </a:fillRef>
-          <a:effectRef idx="2">
-            <a:schemeClr val="accent1"/>
-          </a:effectRef>
-          <a:fontRef idx="minor">
-            <a:schemeClr val="lt1"/>
-          </a:fontRef>
-        </p:style>
-        <p:txBody>
-          <a:bodyPr rtlCol="0" anchor="ctr"/>
-          <a:lstStyle/>
-          <a:p>
-            <a:pPr algn="ctr"/>
-          </a:p>
-        </p:txBody>
-      </p:sp>
-      <p:sp>
-        <p:nvSpPr>
-          <p:cNvPr id="12" name="Rectangle 11"/>
-          <p:cNvSpPr/>
-          <p:nvPr/>
-        </p:nvSpPr>
-        <p:spPr>
-          <a:xfrm>
-            <a:off x="457200" y="3694176"/>
-            <a:ext cx="128016" cy="1051560"/>
-          </a:xfrm>
-          <a:prstGeom prst="rect">
-            <a:avLst/>
-          </a:prstGeom>
-          <a:solidFill>
-            <a:srgbClr val="A02030"/>
-          </a:solidFill>
-          <a:ln>
-            <a:noFill/>
-          </a:ln>
-        </p:spPr>
-        <p:style>
-          <a:lnRef idx="1">
-            <a:schemeClr val="accent1"/>
-          </a:lnRef>
-          <a:fillRef idx="3">
-            <a:schemeClr val="accent1"/>
-          </a:fillRef>
-          <a:effectRef idx="2">
-            <a:schemeClr val="accent1"/>
-          </a:effectRef>
-          <a:fontRef idx="minor">
-            <a:schemeClr val="lt1"/>
-          </a:fontRef>
-        </p:style>
-        <p:txBody>
-          <a:bodyPr rtlCol="0" anchor="ctr"/>
-          <a:lstStyle/>
-          <a:p>
-            <a:pPr algn="ctr"/>
-          </a:p>
-        </p:txBody>
-      </p:sp>
-      <p:sp>
-        <p:nvSpPr>
-          <p:cNvPr id="13" name="TextBox 12"/>
-          <p:cNvSpPr txBox="1"/>
-          <p:nvPr/>
-        </p:nvSpPr>
-        <p:spPr>
-          <a:xfrm>
-            <a:off x="777240" y="3831336"/>
-            <a:ext cx="10774375" cy="822959"/>
-          </a:xfrm>
-          <a:prstGeom prst="rect">
-            <a:avLst/>
-          </a:prstGeom>
-          <a:noFill/>
-        </p:spPr>
-        <p:txBody>
-          <a:bodyPr wrap="square">
-            <a:spAutoFit/>
-          </a:bodyPr>
-          <a:lstStyle/>
-          <a:p>
-            <a:r>
-              <a:rPr sz="1200" b="1" i="0">
-                <a:solidFill>
-                  <a:srgbClr val="A02030"/>
-                </a:solidFill>
-                <a:latin typeface="Calibri"/>
-              </a:rPr>
-              <a:t>Atención</a:t>
+              <a:t>–   Es el primer artefacto del curso que se lee igual en Cali, en Bogota o en Berlin, porque UML es un estandar y no una convencion del salon.</a:t>
             </a:r>
           </a:p>
           <a:p>
             <a:pPr>
-              <a:spcBef>
-                <a:spcPts val="400"/>
-              </a:spcBef>
+              <a:spcAft>
+                <a:spcPts val="800"/>
+              </a:spcAft>
             </a:pPr>
             <a:r>
-              <a:rPr sz="1400" b="0" i="0">
+              <a:rPr sz="2000" b="0" i="0">
                 <a:solidFill>
                   <a:srgbClr val="333333"/>
                 </a:solidFill>
                 <a:latin typeface="Calibri"/>
               </a:rPr>
-              <a:t>Entrega del taller, si el docente lo asigna · en la fecha que indique el docente.</a:t>
-            </a:r>
-          </a:p>
-        </p:txBody>
-      </p:sp>
-      <p:sp>
-        <p:nvSpPr>
-          <p:cNvPr id="14" name="TextBox 13"/>
+              <a:t>–   Si una clase no puede rastrearse a un requisito o a una historia del backlog, sobra; y si un requisito no tiene donde vivir en el diagrama, falta una clase.</a:t>
+            </a:r>
+          </a:p>
+        </p:txBody>
+      </p:sp>
+      <p:sp>
+        <p:nvSpPr>
+          <p:cNvPr id="6" name="TextBox 5"/>
           <p:cNvSpPr txBox="1"/>
           <p:nvPr/>
         </p:nvSpPr>
@@ -6148,6 +5749,2893 @@
         <p:spPr>
           <a:xfrm>
             <a:off x="0" y="0"/>
+            <a:ext cx="12191695" cy="960120"/>
+          </a:xfrm>
+          <a:prstGeom prst="rect">
+            <a:avLst/>
+          </a:prstGeom>
+          <a:solidFill>
+            <a:srgbClr val="095292"/>
+          </a:solidFill>
+          <a:ln>
+            <a:noFill/>
+          </a:ln>
+        </p:spPr>
+        <p:style>
+          <a:lnRef idx="1">
+            <a:schemeClr val="accent1"/>
+          </a:lnRef>
+          <a:fillRef idx="3">
+            <a:schemeClr val="accent1"/>
+          </a:fillRef>
+          <a:effectRef idx="2">
+            <a:schemeClr val="accent1"/>
+          </a:effectRef>
+          <a:fontRef idx="minor">
+            <a:schemeClr val="lt1"/>
+          </a:fontRef>
+        </p:style>
+        <p:txBody>
+          <a:bodyPr rtlCol="0" anchor="ctr"/>
+          <a:lstStyle/>
+          <a:p>
+            <a:pPr algn="ctr"/>
+          </a:p>
+        </p:txBody>
+      </p:sp>
+      <p:sp>
+        <p:nvSpPr>
+          <p:cNvPr id="3" name="Rectangle 2"/>
+          <p:cNvSpPr/>
+          <p:nvPr/>
+        </p:nvSpPr>
+        <p:spPr>
+          <a:xfrm>
+            <a:off x="0" y="960120"/>
+            <a:ext cx="12191695" cy="41148"/>
+          </a:xfrm>
+          <a:prstGeom prst="rect">
+            <a:avLst/>
+          </a:prstGeom>
+          <a:solidFill>
+            <a:srgbClr val="FFD000"/>
+          </a:solidFill>
+          <a:ln>
+            <a:noFill/>
+          </a:ln>
+        </p:spPr>
+        <p:style>
+          <a:lnRef idx="1">
+            <a:schemeClr val="accent1"/>
+          </a:lnRef>
+          <a:fillRef idx="3">
+            <a:schemeClr val="accent1"/>
+          </a:fillRef>
+          <a:effectRef idx="2">
+            <a:schemeClr val="accent1"/>
+          </a:effectRef>
+          <a:fontRef idx="minor">
+            <a:schemeClr val="lt1"/>
+          </a:fontRef>
+        </p:style>
+        <p:txBody>
+          <a:bodyPr rtlCol="0" anchor="ctr"/>
+          <a:lstStyle/>
+          <a:p>
+            <a:pPr algn="ctr"/>
+          </a:p>
+        </p:txBody>
+      </p:sp>
+      <p:sp>
+        <p:nvSpPr>
+          <p:cNvPr id="4" name="TextBox 3"/>
+          <p:cNvSpPr txBox="1"/>
+          <p:nvPr/>
+        </p:nvSpPr>
+        <p:spPr>
+          <a:xfrm>
+            <a:off x="457200" y="164592"/>
+            <a:ext cx="11277295" cy="502920"/>
+          </a:xfrm>
+          <a:prstGeom prst="rect">
+            <a:avLst/>
+          </a:prstGeom>
+          <a:noFill/>
+        </p:spPr>
+        <p:txBody>
+          <a:bodyPr wrap="square">
+            <a:spAutoFit/>
+          </a:bodyPr>
+          <a:lstStyle/>
+          <a:p>
+            <a:r>
+              <a:rPr sz="2600" b="1" i="0">
+                <a:solidFill>
+                  <a:srgbClr val="FFFFFF"/>
+                </a:solidFill>
+                <a:latin typeface="Calibri"/>
+              </a:rPr>
+              <a:t>Taller PI — punto de partida</a:t>
+            </a:r>
+          </a:p>
+        </p:txBody>
+      </p:sp>
+      <p:sp>
+        <p:nvSpPr>
+          <p:cNvPr id="5" name="TextBox 4"/>
+          <p:cNvSpPr txBox="1"/>
+          <p:nvPr/>
+        </p:nvSpPr>
+        <p:spPr>
+          <a:xfrm>
+            <a:off x="457200" y="1170432"/>
+            <a:ext cx="11277295" cy="5230368"/>
+          </a:xfrm>
+          <a:prstGeom prst="rect">
+            <a:avLst/>
+          </a:prstGeom>
+          <a:noFill/>
+        </p:spPr>
+        <p:txBody>
+          <a:bodyPr wrap="square">
+            <a:spAutoFit/>
+          </a:bodyPr>
+          <a:lstStyle/>
+          <a:p>
+            <a:pPr>
+              <a:spcAft>
+                <a:spcPts val="800"/>
+              </a:spcAft>
+            </a:pPr>
+            <a:r>
+              <a:rPr sz="2000" b="0" i="0">
+                <a:solidFill>
+                  <a:srgbClr val="333333"/>
+                </a:solidFill>
+                <a:latin typeface="Calibri"/>
+              </a:rPr>
+              <a:t>–   Ya existen el catalogo de RF/RNF y el backlog de historias de VetCare, ambos escritos en texto y sin ninguna representacion grafica.</a:t>
+            </a:r>
+          </a:p>
+          <a:p>
+            <a:pPr>
+              <a:spcAft>
+                <a:spcPts val="800"/>
+              </a:spcAft>
+            </a:pPr>
+            <a:r>
+              <a:rPr sz="2000" b="0" i="0">
+                <a:solidFill>
+                  <a:srgbClr val="333333"/>
+                </a:solidFill>
+                <a:latin typeface="Calibri"/>
+              </a:rPr>
+              <a:t>–   Nadie ha definido todavia que conceptos del negocio existen, que datos guarda cada uno ni como se relacionan entre si.</a:t>
+            </a:r>
+          </a:p>
+          <a:p>
+            <a:pPr>
+              <a:spcAft>
+                <a:spcPts val="800"/>
+              </a:spcAft>
+            </a:pPr>
+            <a:r>
+              <a:rPr sz="2000" b="0" i="0">
+                <a:solidFill>
+                  <a:srgbClr val="333333"/>
+                </a:solidFill>
+                <a:latin typeface="Calibri"/>
+              </a:rPr>
+              <a:t>–   El equipo discute en palabras si una mascota puede tener dos duenos y si la cita pertenece a la mascota o al veterinario, y esa discusion no se cierra hablando.</a:t>
+            </a:r>
+          </a:p>
+        </p:txBody>
+      </p:sp>
+      <p:sp>
+        <p:nvSpPr>
+          <p:cNvPr id="6" name="TextBox 5"/>
+          <p:cNvSpPr txBox="1"/>
+          <p:nvPr/>
+        </p:nvSpPr>
+        <p:spPr>
+          <a:xfrm>
+            <a:off x="11185855" y="6473952"/>
+            <a:ext cx="640080" cy="274320"/>
+          </a:xfrm>
+          <a:prstGeom prst="rect">
+            <a:avLst/>
+          </a:prstGeom>
+          <a:noFill/>
+        </p:spPr>
+        <p:txBody>
+          <a:bodyPr wrap="square">
+            <a:spAutoFit/>
+          </a:bodyPr>
+          <a:lstStyle/>
+          <a:p>
+            <a:pPr algn="r"/>
+            <a:r>
+              <a:rPr sz="1100" b="0" i="0">
+                <a:solidFill>
+                  <a:srgbClr val="666666"/>
+                </a:solidFill>
+                <a:latin typeface="Calibri"/>
+              </a:rPr>
+              <a:t>14</a:t>
+            </a:r>
+          </a:p>
+        </p:txBody>
+      </p:sp>
+    </p:spTree>
+  </p:cSld>
+  <p:clrMapOvr>
+    <a:masterClrMapping/>
+  </p:clrMapOvr>
+</p:sld>
+</file>
+
+<file path=ppt/slides/slide15.xml><?xml version="1.0" encoding="utf-8"?>
+<p:sld xmlns:a="http://schemas.openxmlformats.org/drawingml/2006/main" xmlns:p="http://schemas.openxmlformats.org/presentationml/2006/main" xmlns:r="http://schemas.openxmlformats.org/officeDocument/2006/relationships">
+  <p:cSld>
+    <p:bg>
+      <p:bgPr>
+        <a:solidFill>
+          <a:srgbClr val="FFFFFF"/>
+        </a:solidFill>
+        <a:effectLst/>
+      </p:bgPr>
+    </p:bg>
+    <p:spTree>
+      <p:nvGrpSpPr>
+        <p:cNvPr id="1" name=""/>
+        <p:cNvGrpSpPr/>
+        <p:nvPr/>
+      </p:nvGrpSpPr>
+      <p:grpSpPr/>
+      <p:sp>
+        <p:nvSpPr>
+          <p:cNvPr id="2" name="Rectangle 1"/>
+          <p:cNvSpPr/>
+          <p:nvPr/>
+        </p:nvSpPr>
+        <p:spPr>
+          <a:xfrm>
+            <a:off x="0" y="0"/>
+            <a:ext cx="12191695" cy="960120"/>
+          </a:xfrm>
+          <a:prstGeom prst="rect">
+            <a:avLst/>
+          </a:prstGeom>
+          <a:solidFill>
+            <a:srgbClr val="095292"/>
+          </a:solidFill>
+          <a:ln>
+            <a:noFill/>
+          </a:ln>
+        </p:spPr>
+        <p:style>
+          <a:lnRef idx="1">
+            <a:schemeClr val="accent1"/>
+          </a:lnRef>
+          <a:fillRef idx="3">
+            <a:schemeClr val="accent1"/>
+          </a:fillRef>
+          <a:effectRef idx="2">
+            <a:schemeClr val="accent1"/>
+          </a:effectRef>
+          <a:fontRef idx="minor">
+            <a:schemeClr val="lt1"/>
+          </a:fontRef>
+        </p:style>
+        <p:txBody>
+          <a:bodyPr rtlCol="0" anchor="ctr"/>
+          <a:lstStyle/>
+          <a:p>
+            <a:pPr algn="ctr"/>
+          </a:p>
+        </p:txBody>
+      </p:sp>
+      <p:sp>
+        <p:nvSpPr>
+          <p:cNvPr id="3" name="Rectangle 2"/>
+          <p:cNvSpPr/>
+          <p:nvPr/>
+        </p:nvSpPr>
+        <p:spPr>
+          <a:xfrm>
+            <a:off x="0" y="960120"/>
+            <a:ext cx="12191695" cy="41148"/>
+          </a:xfrm>
+          <a:prstGeom prst="rect">
+            <a:avLst/>
+          </a:prstGeom>
+          <a:solidFill>
+            <a:srgbClr val="FFD000"/>
+          </a:solidFill>
+          <a:ln>
+            <a:noFill/>
+          </a:ln>
+        </p:spPr>
+        <p:style>
+          <a:lnRef idx="1">
+            <a:schemeClr val="accent1"/>
+          </a:lnRef>
+          <a:fillRef idx="3">
+            <a:schemeClr val="accent1"/>
+          </a:fillRef>
+          <a:effectRef idx="2">
+            <a:schemeClr val="accent1"/>
+          </a:effectRef>
+          <a:fontRef idx="minor">
+            <a:schemeClr val="lt1"/>
+          </a:fontRef>
+        </p:style>
+        <p:txBody>
+          <a:bodyPr rtlCol="0" anchor="ctr"/>
+          <a:lstStyle/>
+          <a:p>
+            <a:pPr algn="ctr"/>
+          </a:p>
+        </p:txBody>
+      </p:sp>
+      <p:sp>
+        <p:nvSpPr>
+          <p:cNvPr id="4" name="TextBox 3"/>
+          <p:cNvSpPr txBox="1"/>
+          <p:nvPr/>
+        </p:nvSpPr>
+        <p:spPr>
+          <a:xfrm>
+            <a:off x="457200" y="164592"/>
+            <a:ext cx="11277295" cy="502920"/>
+          </a:xfrm>
+          <a:prstGeom prst="rect">
+            <a:avLst/>
+          </a:prstGeom>
+          <a:noFill/>
+        </p:spPr>
+        <p:txBody>
+          <a:bodyPr wrap="square">
+            <a:spAutoFit/>
+          </a:bodyPr>
+          <a:lstStyle/>
+          <a:p>
+            <a:r>
+              <a:rPr sz="2600" b="1" i="0">
+                <a:solidFill>
+                  <a:srgbClr val="FFFFFF"/>
+                </a:solidFill>
+                <a:latin typeface="Calibri"/>
+              </a:rPr>
+              <a:t>Taller PI — pasos guiados</a:t>
+            </a:r>
+          </a:p>
+        </p:txBody>
+      </p:sp>
+      <p:sp>
+        <p:nvSpPr>
+          <p:cNvPr id="5" name="Rounded Rectangle 4"/>
+          <p:cNvSpPr/>
+          <p:nvPr/>
+        </p:nvSpPr>
+        <p:spPr>
+          <a:xfrm>
+            <a:off x="457200" y="1234440"/>
+            <a:ext cx="11277295" cy="950976"/>
+          </a:xfrm>
+          <a:prstGeom prst="roundRect">
+            <a:avLst>
+              <a:gd name="adj" fmla="val 12000"/>
+            </a:avLst>
+          </a:prstGeom>
+          <a:solidFill>
+            <a:srgbClr val="F2F2F2"/>
+          </a:solidFill>
+          <a:ln>
+            <a:noFill/>
+          </a:ln>
+        </p:spPr>
+        <p:style>
+          <a:lnRef idx="1">
+            <a:schemeClr val="accent1"/>
+          </a:lnRef>
+          <a:fillRef idx="3">
+            <a:schemeClr val="accent1"/>
+          </a:fillRef>
+          <a:effectRef idx="2">
+            <a:schemeClr val="accent1"/>
+          </a:effectRef>
+          <a:fontRef idx="minor">
+            <a:schemeClr val="lt1"/>
+          </a:fontRef>
+        </p:style>
+        <p:txBody>
+          <a:bodyPr rtlCol="0" anchor="ctr"/>
+          <a:lstStyle/>
+          <a:p>
+            <a:pPr algn="ctr"/>
+          </a:p>
+        </p:txBody>
+      </p:sp>
+      <p:sp>
+        <p:nvSpPr>
+          <p:cNvPr id="6" name="Rounded Rectangle 5"/>
+          <p:cNvSpPr/>
+          <p:nvPr/>
+        </p:nvSpPr>
+        <p:spPr>
+          <a:xfrm>
+            <a:off x="594360" y="1490472"/>
+            <a:ext cx="438912" cy="438912"/>
+          </a:xfrm>
+          <a:prstGeom prst="roundRect">
+            <a:avLst>
+              <a:gd name="adj" fmla="val 12000"/>
+            </a:avLst>
+          </a:prstGeom>
+          <a:solidFill>
+            <a:srgbClr val="095292"/>
+          </a:solidFill>
+          <a:ln>
+            <a:noFill/>
+          </a:ln>
+        </p:spPr>
+        <p:style>
+          <a:lnRef idx="1">
+            <a:schemeClr val="accent1"/>
+          </a:lnRef>
+          <a:fillRef idx="3">
+            <a:schemeClr val="accent1"/>
+          </a:fillRef>
+          <a:effectRef idx="2">
+            <a:schemeClr val="accent1"/>
+          </a:effectRef>
+          <a:fontRef idx="minor">
+            <a:schemeClr val="lt1"/>
+          </a:fontRef>
+        </p:style>
+        <p:txBody>
+          <a:bodyPr rtlCol="0" anchor="ctr"/>
+          <a:lstStyle/>
+          <a:p>
+            <a:pPr algn="ctr"/>
+          </a:p>
+        </p:txBody>
+      </p:sp>
+      <p:sp>
+        <p:nvSpPr>
+          <p:cNvPr id="7" name="TextBox 6"/>
+          <p:cNvSpPr txBox="1"/>
+          <p:nvPr/>
+        </p:nvSpPr>
+        <p:spPr>
+          <a:xfrm>
+            <a:off x="594360" y="1490472"/>
+            <a:ext cx="438912" cy="438912"/>
+          </a:xfrm>
+          <a:prstGeom prst="rect">
+            <a:avLst/>
+          </a:prstGeom>
+          <a:noFill/>
+        </p:spPr>
+        <p:txBody>
+          <a:bodyPr wrap="square" anchor="ctr"/>
+          <a:lstStyle/>
+          <a:p>
+            <a:pPr algn="ctr"/>
+            <a:r>
+              <a:rPr sz="1600" b="1" i="0">
+                <a:solidFill>
+                  <a:srgbClr val="FFFFFF"/>
+                </a:solidFill>
+                <a:latin typeface="Calibri"/>
+              </a:rPr>
+              <a:t>1</a:t>
+            </a:r>
+          </a:p>
+        </p:txBody>
+      </p:sp>
+      <p:sp>
+        <p:nvSpPr>
+          <p:cNvPr id="8" name="TextBox 7"/>
+          <p:cNvSpPr txBox="1"/>
+          <p:nvPr/>
+        </p:nvSpPr>
+        <p:spPr>
+          <a:xfrm>
+            <a:off x="1188720" y="1325880"/>
+            <a:ext cx="10271455" cy="786384"/>
+          </a:xfrm>
+          <a:prstGeom prst="rect">
+            <a:avLst/>
+          </a:prstGeom>
+          <a:noFill/>
+        </p:spPr>
+        <p:txBody>
+          <a:bodyPr wrap="square" anchor="ctr"/>
+          <a:lstStyle/>
+          <a:p>
+            <a:r>
+              <a:rPr sz="1500" b="1" i="0">
+                <a:solidFill>
+                  <a:srgbClr val="095292"/>
+                </a:solidFill>
+                <a:latin typeface="Calibri"/>
+              </a:rPr>
+              <a:t>Paso 1: subraye en el catalogo de requisitos y en el backlog los sustantivos del negocio de VetCare y arme la lista de clases candidatas, descartando las que sean pantallas, reportes o cosas tecnicas.</a:t>
+            </a:r>
+          </a:p>
+        </p:txBody>
+      </p:sp>
+      <p:sp>
+        <p:nvSpPr>
+          <p:cNvPr id="9" name="Rounded Rectangle 8"/>
+          <p:cNvSpPr/>
+          <p:nvPr/>
+        </p:nvSpPr>
+        <p:spPr>
+          <a:xfrm>
+            <a:off x="457200" y="2276856"/>
+            <a:ext cx="11277295" cy="950976"/>
+          </a:xfrm>
+          <a:prstGeom prst="roundRect">
+            <a:avLst>
+              <a:gd name="adj" fmla="val 12000"/>
+            </a:avLst>
+          </a:prstGeom>
+          <a:solidFill>
+            <a:srgbClr val="E8F4FA"/>
+          </a:solidFill>
+          <a:ln>
+            <a:noFill/>
+          </a:ln>
+        </p:spPr>
+        <p:style>
+          <a:lnRef idx="1">
+            <a:schemeClr val="accent1"/>
+          </a:lnRef>
+          <a:fillRef idx="3">
+            <a:schemeClr val="accent1"/>
+          </a:fillRef>
+          <a:effectRef idx="2">
+            <a:schemeClr val="accent1"/>
+          </a:effectRef>
+          <a:fontRef idx="minor">
+            <a:schemeClr val="lt1"/>
+          </a:fontRef>
+        </p:style>
+        <p:txBody>
+          <a:bodyPr rtlCol="0" anchor="ctr"/>
+          <a:lstStyle/>
+          <a:p>
+            <a:pPr algn="ctr"/>
+          </a:p>
+        </p:txBody>
+      </p:sp>
+      <p:sp>
+        <p:nvSpPr>
+          <p:cNvPr id="10" name="Rounded Rectangle 9"/>
+          <p:cNvSpPr/>
+          <p:nvPr/>
+        </p:nvSpPr>
+        <p:spPr>
+          <a:xfrm>
+            <a:off x="594360" y="2532888"/>
+            <a:ext cx="438912" cy="438912"/>
+          </a:xfrm>
+          <a:prstGeom prst="roundRect">
+            <a:avLst>
+              <a:gd name="adj" fmla="val 12000"/>
+            </a:avLst>
+          </a:prstGeom>
+          <a:solidFill>
+            <a:srgbClr val="095292"/>
+          </a:solidFill>
+          <a:ln>
+            <a:noFill/>
+          </a:ln>
+        </p:spPr>
+        <p:style>
+          <a:lnRef idx="1">
+            <a:schemeClr val="accent1"/>
+          </a:lnRef>
+          <a:fillRef idx="3">
+            <a:schemeClr val="accent1"/>
+          </a:fillRef>
+          <a:effectRef idx="2">
+            <a:schemeClr val="accent1"/>
+          </a:effectRef>
+          <a:fontRef idx="minor">
+            <a:schemeClr val="lt1"/>
+          </a:fontRef>
+        </p:style>
+        <p:txBody>
+          <a:bodyPr rtlCol="0" anchor="ctr"/>
+          <a:lstStyle/>
+          <a:p>
+            <a:pPr algn="ctr"/>
+          </a:p>
+        </p:txBody>
+      </p:sp>
+      <p:sp>
+        <p:nvSpPr>
+          <p:cNvPr id="11" name="TextBox 10"/>
+          <p:cNvSpPr txBox="1"/>
+          <p:nvPr/>
+        </p:nvSpPr>
+        <p:spPr>
+          <a:xfrm>
+            <a:off x="594360" y="2532888"/>
+            <a:ext cx="438912" cy="438912"/>
+          </a:xfrm>
+          <a:prstGeom prst="rect">
+            <a:avLst/>
+          </a:prstGeom>
+          <a:noFill/>
+        </p:spPr>
+        <p:txBody>
+          <a:bodyPr wrap="square" anchor="ctr"/>
+          <a:lstStyle/>
+          <a:p>
+            <a:pPr algn="ctr"/>
+            <a:r>
+              <a:rPr sz="1600" b="1" i="0">
+                <a:solidFill>
+                  <a:srgbClr val="FFFFFF"/>
+                </a:solidFill>
+                <a:latin typeface="Calibri"/>
+              </a:rPr>
+              <a:t>2</a:t>
+            </a:r>
+          </a:p>
+        </p:txBody>
+      </p:sp>
+      <p:sp>
+        <p:nvSpPr>
+          <p:cNvPr id="12" name="TextBox 11"/>
+          <p:cNvSpPr txBox="1"/>
+          <p:nvPr/>
+        </p:nvSpPr>
+        <p:spPr>
+          <a:xfrm>
+            <a:off x="1188720" y="2368296"/>
+            <a:ext cx="10271455" cy="786384"/>
+          </a:xfrm>
+          <a:prstGeom prst="rect">
+            <a:avLst/>
+          </a:prstGeom>
+          <a:noFill/>
+        </p:spPr>
+        <p:txBody>
+          <a:bodyPr wrap="square" anchor="ctr"/>
+          <a:lstStyle/>
+          <a:p>
+            <a:r>
+              <a:rPr sz="1500" b="1" i="0">
+                <a:solidFill>
+                  <a:srgbClr val="095292"/>
+                </a:solidFill>
+                <a:latin typeface="Calibri"/>
+              </a:rPr>
+              <a:t>Paso 2: dibuje en draw.io las cinco clases Dueno, Mascota, Cita, Veterinario y Atencion con la caja de tres compartimentos, en singular y con mayuscula inicial.</a:t>
+            </a:r>
+          </a:p>
+        </p:txBody>
+      </p:sp>
+      <p:sp>
+        <p:nvSpPr>
+          <p:cNvPr id="13" name="Rounded Rectangle 12"/>
+          <p:cNvSpPr/>
+          <p:nvPr/>
+        </p:nvSpPr>
+        <p:spPr>
+          <a:xfrm>
+            <a:off x="457200" y="3319272"/>
+            <a:ext cx="11277295" cy="950976"/>
+          </a:xfrm>
+          <a:prstGeom prst="roundRect">
+            <a:avLst>
+              <a:gd name="adj" fmla="val 12000"/>
+            </a:avLst>
+          </a:prstGeom>
+          <a:solidFill>
+            <a:srgbClr val="F2F2F2"/>
+          </a:solidFill>
+          <a:ln>
+            <a:noFill/>
+          </a:ln>
+        </p:spPr>
+        <p:style>
+          <a:lnRef idx="1">
+            <a:schemeClr val="accent1"/>
+          </a:lnRef>
+          <a:fillRef idx="3">
+            <a:schemeClr val="accent1"/>
+          </a:fillRef>
+          <a:effectRef idx="2">
+            <a:schemeClr val="accent1"/>
+          </a:effectRef>
+          <a:fontRef idx="minor">
+            <a:schemeClr val="lt1"/>
+          </a:fontRef>
+        </p:style>
+        <p:txBody>
+          <a:bodyPr rtlCol="0" anchor="ctr"/>
+          <a:lstStyle/>
+          <a:p>
+            <a:pPr algn="ctr"/>
+          </a:p>
+        </p:txBody>
+      </p:sp>
+      <p:sp>
+        <p:nvSpPr>
+          <p:cNvPr id="14" name="Rounded Rectangle 13"/>
+          <p:cNvSpPr/>
+          <p:nvPr/>
+        </p:nvSpPr>
+        <p:spPr>
+          <a:xfrm>
+            <a:off x="594360" y="3575304"/>
+            <a:ext cx="438912" cy="438912"/>
+          </a:xfrm>
+          <a:prstGeom prst="roundRect">
+            <a:avLst>
+              <a:gd name="adj" fmla="val 12000"/>
+            </a:avLst>
+          </a:prstGeom>
+          <a:solidFill>
+            <a:srgbClr val="095292"/>
+          </a:solidFill>
+          <a:ln>
+            <a:noFill/>
+          </a:ln>
+        </p:spPr>
+        <p:style>
+          <a:lnRef idx="1">
+            <a:schemeClr val="accent1"/>
+          </a:lnRef>
+          <a:fillRef idx="3">
+            <a:schemeClr val="accent1"/>
+          </a:fillRef>
+          <a:effectRef idx="2">
+            <a:schemeClr val="accent1"/>
+          </a:effectRef>
+          <a:fontRef idx="minor">
+            <a:schemeClr val="lt1"/>
+          </a:fontRef>
+        </p:style>
+        <p:txBody>
+          <a:bodyPr rtlCol="0" anchor="ctr"/>
+          <a:lstStyle/>
+          <a:p>
+            <a:pPr algn="ctr"/>
+          </a:p>
+        </p:txBody>
+      </p:sp>
+      <p:sp>
+        <p:nvSpPr>
+          <p:cNvPr id="15" name="TextBox 14"/>
+          <p:cNvSpPr txBox="1"/>
+          <p:nvPr/>
+        </p:nvSpPr>
+        <p:spPr>
+          <a:xfrm>
+            <a:off x="594360" y="3575304"/>
+            <a:ext cx="438912" cy="438912"/>
+          </a:xfrm>
+          <a:prstGeom prst="rect">
+            <a:avLst/>
+          </a:prstGeom>
+          <a:noFill/>
+        </p:spPr>
+        <p:txBody>
+          <a:bodyPr wrap="square" anchor="ctr"/>
+          <a:lstStyle/>
+          <a:p>
+            <a:pPr algn="ctr"/>
+            <a:r>
+              <a:rPr sz="1600" b="1" i="0">
+                <a:solidFill>
+                  <a:srgbClr val="FFFFFF"/>
+                </a:solidFill>
+                <a:latin typeface="Calibri"/>
+              </a:rPr>
+              <a:t>3</a:t>
+            </a:r>
+          </a:p>
+        </p:txBody>
+      </p:sp>
+      <p:sp>
+        <p:nvSpPr>
+          <p:cNvPr id="16" name="TextBox 15"/>
+          <p:cNvSpPr txBox="1"/>
+          <p:nvPr/>
+        </p:nvSpPr>
+        <p:spPr>
+          <a:xfrm>
+            <a:off x="1188720" y="3410712"/>
+            <a:ext cx="10271455" cy="786384"/>
+          </a:xfrm>
+          <a:prstGeom prst="rect">
+            <a:avLst/>
+          </a:prstGeom>
+          <a:noFill/>
+        </p:spPr>
+        <p:txBody>
+          <a:bodyPr wrap="square" anchor="ctr"/>
+          <a:lstStyle/>
+          <a:p>
+            <a:r>
+              <a:rPr sz="1500" b="1" i="0">
+                <a:solidFill>
+                  <a:srgbClr val="095292"/>
+                </a:solidFill>
+                <a:latin typeface="Calibri"/>
+              </a:rPr>
+              <a:t>Paso 3: coloque minimo cuatro atributos por clase con visibilidad y tipo (por ejemplo -documento: String, -fechaNacimiento: Date) verificando que ningun atributo este repetido en dos clases distintas.</a:t>
+            </a:r>
+          </a:p>
+        </p:txBody>
+      </p:sp>
+      <p:sp>
+        <p:nvSpPr>
+          <p:cNvPr id="17" name="Rounded Rectangle 16"/>
+          <p:cNvSpPr/>
+          <p:nvPr/>
+        </p:nvSpPr>
+        <p:spPr>
+          <a:xfrm>
+            <a:off x="457200" y="4361688"/>
+            <a:ext cx="11277295" cy="950976"/>
+          </a:xfrm>
+          <a:prstGeom prst="roundRect">
+            <a:avLst>
+              <a:gd name="adj" fmla="val 12000"/>
+            </a:avLst>
+          </a:prstGeom>
+          <a:solidFill>
+            <a:srgbClr val="E8F4FA"/>
+          </a:solidFill>
+          <a:ln>
+            <a:noFill/>
+          </a:ln>
+        </p:spPr>
+        <p:style>
+          <a:lnRef idx="1">
+            <a:schemeClr val="accent1"/>
+          </a:lnRef>
+          <a:fillRef idx="3">
+            <a:schemeClr val="accent1"/>
+          </a:fillRef>
+          <a:effectRef idx="2">
+            <a:schemeClr val="accent1"/>
+          </a:effectRef>
+          <a:fontRef idx="minor">
+            <a:schemeClr val="lt1"/>
+          </a:fontRef>
+        </p:style>
+        <p:txBody>
+          <a:bodyPr rtlCol="0" anchor="ctr"/>
+          <a:lstStyle/>
+          <a:p>
+            <a:pPr algn="ctr"/>
+          </a:p>
+        </p:txBody>
+      </p:sp>
+      <p:sp>
+        <p:nvSpPr>
+          <p:cNvPr id="18" name="Rounded Rectangle 17"/>
+          <p:cNvSpPr/>
+          <p:nvPr/>
+        </p:nvSpPr>
+        <p:spPr>
+          <a:xfrm>
+            <a:off x="594360" y="4617720"/>
+            <a:ext cx="438912" cy="438912"/>
+          </a:xfrm>
+          <a:prstGeom prst="roundRect">
+            <a:avLst>
+              <a:gd name="adj" fmla="val 12000"/>
+            </a:avLst>
+          </a:prstGeom>
+          <a:solidFill>
+            <a:srgbClr val="095292"/>
+          </a:solidFill>
+          <a:ln>
+            <a:noFill/>
+          </a:ln>
+        </p:spPr>
+        <p:style>
+          <a:lnRef idx="1">
+            <a:schemeClr val="accent1"/>
+          </a:lnRef>
+          <a:fillRef idx="3">
+            <a:schemeClr val="accent1"/>
+          </a:fillRef>
+          <a:effectRef idx="2">
+            <a:schemeClr val="accent1"/>
+          </a:effectRef>
+          <a:fontRef idx="minor">
+            <a:schemeClr val="lt1"/>
+          </a:fontRef>
+        </p:style>
+        <p:txBody>
+          <a:bodyPr rtlCol="0" anchor="ctr"/>
+          <a:lstStyle/>
+          <a:p>
+            <a:pPr algn="ctr"/>
+          </a:p>
+        </p:txBody>
+      </p:sp>
+      <p:sp>
+        <p:nvSpPr>
+          <p:cNvPr id="19" name="TextBox 18"/>
+          <p:cNvSpPr txBox="1"/>
+          <p:nvPr/>
+        </p:nvSpPr>
+        <p:spPr>
+          <a:xfrm>
+            <a:off x="594360" y="4617720"/>
+            <a:ext cx="438912" cy="438912"/>
+          </a:xfrm>
+          <a:prstGeom prst="rect">
+            <a:avLst/>
+          </a:prstGeom>
+          <a:noFill/>
+        </p:spPr>
+        <p:txBody>
+          <a:bodyPr wrap="square" anchor="ctr"/>
+          <a:lstStyle/>
+          <a:p>
+            <a:pPr algn="ctr"/>
+            <a:r>
+              <a:rPr sz="1600" b="1" i="0">
+                <a:solidFill>
+                  <a:srgbClr val="FFFFFF"/>
+                </a:solidFill>
+                <a:latin typeface="Calibri"/>
+              </a:rPr>
+              <a:t>4</a:t>
+            </a:r>
+          </a:p>
+        </p:txBody>
+      </p:sp>
+      <p:sp>
+        <p:nvSpPr>
+          <p:cNvPr id="20" name="TextBox 19"/>
+          <p:cNvSpPr txBox="1"/>
+          <p:nvPr/>
+        </p:nvSpPr>
+        <p:spPr>
+          <a:xfrm>
+            <a:off x="1188720" y="4453128"/>
+            <a:ext cx="10271455" cy="786384"/>
+          </a:xfrm>
+          <a:prstGeom prst="rect">
+            <a:avLst/>
+          </a:prstGeom>
+          <a:noFill/>
+        </p:spPr>
+        <p:txBody>
+          <a:bodyPr wrap="square" anchor="ctr"/>
+          <a:lstStyle/>
+          <a:p>
+            <a:r>
+              <a:rPr sz="1500" b="1" i="0">
+                <a:solidFill>
+                  <a:srgbClr val="095292"/>
+                </a:solidFill>
+                <a:latin typeface="Calibri"/>
+              </a:rPr>
+              <a:t>Paso 4: agregue al menos un metodo propio del dominio por clase (por ejemplo +calcularEdad(): int en Mascota, +reprogramar(nuevaFecha: Date) en Cita) y descarte metodos tecnicos como conectarBD o guardarEnDisco.</a:t>
+            </a:r>
+          </a:p>
+        </p:txBody>
+      </p:sp>
+      <p:sp>
+        <p:nvSpPr>
+          <p:cNvPr id="21" name="Rounded Rectangle 20"/>
+          <p:cNvSpPr/>
+          <p:nvPr/>
+        </p:nvSpPr>
+        <p:spPr>
+          <a:xfrm>
+            <a:off x="457200" y="5404104"/>
+            <a:ext cx="11277295" cy="950976"/>
+          </a:xfrm>
+          <a:prstGeom prst="roundRect">
+            <a:avLst>
+              <a:gd name="adj" fmla="val 12000"/>
+            </a:avLst>
+          </a:prstGeom>
+          <a:solidFill>
+            <a:srgbClr val="F2F2F2"/>
+          </a:solidFill>
+          <a:ln>
+            <a:noFill/>
+          </a:ln>
+        </p:spPr>
+        <p:style>
+          <a:lnRef idx="1">
+            <a:schemeClr val="accent1"/>
+          </a:lnRef>
+          <a:fillRef idx="3">
+            <a:schemeClr val="accent1"/>
+          </a:fillRef>
+          <a:effectRef idx="2">
+            <a:schemeClr val="accent1"/>
+          </a:effectRef>
+          <a:fontRef idx="minor">
+            <a:schemeClr val="lt1"/>
+          </a:fontRef>
+        </p:style>
+        <p:txBody>
+          <a:bodyPr rtlCol="0" anchor="ctr"/>
+          <a:lstStyle/>
+          <a:p>
+            <a:pPr algn="ctr"/>
+          </a:p>
+        </p:txBody>
+      </p:sp>
+      <p:sp>
+        <p:nvSpPr>
+          <p:cNvPr id="22" name="Rounded Rectangle 21"/>
+          <p:cNvSpPr/>
+          <p:nvPr/>
+        </p:nvSpPr>
+        <p:spPr>
+          <a:xfrm>
+            <a:off x="594360" y="5660136"/>
+            <a:ext cx="438912" cy="438912"/>
+          </a:xfrm>
+          <a:prstGeom prst="roundRect">
+            <a:avLst>
+              <a:gd name="adj" fmla="val 12000"/>
+            </a:avLst>
+          </a:prstGeom>
+          <a:solidFill>
+            <a:srgbClr val="095292"/>
+          </a:solidFill>
+          <a:ln>
+            <a:noFill/>
+          </a:ln>
+        </p:spPr>
+        <p:style>
+          <a:lnRef idx="1">
+            <a:schemeClr val="accent1"/>
+          </a:lnRef>
+          <a:fillRef idx="3">
+            <a:schemeClr val="accent1"/>
+          </a:fillRef>
+          <a:effectRef idx="2">
+            <a:schemeClr val="accent1"/>
+          </a:effectRef>
+          <a:fontRef idx="minor">
+            <a:schemeClr val="lt1"/>
+          </a:fontRef>
+        </p:style>
+        <p:txBody>
+          <a:bodyPr rtlCol="0" anchor="ctr"/>
+          <a:lstStyle/>
+          <a:p>
+            <a:pPr algn="ctr"/>
+          </a:p>
+        </p:txBody>
+      </p:sp>
+      <p:sp>
+        <p:nvSpPr>
+          <p:cNvPr id="23" name="TextBox 22"/>
+          <p:cNvSpPr txBox="1"/>
+          <p:nvPr/>
+        </p:nvSpPr>
+        <p:spPr>
+          <a:xfrm>
+            <a:off x="594360" y="5660136"/>
+            <a:ext cx="438912" cy="438912"/>
+          </a:xfrm>
+          <a:prstGeom prst="rect">
+            <a:avLst/>
+          </a:prstGeom>
+          <a:noFill/>
+        </p:spPr>
+        <p:txBody>
+          <a:bodyPr wrap="square" anchor="ctr"/>
+          <a:lstStyle/>
+          <a:p>
+            <a:pPr algn="ctr"/>
+            <a:r>
+              <a:rPr sz="1600" b="1" i="0">
+                <a:solidFill>
+                  <a:srgbClr val="FFFFFF"/>
+                </a:solidFill>
+                <a:latin typeface="Calibri"/>
+              </a:rPr>
+              <a:t>5</a:t>
+            </a:r>
+          </a:p>
+        </p:txBody>
+      </p:sp>
+      <p:sp>
+        <p:nvSpPr>
+          <p:cNvPr id="24" name="TextBox 23"/>
+          <p:cNvSpPr txBox="1"/>
+          <p:nvPr/>
+        </p:nvSpPr>
+        <p:spPr>
+          <a:xfrm>
+            <a:off x="1188720" y="5495544"/>
+            <a:ext cx="10271455" cy="786384"/>
+          </a:xfrm>
+          <a:prstGeom prst="rect">
+            <a:avLst/>
+          </a:prstGeom>
+          <a:noFill/>
+        </p:spPr>
+        <p:txBody>
+          <a:bodyPr wrap="square" anchor="ctr"/>
+          <a:lstStyle/>
+          <a:p>
+            <a:r>
+              <a:rPr sz="1500" b="1" i="0">
+                <a:solidFill>
+                  <a:srgbClr val="095292"/>
+                </a:solidFill>
+                <a:latin typeface="Calibri"/>
+              </a:rPr>
+              <a:t>Paso 5: trace las cuatro asociaciones con nombre de relacion y multiplicidad en ambos extremos, leala cada una en voz alta como frase completa, exporte a PNG y .drawio y suba ambos archivos a la plataforma del curso.</a:t>
+            </a:r>
+          </a:p>
+        </p:txBody>
+      </p:sp>
+      <p:sp>
+        <p:nvSpPr>
+          <p:cNvPr id="25" name="TextBox 24"/>
+          <p:cNvSpPr txBox="1"/>
+          <p:nvPr/>
+        </p:nvSpPr>
+        <p:spPr>
+          <a:xfrm>
+            <a:off x="11185855" y="6473952"/>
+            <a:ext cx="640080" cy="274320"/>
+          </a:xfrm>
+          <a:prstGeom prst="rect">
+            <a:avLst/>
+          </a:prstGeom>
+          <a:noFill/>
+        </p:spPr>
+        <p:txBody>
+          <a:bodyPr wrap="square">
+            <a:spAutoFit/>
+          </a:bodyPr>
+          <a:lstStyle/>
+          <a:p>
+            <a:pPr algn="r"/>
+            <a:r>
+              <a:rPr sz="1100" b="0" i="0">
+                <a:solidFill>
+                  <a:srgbClr val="666666"/>
+                </a:solidFill>
+                <a:latin typeface="Calibri"/>
+              </a:rPr>
+              <a:t>15</a:t>
+            </a:r>
+          </a:p>
+        </p:txBody>
+      </p:sp>
+    </p:spTree>
+  </p:cSld>
+  <p:clrMapOvr>
+    <a:masterClrMapping/>
+  </p:clrMapOvr>
+</p:sld>
+</file>
+
+<file path=ppt/slides/slide16.xml><?xml version="1.0" encoding="utf-8"?>
+<p:sld xmlns:a="http://schemas.openxmlformats.org/drawingml/2006/main" xmlns:p="http://schemas.openxmlformats.org/presentationml/2006/main" xmlns:r="http://schemas.openxmlformats.org/officeDocument/2006/relationships">
+  <p:cSld>
+    <p:bg>
+      <p:bgPr>
+        <a:solidFill>
+          <a:srgbClr val="FFFFFF"/>
+        </a:solidFill>
+        <a:effectLst/>
+      </p:bgPr>
+    </p:bg>
+    <p:spTree>
+      <p:nvGrpSpPr>
+        <p:cNvPr id="1" name=""/>
+        <p:cNvGrpSpPr/>
+        <p:nvPr/>
+      </p:nvGrpSpPr>
+      <p:grpSpPr/>
+      <p:sp>
+        <p:nvSpPr>
+          <p:cNvPr id="2" name="Rectangle 1"/>
+          <p:cNvSpPr/>
+          <p:nvPr/>
+        </p:nvSpPr>
+        <p:spPr>
+          <a:xfrm>
+            <a:off x="0" y="0"/>
+            <a:ext cx="12191695" cy="960120"/>
+          </a:xfrm>
+          <a:prstGeom prst="rect">
+            <a:avLst/>
+          </a:prstGeom>
+          <a:solidFill>
+            <a:srgbClr val="095292"/>
+          </a:solidFill>
+          <a:ln>
+            <a:noFill/>
+          </a:ln>
+        </p:spPr>
+        <p:style>
+          <a:lnRef idx="1">
+            <a:schemeClr val="accent1"/>
+          </a:lnRef>
+          <a:fillRef idx="3">
+            <a:schemeClr val="accent1"/>
+          </a:fillRef>
+          <a:effectRef idx="2">
+            <a:schemeClr val="accent1"/>
+          </a:effectRef>
+          <a:fontRef idx="minor">
+            <a:schemeClr val="lt1"/>
+          </a:fontRef>
+        </p:style>
+        <p:txBody>
+          <a:bodyPr rtlCol="0" anchor="ctr"/>
+          <a:lstStyle/>
+          <a:p>
+            <a:pPr algn="ctr"/>
+          </a:p>
+        </p:txBody>
+      </p:sp>
+      <p:sp>
+        <p:nvSpPr>
+          <p:cNvPr id="3" name="Rectangle 2"/>
+          <p:cNvSpPr/>
+          <p:nvPr/>
+        </p:nvSpPr>
+        <p:spPr>
+          <a:xfrm>
+            <a:off x="0" y="960120"/>
+            <a:ext cx="12191695" cy="41148"/>
+          </a:xfrm>
+          <a:prstGeom prst="rect">
+            <a:avLst/>
+          </a:prstGeom>
+          <a:solidFill>
+            <a:srgbClr val="FFD000"/>
+          </a:solidFill>
+          <a:ln>
+            <a:noFill/>
+          </a:ln>
+        </p:spPr>
+        <p:style>
+          <a:lnRef idx="1">
+            <a:schemeClr val="accent1"/>
+          </a:lnRef>
+          <a:fillRef idx="3">
+            <a:schemeClr val="accent1"/>
+          </a:fillRef>
+          <a:effectRef idx="2">
+            <a:schemeClr val="accent1"/>
+          </a:effectRef>
+          <a:fontRef idx="minor">
+            <a:schemeClr val="lt1"/>
+          </a:fontRef>
+        </p:style>
+        <p:txBody>
+          <a:bodyPr rtlCol="0" anchor="ctr"/>
+          <a:lstStyle/>
+          <a:p>
+            <a:pPr algn="ctr"/>
+          </a:p>
+        </p:txBody>
+      </p:sp>
+      <p:sp>
+        <p:nvSpPr>
+          <p:cNvPr id="4" name="TextBox 3"/>
+          <p:cNvSpPr txBox="1"/>
+          <p:nvPr/>
+        </p:nvSpPr>
+        <p:spPr>
+          <a:xfrm>
+            <a:off x="457200" y="164592"/>
+            <a:ext cx="11277295" cy="502920"/>
+          </a:xfrm>
+          <a:prstGeom prst="rect">
+            <a:avLst/>
+          </a:prstGeom>
+          <a:noFill/>
+        </p:spPr>
+        <p:txBody>
+          <a:bodyPr wrap="square">
+            <a:spAutoFit/>
+          </a:bodyPr>
+          <a:lstStyle/>
+          <a:p>
+            <a:r>
+              <a:rPr sz="2600" b="1" i="0">
+                <a:solidFill>
+                  <a:srgbClr val="FFFFFF"/>
+                </a:solidFill>
+                <a:latin typeface="Calibri"/>
+              </a:rPr>
+              <a:t>Antes de entregar — autochequeo</a:t>
+            </a:r>
+          </a:p>
+        </p:txBody>
+      </p:sp>
+      <p:sp>
+        <p:nvSpPr>
+          <p:cNvPr id="5" name="Rounded Rectangle 4"/>
+          <p:cNvSpPr/>
+          <p:nvPr/>
+        </p:nvSpPr>
+        <p:spPr>
+          <a:xfrm>
+            <a:off x="457200" y="1261872"/>
+            <a:ext cx="11277295" cy="566928"/>
+          </a:xfrm>
+          <a:prstGeom prst="roundRect">
+            <a:avLst>
+              <a:gd name="adj" fmla="val 12000"/>
+            </a:avLst>
+          </a:prstGeom>
+          <a:solidFill>
+            <a:srgbClr val="F2F2F2"/>
+          </a:solidFill>
+          <a:ln>
+            <a:noFill/>
+          </a:ln>
+        </p:spPr>
+        <p:style>
+          <a:lnRef idx="1">
+            <a:schemeClr val="accent1"/>
+          </a:lnRef>
+          <a:fillRef idx="3">
+            <a:schemeClr val="accent1"/>
+          </a:fillRef>
+          <a:effectRef idx="2">
+            <a:schemeClr val="accent1"/>
+          </a:effectRef>
+          <a:fontRef idx="minor">
+            <a:schemeClr val="lt1"/>
+          </a:fontRef>
+        </p:style>
+        <p:txBody>
+          <a:bodyPr rtlCol="0" anchor="ctr"/>
+          <a:lstStyle/>
+          <a:p>
+            <a:pPr algn="ctr"/>
+          </a:p>
+        </p:txBody>
+      </p:sp>
+      <p:sp>
+        <p:nvSpPr>
+          <p:cNvPr id="6" name="Rectangle 5"/>
+          <p:cNvSpPr/>
+          <p:nvPr/>
+        </p:nvSpPr>
+        <p:spPr>
+          <a:xfrm>
+            <a:off x="640080" y="1408175"/>
+            <a:ext cx="274320" cy="274320"/>
+          </a:xfrm>
+          <a:prstGeom prst="rect">
+            <a:avLst/>
+          </a:prstGeom>
+          <a:solidFill>
+            <a:srgbClr val="FFFFFF"/>
+          </a:solidFill>
+          <a:ln>
+            <a:solidFill>
+              <a:srgbClr val="333333"/>
+            </a:solidFill>
+          </a:ln>
+        </p:spPr>
+        <p:style>
+          <a:lnRef idx="1">
+            <a:schemeClr val="accent1"/>
+          </a:lnRef>
+          <a:fillRef idx="3">
+            <a:schemeClr val="accent1"/>
+          </a:fillRef>
+          <a:effectRef idx="2">
+            <a:schemeClr val="accent1"/>
+          </a:effectRef>
+          <a:fontRef idx="minor">
+            <a:schemeClr val="lt1"/>
+          </a:fontRef>
+        </p:style>
+        <p:txBody>
+          <a:bodyPr rtlCol="0" anchor="ctr"/>
+          <a:lstStyle/>
+          <a:p>
+            <a:pPr algn="ctr"/>
+          </a:p>
+        </p:txBody>
+      </p:sp>
+      <p:sp>
+        <p:nvSpPr>
+          <p:cNvPr id="7" name="Rectangle 6"/>
+          <p:cNvSpPr/>
+          <p:nvPr/>
+        </p:nvSpPr>
+        <p:spPr>
+          <a:xfrm>
+            <a:off x="640080" y="1408175"/>
+            <a:ext cx="73152" cy="274320"/>
+          </a:xfrm>
+          <a:prstGeom prst="rect">
+            <a:avLst/>
+          </a:prstGeom>
+          <a:solidFill>
+            <a:srgbClr val="269CCB"/>
+          </a:solidFill>
+          <a:ln>
+            <a:noFill/>
+          </a:ln>
+        </p:spPr>
+        <p:style>
+          <a:lnRef idx="1">
+            <a:schemeClr val="accent1"/>
+          </a:lnRef>
+          <a:fillRef idx="3">
+            <a:schemeClr val="accent1"/>
+          </a:fillRef>
+          <a:effectRef idx="2">
+            <a:schemeClr val="accent1"/>
+          </a:effectRef>
+          <a:fontRef idx="minor">
+            <a:schemeClr val="lt1"/>
+          </a:fontRef>
+        </p:style>
+        <p:txBody>
+          <a:bodyPr rtlCol="0" anchor="ctr"/>
+          <a:lstStyle/>
+          <a:p>
+            <a:pPr algn="ctr"/>
+          </a:p>
+        </p:txBody>
+      </p:sp>
+      <p:sp>
+        <p:nvSpPr>
+          <p:cNvPr id="8" name="TextBox 7"/>
+          <p:cNvSpPr txBox="1"/>
+          <p:nvPr/>
+        </p:nvSpPr>
+        <p:spPr>
+          <a:xfrm>
+            <a:off x="1097280" y="1353312"/>
+            <a:ext cx="10362895" cy="402336"/>
+          </a:xfrm>
+          <a:prstGeom prst="rect">
+            <a:avLst/>
+          </a:prstGeom>
+          <a:noFill/>
+        </p:spPr>
+        <p:txBody>
+          <a:bodyPr wrap="square" anchor="ctr"/>
+          <a:lstStyle/>
+          <a:p>
+            <a:r>
+              <a:rPr sz="1500" b="0" i="0">
+                <a:solidFill>
+                  <a:srgbClr val="333333"/>
+                </a:solidFill>
+                <a:latin typeface="Calibri"/>
+              </a:rPr>
+              <a:t>Si leo esta relacion en voz alta con sus dos multiplicidades, la frase resultante es cierta en la clinica Huellitas o suena absurda?</a:t>
+            </a:r>
+          </a:p>
+        </p:txBody>
+      </p:sp>
+      <p:sp>
+        <p:nvSpPr>
+          <p:cNvPr id="9" name="Rounded Rectangle 8"/>
+          <p:cNvSpPr/>
+          <p:nvPr/>
+        </p:nvSpPr>
+        <p:spPr>
+          <a:xfrm>
+            <a:off x="457200" y="1938528"/>
+            <a:ext cx="11277295" cy="566928"/>
+          </a:xfrm>
+          <a:prstGeom prst="roundRect">
+            <a:avLst>
+              <a:gd name="adj" fmla="val 12000"/>
+            </a:avLst>
+          </a:prstGeom>
+          <a:solidFill>
+            <a:srgbClr val="F2F2F2"/>
+          </a:solidFill>
+          <a:ln>
+            <a:noFill/>
+          </a:ln>
+        </p:spPr>
+        <p:style>
+          <a:lnRef idx="1">
+            <a:schemeClr val="accent1"/>
+          </a:lnRef>
+          <a:fillRef idx="3">
+            <a:schemeClr val="accent1"/>
+          </a:fillRef>
+          <a:effectRef idx="2">
+            <a:schemeClr val="accent1"/>
+          </a:effectRef>
+          <a:fontRef idx="minor">
+            <a:schemeClr val="lt1"/>
+          </a:fontRef>
+        </p:style>
+        <p:txBody>
+          <a:bodyPr rtlCol="0" anchor="ctr"/>
+          <a:lstStyle/>
+          <a:p>
+            <a:pPr algn="ctr"/>
+          </a:p>
+        </p:txBody>
+      </p:sp>
+      <p:sp>
+        <p:nvSpPr>
+          <p:cNvPr id="10" name="Rectangle 9"/>
+          <p:cNvSpPr/>
+          <p:nvPr/>
+        </p:nvSpPr>
+        <p:spPr>
+          <a:xfrm>
+            <a:off x="640080" y="2084832"/>
+            <a:ext cx="274320" cy="274320"/>
+          </a:xfrm>
+          <a:prstGeom prst="rect">
+            <a:avLst/>
+          </a:prstGeom>
+          <a:solidFill>
+            <a:srgbClr val="FFFFFF"/>
+          </a:solidFill>
+          <a:ln>
+            <a:solidFill>
+              <a:srgbClr val="333333"/>
+            </a:solidFill>
+          </a:ln>
+        </p:spPr>
+        <p:style>
+          <a:lnRef idx="1">
+            <a:schemeClr val="accent1"/>
+          </a:lnRef>
+          <a:fillRef idx="3">
+            <a:schemeClr val="accent1"/>
+          </a:fillRef>
+          <a:effectRef idx="2">
+            <a:schemeClr val="accent1"/>
+          </a:effectRef>
+          <a:fontRef idx="minor">
+            <a:schemeClr val="lt1"/>
+          </a:fontRef>
+        </p:style>
+        <p:txBody>
+          <a:bodyPr rtlCol="0" anchor="ctr"/>
+          <a:lstStyle/>
+          <a:p>
+            <a:pPr algn="ctr"/>
+          </a:p>
+        </p:txBody>
+      </p:sp>
+      <p:sp>
+        <p:nvSpPr>
+          <p:cNvPr id="11" name="Rectangle 10"/>
+          <p:cNvSpPr/>
+          <p:nvPr/>
+        </p:nvSpPr>
+        <p:spPr>
+          <a:xfrm>
+            <a:off x="640080" y="2084832"/>
+            <a:ext cx="73152" cy="274320"/>
+          </a:xfrm>
+          <a:prstGeom prst="rect">
+            <a:avLst/>
+          </a:prstGeom>
+          <a:solidFill>
+            <a:srgbClr val="269CCB"/>
+          </a:solidFill>
+          <a:ln>
+            <a:noFill/>
+          </a:ln>
+        </p:spPr>
+        <p:style>
+          <a:lnRef idx="1">
+            <a:schemeClr val="accent1"/>
+          </a:lnRef>
+          <a:fillRef idx="3">
+            <a:schemeClr val="accent1"/>
+          </a:fillRef>
+          <a:effectRef idx="2">
+            <a:schemeClr val="accent1"/>
+          </a:effectRef>
+          <a:fontRef idx="minor">
+            <a:schemeClr val="lt1"/>
+          </a:fontRef>
+        </p:style>
+        <p:txBody>
+          <a:bodyPr rtlCol="0" anchor="ctr"/>
+          <a:lstStyle/>
+          <a:p>
+            <a:pPr algn="ctr"/>
+          </a:p>
+        </p:txBody>
+      </p:sp>
+      <p:sp>
+        <p:nvSpPr>
+          <p:cNvPr id="12" name="TextBox 11"/>
+          <p:cNvSpPr txBox="1"/>
+          <p:nvPr/>
+        </p:nvSpPr>
+        <p:spPr>
+          <a:xfrm>
+            <a:off x="1097280" y="2029968"/>
+            <a:ext cx="10362895" cy="402336"/>
+          </a:xfrm>
+          <a:prstGeom prst="rect">
+            <a:avLst/>
+          </a:prstGeom>
+          <a:noFill/>
+        </p:spPr>
+        <p:txBody>
+          <a:bodyPr wrap="square" anchor="ctr"/>
+          <a:lstStyle/>
+          <a:p>
+            <a:r>
+              <a:rPr sz="1500" b="0" i="0">
+                <a:solidFill>
+                  <a:srgbClr val="333333"/>
+                </a:solidFill>
+                <a:latin typeface="Calibri"/>
+              </a:rPr>
+              <a:t>Este atributo pertenece de verdad al concepto donde lo puse, o lo puse ahi solo porque en la pantalla aparecen juntos?</a:t>
+            </a:r>
+          </a:p>
+        </p:txBody>
+      </p:sp>
+      <p:sp>
+        <p:nvSpPr>
+          <p:cNvPr id="13" name="Rounded Rectangle 12"/>
+          <p:cNvSpPr/>
+          <p:nvPr/>
+        </p:nvSpPr>
+        <p:spPr>
+          <a:xfrm>
+            <a:off x="457200" y="2615184"/>
+            <a:ext cx="11277295" cy="566928"/>
+          </a:xfrm>
+          <a:prstGeom prst="roundRect">
+            <a:avLst>
+              <a:gd name="adj" fmla="val 12000"/>
+            </a:avLst>
+          </a:prstGeom>
+          <a:solidFill>
+            <a:srgbClr val="F2F2F2"/>
+          </a:solidFill>
+          <a:ln>
+            <a:noFill/>
+          </a:ln>
+        </p:spPr>
+        <p:style>
+          <a:lnRef idx="1">
+            <a:schemeClr val="accent1"/>
+          </a:lnRef>
+          <a:fillRef idx="3">
+            <a:schemeClr val="accent1"/>
+          </a:fillRef>
+          <a:effectRef idx="2">
+            <a:schemeClr val="accent1"/>
+          </a:effectRef>
+          <a:fontRef idx="minor">
+            <a:schemeClr val="lt1"/>
+          </a:fontRef>
+        </p:style>
+        <p:txBody>
+          <a:bodyPr rtlCol="0" anchor="ctr"/>
+          <a:lstStyle/>
+          <a:p>
+            <a:pPr algn="ctr"/>
+          </a:p>
+        </p:txBody>
+      </p:sp>
+      <p:sp>
+        <p:nvSpPr>
+          <p:cNvPr id="14" name="Rectangle 13"/>
+          <p:cNvSpPr/>
+          <p:nvPr/>
+        </p:nvSpPr>
+        <p:spPr>
+          <a:xfrm>
+            <a:off x="640080" y="2761488"/>
+            <a:ext cx="274320" cy="274320"/>
+          </a:xfrm>
+          <a:prstGeom prst="rect">
+            <a:avLst/>
+          </a:prstGeom>
+          <a:solidFill>
+            <a:srgbClr val="FFFFFF"/>
+          </a:solidFill>
+          <a:ln>
+            <a:solidFill>
+              <a:srgbClr val="333333"/>
+            </a:solidFill>
+          </a:ln>
+        </p:spPr>
+        <p:style>
+          <a:lnRef idx="1">
+            <a:schemeClr val="accent1"/>
+          </a:lnRef>
+          <a:fillRef idx="3">
+            <a:schemeClr val="accent1"/>
+          </a:fillRef>
+          <a:effectRef idx="2">
+            <a:schemeClr val="accent1"/>
+          </a:effectRef>
+          <a:fontRef idx="minor">
+            <a:schemeClr val="lt1"/>
+          </a:fontRef>
+        </p:style>
+        <p:txBody>
+          <a:bodyPr rtlCol="0" anchor="ctr"/>
+          <a:lstStyle/>
+          <a:p>
+            <a:pPr algn="ctr"/>
+          </a:p>
+        </p:txBody>
+      </p:sp>
+      <p:sp>
+        <p:nvSpPr>
+          <p:cNvPr id="15" name="Rectangle 14"/>
+          <p:cNvSpPr/>
+          <p:nvPr/>
+        </p:nvSpPr>
+        <p:spPr>
+          <a:xfrm>
+            <a:off x="640080" y="2761488"/>
+            <a:ext cx="73152" cy="274320"/>
+          </a:xfrm>
+          <a:prstGeom prst="rect">
+            <a:avLst/>
+          </a:prstGeom>
+          <a:solidFill>
+            <a:srgbClr val="269CCB"/>
+          </a:solidFill>
+          <a:ln>
+            <a:noFill/>
+          </a:ln>
+        </p:spPr>
+        <p:style>
+          <a:lnRef idx="1">
+            <a:schemeClr val="accent1"/>
+          </a:lnRef>
+          <a:fillRef idx="3">
+            <a:schemeClr val="accent1"/>
+          </a:fillRef>
+          <a:effectRef idx="2">
+            <a:schemeClr val="accent1"/>
+          </a:effectRef>
+          <a:fontRef idx="minor">
+            <a:schemeClr val="lt1"/>
+          </a:fontRef>
+        </p:style>
+        <p:txBody>
+          <a:bodyPr rtlCol="0" anchor="ctr"/>
+          <a:lstStyle/>
+          <a:p>
+            <a:pPr algn="ctr"/>
+          </a:p>
+        </p:txBody>
+      </p:sp>
+      <p:sp>
+        <p:nvSpPr>
+          <p:cNvPr id="16" name="TextBox 15"/>
+          <p:cNvSpPr txBox="1"/>
+          <p:nvPr/>
+        </p:nvSpPr>
+        <p:spPr>
+          <a:xfrm>
+            <a:off x="1097280" y="2706624"/>
+            <a:ext cx="10362895" cy="402336"/>
+          </a:xfrm>
+          <a:prstGeom prst="rect">
+            <a:avLst/>
+          </a:prstGeom>
+          <a:noFill/>
+        </p:spPr>
+        <p:txBody>
+          <a:bodyPr wrap="square" anchor="ctr"/>
+          <a:lstStyle/>
+          <a:p>
+            <a:r>
+              <a:rPr sz="1500" b="0" i="0">
+                <a:solidFill>
+                  <a:srgbClr val="333333"/>
+                </a:solidFill>
+                <a:latin typeface="Calibri"/>
+              </a:rPr>
+              <a:t>Esta caja es un concepto del negocio del que habla el veterinario, o es una pantalla, un reporte o algo tecnico que se me colo?</a:t>
+            </a:r>
+          </a:p>
+        </p:txBody>
+      </p:sp>
+      <p:sp>
+        <p:nvSpPr>
+          <p:cNvPr id="17" name="TextBox 16"/>
+          <p:cNvSpPr txBox="1"/>
+          <p:nvPr/>
+        </p:nvSpPr>
+        <p:spPr>
+          <a:xfrm>
+            <a:off x="11185855" y="6473952"/>
+            <a:ext cx="640080" cy="274320"/>
+          </a:xfrm>
+          <a:prstGeom prst="rect">
+            <a:avLst/>
+          </a:prstGeom>
+          <a:noFill/>
+        </p:spPr>
+        <p:txBody>
+          <a:bodyPr wrap="square">
+            <a:spAutoFit/>
+          </a:bodyPr>
+          <a:lstStyle/>
+          <a:p>
+            <a:pPr algn="r"/>
+            <a:r>
+              <a:rPr sz="1100" b="0" i="0">
+                <a:solidFill>
+                  <a:srgbClr val="666666"/>
+                </a:solidFill>
+                <a:latin typeface="Calibri"/>
+              </a:rPr>
+              <a:t>16</a:t>
+            </a:r>
+          </a:p>
+        </p:txBody>
+      </p:sp>
+    </p:spTree>
+  </p:cSld>
+  <p:clrMapOvr>
+    <a:masterClrMapping/>
+  </p:clrMapOvr>
+</p:sld>
+</file>
+
+<file path=ppt/slides/slide17.xml><?xml version="1.0" encoding="utf-8"?>
+<p:sld xmlns:a="http://schemas.openxmlformats.org/drawingml/2006/main" xmlns:p="http://schemas.openxmlformats.org/presentationml/2006/main" xmlns:r="http://schemas.openxmlformats.org/officeDocument/2006/relationships">
+  <p:cSld>
+    <p:bg>
+      <p:bgPr>
+        <a:solidFill>
+          <a:srgbClr val="FFFFFF"/>
+        </a:solidFill>
+        <a:effectLst/>
+      </p:bgPr>
+    </p:bg>
+    <p:spTree>
+      <p:nvGrpSpPr>
+        <p:cNvPr id="1" name=""/>
+        <p:cNvGrpSpPr/>
+        <p:nvPr/>
+      </p:nvGrpSpPr>
+      <p:grpSpPr/>
+      <p:sp>
+        <p:nvSpPr>
+          <p:cNvPr id="2" name="Rectangle 1"/>
+          <p:cNvSpPr/>
+          <p:nvPr/>
+        </p:nvSpPr>
+        <p:spPr>
+          <a:xfrm>
+            <a:off x="0" y="0"/>
+            <a:ext cx="12191695" cy="960120"/>
+          </a:xfrm>
+          <a:prstGeom prst="rect">
+            <a:avLst/>
+          </a:prstGeom>
+          <a:solidFill>
+            <a:srgbClr val="095292"/>
+          </a:solidFill>
+          <a:ln>
+            <a:noFill/>
+          </a:ln>
+        </p:spPr>
+        <p:style>
+          <a:lnRef idx="1">
+            <a:schemeClr val="accent1"/>
+          </a:lnRef>
+          <a:fillRef idx="3">
+            <a:schemeClr val="accent1"/>
+          </a:fillRef>
+          <a:effectRef idx="2">
+            <a:schemeClr val="accent1"/>
+          </a:effectRef>
+          <a:fontRef idx="minor">
+            <a:schemeClr val="lt1"/>
+          </a:fontRef>
+        </p:style>
+        <p:txBody>
+          <a:bodyPr rtlCol="0" anchor="ctr"/>
+          <a:lstStyle/>
+          <a:p>
+            <a:pPr algn="ctr"/>
+          </a:p>
+        </p:txBody>
+      </p:sp>
+      <p:sp>
+        <p:nvSpPr>
+          <p:cNvPr id="3" name="Rectangle 2"/>
+          <p:cNvSpPr/>
+          <p:nvPr/>
+        </p:nvSpPr>
+        <p:spPr>
+          <a:xfrm>
+            <a:off x="0" y="960120"/>
+            <a:ext cx="12191695" cy="41148"/>
+          </a:xfrm>
+          <a:prstGeom prst="rect">
+            <a:avLst/>
+          </a:prstGeom>
+          <a:solidFill>
+            <a:srgbClr val="FFD000"/>
+          </a:solidFill>
+          <a:ln>
+            <a:noFill/>
+          </a:ln>
+        </p:spPr>
+        <p:style>
+          <a:lnRef idx="1">
+            <a:schemeClr val="accent1"/>
+          </a:lnRef>
+          <a:fillRef idx="3">
+            <a:schemeClr val="accent1"/>
+          </a:fillRef>
+          <a:effectRef idx="2">
+            <a:schemeClr val="accent1"/>
+          </a:effectRef>
+          <a:fontRef idx="minor">
+            <a:schemeClr val="lt1"/>
+          </a:fontRef>
+        </p:style>
+        <p:txBody>
+          <a:bodyPr rtlCol="0" anchor="ctr"/>
+          <a:lstStyle/>
+          <a:p>
+            <a:pPr algn="ctr"/>
+          </a:p>
+        </p:txBody>
+      </p:sp>
+      <p:sp>
+        <p:nvSpPr>
+          <p:cNvPr id="4" name="TextBox 3"/>
+          <p:cNvSpPr txBox="1"/>
+          <p:nvPr/>
+        </p:nvSpPr>
+        <p:spPr>
+          <a:xfrm>
+            <a:off x="457200" y="164592"/>
+            <a:ext cx="11277295" cy="502920"/>
+          </a:xfrm>
+          <a:prstGeom prst="rect">
+            <a:avLst/>
+          </a:prstGeom>
+          <a:noFill/>
+        </p:spPr>
+        <p:txBody>
+          <a:bodyPr wrap="square">
+            <a:spAutoFit/>
+          </a:bodyPr>
+          <a:lstStyle/>
+          <a:p>
+            <a:r>
+              <a:rPr sz="2600" b="1" i="0">
+                <a:solidFill>
+                  <a:srgbClr val="FFFFFF"/>
+                </a:solidFill>
+                <a:latin typeface="Calibri"/>
+              </a:rPr>
+              <a:t>Criterios de exito / entregable</a:t>
+            </a:r>
+          </a:p>
+        </p:txBody>
+      </p:sp>
+      <p:sp>
+        <p:nvSpPr>
+          <p:cNvPr id="5" name="TextBox 4"/>
+          <p:cNvSpPr txBox="1"/>
+          <p:nvPr/>
+        </p:nvSpPr>
+        <p:spPr>
+          <a:xfrm>
+            <a:off x="457200" y="1170432"/>
+            <a:ext cx="11277295" cy="5230368"/>
+          </a:xfrm>
+          <a:prstGeom prst="rect">
+            <a:avLst/>
+          </a:prstGeom>
+          <a:noFill/>
+        </p:spPr>
+        <p:txBody>
+          <a:bodyPr wrap="square">
+            <a:spAutoFit/>
+          </a:bodyPr>
+          <a:lstStyle/>
+          <a:p>
+            <a:pPr>
+              <a:spcAft>
+                <a:spcPts val="800"/>
+              </a:spcAft>
+            </a:pPr>
+            <a:r>
+              <a:rPr sz="2000" b="0" i="0">
+                <a:solidFill>
+                  <a:srgbClr val="333333"/>
+                </a:solidFill>
+                <a:latin typeface="Calibri"/>
+              </a:rPr>
+              <a:t>–   </a:t>
+            </a:r>
+            <a:r>
+              <a:rPr sz="2000" b="1" i="0">
+                <a:solidFill>
+                  <a:srgbClr val="333333"/>
+                </a:solidFill>
+                <a:latin typeface="Calibri"/>
+              </a:rPr>
+              <a:t>Entregable:</a:t>
+            </a:r>
+            <a:r>
+              <a:rPr sz="2000" b="0" i="0">
+                <a:solidFill>
+                  <a:srgbClr val="333333"/>
+                </a:solidFill>
+                <a:latin typeface="Calibri"/>
+              </a:rPr>
+              <a:t> Diagrama de clases de VetCare hecho en draw.io, exportado a PNG y al archivo .drawio, con 5 clases, atributos tipados, metodos propios y 4 asociaciones con multiplicidad y nombre de rol, subido a la plataforma del curso.</a:t>
+            </a:r>
+          </a:p>
+          <a:p>
+            <a:pPr>
+              <a:spcAft>
+                <a:spcPts val="800"/>
+              </a:spcAft>
+            </a:pPr>
+            <a:r>
+              <a:rPr sz="2000" b="0" i="0">
+                <a:solidFill>
+                  <a:srgbClr val="333333"/>
+                </a:solidFill>
+                <a:latin typeface="Calibri"/>
+              </a:rPr>
+              <a:t>–   </a:t>
+            </a:r>
+            <a:r>
+              <a:rPr sz="2000" b="1" i="0">
+                <a:solidFill>
+                  <a:srgbClr val="333333"/>
+                </a:solidFill>
+                <a:latin typeface="Calibri"/>
+              </a:rPr>
+              <a:t>Exito:</a:t>
+            </a:r>
+            <a:r>
+              <a:rPr sz="2000" b="0" i="0">
+                <a:solidFill>
+                  <a:srgbClr val="333333"/>
+                </a:solidFill>
+                <a:latin typeface="Calibri"/>
+              </a:rPr>
+              <a:t> El diagrama tiene las 5 clases del dominio en singular, con mayuscula inicial y sin clases tecnicas (nada de DAO, Conexion, Login o Menu).</a:t>
+            </a:r>
+          </a:p>
+          <a:p>
+            <a:pPr>
+              <a:spcAft>
+                <a:spcPts val="800"/>
+              </a:spcAft>
+            </a:pPr>
+            <a:r>
+              <a:rPr sz="2000" b="0" i="0">
+                <a:solidFill>
+                  <a:srgbClr val="333333"/>
+                </a:solidFill>
+                <a:latin typeface="Calibri"/>
+              </a:rPr>
+              <a:t>–   </a:t>
+            </a:r>
+            <a:r>
+              <a:rPr sz="2000" b="1" i="0">
+                <a:solidFill>
+                  <a:srgbClr val="333333"/>
+                </a:solidFill>
+                <a:latin typeface="Calibri"/>
+              </a:rPr>
+              <a:t>Exito:</a:t>
+            </a:r>
+            <a:r>
+              <a:rPr sz="2000" b="0" i="0">
+                <a:solidFill>
+                  <a:srgbClr val="333333"/>
+                </a:solidFill>
+                <a:latin typeface="Calibri"/>
+              </a:rPr>
+              <a:t> Cada clase tiene minimo 4 atributos con visibilidad y tipo, y ningun atributo aparece duplicado en dos clases.</a:t>
+            </a:r>
+          </a:p>
+          <a:p>
+            <a:pPr>
+              <a:spcAft>
+                <a:spcPts val="800"/>
+              </a:spcAft>
+            </a:pPr>
+            <a:r>
+              <a:rPr sz="2000" b="0" i="0">
+                <a:solidFill>
+                  <a:srgbClr val="333333"/>
+                </a:solidFill>
+                <a:latin typeface="Calibri"/>
+              </a:rPr>
+              <a:t>–   </a:t>
+            </a:r>
+            <a:r>
+              <a:rPr sz="2000" b="1" i="0">
+                <a:solidFill>
+                  <a:srgbClr val="333333"/>
+                </a:solidFill>
+                <a:latin typeface="Calibri"/>
+              </a:rPr>
+              <a:t>Exito:</a:t>
+            </a:r>
+            <a:r>
+              <a:rPr sz="2000" b="0" i="0">
+                <a:solidFill>
+                  <a:srgbClr val="333333"/>
+                </a:solidFill>
+                <a:latin typeface="Calibri"/>
+              </a:rPr>
+              <a:t> Las 4 asociaciones tienen nombre de relacion y multiplicidad explicita en ambos extremos.</a:t>
+            </a:r>
+          </a:p>
+          <a:p>
+            <a:pPr>
+              <a:spcAft>
+                <a:spcPts val="800"/>
+              </a:spcAft>
+            </a:pPr>
+            <a:r>
+              <a:rPr sz="2000" b="0" i="0">
+                <a:solidFill>
+                  <a:srgbClr val="333333"/>
+                </a:solidFill>
+                <a:latin typeface="Calibri"/>
+              </a:rPr>
+              <a:t>–   </a:t>
+            </a:r>
+            <a:r>
+              <a:rPr sz="2000" b="1" i="0">
+                <a:solidFill>
+                  <a:srgbClr val="333333"/>
+                </a:solidFill>
+                <a:latin typeface="Calibri"/>
+              </a:rPr>
+              <a:t>Exito:</a:t>
+            </a:r>
+            <a:r>
+              <a:rPr sz="2000" b="0" i="0">
+                <a:solidFill>
+                  <a:srgbClr val="333333"/>
+                </a:solidFill>
+                <a:latin typeface="Calibri"/>
+              </a:rPr>
+              <a:t> Cada relacion se puede leer en voz alta como una frase verdadera del negocio de la clinica Huellitas, y cada clase se rastrea a un RF o a una historia.</a:t>
+            </a:r>
+          </a:p>
+          <a:p>
+            <a:pPr>
+              <a:spcAft>
+                <a:spcPts val="800"/>
+              </a:spcAft>
+            </a:pPr>
+            <a:r>
+              <a:rPr sz="2000" b="0" i="0">
+                <a:solidFill>
+                  <a:srgbClr val="333333"/>
+                </a:solidFill>
+                <a:latin typeface="Calibri"/>
+              </a:rPr>
+              <a:t>–   </a:t>
+            </a:r>
+            <a:r>
+              <a:rPr sz="2000" b="1" i="0">
+                <a:solidFill>
+                  <a:srgbClr val="333333"/>
+                </a:solidFill>
+                <a:latin typeface="Calibri"/>
+              </a:rPr>
+              <a:t>Entrega en la plataforma del curso</a:t>
+            </a:r>
+            <a:r>
+              <a:rPr sz="2000" b="0" i="0">
+                <a:solidFill>
+                  <a:srgbClr val="333333"/>
+                </a:solidFill>
+                <a:latin typeface="Calibri"/>
+              </a:rPr>
+              <a:t> — en la fecha que indique el docente.</a:t>
+            </a:r>
+          </a:p>
+        </p:txBody>
+      </p:sp>
+      <p:sp>
+        <p:nvSpPr>
+          <p:cNvPr id="6" name="TextBox 5"/>
+          <p:cNvSpPr txBox="1"/>
+          <p:nvPr/>
+        </p:nvSpPr>
+        <p:spPr>
+          <a:xfrm>
+            <a:off x="11185855" y="6473952"/>
+            <a:ext cx="640080" cy="274320"/>
+          </a:xfrm>
+          <a:prstGeom prst="rect">
+            <a:avLst/>
+          </a:prstGeom>
+          <a:noFill/>
+        </p:spPr>
+        <p:txBody>
+          <a:bodyPr wrap="square">
+            <a:spAutoFit/>
+          </a:bodyPr>
+          <a:lstStyle/>
+          <a:p>
+            <a:pPr algn="r"/>
+            <a:r>
+              <a:rPr sz="1100" b="0" i="0">
+                <a:solidFill>
+                  <a:srgbClr val="666666"/>
+                </a:solidFill>
+                <a:latin typeface="Calibri"/>
+              </a:rPr>
+              <a:t>17</a:t>
+            </a:r>
+          </a:p>
+        </p:txBody>
+      </p:sp>
+    </p:spTree>
+  </p:cSld>
+  <p:clrMapOvr>
+    <a:masterClrMapping/>
+  </p:clrMapOvr>
+</p:sld>
+</file>
+
+<file path=ppt/slides/slide18.xml><?xml version="1.0" encoding="utf-8"?>
+<p:sld xmlns:a="http://schemas.openxmlformats.org/drawingml/2006/main" xmlns:p="http://schemas.openxmlformats.org/presentationml/2006/main" xmlns:r="http://schemas.openxmlformats.org/officeDocument/2006/relationships">
+  <p:cSld>
+    <p:bg>
+      <p:bgPr>
+        <a:solidFill>
+          <a:srgbClr val="FFFFFF"/>
+        </a:solidFill>
+        <a:effectLst/>
+      </p:bgPr>
+    </p:bg>
+    <p:spTree>
+      <p:nvGrpSpPr>
+        <p:cNvPr id="1" name=""/>
+        <p:cNvGrpSpPr/>
+        <p:nvPr/>
+      </p:nvGrpSpPr>
+      <p:grpSpPr/>
+      <p:sp>
+        <p:nvSpPr>
+          <p:cNvPr id="2" name="Rectangle 1"/>
+          <p:cNvSpPr/>
+          <p:nvPr/>
+        </p:nvSpPr>
+        <p:spPr>
+          <a:xfrm>
+            <a:off x="0" y="0"/>
+            <a:ext cx="12191695" cy="960120"/>
+          </a:xfrm>
+          <a:prstGeom prst="rect">
+            <a:avLst/>
+          </a:prstGeom>
+          <a:solidFill>
+            <a:srgbClr val="095292"/>
+          </a:solidFill>
+          <a:ln>
+            <a:noFill/>
+          </a:ln>
+        </p:spPr>
+        <p:style>
+          <a:lnRef idx="1">
+            <a:schemeClr val="accent1"/>
+          </a:lnRef>
+          <a:fillRef idx="3">
+            <a:schemeClr val="accent1"/>
+          </a:fillRef>
+          <a:effectRef idx="2">
+            <a:schemeClr val="accent1"/>
+          </a:effectRef>
+          <a:fontRef idx="minor">
+            <a:schemeClr val="lt1"/>
+          </a:fontRef>
+        </p:style>
+        <p:txBody>
+          <a:bodyPr rtlCol="0" anchor="ctr"/>
+          <a:lstStyle/>
+          <a:p>
+            <a:pPr algn="ctr"/>
+          </a:p>
+        </p:txBody>
+      </p:sp>
+      <p:sp>
+        <p:nvSpPr>
+          <p:cNvPr id="3" name="Rectangle 2"/>
+          <p:cNvSpPr/>
+          <p:nvPr/>
+        </p:nvSpPr>
+        <p:spPr>
+          <a:xfrm>
+            <a:off x="0" y="960120"/>
+            <a:ext cx="12191695" cy="41148"/>
+          </a:xfrm>
+          <a:prstGeom prst="rect">
+            <a:avLst/>
+          </a:prstGeom>
+          <a:solidFill>
+            <a:srgbClr val="FFD000"/>
+          </a:solidFill>
+          <a:ln>
+            <a:noFill/>
+          </a:ln>
+        </p:spPr>
+        <p:style>
+          <a:lnRef idx="1">
+            <a:schemeClr val="accent1"/>
+          </a:lnRef>
+          <a:fillRef idx="3">
+            <a:schemeClr val="accent1"/>
+          </a:fillRef>
+          <a:effectRef idx="2">
+            <a:schemeClr val="accent1"/>
+          </a:effectRef>
+          <a:fontRef idx="minor">
+            <a:schemeClr val="lt1"/>
+          </a:fontRef>
+        </p:style>
+        <p:txBody>
+          <a:bodyPr rtlCol="0" anchor="ctr"/>
+          <a:lstStyle/>
+          <a:p>
+            <a:pPr algn="ctr"/>
+          </a:p>
+        </p:txBody>
+      </p:sp>
+      <p:sp>
+        <p:nvSpPr>
+          <p:cNvPr id="4" name="TextBox 3"/>
+          <p:cNvSpPr txBox="1"/>
+          <p:nvPr/>
+        </p:nvSpPr>
+        <p:spPr>
+          <a:xfrm>
+            <a:off x="457200" y="164592"/>
+            <a:ext cx="11277295" cy="502920"/>
+          </a:xfrm>
+          <a:prstGeom prst="rect">
+            <a:avLst/>
+          </a:prstGeom>
+          <a:noFill/>
+        </p:spPr>
+        <p:txBody>
+          <a:bodyPr wrap="square">
+            <a:spAutoFit/>
+          </a:bodyPr>
+          <a:lstStyle/>
+          <a:p>
+            <a:r>
+              <a:rPr sz="2600" b="1" i="0">
+                <a:solidFill>
+                  <a:srgbClr val="FFFFFF"/>
+                </a:solidFill>
+                <a:latin typeface="Calibri"/>
+              </a:rPr>
+              <a:t>Para el PI esta semana</a:t>
+            </a:r>
+          </a:p>
+        </p:txBody>
+      </p:sp>
+      <p:sp>
+        <p:nvSpPr>
+          <p:cNvPr id="5" name="Rounded Rectangle 4"/>
+          <p:cNvSpPr/>
+          <p:nvPr/>
+        </p:nvSpPr>
+        <p:spPr>
+          <a:xfrm>
+            <a:off x="457200" y="1261872"/>
+            <a:ext cx="11277295" cy="1051560"/>
+          </a:xfrm>
+          <a:prstGeom prst="roundRect">
+            <a:avLst>
+              <a:gd name="adj" fmla="val 12000"/>
+            </a:avLst>
+          </a:prstGeom>
+          <a:solidFill>
+            <a:srgbClr val="E8F4FA"/>
+          </a:solidFill>
+          <a:ln>
+            <a:noFill/>
+          </a:ln>
+        </p:spPr>
+        <p:style>
+          <a:lnRef idx="1">
+            <a:schemeClr val="accent1"/>
+          </a:lnRef>
+          <a:fillRef idx="3">
+            <a:schemeClr val="accent1"/>
+          </a:fillRef>
+          <a:effectRef idx="2">
+            <a:schemeClr val="accent1"/>
+          </a:effectRef>
+          <a:fontRef idx="minor">
+            <a:schemeClr val="lt1"/>
+          </a:fontRef>
+        </p:style>
+        <p:txBody>
+          <a:bodyPr rtlCol="0" anchor="ctr"/>
+          <a:lstStyle/>
+          <a:p>
+            <a:pPr algn="ctr"/>
+          </a:p>
+        </p:txBody>
+      </p:sp>
+      <p:sp>
+        <p:nvSpPr>
+          <p:cNvPr id="6" name="Rectangle 5"/>
+          <p:cNvSpPr/>
+          <p:nvPr/>
+        </p:nvSpPr>
+        <p:spPr>
+          <a:xfrm>
+            <a:off x="457200" y="1261872"/>
+            <a:ext cx="128016" cy="1051560"/>
+          </a:xfrm>
+          <a:prstGeom prst="rect">
+            <a:avLst/>
+          </a:prstGeom>
+          <a:solidFill>
+            <a:srgbClr val="269CCB"/>
+          </a:solidFill>
+          <a:ln>
+            <a:noFill/>
+          </a:ln>
+        </p:spPr>
+        <p:style>
+          <a:lnRef idx="1">
+            <a:schemeClr val="accent1"/>
+          </a:lnRef>
+          <a:fillRef idx="3">
+            <a:schemeClr val="accent1"/>
+          </a:fillRef>
+          <a:effectRef idx="2">
+            <a:schemeClr val="accent1"/>
+          </a:effectRef>
+          <a:fontRef idx="minor">
+            <a:schemeClr val="lt1"/>
+          </a:fontRef>
+        </p:style>
+        <p:txBody>
+          <a:bodyPr rtlCol="0" anchor="ctr"/>
+          <a:lstStyle/>
+          <a:p>
+            <a:pPr algn="ctr"/>
+          </a:p>
+        </p:txBody>
+      </p:sp>
+      <p:sp>
+        <p:nvSpPr>
+          <p:cNvPr id="7" name="TextBox 6"/>
+          <p:cNvSpPr txBox="1"/>
+          <p:nvPr/>
+        </p:nvSpPr>
+        <p:spPr>
+          <a:xfrm>
+            <a:off x="777240" y="1399031"/>
+            <a:ext cx="10774375" cy="822959"/>
+          </a:xfrm>
+          <a:prstGeom prst="rect">
+            <a:avLst/>
+          </a:prstGeom>
+          <a:noFill/>
+        </p:spPr>
+        <p:txBody>
+          <a:bodyPr wrap="square">
+            <a:spAutoFit/>
+          </a:bodyPr>
+          <a:lstStyle/>
+          <a:p>
+            <a:r>
+              <a:rPr sz="1200" b="1" i="0">
+                <a:solidFill>
+                  <a:srgbClr val="269CCB"/>
+                </a:solidFill>
+                <a:latin typeface="Calibri"/>
+              </a:rPr>
+              <a:t>Info</a:t>
+            </a:r>
+          </a:p>
+          <a:p>
+            <a:pPr>
+              <a:spcBef>
+                <a:spcPts val="400"/>
+              </a:spcBef>
+            </a:pPr>
+            <a:r>
+              <a:rPr sz="1400" b="0" i="0">
+                <a:solidFill>
+                  <a:srgbClr val="333333"/>
+                </a:solidFill>
+                <a:latin typeface="Calibri"/>
+              </a:rPr>
+              <a:t>Hito: Queda listo el modelo de dominio de VetCare: el diagrama de clases con Dueno, Mascota, Cita, Veterinario y Atencion.</a:t>
+            </a:r>
+          </a:p>
+        </p:txBody>
+      </p:sp>
+      <p:sp>
+        <p:nvSpPr>
+          <p:cNvPr id="8" name="Rounded Rectangle 7"/>
+          <p:cNvSpPr/>
+          <p:nvPr/>
+        </p:nvSpPr>
+        <p:spPr>
+          <a:xfrm>
+            <a:off x="457200" y="2478024"/>
+            <a:ext cx="11277295" cy="1051560"/>
+          </a:xfrm>
+          <a:prstGeom prst="roundRect">
+            <a:avLst>
+              <a:gd name="adj" fmla="val 12000"/>
+            </a:avLst>
+          </a:prstGeom>
+          <a:solidFill>
+            <a:srgbClr val="FFF8E1"/>
+          </a:solidFill>
+          <a:ln>
+            <a:noFill/>
+          </a:ln>
+        </p:spPr>
+        <p:style>
+          <a:lnRef idx="1">
+            <a:schemeClr val="accent1"/>
+          </a:lnRef>
+          <a:fillRef idx="3">
+            <a:schemeClr val="accent1"/>
+          </a:fillRef>
+          <a:effectRef idx="2">
+            <a:schemeClr val="accent1"/>
+          </a:effectRef>
+          <a:fontRef idx="minor">
+            <a:schemeClr val="lt1"/>
+          </a:fontRef>
+        </p:style>
+        <p:txBody>
+          <a:bodyPr rtlCol="0" anchor="ctr"/>
+          <a:lstStyle/>
+          <a:p>
+            <a:pPr algn="ctr"/>
+          </a:p>
+        </p:txBody>
+      </p:sp>
+      <p:sp>
+        <p:nvSpPr>
+          <p:cNvPr id="9" name="Rectangle 8"/>
+          <p:cNvSpPr/>
+          <p:nvPr/>
+        </p:nvSpPr>
+        <p:spPr>
+          <a:xfrm>
+            <a:off x="457200" y="2478024"/>
+            <a:ext cx="128016" cy="1051560"/>
+          </a:xfrm>
+          <a:prstGeom prst="rect">
+            <a:avLst/>
+          </a:prstGeom>
+          <a:solidFill>
+            <a:srgbClr val="FFD000"/>
+          </a:solidFill>
+          <a:ln>
+            <a:noFill/>
+          </a:ln>
+        </p:spPr>
+        <p:style>
+          <a:lnRef idx="1">
+            <a:schemeClr val="accent1"/>
+          </a:lnRef>
+          <a:fillRef idx="3">
+            <a:schemeClr val="accent1"/>
+          </a:fillRef>
+          <a:effectRef idx="2">
+            <a:schemeClr val="accent1"/>
+          </a:effectRef>
+          <a:fontRef idx="minor">
+            <a:schemeClr val="lt1"/>
+          </a:fontRef>
+        </p:style>
+        <p:txBody>
+          <a:bodyPr rtlCol="0" anchor="ctr"/>
+          <a:lstStyle/>
+          <a:p>
+            <a:pPr algn="ctr"/>
+          </a:p>
+        </p:txBody>
+      </p:sp>
+      <p:sp>
+        <p:nvSpPr>
+          <p:cNvPr id="10" name="TextBox 9"/>
+          <p:cNvSpPr txBox="1"/>
+          <p:nvPr/>
+        </p:nvSpPr>
+        <p:spPr>
+          <a:xfrm>
+            <a:off x="777240" y="2615184"/>
+            <a:ext cx="10774375" cy="822959"/>
+          </a:xfrm>
+          <a:prstGeom prst="rect">
+            <a:avLst/>
+          </a:prstGeom>
+          <a:noFill/>
+        </p:spPr>
+        <p:txBody>
+          <a:bodyPr wrap="square">
+            <a:spAutoFit/>
+          </a:bodyPr>
+          <a:lstStyle/>
+          <a:p>
+            <a:r>
+              <a:rPr sz="1200" b="1" i="0">
+                <a:solidFill>
+                  <a:srgbClr val="FFD000"/>
+                </a:solidFill>
+                <a:latin typeface="Calibri"/>
+              </a:rPr>
+              <a:t>Aclaración</a:t>
+            </a:r>
+          </a:p>
+          <a:p>
+            <a:pPr>
+              <a:spcBef>
+                <a:spcPts val="400"/>
+              </a:spcBef>
+            </a:pPr>
+            <a:r>
+              <a:rPr sz="1400" b="0" i="0">
+                <a:solidFill>
+                  <a:srgbClr val="333333"/>
+                </a:solidFill>
+                <a:latin typeface="Calibri"/>
+              </a:rPr>
+              <a:t>Enunciado completo: Clases/Proyecto Integrador/ (VetCare).</a:t>
+            </a:r>
+          </a:p>
+        </p:txBody>
+      </p:sp>
+      <p:sp>
+        <p:nvSpPr>
+          <p:cNvPr id="11" name="Rounded Rectangle 10"/>
+          <p:cNvSpPr/>
+          <p:nvPr/>
+        </p:nvSpPr>
+        <p:spPr>
+          <a:xfrm>
+            <a:off x="457200" y="3694176"/>
+            <a:ext cx="11277295" cy="1051560"/>
+          </a:xfrm>
+          <a:prstGeom prst="roundRect">
+            <a:avLst>
+              <a:gd name="adj" fmla="val 12000"/>
+            </a:avLst>
+          </a:prstGeom>
+          <a:solidFill>
+            <a:srgbClr val="FBE4E4"/>
+          </a:solidFill>
+          <a:ln>
+            <a:noFill/>
+          </a:ln>
+        </p:spPr>
+        <p:style>
+          <a:lnRef idx="1">
+            <a:schemeClr val="accent1"/>
+          </a:lnRef>
+          <a:fillRef idx="3">
+            <a:schemeClr val="accent1"/>
+          </a:fillRef>
+          <a:effectRef idx="2">
+            <a:schemeClr val="accent1"/>
+          </a:effectRef>
+          <a:fontRef idx="minor">
+            <a:schemeClr val="lt1"/>
+          </a:fontRef>
+        </p:style>
+        <p:txBody>
+          <a:bodyPr rtlCol="0" anchor="ctr"/>
+          <a:lstStyle/>
+          <a:p>
+            <a:pPr algn="ctr"/>
+          </a:p>
+        </p:txBody>
+      </p:sp>
+      <p:sp>
+        <p:nvSpPr>
+          <p:cNvPr id="12" name="Rectangle 11"/>
+          <p:cNvSpPr/>
+          <p:nvPr/>
+        </p:nvSpPr>
+        <p:spPr>
+          <a:xfrm>
+            <a:off x="457200" y="3694176"/>
+            <a:ext cx="128016" cy="1051560"/>
+          </a:xfrm>
+          <a:prstGeom prst="rect">
+            <a:avLst/>
+          </a:prstGeom>
+          <a:solidFill>
+            <a:srgbClr val="A02030"/>
+          </a:solidFill>
+          <a:ln>
+            <a:noFill/>
+          </a:ln>
+        </p:spPr>
+        <p:style>
+          <a:lnRef idx="1">
+            <a:schemeClr val="accent1"/>
+          </a:lnRef>
+          <a:fillRef idx="3">
+            <a:schemeClr val="accent1"/>
+          </a:fillRef>
+          <a:effectRef idx="2">
+            <a:schemeClr val="accent1"/>
+          </a:effectRef>
+          <a:fontRef idx="minor">
+            <a:schemeClr val="lt1"/>
+          </a:fontRef>
+        </p:style>
+        <p:txBody>
+          <a:bodyPr rtlCol="0" anchor="ctr"/>
+          <a:lstStyle/>
+          <a:p>
+            <a:pPr algn="ctr"/>
+          </a:p>
+        </p:txBody>
+      </p:sp>
+      <p:sp>
+        <p:nvSpPr>
+          <p:cNvPr id="13" name="TextBox 12"/>
+          <p:cNvSpPr txBox="1"/>
+          <p:nvPr/>
+        </p:nvSpPr>
+        <p:spPr>
+          <a:xfrm>
+            <a:off x="777240" y="3831336"/>
+            <a:ext cx="10774375" cy="822959"/>
+          </a:xfrm>
+          <a:prstGeom prst="rect">
+            <a:avLst/>
+          </a:prstGeom>
+          <a:noFill/>
+        </p:spPr>
+        <p:txBody>
+          <a:bodyPr wrap="square">
+            <a:spAutoFit/>
+          </a:bodyPr>
+          <a:lstStyle/>
+          <a:p>
+            <a:r>
+              <a:rPr sz="1200" b="1" i="0">
+                <a:solidFill>
+                  <a:srgbClr val="A02030"/>
+                </a:solidFill>
+                <a:latin typeface="Calibri"/>
+              </a:rPr>
+              <a:t>Atención</a:t>
+            </a:r>
+          </a:p>
+          <a:p>
+            <a:pPr>
+              <a:spcBef>
+                <a:spcPts val="400"/>
+              </a:spcBef>
+            </a:pPr>
+            <a:r>
+              <a:rPr sz="1400" b="0" i="0">
+                <a:solidFill>
+                  <a:srgbClr val="333333"/>
+                </a:solidFill>
+                <a:latin typeface="Calibri"/>
+              </a:rPr>
+              <a:t>Entrega del taller, si el docente lo asigna · en la fecha que indique el docente.</a:t>
+            </a:r>
+          </a:p>
+        </p:txBody>
+      </p:sp>
+      <p:sp>
+        <p:nvSpPr>
+          <p:cNvPr id="14" name="TextBox 13"/>
+          <p:cNvSpPr txBox="1"/>
+          <p:nvPr/>
+        </p:nvSpPr>
+        <p:spPr>
+          <a:xfrm>
+            <a:off x="11185855" y="6473952"/>
+            <a:ext cx="640080" cy="274320"/>
+          </a:xfrm>
+          <a:prstGeom prst="rect">
+            <a:avLst/>
+          </a:prstGeom>
+          <a:noFill/>
+        </p:spPr>
+        <p:txBody>
+          <a:bodyPr wrap="square">
+            <a:spAutoFit/>
+          </a:bodyPr>
+          <a:lstStyle/>
+          <a:p>
+            <a:pPr algn="r"/>
+            <a:r>
+              <a:rPr sz="1100" b="0" i="0">
+                <a:solidFill>
+                  <a:srgbClr val="666666"/>
+                </a:solidFill>
+                <a:latin typeface="Calibri"/>
+              </a:rPr>
+              <a:t>18</a:t>
+            </a:r>
+          </a:p>
+        </p:txBody>
+      </p:sp>
+    </p:spTree>
+  </p:cSld>
+  <p:clrMapOvr>
+    <a:masterClrMapping/>
+  </p:clrMapOvr>
+</p:sld>
+</file>
+
+<file path=ppt/slides/slide19.xml><?xml version="1.0" encoding="utf-8"?>
+<p:sld xmlns:a="http://schemas.openxmlformats.org/drawingml/2006/main" xmlns:p="http://schemas.openxmlformats.org/presentationml/2006/main" xmlns:r="http://schemas.openxmlformats.org/officeDocument/2006/relationships">
+  <p:cSld>
+    <p:bg>
+      <p:bgPr>
+        <a:solidFill>
+          <a:srgbClr val="FFFFFF"/>
+        </a:solidFill>
+        <a:effectLst/>
+      </p:bgPr>
+    </p:bg>
+    <p:spTree>
+      <p:nvGrpSpPr>
+        <p:cNvPr id="1" name=""/>
+        <p:cNvGrpSpPr/>
+        <p:nvPr/>
+      </p:nvGrpSpPr>
+      <p:grpSpPr/>
+      <p:sp>
+        <p:nvSpPr>
+          <p:cNvPr id="2" name="Rectangle 1"/>
+          <p:cNvSpPr/>
+          <p:nvPr/>
+        </p:nvSpPr>
+        <p:spPr>
+          <a:xfrm>
+            <a:off x="0" y="0"/>
             <a:ext cx="12191695" cy="164592"/>
           </a:xfrm>
           <a:prstGeom prst="rect">
@@ -7669,7 +10157,7 @@
                 </a:solidFill>
                 <a:latin typeface="Calibri"/>
               </a:rPr>
-              <a:t>Teoria Core</a:t>
+              <a:t>UML significa Lenguaje Unificado de Modelado y nacio en los anos...</a:t>
             </a:r>
           </a:p>
         </p:txBody>
@@ -7708,7 +10196,7 @@
                 </a:solidFill>
                 <a:latin typeface="Calibri"/>
               </a:rPr>
-              <a:t>–   UML significa Lenguaje Unificado de Modelado y nacio en los anos noventa para resolver un problema muy concreto…</a:t>
+              <a:t>–   UML significa Lenguaje Unificado de Modelado y nacio en los anos noventa para resolver un problema muy concreto: tres personas leian la misma frase en espanol y entendian tres sistemas distintos.</a:t>
             </a:r>
           </a:p>
           <a:p>
@@ -7724,7 +10212,7 @@
                 </a:solidFill>
                 <a:latin typeface="Calibri"/>
               </a:rPr>
-              <a:t>–   Los diagramas se agrupan en dos grandes vistas</a:t>
+              <a:t>–   Es un lenguaje grafico estandarizado, no un lenguaje de programacion y no una herramienta; usted puede dibujar UML valido en draw.io, en Mermaid o en el tablero con marcador</a:t>
             </a:r>
           </a:p>
           <a:p>
@@ -7740,7 +10228,7 @@
                 </a:solidFill>
                 <a:latin typeface="Calibri"/>
               </a:rPr>
-              <a:t>–   El diagrama de clases se dibuja con una caja de tres compartimentos: arriba el nombre de la clase en singular y…</a:t>
+              <a:t>–   Porque lo que esta normalizado es el significado de las cajas, las lineas y los numeros, no el programa donde se pintan.</a:t>
             </a:r>
           </a:p>
           <a:p>
@@ -7756,7 +10244,7 @@
                 </a:solidFill>
                 <a:latin typeface="Calibri"/>
               </a:rPr>
-              <a:t>–   Las lineas entre clases son la mitad del valor del diagrama</a:t>
+              <a:t>–   La especificacion tiene catorce tipos de diagrama, pero en la vida real de un analista se usan cuatro o cinco de forma constante y los demas se consultan cuando se necesitan; querer aprender los catorce es la manera mas rapida de no aprender ninguno.</a:t>
             </a:r>
           </a:p>
           <a:p>
@@ -7772,7 +10260,23 @@
                 </a:solidFill>
                 <a:latin typeface="Calibri"/>
               </a:rPr>
-              <a:t>–   El diagrama que dibujamos hoy no se queda en la clase: es la pieza que viaja mas lejos del Proyecto Integrador</a:t>
+              <a:t>–   En VetCare, la frase un dueno puede tener varias mascotas parece clarisima hasta que alguien pregunta si una mascota puede tener dos duenos, si el dueno existe antes de registrar la mascota o si al borrar el dueno desaparece la mascota</a:t>
+            </a:r>
+          </a:p>
+          <a:p>
+            <a:pPr>
+              <a:spcAft>
+                <a:spcPts val="800"/>
+              </a:spcAft>
+            </a:pPr>
+            <a:r>
+              <a:rPr sz="2000" b="0" i="0">
+                <a:solidFill>
+                  <a:srgbClr val="333333"/>
+                </a:solidFill>
+                <a:latin typeface="Calibri"/>
+              </a:rPr>
+              <a:t>–   El diagrama contesta esas tres preguntas con dos numeros y una linea, y ahi es donde UML se gana el sueldo.</a:t>
             </a:r>
           </a:p>
         </p:txBody>
@@ -7953,141 +10457,21 @@
                 </a:solidFill>
                 <a:latin typeface="Calibri"/>
               </a:rPr>
-              <a:t>Modelo de dominio de VetCare en sintaxis Mermaid (diagrama, no codigo)</a:t>
-            </a:r>
-          </a:p>
-        </p:txBody>
-      </p:sp>
-      <p:sp>
-        <p:nvSpPr>
-          <p:cNvPr id="5" name="Rounded Rectangle 4"/>
-          <p:cNvSpPr/>
-          <p:nvPr/>
-        </p:nvSpPr>
-        <p:spPr>
-          <a:xfrm>
-            <a:off x="457200" y="1261872"/>
-            <a:ext cx="11277295" cy="4773168"/>
-          </a:xfrm>
-          <a:prstGeom prst="roundRect">
-            <a:avLst>
-              <a:gd name="adj" fmla="val 12000"/>
-            </a:avLst>
-          </a:prstGeom>
-          <a:solidFill>
-            <a:srgbClr val="1E2A38"/>
-          </a:solidFill>
-          <a:ln>
-            <a:noFill/>
-          </a:ln>
-        </p:spPr>
-        <p:style>
-          <a:lnRef idx="1">
-            <a:schemeClr val="accent1"/>
-          </a:lnRef>
-          <a:fillRef idx="3">
-            <a:schemeClr val="accent1"/>
-          </a:fillRef>
-          <a:effectRef idx="2">
-            <a:schemeClr val="accent1"/>
-          </a:effectRef>
-          <a:fontRef idx="minor">
-            <a:schemeClr val="lt1"/>
-          </a:fontRef>
-        </p:style>
-        <p:txBody>
-          <a:bodyPr rtlCol="0" anchor="ctr"/>
-          <a:lstStyle/>
-          <a:p>
-            <a:pPr algn="ctr"/>
-          </a:p>
-        </p:txBody>
-      </p:sp>
-      <p:sp>
-        <p:nvSpPr>
-          <p:cNvPr id="6" name="Rectangle 5"/>
-          <p:cNvSpPr/>
-          <p:nvPr/>
-        </p:nvSpPr>
-        <p:spPr>
-          <a:xfrm>
-            <a:off x="457200" y="1261872"/>
-            <a:ext cx="11277295" cy="320040"/>
-          </a:xfrm>
-          <a:prstGeom prst="rect">
-            <a:avLst/>
-          </a:prstGeom>
-          <a:solidFill>
-            <a:srgbClr val="095292"/>
-          </a:solidFill>
-          <a:ln>
-            <a:noFill/>
-          </a:ln>
-        </p:spPr>
-        <p:style>
-          <a:lnRef idx="1">
-            <a:schemeClr val="accent1"/>
-          </a:lnRef>
-          <a:fillRef idx="3">
-            <a:schemeClr val="accent1"/>
-          </a:fillRef>
-          <a:effectRef idx="2">
-            <a:schemeClr val="accent1"/>
-          </a:effectRef>
-          <a:fontRef idx="minor">
-            <a:schemeClr val="lt1"/>
-          </a:fontRef>
-        </p:style>
-        <p:txBody>
-          <a:bodyPr rtlCol="0" anchor="ctr"/>
-          <a:lstStyle/>
-          <a:p>
-            <a:pPr algn="ctr"/>
-          </a:p>
-        </p:txBody>
-      </p:sp>
-      <p:sp>
-        <p:nvSpPr>
-          <p:cNvPr id="7" name="TextBox 6"/>
+              <a:t>Los diagramas se agrupan en dos grandes vistas</a:t>
+            </a:r>
+          </a:p>
+        </p:txBody>
+      </p:sp>
+      <p:sp>
+        <p:nvSpPr>
+          <p:cNvPr id="5" name="TextBox 4"/>
           <p:cNvSpPr txBox="1"/>
           <p:nvPr/>
         </p:nvSpPr>
         <p:spPr>
           <a:xfrm>
-            <a:off x="685800" y="1307592"/>
-            <a:ext cx="10820095" cy="256032"/>
-          </a:xfrm>
-          <a:prstGeom prst="rect">
-            <a:avLst/>
-          </a:prstGeom>
-          <a:noFill/>
-        </p:spPr>
-        <p:txBody>
-          <a:bodyPr wrap="square" anchor="ctr"/>
-          <a:lstStyle/>
-          <a:p>
-            <a:r>
-              <a:rPr sz="1000" b="1" i="0">
-                <a:solidFill>
-                  <a:srgbClr val="269CCB"/>
-                </a:solidFill>
-                <a:latin typeface="Calibri"/>
-              </a:rPr>
-              <a:t>● ● ●</a:t>
-            </a:r>
-          </a:p>
-        </p:txBody>
-      </p:sp>
-      <p:sp>
-        <p:nvSpPr>
-          <p:cNvPr id="8" name="TextBox 7"/>
-          <p:cNvSpPr txBox="1"/>
-          <p:nvPr/>
-        </p:nvSpPr>
-        <p:spPr>
-          <a:xfrm>
-            <a:off x="777240" y="1719072"/>
-            <a:ext cx="5181447" cy="4133087"/>
+            <a:off x="457200" y="1170432"/>
+            <a:ext cx="11277295" cy="5230368"/>
           </a:xfrm>
           <a:prstGeom prst="rect">
             <a:avLst/>
@@ -8102,530 +10486,136 @@
           <a:p>
             <a:pPr>
               <a:spcAft>
-                <a:spcPts val="371"/>
+                <a:spcPts val="800"/>
               </a:spcAft>
             </a:pPr>
             <a:r>
-              <a:rPr sz="1300" b="0" i="0">
-                <a:solidFill>
-                  <a:srgbClr val="FFFFFF"/>
-                </a:solidFill>
-                <a:latin typeface="Calibri"/>
-              </a:rPr>
-              <a:t>classDiagram</a:t>
+              <a:rPr sz="1900" b="0" i="0">
+                <a:solidFill>
+                  <a:srgbClr val="333333"/>
+                </a:solidFill>
+                <a:latin typeface="Calibri"/>
+              </a:rPr>
+              <a:t>–   Los diagramas se agrupan en dos grandes vistas.</a:t>
             </a:r>
           </a:p>
           <a:p>
             <a:pPr>
               <a:spcAft>
-                <a:spcPts val="371"/>
+                <a:spcPts val="800"/>
               </a:spcAft>
             </a:pPr>
             <a:r>
-              <a:rPr sz="1300" b="0" i="0">
-                <a:solidFill>
-                  <a:srgbClr val="FFFFFF"/>
-                </a:solidFill>
-                <a:latin typeface="Calibri"/>
-              </a:rPr>
-              <a:t>  class Dueno {</a:t>
+              <a:rPr sz="1900" b="0" i="0">
+                <a:solidFill>
+                  <a:srgbClr val="333333"/>
+                </a:solidFill>
+                <a:latin typeface="Calibri"/>
+              </a:rPr>
+              <a:t>–   La vista estructural muestra de que esta hecho el sistema y no cambia con el tiempo: diagrama de clases, de objetos, de componentes y de despliegue.</a:t>
             </a:r>
           </a:p>
           <a:p>
             <a:pPr>
               <a:spcAft>
-                <a:spcPts val="371"/>
+                <a:spcPts val="800"/>
               </a:spcAft>
             </a:pPr>
             <a:r>
-              <a:rPr sz="1300" b="0" i="0">
-                <a:solidFill>
-                  <a:srgbClr val="FFFFFF"/>
-                </a:solidFill>
-                <a:latin typeface="Calibri"/>
-              </a:rPr>
-              <a:t>    -documento: String</a:t>
+              <a:rPr sz="1900" b="0" i="0">
+                <a:solidFill>
+                  <a:srgbClr val="333333"/>
+                </a:solidFill>
+                <a:latin typeface="Calibri"/>
+              </a:rPr>
+              <a:t>–   La vista de comportamiento muestra que pasa y en que orden: casos de uso, actividades, secuencia y maquina de estados.</a:t>
             </a:r>
           </a:p>
           <a:p>
             <a:pPr>
               <a:spcAft>
-                <a:spcPts val="371"/>
+                <a:spcPts val="800"/>
               </a:spcAft>
             </a:pPr>
             <a:r>
-              <a:rPr sz="1300" b="0" i="0">
-                <a:solidFill>
-                  <a:srgbClr val="FFFFFF"/>
-                </a:solidFill>
-                <a:latin typeface="Calibri"/>
-              </a:rPr>
-              <a:t>    -nombre: String</a:t>
+              <a:rPr sz="1900" b="0" i="0">
+                <a:solidFill>
+                  <a:srgbClr val="333333"/>
+                </a:solidFill>
+                <a:latin typeface="Calibri"/>
+              </a:rPr>
+              <a:t>–   Un mismo sistema necesita las dos, igual que una casa necesita el plano de plantas y tambien el plano de instalaciones.</a:t>
             </a:r>
           </a:p>
           <a:p>
             <a:pPr>
               <a:spcAft>
-                <a:spcPts val="371"/>
+                <a:spcPts val="800"/>
               </a:spcAft>
             </a:pPr>
             <a:r>
-              <a:rPr sz="1300" b="0" i="0">
-                <a:solidFill>
-                  <a:srgbClr val="FFFFFF"/>
-                </a:solidFill>
-                <a:latin typeface="Calibri"/>
-              </a:rPr>
-              <a:t>    +registrarMascota(m: Mascota): void</a:t>
+              <a:rPr sz="1900" b="0" i="0">
+                <a:solidFill>
+                  <a:srgbClr val="333333"/>
+                </a:solidFill>
+                <a:latin typeface="Calibri"/>
+              </a:rPr>
+              <a:t>–   En la practica profesional los que sobreviven son cinco: casos de uso para acordar el alcance con el cliente, clases para el modelo del dominio</a:t>
             </a:r>
           </a:p>
           <a:p>
             <a:pPr>
               <a:spcAft>
-                <a:spcPts val="371"/>
+                <a:spcPts val="800"/>
               </a:spcAft>
             </a:pPr>
             <a:r>
-              <a:rPr sz="1300" b="0" i="0">
-                <a:solidFill>
-                  <a:srgbClr val="FFFFFF"/>
-                </a:solidFill>
-                <a:latin typeface="Calibri"/>
-              </a:rPr>
-              <a:t>  }</a:t>
+              <a:rPr sz="1900" b="0" i="0">
+                <a:solidFill>
+                  <a:srgbClr val="333333"/>
+                </a:solidFill>
+                <a:latin typeface="Calibri"/>
+              </a:rPr>
+              <a:t>–   Secuencia para entender un flujo complicado paso a paso, actividades para procesos de negocio con decisiones, y despliegue cuando hay que explicar donde vive cada cosa.</a:t>
             </a:r>
           </a:p>
           <a:p>
             <a:pPr>
               <a:spcAft>
-                <a:spcPts val="371"/>
+                <a:spcPts val="800"/>
               </a:spcAft>
             </a:pPr>
             <a:r>
-              <a:rPr sz="1300" b="0" i="0">
-                <a:solidFill>
-                  <a:srgbClr val="FFFFFF"/>
-                </a:solidFill>
-                <a:latin typeface="Calibri"/>
-              </a:rPr>
-              <a:t>  class Mascota {</a:t>
+              <a:rPr sz="1900" b="0" i="0">
+                <a:solidFill>
+                  <a:srgbClr val="333333"/>
+                </a:solidFill>
+                <a:latin typeface="Calibri"/>
+              </a:rPr>
+              <a:t>–   En VetCare vamos a usar clases hoy, casos de uso y secuencia mas adelante, y el resto se menciona para que sepan que existen.</a:t>
             </a:r>
           </a:p>
           <a:p>
             <a:pPr>
               <a:spcAft>
-                <a:spcPts val="371"/>
+                <a:spcPts val="800"/>
               </a:spcAft>
             </a:pPr>
             <a:r>
-              <a:rPr sz="1300" b="0" i="0">
-                <a:solidFill>
-                  <a:srgbClr val="FFFFFF"/>
-                </a:solidFill>
-                <a:latin typeface="Calibri"/>
-              </a:rPr>
-              <a:t>    -codigo: String</a:t>
-            </a:r>
-          </a:p>
-          <a:p>
-            <a:pPr>
-              <a:spcAft>
-                <a:spcPts val="371"/>
-              </a:spcAft>
-            </a:pPr>
-            <a:r>
-              <a:rPr sz="1300" b="0" i="0">
-                <a:solidFill>
-                  <a:srgbClr val="FFFFFF"/>
-                </a:solidFill>
-                <a:latin typeface="Calibri"/>
-              </a:rPr>
-              <a:t>    -especie: String</a:t>
-            </a:r>
-          </a:p>
-          <a:p>
-            <a:pPr>
-              <a:spcAft>
-                <a:spcPts val="371"/>
-              </a:spcAft>
-            </a:pPr>
-            <a:r>
-              <a:rPr sz="1300" b="0" i="0">
-                <a:solidFill>
-                  <a:srgbClr val="FFFFFF"/>
-                </a:solidFill>
-                <a:latin typeface="Calibri"/>
-              </a:rPr>
-              <a:t>    -fechaNacimiento: Date</a:t>
-            </a:r>
-          </a:p>
-          <a:p>
-            <a:pPr>
-              <a:spcAft>
-                <a:spcPts val="371"/>
-              </a:spcAft>
-            </a:pPr>
-            <a:r>
-              <a:rPr sz="1300" b="0" i="0">
-                <a:solidFill>
-                  <a:srgbClr val="FFFFFF"/>
-                </a:solidFill>
-                <a:latin typeface="Calibri"/>
-              </a:rPr>
-              <a:t>    +calcularEdad(): int</a:t>
-            </a:r>
-          </a:p>
-          <a:p>
-            <a:pPr>
-              <a:spcAft>
-                <a:spcPts val="371"/>
-              </a:spcAft>
-            </a:pPr>
-            <a:r>
-              <a:rPr sz="1300" b="0" i="0">
-                <a:solidFill>
-                  <a:srgbClr val="FFFFFF"/>
-                </a:solidFill>
-                <a:latin typeface="Calibri"/>
-              </a:rPr>
-              <a:t>  }</a:t>
-            </a:r>
-          </a:p>
-          <a:p>
-            <a:pPr>
-              <a:spcAft>
-                <a:spcPts val="371"/>
-              </a:spcAft>
-            </a:pPr>
-            <a:r>
-              <a:rPr sz="1300" b="0" i="0">
-                <a:solidFill>
-                  <a:srgbClr val="FFFFFF"/>
-                </a:solidFill>
-                <a:latin typeface="Calibri"/>
-              </a:rPr>
-              <a:t>  class Veterinario {</a:t>
-            </a:r>
-          </a:p>
-          <a:p>
-            <a:pPr>
-              <a:spcAft>
-                <a:spcPts val="371"/>
-              </a:spcAft>
-            </a:pPr>
-            <a:r>
-              <a:rPr sz="1300" b="0" i="0">
-                <a:solidFill>
-                  <a:srgbClr val="FFFFFF"/>
-                </a:solidFill>
-                <a:latin typeface="Calibri"/>
-              </a:rPr>
-              <a:t>    -tarjetaProfesional: String</a:t>
-            </a:r>
-          </a:p>
-          <a:p>
-            <a:pPr>
-              <a:spcAft>
-                <a:spcPts val="371"/>
-              </a:spcAft>
-            </a:pPr>
-            <a:r>
-              <a:rPr sz="1300" b="0" i="0">
-                <a:solidFill>
-                  <a:srgbClr val="FFFFFF"/>
-                </a:solidFill>
-                <a:latin typeface="Calibri"/>
-              </a:rPr>
-              <a:t>    -especialidad: String</a:t>
-            </a:r>
-          </a:p>
-          <a:p>
-            <a:pPr>
-              <a:spcAft>
-                <a:spcPts val="371"/>
-              </a:spcAft>
-            </a:pPr>
-            <a:r>
-              <a:rPr sz="1300" b="0" i="0">
-                <a:solidFill>
-                  <a:srgbClr val="FFFFFF"/>
-                </a:solidFill>
-                <a:latin typeface="Calibri"/>
-              </a:rPr>
-              <a:t>  }</a:t>
-            </a:r>
-          </a:p>
-        </p:txBody>
-      </p:sp>
-      <p:sp>
-        <p:nvSpPr>
-          <p:cNvPr id="9" name="TextBox 8"/>
-          <p:cNvSpPr txBox="1"/>
-          <p:nvPr/>
-        </p:nvSpPr>
-        <p:spPr>
-          <a:xfrm>
-            <a:off x="6233007" y="1719072"/>
-            <a:ext cx="5181447" cy="4133087"/>
-          </a:xfrm>
-          <a:prstGeom prst="rect">
-            <a:avLst/>
-          </a:prstGeom>
-          <a:noFill/>
-        </p:spPr>
-        <p:txBody>
-          <a:bodyPr wrap="square">
-            <a:spAutoFit/>
-          </a:bodyPr>
-          <a:lstStyle/>
-          <a:p>
-            <a:pPr>
-              <a:spcAft>
-                <a:spcPts val="371"/>
-              </a:spcAft>
-            </a:pPr>
-            <a:r>
-              <a:rPr sz="1300" b="0" i="0">
-                <a:solidFill>
-                  <a:srgbClr val="FFFFFF"/>
-                </a:solidFill>
-                <a:latin typeface="Calibri"/>
-              </a:rPr>
-              <a:t>  class Cita {</a:t>
-            </a:r>
-          </a:p>
-          <a:p>
-            <a:pPr>
-              <a:spcAft>
-                <a:spcPts val="371"/>
-              </a:spcAft>
-            </a:pPr>
-            <a:r>
-              <a:rPr sz="1300" b="0" i="0">
-                <a:solidFill>
-                  <a:srgbClr val="FFFFFF"/>
-                </a:solidFill>
-                <a:latin typeface="Calibri"/>
-              </a:rPr>
-              <a:t>    -fechaHora: DateTime</a:t>
-            </a:r>
-          </a:p>
-          <a:p>
-            <a:pPr>
-              <a:spcAft>
-                <a:spcPts val="371"/>
-              </a:spcAft>
-            </a:pPr>
-            <a:r>
-              <a:rPr sz="1300" b="0" i="0">
-                <a:solidFill>
-                  <a:srgbClr val="FFFFFF"/>
-                </a:solidFill>
-                <a:latin typeface="Calibri"/>
-              </a:rPr>
-              <a:t>    -estado: String</a:t>
-            </a:r>
-          </a:p>
-          <a:p>
-            <a:pPr>
-              <a:spcAft>
-                <a:spcPts val="371"/>
-              </a:spcAft>
-            </a:pPr>
-            <a:r>
-              <a:rPr sz="1300" b="0" i="0">
-                <a:solidFill>
-                  <a:srgbClr val="FFFFFF"/>
-                </a:solidFill>
-                <a:latin typeface="Calibri"/>
-              </a:rPr>
-              <a:t>    +reprogramar(nuevaFecha: DateTime): void</a:t>
-            </a:r>
-          </a:p>
-          <a:p>
-            <a:pPr>
-              <a:spcAft>
-                <a:spcPts val="371"/>
-              </a:spcAft>
-            </a:pPr>
-            <a:r>
-              <a:rPr sz="1300" b="0" i="0">
-                <a:solidFill>
-                  <a:srgbClr val="FFFFFF"/>
-                </a:solidFill>
-                <a:latin typeface="Calibri"/>
-              </a:rPr>
-              <a:t>  }</a:t>
-            </a:r>
-          </a:p>
-          <a:p>
-            <a:pPr>
-              <a:spcAft>
-                <a:spcPts val="371"/>
-              </a:spcAft>
-            </a:pPr>
-            <a:r>
-              <a:rPr sz="1300" b="0" i="0">
-                <a:solidFill>
-                  <a:srgbClr val="FFFFFF"/>
-                </a:solidFill>
-                <a:latin typeface="Calibri"/>
-              </a:rPr>
-              <a:t>  class Atencion {</a:t>
-            </a:r>
-          </a:p>
-          <a:p>
-            <a:pPr>
-              <a:spcAft>
-                <a:spcPts val="371"/>
-              </a:spcAft>
-            </a:pPr>
-            <a:r>
-              <a:rPr sz="1300" b="0" i="0">
-                <a:solidFill>
-                  <a:srgbClr val="FFFFFF"/>
-                </a:solidFill>
-                <a:latin typeface="Calibri"/>
-              </a:rPr>
-              <a:t>    -diagnostico: String</a:t>
-            </a:r>
-          </a:p>
-          <a:p>
-            <a:pPr>
-              <a:spcAft>
-                <a:spcPts val="371"/>
-              </a:spcAft>
-            </a:pPr>
-            <a:r>
-              <a:rPr sz="1300" b="0" i="0">
-                <a:solidFill>
-                  <a:srgbClr val="FFFFFF"/>
-                </a:solidFill>
-                <a:latin typeface="Calibri"/>
-              </a:rPr>
-              <a:t>    -tratamiento: String</a:t>
-            </a:r>
-          </a:p>
-          <a:p>
-            <a:pPr>
-              <a:spcAft>
-                <a:spcPts val="371"/>
-              </a:spcAft>
-            </a:pPr>
-            <a:r>
-              <a:rPr sz="1300" b="0" i="0">
-                <a:solidFill>
-                  <a:srgbClr val="FFFFFF"/>
-                </a:solidFill>
-                <a:latin typeface="Calibri"/>
-              </a:rPr>
-              <a:t>  }</a:t>
-            </a:r>
-          </a:p>
-          <a:p>
-            <a:pPr>
-              <a:spcAft>
-                <a:spcPts val="371"/>
-              </a:spcAft>
-            </a:pPr>
-            <a:r>
-              <a:rPr sz="1300" b="0" i="0">
-                <a:solidFill>
-                  <a:srgbClr val="FFFFFF"/>
-                </a:solidFill>
-                <a:latin typeface="Calibri"/>
-              </a:rPr>
-              <a:t>  Dueno "1" --&gt; "0..*" Mascota: es dueno de</a:t>
-            </a:r>
-          </a:p>
-          <a:p>
-            <a:pPr>
-              <a:spcAft>
-                <a:spcPts val="371"/>
-              </a:spcAft>
-            </a:pPr>
-            <a:r>
-              <a:rPr sz="1300" b="0" i="0">
-                <a:solidFill>
-                  <a:srgbClr val="FFFFFF"/>
-                </a:solidFill>
-                <a:latin typeface="Calibri"/>
-              </a:rPr>
-              <a:t>  Mascota "1" --&gt; "0..*" Cita: tiene agendada</a:t>
-            </a:r>
-          </a:p>
-          <a:p>
-            <a:pPr>
-              <a:spcAft>
-                <a:spcPts val="371"/>
-              </a:spcAft>
-            </a:pPr>
-            <a:r>
-              <a:rPr sz="1300" b="0" i="0">
-                <a:solidFill>
-                  <a:srgbClr val="FFFFFF"/>
-                </a:solidFill>
-                <a:latin typeface="Calibri"/>
-              </a:rPr>
-              <a:t>  Veterinario "1" --&gt; "0..*" Cita: atiende</a:t>
-            </a:r>
-          </a:p>
-          <a:p>
-            <a:pPr>
-              <a:spcAft>
-                <a:spcPts val="371"/>
-              </a:spcAft>
-            </a:pPr>
-            <a:r>
-              <a:rPr sz="1300" b="0" i="0">
-                <a:solidFill>
-                  <a:srgbClr val="FFFFFF"/>
-                </a:solidFill>
-                <a:latin typeface="Calibri"/>
-              </a:rPr>
-              <a:t>  Cita "1" --&gt; "0..1" Atencion: genera</a:t>
-            </a:r>
-          </a:p>
-        </p:txBody>
-      </p:sp>
-      <p:sp>
-        <p:nvSpPr>
-          <p:cNvPr id="10" name="TextBox 9"/>
-          <p:cNvSpPr txBox="1"/>
-          <p:nvPr/>
-        </p:nvSpPr>
-        <p:spPr>
-          <a:xfrm>
-            <a:off x="457200" y="6080760"/>
-            <a:ext cx="11277295" cy="320040"/>
-          </a:xfrm>
-          <a:prstGeom prst="rect">
-            <a:avLst/>
-          </a:prstGeom>
-          <a:noFill/>
-        </p:spPr>
-        <p:txBody>
-          <a:bodyPr wrap="square">
-            <a:spAutoFit/>
-          </a:bodyPr>
-          <a:lstStyle/>
-          <a:p>
-            <a:pPr algn="ctr"/>
-            <a:r>
-              <a:rPr sz="1200" b="0" i="1">
-                <a:solidFill>
-                  <a:srgbClr val="666666"/>
-                </a:solidFill>
-                <a:latin typeface="Calibri"/>
-              </a:rPr>
-              <a:t>Las multiplicidades son las que contestan las preguntas que el espanol deja abiertas: un dueno, muchas mascotas.</a:t>
-            </a:r>
-          </a:p>
-        </p:txBody>
-      </p:sp>
-      <p:sp>
-        <p:nvSpPr>
-          <p:cNvPr id="11" name="TextBox 10"/>
+              <a:rPr sz="1900" b="0" i="0">
+                <a:solidFill>
+                  <a:srgbClr val="333333"/>
+                </a:solidFill>
+                <a:latin typeface="Calibri"/>
+              </a:rPr>
+              <a:t>–   Aclaracion importante: los diagramas no reemplazan el documento de requisitos, lo dibujan; cada clase que aparezca hoy debe poder rastrearse a un RF o a una historia del backlog.</a:t>
+            </a:r>
+          </a:p>
+        </p:txBody>
+      </p:sp>
+      <p:sp>
+        <p:nvSpPr>
+          <p:cNvPr id="6" name="TextBox 5"/>
           <p:cNvSpPr txBox="1"/>
           <p:nvPr/>
         </p:nvSpPr>
@@ -8799,7 +10789,7 @@
                 </a:solidFill>
                 <a:latin typeface="Calibri"/>
               </a:rPr>
-              <a:t>Demo del dia</a:t>
+              <a:t>El diagrama de clases se dibuja con una caja de tres compartimentos:...</a:t>
             </a:r>
           </a:p>
         </p:txBody>
@@ -8838,25 +10828,7 @@
                 </a:solidFill>
                 <a:latin typeface="Calibri"/>
               </a:rPr>
-              <a:t>–   </a:t>
-            </a:r>
-            <a:r>
-              <a:rPr sz="2000" b="1" i="0">
-                <a:solidFill>
-                  <a:srgbClr val="333333"/>
-                </a:solidFill>
-                <a:latin typeface="Calibri"/>
-              </a:rPr>
-              <a:t>Herramienta:</a:t>
-            </a:r>
-            <a:r>
-              <a:rPr sz="2000" b="0" i="0">
-                <a:solidFill>
-                  <a:srgbClr val="333333"/>
-                </a:solidFill>
-                <a:latin typeface="Calibri"/>
-              </a:rPr>
-              <a:t> draw.io · Mermaid</a:t>
+              <a:t>–   El diagrama de clases se dibuja con una caja de tres compartimentos: arriba el nombre de la clase en singular y con mayuscula inicial (Mascota, no mascotas), en el medio los atributos y abajo los metodos.</a:t>
             </a:r>
           </a:p>
           <a:p>
@@ -8872,25 +10844,7 @@
                 </a:solidFill>
                 <a:latin typeface="Calibri"/>
               </a:rPr>
-              <a:t>–   </a:t>
-            </a:r>
-            <a:r>
-              <a:rPr sz="2000" b="1" i="0">
-                <a:solidFill>
-                  <a:srgbClr val="333333"/>
-                </a:solidFill>
-                <a:latin typeface="Calibri"/>
-              </a:rPr>
-              <a:t>Demo:</a:t>
-            </a:r>
-            <a:r>
-              <a:rPr sz="2000" b="0" i="0">
-                <a:solidFill>
-                  <a:srgbClr val="333333"/>
-                </a:solidFill>
-                <a:latin typeface="Calibri"/>
-              </a:rPr>
-              <a:t> El docente dibuja en vivo Dueno, Mascota y Cita en draw.io y borra tres atributos mal ubicados explicando a que clase pertenecen de verdad.</a:t>
+              <a:t>–   Un atributo se escribe con visibilidad, nombre y tipo, por ejemplo -nombre: String o -fechaNacimiento: Date, donde el guion significa privado y el mas significa publico.</a:t>
             </a:r>
           </a:p>
           <a:p>
@@ -8906,7 +10860,55 @@
                 </a:solidFill>
                 <a:latin typeface="Calibri"/>
               </a:rPr>
-              <a:t>–   Mismo dominio VetCare — no otro ejemplo. Aqui se diseña, no se programa.</a:t>
+              <a:t>–   Un metodo se escribe con su firma y su tipo de retorno, por ejemplo +calcularEdad(): int.</a:t>
+            </a:r>
+          </a:p>
+          <a:p>
+            <a:pPr>
+              <a:spcAft>
+                <a:spcPts val="800"/>
+              </a:spcAft>
+            </a:pPr>
+            <a:r>
+              <a:rPr sz="2000" b="0" i="0">
+                <a:solidFill>
+                  <a:srgbClr val="333333"/>
+                </a:solidFill>
+                <a:latin typeface="Calibri"/>
+              </a:rPr>
+              <a:t>–   Aqui hay que distinguir dos cosas que los estudiantes mezclan: el modelo de dominio, que solo tiene los conceptos del negocio y sus datos, y el modelo de diseno, que ya incluye clases tecnicas como controladores o repositorios.</a:t>
+            </a:r>
+          </a:p>
+          <a:p>
+            <a:pPr>
+              <a:spcAft>
+                <a:spcPts val="800"/>
+              </a:spcAft>
+            </a:pPr>
+            <a:r>
+              <a:rPr sz="2000" b="0" i="0">
+                <a:solidFill>
+                  <a:srgbClr val="333333"/>
+                </a:solidFill>
+                <a:latin typeface="Calibri"/>
+              </a:rPr>
+              <a:t>–   Hoy hacemos modelo de dominio, asi que en VetCare no aparece ninguna clase llamada MascotaDAO ni ConexionBD: aparecen Dueno, Mascota, Cita, Veterinario y Atencion, que son las cosas de las que habla el Dr. Ramirez cuando cuenta como funciona la clinica.</a:t>
+            </a:r>
+          </a:p>
+          <a:p>
+            <a:pPr>
+              <a:spcAft>
+                <a:spcPts val="800"/>
+              </a:spcAft>
+            </a:pPr>
+            <a:r>
+              <a:rPr sz="2000" b="0" i="0">
+                <a:solidFill>
+                  <a:srgbClr val="333333"/>
+                </a:solidFill>
+                <a:latin typeface="Calibri"/>
+              </a:rPr>
+              <a:t>–   Los metodos, en el modelo de dominio, son solo los que pertenecen naturalmente al concepto, como calcularEdad en Mascota.</a:t>
             </a:r>
           </a:p>
         </p:txBody>
@@ -8981,7 +10983,7 @@
         <p:spPr>
           <a:xfrm>
             <a:off x="0" y="0"/>
-            <a:ext cx="12191695" cy="1170432"/>
+            <a:ext cx="12191695" cy="960120"/>
           </a:xfrm>
           <a:prstGeom prst="rect">
             <a:avLst/>
@@ -9023,7 +11025,7 @@
         </p:nvSpPr>
         <p:spPr>
           <a:xfrm>
-            <a:off x="0" y="1170432"/>
+            <a:off x="0" y="960120"/>
             <a:ext cx="12191695" cy="41148"/>
           </a:xfrm>
           <a:prstGeom prst="rect">
@@ -9067,7 +11069,7 @@
         <p:spPr>
           <a:xfrm>
             <a:off x="457200" y="164592"/>
-            <a:ext cx="11277295" cy="384048"/>
+            <a:ext cx="11277295" cy="502920"/>
           </a:xfrm>
           <a:prstGeom prst="rect">
             <a:avLst/>
@@ -9087,7 +11089,7 @@
                 </a:solidFill>
                 <a:latin typeface="Calibri"/>
               </a:rPr>
-              <a:t>Herramientas de hoy</a:t>
+              <a:t>Las lineas entre clases son la mitad del valor del diagrama (1/2)</a:t>
             </a:r>
           </a:p>
         </p:txBody>
@@ -9100,8 +11102,8 @@
         </p:nvSpPr>
         <p:spPr>
           <a:xfrm>
-            <a:off x="457200" y="566928"/>
-            <a:ext cx="11277295" cy="411480"/>
+            <a:off x="457200" y="1170432"/>
+            <a:ext cx="11277295" cy="5230368"/>
           </a:xfrm>
           <a:prstGeom prst="rect">
             <a:avLst/>
@@ -9114,633 +11116,90 @@
           </a:bodyPr>
           <a:lstStyle/>
           <a:p>
-            <a:r>
-              <a:rPr sz="1400" b="0" i="0">
-                <a:solidFill>
-                  <a:srgbClr val="B8D8EE"/>
-                </a:solidFill>
-                <a:latin typeface="Calibri"/>
-              </a:rPr>
-              <a:t>Gratis · funcionan en el navegador</a:t>
-            </a:r>
-          </a:p>
-        </p:txBody>
-      </p:sp>
-      <p:sp>
-        <p:nvSpPr>
-          <p:cNvPr id="6" name="Rounded Rectangle 5"/>
-          <p:cNvSpPr/>
-          <p:nvPr/>
-        </p:nvSpPr>
-        <p:spPr>
-          <a:xfrm>
-            <a:off x="457200" y="1591056"/>
-            <a:ext cx="3624986" cy="2331720"/>
-          </a:xfrm>
-          <a:prstGeom prst="roundRect">
-            <a:avLst>
-              <a:gd name="adj" fmla="val 12000"/>
-            </a:avLst>
-          </a:prstGeom>
-          <a:solidFill>
-            <a:srgbClr val="F2F2F2"/>
-          </a:solidFill>
-          <a:ln>
-            <a:noFill/>
-          </a:ln>
-        </p:spPr>
-        <p:style>
-          <a:lnRef idx="1">
-            <a:schemeClr val="accent1"/>
-          </a:lnRef>
-          <a:fillRef idx="3">
-            <a:schemeClr val="accent1"/>
-          </a:fillRef>
-          <a:effectRef idx="2">
-            <a:schemeClr val="accent1"/>
-          </a:effectRef>
-          <a:fontRef idx="minor">
-            <a:schemeClr val="lt1"/>
-          </a:fontRef>
-        </p:style>
-        <p:txBody>
-          <a:bodyPr rtlCol="0" anchor="ctr"/>
-          <a:lstStyle/>
-          <a:p>
-            <a:pPr algn="ctr"/>
-          </a:p>
-        </p:txBody>
-      </p:sp>
-      <p:sp>
-        <p:nvSpPr>
-          <p:cNvPr id="7" name="Rectangle 6"/>
-          <p:cNvSpPr/>
-          <p:nvPr/>
-        </p:nvSpPr>
-        <p:spPr>
-          <a:xfrm>
-            <a:off x="457200" y="1591056"/>
-            <a:ext cx="3624986" cy="64008"/>
-          </a:xfrm>
-          <a:prstGeom prst="rect">
-            <a:avLst/>
-          </a:prstGeom>
-          <a:solidFill>
-            <a:srgbClr val="095292"/>
-          </a:solidFill>
-          <a:ln>
-            <a:noFill/>
-          </a:ln>
-        </p:spPr>
-        <p:style>
-          <a:lnRef idx="1">
-            <a:schemeClr val="accent1"/>
-          </a:lnRef>
-          <a:fillRef idx="3">
-            <a:schemeClr val="accent1"/>
-          </a:fillRef>
-          <a:effectRef idx="2">
-            <a:schemeClr val="accent1"/>
-          </a:effectRef>
-          <a:fontRef idx="minor">
-            <a:schemeClr val="lt1"/>
-          </a:fontRef>
-        </p:style>
-        <p:txBody>
-          <a:bodyPr rtlCol="0" anchor="ctr"/>
-          <a:lstStyle/>
-          <a:p>
-            <a:pPr algn="ctr"/>
-          </a:p>
-        </p:txBody>
-      </p:sp>
-      <p:sp>
-        <p:nvSpPr>
-          <p:cNvPr id="8" name="Rectangle 7"/>
-          <p:cNvSpPr/>
-          <p:nvPr/>
-        </p:nvSpPr>
-        <p:spPr>
-          <a:xfrm>
-            <a:off x="457200" y="1655064"/>
-            <a:ext cx="3624986" cy="27432"/>
-          </a:xfrm>
-          <a:prstGeom prst="rect">
-            <a:avLst/>
-          </a:prstGeom>
-          <a:solidFill>
-            <a:srgbClr val="FFD000"/>
-          </a:solidFill>
-          <a:ln>
-            <a:noFill/>
-          </a:ln>
-        </p:spPr>
-        <p:style>
-          <a:lnRef idx="1">
-            <a:schemeClr val="accent1"/>
-          </a:lnRef>
-          <a:fillRef idx="3">
-            <a:schemeClr val="accent1"/>
-          </a:fillRef>
-          <a:effectRef idx="2">
-            <a:schemeClr val="accent1"/>
-          </a:effectRef>
-          <a:fontRef idx="minor">
-            <a:schemeClr val="lt1"/>
-          </a:fontRef>
-        </p:style>
-        <p:txBody>
-          <a:bodyPr rtlCol="0" anchor="ctr"/>
-          <a:lstStyle/>
-          <a:p>
-            <a:pPr algn="ctr"/>
-          </a:p>
-        </p:txBody>
-      </p:sp>
-      <p:pic>
-        <p:nvPicPr>
-          <p:cNvPr id="9" name="Picture 8" descr="drawio.png"/>
-          <p:cNvPicPr>
-            <a:picLocks noChangeAspect="1"/>
-          </p:cNvPicPr>
-          <p:nvPr/>
-        </p:nvPicPr>
-        <p:blipFill>
-          <a:blip r:embed="rId2"/>
-          <a:stretch>
-            <a:fillRect/>
-          </a:stretch>
-        </p:blipFill>
-        <p:spPr>
-          <a:xfrm>
-            <a:off x="1643329" y="1847087"/>
-            <a:ext cx="1252728" cy="1252728"/>
-          </a:xfrm>
-          <a:prstGeom prst="rect">
-            <a:avLst/>
-          </a:prstGeom>
-        </p:spPr>
-      </p:pic>
-      <p:sp>
-        <p:nvSpPr>
-          <p:cNvPr id="10" name="TextBox 9"/>
-          <p:cNvSpPr txBox="1"/>
-          <p:nvPr/>
-        </p:nvSpPr>
-        <p:spPr>
-          <a:xfrm>
-            <a:off x="530352" y="3191256"/>
-            <a:ext cx="3478682" cy="621792"/>
-          </a:xfrm>
-          <a:prstGeom prst="rect">
-            <a:avLst/>
-          </a:prstGeom>
-          <a:noFill/>
-        </p:spPr>
-        <p:txBody>
-          <a:bodyPr wrap="square" anchor="t"/>
-          <a:lstStyle/>
-          <a:p>
-            <a:pPr algn="ctr"/>
-            <a:r>
-              <a:rPr sz="1300" b="1" i="0">
-                <a:solidFill>
-                  <a:srgbClr val="095292"/>
-                </a:solidFill>
-                <a:latin typeface="Calibri"/>
-              </a:rPr>
-              <a:t>Draw.Io</a:t>
-            </a:r>
-          </a:p>
-          <a:p>
-            <a:pPr algn="ctr">
-              <a:spcBef>
-                <a:spcPts val="200"/>
-              </a:spcBef>
+            <a:pPr>
+              <a:spcAft>
+                <a:spcPts val="800"/>
+              </a:spcAft>
             </a:pPr>
             <a:r>
-              <a:rPr sz="1000" b="0" i="0">
-                <a:solidFill>
-                  <a:srgbClr val="666666"/>
-                </a:solidFill>
-                <a:latin typeface="Calibri"/>
-              </a:rPr>
-              <a:t>Diagramas UML y de contexto</a:t>
-            </a:r>
-          </a:p>
-        </p:txBody>
-      </p:sp>
-      <p:sp>
-        <p:nvSpPr>
-          <p:cNvPr id="11" name="Rounded Rectangle 10"/>
-          <p:cNvSpPr/>
-          <p:nvPr/>
-        </p:nvSpPr>
-        <p:spPr>
-          <a:xfrm>
-            <a:off x="4283354" y="1591056"/>
-            <a:ext cx="3624986" cy="2331720"/>
-          </a:xfrm>
-          <a:prstGeom prst="roundRect">
-            <a:avLst>
-              <a:gd name="adj" fmla="val 12000"/>
-            </a:avLst>
-          </a:prstGeom>
-          <a:solidFill>
-            <a:srgbClr val="F2F2F2"/>
-          </a:solidFill>
-          <a:ln>
-            <a:noFill/>
-          </a:ln>
-        </p:spPr>
-        <p:style>
-          <a:lnRef idx="1">
-            <a:schemeClr val="accent1"/>
-          </a:lnRef>
-          <a:fillRef idx="3">
-            <a:schemeClr val="accent1"/>
-          </a:fillRef>
-          <a:effectRef idx="2">
-            <a:schemeClr val="accent1"/>
-          </a:effectRef>
-          <a:fontRef idx="minor">
-            <a:schemeClr val="lt1"/>
-          </a:fontRef>
-        </p:style>
-        <p:txBody>
-          <a:bodyPr rtlCol="0" anchor="ctr"/>
-          <a:lstStyle/>
-          <a:p>
-            <a:pPr algn="ctr"/>
-          </a:p>
-        </p:txBody>
-      </p:sp>
-      <p:sp>
-        <p:nvSpPr>
-          <p:cNvPr id="12" name="Rectangle 11"/>
-          <p:cNvSpPr/>
-          <p:nvPr/>
-        </p:nvSpPr>
-        <p:spPr>
-          <a:xfrm>
-            <a:off x="4283354" y="1591056"/>
-            <a:ext cx="3624986" cy="64008"/>
-          </a:xfrm>
-          <a:prstGeom prst="rect">
-            <a:avLst/>
-          </a:prstGeom>
-          <a:solidFill>
-            <a:srgbClr val="095292"/>
-          </a:solidFill>
-          <a:ln>
-            <a:noFill/>
-          </a:ln>
-        </p:spPr>
-        <p:style>
-          <a:lnRef idx="1">
-            <a:schemeClr val="accent1"/>
-          </a:lnRef>
-          <a:fillRef idx="3">
-            <a:schemeClr val="accent1"/>
-          </a:fillRef>
-          <a:effectRef idx="2">
-            <a:schemeClr val="accent1"/>
-          </a:effectRef>
-          <a:fontRef idx="minor">
-            <a:schemeClr val="lt1"/>
-          </a:fontRef>
-        </p:style>
-        <p:txBody>
-          <a:bodyPr rtlCol="0" anchor="ctr"/>
-          <a:lstStyle/>
-          <a:p>
-            <a:pPr algn="ctr"/>
-          </a:p>
-        </p:txBody>
-      </p:sp>
-      <p:sp>
-        <p:nvSpPr>
-          <p:cNvPr id="13" name="Rectangle 12"/>
-          <p:cNvSpPr/>
-          <p:nvPr/>
-        </p:nvSpPr>
-        <p:spPr>
-          <a:xfrm>
-            <a:off x="4283354" y="1655064"/>
-            <a:ext cx="3624986" cy="27432"/>
-          </a:xfrm>
-          <a:prstGeom prst="rect">
-            <a:avLst/>
-          </a:prstGeom>
-          <a:solidFill>
-            <a:srgbClr val="FFD000"/>
-          </a:solidFill>
-          <a:ln>
-            <a:noFill/>
-          </a:ln>
-        </p:spPr>
-        <p:style>
-          <a:lnRef idx="1">
-            <a:schemeClr val="accent1"/>
-          </a:lnRef>
-          <a:fillRef idx="3">
-            <a:schemeClr val="accent1"/>
-          </a:fillRef>
-          <a:effectRef idx="2">
-            <a:schemeClr val="accent1"/>
-          </a:effectRef>
-          <a:fontRef idx="minor">
-            <a:schemeClr val="lt1"/>
-          </a:fontRef>
-        </p:style>
-        <p:txBody>
-          <a:bodyPr rtlCol="0" anchor="ctr"/>
-          <a:lstStyle/>
-          <a:p>
-            <a:pPr algn="ctr"/>
-          </a:p>
-        </p:txBody>
-      </p:sp>
-      <p:pic>
-        <p:nvPicPr>
-          <p:cNvPr id="14" name="Picture 13" descr="mermaid.png"/>
-          <p:cNvPicPr>
-            <a:picLocks noChangeAspect="1"/>
-          </p:cNvPicPr>
-          <p:nvPr/>
-        </p:nvPicPr>
-        <p:blipFill>
-          <a:blip r:embed="rId3"/>
-          <a:stretch>
-            <a:fillRect/>
-          </a:stretch>
-        </p:blipFill>
-        <p:spPr>
-          <a:xfrm>
-            <a:off x="5469483" y="1847087"/>
-            <a:ext cx="1252728" cy="1252728"/>
-          </a:xfrm>
-          <a:prstGeom prst="rect">
-            <a:avLst/>
-          </a:prstGeom>
-        </p:spPr>
-      </p:pic>
-      <p:sp>
-        <p:nvSpPr>
-          <p:cNvPr id="15" name="TextBox 14"/>
-          <p:cNvSpPr txBox="1"/>
-          <p:nvPr/>
-        </p:nvSpPr>
-        <p:spPr>
-          <a:xfrm>
-            <a:off x="4356506" y="3191256"/>
-            <a:ext cx="3478682" cy="621792"/>
-          </a:xfrm>
-          <a:prstGeom prst="rect">
-            <a:avLst/>
-          </a:prstGeom>
-          <a:noFill/>
-        </p:spPr>
-        <p:txBody>
-          <a:bodyPr wrap="square" anchor="t"/>
-          <a:lstStyle/>
-          <a:p>
-            <a:pPr algn="ctr"/>
-            <a:r>
-              <a:rPr sz="1300" b="1" i="0">
-                <a:solidFill>
-                  <a:srgbClr val="095292"/>
-                </a:solidFill>
-                <a:latin typeface="Calibri"/>
-              </a:rPr>
-              <a:t>Mermaid</a:t>
-            </a:r>
-          </a:p>
-          <a:p>
-            <a:pPr algn="ctr">
-              <a:spcBef>
-                <a:spcPts val="200"/>
-              </a:spcBef>
+              <a:rPr sz="2000" b="0" i="0">
+                <a:solidFill>
+                  <a:srgbClr val="333333"/>
+                </a:solidFill>
+                <a:latin typeface="Calibri"/>
+              </a:rPr>
+              <a:t>–   Las lineas entre clases son la mitad del valor del diagrama.</a:t>
+            </a:r>
+          </a:p>
+          <a:p>
+            <a:pPr>
+              <a:spcAft>
+                <a:spcPts val="800"/>
+              </a:spcAft>
             </a:pPr>
             <a:r>
-              <a:rPr sz="1000" b="0" i="0">
-                <a:solidFill>
-                  <a:srgbClr val="666666"/>
-                </a:solidFill>
-                <a:latin typeface="Calibri"/>
-              </a:rPr>
-              <a:t>Diagramas como texto versionable</a:t>
-            </a:r>
-          </a:p>
-        </p:txBody>
-      </p:sp>
-      <p:sp>
-        <p:nvSpPr>
-          <p:cNvPr id="16" name="Rounded Rectangle 15"/>
-          <p:cNvSpPr/>
-          <p:nvPr/>
-        </p:nvSpPr>
-        <p:spPr>
-          <a:xfrm>
-            <a:off x="8109508" y="1591056"/>
-            <a:ext cx="3624986" cy="2331720"/>
-          </a:xfrm>
-          <a:prstGeom prst="roundRect">
-            <a:avLst>
-              <a:gd name="adj" fmla="val 12000"/>
-            </a:avLst>
-          </a:prstGeom>
-          <a:solidFill>
-            <a:srgbClr val="F2F2F2"/>
-          </a:solidFill>
-          <a:ln>
-            <a:noFill/>
-          </a:ln>
-        </p:spPr>
-        <p:style>
-          <a:lnRef idx="1">
-            <a:schemeClr val="accent1"/>
-          </a:lnRef>
-          <a:fillRef idx="3">
-            <a:schemeClr val="accent1"/>
-          </a:fillRef>
-          <a:effectRef idx="2">
-            <a:schemeClr val="accent1"/>
-          </a:effectRef>
-          <a:fontRef idx="minor">
-            <a:schemeClr val="lt1"/>
-          </a:fontRef>
-        </p:style>
-        <p:txBody>
-          <a:bodyPr rtlCol="0" anchor="ctr"/>
-          <a:lstStyle/>
-          <a:p>
-            <a:pPr algn="ctr"/>
-          </a:p>
-        </p:txBody>
-      </p:sp>
-      <p:sp>
-        <p:nvSpPr>
-          <p:cNvPr id="17" name="Rectangle 16"/>
-          <p:cNvSpPr/>
-          <p:nvPr/>
-        </p:nvSpPr>
-        <p:spPr>
-          <a:xfrm>
-            <a:off x="8109508" y="1591056"/>
-            <a:ext cx="3624986" cy="64008"/>
-          </a:xfrm>
-          <a:prstGeom prst="rect">
-            <a:avLst/>
-          </a:prstGeom>
-          <a:solidFill>
-            <a:srgbClr val="095292"/>
-          </a:solidFill>
-          <a:ln>
-            <a:noFill/>
-          </a:ln>
-        </p:spPr>
-        <p:style>
-          <a:lnRef idx="1">
-            <a:schemeClr val="accent1"/>
-          </a:lnRef>
-          <a:fillRef idx="3">
-            <a:schemeClr val="accent1"/>
-          </a:fillRef>
-          <a:effectRef idx="2">
-            <a:schemeClr val="accent1"/>
-          </a:effectRef>
-          <a:fontRef idx="minor">
-            <a:schemeClr val="lt1"/>
-          </a:fontRef>
-        </p:style>
-        <p:txBody>
-          <a:bodyPr rtlCol="0" anchor="ctr"/>
-          <a:lstStyle/>
-          <a:p>
-            <a:pPr algn="ctr"/>
-          </a:p>
-        </p:txBody>
-      </p:sp>
-      <p:sp>
-        <p:nvSpPr>
-          <p:cNvPr id="18" name="Rectangle 17"/>
-          <p:cNvSpPr/>
-          <p:nvPr/>
-        </p:nvSpPr>
-        <p:spPr>
-          <a:xfrm>
-            <a:off x="8109508" y="1655064"/>
-            <a:ext cx="3624986" cy="27432"/>
-          </a:xfrm>
-          <a:prstGeom prst="rect">
-            <a:avLst/>
-          </a:prstGeom>
-          <a:solidFill>
-            <a:srgbClr val="FFD000"/>
-          </a:solidFill>
-          <a:ln>
-            <a:noFill/>
-          </a:ln>
-        </p:spPr>
-        <p:style>
-          <a:lnRef idx="1">
-            <a:schemeClr val="accent1"/>
-          </a:lnRef>
-          <a:fillRef idx="3">
-            <a:schemeClr val="accent1"/>
-          </a:fillRef>
-          <a:effectRef idx="2">
-            <a:schemeClr val="accent1"/>
-          </a:effectRef>
-          <a:fontRef idx="minor">
-            <a:schemeClr val="lt1"/>
-          </a:fontRef>
-        </p:style>
-        <p:txBody>
-          <a:bodyPr rtlCol="0" anchor="ctr"/>
-          <a:lstStyle/>
-          <a:p>
-            <a:pPr algn="ctr"/>
-          </a:p>
-        </p:txBody>
-      </p:sp>
-      <p:pic>
-        <p:nvPicPr>
-          <p:cNvPr id="19" name="Picture 18" descr="examlab.png"/>
-          <p:cNvPicPr>
-            <a:picLocks noChangeAspect="1"/>
-          </p:cNvPicPr>
-          <p:nvPr/>
-        </p:nvPicPr>
-        <p:blipFill>
-          <a:blip r:embed="rId4"/>
-          <a:stretch>
-            <a:fillRect/>
-          </a:stretch>
-        </p:blipFill>
-        <p:spPr>
-          <a:xfrm>
-            <a:off x="9295638" y="1847087"/>
-            <a:ext cx="1252728" cy="1252728"/>
-          </a:xfrm>
-          <a:prstGeom prst="rect">
-            <a:avLst/>
-          </a:prstGeom>
-        </p:spPr>
-      </p:pic>
-      <p:sp>
-        <p:nvSpPr>
-          <p:cNvPr id="20" name="TextBox 19"/>
-          <p:cNvSpPr txBox="1"/>
-          <p:nvPr/>
-        </p:nvSpPr>
-        <p:spPr>
-          <a:xfrm>
-            <a:off x="8182660" y="3191256"/>
-            <a:ext cx="3478682" cy="621792"/>
-          </a:xfrm>
-          <a:prstGeom prst="rect">
-            <a:avLst/>
-          </a:prstGeom>
-          <a:noFill/>
-        </p:spPr>
-        <p:txBody>
-          <a:bodyPr wrap="square" anchor="t"/>
-          <a:lstStyle/>
-          <a:p>
-            <a:pPr algn="ctr"/>
-            <a:r>
-              <a:rPr sz="1300" b="1" i="0">
-                <a:solidFill>
-                  <a:srgbClr val="095292"/>
-                </a:solidFill>
-                <a:latin typeface="Calibri"/>
-              </a:rPr>
-              <a:t>la plataforma del curso</a:t>
-            </a:r>
-          </a:p>
-          <a:p>
-            <a:pPr algn="ctr">
-              <a:spcBef>
-                <a:spcPts val="200"/>
-              </a:spcBef>
+              <a:rPr sz="2000" b="0" i="0">
+                <a:solidFill>
+                  <a:srgbClr val="333333"/>
+                </a:solidFill>
+                <a:latin typeface="Calibri"/>
+              </a:rPr>
+              <a:t>–   Una asociacion es una relacion estable entre dos conceptos y se dibuja con una linea recta, un nombre que se lee como frase (Dueno tiene Mascota) y</a:t>
+            </a:r>
+          </a:p>
+          <a:p>
+            <a:pPr>
+              <a:spcAft>
+                <a:spcPts val="800"/>
+              </a:spcAft>
             </a:pPr>
             <a:r>
-              <a:rPr sz="1000" b="0" i="0">
-                <a:solidFill>
-                  <a:srgbClr val="666666"/>
-                </a:solidFill>
-                <a:latin typeface="Calibri"/>
-              </a:rPr>
-              <a:t>Entrega del taller · en la fecha que indique el docente</a:t>
-            </a:r>
-          </a:p>
-        </p:txBody>
-      </p:sp>
-      <p:sp>
-        <p:nvSpPr>
-          <p:cNvPr id="21" name="TextBox 20"/>
+              <a:rPr sz="2000" b="0" i="0">
+                <a:solidFill>
+                  <a:srgbClr val="333333"/>
+                </a:solidFill>
+                <a:latin typeface="Calibri"/>
+              </a:rPr>
+              <a:t>–   En cada extremo, una multiplicidad que responde cuantos: 1 exactamente uno, 0..1 opcional, 1..* uno o mas, 0..* cero o mas.</a:t>
+            </a:r>
+          </a:p>
+          <a:p>
+            <a:pPr>
+              <a:spcAft>
+                <a:spcPts val="800"/>
+              </a:spcAft>
+            </a:pPr>
+            <a:r>
+              <a:rPr sz="2000" b="0" i="0">
+                <a:solidFill>
+                  <a:srgbClr val="333333"/>
+                </a:solidFill>
+                <a:latin typeface="Calibri"/>
+              </a:rPr>
+              <a:t>–   En VetCare, Dueno 1 --- 0..* Mascota se lee un dueno puede tener cero o mas mascotas y una mascota pertenece a exactamente un dueno; ese 1 del lado del dueno es una decision de negocio que hay que confirmar con el cliente, no una suposicion.</a:t>
+            </a:r>
+          </a:p>
+          <a:p>
+            <a:pPr>
+              <a:spcAft>
+                <a:spcPts val="800"/>
+              </a:spcAft>
+            </a:pPr>
+            <a:r>
+              <a:rPr sz="2000" b="0" i="0">
+                <a:solidFill>
+                  <a:srgbClr val="333333"/>
+                </a:solidFill>
+                <a:latin typeface="Calibri"/>
+              </a:rPr>
+              <a:t>–   Cita relaciona a Mascota y a Veterinario, cada cita con exactamente una mascota y un veterinario, y cada veterinario con muchas citas.</a:t>
+            </a:r>
+          </a:p>
+        </p:txBody>
+      </p:sp>
+      <p:sp>
+        <p:nvSpPr>
+          <p:cNvPr id="6" name="TextBox 5"/>
           <p:cNvSpPr txBox="1"/>
           <p:nvPr/>
         </p:nvSpPr>
@@ -9914,7 +11373,7 @@
                 </a:solidFill>
                 <a:latin typeface="Calibri"/>
               </a:rPr>
-              <a:t>Taller PI — por que importa</a:t>
+              <a:t>Las lineas entre clases son la mitad del valor del diagrama (2/2)</a:t>
             </a:r>
           </a:p>
         </p:txBody>
@@ -9953,25 +11412,7 @@
                 </a:solidFill>
                 <a:latin typeface="Calibri"/>
               </a:rPr>
-              <a:t>–   </a:t>
-            </a:r>
-            <a:r>
-              <a:rPr sz="2000" b="1" i="0">
-                <a:solidFill>
-                  <a:srgbClr val="333333"/>
-                </a:solidFill>
-                <a:latin typeface="Calibri"/>
-              </a:rPr>
-              <a:t>Por que importa al PI:</a:t>
-            </a:r>
-            <a:r>
-              <a:rPr sz="2000" b="0" i="0">
-                <a:solidFill>
-                  <a:srgbClr val="333333"/>
-                </a:solidFill>
-                <a:latin typeface="Calibri"/>
-              </a:rPr>
-              <a:t> este diagrama de clases es el plano maestro de VetCare: de el salen el diccionario de datos, las tablas de la base de datos y las clases que se programan en Programacion II.</a:t>
+              <a:t>–   La composicion (rombo relleno) se usa cuando la parte no vive sin el todo: en VetCare las Atenciones de una Mascota son parte de su historia clinica y no tienen sentido si se elimina la ficha de la mascota.</a:t>
             </a:r>
           </a:p>
           <a:p>
@@ -9987,7 +11428,7 @@
                 </a:solidFill>
                 <a:latin typeface="Calibri"/>
               </a:rPr>
-              <a:t>–   Es el primer artefacto del curso que se lee igual en Cali, en Bogota o en Berlin, porque UML es un estandar y no una convencion del salon.</a:t>
+              <a:t>–   La agregacion (rombo vacio) se usa cuando la parte sobrevive por su cuenta, como un Veterinario que pertenece a una Sede pero sigue existiendo si la sede cierra.</a:t>
             </a:r>
           </a:p>
           <a:p>
@@ -10003,7 +11444,7 @@
                 </a:solidFill>
                 <a:latin typeface="Calibri"/>
               </a:rPr>
-              <a:t>–   Si una clase no puede rastrearse a un requisito o a una historia del backlog, sobra; y si un requisito no tiene donde vivir en el diagrama, falta una clase.</a:t>
+              <a:t>–   La herencia (triangulo) solo cuando hay un es-un verdadero, por ejemplo Persona con Dueno y Veterinario como especializaciones, decision que solo vale la pena si comparten varios atributos.</a:t>
             </a:r>
           </a:p>
         </p:txBody>
@@ -10184,7 +11625,7 @@
                 </a:solidFill>
                 <a:latin typeface="Calibri"/>
               </a:rPr>
-              <a:t>Taller PI — punto de partida</a:t>
+              <a:t>El diagrama que dibujamos hoy no se queda en la clase: es la pieza que...</a:t>
             </a:r>
           </a:p>
         </p:txBody>
@@ -10223,7 +11664,7 @@
                 </a:solidFill>
                 <a:latin typeface="Calibri"/>
               </a:rPr>
-              <a:t>–   Ya existen el catalogo de RF/RNF y el backlog de historias de VetCare, ambos escritos en texto y sin ninguna representacion grafica.</a:t>
+              <a:t>–   El diagrama que dibujamos hoy no se queda en la clase: es la pieza que viaja mas lejos del Proyecto Integrador.</a:t>
             </a:r>
           </a:p>
           <a:p>
@@ -10239,7 +11680,7 @@
                 </a:solidFill>
                 <a:latin typeface="Calibri"/>
               </a:rPr>
-              <a:t>–   Nadie ha definido todavia que conceptos del negocio existen, que datos guarda cada uno ni como se relacionan entre si.</a:t>
+              <a:t>–   De cada clase salen los campos del diccionario de datos y, mas adelante, las tablas de la base de datos: la clase Mascota con sus atributos se convierte en la tabla mascota, la asociacion 1 a 0..* se convierte en una llave foranea</a:t>
             </a:r>
           </a:p>
           <a:p>
@@ -10255,7 +11696,55 @@
                 </a:solidFill>
                 <a:latin typeface="Calibri"/>
               </a:rPr>
-              <a:t>–   El equipo discute en palabras si una mascota puede tener dos duenos y si la cita pertenece a la mascota o al veterinario, y esa discusion no se cierra hablando.</a:t>
+              <a:t>–   Y las multiplicidades muchos a muchos se convierten en una tabla intermedia.</a:t>
+            </a:r>
+          </a:p>
+          <a:p>
+            <a:pPr>
+              <a:spcAft>
+                <a:spcPts val="800"/>
+              </a:spcAft>
+            </a:pPr>
+            <a:r>
+              <a:rPr sz="2000" b="0" i="0">
+                <a:solidFill>
+                  <a:srgbClr val="333333"/>
+                </a:solidFill>
+                <a:latin typeface="Calibri"/>
+              </a:rPr>
+              <a:t>–   Para quien cursa tambien Programacion II, este diagrama es el mapa que le dice que clases crear y que atributos poner; para quien solo cursa Programacion II, es lo que recibe ya hecho y debe respetar</a:t>
+            </a:r>
+          </a:p>
+          <a:p>
+            <a:pPr>
+              <a:spcAft>
+                <a:spcPts val="800"/>
+              </a:spcAft>
+            </a:pPr>
+            <a:r>
+              <a:rPr sz="2000" b="0" i="0">
+                <a:solidFill>
+                  <a:srgbClr val="333333"/>
+                </a:solidFill>
+                <a:latin typeface="Calibri"/>
+              </a:rPr>
+              <a:t>–   Y para quien solo cursa Seminario, es el corazon del documento de diseno que se entrega al final junto con el prototipo navegable, una ruta completa y perfectamente valida donde el entregable profesional es el plano, no el ladrillo.</a:t>
+            </a:r>
+          </a:p>
+          <a:p>
+            <a:pPr>
+              <a:spcAft>
+                <a:spcPts val="800"/>
+              </a:spcAft>
+            </a:pPr>
+            <a:r>
+              <a:rPr sz="2000" b="0" i="0">
+                <a:solidFill>
+                  <a:srgbClr val="333333"/>
+                </a:solidFill>
+                <a:latin typeface="Calibri"/>
+              </a:rPr>
+              <a:t>–   Por eso el diagrama debe estar limpio: nombres en singular, sin atributos repetidos en dos clases, sin lineas sueltas y sin cajas que no correspondan a ningun requisito.</a:t>
             </a:r>
           </a:p>
         </p:txBody>

--- a/Seminario de Sistemas/Clases/Clase 8 - Introduccion a UML/Presentacion.pptx
+++ b/Seminario de Sistemas/Clases/Clase 8 - Introduccion a UML/Presentacion.pptx
@@ -24,6 +24,8 @@
     <p:sldId id="272" r:id="rId23"/>
     <p:sldId id="273" r:id="rId24"/>
     <p:sldId id="274" r:id="rId25"/>
+    <p:sldId id="275" r:id="rId26"/>
+    <p:sldId id="276" r:id="rId27"/>
   </p:sldIdLst>
   <p:sldSz cx="12191695" cy="6858000" type="screen4x3"/>
   <p:notesSz cx="6858000" cy="9144000"/>
@@ -3624,141 +3626,21 @@
                 </a:solidFill>
                 <a:latin typeface="Calibri"/>
               </a:rPr>
-              <a:t>Modelo de dominio de VetCare en sintaxis Mermaid (diagrama, no codigo)</a:t>
-            </a:r>
-          </a:p>
-        </p:txBody>
-      </p:sp>
-      <p:sp>
-        <p:nvSpPr>
-          <p:cNvPr id="5" name="Rounded Rectangle 4"/>
-          <p:cNvSpPr/>
-          <p:nvPr/>
-        </p:nvSpPr>
-        <p:spPr>
-          <a:xfrm>
-            <a:off x="457200" y="1261872"/>
-            <a:ext cx="11277295" cy="4773168"/>
-          </a:xfrm>
-          <a:prstGeom prst="roundRect">
-            <a:avLst>
-              <a:gd name="adj" fmla="val 12000"/>
-            </a:avLst>
-          </a:prstGeom>
-          <a:solidFill>
-            <a:srgbClr val="1E2A38"/>
-          </a:solidFill>
-          <a:ln>
-            <a:noFill/>
-          </a:ln>
-        </p:spPr>
-        <p:style>
-          <a:lnRef idx="1">
-            <a:schemeClr val="accent1"/>
-          </a:lnRef>
-          <a:fillRef idx="3">
-            <a:schemeClr val="accent1"/>
-          </a:fillRef>
-          <a:effectRef idx="2">
-            <a:schemeClr val="accent1"/>
-          </a:effectRef>
-          <a:fontRef idx="minor">
-            <a:schemeClr val="lt1"/>
-          </a:fontRef>
-        </p:style>
-        <p:txBody>
-          <a:bodyPr rtlCol="0" anchor="ctr"/>
-          <a:lstStyle/>
-          <a:p>
-            <a:pPr algn="ctr"/>
-          </a:p>
-        </p:txBody>
-      </p:sp>
-      <p:sp>
-        <p:nvSpPr>
-          <p:cNvPr id="6" name="Rectangle 5"/>
-          <p:cNvSpPr/>
-          <p:nvPr/>
-        </p:nvSpPr>
-        <p:spPr>
-          <a:xfrm>
-            <a:off x="457200" y="1261872"/>
-            <a:ext cx="11277295" cy="320040"/>
-          </a:xfrm>
-          <a:prstGeom prst="rect">
-            <a:avLst/>
-          </a:prstGeom>
-          <a:solidFill>
-            <a:srgbClr val="095292"/>
-          </a:solidFill>
-          <a:ln>
-            <a:noFill/>
-          </a:ln>
-        </p:spPr>
-        <p:style>
-          <a:lnRef idx="1">
-            <a:schemeClr val="accent1"/>
-          </a:lnRef>
-          <a:fillRef idx="3">
-            <a:schemeClr val="accent1"/>
-          </a:fillRef>
-          <a:effectRef idx="2">
-            <a:schemeClr val="accent1"/>
-          </a:effectRef>
-          <a:fontRef idx="minor">
-            <a:schemeClr val="lt1"/>
-          </a:fontRef>
-        </p:style>
-        <p:txBody>
-          <a:bodyPr rtlCol="0" anchor="ctr"/>
-          <a:lstStyle/>
-          <a:p>
-            <a:pPr algn="ctr"/>
-          </a:p>
-        </p:txBody>
-      </p:sp>
-      <p:sp>
-        <p:nvSpPr>
-          <p:cNvPr id="7" name="TextBox 6"/>
+              <a:t>Las lineas entre clases son la mitad del valor del diagrama (2/2)</a:t>
+            </a:r>
+          </a:p>
+        </p:txBody>
+      </p:sp>
+      <p:sp>
+        <p:nvSpPr>
+          <p:cNvPr id="5" name="TextBox 4"/>
           <p:cNvSpPr txBox="1"/>
           <p:nvPr/>
         </p:nvSpPr>
         <p:spPr>
           <a:xfrm>
-            <a:off x="685800" y="1307592"/>
-            <a:ext cx="10820095" cy="256032"/>
-          </a:xfrm>
-          <a:prstGeom prst="rect">
-            <a:avLst/>
-          </a:prstGeom>
-          <a:noFill/>
-        </p:spPr>
-        <p:txBody>
-          <a:bodyPr wrap="square" anchor="ctr"/>
-          <a:lstStyle/>
-          <a:p>
-            <a:r>
-              <a:rPr sz="1000" b="1" i="0">
-                <a:solidFill>
-                  <a:srgbClr val="269CCB"/>
-                </a:solidFill>
-                <a:latin typeface="Calibri"/>
-              </a:rPr>
-              <a:t>● ● ●</a:t>
-            </a:r>
-          </a:p>
-        </p:txBody>
-      </p:sp>
-      <p:sp>
-        <p:nvSpPr>
-          <p:cNvPr id="8" name="TextBox 7"/>
-          <p:cNvSpPr txBox="1"/>
-          <p:nvPr/>
-        </p:nvSpPr>
-        <p:spPr>
-          <a:xfrm>
-            <a:off x="777240" y="1719072"/>
-            <a:ext cx="5181447" cy="4133087"/>
+            <a:off x="457200" y="1170432"/>
+            <a:ext cx="11277295" cy="5230368"/>
           </a:xfrm>
           <a:prstGeom prst="rect">
             <a:avLst/>
@@ -3773,530 +3655,56 @@
           <a:p>
             <a:pPr>
               <a:spcAft>
-                <a:spcPts val="371"/>
+                <a:spcPts val="800"/>
               </a:spcAft>
             </a:pPr>
             <a:r>
-              <a:rPr sz="1300" b="0" i="0">
-                <a:solidFill>
-                  <a:srgbClr val="FFFFFF"/>
-                </a:solidFill>
-                <a:latin typeface="Calibri"/>
-              </a:rPr>
-              <a:t>classDiagram</a:t>
+              <a:rPr sz="2000" b="0" i="0">
+                <a:solidFill>
+                  <a:srgbClr val="333333"/>
+                </a:solidFill>
+                <a:latin typeface="Calibri"/>
+              </a:rPr>
+              <a:t>–   La composicion (rombo relleno) se usa cuando la parte no vive sin el todo: en VetCare las Atenciones de una Mascota son parte de su historia clinica y no tienen sentido si se elimina la ficha de la mascota.</a:t>
             </a:r>
           </a:p>
           <a:p>
             <a:pPr>
               <a:spcAft>
-                <a:spcPts val="371"/>
+                <a:spcPts val="800"/>
               </a:spcAft>
             </a:pPr>
             <a:r>
-              <a:rPr sz="1300" b="0" i="0">
-                <a:solidFill>
-                  <a:srgbClr val="FFFFFF"/>
-                </a:solidFill>
-                <a:latin typeface="Calibri"/>
-              </a:rPr>
-              <a:t>  class Dueno {</a:t>
+              <a:rPr sz="2000" b="0" i="0">
+                <a:solidFill>
+                  <a:srgbClr val="333333"/>
+                </a:solidFill>
+                <a:latin typeface="Calibri"/>
+              </a:rPr>
+              <a:t>–   La agregacion (rombo vacio) se usa cuando la parte sobrevive por su cuenta, como un Veterinario que pertenece a una Sede pero sigue existiendo si la sede cierra.</a:t>
             </a:r>
           </a:p>
           <a:p>
             <a:pPr>
               <a:spcAft>
-                <a:spcPts val="371"/>
+                <a:spcPts val="800"/>
               </a:spcAft>
             </a:pPr>
             <a:r>
-              <a:rPr sz="1300" b="0" i="0">
-                <a:solidFill>
-                  <a:srgbClr val="FFFFFF"/>
-                </a:solidFill>
-                <a:latin typeface="Calibri"/>
-              </a:rPr>
-              <a:t>    -documento: String</a:t>
-            </a:r>
-          </a:p>
-          <a:p>
-            <a:pPr>
-              <a:spcAft>
-                <a:spcPts val="371"/>
-              </a:spcAft>
-            </a:pPr>
-            <a:r>
-              <a:rPr sz="1300" b="0" i="0">
-                <a:solidFill>
-                  <a:srgbClr val="FFFFFF"/>
-                </a:solidFill>
-                <a:latin typeface="Calibri"/>
-              </a:rPr>
-              <a:t>    -nombre: String</a:t>
-            </a:r>
-          </a:p>
-          <a:p>
-            <a:pPr>
-              <a:spcAft>
-                <a:spcPts val="371"/>
-              </a:spcAft>
-            </a:pPr>
-            <a:r>
-              <a:rPr sz="1300" b="0" i="0">
-                <a:solidFill>
-                  <a:srgbClr val="FFFFFF"/>
-                </a:solidFill>
-                <a:latin typeface="Calibri"/>
-              </a:rPr>
-              <a:t>    +registrarMascota(m: Mascota): void</a:t>
-            </a:r>
-          </a:p>
-          <a:p>
-            <a:pPr>
-              <a:spcAft>
-                <a:spcPts val="371"/>
-              </a:spcAft>
-            </a:pPr>
-            <a:r>
-              <a:rPr sz="1300" b="0" i="0">
-                <a:solidFill>
-                  <a:srgbClr val="FFFFFF"/>
-                </a:solidFill>
-                <a:latin typeface="Calibri"/>
-              </a:rPr>
-              <a:t>  }</a:t>
-            </a:r>
-          </a:p>
-          <a:p>
-            <a:pPr>
-              <a:spcAft>
-                <a:spcPts val="371"/>
-              </a:spcAft>
-            </a:pPr>
-            <a:r>
-              <a:rPr sz="1300" b="0" i="0">
-                <a:solidFill>
-                  <a:srgbClr val="FFFFFF"/>
-                </a:solidFill>
-                <a:latin typeface="Calibri"/>
-              </a:rPr>
-              <a:t>  class Mascota {</a:t>
-            </a:r>
-          </a:p>
-          <a:p>
-            <a:pPr>
-              <a:spcAft>
-                <a:spcPts val="371"/>
-              </a:spcAft>
-            </a:pPr>
-            <a:r>
-              <a:rPr sz="1300" b="0" i="0">
-                <a:solidFill>
-                  <a:srgbClr val="FFFFFF"/>
-                </a:solidFill>
-                <a:latin typeface="Calibri"/>
-              </a:rPr>
-              <a:t>    -codigo: String</a:t>
-            </a:r>
-          </a:p>
-          <a:p>
-            <a:pPr>
-              <a:spcAft>
-                <a:spcPts val="371"/>
-              </a:spcAft>
-            </a:pPr>
-            <a:r>
-              <a:rPr sz="1300" b="0" i="0">
-                <a:solidFill>
-                  <a:srgbClr val="FFFFFF"/>
-                </a:solidFill>
-                <a:latin typeface="Calibri"/>
-              </a:rPr>
-              <a:t>    -especie: String</a:t>
-            </a:r>
-          </a:p>
-          <a:p>
-            <a:pPr>
-              <a:spcAft>
-                <a:spcPts val="371"/>
-              </a:spcAft>
-            </a:pPr>
-            <a:r>
-              <a:rPr sz="1300" b="0" i="0">
-                <a:solidFill>
-                  <a:srgbClr val="FFFFFF"/>
-                </a:solidFill>
-                <a:latin typeface="Calibri"/>
-              </a:rPr>
-              <a:t>    -fechaNacimiento: Date</a:t>
-            </a:r>
-          </a:p>
-          <a:p>
-            <a:pPr>
-              <a:spcAft>
-                <a:spcPts val="371"/>
-              </a:spcAft>
-            </a:pPr>
-            <a:r>
-              <a:rPr sz="1300" b="0" i="0">
-                <a:solidFill>
-                  <a:srgbClr val="FFFFFF"/>
-                </a:solidFill>
-                <a:latin typeface="Calibri"/>
-              </a:rPr>
-              <a:t>    +calcularEdad(): int</a:t>
-            </a:r>
-          </a:p>
-          <a:p>
-            <a:pPr>
-              <a:spcAft>
-                <a:spcPts val="371"/>
-              </a:spcAft>
-            </a:pPr>
-            <a:r>
-              <a:rPr sz="1300" b="0" i="0">
-                <a:solidFill>
-                  <a:srgbClr val="FFFFFF"/>
-                </a:solidFill>
-                <a:latin typeface="Calibri"/>
-              </a:rPr>
-              <a:t>  }</a:t>
-            </a:r>
-          </a:p>
-          <a:p>
-            <a:pPr>
-              <a:spcAft>
-                <a:spcPts val="371"/>
-              </a:spcAft>
-            </a:pPr>
-            <a:r>
-              <a:rPr sz="1300" b="0" i="0">
-                <a:solidFill>
-                  <a:srgbClr val="FFFFFF"/>
-                </a:solidFill>
-                <a:latin typeface="Calibri"/>
-              </a:rPr>
-              <a:t>  class Veterinario {</a:t>
-            </a:r>
-          </a:p>
-          <a:p>
-            <a:pPr>
-              <a:spcAft>
-                <a:spcPts val="371"/>
-              </a:spcAft>
-            </a:pPr>
-            <a:r>
-              <a:rPr sz="1300" b="0" i="0">
-                <a:solidFill>
-                  <a:srgbClr val="FFFFFF"/>
-                </a:solidFill>
-                <a:latin typeface="Calibri"/>
-              </a:rPr>
-              <a:t>    -tarjetaProfesional: String</a:t>
-            </a:r>
-          </a:p>
-          <a:p>
-            <a:pPr>
-              <a:spcAft>
-                <a:spcPts val="371"/>
-              </a:spcAft>
-            </a:pPr>
-            <a:r>
-              <a:rPr sz="1300" b="0" i="0">
-                <a:solidFill>
-                  <a:srgbClr val="FFFFFF"/>
-                </a:solidFill>
-                <a:latin typeface="Calibri"/>
-              </a:rPr>
-              <a:t>    -especialidad: String</a:t>
-            </a:r>
-          </a:p>
-          <a:p>
-            <a:pPr>
-              <a:spcAft>
-                <a:spcPts val="371"/>
-              </a:spcAft>
-            </a:pPr>
-            <a:r>
-              <a:rPr sz="1300" b="0" i="0">
-                <a:solidFill>
-                  <a:srgbClr val="FFFFFF"/>
-                </a:solidFill>
-                <a:latin typeface="Calibri"/>
-              </a:rPr>
-              <a:t>  }</a:t>
-            </a:r>
-          </a:p>
-        </p:txBody>
-      </p:sp>
-      <p:sp>
-        <p:nvSpPr>
-          <p:cNvPr id="9" name="TextBox 8"/>
-          <p:cNvSpPr txBox="1"/>
-          <p:nvPr/>
-        </p:nvSpPr>
-        <p:spPr>
-          <a:xfrm>
-            <a:off x="6233007" y="1719072"/>
-            <a:ext cx="5181447" cy="4133087"/>
-          </a:xfrm>
-          <a:prstGeom prst="rect">
-            <a:avLst/>
-          </a:prstGeom>
-          <a:noFill/>
-        </p:spPr>
-        <p:txBody>
-          <a:bodyPr wrap="square">
-            <a:spAutoFit/>
-          </a:bodyPr>
-          <a:lstStyle/>
-          <a:p>
-            <a:pPr>
-              <a:spcAft>
-                <a:spcPts val="371"/>
-              </a:spcAft>
-            </a:pPr>
-            <a:r>
-              <a:rPr sz="1300" b="0" i="0">
-                <a:solidFill>
-                  <a:srgbClr val="FFFFFF"/>
-                </a:solidFill>
-                <a:latin typeface="Calibri"/>
-              </a:rPr>
-              <a:t>  class Cita {</a:t>
-            </a:r>
-          </a:p>
-          <a:p>
-            <a:pPr>
-              <a:spcAft>
-                <a:spcPts val="371"/>
-              </a:spcAft>
-            </a:pPr>
-            <a:r>
-              <a:rPr sz="1300" b="0" i="0">
-                <a:solidFill>
-                  <a:srgbClr val="FFFFFF"/>
-                </a:solidFill>
-                <a:latin typeface="Calibri"/>
-              </a:rPr>
-              <a:t>    -fechaHora: DateTime</a:t>
-            </a:r>
-          </a:p>
-          <a:p>
-            <a:pPr>
-              <a:spcAft>
-                <a:spcPts val="371"/>
-              </a:spcAft>
-            </a:pPr>
-            <a:r>
-              <a:rPr sz="1300" b="0" i="0">
-                <a:solidFill>
-                  <a:srgbClr val="FFFFFF"/>
-                </a:solidFill>
-                <a:latin typeface="Calibri"/>
-              </a:rPr>
-              <a:t>    -estado: String</a:t>
-            </a:r>
-          </a:p>
-          <a:p>
-            <a:pPr>
-              <a:spcAft>
-                <a:spcPts val="371"/>
-              </a:spcAft>
-            </a:pPr>
-            <a:r>
-              <a:rPr sz="1300" b="0" i="0">
-                <a:solidFill>
-                  <a:srgbClr val="FFFFFF"/>
-                </a:solidFill>
-                <a:latin typeface="Calibri"/>
-              </a:rPr>
-              <a:t>    +reprogramar(nuevaFecha: DateTime): void</a:t>
-            </a:r>
-          </a:p>
-          <a:p>
-            <a:pPr>
-              <a:spcAft>
-                <a:spcPts val="371"/>
-              </a:spcAft>
-            </a:pPr>
-            <a:r>
-              <a:rPr sz="1300" b="0" i="0">
-                <a:solidFill>
-                  <a:srgbClr val="FFFFFF"/>
-                </a:solidFill>
-                <a:latin typeface="Calibri"/>
-              </a:rPr>
-              <a:t>  }</a:t>
-            </a:r>
-          </a:p>
-          <a:p>
-            <a:pPr>
-              <a:spcAft>
-                <a:spcPts val="371"/>
-              </a:spcAft>
-            </a:pPr>
-            <a:r>
-              <a:rPr sz="1300" b="0" i="0">
-                <a:solidFill>
-                  <a:srgbClr val="FFFFFF"/>
-                </a:solidFill>
-                <a:latin typeface="Calibri"/>
-              </a:rPr>
-              <a:t>  class Atencion {</a:t>
-            </a:r>
-          </a:p>
-          <a:p>
-            <a:pPr>
-              <a:spcAft>
-                <a:spcPts val="371"/>
-              </a:spcAft>
-            </a:pPr>
-            <a:r>
-              <a:rPr sz="1300" b="0" i="0">
-                <a:solidFill>
-                  <a:srgbClr val="FFFFFF"/>
-                </a:solidFill>
-                <a:latin typeface="Calibri"/>
-              </a:rPr>
-              <a:t>    -diagnostico: String</a:t>
-            </a:r>
-          </a:p>
-          <a:p>
-            <a:pPr>
-              <a:spcAft>
-                <a:spcPts val="371"/>
-              </a:spcAft>
-            </a:pPr>
-            <a:r>
-              <a:rPr sz="1300" b="0" i="0">
-                <a:solidFill>
-                  <a:srgbClr val="FFFFFF"/>
-                </a:solidFill>
-                <a:latin typeface="Calibri"/>
-              </a:rPr>
-              <a:t>    -tratamiento: String</a:t>
-            </a:r>
-          </a:p>
-          <a:p>
-            <a:pPr>
-              <a:spcAft>
-                <a:spcPts val="371"/>
-              </a:spcAft>
-            </a:pPr>
-            <a:r>
-              <a:rPr sz="1300" b="0" i="0">
-                <a:solidFill>
-                  <a:srgbClr val="FFFFFF"/>
-                </a:solidFill>
-                <a:latin typeface="Calibri"/>
-              </a:rPr>
-              <a:t>  }</a:t>
-            </a:r>
-          </a:p>
-          <a:p>
-            <a:pPr>
-              <a:spcAft>
-                <a:spcPts val="371"/>
-              </a:spcAft>
-            </a:pPr>
-            <a:r>
-              <a:rPr sz="1300" b="0" i="0">
-                <a:solidFill>
-                  <a:srgbClr val="FFFFFF"/>
-                </a:solidFill>
-                <a:latin typeface="Calibri"/>
-              </a:rPr>
-              <a:t>  Dueno "1" --&gt; "0..*" Mascota: es dueno de</a:t>
-            </a:r>
-          </a:p>
-          <a:p>
-            <a:pPr>
-              <a:spcAft>
-                <a:spcPts val="371"/>
-              </a:spcAft>
-            </a:pPr>
-            <a:r>
-              <a:rPr sz="1300" b="0" i="0">
-                <a:solidFill>
-                  <a:srgbClr val="FFFFFF"/>
-                </a:solidFill>
-                <a:latin typeface="Calibri"/>
-              </a:rPr>
-              <a:t>  Mascota "1" --&gt; "0..*" Cita: tiene agendada</a:t>
-            </a:r>
-          </a:p>
-          <a:p>
-            <a:pPr>
-              <a:spcAft>
-                <a:spcPts val="371"/>
-              </a:spcAft>
-            </a:pPr>
-            <a:r>
-              <a:rPr sz="1300" b="0" i="0">
-                <a:solidFill>
-                  <a:srgbClr val="FFFFFF"/>
-                </a:solidFill>
-                <a:latin typeface="Calibri"/>
-              </a:rPr>
-              <a:t>  Veterinario "1" --&gt; "0..*" Cita: atiende</a:t>
-            </a:r>
-          </a:p>
-          <a:p>
-            <a:pPr>
-              <a:spcAft>
-                <a:spcPts val="371"/>
-              </a:spcAft>
-            </a:pPr>
-            <a:r>
-              <a:rPr sz="1300" b="0" i="0">
-                <a:solidFill>
-                  <a:srgbClr val="FFFFFF"/>
-                </a:solidFill>
-                <a:latin typeface="Calibri"/>
-              </a:rPr>
-              <a:t>  Cita "1" --&gt; "0..1" Atencion: genera</a:t>
-            </a:r>
-          </a:p>
-        </p:txBody>
-      </p:sp>
-      <p:sp>
-        <p:nvSpPr>
-          <p:cNvPr id="10" name="TextBox 9"/>
-          <p:cNvSpPr txBox="1"/>
-          <p:nvPr/>
-        </p:nvSpPr>
-        <p:spPr>
-          <a:xfrm>
-            <a:off x="457200" y="6080760"/>
-            <a:ext cx="11277295" cy="320040"/>
-          </a:xfrm>
-          <a:prstGeom prst="rect">
-            <a:avLst/>
-          </a:prstGeom>
-          <a:noFill/>
-        </p:spPr>
-        <p:txBody>
-          <a:bodyPr wrap="square">
-            <a:spAutoFit/>
-          </a:bodyPr>
-          <a:lstStyle/>
-          <a:p>
-            <a:pPr algn="ctr"/>
-            <a:r>
-              <a:rPr sz="1200" b="0" i="1">
-                <a:solidFill>
-                  <a:srgbClr val="666666"/>
-                </a:solidFill>
-                <a:latin typeface="Calibri"/>
-              </a:rPr>
-              <a:t>Las multiplicidades son las que contestan las preguntas que el espanol deja abiertas: un dueno, muchas mascotas.</a:t>
-            </a:r>
-          </a:p>
-        </p:txBody>
-      </p:sp>
-      <p:sp>
-        <p:nvSpPr>
-          <p:cNvPr id="11" name="TextBox 10"/>
+              <a:rPr sz="2000" b="0" i="0">
+                <a:solidFill>
+                  <a:srgbClr val="333333"/>
+                </a:solidFill>
+                <a:latin typeface="Calibri"/>
+              </a:rPr>
+              <a:t>–   La herencia (triangulo) solo cuando hay un es-un verdadero, por ejemplo Persona con Dueno y Veterinario como especializaciones, decision que solo vale la pena si comparten varios atributos.</a:t>
+            </a:r>
+          </a:p>
+        </p:txBody>
+      </p:sp>
+      <p:sp>
+        <p:nvSpPr>
+          <p:cNvPr id="6" name="TextBox 5"/>
           <p:cNvSpPr txBox="1"/>
           <p:nvPr/>
         </p:nvSpPr>
@@ -4470,7 +3878,7 @@
                 </a:solidFill>
                 <a:latin typeface="Calibri"/>
               </a:rPr>
-              <a:t>Demo del dia</a:t>
+              <a:t>El diagrama que dibujamos hoy no se queda en la clase: es la pieza que...</a:t>
             </a:r>
           </a:p>
         </p:txBody>
@@ -4509,25 +3917,7 @@
                 </a:solidFill>
                 <a:latin typeface="Calibri"/>
               </a:rPr>
-              <a:t>–   </a:t>
-            </a:r>
-            <a:r>
-              <a:rPr sz="2000" b="1" i="0">
-                <a:solidFill>
-                  <a:srgbClr val="333333"/>
-                </a:solidFill>
-                <a:latin typeface="Calibri"/>
-              </a:rPr>
-              <a:t>Herramienta:</a:t>
-            </a:r>
-            <a:r>
-              <a:rPr sz="2000" b="0" i="0">
-                <a:solidFill>
-                  <a:srgbClr val="333333"/>
-                </a:solidFill>
-                <a:latin typeface="Calibri"/>
-              </a:rPr>
-              <a:t> draw.io · Mermaid</a:t>
+              <a:t>–   El diagrama que dibujamos hoy no se queda en la clase: es la pieza que viaja mas lejos del Proyecto Integrador.</a:t>
             </a:r>
           </a:p>
           <a:p>
@@ -4543,25 +3933,7 @@
                 </a:solidFill>
                 <a:latin typeface="Calibri"/>
               </a:rPr>
-              <a:t>–   </a:t>
-            </a:r>
-            <a:r>
-              <a:rPr sz="2000" b="1" i="0">
-                <a:solidFill>
-                  <a:srgbClr val="333333"/>
-                </a:solidFill>
-                <a:latin typeface="Calibri"/>
-              </a:rPr>
-              <a:t>Demo:</a:t>
-            </a:r>
-            <a:r>
-              <a:rPr sz="2000" b="0" i="0">
-                <a:solidFill>
-                  <a:srgbClr val="333333"/>
-                </a:solidFill>
-                <a:latin typeface="Calibri"/>
-              </a:rPr>
-              <a:t> El docente dibuja en vivo Dueno, Mascota y Cita en draw.io y borra tres atributos mal ubicados explicando a que clase pertenecen de verdad.</a:t>
+              <a:t>–   De cada clase salen los campos del diccionario de datos y, mas adelante, las tablas de la base de datos: la clase Mascota con sus atributos se convierte en la tabla mascota, la asociacion 1 a 0..* se convierte en una llave foranea</a:t>
             </a:r>
           </a:p>
           <a:p>
@@ -4577,7 +3949,39 @@
                 </a:solidFill>
                 <a:latin typeface="Calibri"/>
               </a:rPr>
-              <a:t>–   Mismo dominio VetCare — no otro ejemplo. Aqui se diseña, no se programa.</a:t>
+              <a:t>–   Y las multiplicidades muchos a muchos se convierten en una tabla intermedia.</a:t>
+            </a:r>
+          </a:p>
+          <a:p>
+            <a:pPr>
+              <a:spcAft>
+                <a:spcPts val="800"/>
+              </a:spcAft>
+            </a:pPr>
+            <a:r>
+              <a:rPr sz="2000" b="0" i="0">
+                <a:solidFill>
+                  <a:srgbClr val="333333"/>
+                </a:solidFill>
+                <a:latin typeface="Calibri"/>
+              </a:rPr>
+              <a:t>–   Para quien cursa tambien Programacion II, este diagrama es el mapa que le dice que clases crear y que atributos poner; para quien solo cursa Programacion II, es lo que recibe ya hecho y debe respetar</a:t>
+            </a:r>
+          </a:p>
+          <a:p>
+            <a:pPr>
+              <a:spcAft>
+                <a:spcPts val="800"/>
+              </a:spcAft>
+            </a:pPr>
+            <a:r>
+              <a:rPr sz="2000" b="0" i="0">
+                <a:solidFill>
+                  <a:srgbClr val="333333"/>
+                </a:solidFill>
+                <a:latin typeface="Calibri"/>
+              </a:rPr>
+              <a:t>–   Y para quien solo cursa Seminario, es el corazon del documento de diseno que se entrega al final junto con el prototipo navegable, una ruta completa y perfectamente valida donde el entregable profesional es el plano, no el ladrillo.</a:t>
             </a:r>
           </a:p>
         </p:txBody>
@@ -4652,7 +4056,7 @@
         <p:spPr>
           <a:xfrm>
             <a:off x="0" y="0"/>
-            <a:ext cx="12191695" cy="1170432"/>
+            <a:ext cx="12191695" cy="960120"/>
           </a:xfrm>
           <a:prstGeom prst="rect">
             <a:avLst/>
@@ -4694,7 +4098,7 @@
         </p:nvSpPr>
         <p:spPr>
           <a:xfrm>
-            <a:off x="0" y="1170432"/>
+            <a:off x="0" y="960120"/>
             <a:ext cx="12191695" cy="41148"/>
           </a:xfrm>
           <a:prstGeom prst="rect">
@@ -4738,7 +4142,7 @@
         <p:spPr>
           <a:xfrm>
             <a:off x="457200" y="164592"/>
-            <a:ext cx="11277295" cy="384048"/>
+            <a:ext cx="11277295" cy="502920"/>
           </a:xfrm>
           <a:prstGeom prst="rect">
             <a:avLst/>
@@ -4758,55 +4162,21 @@
                 </a:solidFill>
                 <a:latin typeface="Calibri"/>
               </a:rPr>
-              <a:t>Herramientas de hoy</a:t>
-            </a:r>
-          </a:p>
-        </p:txBody>
-      </p:sp>
-      <p:sp>
-        <p:nvSpPr>
-          <p:cNvPr id="5" name="TextBox 4"/>
-          <p:cNvSpPr txBox="1"/>
-          <p:nvPr/>
-        </p:nvSpPr>
-        <p:spPr>
-          <a:xfrm>
-            <a:off x="457200" y="566928"/>
-            <a:ext cx="11277295" cy="411480"/>
-          </a:xfrm>
-          <a:prstGeom prst="rect">
-            <a:avLst/>
-          </a:prstGeom>
-          <a:noFill/>
-        </p:spPr>
-        <p:txBody>
-          <a:bodyPr wrap="square">
-            <a:spAutoFit/>
-          </a:bodyPr>
-          <a:lstStyle/>
-          <a:p>
-            <a:r>
-              <a:rPr sz="1400" b="0" i="0">
-                <a:solidFill>
-                  <a:srgbClr val="B8D8EE"/>
-                </a:solidFill>
-                <a:latin typeface="Calibri"/>
-              </a:rPr>
-              <a:t>Gratis · funcionan en el navegador</a:t>
-            </a:r>
-          </a:p>
-        </p:txBody>
-      </p:sp>
-      <p:sp>
-        <p:nvSpPr>
-          <p:cNvPr id="6" name="Rounded Rectangle 5"/>
+              <a:t>Modelo de dominio de VetCare en sintaxis Mermaid (diagrama, no codigo)</a:t>
+            </a:r>
+          </a:p>
+        </p:txBody>
+      </p:sp>
+      <p:sp>
+        <p:nvSpPr>
+          <p:cNvPr id="5" name="Rounded Rectangle 4"/>
           <p:cNvSpPr/>
           <p:nvPr/>
         </p:nvSpPr>
         <p:spPr>
           <a:xfrm>
-            <a:off x="457200" y="1591056"/>
-            <a:ext cx="3624986" cy="2331720"/>
+            <a:off x="457200" y="1261872"/>
+            <a:ext cx="11277295" cy="4773168"/>
           </a:xfrm>
           <a:prstGeom prst="roundRect">
             <a:avLst>
@@ -4814,7 +4184,7 @@
             </a:avLst>
           </a:prstGeom>
           <a:solidFill>
-            <a:srgbClr val="F2F2F2"/>
+            <a:srgbClr val="1E2A38"/>
           </a:solidFill>
           <a:ln>
             <a:noFill/>
@@ -4844,14 +4214,14 @@
       </p:sp>
       <p:sp>
         <p:nvSpPr>
-          <p:cNvPr id="7" name="Rectangle 6"/>
+          <p:cNvPr id="6" name="Rectangle 5"/>
           <p:cNvSpPr/>
           <p:nvPr/>
         </p:nvSpPr>
         <p:spPr>
           <a:xfrm>
-            <a:off x="457200" y="1591056"/>
-            <a:ext cx="3624986" cy="64008"/>
+            <a:off x="457200" y="1261872"/>
+            <a:ext cx="11277295" cy="320040"/>
           </a:xfrm>
           <a:prstGeom prst="rect">
             <a:avLst/>
@@ -4887,71 +4257,546 @@
       </p:sp>
       <p:sp>
         <p:nvSpPr>
-          <p:cNvPr id="8" name="Rectangle 7"/>
-          <p:cNvSpPr/>
-          <p:nvPr/>
-        </p:nvSpPr>
-        <p:spPr>
-          <a:xfrm>
-            <a:off x="457200" y="1655064"/>
-            <a:ext cx="3624986" cy="27432"/>
-          </a:xfrm>
-          <a:prstGeom prst="rect">
-            <a:avLst/>
-          </a:prstGeom>
-          <a:solidFill>
-            <a:srgbClr val="FFD000"/>
-          </a:solidFill>
-          <a:ln>
-            <a:noFill/>
-          </a:ln>
-        </p:spPr>
-        <p:style>
-          <a:lnRef idx="1">
-            <a:schemeClr val="accent1"/>
-          </a:lnRef>
-          <a:fillRef idx="3">
-            <a:schemeClr val="accent1"/>
-          </a:fillRef>
-          <a:effectRef idx="2">
-            <a:schemeClr val="accent1"/>
-          </a:effectRef>
-          <a:fontRef idx="minor">
-            <a:schemeClr val="lt1"/>
-          </a:fontRef>
-        </p:style>
-        <p:txBody>
-          <a:bodyPr rtlCol="0" anchor="ctr"/>
-          <a:lstStyle/>
-          <a:p>
-            <a:pPr algn="ctr"/>
-          </a:p>
-        </p:txBody>
-      </p:sp>
-      <p:pic>
-        <p:nvPicPr>
-          <p:cNvPr id="9" name="Picture 8" descr="drawio.png"/>
-          <p:cNvPicPr>
-            <a:picLocks noChangeAspect="1"/>
-          </p:cNvPicPr>
-          <p:nvPr/>
-        </p:nvPicPr>
-        <p:blipFill>
-          <a:blip r:embed="rId2"/>
-          <a:stretch>
-            <a:fillRect/>
-          </a:stretch>
-        </p:blipFill>
-        <p:spPr>
-          <a:xfrm>
-            <a:off x="1643329" y="1847087"/>
-            <a:ext cx="1252728" cy="1252728"/>
-          </a:xfrm>
-          <a:prstGeom prst="rect">
-            <a:avLst/>
-          </a:prstGeom>
-        </p:spPr>
-      </p:pic>
+          <p:cNvPr id="7" name="TextBox 6"/>
+          <p:cNvSpPr txBox="1"/>
+          <p:nvPr/>
+        </p:nvSpPr>
+        <p:spPr>
+          <a:xfrm>
+            <a:off x="685800" y="1307592"/>
+            <a:ext cx="10820095" cy="256032"/>
+          </a:xfrm>
+          <a:prstGeom prst="rect">
+            <a:avLst/>
+          </a:prstGeom>
+          <a:noFill/>
+        </p:spPr>
+        <p:txBody>
+          <a:bodyPr wrap="square" anchor="ctr"/>
+          <a:lstStyle/>
+          <a:p>
+            <a:r>
+              <a:rPr sz="1000" b="1" i="0">
+                <a:solidFill>
+                  <a:srgbClr val="269CCB"/>
+                </a:solidFill>
+                <a:latin typeface="Calibri"/>
+              </a:rPr>
+              <a:t>● ● ●</a:t>
+            </a:r>
+          </a:p>
+        </p:txBody>
+      </p:sp>
+      <p:sp>
+        <p:nvSpPr>
+          <p:cNvPr id="8" name="TextBox 7"/>
+          <p:cNvSpPr txBox="1"/>
+          <p:nvPr/>
+        </p:nvSpPr>
+        <p:spPr>
+          <a:xfrm>
+            <a:off x="777240" y="1719072"/>
+            <a:ext cx="5181447" cy="4133087"/>
+          </a:xfrm>
+          <a:prstGeom prst="rect">
+            <a:avLst/>
+          </a:prstGeom>
+          <a:noFill/>
+        </p:spPr>
+        <p:txBody>
+          <a:bodyPr wrap="square">
+            <a:spAutoFit/>
+          </a:bodyPr>
+          <a:lstStyle/>
+          <a:p>
+            <a:pPr>
+              <a:spcAft>
+                <a:spcPts val="371"/>
+              </a:spcAft>
+            </a:pPr>
+            <a:r>
+              <a:rPr sz="1300" b="0" i="0">
+                <a:solidFill>
+                  <a:srgbClr val="FFFFFF"/>
+                </a:solidFill>
+                <a:latin typeface="Calibri"/>
+              </a:rPr>
+              <a:t>classDiagram</a:t>
+            </a:r>
+          </a:p>
+          <a:p>
+            <a:pPr>
+              <a:spcAft>
+                <a:spcPts val="371"/>
+              </a:spcAft>
+            </a:pPr>
+            <a:r>
+              <a:rPr sz="1300" b="0" i="0">
+                <a:solidFill>
+                  <a:srgbClr val="FFFFFF"/>
+                </a:solidFill>
+                <a:latin typeface="Calibri"/>
+              </a:rPr>
+              <a:t>  class Dueno {</a:t>
+            </a:r>
+          </a:p>
+          <a:p>
+            <a:pPr>
+              <a:spcAft>
+                <a:spcPts val="371"/>
+              </a:spcAft>
+            </a:pPr>
+            <a:r>
+              <a:rPr sz="1300" b="0" i="0">
+                <a:solidFill>
+                  <a:srgbClr val="FFFFFF"/>
+                </a:solidFill>
+                <a:latin typeface="Calibri"/>
+              </a:rPr>
+              <a:t>    -documento: String</a:t>
+            </a:r>
+          </a:p>
+          <a:p>
+            <a:pPr>
+              <a:spcAft>
+                <a:spcPts val="371"/>
+              </a:spcAft>
+            </a:pPr>
+            <a:r>
+              <a:rPr sz="1300" b="0" i="0">
+                <a:solidFill>
+                  <a:srgbClr val="FFFFFF"/>
+                </a:solidFill>
+                <a:latin typeface="Calibri"/>
+              </a:rPr>
+              <a:t>    -nombre: String</a:t>
+            </a:r>
+          </a:p>
+          <a:p>
+            <a:pPr>
+              <a:spcAft>
+                <a:spcPts val="371"/>
+              </a:spcAft>
+            </a:pPr>
+            <a:r>
+              <a:rPr sz="1300" b="0" i="0">
+                <a:solidFill>
+                  <a:srgbClr val="FFFFFF"/>
+                </a:solidFill>
+                <a:latin typeface="Calibri"/>
+              </a:rPr>
+              <a:t>    +registrarMascota(m: Mascota): void</a:t>
+            </a:r>
+          </a:p>
+          <a:p>
+            <a:pPr>
+              <a:spcAft>
+                <a:spcPts val="371"/>
+              </a:spcAft>
+            </a:pPr>
+            <a:r>
+              <a:rPr sz="1300" b="0" i="0">
+                <a:solidFill>
+                  <a:srgbClr val="FFFFFF"/>
+                </a:solidFill>
+                <a:latin typeface="Calibri"/>
+              </a:rPr>
+              <a:t>  }</a:t>
+            </a:r>
+          </a:p>
+          <a:p>
+            <a:pPr>
+              <a:spcAft>
+                <a:spcPts val="371"/>
+              </a:spcAft>
+            </a:pPr>
+            <a:r>
+              <a:rPr sz="1300" b="0" i="0">
+                <a:solidFill>
+                  <a:srgbClr val="FFFFFF"/>
+                </a:solidFill>
+                <a:latin typeface="Calibri"/>
+              </a:rPr>
+              <a:t>  class Mascota {</a:t>
+            </a:r>
+          </a:p>
+          <a:p>
+            <a:pPr>
+              <a:spcAft>
+                <a:spcPts val="371"/>
+              </a:spcAft>
+            </a:pPr>
+            <a:r>
+              <a:rPr sz="1300" b="0" i="0">
+                <a:solidFill>
+                  <a:srgbClr val="FFFFFF"/>
+                </a:solidFill>
+                <a:latin typeface="Calibri"/>
+              </a:rPr>
+              <a:t>    -codigo: String</a:t>
+            </a:r>
+          </a:p>
+          <a:p>
+            <a:pPr>
+              <a:spcAft>
+                <a:spcPts val="371"/>
+              </a:spcAft>
+            </a:pPr>
+            <a:r>
+              <a:rPr sz="1300" b="0" i="0">
+                <a:solidFill>
+                  <a:srgbClr val="FFFFFF"/>
+                </a:solidFill>
+                <a:latin typeface="Calibri"/>
+              </a:rPr>
+              <a:t>    -especie: String</a:t>
+            </a:r>
+          </a:p>
+          <a:p>
+            <a:pPr>
+              <a:spcAft>
+                <a:spcPts val="371"/>
+              </a:spcAft>
+            </a:pPr>
+            <a:r>
+              <a:rPr sz="1300" b="0" i="0">
+                <a:solidFill>
+                  <a:srgbClr val="FFFFFF"/>
+                </a:solidFill>
+                <a:latin typeface="Calibri"/>
+              </a:rPr>
+              <a:t>    -fechaNacimiento: Date</a:t>
+            </a:r>
+          </a:p>
+          <a:p>
+            <a:pPr>
+              <a:spcAft>
+                <a:spcPts val="371"/>
+              </a:spcAft>
+            </a:pPr>
+            <a:r>
+              <a:rPr sz="1300" b="0" i="0">
+                <a:solidFill>
+                  <a:srgbClr val="FFFFFF"/>
+                </a:solidFill>
+                <a:latin typeface="Calibri"/>
+              </a:rPr>
+              <a:t>    +calcularEdad(): int</a:t>
+            </a:r>
+          </a:p>
+          <a:p>
+            <a:pPr>
+              <a:spcAft>
+                <a:spcPts val="371"/>
+              </a:spcAft>
+            </a:pPr>
+            <a:r>
+              <a:rPr sz="1300" b="0" i="0">
+                <a:solidFill>
+                  <a:srgbClr val="FFFFFF"/>
+                </a:solidFill>
+                <a:latin typeface="Calibri"/>
+              </a:rPr>
+              <a:t>  }</a:t>
+            </a:r>
+          </a:p>
+          <a:p>
+            <a:pPr>
+              <a:spcAft>
+                <a:spcPts val="371"/>
+              </a:spcAft>
+            </a:pPr>
+            <a:r>
+              <a:rPr sz="1300" b="0" i="0">
+                <a:solidFill>
+                  <a:srgbClr val="FFFFFF"/>
+                </a:solidFill>
+                <a:latin typeface="Calibri"/>
+              </a:rPr>
+              <a:t>  class Veterinario {</a:t>
+            </a:r>
+          </a:p>
+          <a:p>
+            <a:pPr>
+              <a:spcAft>
+                <a:spcPts val="371"/>
+              </a:spcAft>
+            </a:pPr>
+            <a:r>
+              <a:rPr sz="1300" b="0" i="0">
+                <a:solidFill>
+                  <a:srgbClr val="FFFFFF"/>
+                </a:solidFill>
+                <a:latin typeface="Calibri"/>
+              </a:rPr>
+              <a:t>    -tarjetaProfesional: String</a:t>
+            </a:r>
+          </a:p>
+          <a:p>
+            <a:pPr>
+              <a:spcAft>
+                <a:spcPts val="371"/>
+              </a:spcAft>
+            </a:pPr>
+            <a:r>
+              <a:rPr sz="1300" b="0" i="0">
+                <a:solidFill>
+                  <a:srgbClr val="FFFFFF"/>
+                </a:solidFill>
+                <a:latin typeface="Calibri"/>
+              </a:rPr>
+              <a:t>    -especialidad: String</a:t>
+            </a:r>
+          </a:p>
+          <a:p>
+            <a:pPr>
+              <a:spcAft>
+                <a:spcPts val="371"/>
+              </a:spcAft>
+            </a:pPr>
+            <a:r>
+              <a:rPr sz="1300" b="0" i="0">
+                <a:solidFill>
+                  <a:srgbClr val="FFFFFF"/>
+                </a:solidFill>
+                <a:latin typeface="Calibri"/>
+              </a:rPr>
+              <a:t>  }</a:t>
+            </a:r>
+          </a:p>
+        </p:txBody>
+      </p:sp>
+      <p:sp>
+        <p:nvSpPr>
+          <p:cNvPr id="9" name="TextBox 8"/>
+          <p:cNvSpPr txBox="1"/>
+          <p:nvPr/>
+        </p:nvSpPr>
+        <p:spPr>
+          <a:xfrm>
+            <a:off x="6233007" y="1719072"/>
+            <a:ext cx="5181447" cy="4133087"/>
+          </a:xfrm>
+          <a:prstGeom prst="rect">
+            <a:avLst/>
+          </a:prstGeom>
+          <a:noFill/>
+        </p:spPr>
+        <p:txBody>
+          <a:bodyPr wrap="square">
+            <a:spAutoFit/>
+          </a:bodyPr>
+          <a:lstStyle/>
+          <a:p>
+            <a:pPr>
+              <a:spcAft>
+                <a:spcPts val="371"/>
+              </a:spcAft>
+            </a:pPr>
+            <a:r>
+              <a:rPr sz="1300" b="0" i="0">
+                <a:solidFill>
+                  <a:srgbClr val="FFFFFF"/>
+                </a:solidFill>
+                <a:latin typeface="Calibri"/>
+              </a:rPr>
+              <a:t>  class Cita {</a:t>
+            </a:r>
+          </a:p>
+          <a:p>
+            <a:pPr>
+              <a:spcAft>
+                <a:spcPts val="371"/>
+              </a:spcAft>
+            </a:pPr>
+            <a:r>
+              <a:rPr sz="1300" b="0" i="0">
+                <a:solidFill>
+                  <a:srgbClr val="FFFFFF"/>
+                </a:solidFill>
+                <a:latin typeface="Calibri"/>
+              </a:rPr>
+              <a:t>    -fechaHora: DateTime</a:t>
+            </a:r>
+          </a:p>
+          <a:p>
+            <a:pPr>
+              <a:spcAft>
+                <a:spcPts val="371"/>
+              </a:spcAft>
+            </a:pPr>
+            <a:r>
+              <a:rPr sz="1300" b="0" i="0">
+                <a:solidFill>
+                  <a:srgbClr val="FFFFFF"/>
+                </a:solidFill>
+                <a:latin typeface="Calibri"/>
+              </a:rPr>
+              <a:t>    -estado: String</a:t>
+            </a:r>
+          </a:p>
+          <a:p>
+            <a:pPr>
+              <a:spcAft>
+                <a:spcPts val="371"/>
+              </a:spcAft>
+            </a:pPr>
+            <a:r>
+              <a:rPr sz="1300" b="0" i="0">
+                <a:solidFill>
+                  <a:srgbClr val="FFFFFF"/>
+                </a:solidFill>
+                <a:latin typeface="Calibri"/>
+              </a:rPr>
+              <a:t>    +reprogramar(nuevaFecha: DateTime): void</a:t>
+            </a:r>
+          </a:p>
+          <a:p>
+            <a:pPr>
+              <a:spcAft>
+                <a:spcPts val="371"/>
+              </a:spcAft>
+            </a:pPr>
+            <a:r>
+              <a:rPr sz="1300" b="0" i="0">
+                <a:solidFill>
+                  <a:srgbClr val="FFFFFF"/>
+                </a:solidFill>
+                <a:latin typeface="Calibri"/>
+              </a:rPr>
+              <a:t>  }</a:t>
+            </a:r>
+          </a:p>
+          <a:p>
+            <a:pPr>
+              <a:spcAft>
+                <a:spcPts val="371"/>
+              </a:spcAft>
+            </a:pPr>
+            <a:r>
+              <a:rPr sz="1300" b="0" i="0">
+                <a:solidFill>
+                  <a:srgbClr val="FFFFFF"/>
+                </a:solidFill>
+                <a:latin typeface="Calibri"/>
+              </a:rPr>
+              <a:t>  class Atencion {</a:t>
+            </a:r>
+          </a:p>
+          <a:p>
+            <a:pPr>
+              <a:spcAft>
+                <a:spcPts val="371"/>
+              </a:spcAft>
+            </a:pPr>
+            <a:r>
+              <a:rPr sz="1300" b="0" i="0">
+                <a:solidFill>
+                  <a:srgbClr val="FFFFFF"/>
+                </a:solidFill>
+                <a:latin typeface="Calibri"/>
+              </a:rPr>
+              <a:t>    -diagnostico: String</a:t>
+            </a:r>
+          </a:p>
+          <a:p>
+            <a:pPr>
+              <a:spcAft>
+                <a:spcPts val="371"/>
+              </a:spcAft>
+            </a:pPr>
+            <a:r>
+              <a:rPr sz="1300" b="0" i="0">
+                <a:solidFill>
+                  <a:srgbClr val="FFFFFF"/>
+                </a:solidFill>
+                <a:latin typeface="Calibri"/>
+              </a:rPr>
+              <a:t>    -tratamiento: String</a:t>
+            </a:r>
+          </a:p>
+          <a:p>
+            <a:pPr>
+              <a:spcAft>
+                <a:spcPts val="371"/>
+              </a:spcAft>
+            </a:pPr>
+            <a:r>
+              <a:rPr sz="1300" b="0" i="0">
+                <a:solidFill>
+                  <a:srgbClr val="FFFFFF"/>
+                </a:solidFill>
+                <a:latin typeface="Calibri"/>
+              </a:rPr>
+              <a:t>  }</a:t>
+            </a:r>
+          </a:p>
+          <a:p>
+            <a:pPr>
+              <a:spcAft>
+                <a:spcPts val="371"/>
+              </a:spcAft>
+            </a:pPr>
+            <a:r>
+              <a:rPr sz="1300" b="0" i="0">
+                <a:solidFill>
+                  <a:srgbClr val="FFFFFF"/>
+                </a:solidFill>
+                <a:latin typeface="Calibri"/>
+              </a:rPr>
+              <a:t>  Dueno "1" --&gt; "0..*" Mascota: es dueno de</a:t>
+            </a:r>
+          </a:p>
+          <a:p>
+            <a:pPr>
+              <a:spcAft>
+                <a:spcPts val="371"/>
+              </a:spcAft>
+            </a:pPr>
+            <a:r>
+              <a:rPr sz="1300" b="0" i="0">
+                <a:solidFill>
+                  <a:srgbClr val="FFFFFF"/>
+                </a:solidFill>
+                <a:latin typeface="Calibri"/>
+              </a:rPr>
+              <a:t>  Mascota "1" --&gt; "0..*" Cita: tiene agendada</a:t>
+            </a:r>
+          </a:p>
+          <a:p>
+            <a:pPr>
+              <a:spcAft>
+                <a:spcPts val="371"/>
+              </a:spcAft>
+            </a:pPr>
+            <a:r>
+              <a:rPr sz="1300" b="0" i="0">
+                <a:solidFill>
+                  <a:srgbClr val="FFFFFF"/>
+                </a:solidFill>
+                <a:latin typeface="Calibri"/>
+              </a:rPr>
+              <a:t>  Veterinario "1" --&gt; "0..*" Cita: atiende</a:t>
+            </a:r>
+          </a:p>
+          <a:p>
+            <a:pPr>
+              <a:spcAft>
+                <a:spcPts val="371"/>
+              </a:spcAft>
+            </a:pPr>
+            <a:r>
+              <a:rPr sz="1300" b="0" i="0">
+                <a:solidFill>
+                  <a:srgbClr val="FFFFFF"/>
+                </a:solidFill>
+                <a:latin typeface="Calibri"/>
+              </a:rPr>
+              <a:t>  Cita "1" --&gt; "0..1" Atencion: genera</a:t>
+            </a:r>
+          </a:p>
+        </p:txBody>
+      </p:sp>
       <p:sp>
         <p:nvSpPr>
           <p:cNvPr id="10" name="TextBox 9"/>
@@ -4960,8 +4805,8 @@
         </p:nvSpPr>
         <p:spPr>
           <a:xfrm>
-            <a:off x="530352" y="3191256"/>
-            <a:ext cx="3478682" cy="621792"/>
+            <a:off x="457200" y="6080760"/>
+            <a:ext cx="11277295" cy="320040"/>
           </a:xfrm>
           <a:prstGeom prst="rect">
             <a:avLst/>
@@ -4969,449 +4814,27 @@
           <a:noFill/>
         </p:spPr>
         <p:txBody>
-          <a:bodyPr wrap="square" anchor="t"/>
+          <a:bodyPr wrap="square">
+            <a:spAutoFit/>
+          </a:bodyPr>
           <a:lstStyle/>
           <a:p>
             <a:pPr algn="ctr"/>
             <a:r>
-              <a:rPr sz="1300" b="1" i="0">
-                <a:solidFill>
-                  <a:srgbClr val="095292"/>
-                </a:solidFill>
-                <a:latin typeface="Calibri"/>
-              </a:rPr>
-              <a:t>Draw.Io</a:t>
-            </a:r>
-          </a:p>
-          <a:p>
-            <a:pPr algn="ctr">
-              <a:spcBef>
-                <a:spcPts val="200"/>
-              </a:spcBef>
-            </a:pPr>
-            <a:r>
-              <a:rPr sz="1000" b="0" i="0">
+              <a:rPr sz="1200" b="0" i="1">
                 <a:solidFill>
                   <a:srgbClr val="666666"/>
                 </a:solidFill>
                 <a:latin typeface="Calibri"/>
               </a:rPr>
-              <a:t>Diagramas UML y de contexto</a:t>
-            </a:r>
-          </a:p>
-        </p:txBody>
-      </p:sp>
-      <p:sp>
-        <p:nvSpPr>
-          <p:cNvPr id="11" name="Rounded Rectangle 10"/>
-          <p:cNvSpPr/>
-          <p:nvPr/>
-        </p:nvSpPr>
-        <p:spPr>
-          <a:xfrm>
-            <a:off x="4283354" y="1591056"/>
-            <a:ext cx="3624986" cy="2331720"/>
-          </a:xfrm>
-          <a:prstGeom prst="roundRect">
-            <a:avLst>
-              <a:gd name="adj" fmla="val 12000"/>
-            </a:avLst>
-          </a:prstGeom>
-          <a:solidFill>
-            <a:srgbClr val="F2F2F2"/>
-          </a:solidFill>
-          <a:ln>
-            <a:noFill/>
-          </a:ln>
-        </p:spPr>
-        <p:style>
-          <a:lnRef idx="1">
-            <a:schemeClr val="accent1"/>
-          </a:lnRef>
-          <a:fillRef idx="3">
-            <a:schemeClr val="accent1"/>
-          </a:fillRef>
-          <a:effectRef idx="2">
-            <a:schemeClr val="accent1"/>
-          </a:effectRef>
-          <a:fontRef idx="minor">
-            <a:schemeClr val="lt1"/>
-          </a:fontRef>
-        </p:style>
-        <p:txBody>
-          <a:bodyPr rtlCol="0" anchor="ctr"/>
-          <a:lstStyle/>
-          <a:p>
-            <a:pPr algn="ctr"/>
-          </a:p>
-        </p:txBody>
-      </p:sp>
-      <p:sp>
-        <p:nvSpPr>
-          <p:cNvPr id="12" name="Rectangle 11"/>
-          <p:cNvSpPr/>
-          <p:nvPr/>
-        </p:nvSpPr>
-        <p:spPr>
-          <a:xfrm>
-            <a:off x="4283354" y="1591056"/>
-            <a:ext cx="3624986" cy="64008"/>
-          </a:xfrm>
-          <a:prstGeom prst="rect">
-            <a:avLst/>
-          </a:prstGeom>
-          <a:solidFill>
-            <a:srgbClr val="095292"/>
-          </a:solidFill>
-          <a:ln>
-            <a:noFill/>
-          </a:ln>
-        </p:spPr>
-        <p:style>
-          <a:lnRef idx="1">
-            <a:schemeClr val="accent1"/>
-          </a:lnRef>
-          <a:fillRef idx="3">
-            <a:schemeClr val="accent1"/>
-          </a:fillRef>
-          <a:effectRef idx="2">
-            <a:schemeClr val="accent1"/>
-          </a:effectRef>
-          <a:fontRef idx="minor">
-            <a:schemeClr val="lt1"/>
-          </a:fontRef>
-        </p:style>
-        <p:txBody>
-          <a:bodyPr rtlCol="0" anchor="ctr"/>
-          <a:lstStyle/>
-          <a:p>
-            <a:pPr algn="ctr"/>
-          </a:p>
-        </p:txBody>
-      </p:sp>
-      <p:sp>
-        <p:nvSpPr>
-          <p:cNvPr id="13" name="Rectangle 12"/>
-          <p:cNvSpPr/>
-          <p:nvPr/>
-        </p:nvSpPr>
-        <p:spPr>
-          <a:xfrm>
-            <a:off x="4283354" y="1655064"/>
-            <a:ext cx="3624986" cy="27432"/>
-          </a:xfrm>
-          <a:prstGeom prst="rect">
-            <a:avLst/>
-          </a:prstGeom>
-          <a:solidFill>
-            <a:srgbClr val="FFD000"/>
-          </a:solidFill>
-          <a:ln>
-            <a:noFill/>
-          </a:ln>
-        </p:spPr>
-        <p:style>
-          <a:lnRef idx="1">
-            <a:schemeClr val="accent1"/>
-          </a:lnRef>
-          <a:fillRef idx="3">
-            <a:schemeClr val="accent1"/>
-          </a:fillRef>
-          <a:effectRef idx="2">
-            <a:schemeClr val="accent1"/>
-          </a:effectRef>
-          <a:fontRef idx="minor">
-            <a:schemeClr val="lt1"/>
-          </a:fontRef>
-        </p:style>
-        <p:txBody>
-          <a:bodyPr rtlCol="0" anchor="ctr"/>
-          <a:lstStyle/>
-          <a:p>
-            <a:pPr algn="ctr"/>
-          </a:p>
-        </p:txBody>
-      </p:sp>
-      <p:pic>
-        <p:nvPicPr>
-          <p:cNvPr id="14" name="Picture 13" descr="mermaid.png"/>
-          <p:cNvPicPr>
-            <a:picLocks noChangeAspect="1"/>
-          </p:cNvPicPr>
-          <p:nvPr/>
-        </p:nvPicPr>
-        <p:blipFill>
-          <a:blip r:embed="rId3"/>
-          <a:stretch>
-            <a:fillRect/>
-          </a:stretch>
-        </p:blipFill>
-        <p:spPr>
-          <a:xfrm>
-            <a:off x="5469483" y="1847087"/>
-            <a:ext cx="1252728" cy="1252728"/>
-          </a:xfrm>
-          <a:prstGeom prst="rect">
-            <a:avLst/>
-          </a:prstGeom>
-        </p:spPr>
-      </p:pic>
-      <p:sp>
-        <p:nvSpPr>
-          <p:cNvPr id="15" name="TextBox 14"/>
-          <p:cNvSpPr txBox="1"/>
-          <p:nvPr/>
-        </p:nvSpPr>
-        <p:spPr>
-          <a:xfrm>
-            <a:off x="4356506" y="3191256"/>
-            <a:ext cx="3478682" cy="621792"/>
-          </a:xfrm>
-          <a:prstGeom prst="rect">
-            <a:avLst/>
-          </a:prstGeom>
-          <a:noFill/>
-        </p:spPr>
-        <p:txBody>
-          <a:bodyPr wrap="square" anchor="t"/>
-          <a:lstStyle/>
-          <a:p>
-            <a:pPr algn="ctr"/>
-            <a:r>
-              <a:rPr sz="1300" b="1" i="0">
-                <a:solidFill>
-                  <a:srgbClr val="095292"/>
-                </a:solidFill>
-                <a:latin typeface="Calibri"/>
-              </a:rPr>
-              <a:t>Mermaid</a:t>
-            </a:r>
-          </a:p>
-          <a:p>
-            <a:pPr algn="ctr">
-              <a:spcBef>
-                <a:spcPts val="200"/>
-              </a:spcBef>
-            </a:pPr>
-            <a:r>
-              <a:rPr sz="1000" b="0" i="0">
-                <a:solidFill>
-                  <a:srgbClr val="666666"/>
-                </a:solidFill>
-                <a:latin typeface="Calibri"/>
-              </a:rPr>
-              <a:t>Diagramas como texto versionable</a:t>
-            </a:r>
-          </a:p>
-        </p:txBody>
-      </p:sp>
-      <p:sp>
-        <p:nvSpPr>
-          <p:cNvPr id="16" name="Rounded Rectangle 15"/>
-          <p:cNvSpPr/>
-          <p:nvPr/>
-        </p:nvSpPr>
-        <p:spPr>
-          <a:xfrm>
-            <a:off x="8109508" y="1591056"/>
-            <a:ext cx="3624986" cy="2331720"/>
-          </a:xfrm>
-          <a:prstGeom prst="roundRect">
-            <a:avLst>
-              <a:gd name="adj" fmla="val 12000"/>
-            </a:avLst>
-          </a:prstGeom>
-          <a:solidFill>
-            <a:srgbClr val="F2F2F2"/>
-          </a:solidFill>
-          <a:ln>
-            <a:noFill/>
-          </a:ln>
-        </p:spPr>
-        <p:style>
-          <a:lnRef idx="1">
-            <a:schemeClr val="accent1"/>
-          </a:lnRef>
-          <a:fillRef idx="3">
-            <a:schemeClr val="accent1"/>
-          </a:fillRef>
-          <a:effectRef idx="2">
-            <a:schemeClr val="accent1"/>
-          </a:effectRef>
-          <a:fontRef idx="minor">
-            <a:schemeClr val="lt1"/>
-          </a:fontRef>
-        </p:style>
-        <p:txBody>
-          <a:bodyPr rtlCol="0" anchor="ctr"/>
-          <a:lstStyle/>
-          <a:p>
-            <a:pPr algn="ctr"/>
-          </a:p>
-        </p:txBody>
-      </p:sp>
-      <p:sp>
-        <p:nvSpPr>
-          <p:cNvPr id="17" name="Rectangle 16"/>
-          <p:cNvSpPr/>
-          <p:nvPr/>
-        </p:nvSpPr>
-        <p:spPr>
-          <a:xfrm>
-            <a:off x="8109508" y="1591056"/>
-            <a:ext cx="3624986" cy="64008"/>
-          </a:xfrm>
-          <a:prstGeom prst="rect">
-            <a:avLst/>
-          </a:prstGeom>
-          <a:solidFill>
-            <a:srgbClr val="095292"/>
-          </a:solidFill>
-          <a:ln>
-            <a:noFill/>
-          </a:ln>
-        </p:spPr>
-        <p:style>
-          <a:lnRef idx="1">
-            <a:schemeClr val="accent1"/>
-          </a:lnRef>
-          <a:fillRef idx="3">
-            <a:schemeClr val="accent1"/>
-          </a:fillRef>
-          <a:effectRef idx="2">
-            <a:schemeClr val="accent1"/>
-          </a:effectRef>
-          <a:fontRef idx="minor">
-            <a:schemeClr val="lt1"/>
-          </a:fontRef>
-        </p:style>
-        <p:txBody>
-          <a:bodyPr rtlCol="0" anchor="ctr"/>
-          <a:lstStyle/>
-          <a:p>
-            <a:pPr algn="ctr"/>
-          </a:p>
-        </p:txBody>
-      </p:sp>
-      <p:sp>
-        <p:nvSpPr>
-          <p:cNvPr id="18" name="Rectangle 17"/>
-          <p:cNvSpPr/>
-          <p:nvPr/>
-        </p:nvSpPr>
-        <p:spPr>
-          <a:xfrm>
-            <a:off x="8109508" y="1655064"/>
-            <a:ext cx="3624986" cy="27432"/>
-          </a:xfrm>
-          <a:prstGeom prst="rect">
-            <a:avLst/>
-          </a:prstGeom>
-          <a:solidFill>
-            <a:srgbClr val="FFD000"/>
-          </a:solidFill>
-          <a:ln>
-            <a:noFill/>
-          </a:ln>
-        </p:spPr>
-        <p:style>
-          <a:lnRef idx="1">
-            <a:schemeClr val="accent1"/>
-          </a:lnRef>
-          <a:fillRef idx="3">
-            <a:schemeClr val="accent1"/>
-          </a:fillRef>
-          <a:effectRef idx="2">
-            <a:schemeClr val="accent1"/>
-          </a:effectRef>
-          <a:fontRef idx="minor">
-            <a:schemeClr val="lt1"/>
-          </a:fontRef>
-        </p:style>
-        <p:txBody>
-          <a:bodyPr rtlCol="0" anchor="ctr"/>
-          <a:lstStyle/>
-          <a:p>
-            <a:pPr algn="ctr"/>
-          </a:p>
-        </p:txBody>
-      </p:sp>
-      <p:pic>
-        <p:nvPicPr>
-          <p:cNvPr id="19" name="Picture 18" descr="examlab.png"/>
-          <p:cNvPicPr>
-            <a:picLocks noChangeAspect="1"/>
-          </p:cNvPicPr>
-          <p:nvPr/>
-        </p:nvPicPr>
-        <p:blipFill>
-          <a:blip r:embed="rId4"/>
-          <a:stretch>
-            <a:fillRect/>
-          </a:stretch>
-        </p:blipFill>
-        <p:spPr>
-          <a:xfrm>
-            <a:off x="9295638" y="1847087"/>
-            <a:ext cx="1252728" cy="1252728"/>
-          </a:xfrm>
-          <a:prstGeom prst="rect">
-            <a:avLst/>
-          </a:prstGeom>
-        </p:spPr>
-      </p:pic>
-      <p:sp>
-        <p:nvSpPr>
-          <p:cNvPr id="20" name="TextBox 19"/>
-          <p:cNvSpPr txBox="1"/>
-          <p:nvPr/>
-        </p:nvSpPr>
-        <p:spPr>
-          <a:xfrm>
-            <a:off x="8182660" y="3191256"/>
-            <a:ext cx="3478682" cy="621792"/>
-          </a:xfrm>
-          <a:prstGeom prst="rect">
-            <a:avLst/>
-          </a:prstGeom>
-          <a:noFill/>
-        </p:spPr>
-        <p:txBody>
-          <a:bodyPr wrap="square" anchor="t"/>
-          <a:lstStyle/>
-          <a:p>
-            <a:pPr algn="ctr"/>
-            <a:r>
-              <a:rPr sz="1300" b="1" i="0">
-                <a:solidFill>
-                  <a:srgbClr val="095292"/>
-                </a:solidFill>
-                <a:latin typeface="Calibri"/>
-              </a:rPr>
-              <a:t>la plataforma del curso</a:t>
-            </a:r>
-          </a:p>
-          <a:p>
-            <a:pPr algn="ctr">
-              <a:spcBef>
-                <a:spcPts val="200"/>
-              </a:spcBef>
-            </a:pPr>
-            <a:r>
-              <a:rPr sz="1000" b="0" i="0">
-                <a:solidFill>
-                  <a:srgbClr val="666666"/>
-                </a:solidFill>
-                <a:latin typeface="Calibri"/>
-              </a:rPr>
-              <a:t>Entrega del taller · en la fecha que indique el docente</a:t>
-            </a:r>
-          </a:p>
-        </p:txBody>
-      </p:sp>
-      <p:sp>
-        <p:nvSpPr>
-          <p:cNvPr id="21" name="TextBox 20"/>
+              <a:t>Las multiplicidades son las que contestan las preguntas que el espanol deja abiertas: un dueno, muchas mascotas.</a:t>
+            </a:r>
+          </a:p>
+        </p:txBody>
+      </p:sp>
+      <p:sp>
+        <p:nvSpPr>
+          <p:cNvPr id="11" name="TextBox 10"/>
           <p:cNvSpPr txBox="1"/>
           <p:nvPr/>
         </p:nvSpPr>
@@ -5585,7 +5008,7 @@
                 </a:solidFill>
                 <a:latin typeface="Calibri"/>
               </a:rPr>
-              <a:t>Taller PI — por que importa</a:t>
+              <a:t>Demo del dia</a:t>
             </a:r>
           </a:p>
         </p:txBody>
@@ -5633,7 +5056,7 @@
                 </a:solidFill>
                 <a:latin typeface="Calibri"/>
               </a:rPr>
-              <a:t>Por que importa al PI:</a:t>
+              <a:t>Herramienta:</a:t>
             </a:r>
             <a:r>
               <a:rPr sz="2000" b="0" i="0">
@@ -5642,7 +5065,7 @@
                 </a:solidFill>
                 <a:latin typeface="Calibri"/>
               </a:rPr>
-              <a:t> este diagrama de clases es el plano maestro de VetCare: de el salen el diccionario de datos, las tablas de la base de datos y las clases que se programan en Programacion II.</a:t>
+              <a:t> draw.io · Mermaid</a:t>
             </a:r>
           </a:p>
           <a:p>
@@ -5658,7 +5081,25 @@
                 </a:solidFill>
                 <a:latin typeface="Calibri"/>
               </a:rPr>
-              <a:t>–   Es el primer artefacto del curso que se lee igual en Cali, en Bogota o en Berlin, porque UML es un estandar y no una convencion del salon.</a:t>
+              <a:t>–   </a:t>
+            </a:r>
+            <a:r>
+              <a:rPr sz="2000" b="1" i="0">
+                <a:solidFill>
+                  <a:srgbClr val="333333"/>
+                </a:solidFill>
+                <a:latin typeface="Calibri"/>
+              </a:rPr>
+              <a:t>Demo:</a:t>
+            </a:r>
+            <a:r>
+              <a:rPr sz="2000" b="0" i="0">
+                <a:solidFill>
+                  <a:srgbClr val="333333"/>
+                </a:solidFill>
+                <a:latin typeface="Calibri"/>
+              </a:rPr>
+              <a:t> El docente dibuja en vivo Dueno, Mascota y Cita en draw.io y borra tres atributos mal ubicados explicando a que clase pertenecen de verdad.</a:t>
             </a:r>
           </a:p>
           <a:p>
@@ -5674,7 +5115,7 @@
                 </a:solidFill>
                 <a:latin typeface="Calibri"/>
               </a:rPr>
-              <a:t>–   Si una clase no puede rastrearse a un requisito o a una historia del backlog, sobra; y si un requisito no tiene donde vivir en el diagrama, falta una clase.</a:t>
+              <a:t>–   Mismo dominio VetCare — no otro ejemplo. Aqui se diseña, no se programa.</a:t>
             </a:r>
           </a:p>
         </p:txBody>
@@ -5749,7 +5190,7 @@
         <p:spPr>
           <a:xfrm>
             <a:off x="0" y="0"/>
-            <a:ext cx="12191695" cy="960120"/>
+            <a:ext cx="12191695" cy="1170432"/>
           </a:xfrm>
           <a:prstGeom prst="rect">
             <a:avLst/>
@@ -5791,7 +5232,7 @@
         </p:nvSpPr>
         <p:spPr>
           <a:xfrm>
-            <a:off x="0" y="960120"/>
+            <a:off x="0" y="1170432"/>
             <a:ext cx="12191695" cy="41148"/>
           </a:xfrm>
           <a:prstGeom prst="rect">
@@ -5835,7 +5276,7 @@
         <p:spPr>
           <a:xfrm>
             <a:off x="457200" y="164592"/>
-            <a:ext cx="11277295" cy="502920"/>
+            <a:ext cx="11277295" cy="384048"/>
           </a:xfrm>
           <a:prstGeom prst="rect">
             <a:avLst/>
@@ -5855,7 +5296,7 @@
                 </a:solidFill>
                 <a:latin typeface="Calibri"/>
               </a:rPr>
-              <a:t>Taller PI — punto de partida</a:t>
+              <a:t>Herramientas de hoy</a:t>
             </a:r>
           </a:p>
         </p:txBody>
@@ -5868,8 +5309,8 @@
         </p:nvSpPr>
         <p:spPr>
           <a:xfrm>
-            <a:off x="457200" y="1170432"/>
-            <a:ext cx="11277295" cy="5230368"/>
+            <a:off x="457200" y="566928"/>
+            <a:ext cx="11277295" cy="411480"/>
           </a:xfrm>
           <a:prstGeom prst="rect">
             <a:avLst/>
@@ -5882,58 +5323,633 @@
           </a:bodyPr>
           <a:lstStyle/>
           <a:p>
-            <a:pPr>
-              <a:spcAft>
-                <a:spcPts val="800"/>
-              </a:spcAft>
+            <a:r>
+              <a:rPr sz="1400" b="0" i="0">
+                <a:solidFill>
+                  <a:srgbClr val="B8D8EE"/>
+                </a:solidFill>
+                <a:latin typeface="Calibri"/>
+              </a:rPr>
+              <a:t>Gratis · funcionan en el navegador</a:t>
+            </a:r>
+          </a:p>
+        </p:txBody>
+      </p:sp>
+      <p:sp>
+        <p:nvSpPr>
+          <p:cNvPr id="6" name="Rounded Rectangle 5"/>
+          <p:cNvSpPr/>
+          <p:nvPr/>
+        </p:nvSpPr>
+        <p:spPr>
+          <a:xfrm>
+            <a:off x="457200" y="1591056"/>
+            <a:ext cx="3624986" cy="2331720"/>
+          </a:xfrm>
+          <a:prstGeom prst="roundRect">
+            <a:avLst>
+              <a:gd name="adj" fmla="val 12000"/>
+            </a:avLst>
+          </a:prstGeom>
+          <a:solidFill>
+            <a:srgbClr val="F2F2F2"/>
+          </a:solidFill>
+          <a:ln>
+            <a:noFill/>
+          </a:ln>
+        </p:spPr>
+        <p:style>
+          <a:lnRef idx="1">
+            <a:schemeClr val="accent1"/>
+          </a:lnRef>
+          <a:fillRef idx="3">
+            <a:schemeClr val="accent1"/>
+          </a:fillRef>
+          <a:effectRef idx="2">
+            <a:schemeClr val="accent1"/>
+          </a:effectRef>
+          <a:fontRef idx="minor">
+            <a:schemeClr val="lt1"/>
+          </a:fontRef>
+        </p:style>
+        <p:txBody>
+          <a:bodyPr rtlCol="0" anchor="ctr"/>
+          <a:lstStyle/>
+          <a:p>
+            <a:pPr algn="ctr"/>
+          </a:p>
+        </p:txBody>
+      </p:sp>
+      <p:sp>
+        <p:nvSpPr>
+          <p:cNvPr id="7" name="Rectangle 6"/>
+          <p:cNvSpPr/>
+          <p:nvPr/>
+        </p:nvSpPr>
+        <p:spPr>
+          <a:xfrm>
+            <a:off x="457200" y="1591056"/>
+            <a:ext cx="3624986" cy="64008"/>
+          </a:xfrm>
+          <a:prstGeom prst="rect">
+            <a:avLst/>
+          </a:prstGeom>
+          <a:solidFill>
+            <a:srgbClr val="095292"/>
+          </a:solidFill>
+          <a:ln>
+            <a:noFill/>
+          </a:ln>
+        </p:spPr>
+        <p:style>
+          <a:lnRef idx="1">
+            <a:schemeClr val="accent1"/>
+          </a:lnRef>
+          <a:fillRef idx="3">
+            <a:schemeClr val="accent1"/>
+          </a:fillRef>
+          <a:effectRef idx="2">
+            <a:schemeClr val="accent1"/>
+          </a:effectRef>
+          <a:fontRef idx="minor">
+            <a:schemeClr val="lt1"/>
+          </a:fontRef>
+        </p:style>
+        <p:txBody>
+          <a:bodyPr rtlCol="0" anchor="ctr"/>
+          <a:lstStyle/>
+          <a:p>
+            <a:pPr algn="ctr"/>
+          </a:p>
+        </p:txBody>
+      </p:sp>
+      <p:sp>
+        <p:nvSpPr>
+          <p:cNvPr id="8" name="Rectangle 7"/>
+          <p:cNvSpPr/>
+          <p:nvPr/>
+        </p:nvSpPr>
+        <p:spPr>
+          <a:xfrm>
+            <a:off x="457200" y="1655064"/>
+            <a:ext cx="3624986" cy="27432"/>
+          </a:xfrm>
+          <a:prstGeom prst="rect">
+            <a:avLst/>
+          </a:prstGeom>
+          <a:solidFill>
+            <a:srgbClr val="FFD000"/>
+          </a:solidFill>
+          <a:ln>
+            <a:noFill/>
+          </a:ln>
+        </p:spPr>
+        <p:style>
+          <a:lnRef idx="1">
+            <a:schemeClr val="accent1"/>
+          </a:lnRef>
+          <a:fillRef idx="3">
+            <a:schemeClr val="accent1"/>
+          </a:fillRef>
+          <a:effectRef idx="2">
+            <a:schemeClr val="accent1"/>
+          </a:effectRef>
+          <a:fontRef idx="minor">
+            <a:schemeClr val="lt1"/>
+          </a:fontRef>
+        </p:style>
+        <p:txBody>
+          <a:bodyPr rtlCol="0" anchor="ctr"/>
+          <a:lstStyle/>
+          <a:p>
+            <a:pPr algn="ctr"/>
+          </a:p>
+        </p:txBody>
+      </p:sp>
+      <p:pic>
+        <p:nvPicPr>
+          <p:cNvPr id="9" name="Picture 8" descr="drawio.png"/>
+          <p:cNvPicPr>
+            <a:picLocks noChangeAspect="1"/>
+          </p:cNvPicPr>
+          <p:nvPr/>
+        </p:nvPicPr>
+        <p:blipFill>
+          <a:blip r:embed="rId2"/>
+          <a:stretch>
+            <a:fillRect/>
+          </a:stretch>
+        </p:blipFill>
+        <p:spPr>
+          <a:xfrm>
+            <a:off x="1643329" y="1847087"/>
+            <a:ext cx="1252728" cy="1252728"/>
+          </a:xfrm>
+          <a:prstGeom prst="rect">
+            <a:avLst/>
+          </a:prstGeom>
+        </p:spPr>
+      </p:pic>
+      <p:sp>
+        <p:nvSpPr>
+          <p:cNvPr id="10" name="TextBox 9"/>
+          <p:cNvSpPr txBox="1"/>
+          <p:nvPr/>
+        </p:nvSpPr>
+        <p:spPr>
+          <a:xfrm>
+            <a:off x="530352" y="3191256"/>
+            <a:ext cx="3478682" cy="621792"/>
+          </a:xfrm>
+          <a:prstGeom prst="rect">
+            <a:avLst/>
+          </a:prstGeom>
+          <a:noFill/>
+        </p:spPr>
+        <p:txBody>
+          <a:bodyPr wrap="square" anchor="t"/>
+          <a:lstStyle/>
+          <a:p>
+            <a:pPr algn="ctr"/>
+            <a:r>
+              <a:rPr sz="1300" b="1" i="0">
+                <a:solidFill>
+                  <a:srgbClr val="095292"/>
+                </a:solidFill>
+                <a:latin typeface="Calibri"/>
+              </a:rPr>
+              <a:t>Draw.Io</a:t>
+            </a:r>
+          </a:p>
+          <a:p>
+            <a:pPr algn="ctr">
+              <a:spcBef>
+                <a:spcPts val="200"/>
+              </a:spcBef>
             </a:pPr>
             <a:r>
-              <a:rPr sz="2000" b="0" i="0">
-                <a:solidFill>
-                  <a:srgbClr val="333333"/>
-                </a:solidFill>
-                <a:latin typeface="Calibri"/>
-              </a:rPr>
-              <a:t>–   Ya existen el catalogo de RF/RNF y el backlog de historias de VetCare, ambos escritos en texto y sin ninguna representacion grafica.</a:t>
-            </a:r>
-          </a:p>
-          <a:p>
-            <a:pPr>
-              <a:spcAft>
-                <a:spcPts val="800"/>
-              </a:spcAft>
+              <a:rPr sz="1000" b="0" i="0">
+                <a:solidFill>
+                  <a:srgbClr val="666666"/>
+                </a:solidFill>
+                <a:latin typeface="Calibri"/>
+              </a:rPr>
+              <a:t>Diagramas UML y de contexto</a:t>
+            </a:r>
+          </a:p>
+        </p:txBody>
+      </p:sp>
+      <p:sp>
+        <p:nvSpPr>
+          <p:cNvPr id="11" name="Rounded Rectangle 10"/>
+          <p:cNvSpPr/>
+          <p:nvPr/>
+        </p:nvSpPr>
+        <p:spPr>
+          <a:xfrm>
+            <a:off x="4283354" y="1591056"/>
+            <a:ext cx="3624986" cy="2331720"/>
+          </a:xfrm>
+          <a:prstGeom prst="roundRect">
+            <a:avLst>
+              <a:gd name="adj" fmla="val 12000"/>
+            </a:avLst>
+          </a:prstGeom>
+          <a:solidFill>
+            <a:srgbClr val="F2F2F2"/>
+          </a:solidFill>
+          <a:ln>
+            <a:noFill/>
+          </a:ln>
+        </p:spPr>
+        <p:style>
+          <a:lnRef idx="1">
+            <a:schemeClr val="accent1"/>
+          </a:lnRef>
+          <a:fillRef idx="3">
+            <a:schemeClr val="accent1"/>
+          </a:fillRef>
+          <a:effectRef idx="2">
+            <a:schemeClr val="accent1"/>
+          </a:effectRef>
+          <a:fontRef idx="minor">
+            <a:schemeClr val="lt1"/>
+          </a:fontRef>
+        </p:style>
+        <p:txBody>
+          <a:bodyPr rtlCol="0" anchor="ctr"/>
+          <a:lstStyle/>
+          <a:p>
+            <a:pPr algn="ctr"/>
+          </a:p>
+        </p:txBody>
+      </p:sp>
+      <p:sp>
+        <p:nvSpPr>
+          <p:cNvPr id="12" name="Rectangle 11"/>
+          <p:cNvSpPr/>
+          <p:nvPr/>
+        </p:nvSpPr>
+        <p:spPr>
+          <a:xfrm>
+            <a:off x="4283354" y="1591056"/>
+            <a:ext cx="3624986" cy="64008"/>
+          </a:xfrm>
+          <a:prstGeom prst="rect">
+            <a:avLst/>
+          </a:prstGeom>
+          <a:solidFill>
+            <a:srgbClr val="095292"/>
+          </a:solidFill>
+          <a:ln>
+            <a:noFill/>
+          </a:ln>
+        </p:spPr>
+        <p:style>
+          <a:lnRef idx="1">
+            <a:schemeClr val="accent1"/>
+          </a:lnRef>
+          <a:fillRef idx="3">
+            <a:schemeClr val="accent1"/>
+          </a:fillRef>
+          <a:effectRef idx="2">
+            <a:schemeClr val="accent1"/>
+          </a:effectRef>
+          <a:fontRef idx="minor">
+            <a:schemeClr val="lt1"/>
+          </a:fontRef>
+        </p:style>
+        <p:txBody>
+          <a:bodyPr rtlCol="0" anchor="ctr"/>
+          <a:lstStyle/>
+          <a:p>
+            <a:pPr algn="ctr"/>
+          </a:p>
+        </p:txBody>
+      </p:sp>
+      <p:sp>
+        <p:nvSpPr>
+          <p:cNvPr id="13" name="Rectangle 12"/>
+          <p:cNvSpPr/>
+          <p:nvPr/>
+        </p:nvSpPr>
+        <p:spPr>
+          <a:xfrm>
+            <a:off x="4283354" y="1655064"/>
+            <a:ext cx="3624986" cy="27432"/>
+          </a:xfrm>
+          <a:prstGeom prst="rect">
+            <a:avLst/>
+          </a:prstGeom>
+          <a:solidFill>
+            <a:srgbClr val="FFD000"/>
+          </a:solidFill>
+          <a:ln>
+            <a:noFill/>
+          </a:ln>
+        </p:spPr>
+        <p:style>
+          <a:lnRef idx="1">
+            <a:schemeClr val="accent1"/>
+          </a:lnRef>
+          <a:fillRef idx="3">
+            <a:schemeClr val="accent1"/>
+          </a:fillRef>
+          <a:effectRef idx="2">
+            <a:schemeClr val="accent1"/>
+          </a:effectRef>
+          <a:fontRef idx="minor">
+            <a:schemeClr val="lt1"/>
+          </a:fontRef>
+        </p:style>
+        <p:txBody>
+          <a:bodyPr rtlCol="0" anchor="ctr"/>
+          <a:lstStyle/>
+          <a:p>
+            <a:pPr algn="ctr"/>
+          </a:p>
+        </p:txBody>
+      </p:sp>
+      <p:pic>
+        <p:nvPicPr>
+          <p:cNvPr id="14" name="Picture 13" descr="mermaid.png"/>
+          <p:cNvPicPr>
+            <a:picLocks noChangeAspect="1"/>
+          </p:cNvPicPr>
+          <p:nvPr/>
+        </p:nvPicPr>
+        <p:blipFill>
+          <a:blip r:embed="rId3"/>
+          <a:stretch>
+            <a:fillRect/>
+          </a:stretch>
+        </p:blipFill>
+        <p:spPr>
+          <a:xfrm>
+            <a:off x="5469483" y="1847087"/>
+            <a:ext cx="1252728" cy="1252728"/>
+          </a:xfrm>
+          <a:prstGeom prst="rect">
+            <a:avLst/>
+          </a:prstGeom>
+        </p:spPr>
+      </p:pic>
+      <p:sp>
+        <p:nvSpPr>
+          <p:cNvPr id="15" name="TextBox 14"/>
+          <p:cNvSpPr txBox="1"/>
+          <p:nvPr/>
+        </p:nvSpPr>
+        <p:spPr>
+          <a:xfrm>
+            <a:off x="4356506" y="3191256"/>
+            <a:ext cx="3478682" cy="621792"/>
+          </a:xfrm>
+          <a:prstGeom prst="rect">
+            <a:avLst/>
+          </a:prstGeom>
+          <a:noFill/>
+        </p:spPr>
+        <p:txBody>
+          <a:bodyPr wrap="square" anchor="t"/>
+          <a:lstStyle/>
+          <a:p>
+            <a:pPr algn="ctr"/>
+            <a:r>
+              <a:rPr sz="1300" b="1" i="0">
+                <a:solidFill>
+                  <a:srgbClr val="095292"/>
+                </a:solidFill>
+                <a:latin typeface="Calibri"/>
+              </a:rPr>
+              <a:t>Mermaid</a:t>
+            </a:r>
+          </a:p>
+          <a:p>
+            <a:pPr algn="ctr">
+              <a:spcBef>
+                <a:spcPts val="200"/>
+              </a:spcBef>
             </a:pPr>
             <a:r>
-              <a:rPr sz="2000" b="0" i="0">
-                <a:solidFill>
-                  <a:srgbClr val="333333"/>
-                </a:solidFill>
-                <a:latin typeface="Calibri"/>
-              </a:rPr>
-              <a:t>–   Nadie ha definido todavia que conceptos del negocio existen, que datos guarda cada uno ni como se relacionan entre si.</a:t>
-            </a:r>
-          </a:p>
-          <a:p>
-            <a:pPr>
-              <a:spcAft>
-                <a:spcPts val="800"/>
-              </a:spcAft>
+              <a:rPr sz="1000" b="0" i="0">
+                <a:solidFill>
+                  <a:srgbClr val="666666"/>
+                </a:solidFill>
+                <a:latin typeface="Calibri"/>
+              </a:rPr>
+              <a:t>Diagramas como texto versionable</a:t>
+            </a:r>
+          </a:p>
+        </p:txBody>
+      </p:sp>
+      <p:sp>
+        <p:nvSpPr>
+          <p:cNvPr id="16" name="Rounded Rectangle 15"/>
+          <p:cNvSpPr/>
+          <p:nvPr/>
+        </p:nvSpPr>
+        <p:spPr>
+          <a:xfrm>
+            <a:off x="8109508" y="1591056"/>
+            <a:ext cx="3624986" cy="2331720"/>
+          </a:xfrm>
+          <a:prstGeom prst="roundRect">
+            <a:avLst>
+              <a:gd name="adj" fmla="val 12000"/>
+            </a:avLst>
+          </a:prstGeom>
+          <a:solidFill>
+            <a:srgbClr val="F2F2F2"/>
+          </a:solidFill>
+          <a:ln>
+            <a:noFill/>
+          </a:ln>
+        </p:spPr>
+        <p:style>
+          <a:lnRef idx="1">
+            <a:schemeClr val="accent1"/>
+          </a:lnRef>
+          <a:fillRef idx="3">
+            <a:schemeClr val="accent1"/>
+          </a:fillRef>
+          <a:effectRef idx="2">
+            <a:schemeClr val="accent1"/>
+          </a:effectRef>
+          <a:fontRef idx="minor">
+            <a:schemeClr val="lt1"/>
+          </a:fontRef>
+        </p:style>
+        <p:txBody>
+          <a:bodyPr rtlCol="0" anchor="ctr"/>
+          <a:lstStyle/>
+          <a:p>
+            <a:pPr algn="ctr"/>
+          </a:p>
+        </p:txBody>
+      </p:sp>
+      <p:sp>
+        <p:nvSpPr>
+          <p:cNvPr id="17" name="Rectangle 16"/>
+          <p:cNvSpPr/>
+          <p:nvPr/>
+        </p:nvSpPr>
+        <p:spPr>
+          <a:xfrm>
+            <a:off x="8109508" y="1591056"/>
+            <a:ext cx="3624986" cy="64008"/>
+          </a:xfrm>
+          <a:prstGeom prst="rect">
+            <a:avLst/>
+          </a:prstGeom>
+          <a:solidFill>
+            <a:srgbClr val="095292"/>
+          </a:solidFill>
+          <a:ln>
+            <a:noFill/>
+          </a:ln>
+        </p:spPr>
+        <p:style>
+          <a:lnRef idx="1">
+            <a:schemeClr val="accent1"/>
+          </a:lnRef>
+          <a:fillRef idx="3">
+            <a:schemeClr val="accent1"/>
+          </a:fillRef>
+          <a:effectRef idx="2">
+            <a:schemeClr val="accent1"/>
+          </a:effectRef>
+          <a:fontRef idx="minor">
+            <a:schemeClr val="lt1"/>
+          </a:fontRef>
+        </p:style>
+        <p:txBody>
+          <a:bodyPr rtlCol="0" anchor="ctr"/>
+          <a:lstStyle/>
+          <a:p>
+            <a:pPr algn="ctr"/>
+          </a:p>
+        </p:txBody>
+      </p:sp>
+      <p:sp>
+        <p:nvSpPr>
+          <p:cNvPr id="18" name="Rectangle 17"/>
+          <p:cNvSpPr/>
+          <p:nvPr/>
+        </p:nvSpPr>
+        <p:spPr>
+          <a:xfrm>
+            <a:off x="8109508" y="1655064"/>
+            <a:ext cx="3624986" cy="27432"/>
+          </a:xfrm>
+          <a:prstGeom prst="rect">
+            <a:avLst/>
+          </a:prstGeom>
+          <a:solidFill>
+            <a:srgbClr val="FFD000"/>
+          </a:solidFill>
+          <a:ln>
+            <a:noFill/>
+          </a:ln>
+        </p:spPr>
+        <p:style>
+          <a:lnRef idx="1">
+            <a:schemeClr val="accent1"/>
+          </a:lnRef>
+          <a:fillRef idx="3">
+            <a:schemeClr val="accent1"/>
+          </a:fillRef>
+          <a:effectRef idx="2">
+            <a:schemeClr val="accent1"/>
+          </a:effectRef>
+          <a:fontRef idx="minor">
+            <a:schemeClr val="lt1"/>
+          </a:fontRef>
+        </p:style>
+        <p:txBody>
+          <a:bodyPr rtlCol="0" anchor="ctr"/>
+          <a:lstStyle/>
+          <a:p>
+            <a:pPr algn="ctr"/>
+          </a:p>
+        </p:txBody>
+      </p:sp>
+      <p:pic>
+        <p:nvPicPr>
+          <p:cNvPr id="19" name="Picture 18" descr="examlab.png"/>
+          <p:cNvPicPr>
+            <a:picLocks noChangeAspect="1"/>
+          </p:cNvPicPr>
+          <p:nvPr/>
+        </p:nvPicPr>
+        <p:blipFill>
+          <a:blip r:embed="rId4"/>
+          <a:stretch>
+            <a:fillRect/>
+          </a:stretch>
+        </p:blipFill>
+        <p:spPr>
+          <a:xfrm>
+            <a:off x="9295638" y="1847087"/>
+            <a:ext cx="1252728" cy="1252728"/>
+          </a:xfrm>
+          <a:prstGeom prst="rect">
+            <a:avLst/>
+          </a:prstGeom>
+        </p:spPr>
+      </p:pic>
+      <p:sp>
+        <p:nvSpPr>
+          <p:cNvPr id="20" name="TextBox 19"/>
+          <p:cNvSpPr txBox="1"/>
+          <p:nvPr/>
+        </p:nvSpPr>
+        <p:spPr>
+          <a:xfrm>
+            <a:off x="8182660" y="3191256"/>
+            <a:ext cx="3478682" cy="621792"/>
+          </a:xfrm>
+          <a:prstGeom prst="rect">
+            <a:avLst/>
+          </a:prstGeom>
+          <a:noFill/>
+        </p:spPr>
+        <p:txBody>
+          <a:bodyPr wrap="square" anchor="t"/>
+          <a:lstStyle/>
+          <a:p>
+            <a:pPr algn="ctr"/>
+            <a:r>
+              <a:rPr sz="1300" b="1" i="0">
+                <a:solidFill>
+                  <a:srgbClr val="095292"/>
+                </a:solidFill>
+                <a:latin typeface="Calibri"/>
+              </a:rPr>
+              <a:t>la plataforma del curso</a:t>
+            </a:r>
+          </a:p>
+          <a:p>
+            <a:pPr algn="ctr">
+              <a:spcBef>
+                <a:spcPts val="200"/>
+              </a:spcBef>
             </a:pPr>
             <a:r>
-              <a:rPr sz="2000" b="0" i="0">
-                <a:solidFill>
-                  <a:srgbClr val="333333"/>
-                </a:solidFill>
-                <a:latin typeface="Calibri"/>
-              </a:rPr>
-              <a:t>–   El equipo discute en palabras si una mascota puede tener dos duenos y si la cita pertenece a la mascota o al veterinario, y esa discusion no se cierra hablando.</a:t>
-            </a:r>
-          </a:p>
-        </p:txBody>
-      </p:sp>
-      <p:sp>
-        <p:nvSpPr>
-          <p:cNvPr id="6" name="TextBox 5"/>
+              <a:rPr sz="1000" b="0" i="0">
+                <a:solidFill>
+                  <a:srgbClr val="666666"/>
+                </a:solidFill>
+                <a:latin typeface="Calibri"/>
+              </a:rPr>
+              <a:t>Entrega del taller · en la fecha que indique el docente</a:t>
+            </a:r>
+          </a:p>
+        </p:txBody>
+      </p:sp>
+      <p:sp>
+        <p:nvSpPr>
+          <p:cNvPr id="21" name="TextBox 20"/>
           <p:cNvSpPr txBox="1"/>
           <p:nvPr/>
         </p:nvSpPr>
@@ -6107,111 +6123,21 @@
                 </a:solidFill>
                 <a:latin typeface="Calibri"/>
               </a:rPr>
-              <a:t>Taller PI — pasos guiados</a:t>
-            </a:r>
-          </a:p>
-        </p:txBody>
-      </p:sp>
-      <p:sp>
-        <p:nvSpPr>
-          <p:cNvPr id="5" name="Rounded Rectangle 4"/>
-          <p:cNvSpPr/>
-          <p:nvPr/>
-        </p:nvSpPr>
-        <p:spPr>
-          <a:xfrm>
-            <a:off x="457200" y="1234440"/>
-            <a:ext cx="11277295" cy="950976"/>
-          </a:xfrm>
-          <a:prstGeom prst="roundRect">
-            <a:avLst>
-              <a:gd name="adj" fmla="val 12000"/>
-            </a:avLst>
-          </a:prstGeom>
-          <a:solidFill>
-            <a:srgbClr val="F2F2F2"/>
-          </a:solidFill>
-          <a:ln>
-            <a:noFill/>
-          </a:ln>
-        </p:spPr>
-        <p:style>
-          <a:lnRef idx="1">
-            <a:schemeClr val="accent1"/>
-          </a:lnRef>
-          <a:fillRef idx="3">
-            <a:schemeClr val="accent1"/>
-          </a:fillRef>
-          <a:effectRef idx="2">
-            <a:schemeClr val="accent1"/>
-          </a:effectRef>
-          <a:fontRef idx="minor">
-            <a:schemeClr val="lt1"/>
-          </a:fontRef>
-        </p:style>
-        <p:txBody>
-          <a:bodyPr rtlCol="0" anchor="ctr"/>
-          <a:lstStyle/>
-          <a:p>
-            <a:pPr algn="ctr"/>
-          </a:p>
-        </p:txBody>
-      </p:sp>
-      <p:sp>
-        <p:nvSpPr>
-          <p:cNvPr id="6" name="Rounded Rectangle 5"/>
-          <p:cNvSpPr/>
-          <p:nvPr/>
-        </p:nvSpPr>
-        <p:spPr>
-          <a:xfrm>
-            <a:off x="594360" y="1490472"/>
-            <a:ext cx="438912" cy="438912"/>
-          </a:xfrm>
-          <a:prstGeom prst="roundRect">
-            <a:avLst>
-              <a:gd name="adj" fmla="val 12000"/>
-            </a:avLst>
-          </a:prstGeom>
-          <a:solidFill>
-            <a:srgbClr val="095292"/>
-          </a:solidFill>
-          <a:ln>
-            <a:noFill/>
-          </a:ln>
-        </p:spPr>
-        <p:style>
-          <a:lnRef idx="1">
-            <a:schemeClr val="accent1"/>
-          </a:lnRef>
-          <a:fillRef idx="3">
-            <a:schemeClr val="accent1"/>
-          </a:fillRef>
-          <a:effectRef idx="2">
-            <a:schemeClr val="accent1"/>
-          </a:effectRef>
-          <a:fontRef idx="minor">
-            <a:schemeClr val="lt1"/>
-          </a:fontRef>
-        </p:style>
-        <p:txBody>
-          <a:bodyPr rtlCol="0" anchor="ctr"/>
-          <a:lstStyle/>
-          <a:p>
-            <a:pPr algn="ctr"/>
-          </a:p>
-        </p:txBody>
-      </p:sp>
-      <p:sp>
-        <p:nvSpPr>
-          <p:cNvPr id="7" name="TextBox 6"/>
+              <a:t>Taller PI — por que importa</a:t>
+            </a:r>
+          </a:p>
+        </p:txBody>
+      </p:sp>
+      <p:sp>
+        <p:nvSpPr>
+          <p:cNvPr id="5" name="TextBox 4"/>
           <p:cNvSpPr txBox="1"/>
           <p:nvPr/>
         </p:nvSpPr>
         <p:spPr>
           <a:xfrm>
-            <a:off x="594360" y="1490472"/>
-            <a:ext cx="438912" cy="438912"/>
+            <a:off x="457200" y="1170432"/>
+            <a:ext cx="11277295" cy="5230368"/>
           </a:xfrm>
           <a:prstGeom prst="rect">
             <a:avLst/>
@@ -6219,677 +6145,81 @@
           <a:noFill/>
         </p:spPr>
         <p:txBody>
-          <a:bodyPr wrap="square" anchor="ctr"/>
-          <a:lstStyle/>
-          <a:p>
-            <a:pPr algn="ctr"/>
-            <a:r>
-              <a:rPr sz="1600" b="1" i="0">
-                <a:solidFill>
-                  <a:srgbClr val="FFFFFF"/>
-                </a:solidFill>
-                <a:latin typeface="Calibri"/>
-              </a:rPr>
-              <a:t>1</a:t>
-            </a:r>
-          </a:p>
-        </p:txBody>
-      </p:sp>
-      <p:sp>
-        <p:nvSpPr>
-          <p:cNvPr id="8" name="TextBox 7"/>
-          <p:cNvSpPr txBox="1"/>
-          <p:nvPr/>
-        </p:nvSpPr>
-        <p:spPr>
-          <a:xfrm>
-            <a:off x="1188720" y="1325880"/>
-            <a:ext cx="10271455" cy="786384"/>
-          </a:xfrm>
-          <a:prstGeom prst="rect">
-            <a:avLst/>
-          </a:prstGeom>
-          <a:noFill/>
-        </p:spPr>
-        <p:txBody>
-          <a:bodyPr wrap="square" anchor="ctr"/>
-          <a:lstStyle/>
-          <a:p>
-            <a:r>
-              <a:rPr sz="1500" b="1" i="0">
-                <a:solidFill>
-                  <a:srgbClr val="095292"/>
-                </a:solidFill>
-                <a:latin typeface="Calibri"/>
-              </a:rPr>
-              <a:t>Paso 1: subraye en el catalogo de requisitos y en el backlog los sustantivos del negocio de VetCare y arme la lista de clases candidatas, descartando las que sean pantallas, reportes o cosas tecnicas.</a:t>
-            </a:r>
-          </a:p>
-        </p:txBody>
-      </p:sp>
-      <p:sp>
-        <p:nvSpPr>
-          <p:cNvPr id="9" name="Rounded Rectangle 8"/>
-          <p:cNvSpPr/>
-          <p:nvPr/>
-        </p:nvSpPr>
-        <p:spPr>
-          <a:xfrm>
-            <a:off x="457200" y="2276856"/>
-            <a:ext cx="11277295" cy="950976"/>
-          </a:xfrm>
-          <a:prstGeom prst="roundRect">
-            <a:avLst>
-              <a:gd name="adj" fmla="val 12000"/>
-            </a:avLst>
-          </a:prstGeom>
-          <a:solidFill>
-            <a:srgbClr val="E8F4FA"/>
-          </a:solidFill>
-          <a:ln>
-            <a:noFill/>
-          </a:ln>
-        </p:spPr>
-        <p:style>
-          <a:lnRef idx="1">
-            <a:schemeClr val="accent1"/>
-          </a:lnRef>
-          <a:fillRef idx="3">
-            <a:schemeClr val="accent1"/>
-          </a:fillRef>
-          <a:effectRef idx="2">
-            <a:schemeClr val="accent1"/>
-          </a:effectRef>
-          <a:fontRef idx="minor">
-            <a:schemeClr val="lt1"/>
-          </a:fontRef>
-        </p:style>
-        <p:txBody>
-          <a:bodyPr rtlCol="0" anchor="ctr"/>
-          <a:lstStyle/>
-          <a:p>
-            <a:pPr algn="ctr"/>
-          </a:p>
-        </p:txBody>
-      </p:sp>
-      <p:sp>
-        <p:nvSpPr>
-          <p:cNvPr id="10" name="Rounded Rectangle 9"/>
-          <p:cNvSpPr/>
-          <p:nvPr/>
-        </p:nvSpPr>
-        <p:spPr>
-          <a:xfrm>
-            <a:off x="594360" y="2532888"/>
-            <a:ext cx="438912" cy="438912"/>
-          </a:xfrm>
-          <a:prstGeom prst="roundRect">
-            <a:avLst>
-              <a:gd name="adj" fmla="val 12000"/>
-            </a:avLst>
-          </a:prstGeom>
-          <a:solidFill>
-            <a:srgbClr val="095292"/>
-          </a:solidFill>
-          <a:ln>
-            <a:noFill/>
-          </a:ln>
-        </p:spPr>
-        <p:style>
-          <a:lnRef idx="1">
-            <a:schemeClr val="accent1"/>
-          </a:lnRef>
-          <a:fillRef idx="3">
-            <a:schemeClr val="accent1"/>
-          </a:fillRef>
-          <a:effectRef idx="2">
-            <a:schemeClr val="accent1"/>
-          </a:effectRef>
-          <a:fontRef idx="minor">
-            <a:schemeClr val="lt1"/>
-          </a:fontRef>
-        </p:style>
-        <p:txBody>
-          <a:bodyPr rtlCol="0" anchor="ctr"/>
-          <a:lstStyle/>
-          <a:p>
-            <a:pPr algn="ctr"/>
-          </a:p>
-        </p:txBody>
-      </p:sp>
-      <p:sp>
-        <p:nvSpPr>
-          <p:cNvPr id="11" name="TextBox 10"/>
-          <p:cNvSpPr txBox="1"/>
-          <p:nvPr/>
-        </p:nvSpPr>
-        <p:spPr>
-          <a:xfrm>
-            <a:off x="594360" y="2532888"/>
-            <a:ext cx="438912" cy="438912"/>
-          </a:xfrm>
-          <a:prstGeom prst="rect">
-            <a:avLst/>
-          </a:prstGeom>
-          <a:noFill/>
-        </p:spPr>
-        <p:txBody>
-          <a:bodyPr wrap="square" anchor="ctr"/>
-          <a:lstStyle/>
-          <a:p>
-            <a:pPr algn="ctr"/>
-            <a:r>
-              <a:rPr sz="1600" b="1" i="0">
-                <a:solidFill>
-                  <a:srgbClr val="FFFFFF"/>
-                </a:solidFill>
-                <a:latin typeface="Calibri"/>
-              </a:rPr>
-              <a:t>2</a:t>
-            </a:r>
-          </a:p>
-        </p:txBody>
-      </p:sp>
-      <p:sp>
-        <p:nvSpPr>
-          <p:cNvPr id="12" name="TextBox 11"/>
-          <p:cNvSpPr txBox="1"/>
-          <p:nvPr/>
-        </p:nvSpPr>
-        <p:spPr>
-          <a:xfrm>
-            <a:off x="1188720" y="2368296"/>
-            <a:ext cx="10271455" cy="786384"/>
-          </a:xfrm>
-          <a:prstGeom prst="rect">
-            <a:avLst/>
-          </a:prstGeom>
-          <a:noFill/>
-        </p:spPr>
-        <p:txBody>
-          <a:bodyPr wrap="square" anchor="ctr"/>
-          <a:lstStyle/>
-          <a:p>
-            <a:r>
-              <a:rPr sz="1500" b="1" i="0">
-                <a:solidFill>
-                  <a:srgbClr val="095292"/>
-                </a:solidFill>
-                <a:latin typeface="Calibri"/>
-              </a:rPr>
-              <a:t>Paso 2: dibuje en draw.io las cinco clases Dueno, Mascota, Cita, Veterinario y Atencion con la caja de tres compartimentos, en singular y con mayuscula inicial.</a:t>
-            </a:r>
-          </a:p>
-        </p:txBody>
-      </p:sp>
-      <p:sp>
-        <p:nvSpPr>
-          <p:cNvPr id="13" name="Rounded Rectangle 12"/>
-          <p:cNvSpPr/>
-          <p:nvPr/>
-        </p:nvSpPr>
-        <p:spPr>
-          <a:xfrm>
-            <a:off x="457200" y="3319272"/>
-            <a:ext cx="11277295" cy="950976"/>
-          </a:xfrm>
-          <a:prstGeom prst="roundRect">
-            <a:avLst>
-              <a:gd name="adj" fmla="val 12000"/>
-            </a:avLst>
-          </a:prstGeom>
-          <a:solidFill>
-            <a:srgbClr val="F2F2F2"/>
-          </a:solidFill>
-          <a:ln>
-            <a:noFill/>
-          </a:ln>
-        </p:spPr>
-        <p:style>
-          <a:lnRef idx="1">
-            <a:schemeClr val="accent1"/>
-          </a:lnRef>
-          <a:fillRef idx="3">
-            <a:schemeClr val="accent1"/>
-          </a:fillRef>
-          <a:effectRef idx="2">
-            <a:schemeClr val="accent1"/>
-          </a:effectRef>
-          <a:fontRef idx="minor">
-            <a:schemeClr val="lt1"/>
-          </a:fontRef>
-        </p:style>
-        <p:txBody>
-          <a:bodyPr rtlCol="0" anchor="ctr"/>
-          <a:lstStyle/>
-          <a:p>
-            <a:pPr algn="ctr"/>
-          </a:p>
-        </p:txBody>
-      </p:sp>
-      <p:sp>
-        <p:nvSpPr>
-          <p:cNvPr id="14" name="Rounded Rectangle 13"/>
-          <p:cNvSpPr/>
-          <p:nvPr/>
-        </p:nvSpPr>
-        <p:spPr>
-          <a:xfrm>
-            <a:off x="594360" y="3575304"/>
-            <a:ext cx="438912" cy="438912"/>
-          </a:xfrm>
-          <a:prstGeom prst="roundRect">
-            <a:avLst>
-              <a:gd name="adj" fmla="val 12000"/>
-            </a:avLst>
-          </a:prstGeom>
-          <a:solidFill>
-            <a:srgbClr val="095292"/>
-          </a:solidFill>
-          <a:ln>
-            <a:noFill/>
-          </a:ln>
-        </p:spPr>
-        <p:style>
-          <a:lnRef idx="1">
-            <a:schemeClr val="accent1"/>
-          </a:lnRef>
-          <a:fillRef idx="3">
-            <a:schemeClr val="accent1"/>
-          </a:fillRef>
-          <a:effectRef idx="2">
-            <a:schemeClr val="accent1"/>
-          </a:effectRef>
-          <a:fontRef idx="minor">
-            <a:schemeClr val="lt1"/>
-          </a:fontRef>
-        </p:style>
-        <p:txBody>
-          <a:bodyPr rtlCol="0" anchor="ctr"/>
-          <a:lstStyle/>
-          <a:p>
-            <a:pPr algn="ctr"/>
-          </a:p>
-        </p:txBody>
-      </p:sp>
-      <p:sp>
-        <p:nvSpPr>
-          <p:cNvPr id="15" name="TextBox 14"/>
-          <p:cNvSpPr txBox="1"/>
-          <p:nvPr/>
-        </p:nvSpPr>
-        <p:spPr>
-          <a:xfrm>
-            <a:off x="594360" y="3575304"/>
-            <a:ext cx="438912" cy="438912"/>
-          </a:xfrm>
-          <a:prstGeom prst="rect">
-            <a:avLst/>
-          </a:prstGeom>
-          <a:noFill/>
-        </p:spPr>
-        <p:txBody>
-          <a:bodyPr wrap="square" anchor="ctr"/>
-          <a:lstStyle/>
-          <a:p>
-            <a:pPr algn="ctr"/>
-            <a:r>
-              <a:rPr sz="1600" b="1" i="0">
-                <a:solidFill>
-                  <a:srgbClr val="FFFFFF"/>
-                </a:solidFill>
-                <a:latin typeface="Calibri"/>
-              </a:rPr>
-              <a:t>3</a:t>
-            </a:r>
-          </a:p>
-        </p:txBody>
-      </p:sp>
-      <p:sp>
-        <p:nvSpPr>
-          <p:cNvPr id="16" name="TextBox 15"/>
-          <p:cNvSpPr txBox="1"/>
-          <p:nvPr/>
-        </p:nvSpPr>
-        <p:spPr>
-          <a:xfrm>
-            <a:off x="1188720" y="3410712"/>
-            <a:ext cx="10271455" cy="786384"/>
-          </a:xfrm>
-          <a:prstGeom prst="rect">
-            <a:avLst/>
-          </a:prstGeom>
-          <a:noFill/>
-        </p:spPr>
-        <p:txBody>
-          <a:bodyPr wrap="square" anchor="ctr"/>
-          <a:lstStyle/>
-          <a:p>
-            <a:r>
-              <a:rPr sz="1500" b="1" i="0">
-                <a:solidFill>
-                  <a:srgbClr val="095292"/>
-                </a:solidFill>
-                <a:latin typeface="Calibri"/>
-              </a:rPr>
-              <a:t>Paso 3: coloque minimo cuatro atributos por clase con visibilidad y tipo (por ejemplo -documento: String, -fechaNacimiento: Date) verificando que ningun atributo este repetido en dos clases distintas.</a:t>
-            </a:r>
-          </a:p>
-        </p:txBody>
-      </p:sp>
-      <p:sp>
-        <p:nvSpPr>
-          <p:cNvPr id="17" name="Rounded Rectangle 16"/>
-          <p:cNvSpPr/>
-          <p:nvPr/>
-        </p:nvSpPr>
-        <p:spPr>
-          <a:xfrm>
-            <a:off x="457200" y="4361688"/>
-            <a:ext cx="11277295" cy="950976"/>
-          </a:xfrm>
-          <a:prstGeom prst="roundRect">
-            <a:avLst>
-              <a:gd name="adj" fmla="val 12000"/>
-            </a:avLst>
-          </a:prstGeom>
-          <a:solidFill>
-            <a:srgbClr val="E8F4FA"/>
-          </a:solidFill>
-          <a:ln>
-            <a:noFill/>
-          </a:ln>
-        </p:spPr>
-        <p:style>
-          <a:lnRef idx="1">
-            <a:schemeClr val="accent1"/>
-          </a:lnRef>
-          <a:fillRef idx="3">
-            <a:schemeClr val="accent1"/>
-          </a:fillRef>
-          <a:effectRef idx="2">
-            <a:schemeClr val="accent1"/>
-          </a:effectRef>
-          <a:fontRef idx="minor">
-            <a:schemeClr val="lt1"/>
-          </a:fontRef>
-        </p:style>
-        <p:txBody>
-          <a:bodyPr rtlCol="0" anchor="ctr"/>
-          <a:lstStyle/>
-          <a:p>
-            <a:pPr algn="ctr"/>
-          </a:p>
-        </p:txBody>
-      </p:sp>
-      <p:sp>
-        <p:nvSpPr>
-          <p:cNvPr id="18" name="Rounded Rectangle 17"/>
-          <p:cNvSpPr/>
-          <p:nvPr/>
-        </p:nvSpPr>
-        <p:spPr>
-          <a:xfrm>
-            <a:off x="594360" y="4617720"/>
-            <a:ext cx="438912" cy="438912"/>
-          </a:xfrm>
-          <a:prstGeom prst="roundRect">
-            <a:avLst>
-              <a:gd name="adj" fmla="val 12000"/>
-            </a:avLst>
-          </a:prstGeom>
-          <a:solidFill>
-            <a:srgbClr val="095292"/>
-          </a:solidFill>
-          <a:ln>
-            <a:noFill/>
-          </a:ln>
-        </p:spPr>
-        <p:style>
-          <a:lnRef idx="1">
-            <a:schemeClr val="accent1"/>
-          </a:lnRef>
-          <a:fillRef idx="3">
-            <a:schemeClr val="accent1"/>
-          </a:fillRef>
-          <a:effectRef idx="2">
-            <a:schemeClr val="accent1"/>
-          </a:effectRef>
-          <a:fontRef idx="minor">
-            <a:schemeClr val="lt1"/>
-          </a:fontRef>
-        </p:style>
-        <p:txBody>
-          <a:bodyPr rtlCol="0" anchor="ctr"/>
-          <a:lstStyle/>
-          <a:p>
-            <a:pPr algn="ctr"/>
-          </a:p>
-        </p:txBody>
-      </p:sp>
-      <p:sp>
-        <p:nvSpPr>
-          <p:cNvPr id="19" name="TextBox 18"/>
-          <p:cNvSpPr txBox="1"/>
-          <p:nvPr/>
-        </p:nvSpPr>
-        <p:spPr>
-          <a:xfrm>
-            <a:off x="594360" y="4617720"/>
-            <a:ext cx="438912" cy="438912"/>
-          </a:xfrm>
-          <a:prstGeom prst="rect">
-            <a:avLst/>
-          </a:prstGeom>
-          <a:noFill/>
-        </p:spPr>
-        <p:txBody>
-          <a:bodyPr wrap="square" anchor="ctr"/>
-          <a:lstStyle/>
-          <a:p>
-            <a:pPr algn="ctr"/>
-            <a:r>
-              <a:rPr sz="1600" b="1" i="0">
-                <a:solidFill>
-                  <a:srgbClr val="FFFFFF"/>
-                </a:solidFill>
-                <a:latin typeface="Calibri"/>
-              </a:rPr>
-              <a:t>4</a:t>
-            </a:r>
-          </a:p>
-        </p:txBody>
-      </p:sp>
-      <p:sp>
-        <p:nvSpPr>
-          <p:cNvPr id="20" name="TextBox 19"/>
-          <p:cNvSpPr txBox="1"/>
-          <p:nvPr/>
-        </p:nvSpPr>
-        <p:spPr>
-          <a:xfrm>
-            <a:off x="1188720" y="4453128"/>
-            <a:ext cx="10271455" cy="786384"/>
-          </a:xfrm>
-          <a:prstGeom prst="rect">
-            <a:avLst/>
-          </a:prstGeom>
-          <a:noFill/>
-        </p:spPr>
-        <p:txBody>
-          <a:bodyPr wrap="square" anchor="ctr"/>
-          <a:lstStyle/>
-          <a:p>
-            <a:r>
-              <a:rPr sz="1500" b="1" i="0">
-                <a:solidFill>
-                  <a:srgbClr val="095292"/>
-                </a:solidFill>
-                <a:latin typeface="Calibri"/>
-              </a:rPr>
-              <a:t>Paso 4: agregue al menos un metodo propio del dominio por clase (por ejemplo +calcularEdad(): int en Mascota, +reprogramar(nuevaFecha: Date) en Cita) y descarte metodos tecnicos como conectarBD o guardarEnDisco.</a:t>
-            </a:r>
-          </a:p>
-        </p:txBody>
-      </p:sp>
-      <p:sp>
-        <p:nvSpPr>
-          <p:cNvPr id="21" name="Rounded Rectangle 20"/>
-          <p:cNvSpPr/>
-          <p:nvPr/>
-        </p:nvSpPr>
-        <p:spPr>
-          <a:xfrm>
-            <a:off x="457200" y="5404104"/>
-            <a:ext cx="11277295" cy="950976"/>
-          </a:xfrm>
-          <a:prstGeom prst="roundRect">
-            <a:avLst>
-              <a:gd name="adj" fmla="val 12000"/>
-            </a:avLst>
-          </a:prstGeom>
-          <a:solidFill>
-            <a:srgbClr val="F2F2F2"/>
-          </a:solidFill>
-          <a:ln>
-            <a:noFill/>
-          </a:ln>
-        </p:spPr>
-        <p:style>
-          <a:lnRef idx="1">
-            <a:schemeClr val="accent1"/>
-          </a:lnRef>
-          <a:fillRef idx="3">
-            <a:schemeClr val="accent1"/>
-          </a:fillRef>
-          <a:effectRef idx="2">
-            <a:schemeClr val="accent1"/>
-          </a:effectRef>
-          <a:fontRef idx="minor">
-            <a:schemeClr val="lt1"/>
-          </a:fontRef>
-        </p:style>
-        <p:txBody>
-          <a:bodyPr rtlCol="0" anchor="ctr"/>
-          <a:lstStyle/>
-          <a:p>
-            <a:pPr algn="ctr"/>
-          </a:p>
-        </p:txBody>
-      </p:sp>
-      <p:sp>
-        <p:nvSpPr>
-          <p:cNvPr id="22" name="Rounded Rectangle 21"/>
-          <p:cNvSpPr/>
-          <p:nvPr/>
-        </p:nvSpPr>
-        <p:spPr>
-          <a:xfrm>
-            <a:off x="594360" y="5660136"/>
-            <a:ext cx="438912" cy="438912"/>
-          </a:xfrm>
-          <a:prstGeom prst="roundRect">
-            <a:avLst>
-              <a:gd name="adj" fmla="val 12000"/>
-            </a:avLst>
-          </a:prstGeom>
-          <a:solidFill>
-            <a:srgbClr val="095292"/>
-          </a:solidFill>
-          <a:ln>
-            <a:noFill/>
-          </a:ln>
-        </p:spPr>
-        <p:style>
-          <a:lnRef idx="1">
-            <a:schemeClr val="accent1"/>
-          </a:lnRef>
-          <a:fillRef idx="3">
-            <a:schemeClr val="accent1"/>
-          </a:fillRef>
-          <a:effectRef idx="2">
-            <a:schemeClr val="accent1"/>
-          </a:effectRef>
-          <a:fontRef idx="minor">
-            <a:schemeClr val="lt1"/>
-          </a:fontRef>
-        </p:style>
-        <p:txBody>
-          <a:bodyPr rtlCol="0" anchor="ctr"/>
-          <a:lstStyle/>
-          <a:p>
-            <a:pPr algn="ctr"/>
-          </a:p>
-        </p:txBody>
-      </p:sp>
-      <p:sp>
-        <p:nvSpPr>
-          <p:cNvPr id="23" name="TextBox 22"/>
-          <p:cNvSpPr txBox="1"/>
-          <p:nvPr/>
-        </p:nvSpPr>
-        <p:spPr>
-          <a:xfrm>
-            <a:off x="594360" y="5660136"/>
-            <a:ext cx="438912" cy="438912"/>
-          </a:xfrm>
-          <a:prstGeom prst="rect">
-            <a:avLst/>
-          </a:prstGeom>
-          <a:noFill/>
-        </p:spPr>
-        <p:txBody>
-          <a:bodyPr wrap="square" anchor="ctr"/>
-          <a:lstStyle/>
-          <a:p>
-            <a:pPr algn="ctr"/>
-            <a:r>
-              <a:rPr sz="1600" b="1" i="0">
-                <a:solidFill>
-                  <a:srgbClr val="FFFFFF"/>
-                </a:solidFill>
-                <a:latin typeface="Calibri"/>
-              </a:rPr>
-              <a:t>5</a:t>
-            </a:r>
-          </a:p>
-        </p:txBody>
-      </p:sp>
-      <p:sp>
-        <p:nvSpPr>
-          <p:cNvPr id="24" name="TextBox 23"/>
-          <p:cNvSpPr txBox="1"/>
-          <p:nvPr/>
-        </p:nvSpPr>
-        <p:spPr>
-          <a:xfrm>
-            <a:off x="1188720" y="5495544"/>
-            <a:ext cx="10271455" cy="786384"/>
-          </a:xfrm>
-          <a:prstGeom prst="rect">
-            <a:avLst/>
-          </a:prstGeom>
-          <a:noFill/>
-        </p:spPr>
-        <p:txBody>
-          <a:bodyPr wrap="square" anchor="ctr"/>
-          <a:lstStyle/>
-          <a:p>
-            <a:r>
-              <a:rPr sz="1500" b="1" i="0">
-                <a:solidFill>
-                  <a:srgbClr val="095292"/>
-                </a:solidFill>
-                <a:latin typeface="Calibri"/>
-              </a:rPr>
-              <a:t>Paso 5: trace las cuatro asociaciones con nombre de relacion y multiplicidad en ambos extremos, leala cada una en voz alta como frase completa, exporte a PNG y .drawio y suba ambos archivos a la plataforma del curso.</a:t>
-            </a:r>
-          </a:p>
-        </p:txBody>
-      </p:sp>
-      <p:sp>
-        <p:nvSpPr>
-          <p:cNvPr id="25" name="TextBox 24"/>
+          <a:bodyPr wrap="square">
+            <a:spAutoFit/>
+          </a:bodyPr>
+          <a:lstStyle/>
+          <a:p>
+            <a:pPr>
+              <a:spcAft>
+                <a:spcPts val="800"/>
+              </a:spcAft>
+            </a:pPr>
+            <a:r>
+              <a:rPr sz="2000" b="0" i="0">
+                <a:solidFill>
+                  <a:srgbClr val="333333"/>
+                </a:solidFill>
+                <a:latin typeface="Calibri"/>
+              </a:rPr>
+              <a:t>–   </a:t>
+            </a:r>
+            <a:r>
+              <a:rPr sz="2000" b="1" i="0">
+                <a:solidFill>
+                  <a:srgbClr val="333333"/>
+                </a:solidFill>
+                <a:latin typeface="Calibri"/>
+              </a:rPr>
+              <a:t>Por que importa al PI:</a:t>
+            </a:r>
+            <a:r>
+              <a:rPr sz="2000" b="0" i="0">
+                <a:solidFill>
+                  <a:srgbClr val="333333"/>
+                </a:solidFill>
+                <a:latin typeface="Calibri"/>
+              </a:rPr>
+              <a:t> este diagrama de clases es el plano maestro de VetCare: de el salen el diccionario de datos, las tablas de la base de datos y las clases que se programan en Programacion II.</a:t>
+            </a:r>
+          </a:p>
+          <a:p>
+            <a:pPr>
+              <a:spcAft>
+                <a:spcPts val="800"/>
+              </a:spcAft>
+            </a:pPr>
+            <a:r>
+              <a:rPr sz="2000" b="0" i="0">
+                <a:solidFill>
+                  <a:srgbClr val="333333"/>
+                </a:solidFill>
+                <a:latin typeface="Calibri"/>
+              </a:rPr>
+              <a:t>–   Es el primer artefacto del curso que se lee igual en Cali, en Bogota o en Berlin, porque UML es un estandar y no una convencion del salon.</a:t>
+            </a:r>
+          </a:p>
+          <a:p>
+            <a:pPr>
+              <a:spcAft>
+                <a:spcPts val="800"/>
+              </a:spcAft>
+            </a:pPr>
+            <a:r>
+              <a:rPr sz="2000" b="0" i="0">
+                <a:solidFill>
+                  <a:srgbClr val="333333"/>
+                </a:solidFill>
+                <a:latin typeface="Calibri"/>
+              </a:rPr>
+              <a:t>–   Si una clase no puede rastrearse a un requisito o a una historia del backlog, sobra; y si un requisito no tiene donde vivir en el diagrama, falta una clase.</a:t>
+            </a:r>
+          </a:p>
+        </p:txBody>
+      </p:sp>
+      <p:sp>
+        <p:nvSpPr>
+          <p:cNvPr id="6" name="TextBox 5"/>
           <p:cNvSpPr txBox="1"/>
           <p:nvPr/>
         </p:nvSpPr>
@@ -7063,154 +6393,21 @@
                 </a:solidFill>
                 <a:latin typeface="Calibri"/>
               </a:rPr>
-              <a:t>Antes de entregar — autochequeo</a:t>
-            </a:r>
-          </a:p>
-        </p:txBody>
-      </p:sp>
-      <p:sp>
-        <p:nvSpPr>
-          <p:cNvPr id="5" name="Rounded Rectangle 4"/>
-          <p:cNvSpPr/>
-          <p:nvPr/>
-        </p:nvSpPr>
-        <p:spPr>
-          <a:xfrm>
-            <a:off x="457200" y="1261872"/>
-            <a:ext cx="11277295" cy="566928"/>
-          </a:xfrm>
-          <a:prstGeom prst="roundRect">
-            <a:avLst>
-              <a:gd name="adj" fmla="val 12000"/>
-            </a:avLst>
-          </a:prstGeom>
-          <a:solidFill>
-            <a:srgbClr val="F2F2F2"/>
-          </a:solidFill>
-          <a:ln>
-            <a:noFill/>
-          </a:ln>
-        </p:spPr>
-        <p:style>
-          <a:lnRef idx="1">
-            <a:schemeClr val="accent1"/>
-          </a:lnRef>
-          <a:fillRef idx="3">
-            <a:schemeClr val="accent1"/>
-          </a:fillRef>
-          <a:effectRef idx="2">
-            <a:schemeClr val="accent1"/>
-          </a:effectRef>
-          <a:fontRef idx="minor">
-            <a:schemeClr val="lt1"/>
-          </a:fontRef>
-        </p:style>
-        <p:txBody>
-          <a:bodyPr rtlCol="0" anchor="ctr"/>
-          <a:lstStyle/>
-          <a:p>
-            <a:pPr algn="ctr"/>
-          </a:p>
-        </p:txBody>
-      </p:sp>
-      <p:sp>
-        <p:nvSpPr>
-          <p:cNvPr id="6" name="Rectangle 5"/>
-          <p:cNvSpPr/>
-          <p:nvPr/>
-        </p:nvSpPr>
-        <p:spPr>
-          <a:xfrm>
-            <a:off x="640080" y="1408175"/>
-            <a:ext cx="274320" cy="274320"/>
-          </a:xfrm>
-          <a:prstGeom prst="rect">
-            <a:avLst/>
-          </a:prstGeom>
-          <a:solidFill>
-            <a:srgbClr val="FFFFFF"/>
-          </a:solidFill>
-          <a:ln>
-            <a:solidFill>
-              <a:srgbClr val="333333"/>
-            </a:solidFill>
-          </a:ln>
-        </p:spPr>
-        <p:style>
-          <a:lnRef idx="1">
-            <a:schemeClr val="accent1"/>
-          </a:lnRef>
-          <a:fillRef idx="3">
-            <a:schemeClr val="accent1"/>
-          </a:fillRef>
-          <a:effectRef idx="2">
-            <a:schemeClr val="accent1"/>
-          </a:effectRef>
-          <a:fontRef idx="minor">
-            <a:schemeClr val="lt1"/>
-          </a:fontRef>
-        </p:style>
-        <p:txBody>
-          <a:bodyPr rtlCol="0" anchor="ctr"/>
-          <a:lstStyle/>
-          <a:p>
-            <a:pPr algn="ctr"/>
-          </a:p>
-        </p:txBody>
-      </p:sp>
-      <p:sp>
-        <p:nvSpPr>
-          <p:cNvPr id="7" name="Rectangle 6"/>
-          <p:cNvSpPr/>
-          <p:nvPr/>
-        </p:nvSpPr>
-        <p:spPr>
-          <a:xfrm>
-            <a:off x="640080" y="1408175"/>
-            <a:ext cx="73152" cy="274320"/>
-          </a:xfrm>
-          <a:prstGeom prst="rect">
-            <a:avLst/>
-          </a:prstGeom>
-          <a:solidFill>
-            <a:srgbClr val="269CCB"/>
-          </a:solidFill>
-          <a:ln>
-            <a:noFill/>
-          </a:ln>
-        </p:spPr>
-        <p:style>
-          <a:lnRef idx="1">
-            <a:schemeClr val="accent1"/>
-          </a:lnRef>
-          <a:fillRef idx="3">
-            <a:schemeClr val="accent1"/>
-          </a:fillRef>
-          <a:effectRef idx="2">
-            <a:schemeClr val="accent1"/>
-          </a:effectRef>
-          <a:fontRef idx="minor">
-            <a:schemeClr val="lt1"/>
-          </a:fontRef>
-        </p:style>
-        <p:txBody>
-          <a:bodyPr rtlCol="0" anchor="ctr"/>
-          <a:lstStyle/>
-          <a:p>
-            <a:pPr algn="ctr"/>
-          </a:p>
-        </p:txBody>
-      </p:sp>
-      <p:sp>
-        <p:nvSpPr>
-          <p:cNvPr id="8" name="TextBox 7"/>
+              <a:t>Taller PI — punto de partida</a:t>
+            </a:r>
+          </a:p>
+        </p:txBody>
+      </p:sp>
+      <p:sp>
+        <p:nvSpPr>
+          <p:cNvPr id="5" name="TextBox 4"/>
           <p:cNvSpPr txBox="1"/>
           <p:nvPr/>
         </p:nvSpPr>
         <p:spPr>
           <a:xfrm>
-            <a:off x="1097280" y="1353312"/>
-            <a:ext cx="10362895" cy="402336"/>
+            <a:off x="457200" y="1170432"/>
+            <a:ext cx="11277295" cy="5230368"/>
           </a:xfrm>
           <a:prstGeom prst="rect">
             <a:avLst/>
@@ -7218,354 +6415,63 @@
           <a:noFill/>
         </p:spPr>
         <p:txBody>
-          <a:bodyPr wrap="square" anchor="ctr"/>
-          <a:lstStyle/>
-          <a:p>
-            <a:r>
-              <a:rPr sz="1500" b="0" i="0">
+          <a:bodyPr wrap="square">
+            <a:spAutoFit/>
+          </a:bodyPr>
+          <a:lstStyle/>
+          <a:p>
+            <a:pPr>
+              <a:spcAft>
+                <a:spcPts val="800"/>
+              </a:spcAft>
+            </a:pPr>
+            <a:r>
+              <a:rPr sz="2000" b="0" i="0">
                 <a:solidFill>
                   <a:srgbClr val="333333"/>
                 </a:solidFill>
                 <a:latin typeface="Calibri"/>
               </a:rPr>
-              <a:t>Si leo esta relacion en voz alta con sus dos multiplicidades, la frase resultante es cierta en la clinica Huellitas o suena absurda?</a:t>
-            </a:r>
-          </a:p>
-        </p:txBody>
-      </p:sp>
-      <p:sp>
-        <p:nvSpPr>
-          <p:cNvPr id="9" name="Rounded Rectangle 8"/>
-          <p:cNvSpPr/>
-          <p:nvPr/>
-        </p:nvSpPr>
-        <p:spPr>
-          <a:xfrm>
-            <a:off x="457200" y="1938528"/>
-            <a:ext cx="11277295" cy="566928"/>
-          </a:xfrm>
-          <a:prstGeom prst="roundRect">
-            <a:avLst>
-              <a:gd name="adj" fmla="val 12000"/>
-            </a:avLst>
-          </a:prstGeom>
-          <a:solidFill>
-            <a:srgbClr val="F2F2F2"/>
-          </a:solidFill>
-          <a:ln>
-            <a:noFill/>
-          </a:ln>
-        </p:spPr>
-        <p:style>
-          <a:lnRef idx="1">
-            <a:schemeClr val="accent1"/>
-          </a:lnRef>
-          <a:fillRef idx="3">
-            <a:schemeClr val="accent1"/>
-          </a:fillRef>
-          <a:effectRef idx="2">
-            <a:schemeClr val="accent1"/>
-          </a:effectRef>
-          <a:fontRef idx="minor">
-            <a:schemeClr val="lt1"/>
-          </a:fontRef>
-        </p:style>
-        <p:txBody>
-          <a:bodyPr rtlCol="0" anchor="ctr"/>
-          <a:lstStyle/>
-          <a:p>
-            <a:pPr algn="ctr"/>
-          </a:p>
-        </p:txBody>
-      </p:sp>
-      <p:sp>
-        <p:nvSpPr>
-          <p:cNvPr id="10" name="Rectangle 9"/>
-          <p:cNvSpPr/>
-          <p:nvPr/>
-        </p:nvSpPr>
-        <p:spPr>
-          <a:xfrm>
-            <a:off x="640080" y="2084832"/>
-            <a:ext cx="274320" cy="274320"/>
-          </a:xfrm>
-          <a:prstGeom prst="rect">
-            <a:avLst/>
-          </a:prstGeom>
-          <a:solidFill>
-            <a:srgbClr val="FFFFFF"/>
-          </a:solidFill>
-          <a:ln>
-            <a:solidFill>
-              <a:srgbClr val="333333"/>
-            </a:solidFill>
-          </a:ln>
-        </p:spPr>
-        <p:style>
-          <a:lnRef idx="1">
-            <a:schemeClr val="accent1"/>
-          </a:lnRef>
-          <a:fillRef idx="3">
-            <a:schemeClr val="accent1"/>
-          </a:fillRef>
-          <a:effectRef idx="2">
-            <a:schemeClr val="accent1"/>
-          </a:effectRef>
-          <a:fontRef idx="minor">
-            <a:schemeClr val="lt1"/>
-          </a:fontRef>
-        </p:style>
-        <p:txBody>
-          <a:bodyPr rtlCol="0" anchor="ctr"/>
-          <a:lstStyle/>
-          <a:p>
-            <a:pPr algn="ctr"/>
-          </a:p>
-        </p:txBody>
-      </p:sp>
-      <p:sp>
-        <p:nvSpPr>
-          <p:cNvPr id="11" name="Rectangle 10"/>
-          <p:cNvSpPr/>
-          <p:nvPr/>
-        </p:nvSpPr>
-        <p:spPr>
-          <a:xfrm>
-            <a:off x="640080" y="2084832"/>
-            <a:ext cx="73152" cy="274320"/>
-          </a:xfrm>
-          <a:prstGeom prst="rect">
-            <a:avLst/>
-          </a:prstGeom>
-          <a:solidFill>
-            <a:srgbClr val="269CCB"/>
-          </a:solidFill>
-          <a:ln>
-            <a:noFill/>
-          </a:ln>
-        </p:spPr>
-        <p:style>
-          <a:lnRef idx="1">
-            <a:schemeClr val="accent1"/>
-          </a:lnRef>
-          <a:fillRef idx="3">
-            <a:schemeClr val="accent1"/>
-          </a:fillRef>
-          <a:effectRef idx="2">
-            <a:schemeClr val="accent1"/>
-          </a:effectRef>
-          <a:fontRef idx="minor">
-            <a:schemeClr val="lt1"/>
-          </a:fontRef>
-        </p:style>
-        <p:txBody>
-          <a:bodyPr rtlCol="0" anchor="ctr"/>
-          <a:lstStyle/>
-          <a:p>
-            <a:pPr algn="ctr"/>
-          </a:p>
-        </p:txBody>
-      </p:sp>
-      <p:sp>
-        <p:nvSpPr>
-          <p:cNvPr id="12" name="TextBox 11"/>
-          <p:cNvSpPr txBox="1"/>
-          <p:nvPr/>
-        </p:nvSpPr>
-        <p:spPr>
-          <a:xfrm>
-            <a:off x="1097280" y="2029968"/>
-            <a:ext cx="10362895" cy="402336"/>
-          </a:xfrm>
-          <a:prstGeom prst="rect">
-            <a:avLst/>
-          </a:prstGeom>
-          <a:noFill/>
-        </p:spPr>
-        <p:txBody>
-          <a:bodyPr wrap="square" anchor="ctr"/>
-          <a:lstStyle/>
-          <a:p>
-            <a:r>
-              <a:rPr sz="1500" b="0" i="0">
+              <a:t>–   Ya existen el catalogo de RF/RNF y el backlog de historias de VetCare, ambos escritos en texto y sin ninguna representacion grafica.</a:t>
+            </a:r>
+          </a:p>
+          <a:p>
+            <a:pPr>
+              <a:spcAft>
+                <a:spcPts val="800"/>
+              </a:spcAft>
+            </a:pPr>
+            <a:r>
+              <a:rPr sz="2000" b="0" i="0">
                 <a:solidFill>
                   <a:srgbClr val="333333"/>
                 </a:solidFill>
                 <a:latin typeface="Calibri"/>
               </a:rPr>
-              <a:t>Este atributo pertenece de verdad al concepto donde lo puse, o lo puse ahi solo porque en la pantalla aparecen juntos?</a:t>
-            </a:r>
-          </a:p>
-        </p:txBody>
-      </p:sp>
-      <p:sp>
-        <p:nvSpPr>
-          <p:cNvPr id="13" name="Rounded Rectangle 12"/>
-          <p:cNvSpPr/>
-          <p:nvPr/>
-        </p:nvSpPr>
-        <p:spPr>
-          <a:xfrm>
-            <a:off x="457200" y="2615184"/>
-            <a:ext cx="11277295" cy="566928"/>
-          </a:xfrm>
-          <a:prstGeom prst="roundRect">
-            <a:avLst>
-              <a:gd name="adj" fmla="val 12000"/>
-            </a:avLst>
-          </a:prstGeom>
-          <a:solidFill>
-            <a:srgbClr val="F2F2F2"/>
-          </a:solidFill>
-          <a:ln>
-            <a:noFill/>
-          </a:ln>
-        </p:spPr>
-        <p:style>
-          <a:lnRef idx="1">
-            <a:schemeClr val="accent1"/>
-          </a:lnRef>
-          <a:fillRef idx="3">
-            <a:schemeClr val="accent1"/>
-          </a:fillRef>
-          <a:effectRef idx="2">
-            <a:schemeClr val="accent1"/>
-          </a:effectRef>
-          <a:fontRef idx="minor">
-            <a:schemeClr val="lt1"/>
-          </a:fontRef>
-        </p:style>
-        <p:txBody>
-          <a:bodyPr rtlCol="0" anchor="ctr"/>
-          <a:lstStyle/>
-          <a:p>
-            <a:pPr algn="ctr"/>
-          </a:p>
-        </p:txBody>
-      </p:sp>
-      <p:sp>
-        <p:nvSpPr>
-          <p:cNvPr id="14" name="Rectangle 13"/>
-          <p:cNvSpPr/>
-          <p:nvPr/>
-        </p:nvSpPr>
-        <p:spPr>
-          <a:xfrm>
-            <a:off x="640080" y="2761488"/>
-            <a:ext cx="274320" cy="274320"/>
-          </a:xfrm>
-          <a:prstGeom prst="rect">
-            <a:avLst/>
-          </a:prstGeom>
-          <a:solidFill>
-            <a:srgbClr val="FFFFFF"/>
-          </a:solidFill>
-          <a:ln>
-            <a:solidFill>
-              <a:srgbClr val="333333"/>
-            </a:solidFill>
-          </a:ln>
-        </p:spPr>
-        <p:style>
-          <a:lnRef idx="1">
-            <a:schemeClr val="accent1"/>
-          </a:lnRef>
-          <a:fillRef idx="3">
-            <a:schemeClr val="accent1"/>
-          </a:fillRef>
-          <a:effectRef idx="2">
-            <a:schemeClr val="accent1"/>
-          </a:effectRef>
-          <a:fontRef idx="minor">
-            <a:schemeClr val="lt1"/>
-          </a:fontRef>
-        </p:style>
-        <p:txBody>
-          <a:bodyPr rtlCol="0" anchor="ctr"/>
-          <a:lstStyle/>
-          <a:p>
-            <a:pPr algn="ctr"/>
-          </a:p>
-        </p:txBody>
-      </p:sp>
-      <p:sp>
-        <p:nvSpPr>
-          <p:cNvPr id="15" name="Rectangle 14"/>
-          <p:cNvSpPr/>
-          <p:nvPr/>
-        </p:nvSpPr>
-        <p:spPr>
-          <a:xfrm>
-            <a:off x="640080" y="2761488"/>
-            <a:ext cx="73152" cy="274320"/>
-          </a:xfrm>
-          <a:prstGeom prst="rect">
-            <a:avLst/>
-          </a:prstGeom>
-          <a:solidFill>
-            <a:srgbClr val="269CCB"/>
-          </a:solidFill>
-          <a:ln>
-            <a:noFill/>
-          </a:ln>
-        </p:spPr>
-        <p:style>
-          <a:lnRef idx="1">
-            <a:schemeClr val="accent1"/>
-          </a:lnRef>
-          <a:fillRef idx="3">
-            <a:schemeClr val="accent1"/>
-          </a:fillRef>
-          <a:effectRef idx="2">
-            <a:schemeClr val="accent1"/>
-          </a:effectRef>
-          <a:fontRef idx="minor">
-            <a:schemeClr val="lt1"/>
-          </a:fontRef>
-        </p:style>
-        <p:txBody>
-          <a:bodyPr rtlCol="0" anchor="ctr"/>
-          <a:lstStyle/>
-          <a:p>
-            <a:pPr algn="ctr"/>
-          </a:p>
-        </p:txBody>
-      </p:sp>
-      <p:sp>
-        <p:nvSpPr>
-          <p:cNvPr id="16" name="TextBox 15"/>
-          <p:cNvSpPr txBox="1"/>
-          <p:nvPr/>
-        </p:nvSpPr>
-        <p:spPr>
-          <a:xfrm>
-            <a:off x="1097280" y="2706624"/>
-            <a:ext cx="10362895" cy="402336"/>
-          </a:xfrm>
-          <a:prstGeom prst="rect">
-            <a:avLst/>
-          </a:prstGeom>
-          <a:noFill/>
-        </p:spPr>
-        <p:txBody>
-          <a:bodyPr wrap="square" anchor="ctr"/>
-          <a:lstStyle/>
-          <a:p>
-            <a:r>
-              <a:rPr sz="1500" b="0" i="0">
+              <a:t>–   Nadie ha definido todavia que conceptos del negocio existen, que datos guarda cada uno ni como se relacionan entre si.</a:t>
+            </a:r>
+          </a:p>
+          <a:p>
+            <a:pPr>
+              <a:spcAft>
+                <a:spcPts val="800"/>
+              </a:spcAft>
+            </a:pPr>
+            <a:r>
+              <a:rPr sz="2000" b="0" i="0">
                 <a:solidFill>
                   <a:srgbClr val="333333"/>
                 </a:solidFill>
                 <a:latin typeface="Calibri"/>
               </a:rPr>
-              <a:t>Esta caja es un concepto del negocio del que habla el veterinario, o es una pantalla, un reporte o algo tecnico que se me colo?</a:t>
-            </a:r>
-          </a:p>
-        </p:txBody>
-      </p:sp>
-      <p:sp>
-        <p:nvSpPr>
-          <p:cNvPr id="17" name="TextBox 16"/>
+              <a:t>–   El equipo discute en palabras si una mascota puede tener dos duenos y si la cita pertenece a la mascota o al veterinario, y esa discusion no se cierra hablando.</a:t>
+            </a:r>
+          </a:p>
+        </p:txBody>
+      </p:sp>
+      <p:sp>
+        <p:nvSpPr>
+          <p:cNvPr id="6" name="TextBox 5"/>
           <p:cNvSpPr txBox="1"/>
           <p:nvPr/>
         </p:nvSpPr>
@@ -7739,21 +6645,111 @@
                 </a:solidFill>
                 <a:latin typeface="Calibri"/>
               </a:rPr>
-              <a:t>Criterios de exito / entregable</a:t>
-            </a:r>
-          </a:p>
-        </p:txBody>
-      </p:sp>
-      <p:sp>
-        <p:nvSpPr>
-          <p:cNvPr id="5" name="TextBox 4"/>
+              <a:t>Taller PI — pasos guiados</a:t>
+            </a:r>
+          </a:p>
+        </p:txBody>
+      </p:sp>
+      <p:sp>
+        <p:nvSpPr>
+          <p:cNvPr id="5" name="Rounded Rectangle 4"/>
+          <p:cNvSpPr/>
+          <p:nvPr/>
+        </p:nvSpPr>
+        <p:spPr>
+          <a:xfrm>
+            <a:off x="457200" y="1234440"/>
+            <a:ext cx="11277295" cy="950976"/>
+          </a:xfrm>
+          <a:prstGeom prst="roundRect">
+            <a:avLst>
+              <a:gd name="adj" fmla="val 12000"/>
+            </a:avLst>
+          </a:prstGeom>
+          <a:solidFill>
+            <a:srgbClr val="F2F2F2"/>
+          </a:solidFill>
+          <a:ln>
+            <a:noFill/>
+          </a:ln>
+        </p:spPr>
+        <p:style>
+          <a:lnRef idx="1">
+            <a:schemeClr val="accent1"/>
+          </a:lnRef>
+          <a:fillRef idx="3">
+            <a:schemeClr val="accent1"/>
+          </a:fillRef>
+          <a:effectRef idx="2">
+            <a:schemeClr val="accent1"/>
+          </a:effectRef>
+          <a:fontRef idx="minor">
+            <a:schemeClr val="lt1"/>
+          </a:fontRef>
+        </p:style>
+        <p:txBody>
+          <a:bodyPr rtlCol="0" anchor="ctr"/>
+          <a:lstStyle/>
+          <a:p>
+            <a:pPr algn="ctr"/>
+          </a:p>
+        </p:txBody>
+      </p:sp>
+      <p:sp>
+        <p:nvSpPr>
+          <p:cNvPr id="6" name="Rounded Rectangle 5"/>
+          <p:cNvSpPr/>
+          <p:nvPr/>
+        </p:nvSpPr>
+        <p:spPr>
+          <a:xfrm>
+            <a:off x="594360" y="1490472"/>
+            <a:ext cx="438912" cy="438912"/>
+          </a:xfrm>
+          <a:prstGeom prst="roundRect">
+            <a:avLst>
+              <a:gd name="adj" fmla="val 12000"/>
+            </a:avLst>
+          </a:prstGeom>
+          <a:solidFill>
+            <a:srgbClr val="095292"/>
+          </a:solidFill>
+          <a:ln>
+            <a:noFill/>
+          </a:ln>
+        </p:spPr>
+        <p:style>
+          <a:lnRef idx="1">
+            <a:schemeClr val="accent1"/>
+          </a:lnRef>
+          <a:fillRef idx="3">
+            <a:schemeClr val="accent1"/>
+          </a:fillRef>
+          <a:effectRef idx="2">
+            <a:schemeClr val="accent1"/>
+          </a:effectRef>
+          <a:fontRef idx="minor">
+            <a:schemeClr val="lt1"/>
+          </a:fontRef>
+        </p:style>
+        <p:txBody>
+          <a:bodyPr rtlCol="0" anchor="ctr"/>
+          <a:lstStyle/>
+          <a:p>
+            <a:pPr algn="ctr"/>
+          </a:p>
+        </p:txBody>
+      </p:sp>
+      <p:sp>
+        <p:nvSpPr>
+          <p:cNvPr id="7" name="TextBox 6"/>
           <p:cNvSpPr txBox="1"/>
           <p:nvPr/>
         </p:nvSpPr>
         <p:spPr>
           <a:xfrm>
-            <a:off x="457200" y="1170432"/>
-            <a:ext cx="11277295" cy="5230368"/>
+            <a:off x="594360" y="1490472"/>
+            <a:ext cx="438912" cy="438912"/>
           </a:xfrm>
           <a:prstGeom prst="rect">
             <a:avLst/>
@@ -7761,219 +6757,677 @@
           <a:noFill/>
         </p:spPr>
         <p:txBody>
-          <a:bodyPr wrap="square">
-            <a:spAutoFit/>
-          </a:bodyPr>
-          <a:lstStyle/>
-          <a:p>
-            <a:pPr>
-              <a:spcAft>
-                <a:spcPts val="800"/>
-              </a:spcAft>
-            </a:pPr>
-            <a:r>
-              <a:rPr sz="2000" b="0" i="0">
-                <a:solidFill>
-                  <a:srgbClr val="333333"/>
-                </a:solidFill>
-                <a:latin typeface="Calibri"/>
-              </a:rPr>
-              <a:t>–   </a:t>
-            </a:r>
-            <a:r>
-              <a:rPr sz="2000" b="1" i="0">
-                <a:solidFill>
-                  <a:srgbClr val="333333"/>
-                </a:solidFill>
-                <a:latin typeface="Calibri"/>
-              </a:rPr>
-              <a:t>Entregable:</a:t>
-            </a:r>
-            <a:r>
-              <a:rPr sz="2000" b="0" i="0">
-                <a:solidFill>
-                  <a:srgbClr val="333333"/>
-                </a:solidFill>
-                <a:latin typeface="Calibri"/>
-              </a:rPr>
-              <a:t> Diagrama de clases de VetCare hecho en draw.io, exportado a PNG y al archivo .drawio, con 5 clases, atributos tipados, metodos propios y 4 asociaciones con multiplicidad y nombre de rol, subido a la plataforma del curso.</a:t>
-            </a:r>
-          </a:p>
-          <a:p>
-            <a:pPr>
-              <a:spcAft>
-                <a:spcPts val="800"/>
-              </a:spcAft>
-            </a:pPr>
-            <a:r>
-              <a:rPr sz="2000" b="0" i="0">
-                <a:solidFill>
-                  <a:srgbClr val="333333"/>
-                </a:solidFill>
-                <a:latin typeface="Calibri"/>
-              </a:rPr>
-              <a:t>–   </a:t>
-            </a:r>
-            <a:r>
-              <a:rPr sz="2000" b="1" i="0">
-                <a:solidFill>
-                  <a:srgbClr val="333333"/>
-                </a:solidFill>
-                <a:latin typeface="Calibri"/>
-              </a:rPr>
-              <a:t>Exito:</a:t>
-            </a:r>
-            <a:r>
-              <a:rPr sz="2000" b="0" i="0">
-                <a:solidFill>
-                  <a:srgbClr val="333333"/>
-                </a:solidFill>
-                <a:latin typeface="Calibri"/>
-              </a:rPr>
-              <a:t> El diagrama tiene las 5 clases del dominio en singular, con mayuscula inicial y sin clases tecnicas (nada de DAO, Conexion, Login o Menu).</a:t>
-            </a:r>
-          </a:p>
-          <a:p>
-            <a:pPr>
-              <a:spcAft>
-                <a:spcPts val="800"/>
-              </a:spcAft>
-            </a:pPr>
-            <a:r>
-              <a:rPr sz="2000" b="0" i="0">
-                <a:solidFill>
-                  <a:srgbClr val="333333"/>
-                </a:solidFill>
-                <a:latin typeface="Calibri"/>
-              </a:rPr>
-              <a:t>–   </a:t>
-            </a:r>
-            <a:r>
-              <a:rPr sz="2000" b="1" i="0">
-                <a:solidFill>
-                  <a:srgbClr val="333333"/>
-                </a:solidFill>
-                <a:latin typeface="Calibri"/>
-              </a:rPr>
-              <a:t>Exito:</a:t>
-            </a:r>
-            <a:r>
-              <a:rPr sz="2000" b="0" i="0">
-                <a:solidFill>
-                  <a:srgbClr val="333333"/>
-                </a:solidFill>
-                <a:latin typeface="Calibri"/>
-              </a:rPr>
-              <a:t> Cada clase tiene minimo 4 atributos con visibilidad y tipo, y ningun atributo aparece duplicado en dos clases.</a:t>
-            </a:r>
-          </a:p>
-          <a:p>
-            <a:pPr>
-              <a:spcAft>
-                <a:spcPts val="800"/>
-              </a:spcAft>
-            </a:pPr>
-            <a:r>
-              <a:rPr sz="2000" b="0" i="0">
-                <a:solidFill>
-                  <a:srgbClr val="333333"/>
-                </a:solidFill>
-                <a:latin typeface="Calibri"/>
-              </a:rPr>
-              <a:t>–   </a:t>
-            </a:r>
-            <a:r>
-              <a:rPr sz="2000" b="1" i="0">
-                <a:solidFill>
-                  <a:srgbClr val="333333"/>
-                </a:solidFill>
-                <a:latin typeface="Calibri"/>
-              </a:rPr>
-              <a:t>Exito:</a:t>
-            </a:r>
-            <a:r>
-              <a:rPr sz="2000" b="0" i="0">
-                <a:solidFill>
-                  <a:srgbClr val="333333"/>
-                </a:solidFill>
-                <a:latin typeface="Calibri"/>
-              </a:rPr>
-              <a:t> Las 4 asociaciones tienen nombre de relacion y multiplicidad explicita en ambos extremos.</a:t>
-            </a:r>
-          </a:p>
-          <a:p>
-            <a:pPr>
-              <a:spcAft>
-                <a:spcPts val="800"/>
-              </a:spcAft>
-            </a:pPr>
-            <a:r>
-              <a:rPr sz="2000" b="0" i="0">
-                <a:solidFill>
-                  <a:srgbClr val="333333"/>
-                </a:solidFill>
-                <a:latin typeface="Calibri"/>
-              </a:rPr>
-              <a:t>–   </a:t>
-            </a:r>
-            <a:r>
-              <a:rPr sz="2000" b="1" i="0">
-                <a:solidFill>
-                  <a:srgbClr val="333333"/>
-                </a:solidFill>
-                <a:latin typeface="Calibri"/>
-              </a:rPr>
-              <a:t>Exito:</a:t>
-            </a:r>
-            <a:r>
-              <a:rPr sz="2000" b="0" i="0">
-                <a:solidFill>
-                  <a:srgbClr val="333333"/>
-                </a:solidFill>
-                <a:latin typeface="Calibri"/>
-              </a:rPr>
-              <a:t> Cada relacion se puede leer en voz alta como una frase verdadera del negocio de la clinica Huellitas, y cada clase se rastrea a un RF o a una historia.</a:t>
-            </a:r>
-          </a:p>
-          <a:p>
-            <a:pPr>
-              <a:spcAft>
-                <a:spcPts val="800"/>
-              </a:spcAft>
-            </a:pPr>
-            <a:r>
-              <a:rPr sz="2000" b="0" i="0">
-                <a:solidFill>
-                  <a:srgbClr val="333333"/>
-                </a:solidFill>
-                <a:latin typeface="Calibri"/>
-              </a:rPr>
-              <a:t>–   </a:t>
-            </a:r>
-            <a:r>
-              <a:rPr sz="2000" b="1" i="0">
-                <a:solidFill>
-                  <a:srgbClr val="333333"/>
-                </a:solidFill>
-                <a:latin typeface="Calibri"/>
-              </a:rPr>
-              <a:t>Entrega en la plataforma del curso</a:t>
-            </a:r>
-            <a:r>
-              <a:rPr sz="2000" b="0" i="0">
-                <a:solidFill>
-                  <a:srgbClr val="333333"/>
-                </a:solidFill>
-                <a:latin typeface="Calibri"/>
-              </a:rPr>
-              <a:t> — en la fecha que indique el docente.</a:t>
-            </a:r>
-          </a:p>
-        </p:txBody>
-      </p:sp>
-      <p:sp>
-        <p:nvSpPr>
-          <p:cNvPr id="6" name="TextBox 5"/>
+          <a:bodyPr wrap="square" anchor="ctr"/>
+          <a:lstStyle/>
+          <a:p>
+            <a:pPr algn="ctr"/>
+            <a:r>
+              <a:rPr sz="1600" b="1" i="0">
+                <a:solidFill>
+                  <a:srgbClr val="FFFFFF"/>
+                </a:solidFill>
+                <a:latin typeface="Calibri"/>
+              </a:rPr>
+              <a:t>1</a:t>
+            </a:r>
+          </a:p>
+        </p:txBody>
+      </p:sp>
+      <p:sp>
+        <p:nvSpPr>
+          <p:cNvPr id="8" name="TextBox 7"/>
+          <p:cNvSpPr txBox="1"/>
+          <p:nvPr/>
+        </p:nvSpPr>
+        <p:spPr>
+          <a:xfrm>
+            <a:off x="1188720" y="1325880"/>
+            <a:ext cx="10271455" cy="786384"/>
+          </a:xfrm>
+          <a:prstGeom prst="rect">
+            <a:avLst/>
+          </a:prstGeom>
+          <a:noFill/>
+        </p:spPr>
+        <p:txBody>
+          <a:bodyPr wrap="square" anchor="ctr"/>
+          <a:lstStyle/>
+          <a:p>
+            <a:r>
+              <a:rPr sz="1500" b="1" i="0">
+                <a:solidFill>
+                  <a:srgbClr val="095292"/>
+                </a:solidFill>
+                <a:latin typeface="Calibri"/>
+              </a:rPr>
+              <a:t>Paso 1: subraye en el catalogo de requisitos y en el backlog los sustantivos del negocio de VetCare y arme la lista de clases candidatas, descartando las que sean pantallas, reportes o cosas tecnicas.</a:t>
+            </a:r>
+          </a:p>
+        </p:txBody>
+      </p:sp>
+      <p:sp>
+        <p:nvSpPr>
+          <p:cNvPr id="9" name="Rounded Rectangle 8"/>
+          <p:cNvSpPr/>
+          <p:nvPr/>
+        </p:nvSpPr>
+        <p:spPr>
+          <a:xfrm>
+            <a:off x="457200" y="2276856"/>
+            <a:ext cx="11277295" cy="950976"/>
+          </a:xfrm>
+          <a:prstGeom prst="roundRect">
+            <a:avLst>
+              <a:gd name="adj" fmla="val 12000"/>
+            </a:avLst>
+          </a:prstGeom>
+          <a:solidFill>
+            <a:srgbClr val="E8F4FA"/>
+          </a:solidFill>
+          <a:ln>
+            <a:noFill/>
+          </a:ln>
+        </p:spPr>
+        <p:style>
+          <a:lnRef idx="1">
+            <a:schemeClr val="accent1"/>
+          </a:lnRef>
+          <a:fillRef idx="3">
+            <a:schemeClr val="accent1"/>
+          </a:fillRef>
+          <a:effectRef idx="2">
+            <a:schemeClr val="accent1"/>
+          </a:effectRef>
+          <a:fontRef idx="minor">
+            <a:schemeClr val="lt1"/>
+          </a:fontRef>
+        </p:style>
+        <p:txBody>
+          <a:bodyPr rtlCol="0" anchor="ctr"/>
+          <a:lstStyle/>
+          <a:p>
+            <a:pPr algn="ctr"/>
+          </a:p>
+        </p:txBody>
+      </p:sp>
+      <p:sp>
+        <p:nvSpPr>
+          <p:cNvPr id="10" name="Rounded Rectangle 9"/>
+          <p:cNvSpPr/>
+          <p:nvPr/>
+        </p:nvSpPr>
+        <p:spPr>
+          <a:xfrm>
+            <a:off x="594360" y="2532888"/>
+            <a:ext cx="438912" cy="438912"/>
+          </a:xfrm>
+          <a:prstGeom prst="roundRect">
+            <a:avLst>
+              <a:gd name="adj" fmla="val 12000"/>
+            </a:avLst>
+          </a:prstGeom>
+          <a:solidFill>
+            <a:srgbClr val="095292"/>
+          </a:solidFill>
+          <a:ln>
+            <a:noFill/>
+          </a:ln>
+        </p:spPr>
+        <p:style>
+          <a:lnRef idx="1">
+            <a:schemeClr val="accent1"/>
+          </a:lnRef>
+          <a:fillRef idx="3">
+            <a:schemeClr val="accent1"/>
+          </a:fillRef>
+          <a:effectRef idx="2">
+            <a:schemeClr val="accent1"/>
+          </a:effectRef>
+          <a:fontRef idx="minor">
+            <a:schemeClr val="lt1"/>
+          </a:fontRef>
+        </p:style>
+        <p:txBody>
+          <a:bodyPr rtlCol="0" anchor="ctr"/>
+          <a:lstStyle/>
+          <a:p>
+            <a:pPr algn="ctr"/>
+          </a:p>
+        </p:txBody>
+      </p:sp>
+      <p:sp>
+        <p:nvSpPr>
+          <p:cNvPr id="11" name="TextBox 10"/>
+          <p:cNvSpPr txBox="1"/>
+          <p:nvPr/>
+        </p:nvSpPr>
+        <p:spPr>
+          <a:xfrm>
+            <a:off x="594360" y="2532888"/>
+            <a:ext cx="438912" cy="438912"/>
+          </a:xfrm>
+          <a:prstGeom prst="rect">
+            <a:avLst/>
+          </a:prstGeom>
+          <a:noFill/>
+        </p:spPr>
+        <p:txBody>
+          <a:bodyPr wrap="square" anchor="ctr"/>
+          <a:lstStyle/>
+          <a:p>
+            <a:pPr algn="ctr"/>
+            <a:r>
+              <a:rPr sz="1600" b="1" i="0">
+                <a:solidFill>
+                  <a:srgbClr val="FFFFFF"/>
+                </a:solidFill>
+                <a:latin typeface="Calibri"/>
+              </a:rPr>
+              <a:t>2</a:t>
+            </a:r>
+          </a:p>
+        </p:txBody>
+      </p:sp>
+      <p:sp>
+        <p:nvSpPr>
+          <p:cNvPr id="12" name="TextBox 11"/>
+          <p:cNvSpPr txBox="1"/>
+          <p:nvPr/>
+        </p:nvSpPr>
+        <p:spPr>
+          <a:xfrm>
+            <a:off x="1188720" y="2368296"/>
+            <a:ext cx="10271455" cy="786384"/>
+          </a:xfrm>
+          <a:prstGeom prst="rect">
+            <a:avLst/>
+          </a:prstGeom>
+          <a:noFill/>
+        </p:spPr>
+        <p:txBody>
+          <a:bodyPr wrap="square" anchor="ctr"/>
+          <a:lstStyle/>
+          <a:p>
+            <a:r>
+              <a:rPr sz="1500" b="1" i="0">
+                <a:solidFill>
+                  <a:srgbClr val="095292"/>
+                </a:solidFill>
+                <a:latin typeface="Calibri"/>
+              </a:rPr>
+              <a:t>Paso 2: dibuje en draw.io las cinco clases Dueno, Mascota, Cita, Veterinario y Atencion con la caja de tres compartimentos, en singular y con mayuscula inicial.</a:t>
+            </a:r>
+          </a:p>
+        </p:txBody>
+      </p:sp>
+      <p:sp>
+        <p:nvSpPr>
+          <p:cNvPr id="13" name="Rounded Rectangle 12"/>
+          <p:cNvSpPr/>
+          <p:nvPr/>
+        </p:nvSpPr>
+        <p:spPr>
+          <a:xfrm>
+            <a:off x="457200" y="3319272"/>
+            <a:ext cx="11277295" cy="950976"/>
+          </a:xfrm>
+          <a:prstGeom prst="roundRect">
+            <a:avLst>
+              <a:gd name="adj" fmla="val 12000"/>
+            </a:avLst>
+          </a:prstGeom>
+          <a:solidFill>
+            <a:srgbClr val="F2F2F2"/>
+          </a:solidFill>
+          <a:ln>
+            <a:noFill/>
+          </a:ln>
+        </p:spPr>
+        <p:style>
+          <a:lnRef idx="1">
+            <a:schemeClr val="accent1"/>
+          </a:lnRef>
+          <a:fillRef idx="3">
+            <a:schemeClr val="accent1"/>
+          </a:fillRef>
+          <a:effectRef idx="2">
+            <a:schemeClr val="accent1"/>
+          </a:effectRef>
+          <a:fontRef idx="minor">
+            <a:schemeClr val="lt1"/>
+          </a:fontRef>
+        </p:style>
+        <p:txBody>
+          <a:bodyPr rtlCol="0" anchor="ctr"/>
+          <a:lstStyle/>
+          <a:p>
+            <a:pPr algn="ctr"/>
+          </a:p>
+        </p:txBody>
+      </p:sp>
+      <p:sp>
+        <p:nvSpPr>
+          <p:cNvPr id="14" name="Rounded Rectangle 13"/>
+          <p:cNvSpPr/>
+          <p:nvPr/>
+        </p:nvSpPr>
+        <p:spPr>
+          <a:xfrm>
+            <a:off x="594360" y="3575304"/>
+            <a:ext cx="438912" cy="438912"/>
+          </a:xfrm>
+          <a:prstGeom prst="roundRect">
+            <a:avLst>
+              <a:gd name="adj" fmla="val 12000"/>
+            </a:avLst>
+          </a:prstGeom>
+          <a:solidFill>
+            <a:srgbClr val="095292"/>
+          </a:solidFill>
+          <a:ln>
+            <a:noFill/>
+          </a:ln>
+        </p:spPr>
+        <p:style>
+          <a:lnRef idx="1">
+            <a:schemeClr val="accent1"/>
+          </a:lnRef>
+          <a:fillRef idx="3">
+            <a:schemeClr val="accent1"/>
+          </a:fillRef>
+          <a:effectRef idx="2">
+            <a:schemeClr val="accent1"/>
+          </a:effectRef>
+          <a:fontRef idx="minor">
+            <a:schemeClr val="lt1"/>
+          </a:fontRef>
+        </p:style>
+        <p:txBody>
+          <a:bodyPr rtlCol="0" anchor="ctr"/>
+          <a:lstStyle/>
+          <a:p>
+            <a:pPr algn="ctr"/>
+          </a:p>
+        </p:txBody>
+      </p:sp>
+      <p:sp>
+        <p:nvSpPr>
+          <p:cNvPr id="15" name="TextBox 14"/>
+          <p:cNvSpPr txBox="1"/>
+          <p:nvPr/>
+        </p:nvSpPr>
+        <p:spPr>
+          <a:xfrm>
+            <a:off x="594360" y="3575304"/>
+            <a:ext cx="438912" cy="438912"/>
+          </a:xfrm>
+          <a:prstGeom prst="rect">
+            <a:avLst/>
+          </a:prstGeom>
+          <a:noFill/>
+        </p:spPr>
+        <p:txBody>
+          <a:bodyPr wrap="square" anchor="ctr"/>
+          <a:lstStyle/>
+          <a:p>
+            <a:pPr algn="ctr"/>
+            <a:r>
+              <a:rPr sz="1600" b="1" i="0">
+                <a:solidFill>
+                  <a:srgbClr val="FFFFFF"/>
+                </a:solidFill>
+                <a:latin typeface="Calibri"/>
+              </a:rPr>
+              <a:t>3</a:t>
+            </a:r>
+          </a:p>
+        </p:txBody>
+      </p:sp>
+      <p:sp>
+        <p:nvSpPr>
+          <p:cNvPr id="16" name="TextBox 15"/>
+          <p:cNvSpPr txBox="1"/>
+          <p:nvPr/>
+        </p:nvSpPr>
+        <p:spPr>
+          <a:xfrm>
+            <a:off x="1188720" y="3410712"/>
+            <a:ext cx="10271455" cy="786384"/>
+          </a:xfrm>
+          <a:prstGeom prst="rect">
+            <a:avLst/>
+          </a:prstGeom>
+          <a:noFill/>
+        </p:spPr>
+        <p:txBody>
+          <a:bodyPr wrap="square" anchor="ctr"/>
+          <a:lstStyle/>
+          <a:p>
+            <a:r>
+              <a:rPr sz="1500" b="1" i="0">
+                <a:solidFill>
+                  <a:srgbClr val="095292"/>
+                </a:solidFill>
+                <a:latin typeface="Calibri"/>
+              </a:rPr>
+              <a:t>Paso 3: coloque minimo cuatro atributos por clase con visibilidad y tipo (por ejemplo -documento: String, -fechaNacimiento: Date) verificando que ningun atributo este repetido en dos clases distintas.</a:t>
+            </a:r>
+          </a:p>
+        </p:txBody>
+      </p:sp>
+      <p:sp>
+        <p:nvSpPr>
+          <p:cNvPr id="17" name="Rounded Rectangle 16"/>
+          <p:cNvSpPr/>
+          <p:nvPr/>
+        </p:nvSpPr>
+        <p:spPr>
+          <a:xfrm>
+            <a:off x="457200" y="4361688"/>
+            <a:ext cx="11277295" cy="950976"/>
+          </a:xfrm>
+          <a:prstGeom prst="roundRect">
+            <a:avLst>
+              <a:gd name="adj" fmla="val 12000"/>
+            </a:avLst>
+          </a:prstGeom>
+          <a:solidFill>
+            <a:srgbClr val="E8F4FA"/>
+          </a:solidFill>
+          <a:ln>
+            <a:noFill/>
+          </a:ln>
+        </p:spPr>
+        <p:style>
+          <a:lnRef idx="1">
+            <a:schemeClr val="accent1"/>
+          </a:lnRef>
+          <a:fillRef idx="3">
+            <a:schemeClr val="accent1"/>
+          </a:fillRef>
+          <a:effectRef idx="2">
+            <a:schemeClr val="accent1"/>
+          </a:effectRef>
+          <a:fontRef idx="minor">
+            <a:schemeClr val="lt1"/>
+          </a:fontRef>
+        </p:style>
+        <p:txBody>
+          <a:bodyPr rtlCol="0" anchor="ctr"/>
+          <a:lstStyle/>
+          <a:p>
+            <a:pPr algn="ctr"/>
+          </a:p>
+        </p:txBody>
+      </p:sp>
+      <p:sp>
+        <p:nvSpPr>
+          <p:cNvPr id="18" name="Rounded Rectangle 17"/>
+          <p:cNvSpPr/>
+          <p:nvPr/>
+        </p:nvSpPr>
+        <p:spPr>
+          <a:xfrm>
+            <a:off x="594360" y="4617720"/>
+            <a:ext cx="438912" cy="438912"/>
+          </a:xfrm>
+          <a:prstGeom prst="roundRect">
+            <a:avLst>
+              <a:gd name="adj" fmla="val 12000"/>
+            </a:avLst>
+          </a:prstGeom>
+          <a:solidFill>
+            <a:srgbClr val="095292"/>
+          </a:solidFill>
+          <a:ln>
+            <a:noFill/>
+          </a:ln>
+        </p:spPr>
+        <p:style>
+          <a:lnRef idx="1">
+            <a:schemeClr val="accent1"/>
+          </a:lnRef>
+          <a:fillRef idx="3">
+            <a:schemeClr val="accent1"/>
+          </a:fillRef>
+          <a:effectRef idx="2">
+            <a:schemeClr val="accent1"/>
+          </a:effectRef>
+          <a:fontRef idx="minor">
+            <a:schemeClr val="lt1"/>
+          </a:fontRef>
+        </p:style>
+        <p:txBody>
+          <a:bodyPr rtlCol="0" anchor="ctr"/>
+          <a:lstStyle/>
+          <a:p>
+            <a:pPr algn="ctr"/>
+          </a:p>
+        </p:txBody>
+      </p:sp>
+      <p:sp>
+        <p:nvSpPr>
+          <p:cNvPr id="19" name="TextBox 18"/>
+          <p:cNvSpPr txBox="1"/>
+          <p:nvPr/>
+        </p:nvSpPr>
+        <p:spPr>
+          <a:xfrm>
+            <a:off x="594360" y="4617720"/>
+            <a:ext cx="438912" cy="438912"/>
+          </a:xfrm>
+          <a:prstGeom prst="rect">
+            <a:avLst/>
+          </a:prstGeom>
+          <a:noFill/>
+        </p:spPr>
+        <p:txBody>
+          <a:bodyPr wrap="square" anchor="ctr"/>
+          <a:lstStyle/>
+          <a:p>
+            <a:pPr algn="ctr"/>
+            <a:r>
+              <a:rPr sz="1600" b="1" i="0">
+                <a:solidFill>
+                  <a:srgbClr val="FFFFFF"/>
+                </a:solidFill>
+                <a:latin typeface="Calibri"/>
+              </a:rPr>
+              <a:t>4</a:t>
+            </a:r>
+          </a:p>
+        </p:txBody>
+      </p:sp>
+      <p:sp>
+        <p:nvSpPr>
+          <p:cNvPr id="20" name="TextBox 19"/>
+          <p:cNvSpPr txBox="1"/>
+          <p:nvPr/>
+        </p:nvSpPr>
+        <p:spPr>
+          <a:xfrm>
+            <a:off x="1188720" y="4453128"/>
+            <a:ext cx="10271455" cy="786384"/>
+          </a:xfrm>
+          <a:prstGeom prst="rect">
+            <a:avLst/>
+          </a:prstGeom>
+          <a:noFill/>
+        </p:spPr>
+        <p:txBody>
+          <a:bodyPr wrap="square" anchor="ctr"/>
+          <a:lstStyle/>
+          <a:p>
+            <a:r>
+              <a:rPr sz="1500" b="1" i="0">
+                <a:solidFill>
+                  <a:srgbClr val="095292"/>
+                </a:solidFill>
+                <a:latin typeface="Calibri"/>
+              </a:rPr>
+              <a:t>Paso 4: agregue al menos un metodo propio del dominio por clase (por ejemplo +calcularEdad(): int en Mascota, +reprogramar(nuevaFecha: Date) en Cita) y descarte metodos tecnicos como conectarBD o guardarEnDisco.</a:t>
+            </a:r>
+          </a:p>
+        </p:txBody>
+      </p:sp>
+      <p:sp>
+        <p:nvSpPr>
+          <p:cNvPr id="21" name="Rounded Rectangle 20"/>
+          <p:cNvSpPr/>
+          <p:nvPr/>
+        </p:nvSpPr>
+        <p:spPr>
+          <a:xfrm>
+            <a:off x="457200" y="5404104"/>
+            <a:ext cx="11277295" cy="950976"/>
+          </a:xfrm>
+          <a:prstGeom prst="roundRect">
+            <a:avLst>
+              <a:gd name="adj" fmla="val 12000"/>
+            </a:avLst>
+          </a:prstGeom>
+          <a:solidFill>
+            <a:srgbClr val="F2F2F2"/>
+          </a:solidFill>
+          <a:ln>
+            <a:noFill/>
+          </a:ln>
+        </p:spPr>
+        <p:style>
+          <a:lnRef idx="1">
+            <a:schemeClr val="accent1"/>
+          </a:lnRef>
+          <a:fillRef idx="3">
+            <a:schemeClr val="accent1"/>
+          </a:fillRef>
+          <a:effectRef idx="2">
+            <a:schemeClr val="accent1"/>
+          </a:effectRef>
+          <a:fontRef idx="minor">
+            <a:schemeClr val="lt1"/>
+          </a:fontRef>
+        </p:style>
+        <p:txBody>
+          <a:bodyPr rtlCol="0" anchor="ctr"/>
+          <a:lstStyle/>
+          <a:p>
+            <a:pPr algn="ctr"/>
+          </a:p>
+        </p:txBody>
+      </p:sp>
+      <p:sp>
+        <p:nvSpPr>
+          <p:cNvPr id="22" name="Rounded Rectangle 21"/>
+          <p:cNvSpPr/>
+          <p:nvPr/>
+        </p:nvSpPr>
+        <p:spPr>
+          <a:xfrm>
+            <a:off x="594360" y="5660136"/>
+            <a:ext cx="438912" cy="438912"/>
+          </a:xfrm>
+          <a:prstGeom prst="roundRect">
+            <a:avLst>
+              <a:gd name="adj" fmla="val 12000"/>
+            </a:avLst>
+          </a:prstGeom>
+          <a:solidFill>
+            <a:srgbClr val="095292"/>
+          </a:solidFill>
+          <a:ln>
+            <a:noFill/>
+          </a:ln>
+        </p:spPr>
+        <p:style>
+          <a:lnRef idx="1">
+            <a:schemeClr val="accent1"/>
+          </a:lnRef>
+          <a:fillRef idx="3">
+            <a:schemeClr val="accent1"/>
+          </a:fillRef>
+          <a:effectRef idx="2">
+            <a:schemeClr val="accent1"/>
+          </a:effectRef>
+          <a:fontRef idx="minor">
+            <a:schemeClr val="lt1"/>
+          </a:fontRef>
+        </p:style>
+        <p:txBody>
+          <a:bodyPr rtlCol="0" anchor="ctr"/>
+          <a:lstStyle/>
+          <a:p>
+            <a:pPr algn="ctr"/>
+          </a:p>
+        </p:txBody>
+      </p:sp>
+      <p:sp>
+        <p:nvSpPr>
+          <p:cNvPr id="23" name="TextBox 22"/>
+          <p:cNvSpPr txBox="1"/>
+          <p:nvPr/>
+        </p:nvSpPr>
+        <p:spPr>
+          <a:xfrm>
+            <a:off x="594360" y="5660136"/>
+            <a:ext cx="438912" cy="438912"/>
+          </a:xfrm>
+          <a:prstGeom prst="rect">
+            <a:avLst/>
+          </a:prstGeom>
+          <a:noFill/>
+        </p:spPr>
+        <p:txBody>
+          <a:bodyPr wrap="square" anchor="ctr"/>
+          <a:lstStyle/>
+          <a:p>
+            <a:pPr algn="ctr"/>
+            <a:r>
+              <a:rPr sz="1600" b="1" i="0">
+                <a:solidFill>
+                  <a:srgbClr val="FFFFFF"/>
+                </a:solidFill>
+                <a:latin typeface="Calibri"/>
+              </a:rPr>
+              <a:t>5</a:t>
+            </a:r>
+          </a:p>
+        </p:txBody>
+      </p:sp>
+      <p:sp>
+        <p:nvSpPr>
+          <p:cNvPr id="24" name="TextBox 23"/>
+          <p:cNvSpPr txBox="1"/>
+          <p:nvPr/>
+        </p:nvSpPr>
+        <p:spPr>
+          <a:xfrm>
+            <a:off x="1188720" y="5495544"/>
+            <a:ext cx="10271455" cy="786384"/>
+          </a:xfrm>
+          <a:prstGeom prst="rect">
+            <a:avLst/>
+          </a:prstGeom>
+          <a:noFill/>
+        </p:spPr>
+        <p:txBody>
+          <a:bodyPr wrap="square" anchor="ctr"/>
+          <a:lstStyle/>
+          <a:p>
+            <a:r>
+              <a:rPr sz="1500" b="1" i="0">
+                <a:solidFill>
+                  <a:srgbClr val="095292"/>
+                </a:solidFill>
+                <a:latin typeface="Calibri"/>
+              </a:rPr>
+              <a:t>Paso 5: trace las cuatro asociaciones con nombre de relacion y multiplicidad en ambos extremos, leala cada una en voz alta como frase completa, exporte a PNG y .drawio y suba ambos archivos a la plataforma del curso.</a:t>
+            </a:r>
+          </a:p>
+        </p:txBody>
+      </p:sp>
+      <p:sp>
+        <p:nvSpPr>
+          <p:cNvPr id="25" name="TextBox 24"/>
           <p:cNvSpPr txBox="1"/>
           <p:nvPr/>
         </p:nvSpPr>
@@ -8147,7 +7601,7 @@
                 </a:solidFill>
                 <a:latin typeface="Calibri"/>
               </a:rPr>
-              <a:t>Para el PI esta semana</a:t>
+              <a:t>Antes de entregar — autochequeo</a:t>
             </a:r>
           </a:p>
         </p:txBody>
@@ -8161,7 +7615,7 @@
         <p:spPr>
           <a:xfrm>
             <a:off x="457200" y="1261872"/>
-            <a:ext cx="11277295" cy="1051560"/>
+            <a:ext cx="11277295" cy="566928"/>
           </a:xfrm>
           <a:prstGeom prst="roundRect">
             <a:avLst>
@@ -8169,7 +7623,7 @@
             </a:avLst>
           </a:prstGeom>
           <a:solidFill>
-            <a:srgbClr val="E8F4FA"/>
+            <a:srgbClr val="F2F2F2"/>
           </a:solidFill>
           <a:ln>
             <a:noFill/>
@@ -8205,8 +7659,53 @@
         </p:nvSpPr>
         <p:spPr>
           <a:xfrm>
-            <a:off x="457200" y="1261872"/>
-            <a:ext cx="128016" cy="1051560"/>
+            <a:off x="640080" y="1408175"/>
+            <a:ext cx="274320" cy="274320"/>
+          </a:xfrm>
+          <a:prstGeom prst="rect">
+            <a:avLst/>
+          </a:prstGeom>
+          <a:solidFill>
+            <a:srgbClr val="FFFFFF"/>
+          </a:solidFill>
+          <a:ln>
+            <a:solidFill>
+              <a:srgbClr val="333333"/>
+            </a:solidFill>
+          </a:ln>
+        </p:spPr>
+        <p:style>
+          <a:lnRef idx="1">
+            <a:schemeClr val="accent1"/>
+          </a:lnRef>
+          <a:fillRef idx="3">
+            <a:schemeClr val="accent1"/>
+          </a:fillRef>
+          <a:effectRef idx="2">
+            <a:schemeClr val="accent1"/>
+          </a:effectRef>
+          <a:fontRef idx="minor">
+            <a:schemeClr val="lt1"/>
+          </a:fontRef>
+        </p:style>
+        <p:txBody>
+          <a:bodyPr rtlCol="0" anchor="ctr"/>
+          <a:lstStyle/>
+          <a:p>
+            <a:pPr algn="ctr"/>
+          </a:p>
+        </p:txBody>
+      </p:sp>
+      <p:sp>
+        <p:nvSpPr>
+          <p:cNvPr id="7" name="Rectangle 6"/>
+          <p:cNvSpPr/>
+          <p:nvPr/>
+        </p:nvSpPr>
+        <p:spPr>
+          <a:xfrm>
+            <a:off x="640080" y="1408175"/>
+            <a:ext cx="73152" cy="274320"/>
           </a:xfrm>
           <a:prstGeom prst="rect">
             <a:avLst/>
@@ -8242,14 +7741,14 @@
       </p:sp>
       <p:sp>
         <p:nvSpPr>
-          <p:cNvPr id="7" name="TextBox 6"/>
+          <p:cNvPr id="8" name="TextBox 7"/>
           <p:cNvSpPr txBox="1"/>
           <p:nvPr/>
         </p:nvSpPr>
         <p:spPr>
           <a:xfrm>
-            <a:off x="777240" y="1399031"/>
-            <a:ext cx="10774375" cy="822959"/>
+            <a:off x="1097280" y="1353312"/>
+            <a:ext cx="10362895" cy="402336"/>
           </a:xfrm>
           <a:prstGeom prst="rect">
             <a:avLst/>
@@ -8257,49 +7756,31 @@
           <a:noFill/>
         </p:spPr>
         <p:txBody>
-          <a:bodyPr wrap="square">
-            <a:spAutoFit/>
-          </a:bodyPr>
-          <a:lstStyle/>
-          <a:p>
-            <a:r>
-              <a:rPr sz="1200" b="1" i="0">
-                <a:solidFill>
-                  <a:srgbClr val="269CCB"/>
-                </a:solidFill>
-                <a:latin typeface="Calibri"/>
-              </a:rPr>
-              <a:t>Info</a:t>
-            </a:r>
-          </a:p>
-          <a:p>
-            <a:pPr>
-              <a:spcBef>
-                <a:spcPts val="400"/>
-              </a:spcBef>
-            </a:pPr>
-            <a:r>
-              <a:rPr sz="1400" b="0" i="0">
+          <a:bodyPr wrap="square" anchor="ctr"/>
+          <a:lstStyle/>
+          <a:p>
+            <a:r>
+              <a:rPr sz="1500" b="0" i="0">
                 <a:solidFill>
                   <a:srgbClr val="333333"/>
                 </a:solidFill>
                 <a:latin typeface="Calibri"/>
               </a:rPr>
-              <a:t>Hito: Queda listo el modelo de dominio de VetCare: el diagrama de clases con Dueno, Mascota, Cita, Veterinario y Atencion.</a:t>
-            </a:r>
-          </a:p>
-        </p:txBody>
-      </p:sp>
-      <p:sp>
-        <p:nvSpPr>
-          <p:cNvPr id="8" name="Rounded Rectangle 7"/>
+              <a:t>Si leo esta relacion en voz alta con sus dos multiplicidades, la frase resultante es cierta en la clinica Huellitas o suena absurda?</a:t>
+            </a:r>
+          </a:p>
+        </p:txBody>
+      </p:sp>
+      <p:sp>
+        <p:nvSpPr>
+          <p:cNvPr id="9" name="Rounded Rectangle 8"/>
           <p:cNvSpPr/>
           <p:nvPr/>
         </p:nvSpPr>
         <p:spPr>
           <a:xfrm>
-            <a:off x="457200" y="2478024"/>
-            <a:ext cx="11277295" cy="1051560"/>
+            <a:off x="457200" y="1938528"/>
+            <a:ext cx="11277295" cy="566928"/>
           </a:xfrm>
           <a:prstGeom prst="roundRect">
             <a:avLst>
@@ -8307,7 +7788,7 @@
             </a:avLst>
           </a:prstGeom>
           <a:solidFill>
-            <a:srgbClr val="FFF8E1"/>
+            <a:srgbClr val="F2F2F2"/>
           </a:solidFill>
           <a:ln>
             <a:noFill/>
@@ -8337,23 +7818,25 @@
       </p:sp>
       <p:sp>
         <p:nvSpPr>
-          <p:cNvPr id="9" name="Rectangle 8"/>
+          <p:cNvPr id="10" name="Rectangle 9"/>
           <p:cNvSpPr/>
           <p:nvPr/>
         </p:nvSpPr>
         <p:spPr>
           <a:xfrm>
-            <a:off x="457200" y="2478024"/>
-            <a:ext cx="128016" cy="1051560"/>
+            <a:off x="640080" y="2084832"/>
+            <a:ext cx="274320" cy="274320"/>
           </a:xfrm>
           <a:prstGeom prst="rect">
             <a:avLst/>
           </a:prstGeom>
           <a:solidFill>
-            <a:srgbClr val="FFD000"/>
+            <a:srgbClr val="FFFFFF"/>
           </a:solidFill>
           <a:ln>
-            <a:noFill/>
+            <a:solidFill>
+              <a:srgbClr val="333333"/>
+            </a:solidFill>
           </a:ln>
         </p:spPr>
         <p:style>
@@ -8380,72 +7863,20 @@
       </p:sp>
       <p:sp>
         <p:nvSpPr>
-          <p:cNvPr id="10" name="TextBox 9"/>
-          <p:cNvSpPr txBox="1"/>
-          <p:nvPr/>
-        </p:nvSpPr>
-        <p:spPr>
-          <a:xfrm>
-            <a:off x="777240" y="2615184"/>
-            <a:ext cx="10774375" cy="822959"/>
-          </a:xfrm>
-          <a:prstGeom prst="rect">
-            <a:avLst/>
-          </a:prstGeom>
-          <a:noFill/>
-        </p:spPr>
-        <p:txBody>
-          <a:bodyPr wrap="square">
-            <a:spAutoFit/>
-          </a:bodyPr>
-          <a:lstStyle/>
-          <a:p>
-            <a:r>
-              <a:rPr sz="1200" b="1" i="0">
-                <a:solidFill>
-                  <a:srgbClr val="FFD000"/>
-                </a:solidFill>
-                <a:latin typeface="Calibri"/>
-              </a:rPr>
-              <a:t>Aclaración</a:t>
-            </a:r>
-          </a:p>
-          <a:p>
-            <a:pPr>
-              <a:spcBef>
-                <a:spcPts val="400"/>
-              </a:spcBef>
-            </a:pPr>
-            <a:r>
-              <a:rPr sz="1400" b="0" i="0">
-                <a:solidFill>
-                  <a:srgbClr val="333333"/>
-                </a:solidFill>
-                <a:latin typeface="Calibri"/>
-              </a:rPr>
-              <a:t>Enunciado completo: Clases/Proyecto Integrador/ (VetCare).</a:t>
-            </a:r>
-          </a:p>
-        </p:txBody>
-      </p:sp>
-      <p:sp>
-        <p:nvSpPr>
-          <p:cNvPr id="11" name="Rounded Rectangle 10"/>
+          <p:cNvPr id="11" name="Rectangle 10"/>
           <p:cNvSpPr/>
           <p:nvPr/>
         </p:nvSpPr>
         <p:spPr>
           <a:xfrm>
-            <a:off x="457200" y="3694176"/>
-            <a:ext cx="11277295" cy="1051560"/>
-          </a:xfrm>
-          <a:prstGeom prst="roundRect">
-            <a:avLst>
-              <a:gd name="adj" fmla="val 12000"/>
-            </a:avLst>
+            <a:off x="640080" y="2084832"/>
+            <a:ext cx="73152" cy="274320"/>
+          </a:xfrm>
+          <a:prstGeom prst="rect">
+            <a:avLst/>
           </a:prstGeom>
           <a:solidFill>
-            <a:srgbClr val="FBE4E4"/>
+            <a:srgbClr val="269CCB"/>
           </a:solidFill>
           <a:ln>
             <a:noFill/>
@@ -8475,20 +7906,54 @@
       </p:sp>
       <p:sp>
         <p:nvSpPr>
-          <p:cNvPr id="12" name="Rectangle 11"/>
+          <p:cNvPr id="12" name="TextBox 11"/>
+          <p:cNvSpPr txBox="1"/>
+          <p:nvPr/>
+        </p:nvSpPr>
+        <p:spPr>
+          <a:xfrm>
+            <a:off x="1097280" y="2029968"/>
+            <a:ext cx="10362895" cy="402336"/>
+          </a:xfrm>
+          <a:prstGeom prst="rect">
+            <a:avLst/>
+          </a:prstGeom>
+          <a:noFill/>
+        </p:spPr>
+        <p:txBody>
+          <a:bodyPr wrap="square" anchor="ctr"/>
+          <a:lstStyle/>
+          <a:p>
+            <a:r>
+              <a:rPr sz="1500" b="0" i="0">
+                <a:solidFill>
+                  <a:srgbClr val="333333"/>
+                </a:solidFill>
+                <a:latin typeface="Calibri"/>
+              </a:rPr>
+              <a:t>Este atributo pertenece de verdad al concepto donde lo puse, o lo puse ahi solo porque en la pantalla aparecen juntos?</a:t>
+            </a:r>
+          </a:p>
+        </p:txBody>
+      </p:sp>
+      <p:sp>
+        <p:nvSpPr>
+          <p:cNvPr id="13" name="Rounded Rectangle 12"/>
           <p:cNvSpPr/>
           <p:nvPr/>
         </p:nvSpPr>
         <p:spPr>
           <a:xfrm>
-            <a:off x="457200" y="3694176"/>
-            <a:ext cx="128016" cy="1051560"/>
-          </a:xfrm>
-          <a:prstGeom prst="rect">
-            <a:avLst/>
+            <a:off x="457200" y="2615184"/>
+            <a:ext cx="11277295" cy="566928"/>
+          </a:xfrm>
+          <a:prstGeom prst="roundRect">
+            <a:avLst>
+              <a:gd name="adj" fmla="val 12000"/>
+            </a:avLst>
           </a:prstGeom>
           <a:solidFill>
-            <a:srgbClr val="A02030"/>
+            <a:srgbClr val="F2F2F2"/>
           </a:solidFill>
           <a:ln>
             <a:noFill/>
@@ -8518,14 +7983,102 @@
       </p:sp>
       <p:sp>
         <p:nvSpPr>
-          <p:cNvPr id="13" name="TextBox 12"/>
+          <p:cNvPr id="14" name="Rectangle 13"/>
+          <p:cNvSpPr/>
+          <p:nvPr/>
+        </p:nvSpPr>
+        <p:spPr>
+          <a:xfrm>
+            <a:off x="640080" y="2761488"/>
+            <a:ext cx="274320" cy="274320"/>
+          </a:xfrm>
+          <a:prstGeom prst="rect">
+            <a:avLst/>
+          </a:prstGeom>
+          <a:solidFill>
+            <a:srgbClr val="FFFFFF"/>
+          </a:solidFill>
+          <a:ln>
+            <a:solidFill>
+              <a:srgbClr val="333333"/>
+            </a:solidFill>
+          </a:ln>
+        </p:spPr>
+        <p:style>
+          <a:lnRef idx="1">
+            <a:schemeClr val="accent1"/>
+          </a:lnRef>
+          <a:fillRef idx="3">
+            <a:schemeClr val="accent1"/>
+          </a:fillRef>
+          <a:effectRef idx="2">
+            <a:schemeClr val="accent1"/>
+          </a:effectRef>
+          <a:fontRef idx="minor">
+            <a:schemeClr val="lt1"/>
+          </a:fontRef>
+        </p:style>
+        <p:txBody>
+          <a:bodyPr rtlCol="0" anchor="ctr"/>
+          <a:lstStyle/>
+          <a:p>
+            <a:pPr algn="ctr"/>
+          </a:p>
+        </p:txBody>
+      </p:sp>
+      <p:sp>
+        <p:nvSpPr>
+          <p:cNvPr id="15" name="Rectangle 14"/>
+          <p:cNvSpPr/>
+          <p:nvPr/>
+        </p:nvSpPr>
+        <p:spPr>
+          <a:xfrm>
+            <a:off x="640080" y="2761488"/>
+            <a:ext cx="73152" cy="274320"/>
+          </a:xfrm>
+          <a:prstGeom prst="rect">
+            <a:avLst/>
+          </a:prstGeom>
+          <a:solidFill>
+            <a:srgbClr val="269CCB"/>
+          </a:solidFill>
+          <a:ln>
+            <a:noFill/>
+          </a:ln>
+        </p:spPr>
+        <p:style>
+          <a:lnRef idx="1">
+            <a:schemeClr val="accent1"/>
+          </a:lnRef>
+          <a:fillRef idx="3">
+            <a:schemeClr val="accent1"/>
+          </a:fillRef>
+          <a:effectRef idx="2">
+            <a:schemeClr val="accent1"/>
+          </a:effectRef>
+          <a:fontRef idx="minor">
+            <a:schemeClr val="lt1"/>
+          </a:fontRef>
+        </p:style>
+        <p:txBody>
+          <a:bodyPr rtlCol="0" anchor="ctr"/>
+          <a:lstStyle/>
+          <a:p>
+            <a:pPr algn="ctr"/>
+          </a:p>
+        </p:txBody>
+      </p:sp>
+      <p:sp>
+        <p:nvSpPr>
+          <p:cNvPr id="16" name="TextBox 15"/>
           <p:cNvSpPr txBox="1"/>
           <p:nvPr/>
         </p:nvSpPr>
         <p:spPr>
           <a:xfrm>
-            <a:off x="777240" y="3831336"/>
-            <a:ext cx="10774375" cy="822959"/>
+            <a:off x="1097280" y="2706624"/>
+            <a:ext cx="10362895" cy="402336"/>
           </a:xfrm>
           <a:prstGeom prst="rect">
             <a:avLst/>
@@ -8533,42 +8086,24 @@
           <a:noFill/>
         </p:spPr>
         <p:txBody>
-          <a:bodyPr wrap="square">
-            <a:spAutoFit/>
-          </a:bodyPr>
-          <a:lstStyle/>
-          <a:p>
-            <a:r>
-              <a:rPr sz="1200" b="1" i="0">
-                <a:solidFill>
-                  <a:srgbClr val="A02030"/>
-                </a:solidFill>
-                <a:latin typeface="Calibri"/>
-              </a:rPr>
-              <a:t>Atención</a:t>
-            </a:r>
-          </a:p>
-          <a:p>
-            <a:pPr>
-              <a:spcBef>
-                <a:spcPts val="400"/>
-              </a:spcBef>
-            </a:pPr>
-            <a:r>
-              <a:rPr sz="1400" b="0" i="0">
+          <a:bodyPr wrap="square" anchor="ctr"/>
+          <a:lstStyle/>
+          <a:p>
+            <a:r>
+              <a:rPr sz="1500" b="0" i="0">
                 <a:solidFill>
                   <a:srgbClr val="333333"/>
                 </a:solidFill>
                 <a:latin typeface="Calibri"/>
               </a:rPr>
-              <a:t>Entrega del taller, si el docente lo asigna · en la fecha que indique el docente.</a:t>
-            </a:r>
-          </a:p>
-        </p:txBody>
-      </p:sp>
-      <p:sp>
-        <p:nvSpPr>
-          <p:cNvPr id="14" name="TextBox 13"/>
+              <a:t>Esta caja es un concepto del negocio del que habla el veterinario, o es una pantalla, un reporte o algo tecnico que se me colo?</a:t>
+            </a:r>
+          </a:p>
+        </p:txBody>
+      </p:sp>
+      <p:sp>
+        <p:nvSpPr>
+          <p:cNvPr id="17" name="TextBox 16"/>
           <p:cNvSpPr txBox="1"/>
           <p:nvPr/>
         </p:nvSpPr>
@@ -8636,13 +8171,13 @@
         <p:spPr>
           <a:xfrm>
             <a:off x="0" y="0"/>
-            <a:ext cx="12191695" cy="164592"/>
+            <a:ext cx="12191695" cy="960120"/>
           </a:xfrm>
           <a:prstGeom prst="rect">
             <a:avLst/>
           </a:prstGeom>
           <a:solidFill>
-            <a:srgbClr val="269CCB"/>
+            <a:srgbClr val="095292"/>
           </a:solidFill>
           <a:ln>
             <a:noFill/>
@@ -8670,30 +8205,49 @@
           </a:p>
         </p:txBody>
       </p:sp>
-      <p:pic>
-        <p:nvPicPr>
-          <p:cNvPr id="3" name="Picture 2" descr="logo_uniajc_color.png"/>
-          <p:cNvPicPr>
-            <a:picLocks noChangeAspect="1"/>
-          </p:cNvPicPr>
-          <p:nvPr/>
-        </p:nvPicPr>
-        <p:blipFill>
-          <a:blip r:embed="rId2"/>
-          <a:stretch>
-            <a:fillRect/>
-          </a:stretch>
-        </p:blipFill>
-        <p:spPr>
-          <a:xfrm>
-            <a:off x="10271455" y="5998464"/>
-            <a:ext cx="1463040" cy="643233"/>
-          </a:xfrm>
-          <a:prstGeom prst="rect">
-            <a:avLst/>
-          </a:prstGeom>
-        </p:spPr>
-      </p:pic>
+      <p:sp>
+        <p:nvSpPr>
+          <p:cNvPr id="3" name="Rectangle 2"/>
+          <p:cNvSpPr/>
+          <p:nvPr/>
+        </p:nvSpPr>
+        <p:spPr>
+          <a:xfrm>
+            <a:off x="0" y="960120"/>
+            <a:ext cx="12191695" cy="41148"/>
+          </a:xfrm>
+          <a:prstGeom prst="rect">
+            <a:avLst/>
+          </a:prstGeom>
+          <a:solidFill>
+            <a:srgbClr val="FFD000"/>
+          </a:solidFill>
+          <a:ln>
+            <a:noFill/>
+          </a:ln>
+        </p:spPr>
+        <p:style>
+          <a:lnRef idx="1">
+            <a:schemeClr val="accent1"/>
+          </a:lnRef>
+          <a:fillRef idx="3">
+            <a:schemeClr val="accent1"/>
+          </a:fillRef>
+          <a:effectRef idx="2">
+            <a:schemeClr val="accent1"/>
+          </a:effectRef>
+          <a:fontRef idx="minor">
+            <a:schemeClr val="lt1"/>
+          </a:fontRef>
+        </p:style>
+        <p:txBody>
+          <a:bodyPr rtlCol="0" anchor="ctr"/>
+          <a:lstStyle/>
+          <a:p>
+            <a:pPr algn="ctr"/>
+          </a:p>
+        </p:txBody>
+      </p:sp>
       <p:sp>
         <p:nvSpPr>
           <p:cNvPr id="4" name="TextBox 3"/>
@@ -8702,41 +8256,8 @@
         </p:nvSpPr>
         <p:spPr>
           <a:xfrm>
-            <a:off x="457200" y="1737360"/>
-            <a:ext cx="11277295" cy="1097280"/>
-          </a:xfrm>
-          <a:prstGeom prst="rect">
-            <a:avLst/>
-          </a:prstGeom>
-          <a:noFill/>
-        </p:spPr>
-        <p:txBody>
-          <a:bodyPr wrap="square" anchor="ctr"/>
-          <a:lstStyle/>
-          <a:p>
-            <a:pPr algn="ctr"/>
-            <a:r>
-              <a:rPr sz="3400" b="1" i="0">
-                <a:solidFill>
-                  <a:srgbClr val="095292"/>
-                </a:solidFill>
-                <a:latin typeface="Calibri"/>
-              </a:rPr>
-              <a:t>Clase 8 · VetCare avanza</a:t>
-            </a:r>
-          </a:p>
-        </p:txBody>
-      </p:sp>
-      <p:sp>
-        <p:nvSpPr>
-          <p:cNvPr id="5" name="TextBox 4"/>
-          <p:cNvSpPr txBox="1"/>
-          <p:nvPr/>
-        </p:nvSpPr>
-        <p:spPr>
-          <a:xfrm>
-            <a:off x="457200" y="3017520"/>
-            <a:ext cx="11277295" cy="1645920"/>
+            <a:off x="457200" y="164592"/>
+            <a:ext cx="11277295" cy="502920"/>
           </a:xfrm>
           <a:prstGeom prst="rect">
             <a:avLst/>
@@ -8749,65 +8270,28 @@
           </a:bodyPr>
           <a:lstStyle/>
           <a:p>
-            <a:pPr algn="ctr">
-              <a:spcAft>
-                <a:spcPts val="600"/>
-              </a:spcAft>
-            </a:pPr>
-            <a:r>
-              <a:rPr sz="1600" b="0" i="0">
-                <a:solidFill>
-                  <a:srgbClr val="333333"/>
-                </a:solidFill>
-                <a:latin typeface="Calibri"/>
-              </a:rPr>
-              <a:t>Queda listo el modelo de dominio de VetCare: el diagrama de clases con Dueno, Mascota, Cita, Veterinario y Atencion.</a:t>
-            </a:r>
-          </a:p>
-          <a:p>
-            <a:pPr algn="ctr">
-              <a:spcAft>
-                <a:spcPts val="600"/>
-              </a:spcAft>
-            </a:pPr>
-            <a:r>
-              <a:rPr sz="1600" b="0" i="0">
-                <a:solidFill>
-                  <a:srgbClr val="333333"/>
-                </a:solidFill>
-                <a:latin typeface="Calibri"/>
-              </a:rPr>
-              <a:t>Entregable: Diagrama de clases de VetCare hecho en draw.io, exportado a PNG y al archivo .drawio, con 5 clases, atributos tipados, metodos propios y 4 asociaciones con multiplicidad y nombre de rol, subido a la plataforma del curso.</a:t>
-            </a:r>
-          </a:p>
-          <a:p>
-            <a:pPr algn="ctr">
-              <a:spcAft>
-                <a:spcPts val="600"/>
-              </a:spcAft>
-            </a:pPr>
-            <a:r>
-              <a:rPr sz="1600" b="0" i="0">
-                <a:solidFill>
-                  <a:srgbClr val="333333"/>
-                </a:solidFill>
-                <a:latin typeface="Calibri"/>
-              </a:rPr>
-              <a:t>Siguiente clase: continuamos el hilo del PI</a:t>
-            </a:r>
-          </a:p>
-        </p:txBody>
-      </p:sp>
-      <p:sp>
-        <p:nvSpPr>
-          <p:cNvPr id="6" name="TextBox 5"/>
+            <a:r>
+              <a:rPr sz="2600" b="1" i="0">
+                <a:solidFill>
+                  <a:srgbClr val="FFFFFF"/>
+                </a:solidFill>
+                <a:latin typeface="Calibri"/>
+              </a:rPr>
+              <a:t>Criterios de exito / entregable</a:t>
+            </a:r>
+          </a:p>
+        </p:txBody>
+      </p:sp>
+      <p:sp>
+        <p:nvSpPr>
+          <p:cNvPr id="5" name="TextBox 4"/>
           <p:cNvSpPr txBox="1"/>
           <p:nvPr/>
         </p:nvSpPr>
         <p:spPr>
           <a:xfrm>
-            <a:off x="457200" y="4754880"/>
-            <a:ext cx="11277295" cy="640080"/>
+            <a:off x="457200" y="1170432"/>
+            <a:ext cx="11277295" cy="5230368"/>
           </a:xfrm>
           <a:prstGeom prst="rect">
             <a:avLst/>
@@ -8820,15 +8304,242 @@
           </a:bodyPr>
           <a:lstStyle/>
           <a:p>
-            <a:pPr algn="ctr"/>
+            <a:pPr>
+              <a:spcAft>
+                <a:spcPts val="800"/>
+              </a:spcAft>
+            </a:pPr>
+            <a:r>
+              <a:rPr sz="2000" b="0" i="0">
+                <a:solidFill>
+                  <a:srgbClr val="333333"/>
+                </a:solidFill>
+                <a:latin typeface="Calibri"/>
+              </a:rPr>
+              <a:t>–   </a:t>
+            </a:r>
             <a:r>
               <a:rPr sz="2000" b="1" i="0">
                 <a:solidFill>
-                  <a:srgbClr val="269CCB"/>
-                </a:solidFill>
-                <a:latin typeface="Calibri"/>
-              </a:rPr>
-              <a:t>Teoria al servicio del proyecto</a:t>
+                  <a:srgbClr val="333333"/>
+                </a:solidFill>
+                <a:latin typeface="Calibri"/>
+              </a:rPr>
+              <a:t>Entregable:</a:t>
+            </a:r>
+            <a:r>
+              <a:rPr sz="2000" b="0" i="0">
+                <a:solidFill>
+                  <a:srgbClr val="333333"/>
+                </a:solidFill>
+                <a:latin typeface="Calibri"/>
+              </a:rPr>
+              <a:t> Diagrama de clases de VetCare hecho en draw.io, exportado a PNG y al archivo .drawio, con 5 clases, atributos tipados, metodos propios y 4 asociaciones con multiplicidad y nombre de rol, subido a la plataforma del curso.</a:t>
+            </a:r>
+          </a:p>
+          <a:p>
+            <a:pPr>
+              <a:spcAft>
+                <a:spcPts val="800"/>
+              </a:spcAft>
+            </a:pPr>
+            <a:r>
+              <a:rPr sz="2000" b="0" i="0">
+                <a:solidFill>
+                  <a:srgbClr val="333333"/>
+                </a:solidFill>
+                <a:latin typeface="Calibri"/>
+              </a:rPr>
+              <a:t>–   </a:t>
+            </a:r>
+            <a:r>
+              <a:rPr sz="2000" b="1" i="0">
+                <a:solidFill>
+                  <a:srgbClr val="333333"/>
+                </a:solidFill>
+                <a:latin typeface="Calibri"/>
+              </a:rPr>
+              <a:t>Exito:</a:t>
+            </a:r>
+            <a:r>
+              <a:rPr sz="2000" b="0" i="0">
+                <a:solidFill>
+                  <a:srgbClr val="333333"/>
+                </a:solidFill>
+                <a:latin typeface="Calibri"/>
+              </a:rPr>
+              <a:t> El diagrama tiene las 5 clases del dominio en singular, con mayuscula inicial y sin clases tecnicas (nada de DAO, Conexion, Login o Menu).</a:t>
+            </a:r>
+          </a:p>
+          <a:p>
+            <a:pPr>
+              <a:spcAft>
+                <a:spcPts val="800"/>
+              </a:spcAft>
+            </a:pPr>
+            <a:r>
+              <a:rPr sz="2000" b="0" i="0">
+                <a:solidFill>
+                  <a:srgbClr val="333333"/>
+                </a:solidFill>
+                <a:latin typeface="Calibri"/>
+              </a:rPr>
+              <a:t>–   </a:t>
+            </a:r>
+            <a:r>
+              <a:rPr sz="2000" b="1" i="0">
+                <a:solidFill>
+                  <a:srgbClr val="333333"/>
+                </a:solidFill>
+                <a:latin typeface="Calibri"/>
+              </a:rPr>
+              <a:t>Exito:</a:t>
+            </a:r>
+            <a:r>
+              <a:rPr sz="2000" b="0" i="0">
+                <a:solidFill>
+                  <a:srgbClr val="333333"/>
+                </a:solidFill>
+                <a:latin typeface="Calibri"/>
+              </a:rPr>
+              <a:t> Cada clase tiene minimo 4 atributos con visibilidad y tipo, y ningun atributo aparece duplicado en dos clases.</a:t>
+            </a:r>
+          </a:p>
+          <a:p>
+            <a:pPr>
+              <a:spcAft>
+                <a:spcPts val="800"/>
+              </a:spcAft>
+            </a:pPr>
+            <a:r>
+              <a:rPr sz="2000" b="0" i="0">
+                <a:solidFill>
+                  <a:srgbClr val="333333"/>
+                </a:solidFill>
+                <a:latin typeface="Calibri"/>
+              </a:rPr>
+              <a:t>–   </a:t>
+            </a:r>
+            <a:r>
+              <a:rPr sz="2000" b="1" i="0">
+                <a:solidFill>
+                  <a:srgbClr val="333333"/>
+                </a:solidFill>
+                <a:latin typeface="Calibri"/>
+              </a:rPr>
+              <a:t>Exito:</a:t>
+            </a:r>
+            <a:r>
+              <a:rPr sz="2000" b="0" i="0">
+                <a:solidFill>
+                  <a:srgbClr val="333333"/>
+                </a:solidFill>
+                <a:latin typeface="Calibri"/>
+              </a:rPr>
+              <a:t> Las 4 asociaciones tienen nombre de relacion y multiplicidad explicita en ambos extremos.</a:t>
+            </a:r>
+          </a:p>
+          <a:p>
+            <a:pPr>
+              <a:spcAft>
+                <a:spcPts val="800"/>
+              </a:spcAft>
+            </a:pPr>
+            <a:r>
+              <a:rPr sz="2000" b="0" i="0">
+                <a:solidFill>
+                  <a:srgbClr val="333333"/>
+                </a:solidFill>
+                <a:latin typeface="Calibri"/>
+              </a:rPr>
+              <a:t>–   </a:t>
+            </a:r>
+            <a:r>
+              <a:rPr sz="2000" b="1" i="0">
+                <a:solidFill>
+                  <a:srgbClr val="333333"/>
+                </a:solidFill>
+                <a:latin typeface="Calibri"/>
+              </a:rPr>
+              <a:t>Exito:</a:t>
+            </a:r>
+            <a:r>
+              <a:rPr sz="2000" b="0" i="0">
+                <a:solidFill>
+                  <a:srgbClr val="333333"/>
+                </a:solidFill>
+                <a:latin typeface="Calibri"/>
+              </a:rPr>
+              <a:t> Cada relacion se puede leer en voz alta como una frase verdadera del negocio de la clinica Huellitas, y cada clase se rastrea a un RF o a una historia.</a:t>
+            </a:r>
+          </a:p>
+          <a:p>
+            <a:pPr>
+              <a:spcAft>
+                <a:spcPts val="800"/>
+              </a:spcAft>
+            </a:pPr>
+            <a:r>
+              <a:rPr sz="2000" b="0" i="0">
+                <a:solidFill>
+                  <a:srgbClr val="333333"/>
+                </a:solidFill>
+                <a:latin typeface="Calibri"/>
+              </a:rPr>
+              <a:t>–   </a:t>
+            </a:r>
+            <a:r>
+              <a:rPr sz="2000" b="1" i="0">
+                <a:solidFill>
+                  <a:srgbClr val="333333"/>
+                </a:solidFill>
+                <a:latin typeface="Calibri"/>
+              </a:rPr>
+              <a:t>Entrega en la plataforma del curso</a:t>
+            </a:r>
+            <a:r>
+              <a:rPr sz="2000" b="0" i="0">
+                <a:solidFill>
+                  <a:srgbClr val="333333"/>
+                </a:solidFill>
+                <a:latin typeface="Calibri"/>
+              </a:rPr>
+              <a:t> — en la fecha que indique el docente.</a:t>
+            </a:r>
+          </a:p>
+        </p:txBody>
+      </p:sp>
+      <p:sp>
+        <p:nvSpPr>
+          <p:cNvPr id="6" name="TextBox 5"/>
+          <p:cNvSpPr txBox="1"/>
+          <p:nvPr/>
+        </p:nvSpPr>
+        <p:spPr>
+          <a:xfrm>
+            <a:off x="11185855" y="6473952"/>
+            <a:ext cx="640080" cy="274320"/>
+          </a:xfrm>
+          <a:prstGeom prst="rect">
+            <a:avLst/>
+          </a:prstGeom>
+          <a:noFill/>
+        </p:spPr>
+        <p:txBody>
+          <a:bodyPr wrap="square">
+            <a:spAutoFit/>
+          </a:bodyPr>
+          <a:lstStyle/>
+          <a:p>
+            <a:pPr algn="r"/>
+            <a:r>
+              <a:rPr sz="1100" b="0" i="0">
+                <a:solidFill>
+                  <a:srgbClr val="666666"/>
+                </a:solidFill>
+                <a:latin typeface="Calibri"/>
+              </a:rPr>
+              <a:t>19</a:t>
             </a:r>
           </a:p>
         </p:txBody>
@@ -9172,6 +8883,833 @@
 </p:sld>
 </file>
 
+<file path=ppt/slides/slide20.xml><?xml version="1.0" encoding="utf-8"?>
+<p:sld xmlns:a="http://schemas.openxmlformats.org/drawingml/2006/main" xmlns:p="http://schemas.openxmlformats.org/presentationml/2006/main" xmlns:r="http://schemas.openxmlformats.org/officeDocument/2006/relationships">
+  <p:cSld>
+    <p:bg>
+      <p:bgPr>
+        <a:solidFill>
+          <a:srgbClr val="FFFFFF"/>
+        </a:solidFill>
+        <a:effectLst/>
+      </p:bgPr>
+    </p:bg>
+    <p:spTree>
+      <p:nvGrpSpPr>
+        <p:cNvPr id="1" name=""/>
+        <p:cNvGrpSpPr/>
+        <p:nvPr/>
+      </p:nvGrpSpPr>
+      <p:grpSpPr/>
+      <p:sp>
+        <p:nvSpPr>
+          <p:cNvPr id="2" name="Rectangle 1"/>
+          <p:cNvSpPr/>
+          <p:nvPr/>
+        </p:nvSpPr>
+        <p:spPr>
+          <a:xfrm>
+            <a:off x="0" y="0"/>
+            <a:ext cx="12191695" cy="960120"/>
+          </a:xfrm>
+          <a:prstGeom prst="rect">
+            <a:avLst/>
+          </a:prstGeom>
+          <a:solidFill>
+            <a:srgbClr val="095292"/>
+          </a:solidFill>
+          <a:ln>
+            <a:noFill/>
+          </a:ln>
+        </p:spPr>
+        <p:style>
+          <a:lnRef idx="1">
+            <a:schemeClr val="accent1"/>
+          </a:lnRef>
+          <a:fillRef idx="3">
+            <a:schemeClr val="accent1"/>
+          </a:fillRef>
+          <a:effectRef idx="2">
+            <a:schemeClr val="accent1"/>
+          </a:effectRef>
+          <a:fontRef idx="minor">
+            <a:schemeClr val="lt1"/>
+          </a:fontRef>
+        </p:style>
+        <p:txBody>
+          <a:bodyPr rtlCol="0" anchor="ctr"/>
+          <a:lstStyle/>
+          <a:p>
+            <a:pPr algn="ctr"/>
+          </a:p>
+        </p:txBody>
+      </p:sp>
+      <p:sp>
+        <p:nvSpPr>
+          <p:cNvPr id="3" name="Rectangle 2"/>
+          <p:cNvSpPr/>
+          <p:nvPr/>
+        </p:nvSpPr>
+        <p:spPr>
+          <a:xfrm>
+            <a:off x="0" y="960120"/>
+            <a:ext cx="12191695" cy="41148"/>
+          </a:xfrm>
+          <a:prstGeom prst="rect">
+            <a:avLst/>
+          </a:prstGeom>
+          <a:solidFill>
+            <a:srgbClr val="FFD000"/>
+          </a:solidFill>
+          <a:ln>
+            <a:noFill/>
+          </a:ln>
+        </p:spPr>
+        <p:style>
+          <a:lnRef idx="1">
+            <a:schemeClr val="accent1"/>
+          </a:lnRef>
+          <a:fillRef idx="3">
+            <a:schemeClr val="accent1"/>
+          </a:fillRef>
+          <a:effectRef idx="2">
+            <a:schemeClr val="accent1"/>
+          </a:effectRef>
+          <a:fontRef idx="minor">
+            <a:schemeClr val="lt1"/>
+          </a:fontRef>
+        </p:style>
+        <p:txBody>
+          <a:bodyPr rtlCol="0" anchor="ctr"/>
+          <a:lstStyle/>
+          <a:p>
+            <a:pPr algn="ctr"/>
+          </a:p>
+        </p:txBody>
+      </p:sp>
+      <p:sp>
+        <p:nvSpPr>
+          <p:cNvPr id="4" name="TextBox 3"/>
+          <p:cNvSpPr txBox="1"/>
+          <p:nvPr/>
+        </p:nvSpPr>
+        <p:spPr>
+          <a:xfrm>
+            <a:off x="457200" y="164592"/>
+            <a:ext cx="11277295" cy="502920"/>
+          </a:xfrm>
+          <a:prstGeom prst="rect">
+            <a:avLst/>
+          </a:prstGeom>
+          <a:noFill/>
+        </p:spPr>
+        <p:txBody>
+          <a:bodyPr wrap="square">
+            <a:spAutoFit/>
+          </a:bodyPr>
+          <a:lstStyle/>
+          <a:p>
+            <a:r>
+              <a:rPr sz="2600" b="1" i="0">
+                <a:solidFill>
+                  <a:srgbClr val="FFFFFF"/>
+                </a:solidFill>
+                <a:latin typeface="Calibri"/>
+              </a:rPr>
+              <a:t>Para el PI esta semana</a:t>
+            </a:r>
+          </a:p>
+        </p:txBody>
+      </p:sp>
+      <p:sp>
+        <p:nvSpPr>
+          <p:cNvPr id="5" name="Rounded Rectangle 4"/>
+          <p:cNvSpPr/>
+          <p:nvPr/>
+        </p:nvSpPr>
+        <p:spPr>
+          <a:xfrm>
+            <a:off x="457200" y="1261872"/>
+            <a:ext cx="11277295" cy="1051560"/>
+          </a:xfrm>
+          <a:prstGeom prst="roundRect">
+            <a:avLst>
+              <a:gd name="adj" fmla="val 12000"/>
+            </a:avLst>
+          </a:prstGeom>
+          <a:solidFill>
+            <a:srgbClr val="E8F4FA"/>
+          </a:solidFill>
+          <a:ln>
+            <a:noFill/>
+          </a:ln>
+        </p:spPr>
+        <p:style>
+          <a:lnRef idx="1">
+            <a:schemeClr val="accent1"/>
+          </a:lnRef>
+          <a:fillRef idx="3">
+            <a:schemeClr val="accent1"/>
+          </a:fillRef>
+          <a:effectRef idx="2">
+            <a:schemeClr val="accent1"/>
+          </a:effectRef>
+          <a:fontRef idx="minor">
+            <a:schemeClr val="lt1"/>
+          </a:fontRef>
+        </p:style>
+        <p:txBody>
+          <a:bodyPr rtlCol="0" anchor="ctr"/>
+          <a:lstStyle/>
+          <a:p>
+            <a:pPr algn="ctr"/>
+          </a:p>
+        </p:txBody>
+      </p:sp>
+      <p:sp>
+        <p:nvSpPr>
+          <p:cNvPr id="6" name="Rectangle 5"/>
+          <p:cNvSpPr/>
+          <p:nvPr/>
+        </p:nvSpPr>
+        <p:spPr>
+          <a:xfrm>
+            <a:off x="457200" y="1261872"/>
+            <a:ext cx="128016" cy="1051560"/>
+          </a:xfrm>
+          <a:prstGeom prst="rect">
+            <a:avLst/>
+          </a:prstGeom>
+          <a:solidFill>
+            <a:srgbClr val="269CCB"/>
+          </a:solidFill>
+          <a:ln>
+            <a:noFill/>
+          </a:ln>
+        </p:spPr>
+        <p:style>
+          <a:lnRef idx="1">
+            <a:schemeClr val="accent1"/>
+          </a:lnRef>
+          <a:fillRef idx="3">
+            <a:schemeClr val="accent1"/>
+          </a:fillRef>
+          <a:effectRef idx="2">
+            <a:schemeClr val="accent1"/>
+          </a:effectRef>
+          <a:fontRef idx="minor">
+            <a:schemeClr val="lt1"/>
+          </a:fontRef>
+        </p:style>
+        <p:txBody>
+          <a:bodyPr rtlCol="0" anchor="ctr"/>
+          <a:lstStyle/>
+          <a:p>
+            <a:pPr algn="ctr"/>
+          </a:p>
+        </p:txBody>
+      </p:sp>
+      <p:sp>
+        <p:nvSpPr>
+          <p:cNvPr id="7" name="TextBox 6"/>
+          <p:cNvSpPr txBox="1"/>
+          <p:nvPr/>
+        </p:nvSpPr>
+        <p:spPr>
+          <a:xfrm>
+            <a:off x="777240" y="1399031"/>
+            <a:ext cx="10774375" cy="822959"/>
+          </a:xfrm>
+          <a:prstGeom prst="rect">
+            <a:avLst/>
+          </a:prstGeom>
+          <a:noFill/>
+        </p:spPr>
+        <p:txBody>
+          <a:bodyPr wrap="square">
+            <a:spAutoFit/>
+          </a:bodyPr>
+          <a:lstStyle/>
+          <a:p>
+            <a:r>
+              <a:rPr sz="1200" b="1" i="0">
+                <a:solidFill>
+                  <a:srgbClr val="269CCB"/>
+                </a:solidFill>
+                <a:latin typeface="Calibri"/>
+              </a:rPr>
+              <a:t>Info</a:t>
+            </a:r>
+          </a:p>
+          <a:p>
+            <a:pPr>
+              <a:spcBef>
+                <a:spcPts val="400"/>
+              </a:spcBef>
+            </a:pPr>
+            <a:r>
+              <a:rPr sz="1400" b="0" i="0">
+                <a:solidFill>
+                  <a:srgbClr val="333333"/>
+                </a:solidFill>
+                <a:latin typeface="Calibri"/>
+              </a:rPr>
+              <a:t>Hito: Queda listo el modelo de dominio de VetCare: el diagrama de clases con Dueno, Mascota, Cita, Veterinario y Atencion.</a:t>
+            </a:r>
+          </a:p>
+        </p:txBody>
+      </p:sp>
+      <p:sp>
+        <p:nvSpPr>
+          <p:cNvPr id="8" name="Rounded Rectangle 7"/>
+          <p:cNvSpPr/>
+          <p:nvPr/>
+        </p:nvSpPr>
+        <p:spPr>
+          <a:xfrm>
+            <a:off x="457200" y="2478024"/>
+            <a:ext cx="11277295" cy="1051560"/>
+          </a:xfrm>
+          <a:prstGeom prst="roundRect">
+            <a:avLst>
+              <a:gd name="adj" fmla="val 12000"/>
+            </a:avLst>
+          </a:prstGeom>
+          <a:solidFill>
+            <a:srgbClr val="FFF8E1"/>
+          </a:solidFill>
+          <a:ln>
+            <a:noFill/>
+          </a:ln>
+        </p:spPr>
+        <p:style>
+          <a:lnRef idx="1">
+            <a:schemeClr val="accent1"/>
+          </a:lnRef>
+          <a:fillRef idx="3">
+            <a:schemeClr val="accent1"/>
+          </a:fillRef>
+          <a:effectRef idx="2">
+            <a:schemeClr val="accent1"/>
+          </a:effectRef>
+          <a:fontRef idx="minor">
+            <a:schemeClr val="lt1"/>
+          </a:fontRef>
+        </p:style>
+        <p:txBody>
+          <a:bodyPr rtlCol="0" anchor="ctr"/>
+          <a:lstStyle/>
+          <a:p>
+            <a:pPr algn="ctr"/>
+          </a:p>
+        </p:txBody>
+      </p:sp>
+      <p:sp>
+        <p:nvSpPr>
+          <p:cNvPr id="9" name="Rectangle 8"/>
+          <p:cNvSpPr/>
+          <p:nvPr/>
+        </p:nvSpPr>
+        <p:spPr>
+          <a:xfrm>
+            <a:off x="457200" y="2478024"/>
+            <a:ext cx="128016" cy="1051560"/>
+          </a:xfrm>
+          <a:prstGeom prst="rect">
+            <a:avLst/>
+          </a:prstGeom>
+          <a:solidFill>
+            <a:srgbClr val="FFD000"/>
+          </a:solidFill>
+          <a:ln>
+            <a:noFill/>
+          </a:ln>
+        </p:spPr>
+        <p:style>
+          <a:lnRef idx="1">
+            <a:schemeClr val="accent1"/>
+          </a:lnRef>
+          <a:fillRef idx="3">
+            <a:schemeClr val="accent1"/>
+          </a:fillRef>
+          <a:effectRef idx="2">
+            <a:schemeClr val="accent1"/>
+          </a:effectRef>
+          <a:fontRef idx="minor">
+            <a:schemeClr val="lt1"/>
+          </a:fontRef>
+        </p:style>
+        <p:txBody>
+          <a:bodyPr rtlCol="0" anchor="ctr"/>
+          <a:lstStyle/>
+          <a:p>
+            <a:pPr algn="ctr"/>
+          </a:p>
+        </p:txBody>
+      </p:sp>
+      <p:sp>
+        <p:nvSpPr>
+          <p:cNvPr id="10" name="TextBox 9"/>
+          <p:cNvSpPr txBox="1"/>
+          <p:nvPr/>
+        </p:nvSpPr>
+        <p:spPr>
+          <a:xfrm>
+            <a:off x="777240" y="2615184"/>
+            <a:ext cx="10774375" cy="822959"/>
+          </a:xfrm>
+          <a:prstGeom prst="rect">
+            <a:avLst/>
+          </a:prstGeom>
+          <a:noFill/>
+        </p:spPr>
+        <p:txBody>
+          <a:bodyPr wrap="square">
+            <a:spAutoFit/>
+          </a:bodyPr>
+          <a:lstStyle/>
+          <a:p>
+            <a:r>
+              <a:rPr sz="1200" b="1" i="0">
+                <a:solidFill>
+                  <a:srgbClr val="FFD000"/>
+                </a:solidFill>
+                <a:latin typeface="Calibri"/>
+              </a:rPr>
+              <a:t>Aclaración</a:t>
+            </a:r>
+          </a:p>
+          <a:p>
+            <a:pPr>
+              <a:spcBef>
+                <a:spcPts val="400"/>
+              </a:spcBef>
+            </a:pPr>
+            <a:r>
+              <a:rPr sz="1400" b="0" i="0">
+                <a:solidFill>
+                  <a:srgbClr val="333333"/>
+                </a:solidFill>
+                <a:latin typeface="Calibri"/>
+              </a:rPr>
+              <a:t>Enunciado completo: Clases/Proyecto Integrador/ (VetCare).</a:t>
+            </a:r>
+          </a:p>
+        </p:txBody>
+      </p:sp>
+      <p:sp>
+        <p:nvSpPr>
+          <p:cNvPr id="11" name="Rounded Rectangle 10"/>
+          <p:cNvSpPr/>
+          <p:nvPr/>
+        </p:nvSpPr>
+        <p:spPr>
+          <a:xfrm>
+            <a:off x="457200" y="3694176"/>
+            <a:ext cx="11277295" cy="1051560"/>
+          </a:xfrm>
+          <a:prstGeom prst="roundRect">
+            <a:avLst>
+              <a:gd name="adj" fmla="val 12000"/>
+            </a:avLst>
+          </a:prstGeom>
+          <a:solidFill>
+            <a:srgbClr val="FBE4E4"/>
+          </a:solidFill>
+          <a:ln>
+            <a:noFill/>
+          </a:ln>
+        </p:spPr>
+        <p:style>
+          <a:lnRef idx="1">
+            <a:schemeClr val="accent1"/>
+          </a:lnRef>
+          <a:fillRef idx="3">
+            <a:schemeClr val="accent1"/>
+          </a:fillRef>
+          <a:effectRef idx="2">
+            <a:schemeClr val="accent1"/>
+          </a:effectRef>
+          <a:fontRef idx="minor">
+            <a:schemeClr val="lt1"/>
+          </a:fontRef>
+        </p:style>
+        <p:txBody>
+          <a:bodyPr rtlCol="0" anchor="ctr"/>
+          <a:lstStyle/>
+          <a:p>
+            <a:pPr algn="ctr"/>
+          </a:p>
+        </p:txBody>
+      </p:sp>
+      <p:sp>
+        <p:nvSpPr>
+          <p:cNvPr id="12" name="Rectangle 11"/>
+          <p:cNvSpPr/>
+          <p:nvPr/>
+        </p:nvSpPr>
+        <p:spPr>
+          <a:xfrm>
+            <a:off x="457200" y="3694176"/>
+            <a:ext cx="128016" cy="1051560"/>
+          </a:xfrm>
+          <a:prstGeom prst="rect">
+            <a:avLst/>
+          </a:prstGeom>
+          <a:solidFill>
+            <a:srgbClr val="A02030"/>
+          </a:solidFill>
+          <a:ln>
+            <a:noFill/>
+          </a:ln>
+        </p:spPr>
+        <p:style>
+          <a:lnRef idx="1">
+            <a:schemeClr val="accent1"/>
+          </a:lnRef>
+          <a:fillRef idx="3">
+            <a:schemeClr val="accent1"/>
+          </a:fillRef>
+          <a:effectRef idx="2">
+            <a:schemeClr val="accent1"/>
+          </a:effectRef>
+          <a:fontRef idx="minor">
+            <a:schemeClr val="lt1"/>
+          </a:fontRef>
+        </p:style>
+        <p:txBody>
+          <a:bodyPr rtlCol="0" anchor="ctr"/>
+          <a:lstStyle/>
+          <a:p>
+            <a:pPr algn="ctr"/>
+          </a:p>
+        </p:txBody>
+      </p:sp>
+      <p:sp>
+        <p:nvSpPr>
+          <p:cNvPr id="13" name="TextBox 12"/>
+          <p:cNvSpPr txBox="1"/>
+          <p:nvPr/>
+        </p:nvSpPr>
+        <p:spPr>
+          <a:xfrm>
+            <a:off x="777240" y="3831336"/>
+            <a:ext cx="10774375" cy="822959"/>
+          </a:xfrm>
+          <a:prstGeom prst="rect">
+            <a:avLst/>
+          </a:prstGeom>
+          <a:noFill/>
+        </p:spPr>
+        <p:txBody>
+          <a:bodyPr wrap="square">
+            <a:spAutoFit/>
+          </a:bodyPr>
+          <a:lstStyle/>
+          <a:p>
+            <a:r>
+              <a:rPr sz="1200" b="1" i="0">
+                <a:solidFill>
+                  <a:srgbClr val="A02030"/>
+                </a:solidFill>
+                <a:latin typeface="Calibri"/>
+              </a:rPr>
+              <a:t>Atención</a:t>
+            </a:r>
+          </a:p>
+          <a:p>
+            <a:pPr>
+              <a:spcBef>
+                <a:spcPts val="400"/>
+              </a:spcBef>
+            </a:pPr>
+            <a:r>
+              <a:rPr sz="1400" b="0" i="0">
+                <a:solidFill>
+                  <a:srgbClr val="333333"/>
+                </a:solidFill>
+                <a:latin typeface="Calibri"/>
+              </a:rPr>
+              <a:t>Entrega del taller, si el docente lo asigna · en la fecha que indique el docente.</a:t>
+            </a:r>
+          </a:p>
+        </p:txBody>
+      </p:sp>
+      <p:sp>
+        <p:nvSpPr>
+          <p:cNvPr id="14" name="TextBox 13"/>
+          <p:cNvSpPr txBox="1"/>
+          <p:nvPr/>
+        </p:nvSpPr>
+        <p:spPr>
+          <a:xfrm>
+            <a:off x="11185855" y="6473952"/>
+            <a:ext cx="640080" cy="274320"/>
+          </a:xfrm>
+          <a:prstGeom prst="rect">
+            <a:avLst/>
+          </a:prstGeom>
+          <a:noFill/>
+        </p:spPr>
+        <p:txBody>
+          <a:bodyPr wrap="square">
+            <a:spAutoFit/>
+          </a:bodyPr>
+          <a:lstStyle/>
+          <a:p>
+            <a:pPr algn="r"/>
+            <a:r>
+              <a:rPr sz="1100" b="0" i="0">
+                <a:solidFill>
+                  <a:srgbClr val="666666"/>
+                </a:solidFill>
+                <a:latin typeface="Calibri"/>
+              </a:rPr>
+              <a:t>20</a:t>
+            </a:r>
+          </a:p>
+        </p:txBody>
+      </p:sp>
+    </p:spTree>
+  </p:cSld>
+  <p:clrMapOvr>
+    <a:masterClrMapping/>
+  </p:clrMapOvr>
+</p:sld>
+</file>
+
+<file path=ppt/slides/slide21.xml><?xml version="1.0" encoding="utf-8"?>
+<p:sld xmlns:a="http://schemas.openxmlformats.org/drawingml/2006/main" xmlns:p="http://schemas.openxmlformats.org/presentationml/2006/main" xmlns:r="http://schemas.openxmlformats.org/officeDocument/2006/relationships">
+  <p:cSld>
+    <p:bg>
+      <p:bgPr>
+        <a:solidFill>
+          <a:srgbClr val="FFFFFF"/>
+        </a:solidFill>
+        <a:effectLst/>
+      </p:bgPr>
+    </p:bg>
+    <p:spTree>
+      <p:nvGrpSpPr>
+        <p:cNvPr id="1" name=""/>
+        <p:cNvGrpSpPr/>
+        <p:nvPr/>
+      </p:nvGrpSpPr>
+      <p:grpSpPr/>
+      <p:sp>
+        <p:nvSpPr>
+          <p:cNvPr id="2" name="Rectangle 1"/>
+          <p:cNvSpPr/>
+          <p:nvPr/>
+        </p:nvSpPr>
+        <p:spPr>
+          <a:xfrm>
+            <a:off x="0" y="0"/>
+            <a:ext cx="12191695" cy="164592"/>
+          </a:xfrm>
+          <a:prstGeom prst="rect">
+            <a:avLst/>
+          </a:prstGeom>
+          <a:solidFill>
+            <a:srgbClr val="269CCB"/>
+          </a:solidFill>
+          <a:ln>
+            <a:noFill/>
+          </a:ln>
+        </p:spPr>
+        <p:style>
+          <a:lnRef idx="1">
+            <a:schemeClr val="accent1"/>
+          </a:lnRef>
+          <a:fillRef idx="3">
+            <a:schemeClr val="accent1"/>
+          </a:fillRef>
+          <a:effectRef idx="2">
+            <a:schemeClr val="accent1"/>
+          </a:effectRef>
+          <a:fontRef idx="minor">
+            <a:schemeClr val="lt1"/>
+          </a:fontRef>
+        </p:style>
+        <p:txBody>
+          <a:bodyPr rtlCol="0" anchor="ctr"/>
+          <a:lstStyle/>
+          <a:p>
+            <a:pPr algn="ctr"/>
+          </a:p>
+        </p:txBody>
+      </p:sp>
+      <p:pic>
+        <p:nvPicPr>
+          <p:cNvPr id="3" name="Picture 2" descr="logo_uniajc_color.png"/>
+          <p:cNvPicPr>
+            <a:picLocks noChangeAspect="1"/>
+          </p:cNvPicPr>
+          <p:nvPr/>
+        </p:nvPicPr>
+        <p:blipFill>
+          <a:blip r:embed="rId2"/>
+          <a:stretch>
+            <a:fillRect/>
+          </a:stretch>
+        </p:blipFill>
+        <p:spPr>
+          <a:xfrm>
+            <a:off x="10271455" y="5998464"/>
+            <a:ext cx="1463040" cy="643233"/>
+          </a:xfrm>
+          <a:prstGeom prst="rect">
+            <a:avLst/>
+          </a:prstGeom>
+        </p:spPr>
+      </p:pic>
+      <p:sp>
+        <p:nvSpPr>
+          <p:cNvPr id="4" name="TextBox 3"/>
+          <p:cNvSpPr txBox="1"/>
+          <p:nvPr/>
+        </p:nvSpPr>
+        <p:spPr>
+          <a:xfrm>
+            <a:off x="457200" y="1737360"/>
+            <a:ext cx="11277295" cy="1097280"/>
+          </a:xfrm>
+          <a:prstGeom prst="rect">
+            <a:avLst/>
+          </a:prstGeom>
+          <a:noFill/>
+        </p:spPr>
+        <p:txBody>
+          <a:bodyPr wrap="square" anchor="ctr"/>
+          <a:lstStyle/>
+          <a:p>
+            <a:pPr algn="ctr"/>
+            <a:r>
+              <a:rPr sz="3400" b="1" i="0">
+                <a:solidFill>
+                  <a:srgbClr val="095292"/>
+                </a:solidFill>
+                <a:latin typeface="Calibri"/>
+              </a:rPr>
+              <a:t>Clase 8 · VetCare avanza</a:t>
+            </a:r>
+          </a:p>
+        </p:txBody>
+      </p:sp>
+      <p:sp>
+        <p:nvSpPr>
+          <p:cNvPr id="5" name="TextBox 4"/>
+          <p:cNvSpPr txBox="1"/>
+          <p:nvPr/>
+        </p:nvSpPr>
+        <p:spPr>
+          <a:xfrm>
+            <a:off x="457200" y="3017520"/>
+            <a:ext cx="11277295" cy="1645920"/>
+          </a:xfrm>
+          <a:prstGeom prst="rect">
+            <a:avLst/>
+          </a:prstGeom>
+          <a:noFill/>
+        </p:spPr>
+        <p:txBody>
+          <a:bodyPr wrap="square">
+            <a:spAutoFit/>
+          </a:bodyPr>
+          <a:lstStyle/>
+          <a:p>
+            <a:pPr algn="ctr">
+              <a:spcAft>
+                <a:spcPts val="600"/>
+              </a:spcAft>
+            </a:pPr>
+            <a:r>
+              <a:rPr sz="1600" b="0" i="0">
+                <a:solidFill>
+                  <a:srgbClr val="333333"/>
+                </a:solidFill>
+                <a:latin typeface="Calibri"/>
+              </a:rPr>
+              <a:t>Queda listo el modelo de dominio de VetCare: el diagrama de clases con Dueno, Mascota, Cita, Veterinario y Atencion.</a:t>
+            </a:r>
+          </a:p>
+          <a:p>
+            <a:pPr algn="ctr">
+              <a:spcAft>
+                <a:spcPts val="600"/>
+              </a:spcAft>
+            </a:pPr>
+            <a:r>
+              <a:rPr sz="1600" b="0" i="0">
+                <a:solidFill>
+                  <a:srgbClr val="333333"/>
+                </a:solidFill>
+                <a:latin typeface="Calibri"/>
+              </a:rPr>
+              <a:t>Entregable: Diagrama de clases de VetCare hecho en draw.io, exportado a PNG y al archivo .drawio, con 5 clases, atributos tipados, metodos propios y 4 asociaciones con multiplicidad y nombre de rol, subido a la plataforma del curso.</a:t>
+            </a:r>
+          </a:p>
+          <a:p>
+            <a:pPr algn="ctr">
+              <a:spcAft>
+                <a:spcPts val="600"/>
+              </a:spcAft>
+            </a:pPr>
+            <a:r>
+              <a:rPr sz="1600" b="0" i="0">
+                <a:solidFill>
+                  <a:srgbClr val="333333"/>
+                </a:solidFill>
+                <a:latin typeface="Calibri"/>
+              </a:rPr>
+              <a:t>Siguiente clase: continuamos el hilo del PI</a:t>
+            </a:r>
+          </a:p>
+        </p:txBody>
+      </p:sp>
+      <p:sp>
+        <p:nvSpPr>
+          <p:cNvPr id="6" name="TextBox 5"/>
+          <p:cNvSpPr txBox="1"/>
+          <p:nvPr/>
+        </p:nvSpPr>
+        <p:spPr>
+          <a:xfrm>
+            <a:off x="457200" y="4754880"/>
+            <a:ext cx="11277295" cy="640080"/>
+          </a:xfrm>
+          <a:prstGeom prst="rect">
+            <a:avLst/>
+          </a:prstGeom>
+          <a:noFill/>
+        </p:spPr>
+        <p:txBody>
+          <a:bodyPr wrap="square">
+            <a:spAutoFit/>
+          </a:bodyPr>
+          <a:lstStyle/>
+          <a:p>
+            <a:pPr algn="ctr"/>
+            <a:r>
+              <a:rPr sz="2000" b="1" i="0">
+                <a:solidFill>
+                  <a:srgbClr val="269CCB"/>
+                </a:solidFill>
+                <a:latin typeface="Calibri"/>
+              </a:rPr>
+              <a:t>Teoria al servicio del proyecto</a:t>
+            </a:r>
+          </a:p>
+        </p:txBody>
+      </p:sp>
+    </p:spTree>
+  </p:cSld>
+  <p:clrMapOvr>
+    <a:masterClrMapping/>
+  </p:clrMapOvr>
+</p:sld>
+</file>
+
 <file path=ppt/slides/slide3.xml><?xml version="1.0" encoding="utf-8"?>
 <p:sld xmlns:a="http://schemas.openxmlformats.org/drawingml/2006/main" xmlns:p="http://schemas.openxmlformats.org/presentationml/2006/main" xmlns:r="http://schemas.openxmlformats.org/officeDocument/2006/relationships">
   <p:cSld>
@@ -10157,7 +10695,7 @@
                 </a:solidFill>
                 <a:latin typeface="Calibri"/>
               </a:rPr>
-              <a:t>UML significa Lenguaje Unificado de Modelado y nacio en los anos...</a:t>
+              <a:t>UML significa Lenguaje Unificado de Modelado y nacio en los anos... (1/2)</a:t>
             </a:r>
           </a:p>
         </p:txBody>
@@ -10245,38 +10783,6 @@
                 <a:latin typeface="Calibri"/>
               </a:rPr>
               <a:t>–   La especificacion tiene catorce tipos de diagrama, pero en la vida real de un analista se usan cuatro o cinco de forma constante y los demas se consultan cuando se necesitan; querer aprender los catorce es la manera mas rapida de no aprender ninguno.</a:t>
-            </a:r>
-          </a:p>
-          <a:p>
-            <a:pPr>
-              <a:spcAft>
-                <a:spcPts val="800"/>
-              </a:spcAft>
-            </a:pPr>
-            <a:r>
-              <a:rPr sz="2000" b="0" i="0">
-                <a:solidFill>
-                  <a:srgbClr val="333333"/>
-                </a:solidFill>
-                <a:latin typeface="Calibri"/>
-              </a:rPr>
-              <a:t>–   En VetCare, la frase un dueno puede tener varias mascotas parece clarisima hasta que alguien pregunta si una mascota puede tener dos duenos, si el dueno existe antes de registrar la mascota o si al borrar el dueno desaparece la mascota</a:t>
-            </a:r>
-          </a:p>
-          <a:p>
-            <a:pPr>
-              <a:spcAft>
-                <a:spcPts val="800"/>
-              </a:spcAft>
-            </a:pPr>
-            <a:r>
-              <a:rPr sz="2000" b="0" i="0">
-                <a:solidFill>
-                  <a:srgbClr val="333333"/>
-                </a:solidFill>
-                <a:latin typeface="Calibri"/>
-              </a:rPr>
-              <a:t>–   El diagrama contesta esas tres preguntas con dos numeros y una linea, y ahi es donde UML se gana el sueldo.</a:t>
             </a:r>
           </a:p>
         </p:txBody>
@@ -10457,7 +10963,7 @@
                 </a:solidFill>
                 <a:latin typeface="Calibri"/>
               </a:rPr>
-              <a:t>Los diagramas se agrupan en dos grandes vistas</a:t>
+              <a:t>UML significa Lenguaje Unificado de Modelado y nacio en los anos... (2/2)</a:t>
             </a:r>
           </a:p>
         </p:txBody>
@@ -10490,13 +10996,13 @@
               </a:spcAft>
             </a:pPr>
             <a:r>
-              <a:rPr sz="1900" b="0" i="0">
+              <a:rPr sz="2000" b="0" i="0">
                 <a:solidFill>
                   <a:srgbClr val="333333"/>
                 </a:solidFill>
                 <a:latin typeface="Calibri"/>
               </a:rPr>
-              <a:t>–   Los diagramas se agrupan en dos grandes vistas.</a:t>
+              <a:t>–   En VetCare, la frase un dueno puede tener varias mascotas parece clarisima hasta que alguien pregunta si una mascota puede tener dos duenos, si el dueno existe antes de registrar la mascota o si al borrar el dueno desaparece la mascota</a:t>
             </a:r>
           </a:p>
           <a:p>
@@ -10506,109 +11012,13 @@
               </a:spcAft>
             </a:pPr>
             <a:r>
-              <a:rPr sz="1900" b="0" i="0">
+              <a:rPr sz="2000" b="0" i="0">
                 <a:solidFill>
                   <a:srgbClr val="333333"/>
                 </a:solidFill>
                 <a:latin typeface="Calibri"/>
               </a:rPr>
-              <a:t>–   La vista estructural muestra de que esta hecho el sistema y no cambia con el tiempo: diagrama de clases, de objetos, de componentes y de despliegue.</a:t>
-            </a:r>
-          </a:p>
-          <a:p>
-            <a:pPr>
-              <a:spcAft>
-                <a:spcPts val="800"/>
-              </a:spcAft>
-            </a:pPr>
-            <a:r>
-              <a:rPr sz="1900" b="0" i="0">
-                <a:solidFill>
-                  <a:srgbClr val="333333"/>
-                </a:solidFill>
-                <a:latin typeface="Calibri"/>
-              </a:rPr>
-              <a:t>–   La vista de comportamiento muestra que pasa y en que orden: casos de uso, actividades, secuencia y maquina de estados.</a:t>
-            </a:r>
-          </a:p>
-          <a:p>
-            <a:pPr>
-              <a:spcAft>
-                <a:spcPts val="800"/>
-              </a:spcAft>
-            </a:pPr>
-            <a:r>
-              <a:rPr sz="1900" b="0" i="0">
-                <a:solidFill>
-                  <a:srgbClr val="333333"/>
-                </a:solidFill>
-                <a:latin typeface="Calibri"/>
-              </a:rPr>
-              <a:t>–   Un mismo sistema necesita las dos, igual que una casa necesita el plano de plantas y tambien el plano de instalaciones.</a:t>
-            </a:r>
-          </a:p>
-          <a:p>
-            <a:pPr>
-              <a:spcAft>
-                <a:spcPts val="800"/>
-              </a:spcAft>
-            </a:pPr>
-            <a:r>
-              <a:rPr sz="1900" b="0" i="0">
-                <a:solidFill>
-                  <a:srgbClr val="333333"/>
-                </a:solidFill>
-                <a:latin typeface="Calibri"/>
-              </a:rPr>
-              <a:t>–   En la practica profesional los que sobreviven son cinco: casos de uso para acordar el alcance con el cliente, clases para el modelo del dominio</a:t>
-            </a:r>
-          </a:p>
-          <a:p>
-            <a:pPr>
-              <a:spcAft>
-                <a:spcPts val="800"/>
-              </a:spcAft>
-            </a:pPr>
-            <a:r>
-              <a:rPr sz="1900" b="0" i="0">
-                <a:solidFill>
-                  <a:srgbClr val="333333"/>
-                </a:solidFill>
-                <a:latin typeface="Calibri"/>
-              </a:rPr>
-              <a:t>–   Secuencia para entender un flujo complicado paso a paso, actividades para procesos de negocio con decisiones, y despliegue cuando hay que explicar donde vive cada cosa.</a:t>
-            </a:r>
-          </a:p>
-          <a:p>
-            <a:pPr>
-              <a:spcAft>
-                <a:spcPts val="800"/>
-              </a:spcAft>
-            </a:pPr>
-            <a:r>
-              <a:rPr sz="1900" b="0" i="0">
-                <a:solidFill>
-                  <a:srgbClr val="333333"/>
-                </a:solidFill>
-                <a:latin typeface="Calibri"/>
-              </a:rPr>
-              <a:t>–   En VetCare vamos a usar clases hoy, casos de uso y secuencia mas adelante, y el resto se menciona para que sepan que existen.</a:t>
-            </a:r>
-          </a:p>
-          <a:p>
-            <a:pPr>
-              <a:spcAft>
-                <a:spcPts val="800"/>
-              </a:spcAft>
-            </a:pPr>
-            <a:r>
-              <a:rPr sz="1900" b="0" i="0">
-                <a:solidFill>
-                  <a:srgbClr val="333333"/>
-                </a:solidFill>
-                <a:latin typeface="Calibri"/>
-              </a:rPr>
-              <a:t>–   Aclaracion importante: los diagramas no reemplazan el documento de requisitos, lo dibujan; cada clase que aparezca hoy debe poder rastrearse a un RF o a una historia del backlog.</a:t>
+              <a:t>–   El diagrama contesta esas tres preguntas con dos numeros y una linea, y ahi es donde UML se gana el sueldo.</a:t>
             </a:r>
           </a:p>
         </p:txBody>
@@ -10789,7 +11199,7 @@
                 </a:solidFill>
                 <a:latin typeface="Calibri"/>
               </a:rPr>
-              <a:t>El diagrama de clases se dibuja con una caja de tres compartimentos:...</a:t>
+              <a:t>Los diagramas se agrupan en dos grandes vistas</a:t>
             </a:r>
           </a:p>
         </p:txBody>
@@ -10828,7 +11238,7 @@
                 </a:solidFill>
                 <a:latin typeface="Calibri"/>
               </a:rPr>
-              <a:t>–   El diagrama de clases se dibuja con una caja de tres compartimentos: arriba el nombre de la clase en singular y con mayuscula inicial (Mascota, no mascotas), en el medio los atributos y abajo los metodos.</a:t>
+              <a:t>–   La vista estructural muestra de que esta hecho el sistema y no cambia con el tiempo: diagrama de clases, de objetos, de componentes y de despliegue.</a:t>
             </a:r>
           </a:p>
           <a:p>
@@ -10844,7 +11254,7 @@
                 </a:solidFill>
                 <a:latin typeface="Calibri"/>
               </a:rPr>
-              <a:t>–   Un atributo se escribe con visibilidad, nombre y tipo, por ejemplo -nombre: String o -fechaNacimiento: Date, donde el guion significa privado y el mas significa publico.</a:t>
+              <a:t>–   La vista de comportamiento muestra que pasa y en que orden: casos de uso, actividades, secuencia y maquina de estados.</a:t>
             </a:r>
           </a:p>
           <a:p>
@@ -10860,7 +11270,7 @@
                 </a:solidFill>
                 <a:latin typeface="Calibri"/>
               </a:rPr>
-              <a:t>–   Un metodo se escribe con su firma y su tipo de retorno, por ejemplo +calcularEdad(): int.</a:t>
+              <a:t>–   En la practica profesional los que sobreviven son cinco: casos de uso para acordar el alcance con el cliente, clases para el modelo del dominio</a:t>
             </a:r>
           </a:p>
           <a:p>
@@ -10876,7 +11286,7 @@
                 </a:solidFill>
                 <a:latin typeface="Calibri"/>
               </a:rPr>
-              <a:t>–   Aqui hay que distinguir dos cosas que los estudiantes mezclan: el modelo de dominio, que solo tiene los conceptos del negocio y sus datos, y el modelo de diseno, que ya incluye clases tecnicas como controladores o repositorios.</a:t>
+              <a:t>–   Secuencia para entender un flujo complicado paso a paso, actividades para procesos de negocio con decisiones, y despliegue cuando hay que explicar donde vive cada cosa.</a:t>
             </a:r>
           </a:p>
           <a:p>
@@ -10892,23 +11302,7 @@
                 </a:solidFill>
                 <a:latin typeface="Calibri"/>
               </a:rPr>
-              <a:t>–   Hoy hacemos modelo de dominio, asi que en VetCare no aparece ninguna clase llamada MascotaDAO ni ConexionBD: aparecen Dueno, Mascota, Cita, Veterinario y Atencion, que son las cosas de las que habla el Dr. Ramirez cuando cuenta como funciona la clinica.</a:t>
-            </a:r>
-          </a:p>
-          <a:p>
-            <a:pPr>
-              <a:spcAft>
-                <a:spcPts val="800"/>
-              </a:spcAft>
-            </a:pPr>
-            <a:r>
-              <a:rPr sz="2000" b="0" i="0">
-                <a:solidFill>
-                  <a:srgbClr val="333333"/>
-                </a:solidFill>
-                <a:latin typeface="Calibri"/>
-              </a:rPr>
-              <a:t>–   Los metodos, en el modelo de dominio, son solo los que pertenecen naturalmente al concepto, como calcularEdad en Mascota.</a:t>
+              <a:t>–   Aclaracion importante: los diagramas no reemplazan el documento de requisitos, lo dibujan; cada clase que aparezca hoy debe poder rastrearse a un RF o a una historia del backlog.</a:t>
             </a:r>
           </a:p>
         </p:txBody>
@@ -11089,7 +11483,7 @@
                 </a:solidFill>
                 <a:latin typeface="Calibri"/>
               </a:rPr>
-              <a:t>Las lineas entre clases son la mitad del valor del diagrama (1/2)</a:t>
+              <a:t>El diagrama de clases se dibuja con una caja de tres compartimentos:... (1/2)</a:t>
             </a:r>
           </a:p>
         </p:txBody>
@@ -11128,7 +11522,7 @@
                 </a:solidFill>
                 <a:latin typeface="Calibri"/>
               </a:rPr>
-              <a:t>–   Las lineas entre clases son la mitad del valor del diagrama.</a:t>
+              <a:t>–   El diagrama de clases se dibuja con una caja de tres compartimentos: arriba el nombre de la clase en singular y con mayuscula inicial (Mascota, no mascotas), en el medio los atributos y abajo los metodos.</a:t>
             </a:r>
           </a:p>
           <a:p>
@@ -11144,7 +11538,7 @@
                 </a:solidFill>
                 <a:latin typeface="Calibri"/>
               </a:rPr>
-              <a:t>–   Una asociacion es una relacion estable entre dos conceptos y se dibuja con una linea recta, un nombre que se lee como frase (Dueno tiene Mascota) y</a:t>
+              <a:t>–   Un atributo se escribe con visibilidad, nombre y tipo, por ejemplo -nombre: String o -fechaNacimiento: Date, donde el guion significa privado y el mas significa publico.</a:t>
             </a:r>
           </a:p>
           <a:p>
@@ -11160,7 +11554,7 @@
                 </a:solidFill>
                 <a:latin typeface="Calibri"/>
               </a:rPr>
-              <a:t>–   En cada extremo, una multiplicidad que responde cuantos: 1 exactamente uno, 0..1 opcional, 1..* uno o mas, 0..* cero o mas.</a:t>
+              <a:t>–   Un metodo se escribe con su firma y su tipo de retorno, por ejemplo +calcularEdad(): int.</a:t>
             </a:r>
           </a:p>
           <a:p>
@@ -11176,23 +11570,7 @@
                 </a:solidFill>
                 <a:latin typeface="Calibri"/>
               </a:rPr>
-              <a:t>–   En VetCare, Dueno 1 --- 0..* Mascota se lee un dueno puede tener cero o mas mascotas y una mascota pertenece a exactamente un dueno; ese 1 del lado del dueno es una decision de negocio que hay que confirmar con el cliente, no una suposicion.</a:t>
-            </a:r>
-          </a:p>
-          <a:p>
-            <a:pPr>
-              <a:spcAft>
-                <a:spcPts val="800"/>
-              </a:spcAft>
-            </a:pPr>
-            <a:r>
-              <a:rPr sz="2000" b="0" i="0">
-                <a:solidFill>
-                  <a:srgbClr val="333333"/>
-                </a:solidFill>
-                <a:latin typeface="Calibri"/>
-              </a:rPr>
-              <a:t>–   Cita relaciona a Mascota y a Veterinario, cada cita con exactamente una mascota y un veterinario, y cada veterinario con muchas citas.</a:t>
+              <a:t>–   Aqui hay que distinguir dos cosas que los estudiantes mezclan: el modelo de dominio, que solo tiene los conceptos del negocio y sus datos, y el modelo de diseno, que ya incluye clases tecnicas como controladores o repositorios.</a:t>
             </a:r>
           </a:p>
         </p:txBody>
@@ -11373,7 +11751,7 @@
                 </a:solidFill>
                 <a:latin typeface="Calibri"/>
               </a:rPr>
-              <a:t>Las lineas entre clases son la mitad del valor del diagrama (2/2)</a:t>
+              <a:t>El diagrama de clases se dibuja con una caja de tres compartimentos:... (2/2)</a:t>
             </a:r>
           </a:p>
         </p:txBody>
@@ -11412,7 +11790,7 @@
                 </a:solidFill>
                 <a:latin typeface="Calibri"/>
               </a:rPr>
-              <a:t>–   La composicion (rombo relleno) se usa cuando la parte no vive sin el todo: en VetCare las Atenciones de una Mascota son parte de su historia clinica y no tienen sentido si se elimina la ficha de la mascota.</a:t>
+              <a:t>–   Hoy hacemos modelo de dominio, asi que en VetCare no aparece ninguna clase llamada MascotaDAO ni ConexionBD: aparecen Dueno, Mascota, Cita, Veterinario y Atencion, que son las cosas de las que habla el Dr. Ramirez cuando cuenta como funciona la clinica.</a:t>
             </a:r>
           </a:p>
           <a:p>
@@ -11428,23 +11806,7 @@
                 </a:solidFill>
                 <a:latin typeface="Calibri"/>
               </a:rPr>
-              <a:t>–   La agregacion (rombo vacio) se usa cuando la parte sobrevive por su cuenta, como un Veterinario que pertenece a una Sede pero sigue existiendo si la sede cierra.</a:t>
-            </a:r>
-          </a:p>
-          <a:p>
-            <a:pPr>
-              <a:spcAft>
-                <a:spcPts val="800"/>
-              </a:spcAft>
-            </a:pPr>
-            <a:r>
-              <a:rPr sz="2000" b="0" i="0">
-                <a:solidFill>
-                  <a:srgbClr val="333333"/>
-                </a:solidFill>
-                <a:latin typeface="Calibri"/>
-              </a:rPr>
-              <a:t>–   La herencia (triangulo) solo cuando hay un es-un verdadero, por ejemplo Persona con Dueno y Veterinario como especializaciones, decision que solo vale la pena si comparten varios atributos.</a:t>
+              <a:t>–   Los metodos, en el modelo de dominio, son solo los que pertenecen naturalmente al concepto, como calcularEdad en Mascota.</a:t>
             </a:r>
           </a:p>
         </p:txBody>
@@ -11625,7 +11987,7 @@
                 </a:solidFill>
                 <a:latin typeface="Calibri"/>
               </a:rPr>
-              <a:t>El diagrama que dibujamos hoy no se queda en la clase: es la pieza que...</a:t>
+              <a:t>Las lineas entre clases son la mitad del valor del diagrama (1/2)</a:t>
             </a:r>
           </a:p>
         </p:txBody>
@@ -11664,7 +12026,7 @@
                 </a:solidFill>
                 <a:latin typeface="Calibri"/>
               </a:rPr>
-              <a:t>–   El diagrama que dibujamos hoy no se queda en la clase: es la pieza que viaja mas lejos del Proyecto Integrador.</a:t>
+              <a:t>–   Las lineas entre clases son la mitad del valor del diagrama.</a:t>
             </a:r>
           </a:p>
           <a:p>
@@ -11680,7 +12042,7 @@
                 </a:solidFill>
                 <a:latin typeface="Calibri"/>
               </a:rPr>
-              <a:t>–   De cada clase salen los campos del diccionario de datos y, mas adelante, las tablas de la base de datos: la clase Mascota con sus atributos se convierte en la tabla mascota, la asociacion 1 a 0..* se convierte en una llave foranea</a:t>
+              <a:t>–   Una asociacion es una relacion estable entre dos conceptos y se dibuja con una linea recta, un nombre que se lee como frase (Dueno tiene Mascota) y</a:t>
             </a:r>
           </a:p>
           <a:p>
@@ -11696,7 +12058,7 @@
                 </a:solidFill>
                 <a:latin typeface="Calibri"/>
               </a:rPr>
-              <a:t>–   Y las multiplicidades muchos a muchos se convierten en una tabla intermedia.</a:t>
+              <a:t>–   En cada extremo, una multiplicidad que responde cuantos: 1 exactamente uno, 0..1 opcional, 1..* uno o mas, 0..* cero o mas.</a:t>
             </a:r>
           </a:p>
           <a:p>
@@ -11712,39 +12074,7 @@
                 </a:solidFill>
                 <a:latin typeface="Calibri"/>
               </a:rPr>
-              <a:t>–   Para quien cursa tambien Programacion II, este diagrama es el mapa que le dice que clases crear y que atributos poner; para quien solo cursa Programacion II, es lo que recibe ya hecho y debe respetar</a:t>
-            </a:r>
-          </a:p>
-          <a:p>
-            <a:pPr>
-              <a:spcAft>
-                <a:spcPts val="800"/>
-              </a:spcAft>
-            </a:pPr>
-            <a:r>
-              <a:rPr sz="2000" b="0" i="0">
-                <a:solidFill>
-                  <a:srgbClr val="333333"/>
-                </a:solidFill>
-                <a:latin typeface="Calibri"/>
-              </a:rPr>
-              <a:t>–   Y para quien solo cursa Seminario, es el corazon del documento de diseno que se entrega al final junto con el prototipo navegable, una ruta completa y perfectamente valida donde el entregable profesional es el plano, no el ladrillo.</a:t>
-            </a:r>
-          </a:p>
-          <a:p>
-            <a:pPr>
-              <a:spcAft>
-                <a:spcPts val="800"/>
-              </a:spcAft>
-            </a:pPr>
-            <a:r>
-              <a:rPr sz="2000" b="0" i="0">
-                <a:solidFill>
-                  <a:srgbClr val="333333"/>
-                </a:solidFill>
-                <a:latin typeface="Calibri"/>
-              </a:rPr>
-              <a:t>–   Por eso el diagrama debe estar limpio: nombres en singular, sin atributos repetidos en dos clases, sin lineas sueltas y sin cajas que no correspondan a ningun requisito.</a:t>
+              <a:t>–   En VetCare, Dueno 1 --- 0..* Mascota se lee un dueno puede tener cero o mas mascotas y una mascota pertenece a exactamente un dueno; ese 1 del lado del dueno es una decision de negocio que hay que confirmar con el cliente, no una suposicion.</a:t>
             </a:r>
           </a:p>
         </p:txBody>

--- a/Seminario de Sistemas/Clases/Clase 8 - Introduccion a UML/Presentacion.pptx
+++ b/Seminario de Sistemas/Clases/Clase 8 - Introduccion a UML/Presentacion.pptx
@@ -26,6 +26,8 @@
     <p:sldId id="274" r:id="rId25"/>
     <p:sldId id="275" r:id="rId26"/>
     <p:sldId id="276" r:id="rId27"/>
+    <p:sldId id="277" r:id="rId28"/>
+    <p:sldId id="278" r:id="rId29"/>
   </p:sldIdLst>
   <p:sldSz cx="12191695" cy="6858000" type="screen4x3"/>
   <p:notesSz cx="6858000" cy="9144000"/>
@@ -4162,7 +4164,7 @@
                 </a:solidFill>
                 <a:latin typeface="Calibri"/>
               </a:rPr>
-              <a:t>Modelo de dominio de VetCare en sintaxis Mermaid (diagrama, no codigo)</a:t>
+              <a:t>El diagrama de clases en Mermaid: la sintaxis completa</a:t>
             </a:r>
           </a:p>
         </p:txBody>
@@ -4176,7 +4178,7 @@
         <p:spPr>
           <a:xfrm>
             <a:off x="457200" y="1261872"/>
-            <a:ext cx="11277295" cy="4773168"/>
+            <a:ext cx="11277295" cy="5093208"/>
           </a:xfrm>
           <a:prstGeom prst="roundRect">
             <a:avLst>
@@ -4296,7 +4298,7 @@
         <p:spPr>
           <a:xfrm>
             <a:off x="777240" y="1719072"/>
-            <a:ext cx="5181447" cy="4133087"/>
+            <a:ext cx="10637215" cy="4453128"/>
           </a:xfrm>
           <a:prstGeom prst="rect">
             <a:avLst/>
@@ -4311,11 +4313,11 @@
           <a:p>
             <a:pPr>
               <a:spcAft>
-                <a:spcPts val="371"/>
+                <a:spcPts val="314"/>
               </a:spcAft>
             </a:pPr>
             <a:r>
-              <a:rPr sz="1300" b="0" i="0">
+              <a:rPr sz="1100" b="0" i="0">
                 <a:solidFill>
                   <a:srgbClr val="FFFFFF"/>
                 </a:solidFill>
@@ -4327,11 +4329,11 @@
           <a:p>
             <a:pPr>
               <a:spcAft>
-                <a:spcPts val="371"/>
+                <a:spcPts val="314"/>
               </a:spcAft>
             </a:pPr>
             <a:r>
-              <a:rPr sz="1300" b="0" i="0">
+              <a:rPr sz="1100" b="0" i="0">
                 <a:solidFill>
                   <a:srgbClr val="FFFFFF"/>
                 </a:solidFill>
@@ -4343,498 +4345,280 @@
           <a:p>
             <a:pPr>
               <a:spcAft>
-                <a:spcPts val="371"/>
+                <a:spcPts val="314"/>
               </a:spcAft>
             </a:pPr>
             <a:r>
-              <a:rPr sz="1300" b="0" i="0">
+              <a:rPr sz="1100" b="0" i="0">
                 <a:solidFill>
                   <a:srgbClr val="FFFFFF"/>
                 </a:solidFill>
                 <a:latin typeface="Calibri"/>
               </a:rPr>
-              <a:t>    -documento: String</a:t>
+              <a:t>    -int idDueno</a:t>
             </a:r>
           </a:p>
           <a:p>
             <a:pPr>
               <a:spcAft>
-                <a:spcPts val="371"/>
+                <a:spcPts val="314"/>
               </a:spcAft>
             </a:pPr>
             <a:r>
-              <a:rPr sz="1300" b="0" i="0">
+              <a:rPr sz="1100" b="0" i="0">
                 <a:solidFill>
                   <a:srgbClr val="FFFFFF"/>
                 </a:solidFill>
                 <a:latin typeface="Calibri"/>
               </a:rPr>
-              <a:t>    -nombre: String</a:t>
+              <a:t>    -String nombre</a:t>
             </a:r>
           </a:p>
           <a:p>
             <a:pPr>
               <a:spcAft>
-                <a:spcPts val="371"/>
+                <a:spcPts val="314"/>
               </a:spcAft>
             </a:pPr>
             <a:r>
-              <a:rPr sz="1300" b="0" i="0">
+              <a:rPr sz="1100" b="0" i="0">
                 <a:solidFill>
                   <a:srgbClr val="FFFFFF"/>
                 </a:solidFill>
                 <a:latin typeface="Calibri"/>
               </a:rPr>
-              <a:t>    +registrarMascota(m: Mascota): void</a:t>
+              <a:t>    -String telefono</a:t>
             </a:r>
           </a:p>
           <a:p>
             <a:pPr>
               <a:spcAft>
-                <a:spcPts val="371"/>
+                <a:spcPts val="314"/>
               </a:spcAft>
             </a:pPr>
             <a:r>
-              <a:rPr sz="1300" b="0" i="0">
+              <a:rPr sz="1100" b="0" i="0">
                 <a:solidFill>
                   <a:srgbClr val="FFFFFF"/>
                 </a:solidFill>
                 <a:latin typeface="Calibri"/>
               </a:rPr>
-              <a:t>  }</a:t>
+              <a:t>    +registrar()</a:t>
             </a:r>
           </a:p>
           <a:p>
             <a:pPr>
               <a:spcAft>
-                <a:spcPts val="371"/>
+                <a:spcPts val="314"/>
               </a:spcAft>
             </a:pPr>
             <a:r>
-              <a:rPr sz="1300" b="0" i="0">
+              <a:rPr sz="1100" b="0" i="0">
                 <a:solidFill>
                   <a:srgbClr val="FFFFFF"/>
                 </a:solidFill>
                 <a:latin typeface="Calibri"/>
               </a:rPr>
-              <a:t>  class Mascota {</a:t>
+              <a:t>  }</a:t>
             </a:r>
           </a:p>
           <a:p>
             <a:pPr>
               <a:spcAft>
-                <a:spcPts val="371"/>
+                <a:spcPts val="314"/>
               </a:spcAft>
             </a:pPr>
             <a:r>
-              <a:rPr sz="1300" b="0" i="0">
+              <a:rPr sz="1100" b="0" i="0">
                 <a:solidFill>
                   <a:srgbClr val="FFFFFF"/>
                 </a:solidFill>
                 <a:latin typeface="Calibri"/>
               </a:rPr>
-              <a:t>    -codigo: String</a:t>
+              <a:t>  class Mascota {</a:t>
             </a:r>
           </a:p>
           <a:p>
             <a:pPr>
               <a:spcAft>
-                <a:spcPts val="371"/>
+                <a:spcPts val="314"/>
               </a:spcAft>
             </a:pPr>
             <a:r>
-              <a:rPr sz="1300" b="0" i="0">
+              <a:rPr sz="1100" b="0" i="0">
                 <a:solidFill>
                   <a:srgbClr val="FFFFFF"/>
                 </a:solidFill>
                 <a:latin typeface="Calibri"/>
               </a:rPr>
-              <a:t>    -especie: String</a:t>
+              <a:t>    -int idMascota</a:t>
             </a:r>
           </a:p>
           <a:p>
             <a:pPr>
               <a:spcAft>
-                <a:spcPts val="371"/>
+                <a:spcPts val="314"/>
               </a:spcAft>
             </a:pPr>
             <a:r>
-              <a:rPr sz="1300" b="0" i="0">
+              <a:rPr sz="1100" b="0" i="0">
                 <a:solidFill>
                   <a:srgbClr val="FFFFFF"/>
                 </a:solidFill>
                 <a:latin typeface="Calibri"/>
               </a:rPr>
-              <a:t>    -fechaNacimiento: Date</a:t>
+              <a:t>    -String nombre</a:t>
             </a:r>
           </a:p>
           <a:p>
             <a:pPr>
               <a:spcAft>
-                <a:spcPts val="371"/>
+                <a:spcPts val="314"/>
               </a:spcAft>
             </a:pPr>
             <a:r>
-              <a:rPr sz="1300" b="0" i="0">
+              <a:rPr sz="1100" b="0" i="0">
                 <a:solidFill>
                   <a:srgbClr val="FFFFFF"/>
                 </a:solidFill>
                 <a:latin typeface="Calibri"/>
               </a:rPr>
-              <a:t>    +calcularEdad(): int</a:t>
+              <a:t>    -String especie</a:t>
             </a:r>
           </a:p>
           <a:p>
             <a:pPr>
               <a:spcAft>
-                <a:spcPts val="371"/>
+                <a:spcPts val="314"/>
               </a:spcAft>
             </a:pPr>
             <a:r>
-              <a:rPr sz="1300" b="0" i="0">
+              <a:rPr sz="1100" b="0" i="0">
                 <a:solidFill>
                   <a:srgbClr val="FFFFFF"/>
                 </a:solidFill>
                 <a:latin typeface="Calibri"/>
               </a:rPr>
-              <a:t>  }</a:t>
+              <a:t>    -char activa</a:t>
             </a:r>
           </a:p>
           <a:p>
             <a:pPr>
               <a:spcAft>
-                <a:spcPts val="371"/>
+                <a:spcPts val="314"/>
               </a:spcAft>
             </a:pPr>
             <a:r>
-              <a:rPr sz="1300" b="0" i="0">
+              <a:rPr sz="1100" b="0" i="0">
                 <a:solidFill>
                   <a:srgbClr val="FFFFFF"/>
                 </a:solidFill>
                 <a:latin typeface="Calibri"/>
               </a:rPr>
-              <a:t>  class Veterinario {</a:t>
+              <a:t>    +abrirExpediente()</a:t>
             </a:r>
           </a:p>
           <a:p>
             <a:pPr>
               <a:spcAft>
-                <a:spcPts val="371"/>
+                <a:spcPts val="314"/>
               </a:spcAft>
             </a:pPr>
             <a:r>
-              <a:rPr sz="1300" b="0" i="0">
+              <a:rPr sz="1100" b="0" i="0">
                 <a:solidFill>
                   <a:srgbClr val="FFFFFF"/>
                 </a:solidFill>
                 <a:latin typeface="Calibri"/>
               </a:rPr>
-              <a:t>    -tarjetaProfesional: String</a:t>
+              <a:t>  }</a:t>
             </a:r>
           </a:p>
           <a:p>
             <a:pPr>
               <a:spcAft>
-                <a:spcPts val="371"/>
+                <a:spcPts val="314"/>
               </a:spcAft>
             </a:pPr>
             <a:r>
-              <a:rPr sz="1300" b="0" i="0">
+              <a:rPr sz="1100" b="0" i="0">
                 <a:solidFill>
                   <a:srgbClr val="FFFFFF"/>
                 </a:solidFill>
                 <a:latin typeface="Calibri"/>
               </a:rPr>
-              <a:t>    -especialidad: String</a:t>
+              <a:t/>
             </a:r>
           </a:p>
           <a:p>
             <a:pPr>
               <a:spcAft>
-                <a:spcPts val="371"/>
+                <a:spcPts val="314"/>
               </a:spcAft>
             </a:pPr>
             <a:r>
-              <a:rPr sz="1300" b="0" i="0">
+              <a:rPr sz="1100" b="0" i="0">
                 <a:solidFill>
                   <a:srgbClr val="FFFFFF"/>
                 </a:solidFill>
                 <a:latin typeface="Calibri"/>
               </a:rPr>
-              <a:t>  }</a:t>
-            </a:r>
-          </a:p>
-        </p:txBody>
-      </p:sp>
-      <p:sp>
-        <p:nvSpPr>
-          <p:cNvPr id="9" name="TextBox 8"/>
-          <p:cNvSpPr txBox="1"/>
-          <p:nvPr/>
-        </p:nvSpPr>
-        <p:spPr>
-          <a:xfrm>
-            <a:off x="6233007" y="1719072"/>
-            <a:ext cx="5181447" cy="4133087"/>
-          </a:xfrm>
-          <a:prstGeom prst="rect">
-            <a:avLst/>
-          </a:prstGeom>
-          <a:noFill/>
-        </p:spPr>
-        <p:txBody>
-          <a:bodyPr wrap="square">
-            <a:spAutoFit/>
-          </a:bodyPr>
-          <a:lstStyle/>
+              <a:t>  Dueno "1" --&gt; "0..*" Mascota: posee</a:t>
+            </a:r>
+          </a:p>
           <a:p>
             <a:pPr>
               <a:spcAft>
-                <a:spcPts val="371"/>
+                <a:spcPts val="314"/>
               </a:spcAft>
             </a:pPr>
             <a:r>
-              <a:rPr sz="1300" b="0" i="0">
+              <a:rPr sz="1100" b="0" i="0">
                 <a:solidFill>
                   <a:srgbClr val="FFFFFF"/>
                 </a:solidFill>
                 <a:latin typeface="Calibri"/>
               </a:rPr>
-              <a:t>  class Cita {</a:t>
+              <a:t/>
             </a:r>
           </a:p>
           <a:p>
             <a:pPr>
               <a:spcAft>
-                <a:spcPts val="371"/>
+                <a:spcPts val="314"/>
               </a:spcAft>
             </a:pPr>
             <a:r>
-              <a:rPr sz="1300" b="0" i="0">
+              <a:rPr sz="1100" b="0" i="0">
                 <a:solidFill>
                   <a:srgbClr val="FFFFFF"/>
                 </a:solidFill>
                 <a:latin typeface="Calibri"/>
               </a:rPr>
-              <a:t>    -fechaHora: DateTime</a:t>
+              <a:t>%% Complete con SUS clases. Lo que se califica: visibilidad (- privado,</a:t>
             </a:r>
           </a:p>
           <a:p>
             <a:pPr>
               <a:spcAft>
-                <a:spcPts val="371"/>
+                <a:spcPts val="314"/>
               </a:spcAft>
             </a:pPr>
             <a:r>
-              <a:rPr sz="1300" b="0" i="0">
+              <a:rPr sz="1100" b="0" i="0">
                 <a:solidFill>
                   <a:srgbClr val="FFFFFF"/>
                 </a:solidFill>
                 <a:latin typeface="Calibri"/>
               </a:rPr>
-              <a:t>    -estado: String</a:t>
-            </a:r>
-          </a:p>
-          <a:p>
-            <a:pPr>
-              <a:spcAft>
-                <a:spcPts val="371"/>
-              </a:spcAft>
-            </a:pPr>
-            <a:r>
-              <a:rPr sz="1300" b="0" i="0">
-                <a:solidFill>
-                  <a:srgbClr val="FFFFFF"/>
-                </a:solidFill>
-                <a:latin typeface="Calibri"/>
-              </a:rPr>
-              <a:t>    +reprogramar(nuevaFecha: DateTime): void</a:t>
-            </a:r>
-          </a:p>
-          <a:p>
-            <a:pPr>
-              <a:spcAft>
-                <a:spcPts val="371"/>
-              </a:spcAft>
-            </a:pPr>
-            <a:r>
-              <a:rPr sz="1300" b="0" i="0">
-                <a:solidFill>
-                  <a:srgbClr val="FFFFFF"/>
-                </a:solidFill>
-                <a:latin typeface="Calibri"/>
-              </a:rPr>
-              <a:t>  }</a:t>
-            </a:r>
-          </a:p>
-          <a:p>
-            <a:pPr>
-              <a:spcAft>
-                <a:spcPts val="371"/>
-              </a:spcAft>
-            </a:pPr>
-            <a:r>
-              <a:rPr sz="1300" b="0" i="0">
-                <a:solidFill>
-                  <a:srgbClr val="FFFFFF"/>
-                </a:solidFill>
-                <a:latin typeface="Calibri"/>
-              </a:rPr>
-              <a:t>  class Atencion {</a:t>
-            </a:r>
-          </a:p>
-          <a:p>
-            <a:pPr>
-              <a:spcAft>
-                <a:spcPts val="371"/>
-              </a:spcAft>
-            </a:pPr>
-            <a:r>
-              <a:rPr sz="1300" b="0" i="0">
-                <a:solidFill>
-                  <a:srgbClr val="FFFFFF"/>
-                </a:solidFill>
-                <a:latin typeface="Calibri"/>
-              </a:rPr>
-              <a:t>    -diagnostico: String</a:t>
-            </a:r>
-          </a:p>
-          <a:p>
-            <a:pPr>
-              <a:spcAft>
-                <a:spcPts val="371"/>
-              </a:spcAft>
-            </a:pPr>
-            <a:r>
-              <a:rPr sz="1300" b="0" i="0">
-                <a:solidFill>
-                  <a:srgbClr val="FFFFFF"/>
-                </a:solidFill>
-                <a:latin typeface="Calibri"/>
-              </a:rPr>
-              <a:t>    -tratamiento: String</a:t>
-            </a:r>
-          </a:p>
-          <a:p>
-            <a:pPr>
-              <a:spcAft>
-                <a:spcPts val="371"/>
-              </a:spcAft>
-            </a:pPr>
-            <a:r>
-              <a:rPr sz="1300" b="0" i="0">
-                <a:solidFill>
-                  <a:srgbClr val="FFFFFF"/>
-                </a:solidFill>
-                <a:latin typeface="Calibri"/>
-              </a:rPr>
-              <a:t>  }</a:t>
-            </a:r>
-          </a:p>
-          <a:p>
-            <a:pPr>
-              <a:spcAft>
-                <a:spcPts val="371"/>
-              </a:spcAft>
-            </a:pPr>
-            <a:r>
-              <a:rPr sz="1300" b="0" i="0">
-                <a:solidFill>
-                  <a:srgbClr val="FFFFFF"/>
-                </a:solidFill>
-                <a:latin typeface="Calibri"/>
-              </a:rPr>
-              <a:t>  Dueno "1" --&gt; "0..*" Mascota: es dueno de</a:t>
-            </a:r>
-          </a:p>
-          <a:p>
-            <a:pPr>
-              <a:spcAft>
-                <a:spcPts val="371"/>
-              </a:spcAft>
-            </a:pPr>
-            <a:r>
-              <a:rPr sz="1300" b="0" i="0">
-                <a:solidFill>
-                  <a:srgbClr val="FFFFFF"/>
-                </a:solidFill>
-                <a:latin typeface="Calibri"/>
-              </a:rPr>
-              <a:t>  Mascota "1" --&gt; "0..*" Cita: tiene agendada</a:t>
-            </a:r>
-          </a:p>
-          <a:p>
-            <a:pPr>
-              <a:spcAft>
-                <a:spcPts val="371"/>
-              </a:spcAft>
-            </a:pPr>
-            <a:r>
-              <a:rPr sz="1300" b="0" i="0">
-                <a:solidFill>
-                  <a:srgbClr val="FFFFFF"/>
-                </a:solidFill>
-                <a:latin typeface="Calibri"/>
-              </a:rPr>
-              <a:t>  Veterinario "1" --&gt; "0..*" Cita: atiende</a:t>
-            </a:r>
-          </a:p>
-          <a:p>
-            <a:pPr>
-              <a:spcAft>
-                <a:spcPts val="371"/>
-              </a:spcAft>
-            </a:pPr>
-            <a:r>
-              <a:rPr sz="1300" b="0" i="0">
-                <a:solidFill>
-                  <a:srgbClr val="FFFFFF"/>
-                </a:solidFill>
-                <a:latin typeface="Calibri"/>
-              </a:rPr>
-              <a:t>  Cita "1" --&gt; "0..1" Atencion: genera</a:t>
-            </a:r>
-          </a:p>
-        </p:txBody>
-      </p:sp>
-      <p:sp>
-        <p:nvSpPr>
-          <p:cNvPr id="10" name="TextBox 9"/>
-          <p:cNvSpPr txBox="1"/>
-          <p:nvPr/>
-        </p:nvSpPr>
-        <p:spPr>
-          <a:xfrm>
-            <a:off x="457200" y="6080760"/>
-            <a:ext cx="11277295" cy="320040"/>
-          </a:xfrm>
-          <a:prstGeom prst="rect">
-            <a:avLst/>
-          </a:prstGeom>
-          <a:noFill/>
-        </p:spPr>
-        <p:txBody>
-          <a:bodyPr wrap="square">
-            <a:spAutoFit/>
-          </a:bodyPr>
-          <a:lstStyle/>
-          <a:p>
-            <a:pPr algn="ctr"/>
-            <a:r>
-              <a:rPr sz="1200" b="0" i="1">
-                <a:solidFill>
-                  <a:srgbClr val="666666"/>
-                </a:solidFill>
-                <a:latin typeface="Calibri"/>
-              </a:rPr>
-              <a:t>Las multiplicidades son las que contestan las preguntas que el espanol deja abiertas: un dueno, muchas mascotas.</a:t>
-            </a:r>
-          </a:p>
-        </p:txBody>
-      </p:sp>
-      <p:sp>
-        <p:nvSpPr>
-          <p:cNvPr id="11" name="TextBox 10"/>
+              <a:t>%% + publico), TIPO de cada atributo, y multiplicidad en LOS DOS extremos.</a:t>
+            </a:r>
+          </a:p>
+        </p:txBody>
+      </p:sp>
+      <p:sp>
+        <p:nvSpPr>
+          <p:cNvPr id="9" name="TextBox 8"/>
           <p:cNvSpPr txBox="1"/>
           <p:nvPr/>
         </p:nvSpPr>
@@ -5008,21 +4792,141 @@
                 </a:solidFill>
                 <a:latin typeface="Calibri"/>
               </a:rPr>
-              <a:t>Demo del dia</a:t>
-            </a:r>
-          </a:p>
-        </p:txBody>
-      </p:sp>
-      <p:sp>
-        <p:nvSpPr>
-          <p:cNvPr id="5" name="TextBox 4"/>
+              <a:t>Lo que NO es una clase del dominio</a:t>
+            </a:r>
+          </a:p>
+        </p:txBody>
+      </p:sp>
+      <p:sp>
+        <p:nvSpPr>
+          <p:cNvPr id="5" name="Rounded Rectangle 4"/>
+          <p:cNvSpPr/>
+          <p:nvPr/>
+        </p:nvSpPr>
+        <p:spPr>
+          <a:xfrm>
+            <a:off x="457200" y="1261872"/>
+            <a:ext cx="11277295" cy="5093208"/>
+          </a:xfrm>
+          <a:prstGeom prst="roundRect">
+            <a:avLst>
+              <a:gd name="adj" fmla="val 12000"/>
+            </a:avLst>
+          </a:prstGeom>
+          <a:solidFill>
+            <a:srgbClr val="1E2A38"/>
+          </a:solidFill>
+          <a:ln>
+            <a:noFill/>
+          </a:ln>
+        </p:spPr>
+        <p:style>
+          <a:lnRef idx="1">
+            <a:schemeClr val="accent1"/>
+          </a:lnRef>
+          <a:fillRef idx="3">
+            <a:schemeClr val="accent1"/>
+          </a:fillRef>
+          <a:effectRef idx="2">
+            <a:schemeClr val="accent1"/>
+          </a:effectRef>
+          <a:fontRef idx="minor">
+            <a:schemeClr val="lt1"/>
+          </a:fontRef>
+        </p:style>
+        <p:txBody>
+          <a:bodyPr rtlCol="0" anchor="ctr"/>
+          <a:lstStyle/>
+          <a:p>
+            <a:pPr algn="ctr"/>
+          </a:p>
+        </p:txBody>
+      </p:sp>
+      <p:sp>
+        <p:nvSpPr>
+          <p:cNvPr id="6" name="Rectangle 5"/>
+          <p:cNvSpPr/>
+          <p:nvPr/>
+        </p:nvSpPr>
+        <p:spPr>
+          <a:xfrm>
+            <a:off x="457200" y="1261872"/>
+            <a:ext cx="11277295" cy="320040"/>
+          </a:xfrm>
+          <a:prstGeom prst="rect">
+            <a:avLst/>
+          </a:prstGeom>
+          <a:solidFill>
+            <a:srgbClr val="095292"/>
+          </a:solidFill>
+          <a:ln>
+            <a:noFill/>
+          </a:ln>
+        </p:spPr>
+        <p:style>
+          <a:lnRef idx="1">
+            <a:schemeClr val="accent1"/>
+          </a:lnRef>
+          <a:fillRef idx="3">
+            <a:schemeClr val="accent1"/>
+          </a:fillRef>
+          <a:effectRef idx="2">
+            <a:schemeClr val="accent1"/>
+          </a:effectRef>
+          <a:fontRef idx="minor">
+            <a:schemeClr val="lt1"/>
+          </a:fontRef>
+        </p:style>
+        <p:txBody>
+          <a:bodyPr rtlCol="0" anchor="ctr"/>
+          <a:lstStyle/>
+          <a:p>
+            <a:pPr algn="ctr"/>
+          </a:p>
+        </p:txBody>
+      </p:sp>
+      <p:sp>
+        <p:nvSpPr>
+          <p:cNvPr id="7" name="TextBox 6"/>
           <p:cNvSpPr txBox="1"/>
           <p:nvPr/>
         </p:nvSpPr>
         <p:spPr>
           <a:xfrm>
-            <a:off x="457200" y="1170432"/>
-            <a:ext cx="11277295" cy="5230368"/>
+            <a:off x="685800" y="1307592"/>
+            <a:ext cx="10820095" cy="256032"/>
+          </a:xfrm>
+          <a:prstGeom prst="rect">
+            <a:avLst/>
+          </a:prstGeom>
+          <a:noFill/>
+        </p:spPr>
+        <p:txBody>
+          <a:bodyPr wrap="square" anchor="ctr"/>
+          <a:lstStyle/>
+          <a:p>
+            <a:r>
+              <a:rPr sz="1000" b="1" i="0">
+                <a:solidFill>
+                  <a:srgbClr val="269CCB"/>
+                </a:solidFill>
+                <a:latin typeface="Calibri"/>
+              </a:rPr>
+              <a:t>● ● ●</a:t>
+            </a:r>
+          </a:p>
+        </p:txBody>
+      </p:sp>
+      <p:sp>
+        <p:nvSpPr>
+          <p:cNvPr id="8" name="TextBox 7"/>
+          <p:cNvSpPr txBox="1"/>
+          <p:nvPr/>
+        </p:nvSpPr>
+        <p:spPr>
+          <a:xfrm>
+            <a:off x="777240" y="1719072"/>
+            <a:ext cx="10637215" cy="4453128"/>
           </a:xfrm>
           <a:prstGeom prst="rect">
             <a:avLst/>
@@ -5037,92 +4941,200 @@
           <a:p>
             <a:pPr>
               <a:spcAft>
-                <a:spcPts val="800"/>
+                <a:spcPts val="400"/>
               </a:spcAft>
             </a:pPr>
             <a:r>
-              <a:rPr sz="2000" b="0" i="0">
-                <a:solidFill>
-                  <a:srgbClr val="333333"/>
-                </a:solidFill>
-                <a:latin typeface="Calibri"/>
-              </a:rPr>
-              <a:t>–   </a:t>
-            </a:r>
-            <a:r>
-              <a:rPr sz="2000" b="1" i="0">
-                <a:solidFill>
-                  <a:srgbClr val="333333"/>
-                </a:solidFill>
-                <a:latin typeface="Calibri"/>
-              </a:rPr>
-              <a:t>Herramienta:</a:t>
-            </a:r>
-            <a:r>
-              <a:rPr sz="2000" b="0" i="0">
-                <a:solidFill>
-                  <a:srgbClr val="333333"/>
-                </a:solidFill>
-                <a:latin typeface="Calibri"/>
-              </a:rPr>
-              <a:t> draw.io · Mermaid</a:t>
+              <a:rPr sz="1400" b="0" i="0">
+                <a:solidFill>
+                  <a:srgbClr val="FFFFFF"/>
+                </a:solidFill>
+                <a:latin typeface="Calibri"/>
+              </a:rPr>
+              <a:t>%% NO son clases del dominio, y es el error mas comun:</a:t>
             </a:r>
           </a:p>
           <a:p>
             <a:pPr>
               <a:spcAft>
-                <a:spcPts val="800"/>
+                <a:spcPts val="400"/>
               </a:spcAft>
             </a:pPr>
             <a:r>
-              <a:rPr sz="2000" b="0" i="0">
-                <a:solidFill>
-                  <a:srgbClr val="333333"/>
-                </a:solidFill>
-                <a:latin typeface="Calibri"/>
-              </a:rPr>
-              <a:t>–   </a:t>
-            </a:r>
-            <a:r>
-              <a:rPr sz="2000" b="1" i="0">
-                <a:solidFill>
-                  <a:srgbClr val="333333"/>
-                </a:solidFill>
-                <a:latin typeface="Calibri"/>
-              </a:rPr>
-              <a:t>Demo:</a:t>
-            </a:r>
-            <a:r>
-              <a:rPr sz="2000" b="0" i="0">
-                <a:solidFill>
-                  <a:srgbClr val="333333"/>
-                </a:solidFill>
-                <a:latin typeface="Calibri"/>
-              </a:rPr>
-              <a:t> El docente dibuja en vivo Dueno, Mascota y Cita en draw.io y borra tres atributos mal ubicados explicando a que clase pertenecen de verdad.</a:t>
+              <a:rPr sz="1400" b="0" i="0">
+                <a:solidFill>
+                  <a:srgbClr val="FFFFFF"/>
+                </a:solidFill>
+                <a:latin typeface="Calibri"/>
+              </a:rPr>
+              <a:t>%%   FormularioRegistroMascota   -&gt; es una PANTALLA (Clase 13)</a:t>
             </a:r>
           </a:p>
           <a:p>
             <a:pPr>
               <a:spcAft>
-                <a:spcPts val="800"/>
+                <a:spcPts val="400"/>
               </a:spcAft>
             </a:pPr>
             <a:r>
-              <a:rPr sz="2000" b="0" i="0">
-                <a:solidFill>
-                  <a:srgbClr val="333333"/>
-                </a:solidFill>
-                <a:latin typeface="Calibri"/>
-              </a:rPr>
-              <a:t>–   Mismo dominio VetCare — no otro ejemplo. Aqui se diseña, no se programa.</a:t>
-            </a:r>
-          </a:p>
-        </p:txBody>
-      </p:sp>
-      <p:sp>
-        <p:nvSpPr>
-          <p:cNvPr id="6" name="TextBox 5"/>
+              <a:rPr sz="1400" b="0" i="0">
+                <a:solidFill>
+                  <a:srgbClr val="FFFFFF"/>
+                </a:solidFill>
+                <a:latin typeface="Calibri"/>
+              </a:rPr>
+              <a:t>%%   ConexionBaseDatos           -&gt; es INFRAESTRUCTURA</a:t>
+            </a:r>
+          </a:p>
+          <a:p>
+            <a:pPr>
+              <a:spcAft>
+                <a:spcPts val="400"/>
+              </a:spcAft>
+            </a:pPr>
+            <a:r>
+              <a:rPr sz="1400" b="0" i="0">
+                <a:solidFill>
+                  <a:srgbClr val="FFFFFF"/>
+                </a:solidFill>
+                <a:latin typeface="Calibri"/>
+              </a:rPr>
+              <a:t>%%   GestorDeMascotas            -&gt; es un «gestor» que solo mueve datos</a:t>
+            </a:r>
+          </a:p>
+          <a:p>
+            <a:pPr>
+              <a:spcAft>
+                <a:spcPts val="400"/>
+              </a:spcAft>
+            </a:pPr>
+            <a:r>
+              <a:rPr sz="1400" b="0" i="0">
+                <a:solidFill>
+                  <a:srgbClr val="FFFFFF"/>
+                </a:solidFill>
+                <a:latin typeface="Calibri"/>
+              </a:rPr>
+              <a:t>%%   BotonGuardar                -&gt; es un control de interfaz</a:t>
+            </a:r>
+          </a:p>
+          <a:p>
+            <a:pPr>
+              <a:spcAft>
+                <a:spcPts val="400"/>
+              </a:spcAft>
+            </a:pPr>
+            <a:r>
+              <a:rPr sz="1400" b="0" i="0">
+                <a:solidFill>
+                  <a:srgbClr val="FFFFFF"/>
+                </a:solidFill>
+                <a:latin typeface="Calibri"/>
+              </a:rPr>
+              <a:t/>
+            </a:r>
+          </a:p>
+          <a:p>
+            <a:pPr>
+              <a:spcAft>
+                <a:spcPts val="400"/>
+              </a:spcAft>
+            </a:pPr>
+            <a:r>
+              <a:rPr sz="1400" b="0" i="0">
+                <a:solidFill>
+                  <a:srgbClr val="FFFFFF"/>
+                </a:solidFill>
+                <a:latin typeface="Calibri"/>
+              </a:rPr>
+              <a:t>%% SI son clases del dominio: los sustantivos que el CLIENTE nombra y</a:t>
+            </a:r>
+          </a:p>
+          <a:p>
+            <a:pPr>
+              <a:spcAft>
+                <a:spcPts val="400"/>
+              </a:spcAft>
+            </a:pPr>
+            <a:r>
+              <a:rPr sz="1400" b="0" i="0">
+                <a:solidFill>
+                  <a:srgbClr val="FFFFFF"/>
+                </a:solidFill>
+                <a:latin typeface="Calibri"/>
+              </a:rPr>
+              <a:t>%% que tienen estado propio y reglas propias.</a:t>
+            </a:r>
+          </a:p>
+          <a:p>
+            <a:pPr>
+              <a:spcAft>
+                <a:spcPts val="400"/>
+              </a:spcAft>
+            </a:pPr>
+            <a:r>
+              <a:rPr sz="1400" b="0" i="0">
+                <a:solidFill>
+                  <a:srgbClr val="FFFFFF"/>
+                </a:solidFill>
+                <a:latin typeface="Calibri"/>
+              </a:rPr>
+              <a:t>%%   Dueno, Mascota, Cita, Veterinario, Consulta, Factura</a:t>
+            </a:r>
+          </a:p>
+          <a:p>
+            <a:pPr>
+              <a:spcAft>
+                <a:spcPts val="400"/>
+              </a:spcAft>
+            </a:pPr>
+            <a:r>
+              <a:rPr sz="1400" b="0" i="0">
+                <a:solidFill>
+                  <a:srgbClr val="FFFFFF"/>
+                </a:solidFill>
+                <a:latin typeface="Calibri"/>
+              </a:rPr>
+              <a:t/>
+            </a:r>
+          </a:p>
+          <a:p>
+            <a:pPr>
+              <a:spcAft>
+                <a:spcPts val="400"/>
+              </a:spcAft>
+            </a:pPr>
+            <a:r>
+              <a:rPr sz="1400" b="0" i="0">
+                <a:solidFill>
+                  <a:srgbClr val="FFFFFF"/>
+                </a:solidFill>
+                <a:latin typeface="Calibri"/>
+              </a:rPr>
+              <a:t>%% La prueba: si el sistema no existiera, la clinica seguiria hablando</a:t>
+            </a:r>
+          </a:p>
+          <a:p>
+            <a:pPr>
+              <a:spcAft>
+                <a:spcPts val="400"/>
+              </a:spcAft>
+            </a:pPr>
+            <a:r>
+              <a:rPr sz="1400" b="0" i="0">
+                <a:solidFill>
+                  <a:srgbClr val="FFFFFF"/>
+                </a:solidFill>
+                <a:latin typeface="Calibri"/>
+              </a:rPr>
+              <a:t>%% de «la mascota» y «la cita». De «GestorDeMascotas» no.</a:t>
+            </a:r>
+          </a:p>
+        </p:txBody>
+      </p:sp>
+      <p:sp>
+        <p:nvSpPr>
+          <p:cNvPr id="9" name="TextBox 8"/>
           <p:cNvSpPr txBox="1"/>
           <p:nvPr/>
         </p:nvSpPr>
@@ -5190,7 +5202,7 @@
         <p:spPr>
           <a:xfrm>
             <a:off x="0" y="0"/>
-            <a:ext cx="12191695" cy="1170432"/>
+            <a:ext cx="12191695" cy="960120"/>
           </a:xfrm>
           <a:prstGeom prst="rect">
             <a:avLst/>
@@ -5232,7 +5244,7 @@
         </p:nvSpPr>
         <p:spPr>
           <a:xfrm>
-            <a:off x="0" y="1170432"/>
+            <a:off x="0" y="960120"/>
             <a:ext cx="12191695" cy="41148"/>
           </a:xfrm>
           <a:prstGeom prst="rect">
@@ -5276,7 +5288,7 @@
         <p:spPr>
           <a:xfrm>
             <a:off x="457200" y="164592"/>
-            <a:ext cx="11277295" cy="384048"/>
+            <a:ext cx="11277295" cy="502920"/>
           </a:xfrm>
           <a:prstGeom prst="rect">
             <a:avLst/>
@@ -5296,55 +5308,21 @@
                 </a:solidFill>
                 <a:latin typeface="Calibri"/>
               </a:rPr>
-              <a:t>Herramientas de hoy</a:t>
-            </a:r>
-          </a:p>
-        </p:txBody>
-      </p:sp>
-      <p:sp>
-        <p:nvSpPr>
-          <p:cNvPr id="5" name="TextBox 4"/>
-          <p:cNvSpPr txBox="1"/>
-          <p:nvPr/>
-        </p:nvSpPr>
-        <p:spPr>
-          <a:xfrm>
-            <a:off x="457200" y="566928"/>
-            <a:ext cx="11277295" cy="411480"/>
-          </a:xfrm>
-          <a:prstGeom prst="rect">
-            <a:avLst/>
-          </a:prstGeom>
-          <a:noFill/>
-        </p:spPr>
-        <p:txBody>
-          <a:bodyPr wrap="square">
-            <a:spAutoFit/>
-          </a:bodyPr>
-          <a:lstStyle/>
-          <a:p>
-            <a:r>
-              <a:rPr sz="1400" b="0" i="0">
-                <a:solidFill>
-                  <a:srgbClr val="B8D8EE"/>
-                </a:solidFill>
-                <a:latin typeface="Calibri"/>
-              </a:rPr>
-              <a:t>Gratis · funcionan en el navegador</a:t>
-            </a:r>
-          </a:p>
-        </p:txBody>
-      </p:sp>
-      <p:sp>
-        <p:nvSpPr>
-          <p:cNvPr id="6" name="Rounded Rectangle 5"/>
+              <a:t>Modelo de dominio de VetCare en sintaxis Mermaid (diagrama, no codigo)</a:t>
+            </a:r>
+          </a:p>
+        </p:txBody>
+      </p:sp>
+      <p:sp>
+        <p:nvSpPr>
+          <p:cNvPr id="5" name="Rounded Rectangle 4"/>
           <p:cNvSpPr/>
           <p:nvPr/>
         </p:nvSpPr>
         <p:spPr>
           <a:xfrm>
-            <a:off x="457200" y="1591056"/>
-            <a:ext cx="3624986" cy="2331720"/>
+            <a:off x="457200" y="1261872"/>
+            <a:ext cx="11277295" cy="4773168"/>
           </a:xfrm>
           <a:prstGeom prst="roundRect">
             <a:avLst>
@@ -5352,7 +5330,7 @@
             </a:avLst>
           </a:prstGeom>
           <a:solidFill>
-            <a:srgbClr val="F2F2F2"/>
+            <a:srgbClr val="1E2A38"/>
           </a:solidFill>
           <a:ln>
             <a:noFill/>
@@ -5382,14 +5360,14 @@
       </p:sp>
       <p:sp>
         <p:nvSpPr>
-          <p:cNvPr id="7" name="Rectangle 6"/>
+          <p:cNvPr id="6" name="Rectangle 5"/>
           <p:cNvSpPr/>
           <p:nvPr/>
         </p:nvSpPr>
         <p:spPr>
           <a:xfrm>
-            <a:off x="457200" y="1591056"/>
-            <a:ext cx="3624986" cy="64008"/>
+            <a:off x="457200" y="1261872"/>
+            <a:ext cx="11277295" cy="320040"/>
           </a:xfrm>
           <a:prstGeom prst="rect">
             <a:avLst/>
@@ -5425,71 +5403,546 @@
       </p:sp>
       <p:sp>
         <p:nvSpPr>
-          <p:cNvPr id="8" name="Rectangle 7"/>
-          <p:cNvSpPr/>
-          <p:nvPr/>
-        </p:nvSpPr>
-        <p:spPr>
-          <a:xfrm>
-            <a:off x="457200" y="1655064"/>
-            <a:ext cx="3624986" cy="27432"/>
-          </a:xfrm>
-          <a:prstGeom prst="rect">
-            <a:avLst/>
-          </a:prstGeom>
-          <a:solidFill>
-            <a:srgbClr val="FFD000"/>
-          </a:solidFill>
-          <a:ln>
-            <a:noFill/>
-          </a:ln>
-        </p:spPr>
-        <p:style>
-          <a:lnRef idx="1">
-            <a:schemeClr val="accent1"/>
-          </a:lnRef>
-          <a:fillRef idx="3">
-            <a:schemeClr val="accent1"/>
-          </a:fillRef>
-          <a:effectRef idx="2">
-            <a:schemeClr val="accent1"/>
-          </a:effectRef>
-          <a:fontRef idx="minor">
-            <a:schemeClr val="lt1"/>
-          </a:fontRef>
-        </p:style>
-        <p:txBody>
-          <a:bodyPr rtlCol="0" anchor="ctr"/>
-          <a:lstStyle/>
-          <a:p>
-            <a:pPr algn="ctr"/>
-          </a:p>
-        </p:txBody>
-      </p:sp>
-      <p:pic>
-        <p:nvPicPr>
-          <p:cNvPr id="9" name="Picture 8" descr="drawio.png"/>
-          <p:cNvPicPr>
-            <a:picLocks noChangeAspect="1"/>
-          </p:cNvPicPr>
-          <p:nvPr/>
-        </p:nvPicPr>
-        <p:blipFill>
-          <a:blip r:embed="rId2"/>
-          <a:stretch>
-            <a:fillRect/>
-          </a:stretch>
-        </p:blipFill>
-        <p:spPr>
-          <a:xfrm>
-            <a:off x="1643329" y="1847087"/>
-            <a:ext cx="1252728" cy="1252728"/>
-          </a:xfrm>
-          <a:prstGeom prst="rect">
-            <a:avLst/>
-          </a:prstGeom>
-        </p:spPr>
-      </p:pic>
+          <p:cNvPr id="7" name="TextBox 6"/>
+          <p:cNvSpPr txBox="1"/>
+          <p:nvPr/>
+        </p:nvSpPr>
+        <p:spPr>
+          <a:xfrm>
+            <a:off x="685800" y="1307592"/>
+            <a:ext cx="10820095" cy="256032"/>
+          </a:xfrm>
+          <a:prstGeom prst="rect">
+            <a:avLst/>
+          </a:prstGeom>
+          <a:noFill/>
+        </p:spPr>
+        <p:txBody>
+          <a:bodyPr wrap="square" anchor="ctr"/>
+          <a:lstStyle/>
+          <a:p>
+            <a:r>
+              <a:rPr sz="1000" b="1" i="0">
+                <a:solidFill>
+                  <a:srgbClr val="269CCB"/>
+                </a:solidFill>
+                <a:latin typeface="Calibri"/>
+              </a:rPr>
+              <a:t>● ● ●</a:t>
+            </a:r>
+          </a:p>
+        </p:txBody>
+      </p:sp>
+      <p:sp>
+        <p:nvSpPr>
+          <p:cNvPr id="8" name="TextBox 7"/>
+          <p:cNvSpPr txBox="1"/>
+          <p:nvPr/>
+        </p:nvSpPr>
+        <p:spPr>
+          <a:xfrm>
+            <a:off x="777240" y="1719072"/>
+            <a:ext cx="5181447" cy="4133087"/>
+          </a:xfrm>
+          <a:prstGeom prst="rect">
+            <a:avLst/>
+          </a:prstGeom>
+          <a:noFill/>
+        </p:spPr>
+        <p:txBody>
+          <a:bodyPr wrap="square">
+            <a:spAutoFit/>
+          </a:bodyPr>
+          <a:lstStyle/>
+          <a:p>
+            <a:pPr>
+              <a:spcAft>
+                <a:spcPts val="371"/>
+              </a:spcAft>
+            </a:pPr>
+            <a:r>
+              <a:rPr sz="1300" b="0" i="0">
+                <a:solidFill>
+                  <a:srgbClr val="FFFFFF"/>
+                </a:solidFill>
+                <a:latin typeface="Calibri"/>
+              </a:rPr>
+              <a:t>classDiagram</a:t>
+            </a:r>
+          </a:p>
+          <a:p>
+            <a:pPr>
+              <a:spcAft>
+                <a:spcPts val="371"/>
+              </a:spcAft>
+            </a:pPr>
+            <a:r>
+              <a:rPr sz="1300" b="0" i="0">
+                <a:solidFill>
+                  <a:srgbClr val="FFFFFF"/>
+                </a:solidFill>
+                <a:latin typeface="Calibri"/>
+              </a:rPr>
+              <a:t>  class Dueno {</a:t>
+            </a:r>
+          </a:p>
+          <a:p>
+            <a:pPr>
+              <a:spcAft>
+                <a:spcPts val="371"/>
+              </a:spcAft>
+            </a:pPr>
+            <a:r>
+              <a:rPr sz="1300" b="0" i="0">
+                <a:solidFill>
+                  <a:srgbClr val="FFFFFF"/>
+                </a:solidFill>
+                <a:latin typeface="Calibri"/>
+              </a:rPr>
+              <a:t>    -documento: String</a:t>
+            </a:r>
+          </a:p>
+          <a:p>
+            <a:pPr>
+              <a:spcAft>
+                <a:spcPts val="371"/>
+              </a:spcAft>
+            </a:pPr>
+            <a:r>
+              <a:rPr sz="1300" b="0" i="0">
+                <a:solidFill>
+                  <a:srgbClr val="FFFFFF"/>
+                </a:solidFill>
+                <a:latin typeface="Calibri"/>
+              </a:rPr>
+              <a:t>    -nombre: String</a:t>
+            </a:r>
+          </a:p>
+          <a:p>
+            <a:pPr>
+              <a:spcAft>
+                <a:spcPts val="371"/>
+              </a:spcAft>
+            </a:pPr>
+            <a:r>
+              <a:rPr sz="1300" b="0" i="0">
+                <a:solidFill>
+                  <a:srgbClr val="FFFFFF"/>
+                </a:solidFill>
+                <a:latin typeface="Calibri"/>
+              </a:rPr>
+              <a:t>    +registrarMascota(m: Mascota): void</a:t>
+            </a:r>
+          </a:p>
+          <a:p>
+            <a:pPr>
+              <a:spcAft>
+                <a:spcPts val="371"/>
+              </a:spcAft>
+            </a:pPr>
+            <a:r>
+              <a:rPr sz="1300" b="0" i="0">
+                <a:solidFill>
+                  <a:srgbClr val="FFFFFF"/>
+                </a:solidFill>
+                <a:latin typeface="Calibri"/>
+              </a:rPr>
+              <a:t>  }</a:t>
+            </a:r>
+          </a:p>
+          <a:p>
+            <a:pPr>
+              <a:spcAft>
+                <a:spcPts val="371"/>
+              </a:spcAft>
+            </a:pPr>
+            <a:r>
+              <a:rPr sz="1300" b="0" i="0">
+                <a:solidFill>
+                  <a:srgbClr val="FFFFFF"/>
+                </a:solidFill>
+                <a:latin typeface="Calibri"/>
+              </a:rPr>
+              <a:t>  class Mascota {</a:t>
+            </a:r>
+          </a:p>
+          <a:p>
+            <a:pPr>
+              <a:spcAft>
+                <a:spcPts val="371"/>
+              </a:spcAft>
+            </a:pPr>
+            <a:r>
+              <a:rPr sz="1300" b="0" i="0">
+                <a:solidFill>
+                  <a:srgbClr val="FFFFFF"/>
+                </a:solidFill>
+                <a:latin typeface="Calibri"/>
+              </a:rPr>
+              <a:t>    -codigo: String</a:t>
+            </a:r>
+          </a:p>
+          <a:p>
+            <a:pPr>
+              <a:spcAft>
+                <a:spcPts val="371"/>
+              </a:spcAft>
+            </a:pPr>
+            <a:r>
+              <a:rPr sz="1300" b="0" i="0">
+                <a:solidFill>
+                  <a:srgbClr val="FFFFFF"/>
+                </a:solidFill>
+                <a:latin typeface="Calibri"/>
+              </a:rPr>
+              <a:t>    -especie: String</a:t>
+            </a:r>
+          </a:p>
+          <a:p>
+            <a:pPr>
+              <a:spcAft>
+                <a:spcPts val="371"/>
+              </a:spcAft>
+            </a:pPr>
+            <a:r>
+              <a:rPr sz="1300" b="0" i="0">
+                <a:solidFill>
+                  <a:srgbClr val="FFFFFF"/>
+                </a:solidFill>
+                <a:latin typeface="Calibri"/>
+              </a:rPr>
+              <a:t>    -fechaNacimiento: Date</a:t>
+            </a:r>
+          </a:p>
+          <a:p>
+            <a:pPr>
+              <a:spcAft>
+                <a:spcPts val="371"/>
+              </a:spcAft>
+            </a:pPr>
+            <a:r>
+              <a:rPr sz="1300" b="0" i="0">
+                <a:solidFill>
+                  <a:srgbClr val="FFFFFF"/>
+                </a:solidFill>
+                <a:latin typeface="Calibri"/>
+              </a:rPr>
+              <a:t>    +calcularEdad(): int</a:t>
+            </a:r>
+          </a:p>
+          <a:p>
+            <a:pPr>
+              <a:spcAft>
+                <a:spcPts val="371"/>
+              </a:spcAft>
+            </a:pPr>
+            <a:r>
+              <a:rPr sz="1300" b="0" i="0">
+                <a:solidFill>
+                  <a:srgbClr val="FFFFFF"/>
+                </a:solidFill>
+                <a:latin typeface="Calibri"/>
+              </a:rPr>
+              <a:t>  }</a:t>
+            </a:r>
+          </a:p>
+          <a:p>
+            <a:pPr>
+              <a:spcAft>
+                <a:spcPts val="371"/>
+              </a:spcAft>
+            </a:pPr>
+            <a:r>
+              <a:rPr sz="1300" b="0" i="0">
+                <a:solidFill>
+                  <a:srgbClr val="FFFFFF"/>
+                </a:solidFill>
+                <a:latin typeface="Calibri"/>
+              </a:rPr>
+              <a:t>  class Veterinario {</a:t>
+            </a:r>
+          </a:p>
+          <a:p>
+            <a:pPr>
+              <a:spcAft>
+                <a:spcPts val="371"/>
+              </a:spcAft>
+            </a:pPr>
+            <a:r>
+              <a:rPr sz="1300" b="0" i="0">
+                <a:solidFill>
+                  <a:srgbClr val="FFFFFF"/>
+                </a:solidFill>
+                <a:latin typeface="Calibri"/>
+              </a:rPr>
+              <a:t>    -tarjetaProfesional: String</a:t>
+            </a:r>
+          </a:p>
+          <a:p>
+            <a:pPr>
+              <a:spcAft>
+                <a:spcPts val="371"/>
+              </a:spcAft>
+            </a:pPr>
+            <a:r>
+              <a:rPr sz="1300" b="0" i="0">
+                <a:solidFill>
+                  <a:srgbClr val="FFFFFF"/>
+                </a:solidFill>
+                <a:latin typeface="Calibri"/>
+              </a:rPr>
+              <a:t>    -especialidad: String</a:t>
+            </a:r>
+          </a:p>
+          <a:p>
+            <a:pPr>
+              <a:spcAft>
+                <a:spcPts val="371"/>
+              </a:spcAft>
+            </a:pPr>
+            <a:r>
+              <a:rPr sz="1300" b="0" i="0">
+                <a:solidFill>
+                  <a:srgbClr val="FFFFFF"/>
+                </a:solidFill>
+                <a:latin typeface="Calibri"/>
+              </a:rPr>
+              <a:t>  }</a:t>
+            </a:r>
+          </a:p>
+        </p:txBody>
+      </p:sp>
+      <p:sp>
+        <p:nvSpPr>
+          <p:cNvPr id="9" name="TextBox 8"/>
+          <p:cNvSpPr txBox="1"/>
+          <p:nvPr/>
+        </p:nvSpPr>
+        <p:spPr>
+          <a:xfrm>
+            <a:off x="6233007" y="1719072"/>
+            <a:ext cx="5181447" cy="4133087"/>
+          </a:xfrm>
+          <a:prstGeom prst="rect">
+            <a:avLst/>
+          </a:prstGeom>
+          <a:noFill/>
+        </p:spPr>
+        <p:txBody>
+          <a:bodyPr wrap="square">
+            <a:spAutoFit/>
+          </a:bodyPr>
+          <a:lstStyle/>
+          <a:p>
+            <a:pPr>
+              <a:spcAft>
+                <a:spcPts val="371"/>
+              </a:spcAft>
+            </a:pPr>
+            <a:r>
+              <a:rPr sz="1300" b="0" i="0">
+                <a:solidFill>
+                  <a:srgbClr val="FFFFFF"/>
+                </a:solidFill>
+                <a:latin typeface="Calibri"/>
+              </a:rPr>
+              <a:t>  class Cita {</a:t>
+            </a:r>
+          </a:p>
+          <a:p>
+            <a:pPr>
+              <a:spcAft>
+                <a:spcPts val="371"/>
+              </a:spcAft>
+            </a:pPr>
+            <a:r>
+              <a:rPr sz="1300" b="0" i="0">
+                <a:solidFill>
+                  <a:srgbClr val="FFFFFF"/>
+                </a:solidFill>
+                <a:latin typeface="Calibri"/>
+              </a:rPr>
+              <a:t>    -fechaHora: DateTime</a:t>
+            </a:r>
+          </a:p>
+          <a:p>
+            <a:pPr>
+              <a:spcAft>
+                <a:spcPts val="371"/>
+              </a:spcAft>
+            </a:pPr>
+            <a:r>
+              <a:rPr sz="1300" b="0" i="0">
+                <a:solidFill>
+                  <a:srgbClr val="FFFFFF"/>
+                </a:solidFill>
+                <a:latin typeface="Calibri"/>
+              </a:rPr>
+              <a:t>    -estado: String</a:t>
+            </a:r>
+          </a:p>
+          <a:p>
+            <a:pPr>
+              <a:spcAft>
+                <a:spcPts val="371"/>
+              </a:spcAft>
+            </a:pPr>
+            <a:r>
+              <a:rPr sz="1300" b="0" i="0">
+                <a:solidFill>
+                  <a:srgbClr val="FFFFFF"/>
+                </a:solidFill>
+                <a:latin typeface="Calibri"/>
+              </a:rPr>
+              <a:t>    +reprogramar(nuevaFecha: DateTime): void</a:t>
+            </a:r>
+          </a:p>
+          <a:p>
+            <a:pPr>
+              <a:spcAft>
+                <a:spcPts val="371"/>
+              </a:spcAft>
+            </a:pPr>
+            <a:r>
+              <a:rPr sz="1300" b="0" i="0">
+                <a:solidFill>
+                  <a:srgbClr val="FFFFFF"/>
+                </a:solidFill>
+                <a:latin typeface="Calibri"/>
+              </a:rPr>
+              <a:t>  }</a:t>
+            </a:r>
+          </a:p>
+          <a:p>
+            <a:pPr>
+              <a:spcAft>
+                <a:spcPts val="371"/>
+              </a:spcAft>
+            </a:pPr>
+            <a:r>
+              <a:rPr sz="1300" b="0" i="0">
+                <a:solidFill>
+                  <a:srgbClr val="FFFFFF"/>
+                </a:solidFill>
+                <a:latin typeface="Calibri"/>
+              </a:rPr>
+              <a:t>  class Atencion {</a:t>
+            </a:r>
+          </a:p>
+          <a:p>
+            <a:pPr>
+              <a:spcAft>
+                <a:spcPts val="371"/>
+              </a:spcAft>
+            </a:pPr>
+            <a:r>
+              <a:rPr sz="1300" b="0" i="0">
+                <a:solidFill>
+                  <a:srgbClr val="FFFFFF"/>
+                </a:solidFill>
+                <a:latin typeface="Calibri"/>
+              </a:rPr>
+              <a:t>    -diagnostico: String</a:t>
+            </a:r>
+          </a:p>
+          <a:p>
+            <a:pPr>
+              <a:spcAft>
+                <a:spcPts val="371"/>
+              </a:spcAft>
+            </a:pPr>
+            <a:r>
+              <a:rPr sz="1300" b="0" i="0">
+                <a:solidFill>
+                  <a:srgbClr val="FFFFFF"/>
+                </a:solidFill>
+                <a:latin typeface="Calibri"/>
+              </a:rPr>
+              <a:t>    -tratamiento: String</a:t>
+            </a:r>
+          </a:p>
+          <a:p>
+            <a:pPr>
+              <a:spcAft>
+                <a:spcPts val="371"/>
+              </a:spcAft>
+            </a:pPr>
+            <a:r>
+              <a:rPr sz="1300" b="0" i="0">
+                <a:solidFill>
+                  <a:srgbClr val="FFFFFF"/>
+                </a:solidFill>
+                <a:latin typeface="Calibri"/>
+              </a:rPr>
+              <a:t>  }</a:t>
+            </a:r>
+          </a:p>
+          <a:p>
+            <a:pPr>
+              <a:spcAft>
+                <a:spcPts val="371"/>
+              </a:spcAft>
+            </a:pPr>
+            <a:r>
+              <a:rPr sz="1300" b="0" i="0">
+                <a:solidFill>
+                  <a:srgbClr val="FFFFFF"/>
+                </a:solidFill>
+                <a:latin typeface="Calibri"/>
+              </a:rPr>
+              <a:t>  Dueno "1" --&gt; "0..*" Mascota: es dueno de</a:t>
+            </a:r>
+          </a:p>
+          <a:p>
+            <a:pPr>
+              <a:spcAft>
+                <a:spcPts val="371"/>
+              </a:spcAft>
+            </a:pPr>
+            <a:r>
+              <a:rPr sz="1300" b="0" i="0">
+                <a:solidFill>
+                  <a:srgbClr val="FFFFFF"/>
+                </a:solidFill>
+                <a:latin typeface="Calibri"/>
+              </a:rPr>
+              <a:t>  Mascota "1" --&gt; "0..*" Cita: tiene agendada</a:t>
+            </a:r>
+          </a:p>
+          <a:p>
+            <a:pPr>
+              <a:spcAft>
+                <a:spcPts val="371"/>
+              </a:spcAft>
+            </a:pPr>
+            <a:r>
+              <a:rPr sz="1300" b="0" i="0">
+                <a:solidFill>
+                  <a:srgbClr val="FFFFFF"/>
+                </a:solidFill>
+                <a:latin typeface="Calibri"/>
+              </a:rPr>
+              <a:t>  Veterinario "1" --&gt; "0..*" Cita: atiende</a:t>
+            </a:r>
+          </a:p>
+          <a:p>
+            <a:pPr>
+              <a:spcAft>
+                <a:spcPts val="371"/>
+              </a:spcAft>
+            </a:pPr>
+            <a:r>
+              <a:rPr sz="1300" b="0" i="0">
+                <a:solidFill>
+                  <a:srgbClr val="FFFFFF"/>
+                </a:solidFill>
+                <a:latin typeface="Calibri"/>
+              </a:rPr>
+              <a:t>  Cita "1" --&gt; "0..1" Atencion: genera</a:t>
+            </a:r>
+          </a:p>
+        </p:txBody>
+      </p:sp>
       <p:sp>
         <p:nvSpPr>
           <p:cNvPr id="10" name="TextBox 9"/>
@@ -5498,8 +5951,8 @@
         </p:nvSpPr>
         <p:spPr>
           <a:xfrm>
-            <a:off x="530352" y="3191256"/>
-            <a:ext cx="3478682" cy="621792"/>
+            <a:off x="457200" y="6080760"/>
+            <a:ext cx="11277295" cy="320040"/>
           </a:xfrm>
           <a:prstGeom prst="rect">
             <a:avLst/>
@@ -5507,449 +5960,27 @@
           <a:noFill/>
         </p:spPr>
         <p:txBody>
-          <a:bodyPr wrap="square" anchor="t"/>
+          <a:bodyPr wrap="square">
+            <a:spAutoFit/>
+          </a:bodyPr>
           <a:lstStyle/>
           <a:p>
             <a:pPr algn="ctr"/>
             <a:r>
-              <a:rPr sz="1300" b="1" i="0">
-                <a:solidFill>
-                  <a:srgbClr val="095292"/>
-                </a:solidFill>
-                <a:latin typeface="Calibri"/>
-              </a:rPr>
-              <a:t>Draw.Io</a:t>
-            </a:r>
-          </a:p>
-          <a:p>
-            <a:pPr algn="ctr">
-              <a:spcBef>
-                <a:spcPts val="200"/>
-              </a:spcBef>
-            </a:pPr>
-            <a:r>
-              <a:rPr sz="1000" b="0" i="0">
+              <a:rPr sz="1200" b="0" i="1">
                 <a:solidFill>
                   <a:srgbClr val="666666"/>
                 </a:solidFill>
                 <a:latin typeface="Calibri"/>
               </a:rPr>
-              <a:t>Diagramas UML y de contexto</a:t>
-            </a:r>
-          </a:p>
-        </p:txBody>
-      </p:sp>
-      <p:sp>
-        <p:nvSpPr>
-          <p:cNvPr id="11" name="Rounded Rectangle 10"/>
-          <p:cNvSpPr/>
-          <p:nvPr/>
-        </p:nvSpPr>
-        <p:spPr>
-          <a:xfrm>
-            <a:off x="4283354" y="1591056"/>
-            <a:ext cx="3624986" cy="2331720"/>
-          </a:xfrm>
-          <a:prstGeom prst="roundRect">
-            <a:avLst>
-              <a:gd name="adj" fmla="val 12000"/>
-            </a:avLst>
-          </a:prstGeom>
-          <a:solidFill>
-            <a:srgbClr val="F2F2F2"/>
-          </a:solidFill>
-          <a:ln>
-            <a:noFill/>
-          </a:ln>
-        </p:spPr>
-        <p:style>
-          <a:lnRef idx="1">
-            <a:schemeClr val="accent1"/>
-          </a:lnRef>
-          <a:fillRef idx="3">
-            <a:schemeClr val="accent1"/>
-          </a:fillRef>
-          <a:effectRef idx="2">
-            <a:schemeClr val="accent1"/>
-          </a:effectRef>
-          <a:fontRef idx="minor">
-            <a:schemeClr val="lt1"/>
-          </a:fontRef>
-        </p:style>
-        <p:txBody>
-          <a:bodyPr rtlCol="0" anchor="ctr"/>
-          <a:lstStyle/>
-          <a:p>
-            <a:pPr algn="ctr"/>
-          </a:p>
-        </p:txBody>
-      </p:sp>
-      <p:sp>
-        <p:nvSpPr>
-          <p:cNvPr id="12" name="Rectangle 11"/>
-          <p:cNvSpPr/>
-          <p:nvPr/>
-        </p:nvSpPr>
-        <p:spPr>
-          <a:xfrm>
-            <a:off x="4283354" y="1591056"/>
-            <a:ext cx="3624986" cy="64008"/>
-          </a:xfrm>
-          <a:prstGeom prst="rect">
-            <a:avLst/>
-          </a:prstGeom>
-          <a:solidFill>
-            <a:srgbClr val="095292"/>
-          </a:solidFill>
-          <a:ln>
-            <a:noFill/>
-          </a:ln>
-        </p:spPr>
-        <p:style>
-          <a:lnRef idx="1">
-            <a:schemeClr val="accent1"/>
-          </a:lnRef>
-          <a:fillRef idx="3">
-            <a:schemeClr val="accent1"/>
-          </a:fillRef>
-          <a:effectRef idx="2">
-            <a:schemeClr val="accent1"/>
-          </a:effectRef>
-          <a:fontRef idx="minor">
-            <a:schemeClr val="lt1"/>
-          </a:fontRef>
-        </p:style>
-        <p:txBody>
-          <a:bodyPr rtlCol="0" anchor="ctr"/>
-          <a:lstStyle/>
-          <a:p>
-            <a:pPr algn="ctr"/>
-          </a:p>
-        </p:txBody>
-      </p:sp>
-      <p:sp>
-        <p:nvSpPr>
-          <p:cNvPr id="13" name="Rectangle 12"/>
-          <p:cNvSpPr/>
-          <p:nvPr/>
-        </p:nvSpPr>
-        <p:spPr>
-          <a:xfrm>
-            <a:off x="4283354" y="1655064"/>
-            <a:ext cx="3624986" cy="27432"/>
-          </a:xfrm>
-          <a:prstGeom prst="rect">
-            <a:avLst/>
-          </a:prstGeom>
-          <a:solidFill>
-            <a:srgbClr val="FFD000"/>
-          </a:solidFill>
-          <a:ln>
-            <a:noFill/>
-          </a:ln>
-        </p:spPr>
-        <p:style>
-          <a:lnRef idx="1">
-            <a:schemeClr val="accent1"/>
-          </a:lnRef>
-          <a:fillRef idx="3">
-            <a:schemeClr val="accent1"/>
-          </a:fillRef>
-          <a:effectRef idx="2">
-            <a:schemeClr val="accent1"/>
-          </a:effectRef>
-          <a:fontRef idx="minor">
-            <a:schemeClr val="lt1"/>
-          </a:fontRef>
-        </p:style>
-        <p:txBody>
-          <a:bodyPr rtlCol="0" anchor="ctr"/>
-          <a:lstStyle/>
-          <a:p>
-            <a:pPr algn="ctr"/>
-          </a:p>
-        </p:txBody>
-      </p:sp>
-      <p:pic>
-        <p:nvPicPr>
-          <p:cNvPr id="14" name="Picture 13" descr="mermaid.png"/>
-          <p:cNvPicPr>
-            <a:picLocks noChangeAspect="1"/>
-          </p:cNvPicPr>
-          <p:nvPr/>
-        </p:nvPicPr>
-        <p:blipFill>
-          <a:blip r:embed="rId3"/>
-          <a:stretch>
-            <a:fillRect/>
-          </a:stretch>
-        </p:blipFill>
-        <p:spPr>
-          <a:xfrm>
-            <a:off x="5469483" y="1847087"/>
-            <a:ext cx="1252728" cy="1252728"/>
-          </a:xfrm>
-          <a:prstGeom prst="rect">
-            <a:avLst/>
-          </a:prstGeom>
-        </p:spPr>
-      </p:pic>
-      <p:sp>
-        <p:nvSpPr>
-          <p:cNvPr id="15" name="TextBox 14"/>
-          <p:cNvSpPr txBox="1"/>
-          <p:nvPr/>
-        </p:nvSpPr>
-        <p:spPr>
-          <a:xfrm>
-            <a:off x="4356506" y="3191256"/>
-            <a:ext cx="3478682" cy="621792"/>
-          </a:xfrm>
-          <a:prstGeom prst="rect">
-            <a:avLst/>
-          </a:prstGeom>
-          <a:noFill/>
-        </p:spPr>
-        <p:txBody>
-          <a:bodyPr wrap="square" anchor="t"/>
-          <a:lstStyle/>
-          <a:p>
-            <a:pPr algn="ctr"/>
-            <a:r>
-              <a:rPr sz="1300" b="1" i="0">
-                <a:solidFill>
-                  <a:srgbClr val="095292"/>
-                </a:solidFill>
-                <a:latin typeface="Calibri"/>
-              </a:rPr>
-              <a:t>Mermaid</a:t>
-            </a:r>
-          </a:p>
-          <a:p>
-            <a:pPr algn="ctr">
-              <a:spcBef>
-                <a:spcPts val="200"/>
-              </a:spcBef>
-            </a:pPr>
-            <a:r>
-              <a:rPr sz="1000" b="0" i="0">
-                <a:solidFill>
-                  <a:srgbClr val="666666"/>
-                </a:solidFill>
-                <a:latin typeface="Calibri"/>
-              </a:rPr>
-              <a:t>Diagramas como texto versionable</a:t>
-            </a:r>
-          </a:p>
-        </p:txBody>
-      </p:sp>
-      <p:sp>
-        <p:nvSpPr>
-          <p:cNvPr id="16" name="Rounded Rectangle 15"/>
-          <p:cNvSpPr/>
-          <p:nvPr/>
-        </p:nvSpPr>
-        <p:spPr>
-          <a:xfrm>
-            <a:off x="8109508" y="1591056"/>
-            <a:ext cx="3624986" cy="2331720"/>
-          </a:xfrm>
-          <a:prstGeom prst="roundRect">
-            <a:avLst>
-              <a:gd name="adj" fmla="val 12000"/>
-            </a:avLst>
-          </a:prstGeom>
-          <a:solidFill>
-            <a:srgbClr val="F2F2F2"/>
-          </a:solidFill>
-          <a:ln>
-            <a:noFill/>
-          </a:ln>
-        </p:spPr>
-        <p:style>
-          <a:lnRef idx="1">
-            <a:schemeClr val="accent1"/>
-          </a:lnRef>
-          <a:fillRef idx="3">
-            <a:schemeClr val="accent1"/>
-          </a:fillRef>
-          <a:effectRef idx="2">
-            <a:schemeClr val="accent1"/>
-          </a:effectRef>
-          <a:fontRef idx="minor">
-            <a:schemeClr val="lt1"/>
-          </a:fontRef>
-        </p:style>
-        <p:txBody>
-          <a:bodyPr rtlCol="0" anchor="ctr"/>
-          <a:lstStyle/>
-          <a:p>
-            <a:pPr algn="ctr"/>
-          </a:p>
-        </p:txBody>
-      </p:sp>
-      <p:sp>
-        <p:nvSpPr>
-          <p:cNvPr id="17" name="Rectangle 16"/>
-          <p:cNvSpPr/>
-          <p:nvPr/>
-        </p:nvSpPr>
-        <p:spPr>
-          <a:xfrm>
-            <a:off x="8109508" y="1591056"/>
-            <a:ext cx="3624986" cy="64008"/>
-          </a:xfrm>
-          <a:prstGeom prst="rect">
-            <a:avLst/>
-          </a:prstGeom>
-          <a:solidFill>
-            <a:srgbClr val="095292"/>
-          </a:solidFill>
-          <a:ln>
-            <a:noFill/>
-          </a:ln>
-        </p:spPr>
-        <p:style>
-          <a:lnRef idx="1">
-            <a:schemeClr val="accent1"/>
-          </a:lnRef>
-          <a:fillRef idx="3">
-            <a:schemeClr val="accent1"/>
-          </a:fillRef>
-          <a:effectRef idx="2">
-            <a:schemeClr val="accent1"/>
-          </a:effectRef>
-          <a:fontRef idx="minor">
-            <a:schemeClr val="lt1"/>
-          </a:fontRef>
-        </p:style>
-        <p:txBody>
-          <a:bodyPr rtlCol="0" anchor="ctr"/>
-          <a:lstStyle/>
-          <a:p>
-            <a:pPr algn="ctr"/>
-          </a:p>
-        </p:txBody>
-      </p:sp>
-      <p:sp>
-        <p:nvSpPr>
-          <p:cNvPr id="18" name="Rectangle 17"/>
-          <p:cNvSpPr/>
-          <p:nvPr/>
-        </p:nvSpPr>
-        <p:spPr>
-          <a:xfrm>
-            <a:off x="8109508" y="1655064"/>
-            <a:ext cx="3624986" cy="27432"/>
-          </a:xfrm>
-          <a:prstGeom prst="rect">
-            <a:avLst/>
-          </a:prstGeom>
-          <a:solidFill>
-            <a:srgbClr val="FFD000"/>
-          </a:solidFill>
-          <a:ln>
-            <a:noFill/>
-          </a:ln>
-        </p:spPr>
-        <p:style>
-          <a:lnRef idx="1">
-            <a:schemeClr val="accent1"/>
-          </a:lnRef>
-          <a:fillRef idx="3">
-            <a:schemeClr val="accent1"/>
-          </a:fillRef>
-          <a:effectRef idx="2">
-            <a:schemeClr val="accent1"/>
-          </a:effectRef>
-          <a:fontRef idx="minor">
-            <a:schemeClr val="lt1"/>
-          </a:fontRef>
-        </p:style>
-        <p:txBody>
-          <a:bodyPr rtlCol="0" anchor="ctr"/>
-          <a:lstStyle/>
-          <a:p>
-            <a:pPr algn="ctr"/>
-          </a:p>
-        </p:txBody>
-      </p:sp>
-      <p:pic>
-        <p:nvPicPr>
-          <p:cNvPr id="19" name="Picture 18" descr="examlab.png"/>
-          <p:cNvPicPr>
-            <a:picLocks noChangeAspect="1"/>
-          </p:cNvPicPr>
-          <p:nvPr/>
-        </p:nvPicPr>
-        <p:blipFill>
-          <a:blip r:embed="rId4"/>
-          <a:stretch>
-            <a:fillRect/>
-          </a:stretch>
-        </p:blipFill>
-        <p:spPr>
-          <a:xfrm>
-            <a:off x="9295638" y="1847087"/>
-            <a:ext cx="1252728" cy="1252728"/>
-          </a:xfrm>
-          <a:prstGeom prst="rect">
-            <a:avLst/>
-          </a:prstGeom>
-        </p:spPr>
-      </p:pic>
-      <p:sp>
-        <p:nvSpPr>
-          <p:cNvPr id="20" name="TextBox 19"/>
-          <p:cNvSpPr txBox="1"/>
-          <p:nvPr/>
-        </p:nvSpPr>
-        <p:spPr>
-          <a:xfrm>
-            <a:off x="8182660" y="3191256"/>
-            <a:ext cx="3478682" cy="621792"/>
-          </a:xfrm>
-          <a:prstGeom prst="rect">
-            <a:avLst/>
-          </a:prstGeom>
-          <a:noFill/>
-        </p:spPr>
-        <p:txBody>
-          <a:bodyPr wrap="square" anchor="t"/>
-          <a:lstStyle/>
-          <a:p>
-            <a:pPr algn="ctr"/>
-            <a:r>
-              <a:rPr sz="1300" b="1" i="0">
-                <a:solidFill>
-                  <a:srgbClr val="095292"/>
-                </a:solidFill>
-                <a:latin typeface="Calibri"/>
-              </a:rPr>
-              <a:t>la plataforma del curso</a:t>
-            </a:r>
-          </a:p>
-          <a:p>
-            <a:pPr algn="ctr">
-              <a:spcBef>
-                <a:spcPts val="200"/>
-              </a:spcBef>
-            </a:pPr>
-            <a:r>
-              <a:rPr sz="1000" b="0" i="0">
-                <a:solidFill>
-                  <a:srgbClr val="666666"/>
-                </a:solidFill>
-                <a:latin typeface="Calibri"/>
-              </a:rPr>
-              <a:t>Entrega del taller · en la fecha que indique el docente</a:t>
-            </a:r>
-          </a:p>
-        </p:txBody>
-      </p:sp>
-      <p:sp>
-        <p:nvSpPr>
-          <p:cNvPr id="21" name="TextBox 20"/>
+              <a:t>Las multiplicidades son las que contestan las preguntas que el espanol deja abiertas: un dueno, muchas mascotas.</a:t>
+            </a:r>
+          </a:p>
+        </p:txBody>
+      </p:sp>
+      <p:sp>
+        <p:nvSpPr>
+          <p:cNvPr id="11" name="TextBox 10"/>
           <p:cNvSpPr txBox="1"/>
           <p:nvPr/>
         </p:nvSpPr>
@@ -6123,7 +6154,7 @@
                 </a:solidFill>
                 <a:latin typeface="Calibri"/>
               </a:rPr>
-              <a:t>Taller PI — por que importa</a:t>
+              <a:t>Demo del dia</a:t>
             </a:r>
           </a:p>
         </p:txBody>
@@ -6171,7 +6202,7 @@
                 </a:solidFill>
                 <a:latin typeface="Calibri"/>
               </a:rPr>
-              <a:t>Por que importa al PI:</a:t>
+              <a:t>Herramienta:</a:t>
             </a:r>
             <a:r>
               <a:rPr sz="2000" b="0" i="0">
@@ -6180,7 +6211,7 @@
                 </a:solidFill>
                 <a:latin typeface="Calibri"/>
               </a:rPr>
-              <a:t> este diagrama de clases es el plano maestro de VetCare: de el salen el diccionario de datos, las tablas de la base de datos y las clases que se programan en Programacion II.</a:t>
+              <a:t> draw.io · Mermaid</a:t>
             </a:r>
           </a:p>
           <a:p>
@@ -6196,7 +6227,25 @@
                 </a:solidFill>
                 <a:latin typeface="Calibri"/>
               </a:rPr>
-              <a:t>–   Es el primer artefacto del curso que se lee igual en Cali, en Bogota o en Berlin, porque UML es un estandar y no una convencion del salon.</a:t>
+              <a:t>–   </a:t>
+            </a:r>
+            <a:r>
+              <a:rPr sz="2000" b="1" i="0">
+                <a:solidFill>
+                  <a:srgbClr val="333333"/>
+                </a:solidFill>
+                <a:latin typeface="Calibri"/>
+              </a:rPr>
+              <a:t>Demo:</a:t>
+            </a:r>
+            <a:r>
+              <a:rPr sz="2000" b="0" i="0">
+                <a:solidFill>
+                  <a:srgbClr val="333333"/>
+                </a:solidFill>
+                <a:latin typeface="Calibri"/>
+              </a:rPr>
+              <a:t> El docente dibuja en vivo Dueno, Mascota y Cita en draw.io y borra tres atributos mal ubicados explicando a que clase pertenecen de verdad.</a:t>
             </a:r>
           </a:p>
           <a:p>
@@ -6212,7 +6261,7 @@
                 </a:solidFill>
                 <a:latin typeface="Calibri"/>
               </a:rPr>
-              <a:t>–   Si una clase no puede rastrearse a un requisito o a una historia del backlog, sobra; y si un requisito no tiene donde vivir en el diagrama, falta una clase.</a:t>
+              <a:t>–   Mismo dominio VetCare — no otro ejemplo. Aqui se diseña, no se programa.</a:t>
             </a:r>
           </a:p>
         </p:txBody>
@@ -6287,7 +6336,7 @@
         <p:spPr>
           <a:xfrm>
             <a:off x="0" y="0"/>
-            <a:ext cx="12191695" cy="960120"/>
+            <a:ext cx="12191695" cy="1170432"/>
           </a:xfrm>
           <a:prstGeom prst="rect">
             <a:avLst/>
@@ -6329,7 +6378,7 @@
         </p:nvSpPr>
         <p:spPr>
           <a:xfrm>
-            <a:off x="0" y="960120"/>
+            <a:off x="0" y="1170432"/>
             <a:ext cx="12191695" cy="41148"/>
           </a:xfrm>
           <a:prstGeom prst="rect">
@@ -6373,7 +6422,7 @@
         <p:spPr>
           <a:xfrm>
             <a:off x="457200" y="164592"/>
-            <a:ext cx="11277295" cy="502920"/>
+            <a:ext cx="11277295" cy="384048"/>
           </a:xfrm>
           <a:prstGeom prst="rect">
             <a:avLst/>
@@ -6393,7 +6442,7 @@
                 </a:solidFill>
                 <a:latin typeface="Calibri"/>
               </a:rPr>
-              <a:t>Taller PI — punto de partida</a:t>
+              <a:t>Herramientas de hoy</a:t>
             </a:r>
           </a:p>
         </p:txBody>
@@ -6406,8 +6455,8 @@
         </p:nvSpPr>
         <p:spPr>
           <a:xfrm>
-            <a:off x="457200" y="1170432"/>
-            <a:ext cx="11277295" cy="5230368"/>
+            <a:off x="457200" y="566928"/>
+            <a:ext cx="11277295" cy="411480"/>
           </a:xfrm>
           <a:prstGeom prst="rect">
             <a:avLst/>
@@ -6420,58 +6469,633 @@
           </a:bodyPr>
           <a:lstStyle/>
           <a:p>
-            <a:pPr>
-              <a:spcAft>
-                <a:spcPts val="800"/>
-              </a:spcAft>
+            <a:r>
+              <a:rPr sz="1400" b="0" i="0">
+                <a:solidFill>
+                  <a:srgbClr val="B8D8EE"/>
+                </a:solidFill>
+                <a:latin typeface="Calibri"/>
+              </a:rPr>
+              <a:t>Gratis · funcionan en el navegador</a:t>
+            </a:r>
+          </a:p>
+        </p:txBody>
+      </p:sp>
+      <p:sp>
+        <p:nvSpPr>
+          <p:cNvPr id="6" name="Rounded Rectangle 5"/>
+          <p:cNvSpPr/>
+          <p:nvPr/>
+        </p:nvSpPr>
+        <p:spPr>
+          <a:xfrm>
+            <a:off x="457200" y="1591056"/>
+            <a:ext cx="3624986" cy="2331720"/>
+          </a:xfrm>
+          <a:prstGeom prst="roundRect">
+            <a:avLst>
+              <a:gd name="adj" fmla="val 12000"/>
+            </a:avLst>
+          </a:prstGeom>
+          <a:solidFill>
+            <a:srgbClr val="F2F2F2"/>
+          </a:solidFill>
+          <a:ln>
+            <a:noFill/>
+          </a:ln>
+        </p:spPr>
+        <p:style>
+          <a:lnRef idx="1">
+            <a:schemeClr val="accent1"/>
+          </a:lnRef>
+          <a:fillRef idx="3">
+            <a:schemeClr val="accent1"/>
+          </a:fillRef>
+          <a:effectRef idx="2">
+            <a:schemeClr val="accent1"/>
+          </a:effectRef>
+          <a:fontRef idx="minor">
+            <a:schemeClr val="lt1"/>
+          </a:fontRef>
+        </p:style>
+        <p:txBody>
+          <a:bodyPr rtlCol="0" anchor="ctr"/>
+          <a:lstStyle/>
+          <a:p>
+            <a:pPr algn="ctr"/>
+          </a:p>
+        </p:txBody>
+      </p:sp>
+      <p:sp>
+        <p:nvSpPr>
+          <p:cNvPr id="7" name="Rectangle 6"/>
+          <p:cNvSpPr/>
+          <p:nvPr/>
+        </p:nvSpPr>
+        <p:spPr>
+          <a:xfrm>
+            <a:off x="457200" y="1591056"/>
+            <a:ext cx="3624986" cy="64008"/>
+          </a:xfrm>
+          <a:prstGeom prst="rect">
+            <a:avLst/>
+          </a:prstGeom>
+          <a:solidFill>
+            <a:srgbClr val="095292"/>
+          </a:solidFill>
+          <a:ln>
+            <a:noFill/>
+          </a:ln>
+        </p:spPr>
+        <p:style>
+          <a:lnRef idx="1">
+            <a:schemeClr val="accent1"/>
+          </a:lnRef>
+          <a:fillRef idx="3">
+            <a:schemeClr val="accent1"/>
+          </a:fillRef>
+          <a:effectRef idx="2">
+            <a:schemeClr val="accent1"/>
+          </a:effectRef>
+          <a:fontRef idx="minor">
+            <a:schemeClr val="lt1"/>
+          </a:fontRef>
+        </p:style>
+        <p:txBody>
+          <a:bodyPr rtlCol="0" anchor="ctr"/>
+          <a:lstStyle/>
+          <a:p>
+            <a:pPr algn="ctr"/>
+          </a:p>
+        </p:txBody>
+      </p:sp>
+      <p:sp>
+        <p:nvSpPr>
+          <p:cNvPr id="8" name="Rectangle 7"/>
+          <p:cNvSpPr/>
+          <p:nvPr/>
+        </p:nvSpPr>
+        <p:spPr>
+          <a:xfrm>
+            <a:off x="457200" y="1655064"/>
+            <a:ext cx="3624986" cy="27432"/>
+          </a:xfrm>
+          <a:prstGeom prst="rect">
+            <a:avLst/>
+          </a:prstGeom>
+          <a:solidFill>
+            <a:srgbClr val="FFD000"/>
+          </a:solidFill>
+          <a:ln>
+            <a:noFill/>
+          </a:ln>
+        </p:spPr>
+        <p:style>
+          <a:lnRef idx="1">
+            <a:schemeClr val="accent1"/>
+          </a:lnRef>
+          <a:fillRef idx="3">
+            <a:schemeClr val="accent1"/>
+          </a:fillRef>
+          <a:effectRef idx="2">
+            <a:schemeClr val="accent1"/>
+          </a:effectRef>
+          <a:fontRef idx="minor">
+            <a:schemeClr val="lt1"/>
+          </a:fontRef>
+        </p:style>
+        <p:txBody>
+          <a:bodyPr rtlCol="0" anchor="ctr"/>
+          <a:lstStyle/>
+          <a:p>
+            <a:pPr algn="ctr"/>
+          </a:p>
+        </p:txBody>
+      </p:sp>
+      <p:pic>
+        <p:nvPicPr>
+          <p:cNvPr id="9" name="Picture 8" descr="drawio.png"/>
+          <p:cNvPicPr>
+            <a:picLocks noChangeAspect="1"/>
+          </p:cNvPicPr>
+          <p:nvPr/>
+        </p:nvPicPr>
+        <p:blipFill>
+          <a:blip r:embed="rId2"/>
+          <a:stretch>
+            <a:fillRect/>
+          </a:stretch>
+        </p:blipFill>
+        <p:spPr>
+          <a:xfrm>
+            <a:off x="1643329" y="1847087"/>
+            <a:ext cx="1252728" cy="1252728"/>
+          </a:xfrm>
+          <a:prstGeom prst="rect">
+            <a:avLst/>
+          </a:prstGeom>
+        </p:spPr>
+      </p:pic>
+      <p:sp>
+        <p:nvSpPr>
+          <p:cNvPr id="10" name="TextBox 9"/>
+          <p:cNvSpPr txBox="1"/>
+          <p:nvPr/>
+        </p:nvSpPr>
+        <p:spPr>
+          <a:xfrm>
+            <a:off x="530352" y="3191256"/>
+            <a:ext cx="3478682" cy="621792"/>
+          </a:xfrm>
+          <a:prstGeom prst="rect">
+            <a:avLst/>
+          </a:prstGeom>
+          <a:noFill/>
+        </p:spPr>
+        <p:txBody>
+          <a:bodyPr wrap="square" anchor="t"/>
+          <a:lstStyle/>
+          <a:p>
+            <a:pPr algn="ctr"/>
+            <a:r>
+              <a:rPr sz="1300" b="1" i="0">
+                <a:solidFill>
+                  <a:srgbClr val="095292"/>
+                </a:solidFill>
+                <a:latin typeface="Calibri"/>
+              </a:rPr>
+              <a:t>Draw.Io</a:t>
+            </a:r>
+          </a:p>
+          <a:p>
+            <a:pPr algn="ctr">
+              <a:spcBef>
+                <a:spcPts val="200"/>
+              </a:spcBef>
             </a:pPr>
             <a:r>
-              <a:rPr sz="2000" b="0" i="0">
-                <a:solidFill>
-                  <a:srgbClr val="333333"/>
-                </a:solidFill>
-                <a:latin typeface="Calibri"/>
-              </a:rPr>
-              <a:t>–   Ya existen el catalogo de RF/RNF y el backlog de historias de VetCare, ambos escritos en texto y sin ninguna representacion grafica.</a:t>
-            </a:r>
-          </a:p>
-          <a:p>
-            <a:pPr>
-              <a:spcAft>
-                <a:spcPts val="800"/>
-              </a:spcAft>
+              <a:rPr sz="1000" b="0" i="0">
+                <a:solidFill>
+                  <a:srgbClr val="666666"/>
+                </a:solidFill>
+                <a:latin typeface="Calibri"/>
+              </a:rPr>
+              <a:t>Diagramas UML y de contexto</a:t>
+            </a:r>
+          </a:p>
+        </p:txBody>
+      </p:sp>
+      <p:sp>
+        <p:nvSpPr>
+          <p:cNvPr id="11" name="Rounded Rectangle 10"/>
+          <p:cNvSpPr/>
+          <p:nvPr/>
+        </p:nvSpPr>
+        <p:spPr>
+          <a:xfrm>
+            <a:off x="4283354" y="1591056"/>
+            <a:ext cx="3624986" cy="2331720"/>
+          </a:xfrm>
+          <a:prstGeom prst="roundRect">
+            <a:avLst>
+              <a:gd name="adj" fmla="val 12000"/>
+            </a:avLst>
+          </a:prstGeom>
+          <a:solidFill>
+            <a:srgbClr val="F2F2F2"/>
+          </a:solidFill>
+          <a:ln>
+            <a:noFill/>
+          </a:ln>
+        </p:spPr>
+        <p:style>
+          <a:lnRef idx="1">
+            <a:schemeClr val="accent1"/>
+          </a:lnRef>
+          <a:fillRef idx="3">
+            <a:schemeClr val="accent1"/>
+          </a:fillRef>
+          <a:effectRef idx="2">
+            <a:schemeClr val="accent1"/>
+          </a:effectRef>
+          <a:fontRef idx="minor">
+            <a:schemeClr val="lt1"/>
+          </a:fontRef>
+        </p:style>
+        <p:txBody>
+          <a:bodyPr rtlCol="0" anchor="ctr"/>
+          <a:lstStyle/>
+          <a:p>
+            <a:pPr algn="ctr"/>
+          </a:p>
+        </p:txBody>
+      </p:sp>
+      <p:sp>
+        <p:nvSpPr>
+          <p:cNvPr id="12" name="Rectangle 11"/>
+          <p:cNvSpPr/>
+          <p:nvPr/>
+        </p:nvSpPr>
+        <p:spPr>
+          <a:xfrm>
+            <a:off x="4283354" y="1591056"/>
+            <a:ext cx="3624986" cy="64008"/>
+          </a:xfrm>
+          <a:prstGeom prst="rect">
+            <a:avLst/>
+          </a:prstGeom>
+          <a:solidFill>
+            <a:srgbClr val="095292"/>
+          </a:solidFill>
+          <a:ln>
+            <a:noFill/>
+          </a:ln>
+        </p:spPr>
+        <p:style>
+          <a:lnRef idx="1">
+            <a:schemeClr val="accent1"/>
+          </a:lnRef>
+          <a:fillRef idx="3">
+            <a:schemeClr val="accent1"/>
+          </a:fillRef>
+          <a:effectRef idx="2">
+            <a:schemeClr val="accent1"/>
+          </a:effectRef>
+          <a:fontRef idx="minor">
+            <a:schemeClr val="lt1"/>
+          </a:fontRef>
+        </p:style>
+        <p:txBody>
+          <a:bodyPr rtlCol="0" anchor="ctr"/>
+          <a:lstStyle/>
+          <a:p>
+            <a:pPr algn="ctr"/>
+          </a:p>
+        </p:txBody>
+      </p:sp>
+      <p:sp>
+        <p:nvSpPr>
+          <p:cNvPr id="13" name="Rectangle 12"/>
+          <p:cNvSpPr/>
+          <p:nvPr/>
+        </p:nvSpPr>
+        <p:spPr>
+          <a:xfrm>
+            <a:off x="4283354" y="1655064"/>
+            <a:ext cx="3624986" cy="27432"/>
+          </a:xfrm>
+          <a:prstGeom prst="rect">
+            <a:avLst/>
+          </a:prstGeom>
+          <a:solidFill>
+            <a:srgbClr val="FFD000"/>
+          </a:solidFill>
+          <a:ln>
+            <a:noFill/>
+          </a:ln>
+        </p:spPr>
+        <p:style>
+          <a:lnRef idx="1">
+            <a:schemeClr val="accent1"/>
+          </a:lnRef>
+          <a:fillRef idx="3">
+            <a:schemeClr val="accent1"/>
+          </a:fillRef>
+          <a:effectRef idx="2">
+            <a:schemeClr val="accent1"/>
+          </a:effectRef>
+          <a:fontRef idx="minor">
+            <a:schemeClr val="lt1"/>
+          </a:fontRef>
+        </p:style>
+        <p:txBody>
+          <a:bodyPr rtlCol="0" anchor="ctr"/>
+          <a:lstStyle/>
+          <a:p>
+            <a:pPr algn="ctr"/>
+          </a:p>
+        </p:txBody>
+      </p:sp>
+      <p:pic>
+        <p:nvPicPr>
+          <p:cNvPr id="14" name="Picture 13" descr="mermaid.png"/>
+          <p:cNvPicPr>
+            <a:picLocks noChangeAspect="1"/>
+          </p:cNvPicPr>
+          <p:nvPr/>
+        </p:nvPicPr>
+        <p:blipFill>
+          <a:blip r:embed="rId3"/>
+          <a:stretch>
+            <a:fillRect/>
+          </a:stretch>
+        </p:blipFill>
+        <p:spPr>
+          <a:xfrm>
+            <a:off x="5469483" y="1847087"/>
+            <a:ext cx="1252728" cy="1252728"/>
+          </a:xfrm>
+          <a:prstGeom prst="rect">
+            <a:avLst/>
+          </a:prstGeom>
+        </p:spPr>
+      </p:pic>
+      <p:sp>
+        <p:nvSpPr>
+          <p:cNvPr id="15" name="TextBox 14"/>
+          <p:cNvSpPr txBox="1"/>
+          <p:nvPr/>
+        </p:nvSpPr>
+        <p:spPr>
+          <a:xfrm>
+            <a:off x="4356506" y="3191256"/>
+            <a:ext cx="3478682" cy="621792"/>
+          </a:xfrm>
+          <a:prstGeom prst="rect">
+            <a:avLst/>
+          </a:prstGeom>
+          <a:noFill/>
+        </p:spPr>
+        <p:txBody>
+          <a:bodyPr wrap="square" anchor="t"/>
+          <a:lstStyle/>
+          <a:p>
+            <a:pPr algn="ctr"/>
+            <a:r>
+              <a:rPr sz="1300" b="1" i="0">
+                <a:solidFill>
+                  <a:srgbClr val="095292"/>
+                </a:solidFill>
+                <a:latin typeface="Calibri"/>
+              </a:rPr>
+              <a:t>Mermaid</a:t>
+            </a:r>
+          </a:p>
+          <a:p>
+            <a:pPr algn="ctr">
+              <a:spcBef>
+                <a:spcPts val="200"/>
+              </a:spcBef>
             </a:pPr>
             <a:r>
-              <a:rPr sz="2000" b="0" i="0">
-                <a:solidFill>
-                  <a:srgbClr val="333333"/>
-                </a:solidFill>
-                <a:latin typeface="Calibri"/>
-              </a:rPr>
-              <a:t>–   Nadie ha definido todavia que conceptos del negocio existen, que datos guarda cada uno ni como se relacionan entre si.</a:t>
-            </a:r>
-          </a:p>
-          <a:p>
-            <a:pPr>
-              <a:spcAft>
-                <a:spcPts val="800"/>
-              </a:spcAft>
+              <a:rPr sz="1000" b="0" i="0">
+                <a:solidFill>
+                  <a:srgbClr val="666666"/>
+                </a:solidFill>
+                <a:latin typeface="Calibri"/>
+              </a:rPr>
+              <a:t>Diagramas como texto versionable</a:t>
+            </a:r>
+          </a:p>
+        </p:txBody>
+      </p:sp>
+      <p:sp>
+        <p:nvSpPr>
+          <p:cNvPr id="16" name="Rounded Rectangle 15"/>
+          <p:cNvSpPr/>
+          <p:nvPr/>
+        </p:nvSpPr>
+        <p:spPr>
+          <a:xfrm>
+            <a:off x="8109508" y="1591056"/>
+            <a:ext cx="3624986" cy="2331720"/>
+          </a:xfrm>
+          <a:prstGeom prst="roundRect">
+            <a:avLst>
+              <a:gd name="adj" fmla="val 12000"/>
+            </a:avLst>
+          </a:prstGeom>
+          <a:solidFill>
+            <a:srgbClr val="F2F2F2"/>
+          </a:solidFill>
+          <a:ln>
+            <a:noFill/>
+          </a:ln>
+        </p:spPr>
+        <p:style>
+          <a:lnRef idx="1">
+            <a:schemeClr val="accent1"/>
+          </a:lnRef>
+          <a:fillRef idx="3">
+            <a:schemeClr val="accent1"/>
+          </a:fillRef>
+          <a:effectRef idx="2">
+            <a:schemeClr val="accent1"/>
+          </a:effectRef>
+          <a:fontRef idx="minor">
+            <a:schemeClr val="lt1"/>
+          </a:fontRef>
+        </p:style>
+        <p:txBody>
+          <a:bodyPr rtlCol="0" anchor="ctr"/>
+          <a:lstStyle/>
+          <a:p>
+            <a:pPr algn="ctr"/>
+          </a:p>
+        </p:txBody>
+      </p:sp>
+      <p:sp>
+        <p:nvSpPr>
+          <p:cNvPr id="17" name="Rectangle 16"/>
+          <p:cNvSpPr/>
+          <p:nvPr/>
+        </p:nvSpPr>
+        <p:spPr>
+          <a:xfrm>
+            <a:off x="8109508" y="1591056"/>
+            <a:ext cx="3624986" cy="64008"/>
+          </a:xfrm>
+          <a:prstGeom prst="rect">
+            <a:avLst/>
+          </a:prstGeom>
+          <a:solidFill>
+            <a:srgbClr val="095292"/>
+          </a:solidFill>
+          <a:ln>
+            <a:noFill/>
+          </a:ln>
+        </p:spPr>
+        <p:style>
+          <a:lnRef idx="1">
+            <a:schemeClr val="accent1"/>
+          </a:lnRef>
+          <a:fillRef idx="3">
+            <a:schemeClr val="accent1"/>
+          </a:fillRef>
+          <a:effectRef idx="2">
+            <a:schemeClr val="accent1"/>
+          </a:effectRef>
+          <a:fontRef idx="minor">
+            <a:schemeClr val="lt1"/>
+          </a:fontRef>
+        </p:style>
+        <p:txBody>
+          <a:bodyPr rtlCol="0" anchor="ctr"/>
+          <a:lstStyle/>
+          <a:p>
+            <a:pPr algn="ctr"/>
+          </a:p>
+        </p:txBody>
+      </p:sp>
+      <p:sp>
+        <p:nvSpPr>
+          <p:cNvPr id="18" name="Rectangle 17"/>
+          <p:cNvSpPr/>
+          <p:nvPr/>
+        </p:nvSpPr>
+        <p:spPr>
+          <a:xfrm>
+            <a:off x="8109508" y="1655064"/>
+            <a:ext cx="3624986" cy="27432"/>
+          </a:xfrm>
+          <a:prstGeom prst="rect">
+            <a:avLst/>
+          </a:prstGeom>
+          <a:solidFill>
+            <a:srgbClr val="FFD000"/>
+          </a:solidFill>
+          <a:ln>
+            <a:noFill/>
+          </a:ln>
+        </p:spPr>
+        <p:style>
+          <a:lnRef idx="1">
+            <a:schemeClr val="accent1"/>
+          </a:lnRef>
+          <a:fillRef idx="3">
+            <a:schemeClr val="accent1"/>
+          </a:fillRef>
+          <a:effectRef idx="2">
+            <a:schemeClr val="accent1"/>
+          </a:effectRef>
+          <a:fontRef idx="minor">
+            <a:schemeClr val="lt1"/>
+          </a:fontRef>
+        </p:style>
+        <p:txBody>
+          <a:bodyPr rtlCol="0" anchor="ctr"/>
+          <a:lstStyle/>
+          <a:p>
+            <a:pPr algn="ctr"/>
+          </a:p>
+        </p:txBody>
+      </p:sp>
+      <p:pic>
+        <p:nvPicPr>
+          <p:cNvPr id="19" name="Picture 18" descr="examlab.png"/>
+          <p:cNvPicPr>
+            <a:picLocks noChangeAspect="1"/>
+          </p:cNvPicPr>
+          <p:nvPr/>
+        </p:nvPicPr>
+        <p:blipFill>
+          <a:blip r:embed="rId4"/>
+          <a:stretch>
+            <a:fillRect/>
+          </a:stretch>
+        </p:blipFill>
+        <p:spPr>
+          <a:xfrm>
+            <a:off x="9295638" y="1847087"/>
+            <a:ext cx="1252728" cy="1252728"/>
+          </a:xfrm>
+          <a:prstGeom prst="rect">
+            <a:avLst/>
+          </a:prstGeom>
+        </p:spPr>
+      </p:pic>
+      <p:sp>
+        <p:nvSpPr>
+          <p:cNvPr id="20" name="TextBox 19"/>
+          <p:cNvSpPr txBox="1"/>
+          <p:nvPr/>
+        </p:nvSpPr>
+        <p:spPr>
+          <a:xfrm>
+            <a:off x="8182660" y="3191256"/>
+            <a:ext cx="3478682" cy="621792"/>
+          </a:xfrm>
+          <a:prstGeom prst="rect">
+            <a:avLst/>
+          </a:prstGeom>
+          <a:noFill/>
+        </p:spPr>
+        <p:txBody>
+          <a:bodyPr wrap="square" anchor="t"/>
+          <a:lstStyle/>
+          <a:p>
+            <a:pPr algn="ctr"/>
+            <a:r>
+              <a:rPr sz="1300" b="1" i="0">
+                <a:solidFill>
+                  <a:srgbClr val="095292"/>
+                </a:solidFill>
+                <a:latin typeface="Calibri"/>
+              </a:rPr>
+              <a:t>la plataforma del curso</a:t>
+            </a:r>
+          </a:p>
+          <a:p>
+            <a:pPr algn="ctr">
+              <a:spcBef>
+                <a:spcPts val="200"/>
+              </a:spcBef>
             </a:pPr>
             <a:r>
-              <a:rPr sz="2000" b="0" i="0">
-                <a:solidFill>
-                  <a:srgbClr val="333333"/>
-                </a:solidFill>
-                <a:latin typeface="Calibri"/>
-              </a:rPr>
-              <a:t>–   El equipo discute en palabras si una mascota puede tener dos duenos y si la cita pertenece a la mascota o al veterinario, y esa discusion no se cierra hablando.</a:t>
-            </a:r>
-          </a:p>
-        </p:txBody>
-      </p:sp>
-      <p:sp>
-        <p:nvSpPr>
-          <p:cNvPr id="6" name="TextBox 5"/>
+              <a:rPr sz="1000" b="0" i="0">
+                <a:solidFill>
+                  <a:srgbClr val="666666"/>
+                </a:solidFill>
+                <a:latin typeface="Calibri"/>
+              </a:rPr>
+              <a:t>Entrega del taller · en la fecha que indique el docente</a:t>
+            </a:r>
+          </a:p>
+        </p:txBody>
+      </p:sp>
+      <p:sp>
+        <p:nvSpPr>
+          <p:cNvPr id="21" name="TextBox 20"/>
           <p:cNvSpPr txBox="1"/>
           <p:nvPr/>
         </p:nvSpPr>
@@ -6645,111 +7269,21 @@
                 </a:solidFill>
                 <a:latin typeface="Calibri"/>
               </a:rPr>
-              <a:t>Taller PI — pasos guiados</a:t>
-            </a:r>
-          </a:p>
-        </p:txBody>
-      </p:sp>
-      <p:sp>
-        <p:nvSpPr>
-          <p:cNvPr id="5" name="Rounded Rectangle 4"/>
-          <p:cNvSpPr/>
-          <p:nvPr/>
-        </p:nvSpPr>
-        <p:spPr>
-          <a:xfrm>
-            <a:off x="457200" y="1234440"/>
-            <a:ext cx="11277295" cy="950976"/>
-          </a:xfrm>
-          <a:prstGeom prst="roundRect">
-            <a:avLst>
-              <a:gd name="adj" fmla="val 12000"/>
-            </a:avLst>
-          </a:prstGeom>
-          <a:solidFill>
-            <a:srgbClr val="F2F2F2"/>
-          </a:solidFill>
-          <a:ln>
-            <a:noFill/>
-          </a:ln>
-        </p:spPr>
-        <p:style>
-          <a:lnRef idx="1">
-            <a:schemeClr val="accent1"/>
-          </a:lnRef>
-          <a:fillRef idx="3">
-            <a:schemeClr val="accent1"/>
-          </a:fillRef>
-          <a:effectRef idx="2">
-            <a:schemeClr val="accent1"/>
-          </a:effectRef>
-          <a:fontRef idx="minor">
-            <a:schemeClr val="lt1"/>
-          </a:fontRef>
-        </p:style>
-        <p:txBody>
-          <a:bodyPr rtlCol="0" anchor="ctr"/>
-          <a:lstStyle/>
-          <a:p>
-            <a:pPr algn="ctr"/>
-          </a:p>
-        </p:txBody>
-      </p:sp>
-      <p:sp>
-        <p:nvSpPr>
-          <p:cNvPr id="6" name="Rounded Rectangle 5"/>
-          <p:cNvSpPr/>
-          <p:nvPr/>
-        </p:nvSpPr>
-        <p:spPr>
-          <a:xfrm>
-            <a:off x="594360" y="1490472"/>
-            <a:ext cx="438912" cy="438912"/>
-          </a:xfrm>
-          <a:prstGeom prst="roundRect">
-            <a:avLst>
-              <a:gd name="adj" fmla="val 12000"/>
-            </a:avLst>
-          </a:prstGeom>
-          <a:solidFill>
-            <a:srgbClr val="095292"/>
-          </a:solidFill>
-          <a:ln>
-            <a:noFill/>
-          </a:ln>
-        </p:spPr>
-        <p:style>
-          <a:lnRef idx="1">
-            <a:schemeClr val="accent1"/>
-          </a:lnRef>
-          <a:fillRef idx="3">
-            <a:schemeClr val="accent1"/>
-          </a:fillRef>
-          <a:effectRef idx="2">
-            <a:schemeClr val="accent1"/>
-          </a:effectRef>
-          <a:fontRef idx="minor">
-            <a:schemeClr val="lt1"/>
-          </a:fontRef>
-        </p:style>
-        <p:txBody>
-          <a:bodyPr rtlCol="0" anchor="ctr"/>
-          <a:lstStyle/>
-          <a:p>
-            <a:pPr algn="ctr"/>
-          </a:p>
-        </p:txBody>
-      </p:sp>
-      <p:sp>
-        <p:nvSpPr>
-          <p:cNvPr id="7" name="TextBox 6"/>
+              <a:t>Taller PI — por que importa</a:t>
+            </a:r>
+          </a:p>
+        </p:txBody>
+      </p:sp>
+      <p:sp>
+        <p:nvSpPr>
+          <p:cNvPr id="5" name="TextBox 4"/>
           <p:cNvSpPr txBox="1"/>
           <p:nvPr/>
         </p:nvSpPr>
         <p:spPr>
           <a:xfrm>
-            <a:off x="594360" y="1490472"/>
-            <a:ext cx="438912" cy="438912"/>
+            <a:off x="457200" y="1170432"/>
+            <a:ext cx="11277295" cy="5230368"/>
           </a:xfrm>
           <a:prstGeom prst="rect">
             <a:avLst/>
@@ -6757,677 +7291,81 @@
           <a:noFill/>
         </p:spPr>
         <p:txBody>
-          <a:bodyPr wrap="square" anchor="ctr"/>
-          <a:lstStyle/>
-          <a:p>
-            <a:pPr algn="ctr"/>
-            <a:r>
-              <a:rPr sz="1600" b="1" i="0">
-                <a:solidFill>
-                  <a:srgbClr val="FFFFFF"/>
-                </a:solidFill>
-                <a:latin typeface="Calibri"/>
-              </a:rPr>
-              <a:t>1</a:t>
-            </a:r>
-          </a:p>
-        </p:txBody>
-      </p:sp>
-      <p:sp>
-        <p:nvSpPr>
-          <p:cNvPr id="8" name="TextBox 7"/>
-          <p:cNvSpPr txBox="1"/>
-          <p:nvPr/>
-        </p:nvSpPr>
-        <p:spPr>
-          <a:xfrm>
-            <a:off x="1188720" y="1325880"/>
-            <a:ext cx="10271455" cy="786384"/>
-          </a:xfrm>
-          <a:prstGeom prst="rect">
-            <a:avLst/>
-          </a:prstGeom>
-          <a:noFill/>
-        </p:spPr>
-        <p:txBody>
-          <a:bodyPr wrap="square" anchor="ctr"/>
-          <a:lstStyle/>
-          <a:p>
-            <a:r>
-              <a:rPr sz="1500" b="1" i="0">
-                <a:solidFill>
-                  <a:srgbClr val="095292"/>
-                </a:solidFill>
-                <a:latin typeface="Calibri"/>
-              </a:rPr>
-              <a:t>Paso 1: subraye en el catalogo de requisitos y en el backlog los sustantivos del negocio de VetCare y arme la lista de clases candidatas, descartando las que sean pantallas, reportes o cosas tecnicas.</a:t>
-            </a:r>
-          </a:p>
-        </p:txBody>
-      </p:sp>
-      <p:sp>
-        <p:nvSpPr>
-          <p:cNvPr id="9" name="Rounded Rectangle 8"/>
-          <p:cNvSpPr/>
-          <p:nvPr/>
-        </p:nvSpPr>
-        <p:spPr>
-          <a:xfrm>
-            <a:off x="457200" y="2276856"/>
-            <a:ext cx="11277295" cy="950976"/>
-          </a:xfrm>
-          <a:prstGeom prst="roundRect">
-            <a:avLst>
-              <a:gd name="adj" fmla="val 12000"/>
-            </a:avLst>
-          </a:prstGeom>
-          <a:solidFill>
-            <a:srgbClr val="E8F4FA"/>
-          </a:solidFill>
-          <a:ln>
-            <a:noFill/>
-          </a:ln>
-        </p:spPr>
-        <p:style>
-          <a:lnRef idx="1">
-            <a:schemeClr val="accent1"/>
-          </a:lnRef>
-          <a:fillRef idx="3">
-            <a:schemeClr val="accent1"/>
-          </a:fillRef>
-          <a:effectRef idx="2">
-            <a:schemeClr val="accent1"/>
-          </a:effectRef>
-          <a:fontRef idx="minor">
-            <a:schemeClr val="lt1"/>
-          </a:fontRef>
-        </p:style>
-        <p:txBody>
-          <a:bodyPr rtlCol="0" anchor="ctr"/>
-          <a:lstStyle/>
-          <a:p>
-            <a:pPr algn="ctr"/>
-          </a:p>
-        </p:txBody>
-      </p:sp>
-      <p:sp>
-        <p:nvSpPr>
-          <p:cNvPr id="10" name="Rounded Rectangle 9"/>
-          <p:cNvSpPr/>
-          <p:nvPr/>
-        </p:nvSpPr>
-        <p:spPr>
-          <a:xfrm>
-            <a:off x="594360" y="2532888"/>
-            <a:ext cx="438912" cy="438912"/>
-          </a:xfrm>
-          <a:prstGeom prst="roundRect">
-            <a:avLst>
-              <a:gd name="adj" fmla="val 12000"/>
-            </a:avLst>
-          </a:prstGeom>
-          <a:solidFill>
-            <a:srgbClr val="095292"/>
-          </a:solidFill>
-          <a:ln>
-            <a:noFill/>
-          </a:ln>
-        </p:spPr>
-        <p:style>
-          <a:lnRef idx="1">
-            <a:schemeClr val="accent1"/>
-          </a:lnRef>
-          <a:fillRef idx="3">
-            <a:schemeClr val="accent1"/>
-          </a:fillRef>
-          <a:effectRef idx="2">
-            <a:schemeClr val="accent1"/>
-          </a:effectRef>
-          <a:fontRef idx="minor">
-            <a:schemeClr val="lt1"/>
-          </a:fontRef>
-        </p:style>
-        <p:txBody>
-          <a:bodyPr rtlCol="0" anchor="ctr"/>
-          <a:lstStyle/>
-          <a:p>
-            <a:pPr algn="ctr"/>
-          </a:p>
-        </p:txBody>
-      </p:sp>
-      <p:sp>
-        <p:nvSpPr>
-          <p:cNvPr id="11" name="TextBox 10"/>
-          <p:cNvSpPr txBox="1"/>
-          <p:nvPr/>
-        </p:nvSpPr>
-        <p:spPr>
-          <a:xfrm>
-            <a:off x="594360" y="2532888"/>
-            <a:ext cx="438912" cy="438912"/>
-          </a:xfrm>
-          <a:prstGeom prst="rect">
-            <a:avLst/>
-          </a:prstGeom>
-          <a:noFill/>
-        </p:spPr>
-        <p:txBody>
-          <a:bodyPr wrap="square" anchor="ctr"/>
-          <a:lstStyle/>
-          <a:p>
-            <a:pPr algn="ctr"/>
-            <a:r>
-              <a:rPr sz="1600" b="1" i="0">
-                <a:solidFill>
-                  <a:srgbClr val="FFFFFF"/>
-                </a:solidFill>
-                <a:latin typeface="Calibri"/>
-              </a:rPr>
-              <a:t>2</a:t>
-            </a:r>
-          </a:p>
-        </p:txBody>
-      </p:sp>
-      <p:sp>
-        <p:nvSpPr>
-          <p:cNvPr id="12" name="TextBox 11"/>
-          <p:cNvSpPr txBox="1"/>
-          <p:nvPr/>
-        </p:nvSpPr>
-        <p:spPr>
-          <a:xfrm>
-            <a:off x="1188720" y="2368296"/>
-            <a:ext cx="10271455" cy="786384"/>
-          </a:xfrm>
-          <a:prstGeom prst="rect">
-            <a:avLst/>
-          </a:prstGeom>
-          <a:noFill/>
-        </p:spPr>
-        <p:txBody>
-          <a:bodyPr wrap="square" anchor="ctr"/>
-          <a:lstStyle/>
-          <a:p>
-            <a:r>
-              <a:rPr sz="1500" b="1" i="0">
-                <a:solidFill>
-                  <a:srgbClr val="095292"/>
-                </a:solidFill>
-                <a:latin typeface="Calibri"/>
-              </a:rPr>
-              <a:t>Paso 2: dibuje en draw.io las cinco clases Dueno, Mascota, Cita, Veterinario y Atencion con la caja de tres compartimentos, en singular y con mayuscula inicial.</a:t>
-            </a:r>
-          </a:p>
-        </p:txBody>
-      </p:sp>
-      <p:sp>
-        <p:nvSpPr>
-          <p:cNvPr id="13" name="Rounded Rectangle 12"/>
-          <p:cNvSpPr/>
-          <p:nvPr/>
-        </p:nvSpPr>
-        <p:spPr>
-          <a:xfrm>
-            <a:off x="457200" y="3319272"/>
-            <a:ext cx="11277295" cy="950976"/>
-          </a:xfrm>
-          <a:prstGeom prst="roundRect">
-            <a:avLst>
-              <a:gd name="adj" fmla="val 12000"/>
-            </a:avLst>
-          </a:prstGeom>
-          <a:solidFill>
-            <a:srgbClr val="F2F2F2"/>
-          </a:solidFill>
-          <a:ln>
-            <a:noFill/>
-          </a:ln>
-        </p:spPr>
-        <p:style>
-          <a:lnRef idx="1">
-            <a:schemeClr val="accent1"/>
-          </a:lnRef>
-          <a:fillRef idx="3">
-            <a:schemeClr val="accent1"/>
-          </a:fillRef>
-          <a:effectRef idx="2">
-            <a:schemeClr val="accent1"/>
-          </a:effectRef>
-          <a:fontRef idx="minor">
-            <a:schemeClr val="lt1"/>
-          </a:fontRef>
-        </p:style>
-        <p:txBody>
-          <a:bodyPr rtlCol="0" anchor="ctr"/>
-          <a:lstStyle/>
-          <a:p>
-            <a:pPr algn="ctr"/>
-          </a:p>
-        </p:txBody>
-      </p:sp>
-      <p:sp>
-        <p:nvSpPr>
-          <p:cNvPr id="14" name="Rounded Rectangle 13"/>
-          <p:cNvSpPr/>
-          <p:nvPr/>
-        </p:nvSpPr>
-        <p:spPr>
-          <a:xfrm>
-            <a:off x="594360" y="3575304"/>
-            <a:ext cx="438912" cy="438912"/>
-          </a:xfrm>
-          <a:prstGeom prst="roundRect">
-            <a:avLst>
-              <a:gd name="adj" fmla="val 12000"/>
-            </a:avLst>
-          </a:prstGeom>
-          <a:solidFill>
-            <a:srgbClr val="095292"/>
-          </a:solidFill>
-          <a:ln>
-            <a:noFill/>
-          </a:ln>
-        </p:spPr>
-        <p:style>
-          <a:lnRef idx="1">
-            <a:schemeClr val="accent1"/>
-          </a:lnRef>
-          <a:fillRef idx="3">
-            <a:schemeClr val="accent1"/>
-          </a:fillRef>
-          <a:effectRef idx="2">
-            <a:schemeClr val="accent1"/>
-          </a:effectRef>
-          <a:fontRef idx="minor">
-            <a:schemeClr val="lt1"/>
-          </a:fontRef>
-        </p:style>
-        <p:txBody>
-          <a:bodyPr rtlCol="0" anchor="ctr"/>
-          <a:lstStyle/>
-          <a:p>
-            <a:pPr algn="ctr"/>
-          </a:p>
-        </p:txBody>
-      </p:sp>
-      <p:sp>
-        <p:nvSpPr>
-          <p:cNvPr id="15" name="TextBox 14"/>
-          <p:cNvSpPr txBox="1"/>
-          <p:nvPr/>
-        </p:nvSpPr>
-        <p:spPr>
-          <a:xfrm>
-            <a:off x="594360" y="3575304"/>
-            <a:ext cx="438912" cy="438912"/>
-          </a:xfrm>
-          <a:prstGeom prst="rect">
-            <a:avLst/>
-          </a:prstGeom>
-          <a:noFill/>
-        </p:spPr>
-        <p:txBody>
-          <a:bodyPr wrap="square" anchor="ctr"/>
-          <a:lstStyle/>
-          <a:p>
-            <a:pPr algn="ctr"/>
-            <a:r>
-              <a:rPr sz="1600" b="1" i="0">
-                <a:solidFill>
-                  <a:srgbClr val="FFFFFF"/>
-                </a:solidFill>
-                <a:latin typeface="Calibri"/>
-              </a:rPr>
-              <a:t>3</a:t>
-            </a:r>
-          </a:p>
-        </p:txBody>
-      </p:sp>
-      <p:sp>
-        <p:nvSpPr>
-          <p:cNvPr id="16" name="TextBox 15"/>
-          <p:cNvSpPr txBox="1"/>
-          <p:nvPr/>
-        </p:nvSpPr>
-        <p:spPr>
-          <a:xfrm>
-            <a:off x="1188720" y="3410712"/>
-            <a:ext cx="10271455" cy="786384"/>
-          </a:xfrm>
-          <a:prstGeom prst="rect">
-            <a:avLst/>
-          </a:prstGeom>
-          <a:noFill/>
-        </p:spPr>
-        <p:txBody>
-          <a:bodyPr wrap="square" anchor="ctr"/>
-          <a:lstStyle/>
-          <a:p>
-            <a:r>
-              <a:rPr sz="1500" b="1" i="0">
-                <a:solidFill>
-                  <a:srgbClr val="095292"/>
-                </a:solidFill>
-                <a:latin typeface="Calibri"/>
-              </a:rPr>
-              <a:t>Paso 3: coloque minimo cuatro atributos por clase con visibilidad y tipo (por ejemplo -documento: String, -fechaNacimiento: Date) verificando que ningun atributo este repetido en dos clases distintas.</a:t>
-            </a:r>
-          </a:p>
-        </p:txBody>
-      </p:sp>
-      <p:sp>
-        <p:nvSpPr>
-          <p:cNvPr id="17" name="Rounded Rectangle 16"/>
-          <p:cNvSpPr/>
-          <p:nvPr/>
-        </p:nvSpPr>
-        <p:spPr>
-          <a:xfrm>
-            <a:off x="457200" y="4361688"/>
-            <a:ext cx="11277295" cy="950976"/>
-          </a:xfrm>
-          <a:prstGeom prst="roundRect">
-            <a:avLst>
-              <a:gd name="adj" fmla="val 12000"/>
-            </a:avLst>
-          </a:prstGeom>
-          <a:solidFill>
-            <a:srgbClr val="E8F4FA"/>
-          </a:solidFill>
-          <a:ln>
-            <a:noFill/>
-          </a:ln>
-        </p:spPr>
-        <p:style>
-          <a:lnRef idx="1">
-            <a:schemeClr val="accent1"/>
-          </a:lnRef>
-          <a:fillRef idx="3">
-            <a:schemeClr val="accent1"/>
-          </a:fillRef>
-          <a:effectRef idx="2">
-            <a:schemeClr val="accent1"/>
-          </a:effectRef>
-          <a:fontRef idx="minor">
-            <a:schemeClr val="lt1"/>
-          </a:fontRef>
-        </p:style>
-        <p:txBody>
-          <a:bodyPr rtlCol="0" anchor="ctr"/>
-          <a:lstStyle/>
-          <a:p>
-            <a:pPr algn="ctr"/>
-          </a:p>
-        </p:txBody>
-      </p:sp>
-      <p:sp>
-        <p:nvSpPr>
-          <p:cNvPr id="18" name="Rounded Rectangle 17"/>
-          <p:cNvSpPr/>
-          <p:nvPr/>
-        </p:nvSpPr>
-        <p:spPr>
-          <a:xfrm>
-            <a:off x="594360" y="4617720"/>
-            <a:ext cx="438912" cy="438912"/>
-          </a:xfrm>
-          <a:prstGeom prst="roundRect">
-            <a:avLst>
-              <a:gd name="adj" fmla="val 12000"/>
-            </a:avLst>
-          </a:prstGeom>
-          <a:solidFill>
-            <a:srgbClr val="095292"/>
-          </a:solidFill>
-          <a:ln>
-            <a:noFill/>
-          </a:ln>
-        </p:spPr>
-        <p:style>
-          <a:lnRef idx="1">
-            <a:schemeClr val="accent1"/>
-          </a:lnRef>
-          <a:fillRef idx="3">
-            <a:schemeClr val="accent1"/>
-          </a:fillRef>
-          <a:effectRef idx="2">
-            <a:schemeClr val="accent1"/>
-          </a:effectRef>
-          <a:fontRef idx="minor">
-            <a:schemeClr val="lt1"/>
-          </a:fontRef>
-        </p:style>
-        <p:txBody>
-          <a:bodyPr rtlCol="0" anchor="ctr"/>
-          <a:lstStyle/>
-          <a:p>
-            <a:pPr algn="ctr"/>
-          </a:p>
-        </p:txBody>
-      </p:sp>
-      <p:sp>
-        <p:nvSpPr>
-          <p:cNvPr id="19" name="TextBox 18"/>
-          <p:cNvSpPr txBox="1"/>
-          <p:nvPr/>
-        </p:nvSpPr>
-        <p:spPr>
-          <a:xfrm>
-            <a:off x="594360" y="4617720"/>
-            <a:ext cx="438912" cy="438912"/>
-          </a:xfrm>
-          <a:prstGeom prst="rect">
-            <a:avLst/>
-          </a:prstGeom>
-          <a:noFill/>
-        </p:spPr>
-        <p:txBody>
-          <a:bodyPr wrap="square" anchor="ctr"/>
-          <a:lstStyle/>
-          <a:p>
-            <a:pPr algn="ctr"/>
-            <a:r>
-              <a:rPr sz="1600" b="1" i="0">
-                <a:solidFill>
-                  <a:srgbClr val="FFFFFF"/>
-                </a:solidFill>
-                <a:latin typeface="Calibri"/>
-              </a:rPr>
-              <a:t>4</a:t>
-            </a:r>
-          </a:p>
-        </p:txBody>
-      </p:sp>
-      <p:sp>
-        <p:nvSpPr>
-          <p:cNvPr id="20" name="TextBox 19"/>
-          <p:cNvSpPr txBox="1"/>
-          <p:nvPr/>
-        </p:nvSpPr>
-        <p:spPr>
-          <a:xfrm>
-            <a:off x="1188720" y="4453128"/>
-            <a:ext cx="10271455" cy="786384"/>
-          </a:xfrm>
-          <a:prstGeom prst="rect">
-            <a:avLst/>
-          </a:prstGeom>
-          <a:noFill/>
-        </p:spPr>
-        <p:txBody>
-          <a:bodyPr wrap="square" anchor="ctr"/>
-          <a:lstStyle/>
-          <a:p>
-            <a:r>
-              <a:rPr sz="1500" b="1" i="0">
-                <a:solidFill>
-                  <a:srgbClr val="095292"/>
-                </a:solidFill>
-                <a:latin typeface="Calibri"/>
-              </a:rPr>
-              <a:t>Paso 4: agregue al menos un metodo propio del dominio por clase (por ejemplo +calcularEdad(): int en Mascota, +reprogramar(nuevaFecha: Date) en Cita) y descarte metodos tecnicos como conectarBD o guardarEnDisco.</a:t>
-            </a:r>
-          </a:p>
-        </p:txBody>
-      </p:sp>
-      <p:sp>
-        <p:nvSpPr>
-          <p:cNvPr id="21" name="Rounded Rectangle 20"/>
-          <p:cNvSpPr/>
-          <p:nvPr/>
-        </p:nvSpPr>
-        <p:spPr>
-          <a:xfrm>
-            <a:off x="457200" y="5404104"/>
-            <a:ext cx="11277295" cy="950976"/>
-          </a:xfrm>
-          <a:prstGeom prst="roundRect">
-            <a:avLst>
-              <a:gd name="adj" fmla="val 12000"/>
-            </a:avLst>
-          </a:prstGeom>
-          <a:solidFill>
-            <a:srgbClr val="F2F2F2"/>
-          </a:solidFill>
-          <a:ln>
-            <a:noFill/>
-          </a:ln>
-        </p:spPr>
-        <p:style>
-          <a:lnRef idx="1">
-            <a:schemeClr val="accent1"/>
-          </a:lnRef>
-          <a:fillRef idx="3">
-            <a:schemeClr val="accent1"/>
-          </a:fillRef>
-          <a:effectRef idx="2">
-            <a:schemeClr val="accent1"/>
-          </a:effectRef>
-          <a:fontRef idx="minor">
-            <a:schemeClr val="lt1"/>
-          </a:fontRef>
-        </p:style>
-        <p:txBody>
-          <a:bodyPr rtlCol="0" anchor="ctr"/>
-          <a:lstStyle/>
-          <a:p>
-            <a:pPr algn="ctr"/>
-          </a:p>
-        </p:txBody>
-      </p:sp>
-      <p:sp>
-        <p:nvSpPr>
-          <p:cNvPr id="22" name="Rounded Rectangle 21"/>
-          <p:cNvSpPr/>
-          <p:nvPr/>
-        </p:nvSpPr>
-        <p:spPr>
-          <a:xfrm>
-            <a:off x="594360" y="5660136"/>
-            <a:ext cx="438912" cy="438912"/>
-          </a:xfrm>
-          <a:prstGeom prst="roundRect">
-            <a:avLst>
-              <a:gd name="adj" fmla="val 12000"/>
-            </a:avLst>
-          </a:prstGeom>
-          <a:solidFill>
-            <a:srgbClr val="095292"/>
-          </a:solidFill>
-          <a:ln>
-            <a:noFill/>
-          </a:ln>
-        </p:spPr>
-        <p:style>
-          <a:lnRef idx="1">
-            <a:schemeClr val="accent1"/>
-          </a:lnRef>
-          <a:fillRef idx="3">
-            <a:schemeClr val="accent1"/>
-          </a:fillRef>
-          <a:effectRef idx="2">
-            <a:schemeClr val="accent1"/>
-          </a:effectRef>
-          <a:fontRef idx="minor">
-            <a:schemeClr val="lt1"/>
-          </a:fontRef>
-        </p:style>
-        <p:txBody>
-          <a:bodyPr rtlCol="0" anchor="ctr"/>
-          <a:lstStyle/>
-          <a:p>
-            <a:pPr algn="ctr"/>
-          </a:p>
-        </p:txBody>
-      </p:sp>
-      <p:sp>
-        <p:nvSpPr>
-          <p:cNvPr id="23" name="TextBox 22"/>
-          <p:cNvSpPr txBox="1"/>
-          <p:nvPr/>
-        </p:nvSpPr>
-        <p:spPr>
-          <a:xfrm>
-            <a:off x="594360" y="5660136"/>
-            <a:ext cx="438912" cy="438912"/>
-          </a:xfrm>
-          <a:prstGeom prst="rect">
-            <a:avLst/>
-          </a:prstGeom>
-          <a:noFill/>
-        </p:spPr>
-        <p:txBody>
-          <a:bodyPr wrap="square" anchor="ctr"/>
-          <a:lstStyle/>
-          <a:p>
-            <a:pPr algn="ctr"/>
-            <a:r>
-              <a:rPr sz="1600" b="1" i="0">
-                <a:solidFill>
-                  <a:srgbClr val="FFFFFF"/>
-                </a:solidFill>
-                <a:latin typeface="Calibri"/>
-              </a:rPr>
-              <a:t>5</a:t>
-            </a:r>
-          </a:p>
-        </p:txBody>
-      </p:sp>
-      <p:sp>
-        <p:nvSpPr>
-          <p:cNvPr id="24" name="TextBox 23"/>
-          <p:cNvSpPr txBox="1"/>
-          <p:nvPr/>
-        </p:nvSpPr>
-        <p:spPr>
-          <a:xfrm>
-            <a:off x="1188720" y="5495544"/>
-            <a:ext cx="10271455" cy="786384"/>
-          </a:xfrm>
-          <a:prstGeom prst="rect">
-            <a:avLst/>
-          </a:prstGeom>
-          <a:noFill/>
-        </p:spPr>
-        <p:txBody>
-          <a:bodyPr wrap="square" anchor="ctr"/>
-          <a:lstStyle/>
-          <a:p>
-            <a:r>
-              <a:rPr sz="1500" b="1" i="0">
-                <a:solidFill>
-                  <a:srgbClr val="095292"/>
-                </a:solidFill>
-                <a:latin typeface="Calibri"/>
-              </a:rPr>
-              <a:t>Paso 5: trace las cuatro asociaciones con nombre de relacion y multiplicidad en ambos extremos, leala cada una en voz alta como frase completa, exporte a PNG y .drawio y suba ambos archivos a la plataforma del curso.</a:t>
-            </a:r>
-          </a:p>
-        </p:txBody>
-      </p:sp>
-      <p:sp>
-        <p:nvSpPr>
-          <p:cNvPr id="25" name="TextBox 24"/>
+          <a:bodyPr wrap="square">
+            <a:spAutoFit/>
+          </a:bodyPr>
+          <a:lstStyle/>
+          <a:p>
+            <a:pPr>
+              <a:spcAft>
+                <a:spcPts val="800"/>
+              </a:spcAft>
+            </a:pPr>
+            <a:r>
+              <a:rPr sz="2000" b="0" i="0">
+                <a:solidFill>
+                  <a:srgbClr val="333333"/>
+                </a:solidFill>
+                <a:latin typeface="Calibri"/>
+              </a:rPr>
+              <a:t>–   </a:t>
+            </a:r>
+            <a:r>
+              <a:rPr sz="2000" b="1" i="0">
+                <a:solidFill>
+                  <a:srgbClr val="333333"/>
+                </a:solidFill>
+                <a:latin typeface="Calibri"/>
+              </a:rPr>
+              <a:t>Por que importa al PI:</a:t>
+            </a:r>
+            <a:r>
+              <a:rPr sz="2000" b="0" i="0">
+                <a:solidFill>
+                  <a:srgbClr val="333333"/>
+                </a:solidFill>
+                <a:latin typeface="Calibri"/>
+              </a:rPr>
+              <a:t> este diagrama de clases es el plano maestro de VetCare: de el salen el diccionario de datos, las tablas de la base de datos y las clases que se programan en Programacion II.</a:t>
+            </a:r>
+          </a:p>
+          <a:p>
+            <a:pPr>
+              <a:spcAft>
+                <a:spcPts val="800"/>
+              </a:spcAft>
+            </a:pPr>
+            <a:r>
+              <a:rPr sz="2000" b="0" i="0">
+                <a:solidFill>
+                  <a:srgbClr val="333333"/>
+                </a:solidFill>
+                <a:latin typeface="Calibri"/>
+              </a:rPr>
+              <a:t>–   Es el primer artefacto del curso que se lee igual en Cali, en Bogota o en Berlin, porque UML es un estandar y no una convencion del salon.</a:t>
+            </a:r>
+          </a:p>
+          <a:p>
+            <a:pPr>
+              <a:spcAft>
+                <a:spcPts val="800"/>
+              </a:spcAft>
+            </a:pPr>
+            <a:r>
+              <a:rPr sz="2000" b="0" i="0">
+                <a:solidFill>
+                  <a:srgbClr val="333333"/>
+                </a:solidFill>
+                <a:latin typeface="Calibri"/>
+              </a:rPr>
+              <a:t>–   Si una clase no puede rastrearse a un requisito o a una historia del backlog, sobra; y si un requisito no tiene donde vivir en el diagrama, falta una clase.</a:t>
+            </a:r>
+          </a:p>
+        </p:txBody>
+      </p:sp>
+      <p:sp>
+        <p:nvSpPr>
+          <p:cNvPr id="6" name="TextBox 5"/>
           <p:cNvSpPr txBox="1"/>
           <p:nvPr/>
         </p:nvSpPr>
@@ -7601,154 +7539,21 @@
                 </a:solidFill>
                 <a:latin typeface="Calibri"/>
               </a:rPr>
-              <a:t>Antes de entregar — autochequeo</a:t>
-            </a:r>
-          </a:p>
-        </p:txBody>
-      </p:sp>
-      <p:sp>
-        <p:nvSpPr>
-          <p:cNvPr id="5" name="Rounded Rectangle 4"/>
-          <p:cNvSpPr/>
-          <p:nvPr/>
-        </p:nvSpPr>
-        <p:spPr>
-          <a:xfrm>
-            <a:off x="457200" y="1261872"/>
-            <a:ext cx="11277295" cy="566928"/>
-          </a:xfrm>
-          <a:prstGeom prst="roundRect">
-            <a:avLst>
-              <a:gd name="adj" fmla="val 12000"/>
-            </a:avLst>
-          </a:prstGeom>
-          <a:solidFill>
-            <a:srgbClr val="F2F2F2"/>
-          </a:solidFill>
-          <a:ln>
-            <a:noFill/>
-          </a:ln>
-        </p:spPr>
-        <p:style>
-          <a:lnRef idx="1">
-            <a:schemeClr val="accent1"/>
-          </a:lnRef>
-          <a:fillRef idx="3">
-            <a:schemeClr val="accent1"/>
-          </a:fillRef>
-          <a:effectRef idx="2">
-            <a:schemeClr val="accent1"/>
-          </a:effectRef>
-          <a:fontRef idx="minor">
-            <a:schemeClr val="lt1"/>
-          </a:fontRef>
-        </p:style>
-        <p:txBody>
-          <a:bodyPr rtlCol="0" anchor="ctr"/>
-          <a:lstStyle/>
-          <a:p>
-            <a:pPr algn="ctr"/>
-          </a:p>
-        </p:txBody>
-      </p:sp>
-      <p:sp>
-        <p:nvSpPr>
-          <p:cNvPr id="6" name="Rectangle 5"/>
-          <p:cNvSpPr/>
-          <p:nvPr/>
-        </p:nvSpPr>
-        <p:spPr>
-          <a:xfrm>
-            <a:off x="640080" y="1408175"/>
-            <a:ext cx="274320" cy="274320"/>
-          </a:xfrm>
-          <a:prstGeom prst="rect">
-            <a:avLst/>
-          </a:prstGeom>
-          <a:solidFill>
-            <a:srgbClr val="FFFFFF"/>
-          </a:solidFill>
-          <a:ln>
-            <a:solidFill>
-              <a:srgbClr val="333333"/>
-            </a:solidFill>
-          </a:ln>
-        </p:spPr>
-        <p:style>
-          <a:lnRef idx="1">
-            <a:schemeClr val="accent1"/>
-          </a:lnRef>
-          <a:fillRef idx="3">
-            <a:schemeClr val="accent1"/>
-          </a:fillRef>
-          <a:effectRef idx="2">
-            <a:schemeClr val="accent1"/>
-          </a:effectRef>
-          <a:fontRef idx="minor">
-            <a:schemeClr val="lt1"/>
-          </a:fontRef>
-        </p:style>
-        <p:txBody>
-          <a:bodyPr rtlCol="0" anchor="ctr"/>
-          <a:lstStyle/>
-          <a:p>
-            <a:pPr algn="ctr"/>
-          </a:p>
-        </p:txBody>
-      </p:sp>
-      <p:sp>
-        <p:nvSpPr>
-          <p:cNvPr id="7" name="Rectangle 6"/>
-          <p:cNvSpPr/>
-          <p:nvPr/>
-        </p:nvSpPr>
-        <p:spPr>
-          <a:xfrm>
-            <a:off x="640080" y="1408175"/>
-            <a:ext cx="73152" cy="274320"/>
-          </a:xfrm>
-          <a:prstGeom prst="rect">
-            <a:avLst/>
-          </a:prstGeom>
-          <a:solidFill>
-            <a:srgbClr val="269CCB"/>
-          </a:solidFill>
-          <a:ln>
-            <a:noFill/>
-          </a:ln>
-        </p:spPr>
-        <p:style>
-          <a:lnRef idx="1">
-            <a:schemeClr val="accent1"/>
-          </a:lnRef>
-          <a:fillRef idx="3">
-            <a:schemeClr val="accent1"/>
-          </a:fillRef>
-          <a:effectRef idx="2">
-            <a:schemeClr val="accent1"/>
-          </a:effectRef>
-          <a:fontRef idx="minor">
-            <a:schemeClr val="lt1"/>
-          </a:fontRef>
-        </p:style>
-        <p:txBody>
-          <a:bodyPr rtlCol="0" anchor="ctr"/>
-          <a:lstStyle/>
-          <a:p>
-            <a:pPr algn="ctr"/>
-          </a:p>
-        </p:txBody>
-      </p:sp>
-      <p:sp>
-        <p:nvSpPr>
-          <p:cNvPr id="8" name="TextBox 7"/>
+              <a:t>Taller PI — punto de partida</a:t>
+            </a:r>
+          </a:p>
+        </p:txBody>
+      </p:sp>
+      <p:sp>
+        <p:nvSpPr>
+          <p:cNvPr id="5" name="TextBox 4"/>
           <p:cNvSpPr txBox="1"/>
           <p:nvPr/>
         </p:nvSpPr>
         <p:spPr>
           <a:xfrm>
-            <a:off x="1097280" y="1353312"/>
-            <a:ext cx="10362895" cy="402336"/>
+            <a:off x="457200" y="1170432"/>
+            <a:ext cx="11277295" cy="5230368"/>
           </a:xfrm>
           <a:prstGeom prst="rect">
             <a:avLst/>
@@ -7756,354 +7561,63 @@
           <a:noFill/>
         </p:spPr>
         <p:txBody>
-          <a:bodyPr wrap="square" anchor="ctr"/>
-          <a:lstStyle/>
-          <a:p>
-            <a:r>
-              <a:rPr sz="1500" b="0" i="0">
+          <a:bodyPr wrap="square">
+            <a:spAutoFit/>
+          </a:bodyPr>
+          <a:lstStyle/>
+          <a:p>
+            <a:pPr>
+              <a:spcAft>
+                <a:spcPts val="800"/>
+              </a:spcAft>
+            </a:pPr>
+            <a:r>
+              <a:rPr sz="2000" b="0" i="0">
                 <a:solidFill>
                   <a:srgbClr val="333333"/>
                 </a:solidFill>
                 <a:latin typeface="Calibri"/>
               </a:rPr>
-              <a:t>Si leo esta relacion en voz alta con sus dos multiplicidades, la frase resultante es cierta en la clinica Huellitas o suena absurda?</a:t>
-            </a:r>
-          </a:p>
-        </p:txBody>
-      </p:sp>
-      <p:sp>
-        <p:nvSpPr>
-          <p:cNvPr id="9" name="Rounded Rectangle 8"/>
-          <p:cNvSpPr/>
-          <p:nvPr/>
-        </p:nvSpPr>
-        <p:spPr>
-          <a:xfrm>
-            <a:off x="457200" y="1938528"/>
-            <a:ext cx="11277295" cy="566928"/>
-          </a:xfrm>
-          <a:prstGeom prst="roundRect">
-            <a:avLst>
-              <a:gd name="adj" fmla="val 12000"/>
-            </a:avLst>
-          </a:prstGeom>
-          <a:solidFill>
-            <a:srgbClr val="F2F2F2"/>
-          </a:solidFill>
-          <a:ln>
-            <a:noFill/>
-          </a:ln>
-        </p:spPr>
-        <p:style>
-          <a:lnRef idx="1">
-            <a:schemeClr val="accent1"/>
-          </a:lnRef>
-          <a:fillRef idx="3">
-            <a:schemeClr val="accent1"/>
-          </a:fillRef>
-          <a:effectRef idx="2">
-            <a:schemeClr val="accent1"/>
-          </a:effectRef>
-          <a:fontRef idx="minor">
-            <a:schemeClr val="lt1"/>
-          </a:fontRef>
-        </p:style>
-        <p:txBody>
-          <a:bodyPr rtlCol="0" anchor="ctr"/>
-          <a:lstStyle/>
-          <a:p>
-            <a:pPr algn="ctr"/>
-          </a:p>
-        </p:txBody>
-      </p:sp>
-      <p:sp>
-        <p:nvSpPr>
-          <p:cNvPr id="10" name="Rectangle 9"/>
-          <p:cNvSpPr/>
-          <p:nvPr/>
-        </p:nvSpPr>
-        <p:spPr>
-          <a:xfrm>
-            <a:off x="640080" y="2084832"/>
-            <a:ext cx="274320" cy="274320"/>
-          </a:xfrm>
-          <a:prstGeom prst="rect">
-            <a:avLst/>
-          </a:prstGeom>
-          <a:solidFill>
-            <a:srgbClr val="FFFFFF"/>
-          </a:solidFill>
-          <a:ln>
-            <a:solidFill>
-              <a:srgbClr val="333333"/>
-            </a:solidFill>
-          </a:ln>
-        </p:spPr>
-        <p:style>
-          <a:lnRef idx="1">
-            <a:schemeClr val="accent1"/>
-          </a:lnRef>
-          <a:fillRef idx="3">
-            <a:schemeClr val="accent1"/>
-          </a:fillRef>
-          <a:effectRef idx="2">
-            <a:schemeClr val="accent1"/>
-          </a:effectRef>
-          <a:fontRef idx="minor">
-            <a:schemeClr val="lt1"/>
-          </a:fontRef>
-        </p:style>
-        <p:txBody>
-          <a:bodyPr rtlCol="0" anchor="ctr"/>
-          <a:lstStyle/>
-          <a:p>
-            <a:pPr algn="ctr"/>
-          </a:p>
-        </p:txBody>
-      </p:sp>
-      <p:sp>
-        <p:nvSpPr>
-          <p:cNvPr id="11" name="Rectangle 10"/>
-          <p:cNvSpPr/>
-          <p:nvPr/>
-        </p:nvSpPr>
-        <p:spPr>
-          <a:xfrm>
-            <a:off x="640080" y="2084832"/>
-            <a:ext cx="73152" cy="274320"/>
-          </a:xfrm>
-          <a:prstGeom prst="rect">
-            <a:avLst/>
-          </a:prstGeom>
-          <a:solidFill>
-            <a:srgbClr val="269CCB"/>
-          </a:solidFill>
-          <a:ln>
-            <a:noFill/>
-          </a:ln>
-        </p:spPr>
-        <p:style>
-          <a:lnRef idx="1">
-            <a:schemeClr val="accent1"/>
-          </a:lnRef>
-          <a:fillRef idx="3">
-            <a:schemeClr val="accent1"/>
-          </a:fillRef>
-          <a:effectRef idx="2">
-            <a:schemeClr val="accent1"/>
-          </a:effectRef>
-          <a:fontRef idx="minor">
-            <a:schemeClr val="lt1"/>
-          </a:fontRef>
-        </p:style>
-        <p:txBody>
-          <a:bodyPr rtlCol="0" anchor="ctr"/>
-          <a:lstStyle/>
-          <a:p>
-            <a:pPr algn="ctr"/>
-          </a:p>
-        </p:txBody>
-      </p:sp>
-      <p:sp>
-        <p:nvSpPr>
-          <p:cNvPr id="12" name="TextBox 11"/>
-          <p:cNvSpPr txBox="1"/>
-          <p:nvPr/>
-        </p:nvSpPr>
-        <p:spPr>
-          <a:xfrm>
-            <a:off x="1097280" y="2029968"/>
-            <a:ext cx="10362895" cy="402336"/>
-          </a:xfrm>
-          <a:prstGeom prst="rect">
-            <a:avLst/>
-          </a:prstGeom>
-          <a:noFill/>
-        </p:spPr>
-        <p:txBody>
-          <a:bodyPr wrap="square" anchor="ctr"/>
-          <a:lstStyle/>
-          <a:p>
-            <a:r>
-              <a:rPr sz="1500" b="0" i="0">
+              <a:t>–   Ya existen el catalogo de RF/RNF y el backlog de historias de VetCare, ambos escritos en texto y sin ninguna representacion grafica.</a:t>
+            </a:r>
+          </a:p>
+          <a:p>
+            <a:pPr>
+              <a:spcAft>
+                <a:spcPts val="800"/>
+              </a:spcAft>
+            </a:pPr>
+            <a:r>
+              <a:rPr sz="2000" b="0" i="0">
                 <a:solidFill>
                   <a:srgbClr val="333333"/>
                 </a:solidFill>
                 <a:latin typeface="Calibri"/>
               </a:rPr>
-              <a:t>Este atributo pertenece de verdad al concepto donde lo puse, o lo puse ahi solo porque en la pantalla aparecen juntos?</a:t>
-            </a:r>
-          </a:p>
-        </p:txBody>
-      </p:sp>
-      <p:sp>
-        <p:nvSpPr>
-          <p:cNvPr id="13" name="Rounded Rectangle 12"/>
-          <p:cNvSpPr/>
-          <p:nvPr/>
-        </p:nvSpPr>
-        <p:spPr>
-          <a:xfrm>
-            <a:off x="457200" y="2615184"/>
-            <a:ext cx="11277295" cy="566928"/>
-          </a:xfrm>
-          <a:prstGeom prst="roundRect">
-            <a:avLst>
-              <a:gd name="adj" fmla="val 12000"/>
-            </a:avLst>
-          </a:prstGeom>
-          <a:solidFill>
-            <a:srgbClr val="F2F2F2"/>
-          </a:solidFill>
-          <a:ln>
-            <a:noFill/>
-          </a:ln>
-        </p:spPr>
-        <p:style>
-          <a:lnRef idx="1">
-            <a:schemeClr val="accent1"/>
-          </a:lnRef>
-          <a:fillRef idx="3">
-            <a:schemeClr val="accent1"/>
-          </a:fillRef>
-          <a:effectRef idx="2">
-            <a:schemeClr val="accent1"/>
-          </a:effectRef>
-          <a:fontRef idx="minor">
-            <a:schemeClr val="lt1"/>
-          </a:fontRef>
-        </p:style>
-        <p:txBody>
-          <a:bodyPr rtlCol="0" anchor="ctr"/>
-          <a:lstStyle/>
-          <a:p>
-            <a:pPr algn="ctr"/>
-          </a:p>
-        </p:txBody>
-      </p:sp>
-      <p:sp>
-        <p:nvSpPr>
-          <p:cNvPr id="14" name="Rectangle 13"/>
-          <p:cNvSpPr/>
-          <p:nvPr/>
-        </p:nvSpPr>
-        <p:spPr>
-          <a:xfrm>
-            <a:off x="640080" y="2761488"/>
-            <a:ext cx="274320" cy="274320"/>
-          </a:xfrm>
-          <a:prstGeom prst="rect">
-            <a:avLst/>
-          </a:prstGeom>
-          <a:solidFill>
-            <a:srgbClr val="FFFFFF"/>
-          </a:solidFill>
-          <a:ln>
-            <a:solidFill>
-              <a:srgbClr val="333333"/>
-            </a:solidFill>
-          </a:ln>
-        </p:spPr>
-        <p:style>
-          <a:lnRef idx="1">
-            <a:schemeClr val="accent1"/>
-          </a:lnRef>
-          <a:fillRef idx="3">
-            <a:schemeClr val="accent1"/>
-          </a:fillRef>
-          <a:effectRef idx="2">
-            <a:schemeClr val="accent1"/>
-          </a:effectRef>
-          <a:fontRef idx="minor">
-            <a:schemeClr val="lt1"/>
-          </a:fontRef>
-        </p:style>
-        <p:txBody>
-          <a:bodyPr rtlCol="0" anchor="ctr"/>
-          <a:lstStyle/>
-          <a:p>
-            <a:pPr algn="ctr"/>
-          </a:p>
-        </p:txBody>
-      </p:sp>
-      <p:sp>
-        <p:nvSpPr>
-          <p:cNvPr id="15" name="Rectangle 14"/>
-          <p:cNvSpPr/>
-          <p:nvPr/>
-        </p:nvSpPr>
-        <p:spPr>
-          <a:xfrm>
-            <a:off x="640080" y="2761488"/>
-            <a:ext cx="73152" cy="274320"/>
-          </a:xfrm>
-          <a:prstGeom prst="rect">
-            <a:avLst/>
-          </a:prstGeom>
-          <a:solidFill>
-            <a:srgbClr val="269CCB"/>
-          </a:solidFill>
-          <a:ln>
-            <a:noFill/>
-          </a:ln>
-        </p:spPr>
-        <p:style>
-          <a:lnRef idx="1">
-            <a:schemeClr val="accent1"/>
-          </a:lnRef>
-          <a:fillRef idx="3">
-            <a:schemeClr val="accent1"/>
-          </a:fillRef>
-          <a:effectRef idx="2">
-            <a:schemeClr val="accent1"/>
-          </a:effectRef>
-          <a:fontRef idx="minor">
-            <a:schemeClr val="lt1"/>
-          </a:fontRef>
-        </p:style>
-        <p:txBody>
-          <a:bodyPr rtlCol="0" anchor="ctr"/>
-          <a:lstStyle/>
-          <a:p>
-            <a:pPr algn="ctr"/>
-          </a:p>
-        </p:txBody>
-      </p:sp>
-      <p:sp>
-        <p:nvSpPr>
-          <p:cNvPr id="16" name="TextBox 15"/>
-          <p:cNvSpPr txBox="1"/>
-          <p:nvPr/>
-        </p:nvSpPr>
-        <p:spPr>
-          <a:xfrm>
-            <a:off x="1097280" y="2706624"/>
-            <a:ext cx="10362895" cy="402336"/>
-          </a:xfrm>
-          <a:prstGeom prst="rect">
-            <a:avLst/>
-          </a:prstGeom>
-          <a:noFill/>
-        </p:spPr>
-        <p:txBody>
-          <a:bodyPr wrap="square" anchor="ctr"/>
-          <a:lstStyle/>
-          <a:p>
-            <a:r>
-              <a:rPr sz="1500" b="0" i="0">
+              <a:t>–   Nadie ha definido todavia que conceptos del negocio existen, que datos guarda cada uno ni como se relacionan entre si.</a:t>
+            </a:r>
+          </a:p>
+          <a:p>
+            <a:pPr>
+              <a:spcAft>
+                <a:spcPts val="800"/>
+              </a:spcAft>
+            </a:pPr>
+            <a:r>
+              <a:rPr sz="2000" b="0" i="0">
                 <a:solidFill>
                   <a:srgbClr val="333333"/>
                 </a:solidFill>
                 <a:latin typeface="Calibri"/>
               </a:rPr>
-              <a:t>Esta caja es un concepto del negocio del que habla el veterinario, o es una pantalla, un reporte o algo tecnico que se me colo?</a:t>
-            </a:r>
-          </a:p>
-        </p:txBody>
-      </p:sp>
-      <p:sp>
-        <p:nvSpPr>
-          <p:cNvPr id="17" name="TextBox 16"/>
+              <a:t>–   El equipo discute en palabras si una mascota puede tener dos duenos y si la cita pertenece a la mascota o al veterinario, y esa discusion no se cierra hablando.</a:t>
+            </a:r>
+          </a:p>
+        </p:txBody>
+      </p:sp>
+      <p:sp>
+        <p:nvSpPr>
+          <p:cNvPr id="6" name="TextBox 5"/>
           <p:cNvSpPr txBox="1"/>
           <p:nvPr/>
         </p:nvSpPr>
@@ -8277,21 +7791,111 @@
                 </a:solidFill>
                 <a:latin typeface="Calibri"/>
               </a:rPr>
-              <a:t>Criterios de exito / entregable</a:t>
-            </a:r>
-          </a:p>
-        </p:txBody>
-      </p:sp>
-      <p:sp>
-        <p:nvSpPr>
-          <p:cNvPr id="5" name="TextBox 4"/>
+              <a:t>Taller PI — pasos guiados</a:t>
+            </a:r>
+          </a:p>
+        </p:txBody>
+      </p:sp>
+      <p:sp>
+        <p:nvSpPr>
+          <p:cNvPr id="5" name="Rounded Rectangle 4"/>
+          <p:cNvSpPr/>
+          <p:nvPr/>
+        </p:nvSpPr>
+        <p:spPr>
+          <a:xfrm>
+            <a:off x="457200" y="1234440"/>
+            <a:ext cx="11277295" cy="950976"/>
+          </a:xfrm>
+          <a:prstGeom prst="roundRect">
+            <a:avLst>
+              <a:gd name="adj" fmla="val 12000"/>
+            </a:avLst>
+          </a:prstGeom>
+          <a:solidFill>
+            <a:srgbClr val="F2F2F2"/>
+          </a:solidFill>
+          <a:ln>
+            <a:noFill/>
+          </a:ln>
+        </p:spPr>
+        <p:style>
+          <a:lnRef idx="1">
+            <a:schemeClr val="accent1"/>
+          </a:lnRef>
+          <a:fillRef idx="3">
+            <a:schemeClr val="accent1"/>
+          </a:fillRef>
+          <a:effectRef idx="2">
+            <a:schemeClr val="accent1"/>
+          </a:effectRef>
+          <a:fontRef idx="minor">
+            <a:schemeClr val="lt1"/>
+          </a:fontRef>
+        </p:style>
+        <p:txBody>
+          <a:bodyPr rtlCol="0" anchor="ctr"/>
+          <a:lstStyle/>
+          <a:p>
+            <a:pPr algn="ctr"/>
+          </a:p>
+        </p:txBody>
+      </p:sp>
+      <p:sp>
+        <p:nvSpPr>
+          <p:cNvPr id="6" name="Rounded Rectangle 5"/>
+          <p:cNvSpPr/>
+          <p:nvPr/>
+        </p:nvSpPr>
+        <p:spPr>
+          <a:xfrm>
+            <a:off x="594360" y="1490472"/>
+            <a:ext cx="438912" cy="438912"/>
+          </a:xfrm>
+          <a:prstGeom prst="roundRect">
+            <a:avLst>
+              <a:gd name="adj" fmla="val 12000"/>
+            </a:avLst>
+          </a:prstGeom>
+          <a:solidFill>
+            <a:srgbClr val="095292"/>
+          </a:solidFill>
+          <a:ln>
+            <a:noFill/>
+          </a:ln>
+        </p:spPr>
+        <p:style>
+          <a:lnRef idx="1">
+            <a:schemeClr val="accent1"/>
+          </a:lnRef>
+          <a:fillRef idx="3">
+            <a:schemeClr val="accent1"/>
+          </a:fillRef>
+          <a:effectRef idx="2">
+            <a:schemeClr val="accent1"/>
+          </a:effectRef>
+          <a:fontRef idx="minor">
+            <a:schemeClr val="lt1"/>
+          </a:fontRef>
+        </p:style>
+        <p:txBody>
+          <a:bodyPr rtlCol="0" anchor="ctr"/>
+          <a:lstStyle/>
+          <a:p>
+            <a:pPr algn="ctr"/>
+          </a:p>
+        </p:txBody>
+      </p:sp>
+      <p:sp>
+        <p:nvSpPr>
+          <p:cNvPr id="7" name="TextBox 6"/>
           <p:cNvSpPr txBox="1"/>
           <p:nvPr/>
         </p:nvSpPr>
         <p:spPr>
           <a:xfrm>
-            <a:off x="457200" y="1170432"/>
-            <a:ext cx="11277295" cy="5230368"/>
+            <a:off x="594360" y="1490472"/>
+            <a:ext cx="438912" cy="438912"/>
           </a:xfrm>
           <a:prstGeom prst="rect">
             <a:avLst/>
@@ -8299,219 +7903,677 @@
           <a:noFill/>
         </p:spPr>
         <p:txBody>
-          <a:bodyPr wrap="square">
-            <a:spAutoFit/>
-          </a:bodyPr>
-          <a:lstStyle/>
-          <a:p>
-            <a:pPr>
-              <a:spcAft>
-                <a:spcPts val="800"/>
-              </a:spcAft>
-            </a:pPr>
-            <a:r>
-              <a:rPr sz="2000" b="0" i="0">
-                <a:solidFill>
-                  <a:srgbClr val="333333"/>
-                </a:solidFill>
-                <a:latin typeface="Calibri"/>
-              </a:rPr>
-              <a:t>–   </a:t>
-            </a:r>
-            <a:r>
-              <a:rPr sz="2000" b="1" i="0">
-                <a:solidFill>
-                  <a:srgbClr val="333333"/>
-                </a:solidFill>
-                <a:latin typeface="Calibri"/>
-              </a:rPr>
-              <a:t>Entregable:</a:t>
-            </a:r>
-            <a:r>
-              <a:rPr sz="2000" b="0" i="0">
-                <a:solidFill>
-                  <a:srgbClr val="333333"/>
-                </a:solidFill>
-                <a:latin typeface="Calibri"/>
-              </a:rPr>
-              <a:t> Diagrama de clases de VetCare hecho en draw.io, exportado a PNG y al archivo .drawio, con 5 clases, atributos tipados, metodos propios y 4 asociaciones con multiplicidad y nombre de rol, subido a la plataforma del curso.</a:t>
-            </a:r>
-          </a:p>
-          <a:p>
-            <a:pPr>
-              <a:spcAft>
-                <a:spcPts val="800"/>
-              </a:spcAft>
-            </a:pPr>
-            <a:r>
-              <a:rPr sz="2000" b="0" i="0">
-                <a:solidFill>
-                  <a:srgbClr val="333333"/>
-                </a:solidFill>
-                <a:latin typeface="Calibri"/>
-              </a:rPr>
-              <a:t>–   </a:t>
-            </a:r>
-            <a:r>
-              <a:rPr sz="2000" b="1" i="0">
-                <a:solidFill>
-                  <a:srgbClr val="333333"/>
-                </a:solidFill>
-                <a:latin typeface="Calibri"/>
-              </a:rPr>
-              <a:t>Exito:</a:t>
-            </a:r>
-            <a:r>
-              <a:rPr sz="2000" b="0" i="0">
-                <a:solidFill>
-                  <a:srgbClr val="333333"/>
-                </a:solidFill>
-                <a:latin typeface="Calibri"/>
-              </a:rPr>
-              <a:t> El diagrama tiene las 5 clases del dominio en singular, con mayuscula inicial y sin clases tecnicas (nada de DAO, Conexion, Login o Menu).</a:t>
-            </a:r>
-          </a:p>
-          <a:p>
-            <a:pPr>
-              <a:spcAft>
-                <a:spcPts val="800"/>
-              </a:spcAft>
-            </a:pPr>
-            <a:r>
-              <a:rPr sz="2000" b="0" i="0">
-                <a:solidFill>
-                  <a:srgbClr val="333333"/>
-                </a:solidFill>
-                <a:latin typeface="Calibri"/>
-              </a:rPr>
-              <a:t>–   </a:t>
-            </a:r>
-            <a:r>
-              <a:rPr sz="2000" b="1" i="0">
-                <a:solidFill>
-                  <a:srgbClr val="333333"/>
-                </a:solidFill>
-                <a:latin typeface="Calibri"/>
-              </a:rPr>
-              <a:t>Exito:</a:t>
-            </a:r>
-            <a:r>
-              <a:rPr sz="2000" b="0" i="0">
-                <a:solidFill>
-                  <a:srgbClr val="333333"/>
-                </a:solidFill>
-                <a:latin typeface="Calibri"/>
-              </a:rPr>
-              <a:t> Cada clase tiene minimo 4 atributos con visibilidad y tipo, y ningun atributo aparece duplicado en dos clases.</a:t>
-            </a:r>
-          </a:p>
-          <a:p>
-            <a:pPr>
-              <a:spcAft>
-                <a:spcPts val="800"/>
-              </a:spcAft>
-            </a:pPr>
-            <a:r>
-              <a:rPr sz="2000" b="0" i="0">
-                <a:solidFill>
-                  <a:srgbClr val="333333"/>
-                </a:solidFill>
-                <a:latin typeface="Calibri"/>
-              </a:rPr>
-              <a:t>–   </a:t>
-            </a:r>
-            <a:r>
-              <a:rPr sz="2000" b="1" i="0">
-                <a:solidFill>
-                  <a:srgbClr val="333333"/>
-                </a:solidFill>
-                <a:latin typeface="Calibri"/>
-              </a:rPr>
-              <a:t>Exito:</a:t>
-            </a:r>
-            <a:r>
-              <a:rPr sz="2000" b="0" i="0">
-                <a:solidFill>
-                  <a:srgbClr val="333333"/>
-                </a:solidFill>
-                <a:latin typeface="Calibri"/>
-              </a:rPr>
-              <a:t> Las 4 asociaciones tienen nombre de relacion y multiplicidad explicita en ambos extremos.</a:t>
-            </a:r>
-          </a:p>
-          <a:p>
-            <a:pPr>
-              <a:spcAft>
-                <a:spcPts val="800"/>
-              </a:spcAft>
-            </a:pPr>
-            <a:r>
-              <a:rPr sz="2000" b="0" i="0">
-                <a:solidFill>
-                  <a:srgbClr val="333333"/>
-                </a:solidFill>
-                <a:latin typeface="Calibri"/>
-              </a:rPr>
-              <a:t>–   </a:t>
-            </a:r>
-            <a:r>
-              <a:rPr sz="2000" b="1" i="0">
-                <a:solidFill>
-                  <a:srgbClr val="333333"/>
-                </a:solidFill>
-                <a:latin typeface="Calibri"/>
-              </a:rPr>
-              <a:t>Exito:</a:t>
-            </a:r>
-            <a:r>
-              <a:rPr sz="2000" b="0" i="0">
-                <a:solidFill>
-                  <a:srgbClr val="333333"/>
-                </a:solidFill>
-                <a:latin typeface="Calibri"/>
-              </a:rPr>
-              <a:t> Cada relacion se puede leer en voz alta como una frase verdadera del negocio de la clinica Huellitas, y cada clase se rastrea a un RF o a una historia.</a:t>
-            </a:r>
-          </a:p>
-          <a:p>
-            <a:pPr>
-              <a:spcAft>
-                <a:spcPts val="800"/>
-              </a:spcAft>
-            </a:pPr>
-            <a:r>
-              <a:rPr sz="2000" b="0" i="0">
-                <a:solidFill>
-                  <a:srgbClr val="333333"/>
-                </a:solidFill>
-                <a:latin typeface="Calibri"/>
-              </a:rPr>
-              <a:t>–   </a:t>
-            </a:r>
-            <a:r>
-              <a:rPr sz="2000" b="1" i="0">
-                <a:solidFill>
-                  <a:srgbClr val="333333"/>
-                </a:solidFill>
-                <a:latin typeface="Calibri"/>
-              </a:rPr>
-              <a:t>Entrega en la plataforma del curso</a:t>
-            </a:r>
-            <a:r>
-              <a:rPr sz="2000" b="0" i="0">
-                <a:solidFill>
-                  <a:srgbClr val="333333"/>
-                </a:solidFill>
-                <a:latin typeface="Calibri"/>
-              </a:rPr>
-              <a:t> — en la fecha que indique el docente.</a:t>
-            </a:r>
-          </a:p>
-        </p:txBody>
-      </p:sp>
-      <p:sp>
-        <p:nvSpPr>
-          <p:cNvPr id="6" name="TextBox 5"/>
+          <a:bodyPr wrap="square" anchor="ctr"/>
+          <a:lstStyle/>
+          <a:p>
+            <a:pPr algn="ctr"/>
+            <a:r>
+              <a:rPr sz="1600" b="1" i="0">
+                <a:solidFill>
+                  <a:srgbClr val="FFFFFF"/>
+                </a:solidFill>
+                <a:latin typeface="Calibri"/>
+              </a:rPr>
+              <a:t>1</a:t>
+            </a:r>
+          </a:p>
+        </p:txBody>
+      </p:sp>
+      <p:sp>
+        <p:nvSpPr>
+          <p:cNvPr id="8" name="TextBox 7"/>
+          <p:cNvSpPr txBox="1"/>
+          <p:nvPr/>
+        </p:nvSpPr>
+        <p:spPr>
+          <a:xfrm>
+            <a:off x="1188720" y="1325880"/>
+            <a:ext cx="10271455" cy="786384"/>
+          </a:xfrm>
+          <a:prstGeom prst="rect">
+            <a:avLst/>
+          </a:prstGeom>
+          <a:noFill/>
+        </p:spPr>
+        <p:txBody>
+          <a:bodyPr wrap="square" anchor="ctr"/>
+          <a:lstStyle/>
+          <a:p>
+            <a:r>
+              <a:rPr sz="1500" b="1" i="0">
+                <a:solidFill>
+                  <a:srgbClr val="095292"/>
+                </a:solidFill>
+                <a:latin typeface="Calibri"/>
+              </a:rPr>
+              <a:t>Paso 1: subraye en el catalogo de requisitos y en el backlog los sustantivos del negocio de VetCare y arme la lista de clases candidatas, descartando las que sean pantallas, reportes o cosas tecnicas.</a:t>
+            </a:r>
+          </a:p>
+        </p:txBody>
+      </p:sp>
+      <p:sp>
+        <p:nvSpPr>
+          <p:cNvPr id="9" name="Rounded Rectangle 8"/>
+          <p:cNvSpPr/>
+          <p:nvPr/>
+        </p:nvSpPr>
+        <p:spPr>
+          <a:xfrm>
+            <a:off x="457200" y="2276856"/>
+            <a:ext cx="11277295" cy="950976"/>
+          </a:xfrm>
+          <a:prstGeom prst="roundRect">
+            <a:avLst>
+              <a:gd name="adj" fmla="val 12000"/>
+            </a:avLst>
+          </a:prstGeom>
+          <a:solidFill>
+            <a:srgbClr val="E8F4FA"/>
+          </a:solidFill>
+          <a:ln>
+            <a:noFill/>
+          </a:ln>
+        </p:spPr>
+        <p:style>
+          <a:lnRef idx="1">
+            <a:schemeClr val="accent1"/>
+          </a:lnRef>
+          <a:fillRef idx="3">
+            <a:schemeClr val="accent1"/>
+          </a:fillRef>
+          <a:effectRef idx="2">
+            <a:schemeClr val="accent1"/>
+          </a:effectRef>
+          <a:fontRef idx="minor">
+            <a:schemeClr val="lt1"/>
+          </a:fontRef>
+        </p:style>
+        <p:txBody>
+          <a:bodyPr rtlCol="0" anchor="ctr"/>
+          <a:lstStyle/>
+          <a:p>
+            <a:pPr algn="ctr"/>
+          </a:p>
+        </p:txBody>
+      </p:sp>
+      <p:sp>
+        <p:nvSpPr>
+          <p:cNvPr id="10" name="Rounded Rectangle 9"/>
+          <p:cNvSpPr/>
+          <p:nvPr/>
+        </p:nvSpPr>
+        <p:spPr>
+          <a:xfrm>
+            <a:off x="594360" y="2532888"/>
+            <a:ext cx="438912" cy="438912"/>
+          </a:xfrm>
+          <a:prstGeom prst="roundRect">
+            <a:avLst>
+              <a:gd name="adj" fmla="val 12000"/>
+            </a:avLst>
+          </a:prstGeom>
+          <a:solidFill>
+            <a:srgbClr val="095292"/>
+          </a:solidFill>
+          <a:ln>
+            <a:noFill/>
+          </a:ln>
+        </p:spPr>
+        <p:style>
+          <a:lnRef idx="1">
+            <a:schemeClr val="accent1"/>
+          </a:lnRef>
+          <a:fillRef idx="3">
+            <a:schemeClr val="accent1"/>
+          </a:fillRef>
+          <a:effectRef idx="2">
+            <a:schemeClr val="accent1"/>
+          </a:effectRef>
+          <a:fontRef idx="minor">
+            <a:schemeClr val="lt1"/>
+          </a:fontRef>
+        </p:style>
+        <p:txBody>
+          <a:bodyPr rtlCol="0" anchor="ctr"/>
+          <a:lstStyle/>
+          <a:p>
+            <a:pPr algn="ctr"/>
+          </a:p>
+        </p:txBody>
+      </p:sp>
+      <p:sp>
+        <p:nvSpPr>
+          <p:cNvPr id="11" name="TextBox 10"/>
+          <p:cNvSpPr txBox="1"/>
+          <p:nvPr/>
+        </p:nvSpPr>
+        <p:spPr>
+          <a:xfrm>
+            <a:off x="594360" y="2532888"/>
+            <a:ext cx="438912" cy="438912"/>
+          </a:xfrm>
+          <a:prstGeom prst="rect">
+            <a:avLst/>
+          </a:prstGeom>
+          <a:noFill/>
+        </p:spPr>
+        <p:txBody>
+          <a:bodyPr wrap="square" anchor="ctr"/>
+          <a:lstStyle/>
+          <a:p>
+            <a:pPr algn="ctr"/>
+            <a:r>
+              <a:rPr sz="1600" b="1" i="0">
+                <a:solidFill>
+                  <a:srgbClr val="FFFFFF"/>
+                </a:solidFill>
+                <a:latin typeface="Calibri"/>
+              </a:rPr>
+              <a:t>2</a:t>
+            </a:r>
+          </a:p>
+        </p:txBody>
+      </p:sp>
+      <p:sp>
+        <p:nvSpPr>
+          <p:cNvPr id="12" name="TextBox 11"/>
+          <p:cNvSpPr txBox="1"/>
+          <p:nvPr/>
+        </p:nvSpPr>
+        <p:spPr>
+          <a:xfrm>
+            <a:off x="1188720" y="2368296"/>
+            <a:ext cx="10271455" cy="786384"/>
+          </a:xfrm>
+          <a:prstGeom prst="rect">
+            <a:avLst/>
+          </a:prstGeom>
+          <a:noFill/>
+        </p:spPr>
+        <p:txBody>
+          <a:bodyPr wrap="square" anchor="ctr"/>
+          <a:lstStyle/>
+          <a:p>
+            <a:r>
+              <a:rPr sz="1500" b="1" i="0">
+                <a:solidFill>
+                  <a:srgbClr val="095292"/>
+                </a:solidFill>
+                <a:latin typeface="Calibri"/>
+              </a:rPr>
+              <a:t>Paso 2: dibuje en draw.io las cinco clases Dueno, Mascota, Cita, Veterinario y Atencion con la caja de tres compartimentos, en singular y con mayuscula inicial.</a:t>
+            </a:r>
+          </a:p>
+        </p:txBody>
+      </p:sp>
+      <p:sp>
+        <p:nvSpPr>
+          <p:cNvPr id="13" name="Rounded Rectangle 12"/>
+          <p:cNvSpPr/>
+          <p:nvPr/>
+        </p:nvSpPr>
+        <p:spPr>
+          <a:xfrm>
+            <a:off x="457200" y="3319272"/>
+            <a:ext cx="11277295" cy="950976"/>
+          </a:xfrm>
+          <a:prstGeom prst="roundRect">
+            <a:avLst>
+              <a:gd name="adj" fmla="val 12000"/>
+            </a:avLst>
+          </a:prstGeom>
+          <a:solidFill>
+            <a:srgbClr val="F2F2F2"/>
+          </a:solidFill>
+          <a:ln>
+            <a:noFill/>
+          </a:ln>
+        </p:spPr>
+        <p:style>
+          <a:lnRef idx="1">
+            <a:schemeClr val="accent1"/>
+          </a:lnRef>
+          <a:fillRef idx="3">
+            <a:schemeClr val="accent1"/>
+          </a:fillRef>
+          <a:effectRef idx="2">
+            <a:schemeClr val="accent1"/>
+          </a:effectRef>
+          <a:fontRef idx="minor">
+            <a:schemeClr val="lt1"/>
+          </a:fontRef>
+        </p:style>
+        <p:txBody>
+          <a:bodyPr rtlCol="0" anchor="ctr"/>
+          <a:lstStyle/>
+          <a:p>
+            <a:pPr algn="ctr"/>
+          </a:p>
+        </p:txBody>
+      </p:sp>
+      <p:sp>
+        <p:nvSpPr>
+          <p:cNvPr id="14" name="Rounded Rectangle 13"/>
+          <p:cNvSpPr/>
+          <p:nvPr/>
+        </p:nvSpPr>
+        <p:spPr>
+          <a:xfrm>
+            <a:off x="594360" y="3575304"/>
+            <a:ext cx="438912" cy="438912"/>
+          </a:xfrm>
+          <a:prstGeom prst="roundRect">
+            <a:avLst>
+              <a:gd name="adj" fmla="val 12000"/>
+            </a:avLst>
+          </a:prstGeom>
+          <a:solidFill>
+            <a:srgbClr val="095292"/>
+          </a:solidFill>
+          <a:ln>
+            <a:noFill/>
+          </a:ln>
+        </p:spPr>
+        <p:style>
+          <a:lnRef idx="1">
+            <a:schemeClr val="accent1"/>
+          </a:lnRef>
+          <a:fillRef idx="3">
+            <a:schemeClr val="accent1"/>
+          </a:fillRef>
+          <a:effectRef idx="2">
+            <a:schemeClr val="accent1"/>
+          </a:effectRef>
+          <a:fontRef idx="minor">
+            <a:schemeClr val="lt1"/>
+          </a:fontRef>
+        </p:style>
+        <p:txBody>
+          <a:bodyPr rtlCol="0" anchor="ctr"/>
+          <a:lstStyle/>
+          <a:p>
+            <a:pPr algn="ctr"/>
+          </a:p>
+        </p:txBody>
+      </p:sp>
+      <p:sp>
+        <p:nvSpPr>
+          <p:cNvPr id="15" name="TextBox 14"/>
+          <p:cNvSpPr txBox="1"/>
+          <p:nvPr/>
+        </p:nvSpPr>
+        <p:spPr>
+          <a:xfrm>
+            <a:off x="594360" y="3575304"/>
+            <a:ext cx="438912" cy="438912"/>
+          </a:xfrm>
+          <a:prstGeom prst="rect">
+            <a:avLst/>
+          </a:prstGeom>
+          <a:noFill/>
+        </p:spPr>
+        <p:txBody>
+          <a:bodyPr wrap="square" anchor="ctr"/>
+          <a:lstStyle/>
+          <a:p>
+            <a:pPr algn="ctr"/>
+            <a:r>
+              <a:rPr sz="1600" b="1" i="0">
+                <a:solidFill>
+                  <a:srgbClr val="FFFFFF"/>
+                </a:solidFill>
+                <a:latin typeface="Calibri"/>
+              </a:rPr>
+              <a:t>3</a:t>
+            </a:r>
+          </a:p>
+        </p:txBody>
+      </p:sp>
+      <p:sp>
+        <p:nvSpPr>
+          <p:cNvPr id="16" name="TextBox 15"/>
+          <p:cNvSpPr txBox="1"/>
+          <p:nvPr/>
+        </p:nvSpPr>
+        <p:spPr>
+          <a:xfrm>
+            <a:off x="1188720" y="3410712"/>
+            <a:ext cx="10271455" cy="786384"/>
+          </a:xfrm>
+          <a:prstGeom prst="rect">
+            <a:avLst/>
+          </a:prstGeom>
+          <a:noFill/>
+        </p:spPr>
+        <p:txBody>
+          <a:bodyPr wrap="square" anchor="ctr"/>
+          <a:lstStyle/>
+          <a:p>
+            <a:r>
+              <a:rPr sz="1500" b="1" i="0">
+                <a:solidFill>
+                  <a:srgbClr val="095292"/>
+                </a:solidFill>
+                <a:latin typeface="Calibri"/>
+              </a:rPr>
+              <a:t>Paso 3: coloque minimo cuatro atributos por clase con visibilidad y tipo (por ejemplo -documento: String, -fechaNacimiento: Date) verificando que ningun atributo este repetido en dos clases distintas.</a:t>
+            </a:r>
+          </a:p>
+        </p:txBody>
+      </p:sp>
+      <p:sp>
+        <p:nvSpPr>
+          <p:cNvPr id="17" name="Rounded Rectangle 16"/>
+          <p:cNvSpPr/>
+          <p:nvPr/>
+        </p:nvSpPr>
+        <p:spPr>
+          <a:xfrm>
+            <a:off x="457200" y="4361688"/>
+            <a:ext cx="11277295" cy="950976"/>
+          </a:xfrm>
+          <a:prstGeom prst="roundRect">
+            <a:avLst>
+              <a:gd name="adj" fmla="val 12000"/>
+            </a:avLst>
+          </a:prstGeom>
+          <a:solidFill>
+            <a:srgbClr val="E8F4FA"/>
+          </a:solidFill>
+          <a:ln>
+            <a:noFill/>
+          </a:ln>
+        </p:spPr>
+        <p:style>
+          <a:lnRef idx="1">
+            <a:schemeClr val="accent1"/>
+          </a:lnRef>
+          <a:fillRef idx="3">
+            <a:schemeClr val="accent1"/>
+          </a:fillRef>
+          <a:effectRef idx="2">
+            <a:schemeClr val="accent1"/>
+          </a:effectRef>
+          <a:fontRef idx="minor">
+            <a:schemeClr val="lt1"/>
+          </a:fontRef>
+        </p:style>
+        <p:txBody>
+          <a:bodyPr rtlCol="0" anchor="ctr"/>
+          <a:lstStyle/>
+          <a:p>
+            <a:pPr algn="ctr"/>
+          </a:p>
+        </p:txBody>
+      </p:sp>
+      <p:sp>
+        <p:nvSpPr>
+          <p:cNvPr id="18" name="Rounded Rectangle 17"/>
+          <p:cNvSpPr/>
+          <p:nvPr/>
+        </p:nvSpPr>
+        <p:spPr>
+          <a:xfrm>
+            <a:off x="594360" y="4617720"/>
+            <a:ext cx="438912" cy="438912"/>
+          </a:xfrm>
+          <a:prstGeom prst="roundRect">
+            <a:avLst>
+              <a:gd name="adj" fmla="val 12000"/>
+            </a:avLst>
+          </a:prstGeom>
+          <a:solidFill>
+            <a:srgbClr val="095292"/>
+          </a:solidFill>
+          <a:ln>
+            <a:noFill/>
+          </a:ln>
+        </p:spPr>
+        <p:style>
+          <a:lnRef idx="1">
+            <a:schemeClr val="accent1"/>
+          </a:lnRef>
+          <a:fillRef idx="3">
+            <a:schemeClr val="accent1"/>
+          </a:fillRef>
+          <a:effectRef idx="2">
+            <a:schemeClr val="accent1"/>
+          </a:effectRef>
+          <a:fontRef idx="minor">
+            <a:schemeClr val="lt1"/>
+          </a:fontRef>
+        </p:style>
+        <p:txBody>
+          <a:bodyPr rtlCol="0" anchor="ctr"/>
+          <a:lstStyle/>
+          <a:p>
+            <a:pPr algn="ctr"/>
+          </a:p>
+        </p:txBody>
+      </p:sp>
+      <p:sp>
+        <p:nvSpPr>
+          <p:cNvPr id="19" name="TextBox 18"/>
+          <p:cNvSpPr txBox="1"/>
+          <p:nvPr/>
+        </p:nvSpPr>
+        <p:spPr>
+          <a:xfrm>
+            <a:off x="594360" y="4617720"/>
+            <a:ext cx="438912" cy="438912"/>
+          </a:xfrm>
+          <a:prstGeom prst="rect">
+            <a:avLst/>
+          </a:prstGeom>
+          <a:noFill/>
+        </p:spPr>
+        <p:txBody>
+          <a:bodyPr wrap="square" anchor="ctr"/>
+          <a:lstStyle/>
+          <a:p>
+            <a:pPr algn="ctr"/>
+            <a:r>
+              <a:rPr sz="1600" b="1" i="0">
+                <a:solidFill>
+                  <a:srgbClr val="FFFFFF"/>
+                </a:solidFill>
+                <a:latin typeface="Calibri"/>
+              </a:rPr>
+              <a:t>4</a:t>
+            </a:r>
+          </a:p>
+        </p:txBody>
+      </p:sp>
+      <p:sp>
+        <p:nvSpPr>
+          <p:cNvPr id="20" name="TextBox 19"/>
+          <p:cNvSpPr txBox="1"/>
+          <p:nvPr/>
+        </p:nvSpPr>
+        <p:spPr>
+          <a:xfrm>
+            <a:off x="1188720" y="4453128"/>
+            <a:ext cx="10271455" cy="786384"/>
+          </a:xfrm>
+          <a:prstGeom prst="rect">
+            <a:avLst/>
+          </a:prstGeom>
+          <a:noFill/>
+        </p:spPr>
+        <p:txBody>
+          <a:bodyPr wrap="square" anchor="ctr"/>
+          <a:lstStyle/>
+          <a:p>
+            <a:r>
+              <a:rPr sz="1500" b="1" i="0">
+                <a:solidFill>
+                  <a:srgbClr val="095292"/>
+                </a:solidFill>
+                <a:latin typeface="Calibri"/>
+              </a:rPr>
+              <a:t>Paso 4: agregue al menos un metodo propio del dominio por clase (por ejemplo +calcularEdad(): int en Mascota, +reprogramar(nuevaFecha: Date) en Cita) y descarte metodos tecnicos como conectarBD o guardarEnDisco.</a:t>
+            </a:r>
+          </a:p>
+        </p:txBody>
+      </p:sp>
+      <p:sp>
+        <p:nvSpPr>
+          <p:cNvPr id="21" name="Rounded Rectangle 20"/>
+          <p:cNvSpPr/>
+          <p:nvPr/>
+        </p:nvSpPr>
+        <p:spPr>
+          <a:xfrm>
+            <a:off x="457200" y="5404104"/>
+            <a:ext cx="11277295" cy="950976"/>
+          </a:xfrm>
+          <a:prstGeom prst="roundRect">
+            <a:avLst>
+              <a:gd name="adj" fmla="val 12000"/>
+            </a:avLst>
+          </a:prstGeom>
+          <a:solidFill>
+            <a:srgbClr val="F2F2F2"/>
+          </a:solidFill>
+          <a:ln>
+            <a:noFill/>
+          </a:ln>
+        </p:spPr>
+        <p:style>
+          <a:lnRef idx="1">
+            <a:schemeClr val="accent1"/>
+          </a:lnRef>
+          <a:fillRef idx="3">
+            <a:schemeClr val="accent1"/>
+          </a:fillRef>
+          <a:effectRef idx="2">
+            <a:schemeClr val="accent1"/>
+          </a:effectRef>
+          <a:fontRef idx="minor">
+            <a:schemeClr val="lt1"/>
+          </a:fontRef>
+        </p:style>
+        <p:txBody>
+          <a:bodyPr rtlCol="0" anchor="ctr"/>
+          <a:lstStyle/>
+          <a:p>
+            <a:pPr algn="ctr"/>
+          </a:p>
+        </p:txBody>
+      </p:sp>
+      <p:sp>
+        <p:nvSpPr>
+          <p:cNvPr id="22" name="Rounded Rectangle 21"/>
+          <p:cNvSpPr/>
+          <p:nvPr/>
+        </p:nvSpPr>
+        <p:spPr>
+          <a:xfrm>
+            <a:off x="594360" y="5660136"/>
+            <a:ext cx="438912" cy="438912"/>
+          </a:xfrm>
+          <a:prstGeom prst="roundRect">
+            <a:avLst>
+              <a:gd name="adj" fmla="val 12000"/>
+            </a:avLst>
+          </a:prstGeom>
+          <a:solidFill>
+            <a:srgbClr val="095292"/>
+          </a:solidFill>
+          <a:ln>
+            <a:noFill/>
+          </a:ln>
+        </p:spPr>
+        <p:style>
+          <a:lnRef idx="1">
+            <a:schemeClr val="accent1"/>
+          </a:lnRef>
+          <a:fillRef idx="3">
+            <a:schemeClr val="accent1"/>
+          </a:fillRef>
+          <a:effectRef idx="2">
+            <a:schemeClr val="accent1"/>
+          </a:effectRef>
+          <a:fontRef idx="minor">
+            <a:schemeClr val="lt1"/>
+          </a:fontRef>
+        </p:style>
+        <p:txBody>
+          <a:bodyPr rtlCol="0" anchor="ctr"/>
+          <a:lstStyle/>
+          <a:p>
+            <a:pPr algn="ctr"/>
+          </a:p>
+        </p:txBody>
+      </p:sp>
+      <p:sp>
+        <p:nvSpPr>
+          <p:cNvPr id="23" name="TextBox 22"/>
+          <p:cNvSpPr txBox="1"/>
+          <p:nvPr/>
+        </p:nvSpPr>
+        <p:spPr>
+          <a:xfrm>
+            <a:off x="594360" y="5660136"/>
+            <a:ext cx="438912" cy="438912"/>
+          </a:xfrm>
+          <a:prstGeom prst="rect">
+            <a:avLst/>
+          </a:prstGeom>
+          <a:noFill/>
+        </p:spPr>
+        <p:txBody>
+          <a:bodyPr wrap="square" anchor="ctr"/>
+          <a:lstStyle/>
+          <a:p>
+            <a:pPr algn="ctr"/>
+            <a:r>
+              <a:rPr sz="1600" b="1" i="0">
+                <a:solidFill>
+                  <a:srgbClr val="FFFFFF"/>
+                </a:solidFill>
+                <a:latin typeface="Calibri"/>
+              </a:rPr>
+              <a:t>5</a:t>
+            </a:r>
+          </a:p>
+        </p:txBody>
+      </p:sp>
+      <p:sp>
+        <p:nvSpPr>
+          <p:cNvPr id="24" name="TextBox 23"/>
+          <p:cNvSpPr txBox="1"/>
+          <p:nvPr/>
+        </p:nvSpPr>
+        <p:spPr>
+          <a:xfrm>
+            <a:off x="1188720" y="5495544"/>
+            <a:ext cx="10271455" cy="786384"/>
+          </a:xfrm>
+          <a:prstGeom prst="rect">
+            <a:avLst/>
+          </a:prstGeom>
+          <a:noFill/>
+        </p:spPr>
+        <p:txBody>
+          <a:bodyPr wrap="square" anchor="ctr"/>
+          <a:lstStyle/>
+          <a:p>
+            <a:r>
+              <a:rPr sz="1500" b="1" i="0">
+                <a:solidFill>
+                  <a:srgbClr val="095292"/>
+                </a:solidFill>
+                <a:latin typeface="Calibri"/>
+              </a:rPr>
+              <a:t>Paso 5: trace las cuatro asociaciones con nombre de relacion y multiplicidad en ambos extremos, leala cada una en voz alta como frase completa, exporte a PNG y .drawio y suba ambos archivos a la plataforma del curso.</a:t>
+            </a:r>
+          </a:p>
+        </p:txBody>
+      </p:sp>
+      <p:sp>
+        <p:nvSpPr>
+          <p:cNvPr id="25" name="TextBox 24"/>
           <p:cNvSpPr txBox="1"/>
           <p:nvPr/>
         </p:nvSpPr>
@@ -9016,7 +9078,7 @@
                 </a:solidFill>
                 <a:latin typeface="Calibri"/>
               </a:rPr>
-              <a:t>Para el PI esta semana</a:t>
+              <a:t>Antes de entregar — autochequeo</a:t>
             </a:r>
           </a:p>
         </p:txBody>
@@ -9030,7 +9092,7 @@
         <p:spPr>
           <a:xfrm>
             <a:off x="457200" y="1261872"/>
-            <a:ext cx="11277295" cy="1051560"/>
+            <a:ext cx="11277295" cy="566928"/>
           </a:xfrm>
           <a:prstGeom prst="roundRect">
             <a:avLst>
@@ -9038,7 +9100,7 @@
             </a:avLst>
           </a:prstGeom>
           <a:solidFill>
-            <a:srgbClr val="E8F4FA"/>
+            <a:srgbClr val="F2F2F2"/>
           </a:solidFill>
           <a:ln>
             <a:noFill/>
@@ -9074,8 +9136,53 @@
         </p:nvSpPr>
         <p:spPr>
           <a:xfrm>
-            <a:off x="457200" y="1261872"/>
-            <a:ext cx="128016" cy="1051560"/>
+            <a:off x="640080" y="1408175"/>
+            <a:ext cx="274320" cy="274320"/>
+          </a:xfrm>
+          <a:prstGeom prst="rect">
+            <a:avLst/>
+          </a:prstGeom>
+          <a:solidFill>
+            <a:srgbClr val="FFFFFF"/>
+          </a:solidFill>
+          <a:ln>
+            <a:solidFill>
+              <a:srgbClr val="333333"/>
+            </a:solidFill>
+          </a:ln>
+        </p:spPr>
+        <p:style>
+          <a:lnRef idx="1">
+            <a:schemeClr val="accent1"/>
+          </a:lnRef>
+          <a:fillRef idx="3">
+            <a:schemeClr val="accent1"/>
+          </a:fillRef>
+          <a:effectRef idx="2">
+            <a:schemeClr val="accent1"/>
+          </a:effectRef>
+          <a:fontRef idx="minor">
+            <a:schemeClr val="lt1"/>
+          </a:fontRef>
+        </p:style>
+        <p:txBody>
+          <a:bodyPr rtlCol="0" anchor="ctr"/>
+          <a:lstStyle/>
+          <a:p>
+            <a:pPr algn="ctr"/>
+          </a:p>
+        </p:txBody>
+      </p:sp>
+      <p:sp>
+        <p:nvSpPr>
+          <p:cNvPr id="7" name="Rectangle 6"/>
+          <p:cNvSpPr/>
+          <p:nvPr/>
+        </p:nvSpPr>
+        <p:spPr>
+          <a:xfrm>
+            <a:off x="640080" y="1408175"/>
+            <a:ext cx="73152" cy="274320"/>
           </a:xfrm>
           <a:prstGeom prst="rect">
             <a:avLst/>
@@ -9111,14 +9218,14 @@
       </p:sp>
       <p:sp>
         <p:nvSpPr>
-          <p:cNvPr id="7" name="TextBox 6"/>
+          <p:cNvPr id="8" name="TextBox 7"/>
           <p:cNvSpPr txBox="1"/>
           <p:nvPr/>
         </p:nvSpPr>
         <p:spPr>
           <a:xfrm>
-            <a:off x="777240" y="1399031"/>
-            <a:ext cx="10774375" cy="822959"/>
+            <a:off x="1097280" y="1353312"/>
+            <a:ext cx="10362895" cy="402336"/>
           </a:xfrm>
           <a:prstGeom prst="rect">
             <a:avLst/>
@@ -9126,49 +9233,31 @@
           <a:noFill/>
         </p:spPr>
         <p:txBody>
-          <a:bodyPr wrap="square">
-            <a:spAutoFit/>
-          </a:bodyPr>
-          <a:lstStyle/>
-          <a:p>
-            <a:r>
-              <a:rPr sz="1200" b="1" i="0">
-                <a:solidFill>
-                  <a:srgbClr val="269CCB"/>
-                </a:solidFill>
-                <a:latin typeface="Calibri"/>
-              </a:rPr>
-              <a:t>Info</a:t>
-            </a:r>
-          </a:p>
-          <a:p>
-            <a:pPr>
-              <a:spcBef>
-                <a:spcPts val="400"/>
-              </a:spcBef>
-            </a:pPr>
-            <a:r>
-              <a:rPr sz="1400" b="0" i="0">
+          <a:bodyPr wrap="square" anchor="ctr"/>
+          <a:lstStyle/>
+          <a:p>
+            <a:r>
+              <a:rPr sz="1500" b="0" i="0">
                 <a:solidFill>
                   <a:srgbClr val="333333"/>
                 </a:solidFill>
                 <a:latin typeface="Calibri"/>
               </a:rPr>
-              <a:t>Hito: Queda listo el modelo de dominio de VetCare: el diagrama de clases con Dueno, Mascota, Cita, Veterinario y Atencion.</a:t>
-            </a:r>
-          </a:p>
-        </p:txBody>
-      </p:sp>
-      <p:sp>
-        <p:nvSpPr>
-          <p:cNvPr id="8" name="Rounded Rectangle 7"/>
+              <a:t>Si leo esta relacion en voz alta con sus dos multiplicidades, la frase resultante es cierta en la clinica Huellitas o suena absurda?</a:t>
+            </a:r>
+          </a:p>
+        </p:txBody>
+      </p:sp>
+      <p:sp>
+        <p:nvSpPr>
+          <p:cNvPr id="9" name="Rounded Rectangle 8"/>
           <p:cNvSpPr/>
           <p:nvPr/>
         </p:nvSpPr>
         <p:spPr>
           <a:xfrm>
-            <a:off x="457200" y="2478024"/>
-            <a:ext cx="11277295" cy="1051560"/>
+            <a:off x="457200" y="1938528"/>
+            <a:ext cx="11277295" cy="566928"/>
           </a:xfrm>
           <a:prstGeom prst="roundRect">
             <a:avLst>
@@ -9176,7 +9265,7 @@
             </a:avLst>
           </a:prstGeom>
           <a:solidFill>
-            <a:srgbClr val="FFF8E1"/>
+            <a:srgbClr val="F2F2F2"/>
           </a:solidFill>
           <a:ln>
             <a:noFill/>
@@ -9206,23 +9295,25 @@
       </p:sp>
       <p:sp>
         <p:nvSpPr>
-          <p:cNvPr id="9" name="Rectangle 8"/>
+          <p:cNvPr id="10" name="Rectangle 9"/>
           <p:cNvSpPr/>
           <p:nvPr/>
         </p:nvSpPr>
         <p:spPr>
           <a:xfrm>
-            <a:off x="457200" y="2478024"/>
-            <a:ext cx="128016" cy="1051560"/>
+            <a:off x="640080" y="2084832"/>
+            <a:ext cx="274320" cy="274320"/>
           </a:xfrm>
           <a:prstGeom prst="rect">
             <a:avLst/>
           </a:prstGeom>
           <a:solidFill>
-            <a:srgbClr val="FFD000"/>
+            <a:srgbClr val="FFFFFF"/>
           </a:solidFill>
           <a:ln>
-            <a:noFill/>
+            <a:solidFill>
+              <a:srgbClr val="333333"/>
+            </a:solidFill>
           </a:ln>
         </p:spPr>
         <p:style>
@@ -9249,72 +9340,20 @@
       </p:sp>
       <p:sp>
         <p:nvSpPr>
-          <p:cNvPr id="10" name="TextBox 9"/>
-          <p:cNvSpPr txBox="1"/>
-          <p:nvPr/>
-        </p:nvSpPr>
-        <p:spPr>
-          <a:xfrm>
-            <a:off x="777240" y="2615184"/>
-            <a:ext cx="10774375" cy="822959"/>
-          </a:xfrm>
-          <a:prstGeom prst="rect">
-            <a:avLst/>
-          </a:prstGeom>
-          <a:noFill/>
-        </p:spPr>
-        <p:txBody>
-          <a:bodyPr wrap="square">
-            <a:spAutoFit/>
-          </a:bodyPr>
-          <a:lstStyle/>
-          <a:p>
-            <a:r>
-              <a:rPr sz="1200" b="1" i="0">
-                <a:solidFill>
-                  <a:srgbClr val="FFD000"/>
-                </a:solidFill>
-                <a:latin typeface="Calibri"/>
-              </a:rPr>
-              <a:t>Aclaración</a:t>
-            </a:r>
-          </a:p>
-          <a:p>
-            <a:pPr>
-              <a:spcBef>
-                <a:spcPts val="400"/>
-              </a:spcBef>
-            </a:pPr>
-            <a:r>
-              <a:rPr sz="1400" b="0" i="0">
-                <a:solidFill>
-                  <a:srgbClr val="333333"/>
-                </a:solidFill>
-                <a:latin typeface="Calibri"/>
-              </a:rPr>
-              <a:t>Enunciado completo: Clases/Proyecto Integrador/ (VetCare).</a:t>
-            </a:r>
-          </a:p>
-        </p:txBody>
-      </p:sp>
-      <p:sp>
-        <p:nvSpPr>
-          <p:cNvPr id="11" name="Rounded Rectangle 10"/>
+          <p:cNvPr id="11" name="Rectangle 10"/>
           <p:cNvSpPr/>
           <p:nvPr/>
         </p:nvSpPr>
         <p:spPr>
           <a:xfrm>
-            <a:off x="457200" y="3694176"/>
-            <a:ext cx="11277295" cy="1051560"/>
-          </a:xfrm>
-          <a:prstGeom prst="roundRect">
-            <a:avLst>
-              <a:gd name="adj" fmla="val 12000"/>
-            </a:avLst>
+            <a:off x="640080" y="2084832"/>
+            <a:ext cx="73152" cy="274320"/>
+          </a:xfrm>
+          <a:prstGeom prst="rect">
+            <a:avLst/>
           </a:prstGeom>
           <a:solidFill>
-            <a:srgbClr val="FBE4E4"/>
+            <a:srgbClr val="269CCB"/>
           </a:solidFill>
           <a:ln>
             <a:noFill/>
@@ -9344,20 +9383,54 @@
       </p:sp>
       <p:sp>
         <p:nvSpPr>
-          <p:cNvPr id="12" name="Rectangle 11"/>
+          <p:cNvPr id="12" name="TextBox 11"/>
+          <p:cNvSpPr txBox="1"/>
+          <p:nvPr/>
+        </p:nvSpPr>
+        <p:spPr>
+          <a:xfrm>
+            <a:off x="1097280" y="2029968"/>
+            <a:ext cx="10362895" cy="402336"/>
+          </a:xfrm>
+          <a:prstGeom prst="rect">
+            <a:avLst/>
+          </a:prstGeom>
+          <a:noFill/>
+        </p:spPr>
+        <p:txBody>
+          <a:bodyPr wrap="square" anchor="ctr"/>
+          <a:lstStyle/>
+          <a:p>
+            <a:r>
+              <a:rPr sz="1500" b="0" i="0">
+                <a:solidFill>
+                  <a:srgbClr val="333333"/>
+                </a:solidFill>
+                <a:latin typeface="Calibri"/>
+              </a:rPr>
+              <a:t>Este atributo pertenece de verdad al concepto donde lo puse, o lo puse ahi solo porque en la pantalla aparecen juntos?</a:t>
+            </a:r>
+          </a:p>
+        </p:txBody>
+      </p:sp>
+      <p:sp>
+        <p:nvSpPr>
+          <p:cNvPr id="13" name="Rounded Rectangle 12"/>
           <p:cNvSpPr/>
           <p:nvPr/>
         </p:nvSpPr>
         <p:spPr>
           <a:xfrm>
-            <a:off x="457200" y="3694176"/>
-            <a:ext cx="128016" cy="1051560"/>
-          </a:xfrm>
-          <a:prstGeom prst="rect">
-            <a:avLst/>
+            <a:off x="457200" y="2615184"/>
+            <a:ext cx="11277295" cy="566928"/>
+          </a:xfrm>
+          <a:prstGeom prst="roundRect">
+            <a:avLst>
+              <a:gd name="adj" fmla="val 12000"/>
+            </a:avLst>
           </a:prstGeom>
           <a:solidFill>
-            <a:srgbClr val="A02030"/>
+            <a:srgbClr val="F2F2F2"/>
           </a:solidFill>
           <a:ln>
             <a:noFill/>
@@ -9387,14 +9460,102 @@
       </p:sp>
       <p:sp>
         <p:nvSpPr>
-          <p:cNvPr id="13" name="TextBox 12"/>
+          <p:cNvPr id="14" name="Rectangle 13"/>
+          <p:cNvSpPr/>
+          <p:nvPr/>
+        </p:nvSpPr>
+        <p:spPr>
+          <a:xfrm>
+            <a:off x="640080" y="2761488"/>
+            <a:ext cx="274320" cy="274320"/>
+          </a:xfrm>
+          <a:prstGeom prst="rect">
+            <a:avLst/>
+          </a:prstGeom>
+          <a:solidFill>
+            <a:srgbClr val="FFFFFF"/>
+          </a:solidFill>
+          <a:ln>
+            <a:solidFill>
+              <a:srgbClr val="333333"/>
+            </a:solidFill>
+          </a:ln>
+        </p:spPr>
+        <p:style>
+          <a:lnRef idx="1">
+            <a:schemeClr val="accent1"/>
+          </a:lnRef>
+          <a:fillRef idx="3">
+            <a:schemeClr val="accent1"/>
+          </a:fillRef>
+          <a:effectRef idx="2">
+            <a:schemeClr val="accent1"/>
+          </a:effectRef>
+          <a:fontRef idx="minor">
+            <a:schemeClr val="lt1"/>
+          </a:fontRef>
+        </p:style>
+        <p:txBody>
+          <a:bodyPr rtlCol="0" anchor="ctr"/>
+          <a:lstStyle/>
+          <a:p>
+            <a:pPr algn="ctr"/>
+          </a:p>
+        </p:txBody>
+      </p:sp>
+      <p:sp>
+        <p:nvSpPr>
+          <p:cNvPr id="15" name="Rectangle 14"/>
+          <p:cNvSpPr/>
+          <p:nvPr/>
+        </p:nvSpPr>
+        <p:spPr>
+          <a:xfrm>
+            <a:off x="640080" y="2761488"/>
+            <a:ext cx="73152" cy="274320"/>
+          </a:xfrm>
+          <a:prstGeom prst="rect">
+            <a:avLst/>
+          </a:prstGeom>
+          <a:solidFill>
+            <a:srgbClr val="269CCB"/>
+          </a:solidFill>
+          <a:ln>
+            <a:noFill/>
+          </a:ln>
+        </p:spPr>
+        <p:style>
+          <a:lnRef idx="1">
+            <a:schemeClr val="accent1"/>
+          </a:lnRef>
+          <a:fillRef idx="3">
+            <a:schemeClr val="accent1"/>
+          </a:fillRef>
+          <a:effectRef idx="2">
+            <a:schemeClr val="accent1"/>
+          </a:effectRef>
+          <a:fontRef idx="minor">
+            <a:schemeClr val="lt1"/>
+          </a:fontRef>
+        </p:style>
+        <p:txBody>
+          <a:bodyPr rtlCol="0" anchor="ctr"/>
+          <a:lstStyle/>
+          <a:p>
+            <a:pPr algn="ctr"/>
+          </a:p>
+        </p:txBody>
+      </p:sp>
+      <p:sp>
+        <p:nvSpPr>
+          <p:cNvPr id="16" name="TextBox 15"/>
           <p:cNvSpPr txBox="1"/>
           <p:nvPr/>
         </p:nvSpPr>
         <p:spPr>
           <a:xfrm>
-            <a:off x="777240" y="3831336"/>
-            <a:ext cx="10774375" cy="822959"/>
+            <a:off x="1097280" y="2706624"/>
+            <a:ext cx="10362895" cy="402336"/>
           </a:xfrm>
           <a:prstGeom prst="rect">
             <a:avLst/>
@@ -9402,42 +9563,24 @@
           <a:noFill/>
         </p:spPr>
         <p:txBody>
-          <a:bodyPr wrap="square">
-            <a:spAutoFit/>
-          </a:bodyPr>
-          <a:lstStyle/>
-          <a:p>
-            <a:r>
-              <a:rPr sz="1200" b="1" i="0">
-                <a:solidFill>
-                  <a:srgbClr val="A02030"/>
-                </a:solidFill>
-                <a:latin typeface="Calibri"/>
-              </a:rPr>
-              <a:t>Atención</a:t>
-            </a:r>
-          </a:p>
-          <a:p>
-            <a:pPr>
-              <a:spcBef>
-                <a:spcPts val="400"/>
-              </a:spcBef>
-            </a:pPr>
-            <a:r>
-              <a:rPr sz="1400" b="0" i="0">
+          <a:bodyPr wrap="square" anchor="ctr"/>
+          <a:lstStyle/>
+          <a:p>
+            <a:r>
+              <a:rPr sz="1500" b="0" i="0">
                 <a:solidFill>
                   <a:srgbClr val="333333"/>
                 </a:solidFill>
                 <a:latin typeface="Calibri"/>
               </a:rPr>
-              <a:t>Entrega del taller, si el docente lo asigna · en la fecha que indique el docente.</a:t>
-            </a:r>
-          </a:p>
-        </p:txBody>
-      </p:sp>
-      <p:sp>
-        <p:nvSpPr>
-          <p:cNvPr id="14" name="TextBox 13"/>
+              <a:t>Esta caja es un concepto del negocio del que habla el veterinario, o es una pantalla, un reporte o algo tecnico que se me colo?</a:t>
+            </a:r>
+          </a:p>
+        </p:txBody>
+      </p:sp>
+      <p:sp>
+        <p:nvSpPr>
+          <p:cNvPr id="17" name="TextBox 16"/>
           <p:cNvSpPr txBox="1"/>
           <p:nvPr/>
         </p:nvSpPr>
@@ -9479,6 +9622,1009 @@
 </file>
 
 <file path=ppt/slides/slide21.xml><?xml version="1.0" encoding="utf-8"?>
+<p:sld xmlns:a="http://schemas.openxmlformats.org/drawingml/2006/main" xmlns:p="http://schemas.openxmlformats.org/presentationml/2006/main" xmlns:r="http://schemas.openxmlformats.org/officeDocument/2006/relationships">
+  <p:cSld>
+    <p:bg>
+      <p:bgPr>
+        <a:solidFill>
+          <a:srgbClr val="FFFFFF"/>
+        </a:solidFill>
+        <a:effectLst/>
+      </p:bgPr>
+    </p:bg>
+    <p:spTree>
+      <p:nvGrpSpPr>
+        <p:cNvPr id="1" name=""/>
+        <p:cNvGrpSpPr/>
+        <p:nvPr/>
+      </p:nvGrpSpPr>
+      <p:grpSpPr/>
+      <p:sp>
+        <p:nvSpPr>
+          <p:cNvPr id="2" name="Rectangle 1"/>
+          <p:cNvSpPr/>
+          <p:nvPr/>
+        </p:nvSpPr>
+        <p:spPr>
+          <a:xfrm>
+            <a:off x="0" y="0"/>
+            <a:ext cx="12191695" cy="960120"/>
+          </a:xfrm>
+          <a:prstGeom prst="rect">
+            <a:avLst/>
+          </a:prstGeom>
+          <a:solidFill>
+            <a:srgbClr val="095292"/>
+          </a:solidFill>
+          <a:ln>
+            <a:noFill/>
+          </a:ln>
+        </p:spPr>
+        <p:style>
+          <a:lnRef idx="1">
+            <a:schemeClr val="accent1"/>
+          </a:lnRef>
+          <a:fillRef idx="3">
+            <a:schemeClr val="accent1"/>
+          </a:fillRef>
+          <a:effectRef idx="2">
+            <a:schemeClr val="accent1"/>
+          </a:effectRef>
+          <a:fontRef idx="minor">
+            <a:schemeClr val="lt1"/>
+          </a:fontRef>
+        </p:style>
+        <p:txBody>
+          <a:bodyPr rtlCol="0" anchor="ctr"/>
+          <a:lstStyle/>
+          <a:p>
+            <a:pPr algn="ctr"/>
+          </a:p>
+        </p:txBody>
+      </p:sp>
+      <p:sp>
+        <p:nvSpPr>
+          <p:cNvPr id="3" name="Rectangle 2"/>
+          <p:cNvSpPr/>
+          <p:nvPr/>
+        </p:nvSpPr>
+        <p:spPr>
+          <a:xfrm>
+            <a:off x="0" y="960120"/>
+            <a:ext cx="12191695" cy="41148"/>
+          </a:xfrm>
+          <a:prstGeom prst="rect">
+            <a:avLst/>
+          </a:prstGeom>
+          <a:solidFill>
+            <a:srgbClr val="FFD000"/>
+          </a:solidFill>
+          <a:ln>
+            <a:noFill/>
+          </a:ln>
+        </p:spPr>
+        <p:style>
+          <a:lnRef idx="1">
+            <a:schemeClr val="accent1"/>
+          </a:lnRef>
+          <a:fillRef idx="3">
+            <a:schemeClr val="accent1"/>
+          </a:fillRef>
+          <a:effectRef idx="2">
+            <a:schemeClr val="accent1"/>
+          </a:effectRef>
+          <a:fontRef idx="minor">
+            <a:schemeClr val="lt1"/>
+          </a:fontRef>
+        </p:style>
+        <p:txBody>
+          <a:bodyPr rtlCol="0" anchor="ctr"/>
+          <a:lstStyle/>
+          <a:p>
+            <a:pPr algn="ctr"/>
+          </a:p>
+        </p:txBody>
+      </p:sp>
+      <p:sp>
+        <p:nvSpPr>
+          <p:cNvPr id="4" name="TextBox 3"/>
+          <p:cNvSpPr txBox="1"/>
+          <p:nvPr/>
+        </p:nvSpPr>
+        <p:spPr>
+          <a:xfrm>
+            <a:off x="457200" y="164592"/>
+            <a:ext cx="11277295" cy="502920"/>
+          </a:xfrm>
+          <a:prstGeom prst="rect">
+            <a:avLst/>
+          </a:prstGeom>
+          <a:noFill/>
+        </p:spPr>
+        <p:txBody>
+          <a:bodyPr wrap="square">
+            <a:spAutoFit/>
+          </a:bodyPr>
+          <a:lstStyle/>
+          <a:p>
+            <a:r>
+              <a:rPr sz="2600" b="1" i="0">
+                <a:solidFill>
+                  <a:srgbClr val="FFFFFF"/>
+                </a:solidFill>
+                <a:latin typeface="Calibri"/>
+              </a:rPr>
+              <a:t>Criterios de exito / entregable</a:t>
+            </a:r>
+          </a:p>
+        </p:txBody>
+      </p:sp>
+      <p:sp>
+        <p:nvSpPr>
+          <p:cNvPr id="5" name="TextBox 4"/>
+          <p:cNvSpPr txBox="1"/>
+          <p:nvPr/>
+        </p:nvSpPr>
+        <p:spPr>
+          <a:xfrm>
+            <a:off x="457200" y="1170432"/>
+            <a:ext cx="11277295" cy="5230368"/>
+          </a:xfrm>
+          <a:prstGeom prst="rect">
+            <a:avLst/>
+          </a:prstGeom>
+          <a:noFill/>
+        </p:spPr>
+        <p:txBody>
+          <a:bodyPr wrap="square">
+            <a:spAutoFit/>
+          </a:bodyPr>
+          <a:lstStyle/>
+          <a:p>
+            <a:pPr>
+              <a:spcAft>
+                <a:spcPts val="800"/>
+              </a:spcAft>
+            </a:pPr>
+            <a:r>
+              <a:rPr sz="2000" b="0" i="0">
+                <a:solidFill>
+                  <a:srgbClr val="333333"/>
+                </a:solidFill>
+                <a:latin typeface="Calibri"/>
+              </a:rPr>
+              <a:t>–   </a:t>
+            </a:r>
+            <a:r>
+              <a:rPr sz="2000" b="1" i="0">
+                <a:solidFill>
+                  <a:srgbClr val="333333"/>
+                </a:solidFill>
+                <a:latin typeface="Calibri"/>
+              </a:rPr>
+              <a:t>Entregable:</a:t>
+            </a:r>
+            <a:r>
+              <a:rPr sz="2000" b="0" i="0">
+                <a:solidFill>
+                  <a:srgbClr val="333333"/>
+                </a:solidFill>
+                <a:latin typeface="Calibri"/>
+              </a:rPr>
+              <a:t> Diagrama de clases de VetCare hecho en draw.io, exportado a PNG y al archivo .drawio, con 5 clases, atributos tipados, metodos propios y 4 asociaciones con multiplicidad y nombre de rol, subido a la plataforma del curso.</a:t>
+            </a:r>
+          </a:p>
+          <a:p>
+            <a:pPr>
+              <a:spcAft>
+                <a:spcPts val="800"/>
+              </a:spcAft>
+            </a:pPr>
+            <a:r>
+              <a:rPr sz="2000" b="0" i="0">
+                <a:solidFill>
+                  <a:srgbClr val="333333"/>
+                </a:solidFill>
+                <a:latin typeface="Calibri"/>
+              </a:rPr>
+              <a:t>–   </a:t>
+            </a:r>
+            <a:r>
+              <a:rPr sz="2000" b="1" i="0">
+                <a:solidFill>
+                  <a:srgbClr val="333333"/>
+                </a:solidFill>
+                <a:latin typeface="Calibri"/>
+              </a:rPr>
+              <a:t>Exito:</a:t>
+            </a:r>
+            <a:r>
+              <a:rPr sz="2000" b="0" i="0">
+                <a:solidFill>
+                  <a:srgbClr val="333333"/>
+                </a:solidFill>
+                <a:latin typeface="Calibri"/>
+              </a:rPr>
+              <a:t> El diagrama tiene las 5 clases del dominio en singular, con mayuscula inicial y sin clases tecnicas (nada de DAO, Conexion, Login o Menu).</a:t>
+            </a:r>
+          </a:p>
+          <a:p>
+            <a:pPr>
+              <a:spcAft>
+                <a:spcPts val="800"/>
+              </a:spcAft>
+            </a:pPr>
+            <a:r>
+              <a:rPr sz="2000" b="0" i="0">
+                <a:solidFill>
+                  <a:srgbClr val="333333"/>
+                </a:solidFill>
+                <a:latin typeface="Calibri"/>
+              </a:rPr>
+              <a:t>–   </a:t>
+            </a:r>
+            <a:r>
+              <a:rPr sz="2000" b="1" i="0">
+                <a:solidFill>
+                  <a:srgbClr val="333333"/>
+                </a:solidFill>
+                <a:latin typeface="Calibri"/>
+              </a:rPr>
+              <a:t>Exito:</a:t>
+            </a:r>
+            <a:r>
+              <a:rPr sz="2000" b="0" i="0">
+                <a:solidFill>
+                  <a:srgbClr val="333333"/>
+                </a:solidFill>
+                <a:latin typeface="Calibri"/>
+              </a:rPr>
+              <a:t> Cada clase tiene minimo 4 atributos con visibilidad y tipo, y ningun atributo aparece duplicado en dos clases.</a:t>
+            </a:r>
+          </a:p>
+          <a:p>
+            <a:pPr>
+              <a:spcAft>
+                <a:spcPts val="800"/>
+              </a:spcAft>
+            </a:pPr>
+            <a:r>
+              <a:rPr sz="2000" b="0" i="0">
+                <a:solidFill>
+                  <a:srgbClr val="333333"/>
+                </a:solidFill>
+                <a:latin typeface="Calibri"/>
+              </a:rPr>
+              <a:t>–   </a:t>
+            </a:r>
+            <a:r>
+              <a:rPr sz="2000" b="1" i="0">
+                <a:solidFill>
+                  <a:srgbClr val="333333"/>
+                </a:solidFill>
+                <a:latin typeface="Calibri"/>
+              </a:rPr>
+              <a:t>Exito:</a:t>
+            </a:r>
+            <a:r>
+              <a:rPr sz="2000" b="0" i="0">
+                <a:solidFill>
+                  <a:srgbClr val="333333"/>
+                </a:solidFill>
+                <a:latin typeface="Calibri"/>
+              </a:rPr>
+              <a:t> Las 4 asociaciones tienen nombre de relacion y multiplicidad explicita en ambos extremos.</a:t>
+            </a:r>
+          </a:p>
+          <a:p>
+            <a:pPr>
+              <a:spcAft>
+                <a:spcPts val="800"/>
+              </a:spcAft>
+            </a:pPr>
+            <a:r>
+              <a:rPr sz="2000" b="0" i="0">
+                <a:solidFill>
+                  <a:srgbClr val="333333"/>
+                </a:solidFill>
+                <a:latin typeface="Calibri"/>
+              </a:rPr>
+              <a:t>–   </a:t>
+            </a:r>
+            <a:r>
+              <a:rPr sz="2000" b="1" i="0">
+                <a:solidFill>
+                  <a:srgbClr val="333333"/>
+                </a:solidFill>
+                <a:latin typeface="Calibri"/>
+              </a:rPr>
+              <a:t>Exito:</a:t>
+            </a:r>
+            <a:r>
+              <a:rPr sz="2000" b="0" i="0">
+                <a:solidFill>
+                  <a:srgbClr val="333333"/>
+                </a:solidFill>
+                <a:latin typeface="Calibri"/>
+              </a:rPr>
+              <a:t> Cada relacion se puede leer en voz alta como una frase verdadera del negocio de la clinica Huellitas, y cada clase se rastrea a un RF o a una historia.</a:t>
+            </a:r>
+          </a:p>
+          <a:p>
+            <a:pPr>
+              <a:spcAft>
+                <a:spcPts val="800"/>
+              </a:spcAft>
+            </a:pPr>
+            <a:r>
+              <a:rPr sz="2000" b="0" i="0">
+                <a:solidFill>
+                  <a:srgbClr val="333333"/>
+                </a:solidFill>
+                <a:latin typeface="Calibri"/>
+              </a:rPr>
+              <a:t>–   </a:t>
+            </a:r>
+            <a:r>
+              <a:rPr sz="2000" b="1" i="0">
+                <a:solidFill>
+                  <a:srgbClr val="333333"/>
+                </a:solidFill>
+                <a:latin typeface="Calibri"/>
+              </a:rPr>
+              <a:t>Entrega en la plataforma del curso</a:t>
+            </a:r>
+            <a:r>
+              <a:rPr sz="2000" b="0" i="0">
+                <a:solidFill>
+                  <a:srgbClr val="333333"/>
+                </a:solidFill>
+                <a:latin typeface="Calibri"/>
+              </a:rPr>
+              <a:t> — en la fecha que indique el docente.</a:t>
+            </a:r>
+          </a:p>
+        </p:txBody>
+      </p:sp>
+      <p:sp>
+        <p:nvSpPr>
+          <p:cNvPr id="6" name="TextBox 5"/>
+          <p:cNvSpPr txBox="1"/>
+          <p:nvPr/>
+        </p:nvSpPr>
+        <p:spPr>
+          <a:xfrm>
+            <a:off x="11185855" y="6473952"/>
+            <a:ext cx="640080" cy="274320"/>
+          </a:xfrm>
+          <a:prstGeom prst="rect">
+            <a:avLst/>
+          </a:prstGeom>
+          <a:noFill/>
+        </p:spPr>
+        <p:txBody>
+          <a:bodyPr wrap="square">
+            <a:spAutoFit/>
+          </a:bodyPr>
+          <a:lstStyle/>
+          <a:p>
+            <a:pPr algn="r"/>
+            <a:r>
+              <a:rPr sz="1100" b="0" i="0">
+                <a:solidFill>
+                  <a:srgbClr val="666666"/>
+                </a:solidFill>
+                <a:latin typeface="Calibri"/>
+              </a:rPr>
+              <a:t>21</a:t>
+            </a:r>
+          </a:p>
+        </p:txBody>
+      </p:sp>
+    </p:spTree>
+  </p:cSld>
+  <p:clrMapOvr>
+    <a:masterClrMapping/>
+  </p:clrMapOvr>
+</p:sld>
+</file>
+
+<file path=ppt/slides/slide22.xml><?xml version="1.0" encoding="utf-8"?>
+<p:sld xmlns:a="http://schemas.openxmlformats.org/drawingml/2006/main" xmlns:p="http://schemas.openxmlformats.org/presentationml/2006/main" xmlns:r="http://schemas.openxmlformats.org/officeDocument/2006/relationships">
+  <p:cSld>
+    <p:bg>
+      <p:bgPr>
+        <a:solidFill>
+          <a:srgbClr val="FFFFFF"/>
+        </a:solidFill>
+        <a:effectLst/>
+      </p:bgPr>
+    </p:bg>
+    <p:spTree>
+      <p:nvGrpSpPr>
+        <p:cNvPr id="1" name=""/>
+        <p:cNvGrpSpPr/>
+        <p:nvPr/>
+      </p:nvGrpSpPr>
+      <p:grpSpPr/>
+      <p:sp>
+        <p:nvSpPr>
+          <p:cNvPr id="2" name="Rectangle 1"/>
+          <p:cNvSpPr/>
+          <p:nvPr/>
+        </p:nvSpPr>
+        <p:spPr>
+          <a:xfrm>
+            <a:off x="0" y="0"/>
+            <a:ext cx="12191695" cy="960120"/>
+          </a:xfrm>
+          <a:prstGeom prst="rect">
+            <a:avLst/>
+          </a:prstGeom>
+          <a:solidFill>
+            <a:srgbClr val="095292"/>
+          </a:solidFill>
+          <a:ln>
+            <a:noFill/>
+          </a:ln>
+        </p:spPr>
+        <p:style>
+          <a:lnRef idx="1">
+            <a:schemeClr val="accent1"/>
+          </a:lnRef>
+          <a:fillRef idx="3">
+            <a:schemeClr val="accent1"/>
+          </a:fillRef>
+          <a:effectRef idx="2">
+            <a:schemeClr val="accent1"/>
+          </a:effectRef>
+          <a:fontRef idx="minor">
+            <a:schemeClr val="lt1"/>
+          </a:fontRef>
+        </p:style>
+        <p:txBody>
+          <a:bodyPr rtlCol="0" anchor="ctr"/>
+          <a:lstStyle/>
+          <a:p>
+            <a:pPr algn="ctr"/>
+          </a:p>
+        </p:txBody>
+      </p:sp>
+      <p:sp>
+        <p:nvSpPr>
+          <p:cNvPr id="3" name="Rectangle 2"/>
+          <p:cNvSpPr/>
+          <p:nvPr/>
+        </p:nvSpPr>
+        <p:spPr>
+          <a:xfrm>
+            <a:off x="0" y="960120"/>
+            <a:ext cx="12191695" cy="41148"/>
+          </a:xfrm>
+          <a:prstGeom prst="rect">
+            <a:avLst/>
+          </a:prstGeom>
+          <a:solidFill>
+            <a:srgbClr val="FFD000"/>
+          </a:solidFill>
+          <a:ln>
+            <a:noFill/>
+          </a:ln>
+        </p:spPr>
+        <p:style>
+          <a:lnRef idx="1">
+            <a:schemeClr val="accent1"/>
+          </a:lnRef>
+          <a:fillRef idx="3">
+            <a:schemeClr val="accent1"/>
+          </a:fillRef>
+          <a:effectRef idx="2">
+            <a:schemeClr val="accent1"/>
+          </a:effectRef>
+          <a:fontRef idx="minor">
+            <a:schemeClr val="lt1"/>
+          </a:fontRef>
+        </p:style>
+        <p:txBody>
+          <a:bodyPr rtlCol="0" anchor="ctr"/>
+          <a:lstStyle/>
+          <a:p>
+            <a:pPr algn="ctr"/>
+          </a:p>
+        </p:txBody>
+      </p:sp>
+      <p:sp>
+        <p:nvSpPr>
+          <p:cNvPr id="4" name="TextBox 3"/>
+          <p:cNvSpPr txBox="1"/>
+          <p:nvPr/>
+        </p:nvSpPr>
+        <p:spPr>
+          <a:xfrm>
+            <a:off x="457200" y="164592"/>
+            <a:ext cx="11277295" cy="502920"/>
+          </a:xfrm>
+          <a:prstGeom prst="rect">
+            <a:avLst/>
+          </a:prstGeom>
+          <a:noFill/>
+        </p:spPr>
+        <p:txBody>
+          <a:bodyPr wrap="square">
+            <a:spAutoFit/>
+          </a:bodyPr>
+          <a:lstStyle/>
+          <a:p>
+            <a:r>
+              <a:rPr sz="2600" b="1" i="0">
+                <a:solidFill>
+                  <a:srgbClr val="FFFFFF"/>
+                </a:solidFill>
+                <a:latin typeface="Calibri"/>
+              </a:rPr>
+              <a:t>Para el PI esta semana</a:t>
+            </a:r>
+          </a:p>
+        </p:txBody>
+      </p:sp>
+      <p:sp>
+        <p:nvSpPr>
+          <p:cNvPr id="5" name="Rounded Rectangle 4"/>
+          <p:cNvSpPr/>
+          <p:nvPr/>
+        </p:nvSpPr>
+        <p:spPr>
+          <a:xfrm>
+            <a:off x="457200" y="1261872"/>
+            <a:ext cx="11277295" cy="1051560"/>
+          </a:xfrm>
+          <a:prstGeom prst="roundRect">
+            <a:avLst>
+              <a:gd name="adj" fmla="val 12000"/>
+            </a:avLst>
+          </a:prstGeom>
+          <a:solidFill>
+            <a:srgbClr val="E8F4FA"/>
+          </a:solidFill>
+          <a:ln>
+            <a:noFill/>
+          </a:ln>
+        </p:spPr>
+        <p:style>
+          <a:lnRef idx="1">
+            <a:schemeClr val="accent1"/>
+          </a:lnRef>
+          <a:fillRef idx="3">
+            <a:schemeClr val="accent1"/>
+          </a:fillRef>
+          <a:effectRef idx="2">
+            <a:schemeClr val="accent1"/>
+          </a:effectRef>
+          <a:fontRef idx="minor">
+            <a:schemeClr val="lt1"/>
+          </a:fontRef>
+        </p:style>
+        <p:txBody>
+          <a:bodyPr rtlCol="0" anchor="ctr"/>
+          <a:lstStyle/>
+          <a:p>
+            <a:pPr algn="ctr"/>
+          </a:p>
+        </p:txBody>
+      </p:sp>
+      <p:sp>
+        <p:nvSpPr>
+          <p:cNvPr id="6" name="Rectangle 5"/>
+          <p:cNvSpPr/>
+          <p:nvPr/>
+        </p:nvSpPr>
+        <p:spPr>
+          <a:xfrm>
+            <a:off x="457200" y="1261872"/>
+            <a:ext cx="128016" cy="1051560"/>
+          </a:xfrm>
+          <a:prstGeom prst="rect">
+            <a:avLst/>
+          </a:prstGeom>
+          <a:solidFill>
+            <a:srgbClr val="269CCB"/>
+          </a:solidFill>
+          <a:ln>
+            <a:noFill/>
+          </a:ln>
+        </p:spPr>
+        <p:style>
+          <a:lnRef idx="1">
+            <a:schemeClr val="accent1"/>
+          </a:lnRef>
+          <a:fillRef idx="3">
+            <a:schemeClr val="accent1"/>
+          </a:fillRef>
+          <a:effectRef idx="2">
+            <a:schemeClr val="accent1"/>
+          </a:effectRef>
+          <a:fontRef idx="minor">
+            <a:schemeClr val="lt1"/>
+          </a:fontRef>
+        </p:style>
+        <p:txBody>
+          <a:bodyPr rtlCol="0" anchor="ctr"/>
+          <a:lstStyle/>
+          <a:p>
+            <a:pPr algn="ctr"/>
+          </a:p>
+        </p:txBody>
+      </p:sp>
+      <p:sp>
+        <p:nvSpPr>
+          <p:cNvPr id="7" name="TextBox 6"/>
+          <p:cNvSpPr txBox="1"/>
+          <p:nvPr/>
+        </p:nvSpPr>
+        <p:spPr>
+          <a:xfrm>
+            <a:off x="777240" y="1399031"/>
+            <a:ext cx="10774375" cy="822959"/>
+          </a:xfrm>
+          <a:prstGeom prst="rect">
+            <a:avLst/>
+          </a:prstGeom>
+          <a:noFill/>
+        </p:spPr>
+        <p:txBody>
+          <a:bodyPr wrap="square">
+            <a:spAutoFit/>
+          </a:bodyPr>
+          <a:lstStyle/>
+          <a:p>
+            <a:r>
+              <a:rPr sz="1200" b="1" i="0">
+                <a:solidFill>
+                  <a:srgbClr val="269CCB"/>
+                </a:solidFill>
+                <a:latin typeface="Calibri"/>
+              </a:rPr>
+              <a:t>Info</a:t>
+            </a:r>
+          </a:p>
+          <a:p>
+            <a:pPr>
+              <a:spcBef>
+                <a:spcPts val="400"/>
+              </a:spcBef>
+            </a:pPr>
+            <a:r>
+              <a:rPr sz="1400" b="0" i="0">
+                <a:solidFill>
+                  <a:srgbClr val="333333"/>
+                </a:solidFill>
+                <a:latin typeface="Calibri"/>
+              </a:rPr>
+              <a:t>Hito: Queda listo el modelo de dominio de VetCare: el diagrama de clases con Dueno, Mascota, Cita, Veterinario y Atencion.</a:t>
+            </a:r>
+          </a:p>
+        </p:txBody>
+      </p:sp>
+      <p:sp>
+        <p:nvSpPr>
+          <p:cNvPr id="8" name="Rounded Rectangle 7"/>
+          <p:cNvSpPr/>
+          <p:nvPr/>
+        </p:nvSpPr>
+        <p:spPr>
+          <a:xfrm>
+            <a:off x="457200" y="2478024"/>
+            <a:ext cx="11277295" cy="1051560"/>
+          </a:xfrm>
+          <a:prstGeom prst="roundRect">
+            <a:avLst>
+              <a:gd name="adj" fmla="val 12000"/>
+            </a:avLst>
+          </a:prstGeom>
+          <a:solidFill>
+            <a:srgbClr val="FFF8E1"/>
+          </a:solidFill>
+          <a:ln>
+            <a:noFill/>
+          </a:ln>
+        </p:spPr>
+        <p:style>
+          <a:lnRef idx="1">
+            <a:schemeClr val="accent1"/>
+          </a:lnRef>
+          <a:fillRef idx="3">
+            <a:schemeClr val="accent1"/>
+          </a:fillRef>
+          <a:effectRef idx="2">
+            <a:schemeClr val="accent1"/>
+          </a:effectRef>
+          <a:fontRef idx="minor">
+            <a:schemeClr val="lt1"/>
+          </a:fontRef>
+        </p:style>
+        <p:txBody>
+          <a:bodyPr rtlCol="0" anchor="ctr"/>
+          <a:lstStyle/>
+          <a:p>
+            <a:pPr algn="ctr"/>
+          </a:p>
+        </p:txBody>
+      </p:sp>
+      <p:sp>
+        <p:nvSpPr>
+          <p:cNvPr id="9" name="Rectangle 8"/>
+          <p:cNvSpPr/>
+          <p:nvPr/>
+        </p:nvSpPr>
+        <p:spPr>
+          <a:xfrm>
+            <a:off x="457200" y="2478024"/>
+            <a:ext cx="128016" cy="1051560"/>
+          </a:xfrm>
+          <a:prstGeom prst="rect">
+            <a:avLst/>
+          </a:prstGeom>
+          <a:solidFill>
+            <a:srgbClr val="FFD000"/>
+          </a:solidFill>
+          <a:ln>
+            <a:noFill/>
+          </a:ln>
+        </p:spPr>
+        <p:style>
+          <a:lnRef idx="1">
+            <a:schemeClr val="accent1"/>
+          </a:lnRef>
+          <a:fillRef idx="3">
+            <a:schemeClr val="accent1"/>
+          </a:fillRef>
+          <a:effectRef idx="2">
+            <a:schemeClr val="accent1"/>
+          </a:effectRef>
+          <a:fontRef idx="minor">
+            <a:schemeClr val="lt1"/>
+          </a:fontRef>
+        </p:style>
+        <p:txBody>
+          <a:bodyPr rtlCol="0" anchor="ctr"/>
+          <a:lstStyle/>
+          <a:p>
+            <a:pPr algn="ctr"/>
+          </a:p>
+        </p:txBody>
+      </p:sp>
+      <p:sp>
+        <p:nvSpPr>
+          <p:cNvPr id="10" name="TextBox 9"/>
+          <p:cNvSpPr txBox="1"/>
+          <p:nvPr/>
+        </p:nvSpPr>
+        <p:spPr>
+          <a:xfrm>
+            <a:off x="777240" y="2615184"/>
+            <a:ext cx="10774375" cy="822959"/>
+          </a:xfrm>
+          <a:prstGeom prst="rect">
+            <a:avLst/>
+          </a:prstGeom>
+          <a:noFill/>
+        </p:spPr>
+        <p:txBody>
+          <a:bodyPr wrap="square">
+            <a:spAutoFit/>
+          </a:bodyPr>
+          <a:lstStyle/>
+          <a:p>
+            <a:r>
+              <a:rPr sz="1200" b="1" i="0">
+                <a:solidFill>
+                  <a:srgbClr val="FFD000"/>
+                </a:solidFill>
+                <a:latin typeface="Calibri"/>
+              </a:rPr>
+              <a:t>Aclaración</a:t>
+            </a:r>
+          </a:p>
+          <a:p>
+            <a:pPr>
+              <a:spcBef>
+                <a:spcPts val="400"/>
+              </a:spcBef>
+            </a:pPr>
+            <a:r>
+              <a:rPr sz="1400" b="0" i="0">
+                <a:solidFill>
+                  <a:srgbClr val="333333"/>
+                </a:solidFill>
+                <a:latin typeface="Calibri"/>
+              </a:rPr>
+              <a:t>Enunciado completo: Clases/Proyecto Integrador/ (VetCare).</a:t>
+            </a:r>
+          </a:p>
+        </p:txBody>
+      </p:sp>
+      <p:sp>
+        <p:nvSpPr>
+          <p:cNvPr id="11" name="Rounded Rectangle 10"/>
+          <p:cNvSpPr/>
+          <p:nvPr/>
+        </p:nvSpPr>
+        <p:spPr>
+          <a:xfrm>
+            <a:off x="457200" y="3694176"/>
+            <a:ext cx="11277295" cy="1051560"/>
+          </a:xfrm>
+          <a:prstGeom prst="roundRect">
+            <a:avLst>
+              <a:gd name="adj" fmla="val 12000"/>
+            </a:avLst>
+          </a:prstGeom>
+          <a:solidFill>
+            <a:srgbClr val="FBE4E4"/>
+          </a:solidFill>
+          <a:ln>
+            <a:noFill/>
+          </a:ln>
+        </p:spPr>
+        <p:style>
+          <a:lnRef idx="1">
+            <a:schemeClr val="accent1"/>
+          </a:lnRef>
+          <a:fillRef idx="3">
+            <a:schemeClr val="accent1"/>
+          </a:fillRef>
+          <a:effectRef idx="2">
+            <a:schemeClr val="accent1"/>
+          </a:effectRef>
+          <a:fontRef idx="minor">
+            <a:schemeClr val="lt1"/>
+          </a:fontRef>
+        </p:style>
+        <p:txBody>
+          <a:bodyPr rtlCol="0" anchor="ctr"/>
+          <a:lstStyle/>
+          <a:p>
+            <a:pPr algn="ctr"/>
+          </a:p>
+        </p:txBody>
+      </p:sp>
+      <p:sp>
+        <p:nvSpPr>
+          <p:cNvPr id="12" name="Rectangle 11"/>
+          <p:cNvSpPr/>
+          <p:nvPr/>
+        </p:nvSpPr>
+        <p:spPr>
+          <a:xfrm>
+            <a:off x="457200" y="3694176"/>
+            <a:ext cx="128016" cy="1051560"/>
+          </a:xfrm>
+          <a:prstGeom prst="rect">
+            <a:avLst/>
+          </a:prstGeom>
+          <a:solidFill>
+            <a:srgbClr val="A02030"/>
+          </a:solidFill>
+          <a:ln>
+            <a:noFill/>
+          </a:ln>
+        </p:spPr>
+        <p:style>
+          <a:lnRef idx="1">
+            <a:schemeClr val="accent1"/>
+          </a:lnRef>
+          <a:fillRef idx="3">
+            <a:schemeClr val="accent1"/>
+          </a:fillRef>
+          <a:effectRef idx="2">
+            <a:schemeClr val="accent1"/>
+          </a:effectRef>
+          <a:fontRef idx="minor">
+            <a:schemeClr val="lt1"/>
+          </a:fontRef>
+        </p:style>
+        <p:txBody>
+          <a:bodyPr rtlCol="0" anchor="ctr"/>
+          <a:lstStyle/>
+          <a:p>
+            <a:pPr algn="ctr"/>
+          </a:p>
+        </p:txBody>
+      </p:sp>
+      <p:sp>
+        <p:nvSpPr>
+          <p:cNvPr id="13" name="TextBox 12"/>
+          <p:cNvSpPr txBox="1"/>
+          <p:nvPr/>
+        </p:nvSpPr>
+        <p:spPr>
+          <a:xfrm>
+            <a:off x="777240" y="3831336"/>
+            <a:ext cx="10774375" cy="822959"/>
+          </a:xfrm>
+          <a:prstGeom prst="rect">
+            <a:avLst/>
+          </a:prstGeom>
+          <a:noFill/>
+        </p:spPr>
+        <p:txBody>
+          <a:bodyPr wrap="square">
+            <a:spAutoFit/>
+          </a:bodyPr>
+          <a:lstStyle/>
+          <a:p>
+            <a:r>
+              <a:rPr sz="1200" b="1" i="0">
+                <a:solidFill>
+                  <a:srgbClr val="A02030"/>
+                </a:solidFill>
+                <a:latin typeface="Calibri"/>
+              </a:rPr>
+              <a:t>Atención</a:t>
+            </a:r>
+          </a:p>
+          <a:p>
+            <a:pPr>
+              <a:spcBef>
+                <a:spcPts val="400"/>
+              </a:spcBef>
+            </a:pPr>
+            <a:r>
+              <a:rPr sz="1400" b="0" i="0">
+                <a:solidFill>
+                  <a:srgbClr val="333333"/>
+                </a:solidFill>
+                <a:latin typeface="Calibri"/>
+              </a:rPr>
+              <a:t>Entrega del taller, si el docente lo asigna · en la fecha que indique el docente.</a:t>
+            </a:r>
+          </a:p>
+        </p:txBody>
+      </p:sp>
+      <p:sp>
+        <p:nvSpPr>
+          <p:cNvPr id="14" name="TextBox 13"/>
+          <p:cNvSpPr txBox="1"/>
+          <p:nvPr/>
+        </p:nvSpPr>
+        <p:spPr>
+          <a:xfrm>
+            <a:off x="11185855" y="6473952"/>
+            <a:ext cx="640080" cy="274320"/>
+          </a:xfrm>
+          <a:prstGeom prst="rect">
+            <a:avLst/>
+          </a:prstGeom>
+          <a:noFill/>
+        </p:spPr>
+        <p:txBody>
+          <a:bodyPr wrap="square">
+            <a:spAutoFit/>
+          </a:bodyPr>
+          <a:lstStyle/>
+          <a:p>
+            <a:pPr algn="r"/>
+            <a:r>
+              <a:rPr sz="1100" b="0" i="0">
+                <a:solidFill>
+                  <a:srgbClr val="666666"/>
+                </a:solidFill>
+                <a:latin typeface="Calibri"/>
+              </a:rPr>
+              <a:t>22</a:t>
+            </a:r>
+          </a:p>
+        </p:txBody>
+      </p:sp>
+    </p:spTree>
+  </p:cSld>
+  <p:clrMapOvr>
+    <a:masterClrMapping/>
+  </p:clrMapOvr>
+</p:sld>
+</file>
+
+<file path=ppt/slides/slide23.xml><?xml version="1.0" encoding="utf-8"?>
 <p:sld xmlns:a="http://schemas.openxmlformats.org/drawingml/2006/main" xmlns:p="http://schemas.openxmlformats.org/presentationml/2006/main" xmlns:r="http://schemas.openxmlformats.org/officeDocument/2006/relationships">
   <p:cSld>
     <p:bg>

--- a/Seminario de Sistemas/Clases/Clase 8 - Introduccion a UML/Presentacion.pptx
+++ b/Seminario de Sistemas/Clases/Clase 8 - Introduccion a UML/Presentacion.pptx
@@ -11,23 +11,16 @@
     <p:sldId id="259" r:id="rId10"/>
     <p:sldId id="260" r:id="rId11"/>
     <p:sldId id="261" r:id="rId12"/>
-    <p:sldId id="262" r:id="rId13"/>
-    <p:sldId id="263" r:id="rId14"/>
-    <p:sldId id="264" r:id="rId15"/>
-    <p:sldId id="265" r:id="rId16"/>
-    <p:sldId id="266" r:id="rId17"/>
-    <p:sldId id="267" r:id="rId18"/>
-    <p:sldId id="268" r:id="rId19"/>
-    <p:sldId id="269" r:id="rId20"/>
-    <p:sldId id="270" r:id="rId21"/>
-    <p:sldId id="271" r:id="rId22"/>
-    <p:sldId id="272" r:id="rId23"/>
-    <p:sldId id="273" r:id="rId24"/>
-    <p:sldId id="274" r:id="rId25"/>
-    <p:sldId id="275" r:id="rId26"/>
-    <p:sldId id="276" r:id="rId27"/>
-    <p:sldId id="277" r:id="rId28"/>
-    <p:sldId id="278" r:id="rId29"/>
+    <p:sldId id="262" r:id="rId14"/>
+    <p:sldId id="263" r:id="rId15"/>
+    <p:sldId id="264" r:id="rId16"/>
+    <p:sldId id="265" r:id="rId17"/>
+    <p:sldId id="266" r:id="rId18"/>
+    <p:sldId id="267" r:id="rId19"/>
+    <p:sldId id="268" r:id="rId20"/>
+    <p:sldId id="269" r:id="rId21"/>
+    <p:sldId id="270" r:id="rId22"/>
+    <p:sldId id="271" r:id="rId23"/>
   </p:sldIdLst>
   <p:sldSz cx="12191695" cy="6858000" type="screen4x3"/>
   <p:notesSz cx="6858000" cy="9144000"/>
@@ -127,6 +120,578 @@
     </a:lvl9pPr>
   </p:defaultTextStyle>
 </p:presentation>
+</file>
+
+<file path=ppt/notesMasters/notesMaster1.xml><?xml version="1.0" encoding="utf-8"?>
+<p:notesMaster xmlns:a="http://schemas.openxmlformats.org/drawingml/2006/main" xmlns:p="http://schemas.openxmlformats.org/presentationml/2006/main" xmlns:r="http://schemas.openxmlformats.org/officeDocument/2006/relationships">
+  <p:cSld>
+    <p:bg>
+      <p:bgRef idx="1001">
+        <a:schemeClr val="bg1"/>
+      </p:bgRef>
+    </p:bg>
+    <p:spTree>
+      <p:nvGrpSpPr>
+        <p:cNvPr id="1" name=""/>
+        <p:cNvGrpSpPr/>
+        <p:nvPr/>
+      </p:nvGrpSpPr>
+      <p:grpSpPr>
+        <a:xfrm>
+          <a:off x="0" y="0"/>
+          <a:ext cx="0" cy="0"/>
+          <a:chOff x="0" y="0"/>
+          <a:chExt cx="0" cy="0"/>
+        </a:xfrm>
+      </p:grpSpPr>
+      <p:sp>
+        <p:nvSpPr>
+          <p:cNvPr id="2" name="Header Placeholder 1"/>
+          <p:cNvSpPr>
+            <a:spLocks noGrp="1"/>
+          </p:cNvSpPr>
+          <p:nvPr>
+            <p:ph type="hdr" sz="quarter"/>
+          </p:nvPr>
+        </p:nvSpPr>
+        <p:spPr>
+          <a:xfrm>
+            <a:off x="0" y="0"/>
+            <a:ext cx="2971800" cy="457200"/>
+          </a:xfrm>
+          <a:prstGeom prst="rect">
+            <a:avLst/>
+          </a:prstGeom>
+        </p:spPr>
+        <p:txBody>
+          <a:bodyPr vert="horz" lIns="91440" tIns="45720" rIns="91440" bIns="45720" rtlCol="0"/>
+          <a:lstStyle>
+            <a:lvl1pPr algn="l">
+              <a:defRPr sz="1200"/>
+            </a:lvl1pPr>
+          </a:lstStyle>
+          <a:p>
+            <a:endParaRPr lang="en-US"/>
+          </a:p>
+        </p:txBody>
+      </p:sp>
+      <p:sp>
+        <p:nvSpPr>
+          <p:cNvPr id="3" name="Date Placeholder 2"/>
+          <p:cNvSpPr>
+            <a:spLocks noGrp="1"/>
+          </p:cNvSpPr>
+          <p:nvPr>
+            <p:ph type="dt" idx="1"/>
+          </p:nvPr>
+        </p:nvSpPr>
+        <p:spPr>
+          <a:xfrm>
+            <a:off x="3884613" y="0"/>
+            <a:ext cx="2971800" cy="457200"/>
+          </a:xfrm>
+          <a:prstGeom prst="rect">
+            <a:avLst/>
+          </a:prstGeom>
+        </p:spPr>
+        <p:txBody>
+          <a:bodyPr vert="horz" lIns="91440" tIns="45720" rIns="91440" bIns="45720" rtlCol="0"/>
+          <a:lstStyle>
+            <a:lvl1pPr algn="r">
+              <a:defRPr sz="1200"/>
+            </a:lvl1pPr>
+          </a:lstStyle>
+          <a:p>
+            <a:fld id="{0F89C1C7-3DCD-1040-A9CF-14679D8B5DDD}" type="datetimeFigureOut">
+              <a:rPr lang="en-US" smtClean="0"/>
+              <a:t>10/17/16</a:t>
+            </a:fld>
+            <a:endParaRPr lang="en-US"/>
+          </a:p>
+        </p:txBody>
+      </p:sp>
+      <p:sp>
+        <p:nvSpPr>
+          <p:cNvPr id="4" name="Slide Image Placeholder 3"/>
+          <p:cNvSpPr>
+            <a:spLocks noGrp="1" noRot="1" noChangeAspect="1"/>
+          </p:cNvSpPr>
+          <p:nvPr>
+            <p:ph type="sldImg" idx="2"/>
+          </p:nvPr>
+        </p:nvSpPr>
+        <p:spPr>
+          <a:xfrm>
+            <a:off x="1143000" y="685800"/>
+            <a:ext cx="4572000" cy="3429000"/>
+          </a:xfrm>
+          <a:prstGeom prst="rect">
+            <a:avLst/>
+          </a:prstGeom>
+          <a:noFill/>
+          <a:ln w="12700">
+            <a:solidFill>
+              <a:prstClr val="black"/>
+            </a:solidFill>
+          </a:ln>
+        </p:spPr>
+        <p:txBody>
+          <a:bodyPr vert="horz" lIns="91440" tIns="45720" rIns="91440" bIns="45720" rtlCol="0" anchor="ctr"/>
+          <a:lstStyle/>
+          <a:p>
+            <a:endParaRPr lang="en-US"/>
+          </a:p>
+        </p:txBody>
+      </p:sp>
+      <p:sp>
+        <p:nvSpPr>
+          <p:cNvPr id="5" name="Notes Placeholder 4"/>
+          <p:cNvSpPr>
+            <a:spLocks noGrp="1"/>
+          </p:cNvSpPr>
+          <p:nvPr>
+            <p:ph type="body" sz="quarter" idx="3"/>
+          </p:nvPr>
+        </p:nvSpPr>
+        <p:spPr>
+          <a:xfrm>
+            <a:off x="685800" y="4343400"/>
+            <a:ext cx="5486400" cy="4114800"/>
+          </a:xfrm>
+          <a:prstGeom prst="rect">
+            <a:avLst/>
+          </a:prstGeom>
+        </p:spPr>
+        <p:txBody>
+          <a:bodyPr vert="horz" lIns="91440" tIns="45720" rIns="91440" bIns="45720" rtlCol="0"/>
+          <a:lstStyle/>
+          <a:p>
+            <a:pPr lvl="0"/>
+            <a:r>
+              <a:rPr lang="en-US" smtClean="0"/>
+              <a:t>Click to edit Master text styles</a:t>
+            </a:r>
+          </a:p>
+          <a:p>
+            <a:pPr lvl="1"/>
+            <a:r>
+              <a:rPr lang="en-US" smtClean="0"/>
+              <a:t>Second level</a:t>
+            </a:r>
+          </a:p>
+          <a:p>
+            <a:pPr lvl="2"/>
+            <a:r>
+              <a:rPr lang="en-US" smtClean="0"/>
+              <a:t>Third level</a:t>
+            </a:r>
+          </a:p>
+          <a:p>
+            <a:pPr lvl="3"/>
+            <a:r>
+              <a:rPr lang="en-US" smtClean="0"/>
+              <a:t>Fourth level</a:t>
+            </a:r>
+          </a:p>
+          <a:p>
+            <a:pPr lvl="4"/>
+            <a:r>
+              <a:rPr lang="en-US" smtClean="0"/>
+              <a:t>Fifth level</a:t>
+            </a:r>
+            <a:endParaRPr lang="en-US"/>
+          </a:p>
+        </p:txBody>
+      </p:sp>
+      <p:sp>
+        <p:nvSpPr>
+          <p:cNvPr id="6" name="Footer Placeholder 5"/>
+          <p:cNvSpPr>
+            <a:spLocks noGrp="1"/>
+          </p:cNvSpPr>
+          <p:nvPr>
+            <p:ph type="ftr" sz="quarter" idx="4"/>
+          </p:nvPr>
+        </p:nvSpPr>
+        <p:spPr>
+          <a:xfrm>
+            <a:off x="0" y="8685213"/>
+            <a:ext cx="2971800" cy="457200"/>
+          </a:xfrm>
+          <a:prstGeom prst="rect">
+            <a:avLst/>
+          </a:prstGeom>
+        </p:spPr>
+        <p:txBody>
+          <a:bodyPr vert="horz" lIns="91440" tIns="45720" rIns="91440" bIns="45720" rtlCol="0" anchor="b"/>
+          <a:lstStyle>
+            <a:lvl1pPr algn="l">
+              <a:defRPr sz="1200"/>
+            </a:lvl1pPr>
+          </a:lstStyle>
+          <a:p>
+            <a:endParaRPr lang="en-US"/>
+          </a:p>
+        </p:txBody>
+      </p:sp>
+      <p:sp>
+        <p:nvSpPr>
+          <p:cNvPr id="7" name="Slide Number Placeholder 6"/>
+          <p:cNvSpPr>
+            <a:spLocks noGrp="1"/>
+          </p:cNvSpPr>
+          <p:nvPr>
+            <p:ph type="sldNum" sz="quarter" idx="5"/>
+          </p:nvPr>
+        </p:nvSpPr>
+        <p:spPr>
+          <a:xfrm>
+            <a:off x="3884613" y="8685213"/>
+            <a:ext cx="2971800" cy="457200"/>
+          </a:xfrm>
+          <a:prstGeom prst="rect">
+            <a:avLst/>
+          </a:prstGeom>
+        </p:spPr>
+        <p:txBody>
+          <a:bodyPr vert="horz" lIns="91440" tIns="45720" rIns="91440" bIns="45720" rtlCol="0" anchor="b"/>
+          <a:lstStyle>
+            <a:lvl1pPr algn="r">
+              <a:defRPr sz="1200"/>
+            </a:lvl1pPr>
+          </a:lstStyle>
+          <a:p>
+            <a:fld id="{BB5E49A5-4136-284D-997B-48E1D791AD67}" type="slidenum">
+              <a:rPr lang="en-US" smtClean="0"/>
+              <a:t>‹#›</a:t>
+            </a:fld>
+            <a:endParaRPr lang="en-US"/>
+          </a:p>
+        </p:txBody>
+      </p:sp>
+    </p:spTree>
+    <p:extLst>
+      <p:ext uri="{BB962C8B-B14F-4D97-AF65-F5344CB8AC3E}">
+        <p14:creationId xmlns:p14="http://schemas.microsoft.com/office/powerpoint/2010/main" val="2623252185"/>
+      </p:ext>
+    </p:extLst>
+  </p:cSld>
+  <p:clrMap bg1="lt1" tx1="dk1" bg2="lt2" tx2="dk2" accent1="accent1" accent2="accent2" accent3="accent3" accent4="accent4" accent5="accent5" accent6="accent6" hlink="hlink" folHlink="folHlink"/>
+  <p:notesStyle>
+    <a:lvl1pPr marL="0" algn="l" defTabSz="457200" rtl="0" eaLnBrk="1" latinLnBrk="0" hangingPunct="1">
+      <a:defRPr sz="1200" kern="1200">
+        <a:solidFill>
+          <a:schemeClr val="tx1"/>
+        </a:solidFill>
+        <a:latin typeface="+mn-lt"/>
+        <a:ea typeface="+mn-ea"/>
+        <a:cs typeface="+mn-cs"/>
+      </a:defRPr>
+    </a:lvl1pPr>
+    <a:lvl2pPr marL="457200" algn="l" defTabSz="457200" rtl="0" eaLnBrk="1" latinLnBrk="0" hangingPunct="1">
+      <a:defRPr sz="1200" kern="1200">
+        <a:solidFill>
+          <a:schemeClr val="tx1"/>
+        </a:solidFill>
+        <a:latin typeface="+mn-lt"/>
+        <a:ea typeface="+mn-ea"/>
+        <a:cs typeface="+mn-cs"/>
+      </a:defRPr>
+    </a:lvl2pPr>
+    <a:lvl3pPr marL="914400" algn="l" defTabSz="457200" rtl="0" eaLnBrk="1" latinLnBrk="0" hangingPunct="1">
+      <a:defRPr sz="1200" kern="1200">
+        <a:solidFill>
+          <a:schemeClr val="tx1"/>
+        </a:solidFill>
+        <a:latin typeface="+mn-lt"/>
+        <a:ea typeface="+mn-ea"/>
+        <a:cs typeface="+mn-cs"/>
+      </a:defRPr>
+    </a:lvl3pPr>
+    <a:lvl4pPr marL="1371600" algn="l" defTabSz="457200" rtl="0" eaLnBrk="1" latinLnBrk="0" hangingPunct="1">
+      <a:defRPr sz="1200" kern="1200">
+        <a:solidFill>
+          <a:schemeClr val="tx1"/>
+        </a:solidFill>
+        <a:latin typeface="+mn-lt"/>
+        <a:ea typeface="+mn-ea"/>
+        <a:cs typeface="+mn-cs"/>
+      </a:defRPr>
+    </a:lvl4pPr>
+    <a:lvl5pPr marL="1828800" algn="l" defTabSz="457200" rtl="0" eaLnBrk="1" latinLnBrk="0" hangingPunct="1">
+      <a:defRPr sz="1200" kern="1200">
+        <a:solidFill>
+          <a:schemeClr val="tx1"/>
+        </a:solidFill>
+        <a:latin typeface="+mn-lt"/>
+        <a:ea typeface="+mn-ea"/>
+        <a:cs typeface="+mn-cs"/>
+      </a:defRPr>
+    </a:lvl5pPr>
+    <a:lvl6pPr marL="2286000" algn="l" defTabSz="457200" rtl="0" eaLnBrk="1" latinLnBrk="0" hangingPunct="1">
+      <a:defRPr sz="1200" kern="1200">
+        <a:solidFill>
+          <a:schemeClr val="tx1"/>
+        </a:solidFill>
+        <a:latin typeface="+mn-lt"/>
+        <a:ea typeface="+mn-ea"/>
+        <a:cs typeface="+mn-cs"/>
+      </a:defRPr>
+    </a:lvl6pPr>
+    <a:lvl7pPr marL="2743200" algn="l" defTabSz="457200" rtl="0" eaLnBrk="1" latinLnBrk="0" hangingPunct="1">
+      <a:defRPr sz="1200" kern="1200">
+        <a:solidFill>
+          <a:schemeClr val="tx1"/>
+        </a:solidFill>
+        <a:latin typeface="+mn-lt"/>
+        <a:ea typeface="+mn-ea"/>
+        <a:cs typeface="+mn-cs"/>
+      </a:defRPr>
+    </a:lvl7pPr>
+    <a:lvl8pPr marL="3200400" algn="l" defTabSz="457200" rtl="0" eaLnBrk="1" latinLnBrk="0" hangingPunct="1">
+      <a:defRPr sz="1200" kern="1200">
+        <a:solidFill>
+          <a:schemeClr val="tx1"/>
+        </a:solidFill>
+        <a:latin typeface="+mn-lt"/>
+        <a:ea typeface="+mn-ea"/>
+        <a:cs typeface="+mn-cs"/>
+      </a:defRPr>
+    </a:lvl8pPr>
+    <a:lvl9pPr marL="3657600" algn="l" defTabSz="457200" rtl="0" eaLnBrk="1" latinLnBrk="0" hangingPunct="1">
+      <a:defRPr sz="1200" kern="1200">
+        <a:solidFill>
+          <a:schemeClr val="tx1"/>
+        </a:solidFill>
+        <a:latin typeface="+mn-lt"/>
+        <a:ea typeface="+mn-ea"/>
+        <a:cs typeface="+mn-cs"/>
+      </a:defRPr>
+    </a:lvl9pPr>
+  </p:notesStyle>
+</p:notesMaster>
+</file>
+
+<file path=ppt/notesSlides/notesSlide1.xml><?xml version="1.0" encoding="utf-8"?>
+<p:notes xmlns:a="http://schemas.openxmlformats.org/drawingml/2006/main" xmlns:p="http://schemas.openxmlformats.org/presentationml/2006/main" xmlns:r="http://schemas.openxmlformats.org/officeDocument/2006/relationships">
+  <p:cSld>
+    <p:spTree>
+      <p:nvGrpSpPr>
+        <p:cNvPr id="1" name=""/>
+        <p:cNvGrpSpPr/>
+        <p:nvPr/>
+      </p:nvGrpSpPr>
+      <p:grpSpPr>
+        <a:xfrm>
+          <a:off x="0" y="0"/>
+          <a:ext cx="0" cy="0"/>
+          <a:chOff x="0" y="0"/>
+          <a:chExt cx="0" cy="0"/>
+        </a:xfrm>
+      </p:grpSpPr>
+      <p:sp>
+        <p:nvSpPr>
+          <p:cNvPr id="2" name="Slide Image Placeholder 1"/>
+          <p:cNvSpPr>
+            <a:spLocks noGrp="1"/>
+          </p:cNvSpPr>
+          <p:nvPr>
+            <p:ph type="sldImg" idx="2"/>
+          </p:nvPr>
+        </p:nvSpPr>
+        <p:spPr/>
+      </p:sp>
+      <p:sp>
+        <p:nvSpPr>
+          <p:cNvPr id="3" name="Notes Placeholder 2"/>
+          <p:cNvSpPr>
+            <a:spLocks noGrp="1"/>
+          </p:cNvSpPr>
+          <p:nvPr>
+            <p:ph type="body" idx="3" sz="quarter"/>
+          </p:nvPr>
+        </p:nvSpPr>
+        <p:spPr/>
+        <p:txBody>
+          <a:bodyPr/>
+          <a:lstStyle/>
+          <a:p>
+            <a:r>
+              <a:t>Los diagramas se agrupan en dos grandes vistas.</a:t>
+            </a:r>
+          </a:p>
+          <a:p/>
+          <a:p>
+            <a:r>
+              <a:t>Un mismo sistema necesita las dos, igual que una casa necesita el plano de plantas y tambien el plano de instalaciones.</a:t>
+            </a:r>
+          </a:p>
+          <a:p/>
+          <a:p>
+            <a:r>
+              <a:t>En VetCare vamos a usar clases hoy, casos de uso y secuencia mas adelante, y el resto se menciona para que sepan que existen.</a:t>
+            </a:r>
+          </a:p>
+        </p:txBody>
+      </p:sp>
+      <p:sp>
+        <p:nvSpPr>
+          <p:cNvPr id="4" name="Slide Number Placeholder 3"/>
+          <p:cNvSpPr>
+            <a:spLocks noGrp="1"/>
+          </p:cNvSpPr>
+          <p:nvPr>
+            <p:ph type="sldNum" idx="5" sz="quarter"/>
+          </p:nvPr>
+        </p:nvSpPr>
+        <p:spPr/>
+      </p:sp>
+    </p:spTree>
+  </p:cSld>
+  <p:clrMapOvr>
+    <a:masterClrMapping/>
+  </p:clrMapOvr>
+</p:notes>
+</file>
+
+<file path=ppt/notesSlides/notesSlide2.xml><?xml version="1.0" encoding="utf-8"?>
+<p:notes xmlns:a="http://schemas.openxmlformats.org/drawingml/2006/main" xmlns:p="http://schemas.openxmlformats.org/presentationml/2006/main" xmlns:r="http://schemas.openxmlformats.org/officeDocument/2006/relationships">
+  <p:cSld>
+    <p:spTree>
+      <p:nvGrpSpPr>
+        <p:cNvPr id="1" name=""/>
+        <p:cNvGrpSpPr/>
+        <p:nvPr/>
+      </p:nvGrpSpPr>
+      <p:grpSpPr>
+        <a:xfrm>
+          <a:off x="0" y="0"/>
+          <a:ext cx="0" cy="0"/>
+          <a:chOff x="0" y="0"/>
+          <a:chExt cx="0" cy="0"/>
+        </a:xfrm>
+      </p:grpSpPr>
+      <p:sp>
+        <p:nvSpPr>
+          <p:cNvPr id="2" name="Slide Image Placeholder 1"/>
+          <p:cNvSpPr>
+            <a:spLocks noGrp="1"/>
+          </p:cNvSpPr>
+          <p:nvPr>
+            <p:ph type="sldImg" idx="2"/>
+          </p:nvPr>
+        </p:nvSpPr>
+        <p:spPr/>
+      </p:sp>
+      <p:sp>
+        <p:nvSpPr>
+          <p:cNvPr id="3" name="Notes Placeholder 2"/>
+          <p:cNvSpPr>
+            <a:spLocks noGrp="1"/>
+          </p:cNvSpPr>
+          <p:nvPr>
+            <p:ph type="body" idx="3" sz="quarter"/>
+          </p:nvPr>
+        </p:nvSpPr>
+        <p:spPr/>
+        <p:txBody>
+          <a:bodyPr/>
+          <a:lstStyle/>
+          <a:p>
+            <a:r>
+              <a:t>Cita relaciona a Mascota y a Veterinario, cada cita con exactamente una mascota y un veterinario, y cada veterinario con muchas citas.</a:t>
+            </a:r>
+          </a:p>
+        </p:txBody>
+      </p:sp>
+      <p:sp>
+        <p:nvSpPr>
+          <p:cNvPr id="4" name="Slide Number Placeholder 3"/>
+          <p:cNvSpPr>
+            <a:spLocks noGrp="1"/>
+          </p:cNvSpPr>
+          <p:nvPr>
+            <p:ph type="sldNum" idx="5" sz="quarter"/>
+          </p:nvPr>
+        </p:nvSpPr>
+        <p:spPr/>
+      </p:sp>
+    </p:spTree>
+  </p:cSld>
+  <p:clrMapOvr>
+    <a:masterClrMapping/>
+  </p:clrMapOvr>
+</p:notes>
+</file>
+
+<file path=ppt/notesSlides/notesSlide3.xml><?xml version="1.0" encoding="utf-8"?>
+<p:notes xmlns:a="http://schemas.openxmlformats.org/drawingml/2006/main" xmlns:p="http://schemas.openxmlformats.org/presentationml/2006/main" xmlns:r="http://schemas.openxmlformats.org/officeDocument/2006/relationships">
+  <p:cSld>
+    <p:spTree>
+      <p:nvGrpSpPr>
+        <p:cNvPr id="1" name=""/>
+        <p:cNvGrpSpPr/>
+        <p:nvPr/>
+      </p:nvGrpSpPr>
+      <p:grpSpPr>
+        <a:xfrm>
+          <a:off x="0" y="0"/>
+          <a:ext cx="0" cy="0"/>
+          <a:chOff x="0" y="0"/>
+          <a:chExt cx="0" cy="0"/>
+        </a:xfrm>
+      </p:grpSpPr>
+      <p:sp>
+        <p:nvSpPr>
+          <p:cNvPr id="2" name="Slide Image Placeholder 1"/>
+          <p:cNvSpPr>
+            <a:spLocks noGrp="1"/>
+          </p:cNvSpPr>
+          <p:nvPr>
+            <p:ph type="sldImg" idx="2"/>
+          </p:nvPr>
+        </p:nvSpPr>
+        <p:spPr/>
+      </p:sp>
+      <p:sp>
+        <p:nvSpPr>
+          <p:cNvPr id="3" name="Notes Placeholder 2"/>
+          <p:cNvSpPr>
+            <a:spLocks noGrp="1"/>
+          </p:cNvSpPr>
+          <p:nvPr>
+            <p:ph type="body" idx="3" sz="quarter"/>
+          </p:nvPr>
+        </p:nvSpPr>
+        <p:spPr/>
+        <p:txBody>
+          <a:bodyPr/>
+          <a:lstStyle/>
+          <a:p>
+            <a:r>
+              <a:t>Por eso el diagrama debe estar limpio: nombres en singular, sin atributos repetidos en dos clases, sin lineas sueltas y sin cajas que no correspondan a ningun requisito.</a:t>
+            </a:r>
+          </a:p>
+        </p:txBody>
+      </p:sp>
+      <p:sp>
+        <p:nvSpPr>
+          <p:cNvPr id="4" name="Slide Number Placeholder 3"/>
+          <p:cNvSpPr>
+            <a:spLocks noGrp="1"/>
+          </p:cNvSpPr>
+          <p:nvPr>
+            <p:ph type="sldNum" idx="5" sz="quarter"/>
+          </p:nvPr>
+        </p:nvSpPr>
+        <p:spPr/>
+      </p:sp>
+    </p:spTree>
+  </p:cSld>
+  <p:clrMapOvr>
+    <a:masterClrMapping/>
+  </p:clrMapOvr>
+</p:notes>
 </file>
 
 <file path=ppt/slideLayouts/slideLayout1.xml><?xml version="1.0" encoding="utf-8"?>
@@ -6336,13 +6901,13 @@
         <p:spPr>
           <a:xfrm>
             <a:off x="0" y="0"/>
-            <a:ext cx="12191695" cy="1170432"/>
+            <a:ext cx="12191695" cy="164592"/>
           </a:xfrm>
           <a:prstGeom prst="rect">
             <a:avLst/>
           </a:prstGeom>
           <a:solidFill>
-            <a:srgbClr val="095292"/>
+            <a:srgbClr val="269CCB"/>
           </a:solidFill>
           <a:ln>
             <a:noFill/>
@@ -6370,251 +6935,9 @@
           </a:p>
         </p:txBody>
       </p:sp>
-      <p:sp>
-        <p:nvSpPr>
-          <p:cNvPr id="3" name="Rectangle 2"/>
-          <p:cNvSpPr/>
-          <p:nvPr/>
-        </p:nvSpPr>
-        <p:spPr>
-          <a:xfrm>
-            <a:off x="0" y="1170432"/>
-            <a:ext cx="12191695" cy="41148"/>
-          </a:xfrm>
-          <a:prstGeom prst="rect">
-            <a:avLst/>
-          </a:prstGeom>
-          <a:solidFill>
-            <a:srgbClr val="FFD000"/>
-          </a:solidFill>
-          <a:ln>
-            <a:noFill/>
-          </a:ln>
-        </p:spPr>
-        <p:style>
-          <a:lnRef idx="1">
-            <a:schemeClr val="accent1"/>
-          </a:lnRef>
-          <a:fillRef idx="3">
-            <a:schemeClr val="accent1"/>
-          </a:fillRef>
-          <a:effectRef idx="2">
-            <a:schemeClr val="accent1"/>
-          </a:effectRef>
-          <a:fontRef idx="minor">
-            <a:schemeClr val="lt1"/>
-          </a:fontRef>
-        </p:style>
-        <p:txBody>
-          <a:bodyPr rtlCol="0" anchor="ctr"/>
-          <a:lstStyle/>
-          <a:p>
-            <a:pPr algn="ctr"/>
-          </a:p>
-        </p:txBody>
-      </p:sp>
-      <p:sp>
-        <p:nvSpPr>
-          <p:cNvPr id="4" name="TextBox 3"/>
-          <p:cNvSpPr txBox="1"/>
-          <p:nvPr/>
-        </p:nvSpPr>
-        <p:spPr>
-          <a:xfrm>
-            <a:off x="457200" y="164592"/>
-            <a:ext cx="11277295" cy="384048"/>
-          </a:xfrm>
-          <a:prstGeom prst="rect">
-            <a:avLst/>
-          </a:prstGeom>
-          <a:noFill/>
-        </p:spPr>
-        <p:txBody>
-          <a:bodyPr wrap="square">
-            <a:spAutoFit/>
-          </a:bodyPr>
-          <a:lstStyle/>
-          <a:p>
-            <a:r>
-              <a:rPr sz="2600" b="1" i="0">
-                <a:solidFill>
-                  <a:srgbClr val="FFFFFF"/>
-                </a:solidFill>
-                <a:latin typeface="Calibri"/>
-              </a:rPr>
-              <a:t>Herramientas de hoy</a:t>
-            </a:r>
-          </a:p>
-        </p:txBody>
-      </p:sp>
-      <p:sp>
-        <p:nvSpPr>
-          <p:cNvPr id="5" name="TextBox 4"/>
-          <p:cNvSpPr txBox="1"/>
-          <p:nvPr/>
-        </p:nvSpPr>
-        <p:spPr>
-          <a:xfrm>
-            <a:off x="457200" y="566928"/>
-            <a:ext cx="11277295" cy="411480"/>
-          </a:xfrm>
-          <a:prstGeom prst="rect">
-            <a:avLst/>
-          </a:prstGeom>
-          <a:noFill/>
-        </p:spPr>
-        <p:txBody>
-          <a:bodyPr wrap="square">
-            <a:spAutoFit/>
-          </a:bodyPr>
-          <a:lstStyle/>
-          <a:p>
-            <a:r>
-              <a:rPr sz="1400" b="0" i="0">
-                <a:solidFill>
-                  <a:srgbClr val="B8D8EE"/>
-                </a:solidFill>
-                <a:latin typeface="Calibri"/>
-              </a:rPr>
-              <a:t>Gratis · funcionan en el navegador</a:t>
-            </a:r>
-          </a:p>
-        </p:txBody>
-      </p:sp>
-      <p:sp>
-        <p:nvSpPr>
-          <p:cNvPr id="6" name="Rounded Rectangle 5"/>
-          <p:cNvSpPr/>
-          <p:nvPr/>
-        </p:nvSpPr>
-        <p:spPr>
-          <a:xfrm>
-            <a:off x="457200" y="1591056"/>
-            <a:ext cx="3624986" cy="2331720"/>
-          </a:xfrm>
-          <a:prstGeom prst="roundRect">
-            <a:avLst>
-              <a:gd name="adj" fmla="val 12000"/>
-            </a:avLst>
-          </a:prstGeom>
-          <a:solidFill>
-            <a:srgbClr val="F2F2F2"/>
-          </a:solidFill>
-          <a:ln>
-            <a:noFill/>
-          </a:ln>
-        </p:spPr>
-        <p:style>
-          <a:lnRef idx="1">
-            <a:schemeClr val="accent1"/>
-          </a:lnRef>
-          <a:fillRef idx="3">
-            <a:schemeClr val="accent1"/>
-          </a:fillRef>
-          <a:effectRef idx="2">
-            <a:schemeClr val="accent1"/>
-          </a:effectRef>
-          <a:fontRef idx="minor">
-            <a:schemeClr val="lt1"/>
-          </a:fontRef>
-        </p:style>
-        <p:txBody>
-          <a:bodyPr rtlCol="0" anchor="ctr"/>
-          <a:lstStyle/>
-          <a:p>
-            <a:pPr algn="ctr"/>
-          </a:p>
-        </p:txBody>
-      </p:sp>
-      <p:sp>
-        <p:nvSpPr>
-          <p:cNvPr id="7" name="Rectangle 6"/>
-          <p:cNvSpPr/>
-          <p:nvPr/>
-        </p:nvSpPr>
-        <p:spPr>
-          <a:xfrm>
-            <a:off x="457200" y="1591056"/>
-            <a:ext cx="3624986" cy="64008"/>
-          </a:xfrm>
-          <a:prstGeom prst="rect">
-            <a:avLst/>
-          </a:prstGeom>
-          <a:solidFill>
-            <a:srgbClr val="095292"/>
-          </a:solidFill>
-          <a:ln>
-            <a:noFill/>
-          </a:ln>
-        </p:spPr>
-        <p:style>
-          <a:lnRef idx="1">
-            <a:schemeClr val="accent1"/>
-          </a:lnRef>
-          <a:fillRef idx="3">
-            <a:schemeClr val="accent1"/>
-          </a:fillRef>
-          <a:effectRef idx="2">
-            <a:schemeClr val="accent1"/>
-          </a:effectRef>
-          <a:fontRef idx="minor">
-            <a:schemeClr val="lt1"/>
-          </a:fontRef>
-        </p:style>
-        <p:txBody>
-          <a:bodyPr rtlCol="0" anchor="ctr"/>
-          <a:lstStyle/>
-          <a:p>
-            <a:pPr algn="ctr"/>
-          </a:p>
-        </p:txBody>
-      </p:sp>
-      <p:sp>
-        <p:nvSpPr>
-          <p:cNvPr id="8" name="Rectangle 7"/>
-          <p:cNvSpPr/>
-          <p:nvPr/>
-        </p:nvSpPr>
-        <p:spPr>
-          <a:xfrm>
-            <a:off x="457200" y="1655064"/>
-            <a:ext cx="3624986" cy="27432"/>
-          </a:xfrm>
-          <a:prstGeom prst="rect">
-            <a:avLst/>
-          </a:prstGeom>
-          <a:solidFill>
-            <a:srgbClr val="FFD000"/>
-          </a:solidFill>
-          <a:ln>
-            <a:noFill/>
-          </a:ln>
-        </p:spPr>
-        <p:style>
-          <a:lnRef idx="1">
-            <a:schemeClr val="accent1"/>
-          </a:lnRef>
-          <a:fillRef idx="3">
-            <a:schemeClr val="accent1"/>
-          </a:fillRef>
-          <a:effectRef idx="2">
-            <a:schemeClr val="accent1"/>
-          </a:effectRef>
-          <a:fontRef idx="minor">
-            <a:schemeClr val="lt1"/>
-          </a:fontRef>
-        </p:style>
-        <p:txBody>
-          <a:bodyPr rtlCol="0" anchor="ctr"/>
-          <a:lstStyle/>
-          <a:p>
-            <a:pPr algn="ctr"/>
-          </a:p>
-        </p:txBody>
-      </p:sp>
       <p:pic>
         <p:nvPicPr>
-          <p:cNvPr id="9" name="Picture 8" descr="drawio.png"/>
+          <p:cNvPr id="3" name="Picture 2" descr="logo_uniajc_color.png"/>
           <p:cNvPicPr>
             <a:picLocks noChangeAspect="1"/>
           </p:cNvPicPr>
@@ -6628,8 +6951,8 @@
         </p:blipFill>
         <p:spPr>
           <a:xfrm>
-            <a:off x="1643329" y="1847087"/>
-            <a:ext cx="1252728" cy="1252728"/>
+            <a:off x="10271455" y="5998464"/>
+            <a:ext cx="1463040" cy="643233"/>
           </a:xfrm>
           <a:prstGeom prst="rect">
             <a:avLst/>
@@ -6638,14 +6961,14 @@
       </p:pic>
       <p:sp>
         <p:nvSpPr>
-          <p:cNvPr id="10" name="TextBox 9"/>
+          <p:cNvPr id="4" name="TextBox 3"/>
           <p:cNvSpPr txBox="1"/>
           <p:nvPr/>
         </p:nvSpPr>
         <p:spPr>
           <a:xfrm>
-            <a:off x="530352" y="3191256"/>
-            <a:ext cx="3478682" cy="621792"/>
+            <a:off x="457200" y="1737360"/>
+            <a:ext cx="11277295" cy="1097280"/>
           </a:xfrm>
           <a:prstGeom prst="rect">
             <a:avLst/>
@@ -6653,456 +6976,32 @@
           <a:noFill/>
         </p:spPr>
         <p:txBody>
-          <a:bodyPr wrap="square" anchor="t"/>
+          <a:bodyPr wrap="square" anchor="ctr"/>
           <a:lstStyle/>
           <a:p>
             <a:pPr algn="ctr"/>
             <a:r>
-              <a:rPr sz="1300" b="1" i="0">
+              <a:rPr sz="3400" b="1" i="0">
                 <a:solidFill>
                   <a:srgbClr val="095292"/>
                 </a:solidFill>
                 <a:latin typeface="Calibri"/>
               </a:rPr>
-              <a:t>Draw.Io</a:t>
-            </a:r>
-          </a:p>
-          <a:p>
-            <a:pPr algn="ctr">
-              <a:spcBef>
-                <a:spcPts val="200"/>
-              </a:spcBef>
-            </a:pPr>
-            <a:r>
-              <a:rPr sz="1000" b="0" i="0">
-                <a:solidFill>
-                  <a:srgbClr val="666666"/>
-                </a:solidFill>
-                <a:latin typeface="Calibri"/>
-              </a:rPr>
-              <a:t>Diagramas UML y de contexto</a:t>
-            </a:r>
-          </a:p>
-        </p:txBody>
-      </p:sp>
-      <p:sp>
-        <p:nvSpPr>
-          <p:cNvPr id="11" name="Rounded Rectangle 10"/>
-          <p:cNvSpPr/>
-          <p:nvPr/>
-        </p:nvSpPr>
-        <p:spPr>
-          <a:xfrm>
-            <a:off x="4283354" y="1591056"/>
-            <a:ext cx="3624986" cy="2331720"/>
-          </a:xfrm>
-          <a:prstGeom prst="roundRect">
-            <a:avLst>
-              <a:gd name="adj" fmla="val 12000"/>
-            </a:avLst>
-          </a:prstGeom>
-          <a:solidFill>
-            <a:srgbClr val="F2F2F2"/>
-          </a:solidFill>
-          <a:ln>
-            <a:noFill/>
-          </a:ln>
-        </p:spPr>
-        <p:style>
-          <a:lnRef idx="1">
-            <a:schemeClr val="accent1"/>
-          </a:lnRef>
-          <a:fillRef idx="3">
-            <a:schemeClr val="accent1"/>
-          </a:fillRef>
-          <a:effectRef idx="2">
-            <a:schemeClr val="accent1"/>
-          </a:effectRef>
-          <a:fontRef idx="minor">
-            <a:schemeClr val="lt1"/>
-          </a:fontRef>
-        </p:style>
-        <p:txBody>
-          <a:bodyPr rtlCol="0" anchor="ctr"/>
-          <a:lstStyle/>
-          <a:p>
-            <a:pPr algn="ctr"/>
-          </a:p>
-        </p:txBody>
-      </p:sp>
-      <p:sp>
-        <p:nvSpPr>
-          <p:cNvPr id="12" name="Rectangle 11"/>
-          <p:cNvSpPr/>
-          <p:nvPr/>
-        </p:nvSpPr>
-        <p:spPr>
-          <a:xfrm>
-            <a:off x="4283354" y="1591056"/>
-            <a:ext cx="3624986" cy="64008"/>
-          </a:xfrm>
-          <a:prstGeom prst="rect">
-            <a:avLst/>
-          </a:prstGeom>
-          <a:solidFill>
-            <a:srgbClr val="095292"/>
-          </a:solidFill>
-          <a:ln>
-            <a:noFill/>
-          </a:ln>
-        </p:spPr>
-        <p:style>
-          <a:lnRef idx="1">
-            <a:schemeClr val="accent1"/>
-          </a:lnRef>
-          <a:fillRef idx="3">
-            <a:schemeClr val="accent1"/>
-          </a:fillRef>
-          <a:effectRef idx="2">
-            <a:schemeClr val="accent1"/>
-          </a:effectRef>
-          <a:fontRef idx="minor">
-            <a:schemeClr val="lt1"/>
-          </a:fontRef>
-        </p:style>
-        <p:txBody>
-          <a:bodyPr rtlCol="0" anchor="ctr"/>
-          <a:lstStyle/>
-          <a:p>
-            <a:pPr algn="ctr"/>
-          </a:p>
-        </p:txBody>
-      </p:sp>
-      <p:sp>
-        <p:nvSpPr>
-          <p:cNvPr id="13" name="Rectangle 12"/>
-          <p:cNvSpPr/>
-          <p:nvPr/>
-        </p:nvSpPr>
-        <p:spPr>
-          <a:xfrm>
-            <a:off x="4283354" y="1655064"/>
-            <a:ext cx="3624986" cy="27432"/>
-          </a:xfrm>
-          <a:prstGeom prst="rect">
-            <a:avLst/>
-          </a:prstGeom>
-          <a:solidFill>
-            <a:srgbClr val="FFD000"/>
-          </a:solidFill>
-          <a:ln>
-            <a:noFill/>
-          </a:ln>
-        </p:spPr>
-        <p:style>
-          <a:lnRef idx="1">
-            <a:schemeClr val="accent1"/>
-          </a:lnRef>
-          <a:fillRef idx="3">
-            <a:schemeClr val="accent1"/>
-          </a:fillRef>
-          <a:effectRef idx="2">
-            <a:schemeClr val="accent1"/>
-          </a:effectRef>
-          <a:fontRef idx="minor">
-            <a:schemeClr val="lt1"/>
-          </a:fontRef>
-        </p:style>
-        <p:txBody>
-          <a:bodyPr rtlCol="0" anchor="ctr"/>
-          <a:lstStyle/>
-          <a:p>
-            <a:pPr algn="ctr"/>
-          </a:p>
-        </p:txBody>
-      </p:sp>
-      <p:pic>
-        <p:nvPicPr>
-          <p:cNvPr id="14" name="Picture 13" descr="mermaid.png"/>
-          <p:cNvPicPr>
-            <a:picLocks noChangeAspect="1"/>
-          </p:cNvPicPr>
-          <p:nvPr/>
-        </p:nvPicPr>
-        <p:blipFill>
-          <a:blip r:embed="rId3"/>
-          <a:stretch>
-            <a:fillRect/>
-          </a:stretch>
-        </p:blipFill>
-        <p:spPr>
-          <a:xfrm>
-            <a:off x="5469483" y="1847087"/>
-            <a:ext cx="1252728" cy="1252728"/>
-          </a:xfrm>
-          <a:prstGeom prst="rect">
-            <a:avLst/>
-          </a:prstGeom>
-        </p:spPr>
-      </p:pic>
-      <p:sp>
-        <p:nvSpPr>
-          <p:cNvPr id="15" name="TextBox 14"/>
+              <a:t>Clase 8 · Introduccion a UML</a:t>
+            </a:r>
+          </a:p>
+        </p:txBody>
+      </p:sp>
+      <p:sp>
+        <p:nvSpPr>
+          <p:cNvPr id="5" name="TextBox 4"/>
           <p:cNvSpPr txBox="1"/>
           <p:nvPr/>
         </p:nvSpPr>
         <p:spPr>
           <a:xfrm>
-            <a:off x="4356506" y="3191256"/>
-            <a:ext cx="3478682" cy="621792"/>
-          </a:xfrm>
-          <a:prstGeom prst="rect">
-            <a:avLst/>
-          </a:prstGeom>
-          <a:noFill/>
-        </p:spPr>
-        <p:txBody>
-          <a:bodyPr wrap="square" anchor="t"/>
-          <a:lstStyle/>
-          <a:p>
-            <a:pPr algn="ctr"/>
-            <a:r>
-              <a:rPr sz="1300" b="1" i="0">
-                <a:solidFill>
-                  <a:srgbClr val="095292"/>
-                </a:solidFill>
-                <a:latin typeface="Calibri"/>
-              </a:rPr>
-              <a:t>Mermaid</a:t>
-            </a:r>
-          </a:p>
-          <a:p>
-            <a:pPr algn="ctr">
-              <a:spcBef>
-                <a:spcPts val="200"/>
-              </a:spcBef>
-            </a:pPr>
-            <a:r>
-              <a:rPr sz="1000" b="0" i="0">
-                <a:solidFill>
-                  <a:srgbClr val="666666"/>
-                </a:solidFill>
-                <a:latin typeface="Calibri"/>
-              </a:rPr>
-              <a:t>Diagramas como texto versionable</a:t>
-            </a:r>
-          </a:p>
-        </p:txBody>
-      </p:sp>
-      <p:sp>
-        <p:nvSpPr>
-          <p:cNvPr id="16" name="Rounded Rectangle 15"/>
-          <p:cNvSpPr/>
-          <p:nvPr/>
-        </p:nvSpPr>
-        <p:spPr>
-          <a:xfrm>
-            <a:off x="8109508" y="1591056"/>
-            <a:ext cx="3624986" cy="2331720"/>
-          </a:xfrm>
-          <a:prstGeom prst="roundRect">
-            <a:avLst>
-              <a:gd name="adj" fmla="val 12000"/>
-            </a:avLst>
-          </a:prstGeom>
-          <a:solidFill>
-            <a:srgbClr val="F2F2F2"/>
-          </a:solidFill>
-          <a:ln>
-            <a:noFill/>
-          </a:ln>
-        </p:spPr>
-        <p:style>
-          <a:lnRef idx="1">
-            <a:schemeClr val="accent1"/>
-          </a:lnRef>
-          <a:fillRef idx="3">
-            <a:schemeClr val="accent1"/>
-          </a:fillRef>
-          <a:effectRef idx="2">
-            <a:schemeClr val="accent1"/>
-          </a:effectRef>
-          <a:fontRef idx="minor">
-            <a:schemeClr val="lt1"/>
-          </a:fontRef>
-        </p:style>
-        <p:txBody>
-          <a:bodyPr rtlCol="0" anchor="ctr"/>
-          <a:lstStyle/>
-          <a:p>
-            <a:pPr algn="ctr"/>
-          </a:p>
-        </p:txBody>
-      </p:sp>
-      <p:sp>
-        <p:nvSpPr>
-          <p:cNvPr id="17" name="Rectangle 16"/>
-          <p:cNvSpPr/>
-          <p:nvPr/>
-        </p:nvSpPr>
-        <p:spPr>
-          <a:xfrm>
-            <a:off x="8109508" y="1591056"/>
-            <a:ext cx="3624986" cy="64008"/>
-          </a:xfrm>
-          <a:prstGeom prst="rect">
-            <a:avLst/>
-          </a:prstGeom>
-          <a:solidFill>
-            <a:srgbClr val="095292"/>
-          </a:solidFill>
-          <a:ln>
-            <a:noFill/>
-          </a:ln>
-        </p:spPr>
-        <p:style>
-          <a:lnRef idx="1">
-            <a:schemeClr val="accent1"/>
-          </a:lnRef>
-          <a:fillRef idx="3">
-            <a:schemeClr val="accent1"/>
-          </a:fillRef>
-          <a:effectRef idx="2">
-            <a:schemeClr val="accent1"/>
-          </a:effectRef>
-          <a:fontRef idx="minor">
-            <a:schemeClr val="lt1"/>
-          </a:fontRef>
-        </p:style>
-        <p:txBody>
-          <a:bodyPr rtlCol="0" anchor="ctr"/>
-          <a:lstStyle/>
-          <a:p>
-            <a:pPr algn="ctr"/>
-          </a:p>
-        </p:txBody>
-      </p:sp>
-      <p:sp>
-        <p:nvSpPr>
-          <p:cNvPr id="18" name="Rectangle 17"/>
-          <p:cNvSpPr/>
-          <p:nvPr/>
-        </p:nvSpPr>
-        <p:spPr>
-          <a:xfrm>
-            <a:off x="8109508" y="1655064"/>
-            <a:ext cx="3624986" cy="27432"/>
-          </a:xfrm>
-          <a:prstGeom prst="rect">
-            <a:avLst/>
-          </a:prstGeom>
-          <a:solidFill>
-            <a:srgbClr val="FFD000"/>
-          </a:solidFill>
-          <a:ln>
-            <a:noFill/>
-          </a:ln>
-        </p:spPr>
-        <p:style>
-          <a:lnRef idx="1">
-            <a:schemeClr val="accent1"/>
-          </a:lnRef>
-          <a:fillRef idx="3">
-            <a:schemeClr val="accent1"/>
-          </a:fillRef>
-          <a:effectRef idx="2">
-            <a:schemeClr val="accent1"/>
-          </a:effectRef>
-          <a:fontRef idx="minor">
-            <a:schemeClr val="lt1"/>
-          </a:fontRef>
-        </p:style>
-        <p:txBody>
-          <a:bodyPr rtlCol="0" anchor="ctr"/>
-          <a:lstStyle/>
-          <a:p>
-            <a:pPr algn="ctr"/>
-          </a:p>
-        </p:txBody>
-      </p:sp>
-      <p:pic>
-        <p:nvPicPr>
-          <p:cNvPr id="19" name="Picture 18" descr="examlab.png"/>
-          <p:cNvPicPr>
-            <a:picLocks noChangeAspect="1"/>
-          </p:cNvPicPr>
-          <p:nvPr/>
-        </p:nvPicPr>
-        <p:blipFill>
-          <a:blip r:embed="rId4"/>
-          <a:stretch>
-            <a:fillRect/>
-          </a:stretch>
-        </p:blipFill>
-        <p:spPr>
-          <a:xfrm>
-            <a:off x="9295638" y="1847087"/>
-            <a:ext cx="1252728" cy="1252728"/>
-          </a:xfrm>
-          <a:prstGeom prst="rect">
-            <a:avLst/>
-          </a:prstGeom>
-        </p:spPr>
-      </p:pic>
-      <p:sp>
-        <p:nvSpPr>
-          <p:cNvPr id="20" name="TextBox 19"/>
-          <p:cNvSpPr txBox="1"/>
-          <p:nvPr/>
-        </p:nvSpPr>
-        <p:spPr>
-          <a:xfrm>
-            <a:off x="8182660" y="3191256"/>
-            <a:ext cx="3478682" cy="621792"/>
-          </a:xfrm>
-          <a:prstGeom prst="rect">
-            <a:avLst/>
-          </a:prstGeom>
-          <a:noFill/>
-        </p:spPr>
-        <p:txBody>
-          <a:bodyPr wrap="square" anchor="t"/>
-          <a:lstStyle/>
-          <a:p>
-            <a:pPr algn="ctr"/>
-            <a:r>
-              <a:rPr sz="1300" b="1" i="0">
-                <a:solidFill>
-                  <a:srgbClr val="095292"/>
-                </a:solidFill>
-                <a:latin typeface="Calibri"/>
-              </a:rPr>
-              <a:t>la plataforma del curso</a:t>
-            </a:r>
-          </a:p>
-          <a:p>
-            <a:pPr algn="ctr">
-              <a:spcBef>
-                <a:spcPts val="200"/>
-              </a:spcBef>
-            </a:pPr>
-            <a:r>
-              <a:rPr sz="1000" b="0" i="0">
-                <a:solidFill>
-                  <a:srgbClr val="666666"/>
-                </a:solidFill>
-                <a:latin typeface="Calibri"/>
-              </a:rPr>
-              <a:t>Entrega del taller · en la fecha que indique el docente</a:t>
-            </a:r>
-          </a:p>
-        </p:txBody>
-      </p:sp>
-      <p:sp>
-        <p:nvSpPr>
-          <p:cNvPr id="21" name="TextBox 20"/>
-          <p:cNvSpPr txBox="1"/>
-          <p:nvPr/>
-        </p:nvSpPr>
-        <p:spPr>
-          <a:xfrm>
-            <a:off x="11185855" y="6473952"/>
-            <a:ext cx="640080" cy="274320"/>
+            <a:off x="457200" y="3017520"/>
+            <a:ext cx="11277295" cy="1645920"/>
           </a:xfrm>
           <a:prstGeom prst="rect">
             <a:avLst/>
@@ -7115,141 +7014,65 @@
           </a:bodyPr>
           <a:lstStyle/>
           <a:p>
-            <a:pPr algn="r"/>
-            <a:r>
-              <a:rPr sz="1100" b="0" i="0">
-                <a:solidFill>
-                  <a:srgbClr val="666666"/>
-                </a:solidFill>
-                <a:latin typeface="Calibri"/>
-              </a:rPr>
-              <a:t>16</a:t>
-            </a:r>
-          </a:p>
-        </p:txBody>
-      </p:sp>
-    </p:spTree>
-  </p:cSld>
-  <p:clrMapOvr>
-    <a:masterClrMapping/>
-  </p:clrMapOvr>
-</p:sld>
-</file>
-
-<file path=ppt/slides/slide17.xml><?xml version="1.0" encoding="utf-8"?>
-<p:sld xmlns:a="http://schemas.openxmlformats.org/drawingml/2006/main" xmlns:p="http://schemas.openxmlformats.org/presentationml/2006/main" xmlns:r="http://schemas.openxmlformats.org/officeDocument/2006/relationships">
-  <p:cSld>
-    <p:bg>
-      <p:bgPr>
-        <a:solidFill>
-          <a:srgbClr val="FFFFFF"/>
-        </a:solidFill>
-        <a:effectLst/>
-      </p:bgPr>
-    </p:bg>
-    <p:spTree>
-      <p:nvGrpSpPr>
-        <p:cNvPr id="1" name=""/>
-        <p:cNvGrpSpPr/>
-        <p:nvPr/>
-      </p:nvGrpSpPr>
-      <p:grpSpPr/>
-      <p:sp>
-        <p:nvSpPr>
-          <p:cNvPr id="2" name="Rectangle 1"/>
-          <p:cNvSpPr/>
-          <p:nvPr/>
-        </p:nvSpPr>
-        <p:spPr>
-          <a:xfrm>
-            <a:off x="0" y="0"/>
-            <a:ext cx="12191695" cy="960120"/>
-          </a:xfrm>
-          <a:prstGeom prst="rect">
-            <a:avLst/>
-          </a:prstGeom>
-          <a:solidFill>
-            <a:srgbClr val="095292"/>
-          </a:solidFill>
-          <a:ln>
-            <a:noFill/>
-          </a:ln>
-        </p:spPr>
-        <p:style>
-          <a:lnRef idx="1">
-            <a:schemeClr val="accent1"/>
-          </a:lnRef>
-          <a:fillRef idx="3">
-            <a:schemeClr val="accent1"/>
-          </a:fillRef>
-          <a:effectRef idx="2">
-            <a:schemeClr val="accent1"/>
-          </a:effectRef>
-          <a:fontRef idx="minor">
-            <a:schemeClr val="lt1"/>
-          </a:fontRef>
-        </p:style>
-        <p:txBody>
-          <a:bodyPr rtlCol="0" anchor="ctr"/>
-          <a:lstStyle/>
-          <a:p>
-            <a:pPr algn="ctr"/>
-          </a:p>
-        </p:txBody>
-      </p:sp>
-      <p:sp>
-        <p:nvSpPr>
-          <p:cNvPr id="3" name="Rectangle 2"/>
-          <p:cNvSpPr/>
-          <p:nvPr/>
-        </p:nvSpPr>
-        <p:spPr>
-          <a:xfrm>
-            <a:off x="0" y="960120"/>
-            <a:ext cx="12191695" cy="41148"/>
-          </a:xfrm>
-          <a:prstGeom prst="rect">
-            <a:avLst/>
-          </a:prstGeom>
-          <a:solidFill>
-            <a:srgbClr val="FFD000"/>
-          </a:solidFill>
-          <a:ln>
-            <a:noFill/>
-          </a:ln>
-        </p:spPr>
-        <p:style>
-          <a:lnRef idx="1">
-            <a:schemeClr val="accent1"/>
-          </a:lnRef>
-          <a:fillRef idx="3">
-            <a:schemeClr val="accent1"/>
-          </a:fillRef>
-          <a:effectRef idx="2">
-            <a:schemeClr val="accent1"/>
-          </a:effectRef>
-          <a:fontRef idx="minor">
-            <a:schemeClr val="lt1"/>
-          </a:fontRef>
-        </p:style>
-        <p:txBody>
-          <a:bodyPr rtlCol="0" anchor="ctr"/>
-          <a:lstStyle/>
-          <a:p>
-            <a:pPr algn="ctr"/>
-          </a:p>
-        </p:txBody>
-      </p:sp>
-      <p:sp>
-        <p:nvSpPr>
-          <p:cNvPr id="4" name="TextBox 3"/>
+            <a:pPr algn="ctr">
+              <a:spcAft>
+                <a:spcPts val="600"/>
+              </a:spcAft>
+            </a:pPr>
+            <a:r>
+              <a:rPr sz="1600" b="0" i="0">
+                <a:solidFill>
+                  <a:srgbClr val="333333"/>
+                </a:solidFill>
+                <a:latin typeface="Calibri"/>
+              </a:rPr>
+              <a:t>El idioma comun para dibujar los planos de VetCare</a:t>
+            </a:r>
+          </a:p>
+          <a:p>
+            <a:pPr algn="ctr">
+              <a:spcAft>
+                <a:spcPts val="600"/>
+              </a:spcAft>
+            </a:pPr>
+            <a:r>
+              <a:rPr sz="1600" b="0" i="0">
+                <a:solidFill>
+                  <a:srgbClr val="333333"/>
+                </a:solidFill>
+                <a:latin typeface="Calibri"/>
+              </a:rPr>
+              <a:t>Repasen las laminas de teoria: cada concepto esta completo</a:t>
+            </a:r>
+          </a:p>
+          <a:p>
+            <a:pPr algn="ctr">
+              <a:spcAft>
+                <a:spcPts val="600"/>
+              </a:spcAft>
+            </a:pPr>
+            <a:r>
+              <a:rPr sz="1600" b="0" i="0">
+                <a:solidFill>
+                  <a:srgbClr val="333333"/>
+                </a:solidFill>
+                <a:latin typeface="Calibri"/>
+              </a:rPr>
+              <a:t>Siguiente clase: continuamos con el siguiente tema</a:t>
+            </a:r>
+          </a:p>
+        </p:txBody>
+      </p:sp>
+      <p:sp>
+        <p:nvSpPr>
+          <p:cNvPr id="6" name="TextBox 5"/>
           <p:cNvSpPr txBox="1"/>
           <p:nvPr/>
         </p:nvSpPr>
         <p:spPr>
           <a:xfrm>
-            <a:off x="457200" y="164592"/>
-            <a:ext cx="11277295" cy="502920"/>
+            <a:off x="457200" y="4754880"/>
+            <a:ext cx="11277295" cy="640080"/>
           </a:xfrm>
           <a:prstGeom prst="rect">
             <a:avLst/>
@@ -7262,1346 +7085,15 @@
           </a:bodyPr>
           <a:lstStyle/>
           <a:p>
-            <a:r>
-              <a:rPr sz="2600" b="1" i="0">
-                <a:solidFill>
-                  <a:srgbClr val="FFFFFF"/>
-                </a:solidFill>
-                <a:latin typeface="Calibri"/>
-              </a:rPr>
-              <a:t>Taller PI — por que importa</a:t>
-            </a:r>
-          </a:p>
-        </p:txBody>
-      </p:sp>
-      <p:sp>
-        <p:nvSpPr>
-          <p:cNvPr id="5" name="TextBox 4"/>
-          <p:cNvSpPr txBox="1"/>
-          <p:nvPr/>
-        </p:nvSpPr>
-        <p:spPr>
-          <a:xfrm>
-            <a:off x="457200" y="1170432"/>
-            <a:ext cx="11277295" cy="5230368"/>
-          </a:xfrm>
-          <a:prstGeom prst="rect">
-            <a:avLst/>
-          </a:prstGeom>
-          <a:noFill/>
-        </p:spPr>
-        <p:txBody>
-          <a:bodyPr wrap="square">
-            <a:spAutoFit/>
-          </a:bodyPr>
-          <a:lstStyle/>
-          <a:p>
-            <a:pPr>
-              <a:spcAft>
-                <a:spcPts val="800"/>
-              </a:spcAft>
-            </a:pPr>
-            <a:r>
-              <a:rPr sz="2000" b="0" i="0">
-                <a:solidFill>
-                  <a:srgbClr val="333333"/>
-                </a:solidFill>
-                <a:latin typeface="Calibri"/>
-              </a:rPr>
-              <a:t>–   </a:t>
-            </a:r>
+            <a:pPr algn="ctr"/>
             <a:r>
               <a:rPr sz="2000" b="1" i="0">
                 <a:solidFill>
-                  <a:srgbClr val="333333"/>
-                </a:solidFill>
-                <a:latin typeface="Calibri"/>
-              </a:rPr>
-              <a:t>Por que importa al PI:</a:t>
-            </a:r>
-            <a:r>
-              <a:rPr sz="2000" b="0" i="0">
-                <a:solidFill>
-                  <a:srgbClr val="333333"/>
-                </a:solidFill>
-                <a:latin typeface="Calibri"/>
-              </a:rPr>
-              <a:t> este diagrama de clases es el plano maestro de VetCare: de el salen el diccionario de datos, las tablas de la base de datos y las clases que se programan en Programacion II.</a:t>
-            </a:r>
-          </a:p>
-          <a:p>
-            <a:pPr>
-              <a:spcAft>
-                <a:spcPts val="800"/>
-              </a:spcAft>
-            </a:pPr>
-            <a:r>
-              <a:rPr sz="2000" b="0" i="0">
-                <a:solidFill>
-                  <a:srgbClr val="333333"/>
-                </a:solidFill>
-                <a:latin typeface="Calibri"/>
-              </a:rPr>
-              <a:t>–   Es el primer artefacto del curso que se lee igual en Cali, en Bogota o en Berlin, porque UML es un estandar y no una convencion del salon.</a:t>
-            </a:r>
-          </a:p>
-          <a:p>
-            <a:pPr>
-              <a:spcAft>
-                <a:spcPts val="800"/>
-              </a:spcAft>
-            </a:pPr>
-            <a:r>
-              <a:rPr sz="2000" b="0" i="0">
-                <a:solidFill>
-                  <a:srgbClr val="333333"/>
-                </a:solidFill>
-                <a:latin typeface="Calibri"/>
-              </a:rPr>
-              <a:t>–   Si una clase no puede rastrearse a un requisito o a una historia del backlog, sobra; y si un requisito no tiene donde vivir en el diagrama, falta una clase.</a:t>
-            </a:r>
-          </a:p>
-        </p:txBody>
-      </p:sp>
-      <p:sp>
-        <p:nvSpPr>
-          <p:cNvPr id="6" name="TextBox 5"/>
-          <p:cNvSpPr txBox="1"/>
-          <p:nvPr/>
-        </p:nvSpPr>
-        <p:spPr>
-          <a:xfrm>
-            <a:off x="11185855" y="6473952"/>
-            <a:ext cx="640080" cy="274320"/>
-          </a:xfrm>
-          <a:prstGeom prst="rect">
-            <a:avLst/>
-          </a:prstGeom>
-          <a:noFill/>
-        </p:spPr>
-        <p:txBody>
-          <a:bodyPr wrap="square">
-            <a:spAutoFit/>
-          </a:bodyPr>
-          <a:lstStyle/>
-          <a:p>
-            <a:pPr algn="r"/>
-            <a:r>
-              <a:rPr sz="1100" b="0" i="0">
-                <a:solidFill>
-                  <a:srgbClr val="666666"/>
-                </a:solidFill>
-                <a:latin typeface="Calibri"/>
-              </a:rPr>
-              <a:t>17</a:t>
-            </a:r>
-          </a:p>
-        </p:txBody>
-      </p:sp>
-    </p:spTree>
-  </p:cSld>
-  <p:clrMapOvr>
-    <a:masterClrMapping/>
-  </p:clrMapOvr>
-</p:sld>
-</file>
-
-<file path=ppt/slides/slide18.xml><?xml version="1.0" encoding="utf-8"?>
-<p:sld xmlns:a="http://schemas.openxmlformats.org/drawingml/2006/main" xmlns:p="http://schemas.openxmlformats.org/presentationml/2006/main" xmlns:r="http://schemas.openxmlformats.org/officeDocument/2006/relationships">
-  <p:cSld>
-    <p:bg>
-      <p:bgPr>
-        <a:solidFill>
-          <a:srgbClr val="FFFFFF"/>
-        </a:solidFill>
-        <a:effectLst/>
-      </p:bgPr>
-    </p:bg>
-    <p:spTree>
-      <p:nvGrpSpPr>
-        <p:cNvPr id="1" name=""/>
-        <p:cNvGrpSpPr/>
-        <p:nvPr/>
-      </p:nvGrpSpPr>
-      <p:grpSpPr/>
-      <p:sp>
-        <p:nvSpPr>
-          <p:cNvPr id="2" name="Rectangle 1"/>
-          <p:cNvSpPr/>
-          <p:nvPr/>
-        </p:nvSpPr>
-        <p:spPr>
-          <a:xfrm>
-            <a:off x="0" y="0"/>
-            <a:ext cx="12191695" cy="960120"/>
-          </a:xfrm>
-          <a:prstGeom prst="rect">
-            <a:avLst/>
-          </a:prstGeom>
-          <a:solidFill>
-            <a:srgbClr val="095292"/>
-          </a:solidFill>
-          <a:ln>
-            <a:noFill/>
-          </a:ln>
-        </p:spPr>
-        <p:style>
-          <a:lnRef idx="1">
-            <a:schemeClr val="accent1"/>
-          </a:lnRef>
-          <a:fillRef idx="3">
-            <a:schemeClr val="accent1"/>
-          </a:fillRef>
-          <a:effectRef idx="2">
-            <a:schemeClr val="accent1"/>
-          </a:effectRef>
-          <a:fontRef idx="minor">
-            <a:schemeClr val="lt1"/>
-          </a:fontRef>
-        </p:style>
-        <p:txBody>
-          <a:bodyPr rtlCol="0" anchor="ctr"/>
-          <a:lstStyle/>
-          <a:p>
-            <a:pPr algn="ctr"/>
-          </a:p>
-        </p:txBody>
-      </p:sp>
-      <p:sp>
-        <p:nvSpPr>
-          <p:cNvPr id="3" name="Rectangle 2"/>
-          <p:cNvSpPr/>
-          <p:nvPr/>
-        </p:nvSpPr>
-        <p:spPr>
-          <a:xfrm>
-            <a:off x="0" y="960120"/>
-            <a:ext cx="12191695" cy="41148"/>
-          </a:xfrm>
-          <a:prstGeom prst="rect">
-            <a:avLst/>
-          </a:prstGeom>
-          <a:solidFill>
-            <a:srgbClr val="FFD000"/>
-          </a:solidFill>
-          <a:ln>
-            <a:noFill/>
-          </a:ln>
-        </p:spPr>
-        <p:style>
-          <a:lnRef idx="1">
-            <a:schemeClr val="accent1"/>
-          </a:lnRef>
-          <a:fillRef idx="3">
-            <a:schemeClr val="accent1"/>
-          </a:fillRef>
-          <a:effectRef idx="2">
-            <a:schemeClr val="accent1"/>
-          </a:effectRef>
-          <a:fontRef idx="minor">
-            <a:schemeClr val="lt1"/>
-          </a:fontRef>
-        </p:style>
-        <p:txBody>
-          <a:bodyPr rtlCol="0" anchor="ctr"/>
-          <a:lstStyle/>
-          <a:p>
-            <a:pPr algn="ctr"/>
-          </a:p>
-        </p:txBody>
-      </p:sp>
-      <p:sp>
-        <p:nvSpPr>
-          <p:cNvPr id="4" name="TextBox 3"/>
-          <p:cNvSpPr txBox="1"/>
-          <p:nvPr/>
-        </p:nvSpPr>
-        <p:spPr>
-          <a:xfrm>
-            <a:off x="457200" y="164592"/>
-            <a:ext cx="11277295" cy="502920"/>
-          </a:xfrm>
-          <a:prstGeom prst="rect">
-            <a:avLst/>
-          </a:prstGeom>
-          <a:noFill/>
-        </p:spPr>
-        <p:txBody>
-          <a:bodyPr wrap="square">
-            <a:spAutoFit/>
-          </a:bodyPr>
-          <a:lstStyle/>
-          <a:p>
-            <a:r>
-              <a:rPr sz="2600" b="1" i="0">
-                <a:solidFill>
-                  <a:srgbClr val="FFFFFF"/>
-                </a:solidFill>
-                <a:latin typeface="Calibri"/>
-              </a:rPr>
-              <a:t>Taller PI — punto de partida</a:t>
-            </a:r>
-          </a:p>
-        </p:txBody>
-      </p:sp>
-      <p:sp>
-        <p:nvSpPr>
-          <p:cNvPr id="5" name="TextBox 4"/>
-          <p:cNvSpPr txBox="1"/>
-          <p:nvPr/>
-        </p:nvSpPr>
-        <p:spPr>
-          <a:xfrm>
-            <a:off x="457200" y="1170432"/>
-            <a:ext cx="11277295" cy="5230368"/>
-          </a:xfrm>
-          <a:prstGeom prst="rect">
-            <a:avLst/>
-          </a:prstGeom>
-          <a:noFill/>
-        </p:spPr>
-        <p:txBody>
-          <a:bodyPr wrap="square">
-            <a:spAutoFit/>
-          </a:bodyPr>
-          <a:lstStyle/>
-          <a:p>
-            <a:pPr>
-              <a:spcAft>
-                <a:spcPts val="800"/>
-              </a:spcAft>
-            </a:pPr>
-            <a:r>
-              <a:rPr sz="2000" b="0" i="0">
-                <a:solidFill>
-                  <a:srgbClr val="333333"/>
-                </a:solidFill>
-                <a:latin typeface="Calibri"/>
-              </a:rPr>
-              <a:t>–   Ya existen el catalogo de RF/RNF y el backlog de historias de VetCare, ambos escritos en texto y sin ninguna representacion grafica.</a:t>
-            </a:r>
-          </a:p>
-          <a:p>
-            <a:pPr>
-              <a:spcAft>
-                <a:spcPts val="800"/>
-              </a:spcAft>
-            </a:pPr>
-            <a:r>
-              <a:rPr sz="2000" b="0" i="0">
-                <a:solidFill>
-                  <a:srgbClr val="333333"/>
-                </a:solidFill>
-                <a:latin typeface="Calibri"/>
-              </a:rPr>
-              <a:t>–   Nadie ha definido todavia que conceptos del negocio existen, que datos guarda cada uno ni como se relacionan entre si.</a:t>
-            </a:r>
-          </a:p>
-          <a:p>
-            <a:pPr>
-              <a:spcAft>
-                <a:spcPts val="800"/>
-              </a:spcAft>
-            </a:pPr>
-            <a:r>
-              <a:rPr sz="2000" b="0" i="0">
-                <a:solidFill>
-                  <a:srgbClr val="333333"/>
-                </a:solidFill>
-                <a:latin typeface="Calibri"/>
-              </a:rPr>
-              <a:t>–   El equipo discute en palabras si una mascota puede tener dos duenos y si la cita pertenece a la mascota o al veterinario, y esa discusion no se cierra hablando.</a:t>
-            </a:r>
-          </a:p>
-        </p:txBody>
-      </p:sp>
-      <p:sp>
-        <p:nvSpPr>
-          <p:cNvPr id="6" name="TextBox 5"/>
-          <p:cNvSpPr txBox="1"/>
-          <p:nvPr/>
-        </p:nvSpPr>
-        <p:spPr>
-          <a:xfrm>
-            <a:off x="11185855" y="6473952"/>
-            <a:ext cx="640080" cy="274320"/>
-          </a:xfrm>
-          <a:prstGeom prst="rect">
-            <a:avLst/>
-          </a:prstGeom>
-          <a:noFill/>
-        </p:spPr>
-        <p:txBody>
-          <a:bodyPr wrap="square">
-            <a:spAutoFit/>
-          </a:bodyPr>
-          <a:lstStyle/>
-          <a:p>
-            <a:pPr algn="r"/>
-            <a:r>
-              <a:rPr sz="1100" b="0" i="0">
-                <a:solidFill>
-                  <a:srgbClr val="666666"/>
-                </a:solidFill>
-                <a:latin typeface="Calibri"/>
-              </a:rPr>
-              <a:t>18</a:t>
-            </a:r>
-          </a:p>
-        </p:txBody>
-      </p:sp>
-    </p:spTree>
-  </p:cSld>
-  <p:clrMapOvr>
-    <a:masterClrMapping/>
-  </p:clrMapOvr>
-</p:sld>
-</file>
-
-<file path=ppt/slides/slide19.xml><?xml version="1.0" encoding="utf-8"?>
-<p:sld xmlns:a="http://schemas.openxmlformats.org/drawingml/2006/main" xmlns:p="http://schemas.openxmlformats.org/presentationml/2006/main" xmlns:r="http://schemas.openxmlformats.org/officeDocument/2006/relationships">
-  <p:cSld>
-    <p:bg>
-      <p:bgPr>
-        <a:solidFill>
-          <a:srgbClr val="FFFFFF"/>
-        </a:solidFill>
-        <a:effectLst/>
-      </p:bgPr>
-    </p:bg>
-    <p:spTree>
-      <p:nvGrpSpPr>
-        <p:cNvPr id="1" name=""/>
-        <p:cNvGrpSpPr/>
-        <p:nvPr/>
-      </p:nvGrpSpPr>
-      <p:grpSpPr/>
-      <p:sp>
-        <p:nvSpPr>
-          <p:cNvPr id="2" name="Rectangle 1"/>
-          <p:cNvSpPr/>
-          <p:nvPr/>
-        </p:nvSpPr>
-        <p:spPr>
-          <a:xfrm>
-            <a:off x="0" y="0"/>
-            <a:ext cx="12191695" cy="960120"/>
-          </a:xfrm>
-          <a:prstGeom prst="rect">
-            <a:avLst/>
-          </a:prstGeom>
-          <a:solidFill>
-            <a:srgbClr val="095292"/>
-          </a:solidFill>
-          <a:ln>
-            <a:noFill/>
-          </a:ln>
-        </p:spPr>
-        <p:style>
-          <a:lnRef idx="1">
-            <a:schemeClr val="accent1"/>
-          </a:lnRef>
-          <a:fillRef idx="3">
-            <a:schemeClr val="accent1"/>
-          </a:fillRef>
-          <a:effectRef idx="2">
-            <a:schemeClr val="accent1"/>
-          </a:effectRef>
-          <a:fontRef idx="minor">
-            <a:schemeClr val="lt1"/>
-          </a:fontRef>
-        </p:style>
-        <p:txBody>
-          <a:bodyPr rtlCol="0" anchor="ctr"/>
-          <a:lstStyle/>
-          <a:p>
-            <a:pPr algn="ctr"/>
-          </a:p>
-        </p:txBody>
-      </p:sp>
-      <p:sp>
-        <p:nvSpPr>
-          <p:cNvPr id="3" name="Rectangle 2"/>
-          <p:cNvSpPr/>
-          <p:nvPr/>
-        </p:nvSpPr>
-        <p:spPr>
-          <a:xfrm>
-            <a:off x="0" y="960120"/>
-            <a:ext cx="12191695" cy="41148"/>
-          </a:xfrm>
-          <a:prstGeom prst="rect">
-            <a:avLst/>
-          </a:prstGeom>
-          <a:solidFill>
-            <a:srgbClr val="FFD000"/>
-          </a:solidFill>
-          <a:ln>
-            <a:noFill/>
-          </a:ln>
-        </p:spPr>
-        <p:style>
-          <a:lnRef idx="1">
-            <a:schemeClr val="accent1"/>
-          </a:lnRef>
-          <a:fillRef idx="3">
-            <a:schemeClr val="accent1"/>
-          </a:fillRef>
-          <a:effectRef idx="2">
-            <a:schemeClr val="accent1"/>
-          </a:effectRef>
-          <a:fontRef idx="minor">
-            <a:schemeClr val="lt1"/>
-          </a:fontRef>
-        </p:style>
-        <p:txBody>
-          <a:bodyPr rtlCol="0" anchor="ctr"/>
-          <a:lstStyle/>
-          <a:p>
-            <a:pPr algn="ctr"/>
-          </a:p>
-        </p:txBody>
-      </p:sp>
-      <p:sp>
-        <p:nvSpPr>
-          <p:cNvPr id="4" name="TextBox 3"/>
-          <p:cNvSpPr txBox="1"/>
-          <p:nvPr/>
-        </p:nvSpPr>
-        <p:spPr>
-          <a:xfrm>
-            <a:off x="457200" y="164592"/>
-            <a:ext cx="11277295" cy="502920"/>
-          </a:xfrm>
-          <a:prstGeom prst="rect">
-            <a:avLst/>
-          </a:prstGeom>
-          <a:noFill/>
-        </p:spPr>
-        <p:txBody>
-          <a:bodyPr wrap="square">
-            <a:spAutoFit/>
-          </a:bodyPr>
-          <a:lstStyle/>
-          <a:p>
-            <a:r>
-              <a:rPr sz="2600" b="1" i="0">
-                <a:solidFill>
-                  <a:srgbClr val="FFFFFF"/>
-                </a:solidFill>
-                <a:latin typeface="Calibri"/>
-              </a:rPr>
-              <a:t>Taller PI — pasos guiados</a:t>
-            </a:r>
-          </a:p>
-        </p:txBody>
-      </p:sp>
-      <p:sp>
-        <p:nvSpPr>
-          <p:cNvPr id="5" name="Rounded Rectangle 4"/>
-          <p:cNvSpPr/>
-          <p:nvPr/>
-        </p:nvSpPr>
-        <p:spPr>
-          <a:xfrm>
-            <a:off x="457200" y="1234440"/>
-            <a:ext cx="11277295" cy="950976"/>
-          </a:xfrm>
-          <a:prstGeom prst="roundRect">
-            <a:avLst>
-              <a:gd name="adj" fmla="val 12000"/>
-            </a:avLst>
-          </a:prstGeom>
-          <a:solidFill>
-            <a:srgbClr val="F2F2F2"/>
-          </a:solidFill>
-          <a:ln>
-            <a:noFill/>
-          </a:ln>
-        </p:spPr>
-        <p:style>
-          <a:lnRef idx="1">
-            <a:schemeClr val="accent1"/>
-          </a:lnRef>
-          <a:fillRef idx="3">
-            <a:schemeClr val="accent1"/>
-          </a:fillRef>
-          <a:effectRef idx="2">
-            <a:schemeClr val="accent1"/>
-          </a:effectRef>
-          <a:fontRef idx="minor">
-            <a:schemeClr val="lt1"/>
-          </a:fontRef>
-        </p:style>
-        <p:txBody>
-          <a:bodyPr rtlCol="0" anchor="ctr"/>
-          <a:lstStyle/>
-          <a:p>
-            <a:pPr algn="ctr"/>
-          </a:p>
-        </p:txBody>
-      </p:sp>
-      <p:sp>
-        <p:nvSpPr>
-          <p:cNvPr id="6" name="Rounded Rectangle 5"/>
-          <p:cNvSpPr/>
-          <p:nvPr/>
-        </p:nvSpPr>
-        <p:spPr>
-          <a:xfrm>
-            <a:off x="594360" y="1490472"/>
-            <a:ext cx="438912" cy="438912"/>
-          </a:xfrm>
-          <a:prstGeom prst="roundRect">
-            <a:avLst>
-              <a:gd name="adj" fmla="val 12000"/>
-            </a:avLst>
-          </a:prstGeom>
-          <a:solidFill>
-            <a:srgbClr val="095292"/>
-          </a:solidFill>
-          <a:ln>
-            <a:noFill/>
-          </a:ln>
-        </p:spPr>
-        <p:style>
-          <a:lnRef idx="1">
-            <a:schemeClr val="accent1"/>
-          </a:lnRef>
-          <a:fillRef idx="3">
-            <a:schemeClr val="accent1"/>
-          </a:fillRef>
-          <a:effectRef idx="2">
-            <a:schemeClr val="accent1"/>
-          </a:effectRef>
-          <a:fontRef idx="minor">
-            <a:schemeClr val="lt1"/>
-          </a:fontRef>
-        </p:style>
-        <p:txBody>
-          <a:bodyPr rtlCol="0" anchor="ctr"/>
-          <a:lstStyle/>
-          <a:p>
-            <a:pPr algn="ctr"/>
-          </a:p>
-        </p:txBody>
-      </p:sp>
-      <p:sp>
-        <p:nvSpPr>
-          <p:cNvPr id="7" name="TextBox 6"/>
-          <p:cNvSpPr txBox="1"/>
-          <p:nvPr/>
-        </p:nvSpPr>
-        <p:spPr>
-          <a:xfrm>
-            <a:off x="594360" y="1490472"/>
-            <a:ext cx="438912" cy="438912"/>
-          </a:xfrm>
-          <a:prstGeom prst="rect">
-            <a:avLst/>
-          </a:prstGeom>
-          <a:noFill/>
-        </p:spPr>
-        <p:txBody>
-          <a:bodyPr wrap="square" anchor="ctr"/>
-          <a:lstStyle/>
-          <a:p>
-            <a:pPr algn="ctr"/>
-            <a:r>
-              <a:rPr sz="1600" b="1" i="0">
-                <a:solidFill>
-                  <a:srgbClr val="FFFFFF"/>
-                </a:solidFill>
-                <a:latin typeface="Calibri"/>
-              </a:rPr>
-              <a:t>1</a:t>
-            </a:r>
-          </a:p>
-        </p:txBody>
-      </p:sp>
-      <p:sp>
-        <p:nvSpPr>
-          <p:cNvPr id="8" name="TextBox 7"/>
-          <p:cNvSpPr txBox="1"/>
-          <p:nvPr/>
-        </p:nvSpPr>
-        <p:spPr>
-          <a:xfrm>
-            <a:off x="1188720" y="1325880"/>
-            <a:ext cx="10271455" cy="786384"/>
-          </a:xfrm>
-          <a:prstGeom prst="rect">
-            <a:avLst/>
-          </a:prstGeom>
-          <a:noFill/>
-        </p:spPr>
-        <p:txBody>
-          <a:bodyPr wrap="square" anchor="ctr"/>
-          <a:lstStyle/>
-          <a:p>
-            <a:r>
-              <a:rPr sz="1500" b="1" i="0">
-                <a:solidFill>
-                  <a:srgbClr val="095292"/>
-                </a:solidFill>
-                <a:latin typeface="Calibri"/>
-              </a:rPr>
-              <a:t>Paso 1: subraye en el catalogo de requisitos y en el backlog los sustantivos del negocio de VetCare y arme la lista de clases candidatas, descartando las que sean pantallas, reportes o cosas tecnicas.</a:t>
-            </a:r>
-          </a:p>
-        </p:txBody>
-      </p:sp>
-      <p:sp>
-        <p:nvSpPr>
-          <p:cNvPr id="9" name="Rounded Rectangle 8"/>
-          <p:cNvSpPr/>
-          <p:nvPr/>
-        </p:nvSpPr>
-        <p:spPr>
-          <a:xfrm>
-            <a:off x="457200" y="2276856"/>
-            <a:ext cx="11277295" cy="950976"/>
-          </a:xfrm>
-          <a:prstGeom prst="roundRect">
-            <a:avLst>
-              <a:gd name="adj" fmla="val 12000"/>
-            </a:avLst>
-          </a:prstGeom>
-          <a:solidFill>
-            <a:srgbClr val="E8F4FA"/>
-          </a:solidFill>
-          <a:ln>
-            <a:noFill/>
-          </a:ln>
-        </p:spPr>
-        <p:style>
-          <a:lnRef idx="1">
-            <a:schemeClr val="accent1"/>
-          </a:lnRef>
-          <a:fillRef idx="3">
-            <a:schemeClr val="accent1"/>
-          </a:fillRef>
-          <a:effectRef idx="2">
-            <a:schemeClr val="accent1"/>
-          </a:effectRef>
-          <a:fontRef idx="minor">
-            <a:schemeClr val="lt1"/>
-          </a:fontRef>
-        </p:style>
-        <p:txBody>
-          <a:bodyPr rtlCol="0" anchor="ctr"/>
-          <a:lstStyle/>
-          <a:p>
-            <a:pPr algn="ctr"/>
-          </a:p>
-        </p:txBody>
-      </p:sp>
-      <p:sp>
-        <p:nvSpPr>
-          <p:cNvPr id="10" name="Rounded Rectangle 9"/>
-          <p:cNvSpPr/>
-          <p:nvPr/>
-        </p:nvSpPr>
-        <p:spPr>
-          <a:xfrm>
-            <a:off x="594360" y="2532888"/>
-            <a:ext cx="438912" cy="438912"/>
-          </a:xfrm>
-          <a:prstGeom prst="roundRect">
-            <a:avLst>
-              <a:gd name="adj" fmla="val 12000"/>
-            </a:avLst>
-          </a:prstGeom>
-          <a:solidFill>
-            <a:srgbClr val="095292"/>
-          </a:solidFill>
-          <a:ln>
-            <a:noFill/>
-          </a:ln>
-        </p:spPr>
-        <p:style>
-          <a:lnRef idx="1">
-            <a:schemeClr val="accent1"/>
-          </a:lnRef>
-          <a:fillRef idx="3">
-            <a:schemeClr val="accent1"/>
-          </a:fillRef>
-          <a:effectRef idx="2">
-            <a:schemeClr val="accent1"/>
-          </a:effectRef>
-          <a:fontRef idx="minor">
-            <a:schemeClr val="lt1"/>
-          </a:fontRef>
-        </p:style>
-        <p:txBody>
-          <a:bodyPr rtlCol="0" anchor="ctr"/>
-          <a:lstStyle/>
-          <a:p>
-            <a:pPr algn="ctr"/>
-          </a:p>
-        </p:txBody>
-      </p:sp>
-      <p:sp>
-        <p:nvSpPr>
-          <p:cNvPr id="11" name="TextBox 10"/>
-          <p:cNvSpPr txBox="1"/>
-          <p:nvPr/>
-        </p:nvSpPr>
-        <p:spPr>
-          <a:xfrm>
-            <a:off x="594360" y="2532888"/>
-            <a:ext cx="438912" cy="438912"/>
-          </a:xfrm>
-          <a:prstGeom prst="rect">
-            <a:avLst/>
-          </a:prstGeom>
-          <a:noFill/>
-        </p:spPr>
-        <p:txBody>
-          <a:bodyPr wrap="square" anchor="ctr"/>
-          <a:lstStyle/>
-          <a:p>
-            <a:pPr algn="ctr"/>
-            <a:r>
-              <a:rPr sz="1600" b="1" i="0">
-                <a:solidFill>
-                  <a:srgbClr val="FFFFFF"/>
-                </a:solidFill>
-                <a:latin typeface="Calibri"/>
-              </a:rPr>
-              <a:t>2</a:t>
-            </a:r>
-          </a:p>
-        </p:txBody>
-      </p:sp>
-      <p:sp>
-        <p:nvSpPr>
-          <p:cNvPr id="12" name="TextBox 11"/>
-          <p:cNvSpPr txBox="1"/>
-          <p:nvPr/>
-        </p:nvSpPr>
-        <p:spPr>
-          <a:xfrm>
-            <a:off x="1188720" y="2368296"/>
-            <a:ext cx="10271455" cy="786384"/>
-          </a:xfrm>
-          <a:prstGeom prst="rect">
-            <a:avLst/>
-          </a:prstGeom>
-          <a:noFill/>
-        </p:spPr>
-        <p:txBody>
-          <a:bodyPr wrap="square" anchor="ctr"/>
-          <a:lstStyle/>
-          <a:p>
-            <a:r>
-              <a:rPr sz="1500" b="1" i="0">
-                <a:solidFill>
-                  <a:srgbClr val="095292"/>
-                </a:solidFill>
-                <a:latin typeface="Calibri"/>
-              </a:rPr>
-              <a:t>Paso 2: dibuje en draw.io las cinco clases Dueno, Mascota, Cita, Veterinario y Atencion con la caja de tres compartimentos, en singular y con mayuscula inicial.</a:t>
-            </a:r>
-          </a:p>
-        </p:txBody>
-      </p:sp>
-      <p:sp>
-        <p:nvSpPr>
-          <p:cNvPr id="13" name="Rounded Rectangle 12"/>
-          <p:cNvSpPr/>
-          <p:nvPr/>
-        </p:nvSpPr>
-        <p:spPr>
-          <a:xfrm>
-            <a:off x="457200" y="3319272"/>
-            <a:ext cx="11277295" cy="950976"/>
-          </a:xfrm>
-          <a:prstGeom prst="roundRect">
-            <a:avLst>
-              <a:gd name="adj" fmla="val 12000"/>
-            </a:avLst>
-          </a:prstGeom>
-          <a:solidFill>
-            <a:srgbClr val="F2F2F2"/>
-          </a:solidFill>
-          <a:ln>
-            <a:noFill/>
-          </a:ln>
-        </p:spPr>
-        <p:style>
-          <a:lnRef idx="1">
-            <a:schemeClr val="accent1"/>
-          </a:lnRef>
-          <a:fillRef idx="3">
-            <a:schemeClr val="accent1"/>
-          </a:fillRef>
-          <a:effectRef idx="2">
-            <a:schemeClr val="accent1"/>
-          </a:effectRef>
-          <a:fontRef idx="minor">
-            <a:schemeClr val="lt1"/>
-          </a:fontRef>
-        </p:style>
-        <p:txBody>
-          <a:bodyPr rtlCol="0" anchor="ctr"/>
-          <a:lstStyle/>
-          <a:p>
-            <a:pPr algn="ctr"/>
-          </a:p>
-        </p:txBody>
-      </p:sp>
-      <p:sp>
-        <p:nvSpPr>
-          <p:cNvPr id="14" name="Rounded Rectangle 13"/>
-          <p:cNvSpPr/>
-          <p:nvPr/>
-        </p:nvSpPr>
-        <p:spPr>
-          <a:xfrm>
-            <a:off x="594360" y="3575304"/>
-            <a:ext cx="438912" cy="438912"/>
-          </a:xfrm>
-          <a:prstGeom prst="roundRect">
-            <a:avLst>
-              <a:gd name="adj" fmla="val 12000"/>
-            </a:avLst>
-          </a:prstGeom>
-          <a:solidFill>
-            <a:srgbClr val="095292"/>
-          </a:solidFill>
-          <a:ln>
-            <a:noFill/>
-          </a:ln>
-        </p:spPr>
-        <p:style>
-          <a:lnRef idx="1">
-            <a:schemeClr val="accent1"/>
-          </a:lnRef>
-          <a:fillRef idx="3">
-            <a:schemeClr val="accent1"/>
-          </a:fillRef>
-          <a:effectRef idx="2">
-            <a:schemeClr val="accent1"/>
-          </a:effectRef>
-          <a:fontRef idx="minor">
-            <a:schemeClr val="lt1"/>
-          </a:fontRef>
-        </p:style>
-        <p:txBody>
-          <a:bodyPr rtlCol="0" anchor="ctr"/>
-          <a:lstStyle/>
-          <a:p>
-            <a:pPr algn="ctr"/>
-          </a:p>
-        </p:txBody>
-      </p:sp>
-      <p:sp>
-        <p:nvSpPr>
-          <p:cNvPr id="15" name="TextBox 14"/>
-          <p:cNvSpPr txBox="1"/>
-          <p:nvPr/>
-        </p:nvSpPr>
-        <p:spPr>
-          <a:xfrm>
-            <a:off x="594360" y="3575304"/>
-            <a:ext cx="438912" cy="438912"/>
-          </a:xfrm>
-          <a:prstGeom prst="rect">
-            <a:avLst/>
-          </a:prstGeom>
-          <a:noFill/>
-        </p:spPr>
-        <p:txBody>
-          <a:bodyPr wrap="square" anchor="ctr"/>
-          <a:lstStyle/>
-          <a:p>
-            <a:pPr algn="ctr"/>
-            <a:r>
-              <a:rPr sz="1600" b="1" i="0">
-                <a:solidFill>
-                  <a:srgbClr val="FFFFFF"/>
-                </a:solidFill>
-                <a:latin typeface="Calibri"/>
-              </a:rPr>
-              <a:t>3</a:t>
-            </a:r>
-          </a:p>
-        </p:txBody>
-      </p:sp>
-      <p:sp>
-        <p:nvSpPr>
-          <p:cNvPr id="16" name="TextBox 15"/>
-          <p:cNvSpPr txBox="1"/>
-          <p:nvPr/>
-        </p:nvSpPr>
-        <p:spPr>
-          <a:xfrm>
-            <a:off x="1188720" y="3410712"/>
-            <a:ext cx="10271455" cy="786384"/>
-          </a:xfrm>
-          <a:prstGeom prst="rect">
-            <a:avLst/>
-          </a:prstGeom>
-          <a:noFill/>
-        </p:spPr>
-        <p:txBody>
-          <a:bodyPr wrap="square" anchor="ctr"/>
-          <a:lstStyle/>
-          <a:p>
-            <a:r>
-              <a:rPr sz="1500" b="1" i="0">
-                <a:solidFill>
-                  <a:srgbClr val="095292"/>
-                </a:solidFill>
-                <a:latin typeface="Calibri"/>
-              </a:rPr>
-              <a:t>Paso 3: coloque minimo cuatro atributos por clase con visibilidad y tipo (por ejemplo -documento: String, -fechaNacimiento: Date) verificando que ningun atributo este repetido en dos clases distintas.</a:t>
-            </a:r>
-          </a:p>
-        </p:txBody>
-      </p:sp>
-      <p:sp>
-        <p:nvSpPr>
-          <p:cNvPr id="17" name="Rounded Rectangle 16"/>
-          <p:cNvSpPr/>
-          <p:nvPr/>
-        </p:nvSpPr>
-        <p:spPr>
-          <a:xfrm>
-            <a:off x="457200" y="4361688"/>
-            <a:ext cx="11277295" cy="950976"/>
-          </a:xfrm>
-          <a:prstGeom prst="roundRect">
-            <a:avLst>
-              <a:gd name="adj" fmla="val 12000"/>
-            </a:avLst>
-          </a:prstGeom>
-          <a:solidFill>
-            <a:srgbClr val="E8F4FA"/>
-          </a:solidFill>
-          <a:ln>
-            <a:noFill/>
-          </a:ln>
-        </p:spPr>
-        <p:style>
-          <a:lnRef idx="1">
-            <a:schemeClr val="accent1"/>
-          </a:lnRef>
-          <a:fillRef idx="3">
-            <a:schemeClr val="accent1"/>
-          </a:fillRef>
-          <a:effectRef idx="2">
-            <a:schemeClr val="accent1"/>
-          </a:effectRef>
-          <a:fontRef idx="minor">
-            <a:schemeClr val="lt1"/>
-          </a:fontRef>
-        </p:style>
-        <p:txBody>
-          <a:bodyPr rtlCol="0" anchor="ctr"/>
-          <a:lstStyle/>
-          <a:p>
-            <a:pPr algn="ctr"/>
-          </a:p>
-        </p:txBody>
-      </p:sp>
-      <p:sp>
-        <p:nvSpPr>
-          <p:cNvPr id="18" name="Rounded Rectangle 17"/>
-          <p:cNvSpPr/>
-          <p:nvPr/>
-        </p:nvSpPr>
-        <p:spPr>
-          <a:xfrm>
-            <a:off x="594360" y="4617720"/>
-            <a:ext cx="438912" cy="438912"/>
-          </a:xfrm>
-          <a:prstGeom prst="roundRect">
-            <a:avLst>
-              <a:gd name="adj" fmla="val 12000"/>
-            </a:avLst>
-          </a:prstGeom>
-          <a:solidFill>
-            <a:srgbClr val="095292"/>
-          </a:solidFill>
-          <a:ln>
-            <a:noFill/>
-          </a:ln>
-        </p:spPr>
-        <p:style>
-          <a:lnRef idx="1">
-            <a:schemeClr val="accent1"/>
-          </a:lnRef>
-          <a:fillRef idx="3">
-            <a:schemeClr val="accent1"/>
-          </a:fillRef>
-          <a:effectRef idx="2">
-            <a:schemeClr val="accent1"/>
-          </a:effectRef>
-          <a:fontRef idx="minor">
-            <a:schemeClr val="lt1"/>
-          </a:fontRef>
-        </p:style>
-        <p:txBody>
-          <a:bodyPr rtlCol="0" anchor="ctr"/>
-          <a:lstStyle/>
-          <a:p>
-            <a:pPr algn="ctr"/>
-          </a:p>
-        </p:txBody>
-      </p:sp>
-      <p:sp>
-        <p:nvSpPr>
-          <p:cNvPr id="19" name="TextBox 18"/>
-          <p:cNvSpPr txBox="1"/>
-          <p:nvPr/>
-        </p:nvSpPr>
-        <p:spPr>
-          <a:xfrm>
-            <a:off x="594360" y="4617720"/>
-            <a:ext cx="438912" cy="438912"/>
-          </a:xfrm>
-          <a:prstGeom prst="rect">
-            <a:avLst/>
-          </a:prstGeom>
-          <a:noFill/>
-        </p:spPr>
-        <p:txBody>
-          <a:bodyPr wrap="square" anchor="ctr"/>
-          <a:lstStyle/>
-          <a:p>
-            <a:pPr algn="ctr"/>
-            <a:r>
-              <a:rPr sz="1600" b="1" i="0">
-                <a:solidFill>
-                  <a:srgbClr val="FFFFFF"/>
-                </a:solidFill>
-                <a:latin typeface="Calibri"/>
-              </a:rPr>
-              <a:t>4</a:t>
-            </a:r>
-          </a:p>
-        </p:txBody>
-      </p:sp>
-      <p:sp>
-        <p:nvSpPr>
-          <p:cNvPr id="20" name="TextBox 19"/>
-          <p:cNvSpPr txBox="1"/>
-          <p:nvPr/>
-        </p:nvSpPr>
-        <p:spPr>
-          <a:xfrm>
-            <a:off x="1188720" y="4453128"/>
-            <a:ext cx="10271455" cy="786384"/>
-          </a:xfrm>
-          <a:prstGeom prst="rect">
-            <a:avLst/>
-          </a:prstGeom>
-          <a:noFill/>
-        </p:spPr>
-        <p:txBody>
-          <a:bodyPr wrap="square" anchor="ctr"/>
-          <a:lstStyle/>
-          <a:p>
-            <a:r>
-              <a:rPr sz="1500" b="1" i="0">
-                <a:solidFill>
-                  <a:srgbClr val="095292"/>
-                </a:solidFill>
-                <a:latin typeface="Calibri"/>
-              </a:rPr>
-              <a:t>Paso 4: agregue al menos un metodo propio del dominio por clase (por ejemplo +calcularEdad(): int en Mascota, +reprogramar(nuevaFecha: Date) en Cita) y descarte metodos tecnicos como conectarBD o guardarEnDisco.</a:t>
-            </a:r>
-          </a:p>
-        </p:txBody>
-      </p:sp>
-      <p:sp>
-        <p:nvSpPr>
-          <p:cNvPr id="21" name="Rounded Rectangle 20"/>
-          <p:cNvSpPr/>
-          <p:nvPr/>
-        </p:nvSpPr>
-        <p:spPr>
-          <a:xfrm>
-            <a:off x="457200" y="5404104"/>
-            <a:ext cx="11277295" cy="950976"/>
-          </a:xfrm>
-          <a:prstGeom prst="roundRect">
-            <a:avLst>
-              <a:gd name="adj" fmla="val 12000"/>
-            </a:avLst>
-          </a:prstGeom>
-          <a:solidFill>
-            <a:srgbClr val="F2F2F2"/>
-          </a:solidFill>
-          <a:ln>
-            <a:noFill/>
-          </a:ln>
-        </p:spPr>
-        <p:style>
-          <a:lnRef idx="1">
-            <a:schemeClr val="accent1"/>
-          </a:lnRef>
-          <a:fillRef idx="3">
-            <a:schemeClr val="accent1"/>
-          </a:fillRef>
-          <a:effectRef idx="2">
-            <a:schemeClr val="accent1"/>
-          </a:effectRef>
-          <a:fontRef idx="minor">
-            <a:schemeClr val="lt1"/>
-          </a:fontRef>
-        </p:style>
-        <p:txBody>
-          <a:bodyPr rtlCol="0" anchor="ctr"/>
-          <a:lstStyle/>
-          <a:p>
-            <a:pPr algn="ctr"/>
-          </a:p>
-        </p:txBody>
-      </p:sp>
-      <p:sp>
-        <p:nvSpPr>
-          <p:cNvPr id="22" name="Rounded Rectangle 21"/>
-          <p:cNvSpPr/>
-          <p:nvPr/>
-        </p:nvSpPr>
-        <p:spPr>
-          <a:xfrm>
-            <a:off x="594360" y="5660136"/>
-            <a:ext cx="438912" cy="438912"/>
-          </a:xfrm>
-          <a:prstGeom prst="roundRect">
-            <a:avLst>
-              <a:gd name="adj" fmla="val 12000"/>
-            </a:avLst>
-          </a:prstGeom>
-          <a:solidFill>
-            <a:srgbClr val="095292"/>
-          </a:solidFill>
-          <a:ln>
-            <a:noFill/>
-          </a:ln>
-        </p:spPr>
-        <p:style>
-          <a:lnRef idx="1">
-            <a:schemeClr val="accent1"/>
-          </a:lnRef>
-          <a:fillRef idx="3">
-            <a:schemeClr val="accent1"/>
-          </a:fillRef>
-          <a:effectRef idx="2">
-            <a:schemeClr val="accent1"/>
-          </a:effectRef>
-          <a:fontRef idx="minor">
-            <a:schemeClr val="lt1"/>
-          </a:fontRef>
-        </p:style>
-        <p:txBody>
-          <a:bodyPr rtlCol="0" anchor="ctr"/>
-          <a:lstStyle/>
-          <a:p>
-            <a:pPr algn="ctr"/>
-          </a:p>
-        </p:txBody>
-      </p:sp>
-      <p:sp>
-        <p:nvSpPr>
-          <p:cNvPr id="23" name="TextBox 22"/>
-          <p:cNvSpPr txBox="1"/>
-          <p:nvPr/>
-        </p:nvSpPr>
-        <p:spPr>
-          <a:xfrm>
-            <a:off x="594360" y="5660136"/>
-            <a:ext cx="438912" cy="438912"/>
-          </a:xfrm>
-          <a:prstGeom prst="rect">
-            <a:avLst/>
-          </a:prstGeom>
-          <a:noFill/>
-        </p:spPr>
-        <p:txBody>
-          <a:bodyPr wrap="square" anchor="ctr"/>
-          <a:lstStyle/>
-          <a:p>
-            <a:pPr algn="ctr"/>
-            <a:r>
-              <a:rPr sz="1600" b="1" i="0">
-                <a:solidFill>
-                  <a:srgbClr val="FFFFFF"/>
-                </a:solidFill>
-                <a:latin typeface="Calibri"/>
-              </a:rPr>
-              <a:t>5</a:t>
-            </a:r>
-          </a:p>
-        </p:txBody>
-      </p:sp>
-      <p:sp>
-        <p:nvSpPr>
-          <p:cNvPr id="24" name="TextBox 23"/>
-          <p:cNvSpPr txBox="1"/>
-          <p:nvPr/>
-        </p:nvSpPr>
-        <p:spPr>
-          <a:xfrm>
-            <a:off x="1188720" y="5495544"/>
-            <a:ext cx="10271455" cy="786384"/>
-          </a:xfrm>
-          <a:prstGeom prst="rect">
-            <a:avLst/>
-          </a:prstGeom>
-          <a:noFill/>
-        </p:spPr>
-        <p:txBody>
-          <a:bodyPr wrap="square" anchor="ctr"/>
-          <a:lstStyle/>
-          <a:p>
-            <a:r>
-              <a:rPr sz="1500" b="1" i="0">
-                <a:solidFill>
-                  <a:srgbClr val="095292"/>
-                </a:solidFill>
-                <a:latin typeface="Calibri"/>
-              </a:rPr>
-              <a:t>Paso 5: trace las cuatro asociaciones con nombre de relacion y multiplicidad en ambos extremos, leala cada una en voz alta como frase completa, exporte a PNG y .drawio y suba ambos archivos a la plataforma del curso.</a:t>
-            </a:r>
-          </a:p>
-        </p:txBody>
-      </p:sp>
-      <p:sp>
-        <p:nvSpPr>
-          <p:cNvPr id="25" name="TextBox 24"/>
-          <p:cNvSpPr txBox="1"/>
-          <p:nvPr/>
-        </p:nvSpPr>
-        <p:spPr>
-          <a:xfrm>
-            <a:off x="11185855" y="6473952"/>
-            <a:ext cx="640080" cy="274320"/>
-          </a:xfrm>
-          <a:prstGeom prst="rect">
-            <a:avLst/>
-          </a:prstGeom>
-          <a:noFill/>
-        </p:spPr>
-        <p:txBody>
-          <a:bodyPr wrap="square">
-            <a:spAutoFit/>
-          </a:bodyPr>
-          <a:lstStyle/>
-          <a:p>
-            <a:pPr algn="r"/>
-            <a:r>
-              <a:rPr sz="1100" b="0" i="0">
-                <a:solidFill>
-                  <a:srgbClr val="666666"/>
-                </a:solidFill>
-                <a:latin typeface="Calibri"/>
-              </a:rPr>
-              <a:t>19</a:t>
+                  <a:srgbClr val="269CCB"/>
+                </a:solidFill>
+                <a:latin typeface="Calibri"/>
+              </a:rPr>
+              <a:t>Teoria al servicio del diseño</a:t>
             </a:r>
           </a:p>
         </p:txBody>
@@ -8747,7 +7239,7 @@
                 </a:solidFill>
                 <a:latin typeface="Calibri"/>
               </a:rPr>
-              <a:t>Encuadre de hoy · Objetivo del PI</a:t>
+              <a:t>Encuadre de hoy</a:t>
             </a:r>
           </a:p>
         </p:txBody>
@@ -8795,7 +7287,7 @@
                 </a:solidFill>
                 <a:latin typeface="Calibri"/>
               </a:rPr>
-              <a:t>Hoy avanzamos VetCare en:</a:t>
+              <a:t>Tema:</a:t>
             </a:r>
             <a:r>
               <a:rPr sz="2000" b="0" i="0">
@@ -8804,7 +7296,7 @@
                 </a:solidFill>
                 <a:latin typeface="Calibri"/>
               </a:rPr>
-              <a:t> Queda listo el modelo de dominio de VetCare: el diagrama de clases con Dueno, Mascota, Cita, Veterinario y Atencion.</a:t>
+              <a:t> Introduccion a UML</a:t>
             </a:r>
           </a:p>
           <a:p>
@@ -8820,34 +7312,7 @@
                 </a:solidFill>
                 <a:latin typeface="Calibri"/>
               </a:rPr>
-              <a:t>–   Herramienta: </a:t>
-            </a:r>
-            <a:r>
-              <a:rPr sz="2000" b="1" i="0">
-                <a:solidFill>
-                  <a:srgbClr val="333333"/>
-                </a:solidFill>
-                <a:latin typeface="Calibri"/>
-              </a:rPr>
-              <a:t>draw.io · Mermaid</a:t>
-            </a:r>
-            <a:r>
-              <a:rPr sz="2000" b="0" i="0">
-                <a:solidFill>
-                  <a:srgbClr val="333333"/>
-                </a:solidFill>
-                <a:latin typeface="Calibri"/>
-              </a:rPr>
-              <a:t> · Bloque </a:t>
-            </a:r>
-            <a:r>
-              <a:rPr sz="2000" b="1" i="0">
-                <a:solidFill>
-                  <a:srgbClr val="333333"/>
-                </a:solidFill>
-                <a:latin typeface="Calibri"/>
-              </a:rPr>
-              <a:t>120 min</a:t>
+              <a:t>–   El idioma comun para dibujar los planos de VetCare</a:t>
             </a:r>
           </a:p>
           <a:p>
@@ -8863,7 +7328,7 @@
                 </a:solidFill>
                 <a:latin typeface="Calibri"/>
               </a:rPr>
-              <a:t>–   </a:t>
+              <a:t>–   Herramienta del tema: </a:t>
             </a:r>
             <a:r>
               <a:rPr sz="2000" b="1" i="0">
@@ -8872,7 +7337,7 @@
                 </a:solidFill>
                 <a:latin typeface="Calibri"/>
               </a:rPr>
-              <a:t>Entregable de hoy:</a:t>
+              <a:t>draw.io · Mermaid</a:t>
             </a:r>
             <a:r>
               <a:rPr sz="2000" b="0" i="0">
@@ -8881,7 +7346,16 @@
                 </a:solidFill>
                 <a:latin typeface="Calibri"/>
               </a:rPr>
-              <a:t> Diagrama de clases de VetCare hecho en draw.io, exportado a PNG y al archivo .drawio, con 5 clases, atributos tipados, metodos propios y 4 asociaciones con multiplicidad y nombre de rol, subido a la plataforma del curso.</a:t>
+              <a:t> · Bloque </a:t>
+            </a:r>
+            <a:r>
+              <a:rPr sz="2000" b="1" i="0">
+                <a:solidFill>
+                  <a:srgbClr val="333333"/>
+                </a:solidFill>
+                <a:latin typeface="Calibri"/>
+              </a:rPr>
+              <a:t>120 min</a:t>
             </a:r>
           </a:p>
           <a:p>
@@ -8897,7 +7371,7 @@
                 </a:solidFill>
                 <a:latin typeface="Calibri"/>
               </a:rPr>
-              <a:t>–   La teoria esta al servicio del producto: al salir, VetCare avanzo.</a:t>
+              <a:t>–   Ejemplo de toda la clase: VetCare, el sistema de la clinica «Huellitas».</a:t>
             </a:r>
           </a:p>
         </p:txBody>
@@ -8933,1917 +7407,6 @@
                 <a:latin typeface="Calibri"/>
               </a:rPr>
               <a:t>2</a:t>
-            </a:r>
-          </a:p>
-        </p:txBody>
-      </p:sp>
-    </p:spTree>
-  </p:cSld>
-  <p:clrMapOvr>
-    <a:masterClrMapping/>
-  </p:clrMapOvr>
-</p:sld>
-</file>
-
-<file path=ppt/slides/slide20.xml><?xml version="1.0" encoding="utf-8"?>
-<p:sld xmlns:a="http://schemas.openxmlformats.org/drawingml/2006/main" xmlns:p="http://schemas.openxmlformats.org/presentationml/2006/main" xmlns:r="http://schemas.openxmlformats.org/officeDocument/2006/relationships">
-  <p:cSld>
-    <p:bg>
-      <p:bgPr>
-        <a:solidFill>
-          <a:srgbClr val="FFFFFF"/>
-        </a:solidFill>
-        <a:effectLst/>
-      </p:bgPr>
-    </p:bg>
-    <p:spTree>
-      <p:nvGrpSpPr>
-        <p:cNvPr id="1" name=""/>
-        <p:cNvGrpSpPr/>
-        <p:nvPr/>
-      </p:nvGrpSpPr>
-      <p:grpSpPr/>
-      <p:sp>
-        <p:nvSpPr>
-          <p:cNvPr id="2" name="Rectangle 1"/>
-          <p:cNvSpPr/>
-          <p:nvPr/>
-        </p:nvSpPr>
-        <p:spPr>
-          <a:xfrm>
-            <a:off x="0" y="0"/>
-            <a:ext cx="12191695" cy="960120"/>
-          </a:xfrm>
-          <a:prstGeom prst="rect">
-            <a:avLst/>
-          </a:prstGeom>
-          <a:solidFill>
-            <a:srgbClr val="095292"/>
-          </a:solidFill>
-          <a:ln>
-            <a:noFill/>
-          </a:ln>
-        </p:spPr>
-        <p:style>
-          <a:lnRef idx="1">
-            <a:schemeClr val="accent1"/>
-          </a:lnRef>
-          <a:fillRef idx="3">
-            <a:schemeClr val="accent1"/>
-          </a:fillRef>
-          <a:effectRef idx="2">
-            <a:schemeClr val="accent1"/>
-          </a:effectRef>
-          <a:fontRef idx="minor">
-            <a:schemeClr val="lt1"/>
-          </a:fontRef>
-        </p:style>
-        <p:txBody>
-          <a:bodyPr rtlCol="0" anchor="ctr"/>
-          <a:lstStyle/>
-          <a:p>
-            <a:pPr algn="ctr"/>
-          </a:p>
-        </p:txBody>
-      </p:sp>
-      <p:sp>
-        <p:nvSpPr>
-          <p:cNvPr id="3" name="Rectangle 2"/>
-          <p:cNvSpPr/>
-          <p:nvPr/>
-        </p:nvSpPr>
-        <p:spPr>
-          <a:xfrm>
-            <a:off x="0" y="960120"/>
-            <a:ext cx="12191695" cy="41148"/>
-          </a:xfrm>
-          <a:prstGeom prst="rect">
-            <a:avLst/>
-          </a:prstGeom>
-          <a:solidFill>
-            <a:srgbClr val="FFD000"/>
-          </a:solidFill>
-          <a:ln>
-            <a:noFill/>
-          </a:ln>
-        </p:spPr>
-        <p:style>
-          <a:lnRef idx="1">
-            <a:schemeClr val="accent1"/>
-          </a:lnRef>
-          <a:fillRef idx="3">
-            <a:schemeClr val="accent1"/>
-          </a:fillRef>
-          <a:effectRef idx="2">
-            <a:schemeClr val="accent1"/>
-          </a:effectRef>
-          <a:fontRef idx="minor">
-            <a:schemeClr val="lt1"/>
-          </a:fontRef>
-        </p:style>
-        <p:txBody>
-          <a:bodyPr rtlCol="0" anchor="ctr"/>
-          <a:lstStyle/>
-          <a:p>
-            <a:pPr algn="ctr"/>
-          </a:p>
-        </p:txBody>
-      </p:sp>
-      <p:sp>
-        <p:nvSpPr>
-          <p:cNvPr id="4" name="TextBox 3"/>
-          <p:cNvSpPr txBox="1"/>
-          <p:nvPr/>
-        </p:nvSpPr>
-        <p:spPr>
-          <a:xfrm>
-            <a:off x="457200" y="164592"/>
-            <a:ext cx="11277295" cy="502920"/>
-          </a:xfrm>
-          <a:prstGeom prst="rect">
-            <a:avLst/>
-          </a:prstGeom>
-          <a:noFill/>
-        </p:spPr>
-        <p:txBody>
-          <a:bodyPr wrap="square">
-            <a:spAutoFit/>
-          </a:bodyPr>
-          <a:lstStyle/>
-          <a:p>
-            <a:r>
-              <a:rPr sz="2600" b="1" i="0">
-                <a:solidFill>
-                  <a:srgbClr val="FFFFFF"/>
-                </a:solidFill>
-                <a:latin typeface="Calibri"/>
-              </a:rPr>
-              <a:t>Antes de entregar — autochequeo</a:t>
-            </a:r>
-          </a:p>
-        </p:txBody>
-      </p:sp>
-      <p:sp>
-        <p:nvSpPr>
-          <p:cNvPr id="5" name="Rounded Rectangle 4"/>
-          <p:cNvSpPr/>
-          <p:nvPr/>
-        </p:nvSpPr>
-        <p:spPr>
-          <a:xfrm>
-            <a:off x="457200" y="1261872"/>
-            <a:ext cx="11277295" cy="566928"/>
-          </a:xfrm>
-          <a:prstGeom prst="roundRect">
-            <a:avLst>
-              <a:gd name="adj" fmla="val 12000"/>
-            </a:avLst>
-          </a:prstGeom>
-          <a:solidFill>
-            <a:srgbClr val="F2F2F2"/>
-          </a:solidFill>
-          <a:ln>
-            <a:noFill/>
-          </a:ln>
-        </p:spPr>
-        <p:style>
-          <a:lnRef idx="1">
-            <a:schemeClr val="accent1"/>
-          </a:lnRef>
-          <a:fillRef idx="3">
-            <a:schemeClr val="accent1"/>
-          </a:fillRef>
-          <a:effectRef idx="2">
-            <a:schemeClr val="accent1"/>
-          </a:effectRef>
-          <a:fontRef idx="minor">
-            <a:schemeClr val="lt1"/>
-          </a:fontRef>
-        </p:style>
-        <p:txBody>
-          <a:bodyPr rtlCol="0" anchor="ctr"/>
-          <a:lstStyle/>
-          <a:p>
-            <a:pPr algn="ctr"/>
-          </a:p>
-        </p:txBody>
-      </p:sp>
-      <p:sp>
-        <p:nvSpPr>
-          <p:cNvPr id="6" name="Rectangle 5"/>
-          <p:cNvSpPr/>
-          <p:nvPr/>
-        </p:nvSpPr>
-        <p:spPr>
-          <a:xfrm>
-            <a:off x="640080" y="1408175"/>
-            <a:ext cx="274320" cy="274320"/>
-          </a:xfrm>
-          <a:prstGeom prst="rect">
-            <a:avLst/>
-          </a:prstGeom>
-          <a:solidFill>
-            <a:srgbClr val="FFFFFF"/>
-          </a:solidFill>
-          <a:ln>
-            <a:solidFill>
-              <a:srgbClr val="333333"/>
-            </a:solidFill>
-          </a:ln>
-        </p:spPr>
-        <p:style>
-          <a:lnRef idx="1">
-            <a:schemeClr val="accent1"/>
-          </a:lnRef>
-          <a:fillRef idx="3">
-            <a:schemeClr val="accent1"/>
-          </a:fillRef>
-          <a:effectRef idx="2">
-            <a:schemeClr val="accent1"/>
-          </a:effectRef>
-          <a:fontRef idx="minor">
-            <a:schemeClr val="lt1"/>
-          </a:fontRef>
-        </p:style>
-        <p:txBody>
-          <a:bodyPr rtlCol="0" anchor="ctr"/>
-          <a:lstStyle/>
-          <a:p>
-            <a:pPr algn="ctr"/>
-          </a:p>
-        </p:txBody>
-      </p:sp>
-      <p:sp>
-        <p:nvSpPr>
-          <p:cNvPr id="7" name="Rectangle 6"/>
-          <p:cNvSpPr/>
-          <p:nvPr/>
-        </p:nvSpPr>
-        <p:spPr>
-          <a:xfrm>
-            <a:off x="640080" y="1408175"/>
-            <a:ext cx="73152" cy="274320"/>
-          </a:xfrm>
-          <a:prstGeom prst="rect">
-            <a:avLst/>
-          </a:prstGeom>
-          <a:solidFill>
-            <a:srgbClr val="269CCB"/>
-          </a:solidFill>
-          <a:ln>
-            <a:noFill/>
-          </a:ln>
-        </p:spPr>
-        <p:style>
-          <a:lnRef idx="1">
-            <a:schemeClr val="accent1"/>
-          </a:lnRef>
-          <a:fillRef idx="3">
-            <a:schemeClr val="accent1"/>
-          </a:fillRef>
-          <a:effectRef idx="2">
-            <a:schemeClr val="accent1"/>
-          </a:effectRef>
-          <a:fontRef idx="minor">
-            <a:schemeClr val="lt1"/>
-          </a:fontRef>
-        </p:style>
-        <p:txBody>
-          <a:bodyPr rtlCol="0" anchor="ctr"/>
-          <a:lstStyle/>
-          <a:p>
-            <a:pPr algn="ctr"/>
-          </a:p>
-        </p:txBody>
-      </p:sp>
-      <p:sp>
-        <p:nvSpPr>
-          <p:cNvPr id="8" name="TextBox 7"/>
-          <p:cNvSpPr txBox="1"/>
-          <p:nvPr/>
-        </p:nvSpPr>
-        <p:spPr>
-          <a:xfrm>
-            <a:off x="1097280" y="1353312"/>
-            <a:ext cx="10362895" cy="402336"/>
-          </a:xfrm>
-          <a:prstGeom prst="rect">
-            <a:avLst/>
-          </a:prstGeom>
-          <a:noFill/>
-        </p:spPr>
-        <p:txBody>
-          <a:bodyPr wrap="square" anchor="ctr"/>
-          <a:lstStyle/>
-          <a:p>
-            <a:r>
-              <a:rPr sz="1500" b="0" i="0">
-                <a:solidFill>
-                  <a:srgbClr val="333333"/>
-                </a:solidFill>
-                <a:latin typeface="Calibri"/>
-              </a:rPr>
-              <a:t>Si leo esta relacion en voz alta con sus dos multiplicidades, la frase resultante es cierta en la clinica Huellitas o suena absurda?</a:t>
-            </a:r>
-          </a:p>
-        </p:txBody>
-      </p:sp>
-      <p:sp>
-        <p:nvSpPr>
-          <p:cNvPr id="9" name="Rounded Rectangle 8"/>
-          <p:cNvSpPr/>
-          <p:nvPr/>
-        </p:nvSpPr>
-        <p:spPr>
-          <a:xfrm>
-            <a:off x="457200" y="1938528"/>
-            <a:ext cx="11277295" cy="566928"/>
-          </a:xfrm>
-          <a:prstGeom prst="roundRect">
-            <a:avLst>
-              <a:gd name="adj" fmla="val 12000"/>
-            </a:avLst>
-          </a:prstGeom>
-          <a:solidFill>
-            <a:srgbClr val="F2F2F2"/>
-          </a:solidFill>
-          <a:ln>
-            <a:noFill/>
-          </a:ln>
-        </p:spPr>
-        <p:style>
-          <a:lnRef idx="1">
-            <a:schemeClr val="accent1"/>
-          </a:lnRef>
-          <a:fillRef idx="3">
-            <a:schemeClr val="accent1"/>
-          </a:fillRef>
-          <a:effectRef idx="2">
-            <a:schemeClr val="accent1"/>
-          </a:effectRef>
-          <a:fontRef idx="minor">
-            <a:schemeClr val="lt1"/>
-          </a:fontRef>
-        </p:style>
-        <p:txBody>
-          <a:bodyPr rtlCol="0" anchor="ctr"/>
-          <a:lstStyle/>
-          <a:p>
-            <a:pPr algn="ctr"/>
-          </a:p>
-        </p:txBody>
-      </p:sp>
-      <p:sp>
-        <p:nvSpPr>
-          <p:cNvPr id="10" name="Rectangle 9"/>
-          <p:cNvSpPr/>
-          <p:nvPr/>
-        </p:nvSpPr>
-        <p:spPr>
-          <a:xfrm>
-            <a:off x="640080" y="2084832"/>
-            <a:ext cx="274320" cy="274320"/>
-          </a:xfrm>
-          <a:prstGeom prst="rect">
-            <a:avLst/>
-          </a:prstGeom>
-          <a:solidFill>
-            <a:srgbClr val="FFFFFF"/>
-          </a:solidFill>
-          <a:ln>
-            <a:solidFill>
-              <a:srgbClr val="333333"/>
-            </a:solidFill>
-          </a:ln>
-        </p:spPr>
-        <p:style>
-          <a:lnRef idx="1">
-            <a:schemeClr val="accent1"/>
-          </a:lnRef>
-          <a:fillRef idx="3">
-            <a:schemeClr val="accent1"/>
-          </a:fillRef>
-          <a:effectRef idx="2">
-            <a:schemeClr val="accent1"/>
-          </a:effectRef>
-          <a:fontRef idx="minor">
-            <a:schemeClr val="lt1"/>
-          </a:fontRef>
-        </p:style>
-        <p:txBody>
-          <a:bodyPr rtlCol="0" anchor="ctr"/>
-          <a:lstStyle/>
-          <a:p>
-            <a:pPr algn="ctr"/>
-          </a:p>
-        </p:txBody>
-      </p:sp>
-      <p:sp>
-        <p:nvSpPr>
-          <p:cNvPr id="11" name="Rectangle 10"/>
-          <p:cNvSpPr/>
-          <p:nvPr/>
-        </p:nvSpPr>
-        <p:spPr>
-          <a:xfrm>
-            <a:off x="640080" y="2084832"/>
-            <a:ext cx="73152" cy="274320"/>
-          </a:xfrm>
-          <a:prstGeom prst="rect">
-            <a:avLst/>
-          </a:prstGeom>
-          <a:solidFill>
-            <a:srgbClr val="269CCB"/>
-          </a:solidFill>
-          <a:ln>
-            <a:noFill/>
-          </a:ln>
-        </p:spPr>
-        <p:style>
-          <a:lnRef idx="1">
-            <a:schemeClr val="accent1"/>
-          </a:lnRef>
-          <a:fillRef idx="3">
-            <a:schemeClr val="accent1"/>
-          </a:fillRef>
-          <a:effectRef idx="2">
-            <a:schemeClr val="accent1"/>
-          </a:effectRef>
-          <a:fontRef idx="minor">
-            <a:schemeClr val="lt1"/>
-          </a:fontRef>
-        </p:style>
-        <p:txBody>
-          <a:bodyPr rtlCol="0" anchor="ctr"/>
-          <a:lstStyle/>
-          <a:p>
-            <a:pPr algn="ctr"/>
-          </a:p>
-        </p:txBody>
-      </p:sp>
-      <p:sp>
-        <p:nvSpPr>
-          <p:cNvPr id="12" name="TextBox 11"/>
-          <p:cNvSpPr txBox="1"/>
-          <p:nvPr/>
-        </p:nvSpPr>
-        <p:spPr>
-          <a:xfrm>
-            <a:off x="1097280" y="2029968"/>
-            <a:ext cx="10362895" cy="402336"/>
-          </a:xfrm>
-          <a:prstGeom prst="rect">
-            <a:avLst/>
-          </a:prstGeom>
-          <a:noFill/>
-        </p:spPr>
-        <p:txBody>
-          <a:bodyPr wrap="square" anchor="ctr"/>
-          <a:lstStyle/>
-          <a:p>
-            <a:r>
-              <a:rPr sz="1500" b="0" i="0">
-                <a:solidFill>
-                  <a:srgbClr val="333333"/>
-                </a:solidFill>
-                <a:latin typeface="Calibri"/>
-              </a:rPr>
-              <a:t>Este atributo pertenece de verdad al concepto donde lo puse, o lo puse ahi solo porque en la pantalla aparecen juntos?</a:t>
-            </a:r>
-          </a:p>
-        </p:txBody>
-      </p:sp>
-      <p:sp>
-        <p:nvSpPr>
-          <p:cNvPr id="13" name="Rounded Rectangle 12"/>
-          <p:cNvSpPr/>
-          <p:nvPr/>
-        </p:nvSpPr>
-        <p:spPr>
-          <a:xfrm>
-            <a:off x="457200" y="2615184"/>
-            <a:ext cx="11277295" cy="566928"/>
-          </a:xfrm>
-          <a:prstGeom prst="roundRect">
-            <a:avLst>
-              <a:gd name="adj" fmla="val 12000"/>
-            </a:avLst>
-          </a:prstGeom>
-          <a:solidFill>
-            <a:srgbClr val="F2F2F2"/>
-          </a:solidFill>
-          <a:ln>
-            <a:noFill/>
-          </a:ln>
-        </p:spPr>
-        <p:style>
-          <a:lnRef idx="1">
-            <a:schemeClr val="accent1"/>
-          </a:lnRef>
-          <a:fillRef idx="3">
-            <a:schemeClr val="accent1"/>
-          </a:fillRef>
-          <a:effectRef idx="2">
-            <a:schemeClr val="accent1"/>
-          </a:effectRef>
-          <a:fontRef idx="minor">
-            <a:schemeClr val="lt1"/>
-          </a:fontRef>
-        </p:style>
-        <p:txBody>
-          <a:bodyPr rtlCol="0" anchor="ctr"/>
-          <a:lstStyle/>
-          <a:p>
-            <a:pPr algn="ctr"/>
-          </a:p>
-        </p:txBody>
-      </p:sp>
-      <p:sp>
-        <p:nvSpPr>
-          <p:cNvPr id="14" name="Rectangle 13"/>
-          <p:cNvSpPr/>
-          <p:nvPr/>
-        </p:nvSpPr>
-        <p:spPr>
-          <a:xfrm>
-            <a:off x="640080" y="2761488"/>
-            <a:ext cx="274320" cy="274320"/>
-          </a:xfrm>
-          <a:prstGeom prst="rect">
-            <a:avLst/>
-          </a:prstGeom>
-          <a:solidFill>
-            <a:srgbClr val="FFFFFF"/>
-          </a:solidFill>
-          <a:ln>
-            <a:solidFill>
-              <a:srgbClr val="333333"/>
-            </a:solidFill>
-          </a:ln>
-        </p:spPr>
-        <p:style>
-          <a:lnRef idx="1">
-            <a:schemeClr val="accent1"/>
-          </a:lnRef>
-          <a:fillRef idx="3">
-            <a:schemeClr val="accent1"/>
-          </a:fillRef>
-          <a:effectRef idx="2">
-            <a:schemeClr val="accent1"/>
-          </a:effectRef>
-          <a:fontRef idx="minor">
-            <a:schemeClr val="lt1"/>
-          </a:fontRef>
-        </p:style>
-        <p:txBody>
-          <a:bodyPr rtlCol="0" anchor="ctr"/>
-          <a:lstStyle/>
-          <a:p>
-            <a:pPr algn="ctr"/>
-          </a:p>
-        </p:txBody>
-      </p:sp>
-      <p:sp>
-        <p:nvSpPr>
-          <p:cNvPr id="15" name="Rectangle 14"/>
-          <p:cNvSpPr/>
-          <p:nvPr/>
-        </p:nvSpPr>
-        <p:spPr>
-          <a:xfrm>
-            <a:off x="640080" y="2761488"/>
-            <a:ext cx="73152" cy="274320"/>
-          </a:xfrm>
-          <a:prstGeom prst="rect">
-            <a:avLst/>
-          </a:prstGeom>
-          <a:solidFill>
-            <a:srgbClr val="269CCB"/>
-          </a:solidFill>
-          <a:ln>
-            <a:noFill/>
-          </a:ln>
-        </p:spPr>
-        <p:style>
-          <a:lnRef idx="1">
-            <a:schemeClr val="accent1"/>
-          </a:lnRef>
-          <a:fillRef idx="3">
-            <a:schemeClr val="accent1"/>
-          </a:fillRef>
-          <a:effectRef idx="2">
-            <a:schemeClr val="accent1"/>
-          </a:effectRef>
-          <a:fontRef idx="minor">
-            <a:schemeClr val="lt1"/>
-          </a:fontRef>
-        </p:style>
-        <p:txBody>
-          <a:bodyPr rtlCol="0" anchor="ctr"/>
-          <a:lstStyle/>
-          <a:p>
-            <a:pPr algn="ctr"/>
-          </a:p>
-        </p:txBody>
-      </p:sp>
-      <p:sp>
-        <p:nvSpPr>
-          <p:cNvPr id="16" name="TextBox 15"/>
-          <p:cNvSpPr txBox="1"/>
-          <p:nvPr/>
-        </p:nvSpPr>
-        <p:spPr>
-          <a:xfrm>
-            <a:off x="1097280" y="2706624"/>
-            <a:ext cx="10362895" cy="402336"/>
-          </a:xfrm>
-          <a:prstGeom prst="rect">
-            <a:avLst/>
-          </a:prstGeom>
-          <a:noFill/>
-        </p:spPr>
-        <p:txBody>
-          <a:bodyPr wrap="square" anchor="ctr"/>
-          <a:lstStyle/>
-          <a:p>
-            <a:r>
-              <a:rPr sz="1500" b="0" i="0">
-                <a:solidFill>
-                  <a:srgbClr val="333333"/>
-                </a:solidFill>
-                <a:latin typeface="Calibri"/>
-              </a:rPr>
-              <a:t>Esta caja es un concepto del negocio del que habla el veterinario, o es una pantalla, un reporte o algo tecnico que se me colo?</a:t>
-            </a:r>
-          </a:p>
-        </p:txBody>
-      </p:sp>
-      <p:sp>
-        <p:nvSpPr>
-          <p:cNvPr id="17" name="TextBox 16"/>
-          <p:cNvSpPr txBox="1"/>
-          <p:nvPr/>
-        </p:nvSpPr>
-        <p:spPr>
-          <a:xfrm>
-            <a:off x="11185855" y="6473952"/>
-            <a:ext cx="640080" cy="274320"/>
-          </a:xfrm>
-          <a:prstGeom prst="rect">
-            <a:avLst/>
-          </a:prstGeom>
-          <a:noFill/>
-        </p:spPr>
-        <p:txBody>
-          <a:bodyPr wrap="square">
-            <a:spAutoFit/>
-          </a:bodyPr>
-          <a:lstStyle/>
-          <a:p>
-            <a:pPr algn="r"/>
-            <a:r>
-              <a:rPr sz="1100" b="0" i="0">
-                <a:solidFill>
-                  <a:srgbClr val="666666"/>
-                </a:solidFill>
-                <a:latin typeface="Calibri"/>
-              </a:rPr>
-              <a:t>20</a:t>
-            </a:r>
-          </a:p>
-        </p:txBody>
-      </p:sp>
-    </p:spTree>
-  </p:cSld>
-  <p:clrMapOvr>
-    <a:masterClrMapping/>
-  </p:clrMapOvr>
-</p:sld>
-</file>
-
-<file path=ppt/slides/slide21.xml><?xml version="1.0" encoding="utf-8"?>
-<p:sld xmlns:a="http://schemas.openxmlformats.org/drawingml/2006/main" xmlns:p="http://schemas.openxmlformats.org/presentationml/2006/main" xmlns:r="http://schemas.openxmlformats.org/officeDocument/2006/relationships">
-  <p:cSld>
-    <p:bg>
-      <p:bgPr>
-        <a:solidFill>
-          <a:srgbClr val="FFFFFF"/>
-        </a:solidFill>
-        <a:effectLst/>
-      </p:bgPr>
-    </p:bg>
-    <p:spTree>
-      <p:nvGrpSpPr>
-        <p:cNvPr id="1" name=""/>
-        <p:cNvGrpSpPr/>
-        <p:nvPr/>
-      </p:nvGrpSpPr>
-      <p:grpSpPr/>
-      <p:sp>
-        <p:nvSpPr>
-          <p:cNvPr id="2" name="Rectangle 1"/>
-          <p:cNvSpPr/>
-          <p:nvPr/>
-        </p:nvSpPr>
-        <p:spPr>
-          <a:xfrm>
-            <a:off x="0" y="0"/>
-            <a:ext cx="12191695" cy="960120"/>
-          </a:xfrm>
-          <a:prstGeom prst="rect">
-            <a:avLst/>
-          </a:prstGeom>
-          <a:solidFill>
-            <a:srgbClr val="095292"/>
-          </a:solidFill>
-          <a:ln>
-            <a:noFill/>
-          </a:ln>
-        </p:spPr>
-        <p:style>
-          <a:lnRef idx="1">
-            <a:schemeClr val="accent1"/>
-          </a:lnRef>
-          <a:fillRef idx="3">
-            <a:schemeClr val="accent1"/>
-          </a:fillRef>
-          <a:effectRef idx="2">
-            <a:schemeClr val="accent1"/>
-          </a:effectRef>
-          <a:fontRef idx="minor">
-            <a:schemeClr val="lt1"/>
-          </a:fontRef>
-        </p:style>
-        <p:txBody>
-          <a:bodyPr rtlCol="0" anchor="ctr"/>
-          <a:lstStyle/>
-          <a:p>
-            <a:pPr algn="ctr"/>
-          </a:p>
-        </p:txBody>
-      </p:sp>
-      <p:sp>
-        <p:nvSpPr>
-          <p:cNvPr id="3" name="Rectangle 2"/>
-          <p:cNvSpPr/>
-          <p:nvPr/>
-        </p:nvSpPr>
-        <p:spPr>
-          <a:xfrm>
-            <a:off x="0" y="960120"/>
-            <a:ext cx="12191695" cy="41148"/>
-          </a:xfrm>
-          <a:prstGeom prst="rect">
-            <a:avLst/>
-          </a:prstGeom>
-          <a:solidFill>
-            <a:srgbClr val="FFD000"/>
-          </a:solidFill>
-          <a:ln>
-            <a:noFill/>
-          </a:ln>
-        </p:spPr>
-        <p:style>
-          <a:lnRef idx="1">
-            <a:schemeClr val="accent1"/>
-          </a:lnRef>
-          <a:fillRef idx="3">
-            <a:schemeClr val="accent1"/>
-          </a:fillRef>
-          <a:effectRef idx="2">
-            <a:schemeClr val="accent1"/>
-          </a:effectRef>
-          <a:fontRef idx="minor">
-            <a:schemeClr val="lt1"/>
-          </a:fontRef>
-        </p:style>
-        <p:txBody>
-          <a:bodyPr rtlCol="0" anchor="ctr"/>
-          <a:lstStyle/>
-          <a:p>
-            <a:pPr algn="ctr"/>
-          </a:p>
-        </p:txBody>
-      </p:sp>
-      <p:sp>
-        <p:nvSpPr>
-          <p:cNvPr id="4" name="TextBox 3"/>
-          <p:cNvSpPr txBox="1"/>
-          <p:nvPr/>
-        </p:nvSpPr>
-        <p:spPr>
-          <a:xfrm>
-            <a:off x="457200" y="164592"/>
-            <a:ext cx="11277295" cy="502920"/>
-          </a:xfrm>
-          <a:prstGeom prst="rect">
-            <a:avLst/>
-          </a:prstGeom>
-          <a:noFill/>
-        </p:spPr>
-        <p:txBody>
-          <a:bodyPr wrap="square">
-            <a:spAutoFit/>
-          </a:bodyPr>
-          <a:lstStyle/>
-          <a:p>
-            <a:r>
-              <a:rPr sz="2600" b="1" i="0">
-                <a:solidFill>
-                  <a:srgbClr val="FFFFFF"/>
-                </a:solidFill>
-                <a:latin typeface="Calibri"/>
-              </a:rPr>
-              <a:t>Criterios de exito / entregable</a:t>
-            </a:r>
-          </a:p>
-        </p:txBody>
-      </p:sp>
-      <p:sp>
-        <p:nvSpPr>
-          <p:cNvPr id="5" name="TextBox 4"/>
-          <p:cNvSpPr txBox="1"/>
-          <p:nvPr/>
-        </p:nvSpPr>
-        <p:spPr>
-          <a:xfrm>
-            <a:off x="457200" y="1170432"/>
-            <a:ext cx="11277295" cy="5230368"/>
-          </a:xfrm>
-          <a:prstGeom prst="rect">
-            <a:avLst/>
-          </a:prstGeom>
-          <a:noFill/>
-        </p:spPr>
-        <p:txBody>
-          <a:bodyPr wrap="square">
-            <a:spAutoFit/>
-          </a:bodyPr>
-          <a:lstStyle/>
-          <a:p>
-            <a:pPr>
-              <a:spcAft>
-                <a:spcPts val="800"/>
-              </a:spcAft>
-            </a:pPr>
-            <a:r>
-              <a:rPr sz="2000" b="0" i="0">
-                <a:solidFill>
-                  <a:srgbClr val="333333"/>
-                </a:solidFill>
-                <a:latin typeface="Calibri"/>
-              </a:rPr>
-              <a:t>–   </a:t>
-            </a:r>
-            <a:r>
-              <a:rPr sz="2000" b="1" i="0">
-                <a:solidFill>
-                  <a:srgbClr val="333333"/>
-                </a:solidFill>
-                <a:latin typeface="Calibri"/>
-              </a:rPr>
-              <a:t>Entregable:</a:t>
-            </a:r>
-            <a:r>
-              <a:rPr sz="2000" b="0" i="0">
-                <a:solidFill>
-                  <a:srgbClr val="333333"/>
-                </a:solidFill>
-                <a:latin typeface="Calibri"/>
-              </a:rPr>
-              <a:t> Diagrama de clases de VetCare hecho en draw.io, exportado a PNG y al archivo .drawio, con 5 clases, atributos tipados, metodos propios y 4 asociaciones con multiplicidad y nombre de rol, subido a la plataforma del curso.</a:t>
-            </a:r>
-          </a:p>
-          <a:p>
-            <a:pPr>
-              <a:spcAft>
-                <a:spcPts val="800"/>
-              </a:spcAft>
-            </a:pPr>
-            <a:r>
-              <a:rPr sz="2000" b="0" i="0">
-                <a:solidFill>
-                  <a:srgbClr val="333333"/>
-                </a:solidFill>
-                <a:latin typeface="Calibri"/>
-              </a:rPr>
-              <a:t>–   </a:t>
-            </a:r>
-            <a:r>
-              <a:rPr sz="2000" b="1" i="0">
-                <a:solidFill>
-                  <a:srgbClr val="333333"/>
-                </a:solidFill>
-                <a:latin typeface="Calibri"/>
-              </a:rPr>
-              <a:t>Exito:</a:t>
-            </a:r>
-            <a:r>
-              <a:rPr sz="2000" b="0" i="0">
-                <a:solidFill>
-                  <a:srgbClr val="333333"/>
-                </a:solidFill>
-                <a:latin typeface="Calibri"/>
-              </a:rPr>
-              <a:t> El diagrama tiene las 5 clases del dominio en singular, con mayuscula inicial y sin clases tecnicas (nada de DAO, Conexion, Login o Menu).</a:t>
-            </a:r>
-          </a:p>
-          <a:p>
-            <a:pPr>
-              <a:spcAft>
-                <a:spcPts val="800"/>
-              </a:spcAft>
-            </a:pPr>
-            <a:r>
-              <a:rPr sz="2000" b="0" i="0">
-                <a:solidFill>
-                  <a:srgbClr val="333333"/>
-                </a:solidFill>
-                <a:latin typeface="Calibri"/>
-              </a:rPr>
-              <a:t>–   </a:t>
-            </a:r>
-            <a:r>
-              <a:rPr sz="2000" b="1" i="0">
-                <a:solidFill>
-                  <a:srgbClr val="333333"/>
-                </a:solidFill>
-                <a:latin typeface="Calibri"/>
-              </a:rPr>
-              <a:t>Exito:</a:t>
-            </a:r>
-            <a:r>
-              <a:rPr sz="2000" b="0" i="0">
-                <a:solidFill>
-                  <a:srgbClr val="333333"/>
-                </a:solidFill>
-                <a:latin typeface="Calibri"/>
-              </a:rPr>
-              <a:t> Cada clase tiene minimo 4 atributos con visibilidad y tipo, y ningun atributo aparece duplicado en dos clases.</a:t>
-            </a:r>
-          </a:p>
-          <a:p>
-            <a:pPr>
-              <a:spcAft>
-                <a:spcPts val="800"/>
-              </a:spcAft>
-            </a:pPr>
-            <a:r>
-              <a:rPr sz="2000" b="0" i="0">
-                <a:solidFill>
-                  <a:srgbClr val="333333"/>
-                </a:solidFill>
-                <a:latin typeface="Calibri"/>
-              </a:rPr>
-              <a:t>–   </a:t>
-            </a:r>
-            <a:r>
-              <a:rPr sz="2000" b="1" i="0">
-                <a:solidFill>
-                  <a:srgbClr val="333333"/>
-                </a:solidFill>
-                <a:latin typeface="Calibri"/>
-              </a:rPr>
-              <a:t>Exito:</a:t>
-            </a:r>
-            <a:r>
-              <a:rPr sz="2000" b="0" i="0">
-                <a:solidFill>
-                  <a:srgbClr val="333333"/>
-                </a:solidFill>
-                <a:latin typeface="Calibri"/>
-              </a:rPr>
-              <a:t> Las 4 asociaciones tienen nombre de relacion y multiplicidad explicita en ambos extremos.</a:t>
-            </a:r>
-          </a:p>
-          <a:p>
-            <a:pPr>
-              <a:spcAft>
-                <a:spcPts val="800"/>
-              </a:spcAft>
-            </a:pPr>
-            <a:r>
-              <a:rPr sz="2000" b="0" i="0">
-                <a:solidFill>
-                  <a:srgbClr val="333333"/>
-                </a:solidFill>
-                <a:latin typeface="Calibri"/>
-              </a:rPr>
-              <a:t>–   </a:t>
-            </a:r>
-            <a:r>
-              <a:rPr sz="2000" b="1" i="0">
-                <a:solidFill>
-                  <a:srgbClr val="333333"/>
-                </a:solidFill>
-                <a:latin typeface="Calibri"/>
-              </a:rPr>
-              <a:t>Exito:</a:t>
-            </a:r>
-            <a:r>
-              <a:rPr sz="2000" b="0" i="0">
-                <a:solidFill>
-                  <a:srgbClr val="333333"/>
-                </a:solidFill>
-                <a:latin typeface="Calibri"/>
-              </a:rPr>
-              <a:t> Cada relacion se puede leer en voz alta como una frase verdadera del negocio de la clinica Huellitas, y cada clase se rastrea a un RF o a una historia.</a:t>
-            </a:r>
-          </a:p>
-          <a:p>
-            <a:pPr>
-              <a:spcAft>
-                <a:spcPts val="800"/>
-              </a:spcAft>
-            </a:pPr>
-            <a:r>
-              <a:rPr sz="2000" b="0" i="0">
-                <a:solidFill>
-                  <a:srgbClr val="333333"/>
-                </a:solidFill>
-                <a:latin typeface="Calibri"/>
-              </a:rPr>
-              <a:t>–   </a:t>
-            </a:r>
-            <a:r>
-              <a:rPr sz="2000" b="1" i="0">
-                <a:solidFill>
-                  <a:srgbClr val="333333"/>
-                </a:solidFill>
-                <a:latin typeface="Calibri"/>
-              </a:rPr>
-              <a:t>Entrega en la plataforma del curso</a:t>
-            </a:r>
-            <a:r>
-              <a:rPr sz="2000" b="0" i="0">
-                <a:solidFill>
-                  <a:srgbClr val="333333"/>
-                </a:solidFill>
-                <a:latin typeface="Calibri"/>
-              </a:rPr>
-              <a:t> — en la fecha que indique el docente.</a:t>
-            </a:r>
-          </a:p>
-        </p:txBody>
-      </p:sp>
-      <p:sp>
-        <p:nvSpPr>
-          <p:cNvPr id="6" name="TextBox 5"/>
-          <p:cNvSpPr txBox="1"/>
-          <p:nvPr/>
-        </p:nvSpPr>
-        <p:spPr>
-          <a:xfrm>
-            <a:off x="11185855" y="6473952"/>
-            <a:ext cx="640080" cy="274320"/>
-          </a:xfrm>
-          <a:prstGeom prst="rect">
-            <a:avLst/>
-          </a:prstGeom>
-          <a:noFill/>
-        </p:spPr>
-        <p:txBody>
-          <a:bodyPr wrap="square">
-            <a:spAutoFit/>
-          </a:bodyPr>
-          <a:lstStyle/>
-          <a:p>
-            <a:pPr algn="r"/>
-            <a:r>
-              <a:rPr sz="1100" b="0" i="0">
-                <a:solidFill>
-                  <a:srgbClr val="666666"/>
-                </a:solidFill>
-                <a:latin typeface="Calibri"/>
-              </a:rPr>
-              <a:t>21</a:t>
-            </a:r>
-          </a:p>
-        </p:txBody>
-      </p:sp>
-    </p:spTree>
-  </p:cSld>
-  <p:clrMapOvr>
-    <a:masterClrMapping/>
-  </p:clrMapOvr>
-</p:sld>
-</file>
-
-<file path=ppt/slides/slide22.xml><?xml version="1.0" encoding="utf-8"?>
-<p:sld xmlns:a="http://schemas.openxmlformats.org/drawingml/2006/main" xmlns:p="http://schemas.openxmlformats.org/presentationml/2006/main" xmlns:r="http://schemas.openxmlformats.org/officeDocument/2006/relationships">
-  <p:cSld>
-    <p:bg>
-      <p:bgPr>
-        <a:solidFill>
-          <a:srgbClr val="FFFFFF"/>
-        </a:solidFill>
-        <a:effectLst/>
-      </p:bgPr>
-    </p:bg>
-    <p:spTree>
-      <p:nvGrpSpPr>
-        <p:cNvPr id="1" name=""/>
-        <p:cNvGrpSpPr/>
-        <p:nvPr/>
-      </p:nvGrpSpPr>
-      <p:grpSpPr/>
-      <p:sp>
-        <p:nvSpPr>
-          <p:cNvPr id="2" name="Rectangle 1"/>
-          <p:cNvSpPr/>
-          <p:nvPr/>
-        </p:nvSpPr>
-        <p:spPr>
-          <a:xfrm>
-            <a:off x="0" y="0"/>
-            <a:ext cx="12191695" cy="960120"/>
-          </a:xfrm>
-          <a:prstGeom prst="rect">
-            <a:avLst/>
-          </a:prstGeom>
-          <a:solidFill>
-            <a:srgbClr val="095292"/>
-          </a:solidFill>
-          <a:ln>
-            <a:noFill/>
-          </a:ln>
-        </p:spPr>
-        <p:style>
-          <a:lnRef idx="1">
-            <a:schemeClr val="accent1"/>
-          </a:lnRef>
-          <a:fillRef idx="3">
-            <a:schemeClr val="accent1"/>
-          </a:fillRef>
-          <a:effectRef idx="2">
-            <a:schemeClr val="accent1"/>
-          </a:effectRef>
-          <a:fontRef idx="minor">
-            <a:schemeClr val="lt1"/>
-          </a:fontRef>
-        </p:style>
-        <p:txBody>
-          <a:bodyPr rtlCol="0" anchor="ctr"/>
-          <a:lstStyle/>
-          <a:p>
-            <a:pPr algn="ctr"/>
-          </a:p>
-        </p:txBody>
-      </p:sp>
-      <p:sp>
-        <p:nvSpPr>
-          <p:cNvPr id="3" name="Rectangle 2"/>
-          <p:cNvSpPr/>
-          <p:nvPr/>
-        </p:nvSpPr>
-        <p:spPr>
-          <a:xfrm>
-            <a:off x="0" y="960120"/>
-            <a:ext cx="12191695" cy="41148"/>
-          </a:xfrm>
-          <a:prstGeom prst="rect">
-            <a:avLst/>
-          </a:prstGeom>
-          <a:solidFill>
-            <a:srgbClr val="FFD000"/>
-          </a:solidFill>
-          <a:ln>
-            <a:noFill/>
-          </a:ln>
-        </p:spPr>
-        <p:style>
-          <a:lnRef idx="1">
-            <a:schemeClr val="accent1"/>
-          </a:lnRef>
-          <a:fillRef idx="3">
-            <a:schemeClr val="accent1"/>
-          </a:fillRef>
-          <a:effectRef idx="2">
-            <a:schemeClr val="accent1"/>
-          </a:effectRef>
-          <a:fontRef idx="minor">
-            <a:schemeClr val="lt1"/>
-          </a:fontRef>
-        </p:style>
-        <p:txBody>
-          <a:bodyPr rtlCol="0" anchor="ctr"/>
-          <a:lstStyle/>
-          <a:p>
-            <a:pPr algn="ctr"/>
-          </a:p>
-        </p:txBody>
-      </p:sp>
-      <p:sp>
-        <p:nvSpPr>
-          <p:cNvPr id="4" name="TextBox 3"/>
-          <p:cNvSpPr txBox="1"/>
-          <p:nvPr/>
-        </p:nvSpPr>
-        <p:spPr>
-          <a:xfrm>
-            <a:off x="457200" y="164592"/>
-            <a:ext cx="11277295" cy="502920"/>
-          </a:xfrm>
-          <a:prstGeom prst="rect">
-            <a:avLst/>
-          </a:prstGeom>
-          <a:noFill/>
-        </p:spPr>
-        <p:txBody>
-          <a:bodyPr wrap="square">
-            <a:spAutoFit/>
-          </a:bodyPr>
-          <a:lstStyle/>
-          <a:p>
-            <a:r>
-              <a:rPr sz="2600" b="1" i="0">
-                <a:solidFill>
-                  <a:srgbClr val="FFFFFF"/>
-                </a:solidFill>
-                <a:latin typeface="Calibri"/>
-              </a:rPr>
-              <a:t>Para el PI esta semana</a:t>
-            </a:r>
-          </a:p>
-        </p:txBody>
-      </p:sp>
-      <p:sp>
-        <p:nvSpPr>
-          <p:cNvPr id="5" name="Rounded Rectangle 4"/>
-          <p:cNvSpPr/>
-          <p:nvPr/>
-        </p:nvSpPr>
-        <p:spPr>
-          <a:xfrm>
-            <a:off x="457200" y="1261872"/>
-            <a:ext cx="11277295" cy="1051560"/>
-          </a:xfrm>
-          <a:prstGeom prst="roundRect">
-            <a:avLst>
-              <a:gd name="adj" fmla="val 12000"/>
-            </a:avLst>
-          </a:prstGeom>
-          <a:solidFill>
-            <a:srgbClr val="E8F4FA"/>
-          </a:solidFill>
-          <a:ln>
-            <a:noFill/>
-          </a:ln>
-        </p:spPr>
-        <p:style>
-          <a:lnRef idx="1">
-            <a:schemeClr val="accent1"/>
-          </a:lnRef>
-          <a:fillRef idx="3">
-            <a:schemeClr val="accent1"/>
-          </a:fillRef>
-          <a:effectRef idx="2">
-            <a:schemeClr val="accent1"/>
-          </a:effectRef>
-          <a:fontRef idx="minor">
-            <a:schemeClr val="lt1"/>
-          </a:fontRef>
-        </p:style>
-        <p:txBody>
-          <a:bodyPr rtlCol="0" anchor="ctr"/>
-          <a:lstStyle/>
-          <a:p>
-            <a:pPr algn="ctr"/>
-          </a:p>
-        </p:txBody>
-      </p:sp>
-      <p:sp>
-        <p:nvSpPr>
-          <p:cNvPr id="6" name="Rectangle 5"/>
-          <p:cNvSpPr/>
-          <p:nvPr/>
-        </p:nvSpPr>
-        <p:spPr>
-          <a:xfrm>
-            <a:off x="457200" y="1261872"/>
-            <a:ext cx="128016" cy="1051560"/>
-          </a:xfrm>
-          <a:prstGeom prst="rect">
-            <a:avLst/>
-          </a:prstGeom>
-          <a:solidFill>
-            <a:srgbClr val="269CCB"/>
-          </a:solidFill>
-          <a:ln>
-            <a:noFill/>
-          </a:ln>
-        </p:spPr>
-        <p:style>
-          <a:lnRef idx="1">
-            <a:schemeClr val="accent1"/>
-          </a:lnRef>
-          <a:fillRef idx="3">
-            <a:schemeClr val="accent1"/>
-          </a:fillRef>
-          <a:effectRef idx="2">
-            <a:schemeClr val="accent1"/>
-          </a:effectRef>
-          <a:fontRef idx="minor">
-            <a:schemeClr val="lt1"/>
-          </a:fontRef>
-        </p:style>
-        <p:txBody>
-          <a:bodyPr rtlCol="0" anchor="ctr"/>
-          <a:lstStyle/>
-          <a:p>
-            <a:pPr algn="ctr"/>
-          </a:p>
-        </p:txBody>
-      </p:sp>
-      <p:sp>
-        <p:nvSpPr>
-          <p:cNvPr id="7" name="TextBox 6"/>
-          <p:cNvSpPr txBox="1"/>
-          <p:nvPr/>
-        </p:nvSpPr>
-        <p:spPr>
-          <a:xfrm>
-            <a:off x="777240" y="1399031"/>
-            <a:ext cx="10774375" cy="822959"/>
-          </a:xfrm>
-          <a:prstGeom prst="rect">
-            <a:avLst/>
-          </a:prstGeom>
-          <a:noFill/>
-        </p:spPr>
-        <p:txBody>
-          <a:bodyPr wrap="square">
-            <a:spAutoFit/>
-          </a:bodyPr>
-          <a:lstStyle/>
-          <a:p>
-            <a:r>
-              <a:rPr sz="1200" b="1" i="0">
-                <a:solidFill>
-                  <a:srgbClr val="269CCB"/>
-                </a:solidFill>
-                <a:latin typeface="Calibri"/>
-              </a:rPr>
-              <a:t>Info</a:t>
-            </a:r>
-          </a:p>
-          <a:p>
-            <a:pPr>
-              <a:spcBef>
-                <a:spcPts val="400"/>
-              </a:spcBef>
-            </a:pPr>
-            <a:r>
-              <a:rPr sz="1400" b="0" i="0">
-                <a:solidFill>
-                  <a:srgbClr val="333333"/>
-                </a:solidFill>
-                <a:latin typeface="Calibri"/>
-              </a:rPr>
-              <a:t>Hito: Queda listo el modelo de dominio de VetCare: el diagrama de clases con Dueno, Mascota, Cita, Veterinario y Atencion.</a:t>
-            </a:r>
-          </a:p>
-        </p:txBody>
-      </p:sp>
-      <p:sp>
-        <p:nvSpPr>
-          <p:cNvPr id="8" name="Rounded Rectangle 7"/>
-          <p:cNvSpPr/>
-          <p:nvPr/>
-        </p:nvSpPr>
-        <p:spPr>
-          <a:xfrm>
-            <a:off x="457200" y="2478024"/>
-            <a:ext cx="11277295" cy="1051560"/>
-          </a:xfrm>
-          <a:prstGeom prst="roundRect">
-            <a:avLst>
-              <a:gd name="adj" fmla="val 12000"/>
-            </a:avLst>
-          </a:prstGeom>
-          <a:solidFill>
-            <a:srgbClr val="FFF8E1"/>
-          </a:solidFill>
-          <a:ln>
-            <a:noFill/>
-          </a:ln>
-        </p:spPr>
-        <p:style>
-          <a:lnRef idx="1">
-            <a:schemeClr val="accent1"/>
-          </a:lnRef>
-          <a:fillRef idx="3">
-            <a:schemeClr val="accent1"/>
-          </a:fillRef>
-          <a:effectRef idx="2">
-            <a:schemeClr val="accent1"/>
-          </a:effectRef>
-          <a:fontRef idx="minor">
-            <a:schemeClr val="lt1"/>
-          </a:fontRef>
-        </p:style>
-        <p:txBody>
-          <a:bodyPr rtlCol="0" anchor="ctr"/>
-          <a:lstStyle/>
-          <a:p>
-            <a:pPr algn="ctr"/>
-          </a:p>
-        </p:txBody>
-      </p:sp>
-      <p:sp>
-        <p:nvSpPr>
-          <p:cNvPr id="9" name="Rectangle 8"/>
-          <p:cNvSpPr/>
-          <p:nvPr/>
-        </p:nvSpPr>
-        <p:spPr>
-          <a:xfrm>
-            <a:off x="457200" y="2478024"/>
-            <a:ext cx="128016" cy="1051560"/>
-          </a:xfrm>
-          <a:prstGeom prst="rect">
-            <a:avLst/>
-          </a:prstGeom>
-          <a:solidFill>
-            <a:srgbClr val="FFD000"/>
-          </a:solidFill>
-          <a:ln>
-            <a:noFill/>
-          </a:ln>
-        </p:spPr>
-        <p:style>
-          <a:lnRef idx="1">
-            <a:schemeClr val="accent1"/>
-          </a:lnRef>
-          <a:fillRef idx="3">
-            <a:schemeClr val="accent1"/>
-          </a:fillRef>
-          <a:effectRef idx="2">
-            <a:schemeClr val="accent1"/>
-          </a:effectRef>
-          <a:fontRef idx="minor">
-            <a:schemeClr val="lt1"/>
-          </a:fontRef>
-        </p:style>
-        <p:txBody>
-          <a:bodyPr rtlCol="0" anchor="ctr"/>
-          <a:lstStyle/>
-          <a:p>
-            <a:pPr algn="ctr"/>
-          </a:p>
-        </p:txBody>
-      </p:sp>
-      <p:sp>
-        <p:nvSpPr>
-          <p:cNvPr id="10" name="TextBox 9"/>
-          <p:cNvSpPr txBox="1"/>
-          <p:nvPr/>
-        </p:nvSpPr>
-        <p:spPr>
-          <a:xfrm>
-            <a:off x="777240" y="2615184"/>
-            <a:ext cx="10774375" cy="822959"/>
-          </a:xfrm>
-          <a:prstGeom prst="rect">
-            <a:avLst/>
-          </a:prstGeom>
-          <a:noFill/>
-        </p:spPr>
-        <p:txBody>
-          <a:bodyPr wrap="square">
-            <a:spAutoFit/>
-          </a:bodyPr>
-          <a:lstStyle/>
-          <a:p>
-            <a:r>
-              <a:rPr sz="1200" b="1" i="0">
-                <a:solidFill>
-                  <a:srgbClr val="FFD000"/>
-                </a:solidFill>
-                <a:latin typeface="Calibri"/>
-              </a:rPr>
-              <a:t>Aclaración</a:t>
-            </a:r>
-          </a:p>
-          <a:p>
-            <a:pPr>
-              <a:spcBef>
-                <a:spcPts val="400"/>
-              </a:spcBef>
-            </a:pPr>
-            <a:r>
-              <a:rPr sz="1400" b="0" i="0">
-                <a:solidFill>
-                  <a:srgbClr val="333333"/>
-                </a:solidFill>
-                <a:latin typeface="Calibri"/>
-              </a:rPr>
-              <a:t>Enunciado completo: Clases/Proyecto Integrador/ (VetCare).</a:t>
-            </a:r>
-          </a:p>
-        </p:txBody>
-      </p:sp>
-      <p:sp>
-        <p:nvSpPr>
-          <p:cNvPr id="11" name="Rounded Rectangle 10"/>
-          <p:cNvSpPr/>
-          <p:nvPr/>
-        </p:nvSpPr>
-        <p:spPr>
-          <a:xfrm>
-            <a:off x="457200" y="3694176"/>
-            <a:ext cx="11277295" cy="1051560"/>
-          </a:xfrm>
-          <a:prstGeom prst="roundRect">
-            <a:avLst>
-              <a:gd name="adj" fmla="val 12000"/>
-            </a:avLst>
-          </a:prstGeom>
-          <a:solidFill>
-            <a:srgbClr val="FBE4E4"/>
-          </a:solidFill>
-          <a:ln>
-            <a:noFill/>
-          </a:ln>
-        </p:spPr>
-        <p:style>
-          <a:lnRef idx="1">
-            <a:schemeClr val="accent1"/>
-          </a:lnRef>
-          <a:fillRef idx="3">
-            <a:schemeClr val="accent1"/>
-          </a:fillRef>
-          <a:effectRef idx="2">
-            <a:schemeClr val="accent1"/>
-          </a:effectRef>
-          <a:fontRef idx="minor">
-            <a:schemeClr val="lt1"/>
-          </a:fontRef>
-        </p:style>
-        <p:txBody>
-          <a:bodyPr rtlCol="0" anchor="ctr"/>
-          <a:lstStyle/>
-          <a:p>
-            <a:pPr algn="ctr"/>
-          </a:p>
-        </p:txBody>
-      </p:sp>
-      <p:sp>
-        <p:nvSpPr>
-          <p:cNvPr id="12" name="Rectangle 11"/>
-          <p:cNvSpPr/>
-          <p:nvPr/>
-        </p:nvSpPr>
-        <p:spPr>
-          <a:xfrm>
-            <a:off x="457200" y="3694176"/>
-            <a:ext cx="128016" cy="1051560"/>
-          </a:xfrm>
-          <a:prstGeom prst="rect">
-            <a:avLst/>
-          </a:prstGeom>
-          <a:solidFill>
-            <a:srgbClr val="A02030"/>
-          </a:solidFill>
-          <a:ln>
-            <a:noFill/>
-          </a:ln>
-        </p:spPr>
-        <p:style>
-          <a:lnRef idx="1">
-            <a:schemeClr val="accent1"/>
-          </a:lnRef>
-          <a:fillRef idx="3">
-            <a:schemeClr val="accent1"/>
-          </a:fillRef>
-          <a:effectRef idx="2">
-            <a:schemeClr val="accent1"/>
-          </a:effectRef>
-          <a:fontRef idx="minor">
-            <a:schemeClr val="lt1"/>
-          </a:fontRef>
-        </p:style>
-        <p:txBody>
-          <a:bodyPr rtlCol="0" anchor="ctr"/>
-          <a:lstStyle/>
-          <a:p>
-            <a:pPr algn="ctr"/>
-          </a:p>
-        </p:txBody>
-      </p:sp>
-      <p:sp>
-        <p:nvSpPr>
-          <p:cNvPr id="13" name="TextBox 12"/>
-          <p:cNvSpPr txBox="1"/>
-          <p:nvPr/>
-        </p:nvSpPr>
-        <p:spPr>
-          <a:xfrm>
-            <a:off x="777240" y="3831336"/>
-            <a:ext cx="10774375" cy="822959"/>
-          </a:xfrm>
-          <a:prstGeom prst="rect">
-            <a:avLst/>
-          </a:prstGeom>
-          <a:noFill/>
-        </p:spPr>
-        <p:txBody>
-          <a:bodyPr wrap="square">
-            <a:spAutoFit/>
-          </a:bodyPr>
-          <a:lstStyle/>
-          <a:p>
-            <a:r>
-              <a:rPr sz="1200" b="1" i="0">
-                <a:solidFill>
-                  <a:srgbClr val="A02030"/>
-                </a:solidFill>
-                <a:latin typeface="Calibri"/>
-              </a:rPr>
-              <a:t>Atención</a:t>
-            </a:r>
-          </a:p>
-          <a:p>
-            <a:pPr>
-              <a:spcBef>
-                <a:spcPts val="400"/>
-              </a:spcBef>
-            </a:pPr>
-            <a:r>
-              <a:rPr sz="1400" b="0" i="0">
-                <a:solidFill>
-                  <a:srgbClr val="333333"/>
-                </a:solidFill>
-                <a:latin typeface="Calibri"/>
-              </a:rPr>
-              <a:t>Entrega del taller, si el docente lo asigna · en la fecha que indique el docente.</a:t>
-            </a:r>
-          </a:p>
-        </p:txBody>
-      </p:sp>
-      <p:sp>
-        <p:nvSpPr>
-          <p:cNvPr id="14" name="TextBox 13"/>
-          <p:cNvSpPr txBox="1"/>
-          <p:nvPr/>
-        </p:nvSpPr>
-        <p:spPr>
-          <a:xfrm>
-            <a:off x="11185855" y="6473952"/>
-            <a:ext cx="640080" cy="274320"/>
-          </a:xfrm>
-          <a:prstGeom prst="rect">
-            <a:avLst/>
-          </a:prstGeom>
-          <a:noFill/>
-        </p:spPr>
-        <p:txBody>
-          <a:bodyPr wrap="square">
-            <a:spAutoFit/>
-          </a:bodyPr>
-          <a:lstStyle/>
-          <a:p>
-            <a:pPr algn="r"/>
-            <a:r>
-              <a:rPr sz="1100" b="0" i="0">
-                <a:solidFill>
-                  <a:srgbClr val="666666"/>
-                </a:solidFill>
-                <a:latin typeface="Calibri"/>
-              </a:rPr>
-              <a:t>22</a:t>
-            </a:r>
-          </a:p>
-        </p:txBody>
-      </p:sp>
-    </p:spTree>
-  </p:cSld>
-  <p:clrMapOvr>
-    <a:masterClrMapping/>
-  </p:clrMapOvr>
-</p:sld>
-</file>
-
-<file path=ppt/slides/slide23.xml><?xml version="1.0" encoding="utf-8"?>
-<p:sld xmlns:a="http://schemas.openxmlformats.org/drawingml/2006/main" xmlns:p="http://schemas.openxmlformats.org/presentationml/2006/main" xmlns:r="http://schemas.openxmlformats.org/officeDocument/2006/relationships">
-  <p:cSld>
-    <p:bg>
-      <p:bgPr>
-        <a:solidFill>
-          <a:srgbClr val="FFFFFF"/>
-        </a:solidFill>
-        <a:effectLst/>
-      </p:bgPr>
-    </p:bg>
-    <p:spTree>
-      <p:nvGrpSpPr>
-        <p:cNvPr id="1" name=""/>
-        <p:cNvGrpSpPr/>
-        <p:nvPr/>
-      </p:nvGrpSpPr>
-      <p:grpSpPr/>
-      <p:sp>
-        <p:nvSpPr>
-          <p:cNvPr id="2" name="Rectangle 1"/>
-          <p:cNvSpPr/>
-          <p:nvPr/>
-        </p:nvSpPr>
-        <p:spPr>
-          <a:xfrm>
-            <a:off x="0" y="0"/>
-            <a:ext cx="12191695" cy="164592"/>
-          </a:xfrm>
-          <a:prstGeom prst="rect">
-            <a:avLst/>
-          </a:prstGeom>
-          <a:solidFill>
-            <a:srgbClr val="269CCB"/>
-          </a:solidFill>
-          <a:ln>
-            <a:noFill/>
-          </a:ln>
-        </p:spPr>
-        <p:style>
-          <a:lnRef idx="1">
-            <a:schemeClr val="accent1"/>
-          </a:lnRef>
-          <a:fillRef idx="3">
-            <a:schemeClr val="accent1"/>
-          </a:fillRef>
-          <a:effectRef idx="2">
-            <a:schemeClr val="accent1"/>
-          </a:effectRef>
-          <a:fontRef idx="minor">
-            <a:schemeClr val="lt1"/>
-          </a:fontRef>
-        </p:style>
-        <p:txBody>
-          <a:bodyPr rtlCol="0" anchor="ctr"/>
-          <a:lstStyle/>
-          <a:p>
-            <a:pPr algn="ctr"/>
-          </a:p>
-        </p:txBody>
-      </p:sp>
-      <p:pic>
-        <p:nvPicPr>
-          <p:cNvPr id="3" name="Picture 2" descr="logo_uniajc_color.png"/>
-          <p:cNvPicPr>
-            <a:picLocks noChangeAspect="1"/>
-          </p:cNvPicPr>
-          <p:nvPr/>
-        </p:nvPicPr>
-        <p:blipFill>
-          <a:blip r:embed="rId2"/>
-          <a:stretch>
-            <a:fillRect/>
-          </a:stretch>
-        </p:blipFill>
-        <p:spPr>
-          <a:xfrm>
-            <a:off x="10271455" y="5998464"/>
-            <a:ext cx="1463040" cy="643233"/>
-          </a:xfrm>
-          <a:prstGeom prst="rect">
-            <a:avLst/>
-          </a:prstGeom>
-        </p:spPr>
-      </p:pic>
-      <p:sp>
-        <p:nvSpPr>
-          <p:cNvPr id="4" name="TextBox 3"/>
-          <p:cNvSpPr txBox="1"/>
-          <p:nvPr/>
-        </p:nvSpPr>
-        <p:spPr>
-          <a:xfrm>
-            <a:off x="457200" y="1737360"/>
-            <a:ext cx="11277295" cy="1097280"/>
-          </a:xfrm>
-          <a:prstGeom prst="rect">
-            <a:avLst/>
-          </a:prstGeom>
-          <a:noFill/>
-        </p:spPr>
-        <p:txBody>
-          <a:bodyPr wrap="square" anchor="ctr"/>
-          <a:lstStyle/>
-          <a:p>
-            <a:pPr algn="ctr"/>
-            <a:r>
-              <a:rPr sz="3400" b="1" i="0">
-                <a:solidFill>
-                  <a:srgbClr val="095292"/>
-                </a:solidFill>
-                <a:latin typeface="Calibri"/>
-              </a:rPr>
-              <a:t>Clase 8 · VetCare avanza</a:t>
-            </a:r>
-          </a:p>
-        </p:txBody>
-      </p:sp>
-      <p:sp>
-        <p:nvSpPr>
-          <p:cNvPr id="5" name="TextBox 4"/>
-          <p:cNvSpPr txBox="1"/>
-          <p:nvPr/>
-        </p:nvSpPr>
-        <p:spPr>
-          <a:xfrm>
-            <a:off x="457200" y="3017520"/>
-            <a:ext cx="11277295" cy="1645920"/>
-          </a:xfrm>
-          <a:prstGeom prst="rect">
-            <a:avLst/>
-          </a:prstGeom>
-          <a:noFill/>
-        </p:spPr>
-        <p:txBody>
-          <a:bodyPr wrap="square">
-            <a:spAutoFit/>
-          </a:bodyPr>
-          <a:lstStyle/>
-          <a:p>
-            <a:pPr algn="ctr">
-              <a:spcAft>
-                <a:spcPts val="600"/>
-              </a:spcAft>
-            </a:pPr>
-            <a:r>
-              <a:rPr sz="1600" b="0" i="0">
-                <a:solidFill>
-                  <a:srgbClr val="333333"/>
-                </a:solidFill>
-                <a:latin typeface="Calibri"/>
-              </a:rPr>
-              <a:t>Queda listo el modelo de dominio de VetCare: el diagrama de clases con Dueno, Mascota, Cita, Veterinario y Atencion.</a:t>
-            </a:r>
-          </a:p>
-          <a:p>
-            <a:pPr algn="ctr">
-              <a:spcAft>
-                <a:spcPts val="600"/>
-              </a:spcAft>
-            </a:pPr>
-            <a:r>
-              <a:rPr sz="1600" b="0" i="0">
-                <a:solidFill>
-                  <a:srgbClr val="333333"/>
-                </a:solidFill>
-                <a:latin typeface="Calibri"/>
-              </a:rPr>
-              <a:t>Entregable: Diagrama de clases de VetCare hecho en draw.io, exportado a PNG y al archivo .drawio, con 5 clases, atributos tipados, metodos propios y 4 asociaciones con multiplicidad y nombre de rol, subido a la plataforma del curso.</a:t>
-            </a:r>
-          </a:p>
-          <a:p>
-            <a:pPr algn="ctr">
-              <a:spcAft>
-                <a:spcPts val="600"/>
-              </a:spcAft>
-            </a:pPr>
-            <a:r>
-              <a:rPr sz="1600" b="0" i="0">
-                <a:solidFill>
-                  <a:srgbClr val="333333"/>
-                </a:solidFill>
-                <a:latin typeface="Calibri"/>
-              </a:rPr>
-              <a:t>Siguiente clase: continuamos el hilo del PI</a:t>
-            </a:r>
-          </a:p>
-        </p:txBody>
-      </p:sp>
-      <p:sp>
-        <p:nvSpPr>
-          <p:cNvPr id="6" name="TextBox 5"/>
-          <p:cNvSpPr txBox="1"/>
-          <p:nvPr/>
-        </p:nvSpPr>
-        <p:spPr>
-          <a:xfrm>
-            <a:off x="457200" y="4754880"/>
-            <a:ext cx="11277295" cy="640080"/>
-          </a:xfrm>
-          <a:prstGeom prst="rect">
-            <a:avLst/>
-          </a:prstGeom>
-          <a:noFill/>
-        </p:spPr>
-        <p:txBody>
-          <a:bodyPr wrap="square">
-            <a:spAutoFit/>
-          </a:bodyPr>
-          <a:lstStyle/>
-          <a:p>
-            <a:pPr algn="ctr"/>
-            <a:r>
-              <a:rPr sz="2000" b="1" i="0">
-                <a:solidFill>
-                  <a:srgbClr val="269CCB"/>
-                </a:solidFill>
-                <a:latin typeface="Calibri"/>
-              </a:rPr>
-              <a:t>Teoria al servicio del proyecto</a:t>
             </a:r>
           </a:p>
         </p:txBody>
@@ -11147,7 +7710,7 @@
                 </a:solidFill>
                 <a:latin typeface="Calibri"/>
               </a:rPr>
-              <a:t>Encuadre y repaso del avance</a:t>
+              <a:t>Encuadre y repaso</a:t>
             </a:r>
           </a:p>
         </p:txBody>
@@ -11492,7 +8055,7 @@
                 </a:solidFill>
                 <a:latin typeface="Calibri"/>
               </a:rPr>
-              <a:t>Taller guiado = avance del PI</a:t>
+              <a:t>Practica (opcional, guia en la carpeta)</a:t>
             </a:r>
           </a:p>
         </p:txBody>
@@ -11607,7 +8170,7 @@
                 </a:solidFill>
                 <a:latin typeface="Calibri"/>
               </a:rPr>
-              <a:t>Criterios de exito y cierre</a:t>
+              <a:t>Sintesis y cierre</a:t>
             </a:r>
           </a:p>
         </p:txBody>
@@ -13586,4 +10149,324 @@
   </a:objectDefaults>
   <a:extraClrSchemeLst/>
 </a:theme>
+</file>
+
+<file path=ppt/theme/theme2.xml><?xml version="1.0" encoding="utf-8"?>
+<a:theme xmlns:a="http://schemas.openxmlformats.org/drawingml/2006/main" name="Office Theme">
+  <a:themeElements>
+    <a:clrScheme name="Office">
+      <a:dk1>
+        <a:sysClr val="windowText" lastClr="000000"/>
+      </a:dk1>
+      <a:lt1>
+        <a:sysClr val="window" lastClr="FFFFFF"/>
+      </a:lt1>
+      <a:dk2>
+        <a:srgbClr val="1F497D"/>
+      </a:dk2>
+      <a:lt2>
+        <a:srgbClr val="EEECE1"/>
+      </a:lt2>
+      <a:accent1>
+        <a:srgbClr val="4F81BD"/>
+      </a:accent1>
+      <a:accent2>
+        <a:srgbClr val="C0504D"/>
+      </a:accent2>
+      <a:accent3>
+        <a:srgbClr val="9BBB59"/>
+      </a:accent3>
+      <a:accent4>
+        <a:srgbClr val="8064A2"/>
+      </a:accent4>
+      <a:accent5>
+        <a:srgbClr val="4BACC6"/>
+      </a:accent5>
+      <a:accent6>
+        <a:srgbClr val="F79646"/>
+      </a:accent6>
+      <a:hlink>
+        <a:srgbClr val="0000FF"/>
+      </a:hlink>
+      <a:folHlink>
+        <a:srgbClr val="800080"/>
+      </a:folHlink>
+    </a:clrScheme>
+    <a:fontScheme name="Office">
+      <a:majorFont>
+        <a:latin typeface="Calibri"/>
+        <a:ea typeface=""/>
+        <a:cs typeface=""/>
+        <a:font script="Jpan" typeface="ＭＳ Ｐゴシック"/>
+        <a:font script="Hang" typeface="맑은 고딕"/>
+        <a:font script="Hans" typeface="宋体"/>
+        <a:font script="Hant" typeface="新細明體"/>
+        <a:font script="Arab" typeface="Times New Roman"/>
+        <a:font script="Hebr" typeface="Times New Roman"/>
+        <a:font script="Thai" typeface="Angsana New"/>
+        <a:font script="Ethi" typeface="Nyala"/>
+        <a:font script="Beng" typeface="Vrinda"/>
+        <a:font script="Gujr" typeface="Shruti"/>
+        <a:font script="Khmr" typeface="MoolBoran"/>
+        <a:font script="Knda" typeface="Tunga"/>
+        <a:font script="Guru" typeface="Raavi"/>
+        <a:font script="Cans" typeface="Euphemia"/>
+        <a:font script="Cher" typeface="Plantagenet Cherokee"/>
+        <a:font script="Yiii" typeface="Microsoft Yi Baiti"/>
+        <a:font script="Tibt" typeface="Microsoft Himalaya"/>
+        <a:font script="Thaa" typeface="MV Boli"/>
+        <a:font script="Deva" typeface="Mangal"/>
+        <a:font script="Telu" typeface="Gautami"/>
+        <a:font script="Taml" typeface="Latha"/>
+        <a:font script="Syrc" typeface="Estrangelo Edessa"/>
+        <a:font script="Orya" typeface="Kalinga"/>
+        <a:font script="Mlym" typeface="Kartika"/>
+        <a:font script="Laoo" typeface="DokChampa"/>
+        <a:font script="Sinh" typeface="Iskoola Pota"/>
+        <a:font script="Mong" typeface="Mongolian Baiti"/>
+        <a:font script="Viet" typeface="Times New Roman"/>
+        <a:font script="Uigh" typeface="Microsoft Uighur"/>
+        <a:font script="Geor" typeface="Sylfaen"/>
+      </a:majorFont>
+      <a:minorFont>
+        <a:latin typeface="Calibri"/>
+        <a:ea typeface=""/>
+        <a:cs typeface=""/>
+        <a:font script="Jpan" typeface="ＭＳ Ｐゴシック"/>
+        <a:font script="Hang" typeface="맑은 고딕"/>
+        <a:font script="Hans" typeface="宋体"/>
+        <a:font script="Hant" typeface="新細明體"/>
+        <a:font script="Arab" typeface="Arial"/>
+        <a:font script="Hebr" typeface="Arial"/>
+        <a:font script="Thai" typeface="Cordia New"/>
+        <a:font script="Ethi" typeface="Nyala"/>
+        <a:font script="Beng" typeface="Vrinda"/>
+        <a:font script="Gujr" typeface="Shruti"/>
+        <a:font script="Khmr" typeface="DaunPenh"/>
+        <a:font script="Knda" typeface="Tunga"/>
+        <a:font script="Guru" typeface="Raavi"/>
+        <a:font script="Cans" typeface="Euphemia"/>
+        <a:font script="Cher" typeface="Plantagenet Cherokee"/>
+        <a:font script="Yiii" typeface="Microsoft Yi Baiti"/>
+        <a:font script="Tibt" typeface="Microsoft Himalaya"/>
+        <a:font script="Thaa" typeface="MV Boli"/>
+        <a:font script="Deva" typeface="Mangal"/>
+        <a:font script="Telu" typeface="Gautami"/>
+        <a:font script="Taml" typeface="Latha"/>
+        <a:font script="Syrc" typeface="Estrangelo Edessa"/>
+        <a:font script="Orya" typeface="Kalinga"/>
+        <a:font script="Mlym" typeface="Kartika"/>
+        <a:font script="Laoo" typeface="DokChampa"/>
+        <a:font script="Sinh" typeface="Iskoola Pota"/>
+        <a:font script="Mong" typeface="Mongolian Baiti"/>
+        <a:font script="Viet" typeface="Arial"/>
+        <a:font script="Uigh" typeface="Microsoft Uighur"/>
+        <a:font script="Geor" typeface="Sylfaen"/>
+      </a:minorFont>
+    </a:fontScheme>
+    <a:fmtScheme name="Office">
+      <a:fillStyleLst>
+        <a:solidFill>
+          <a:schemeClr val="phClr"/>
+        </a:solidFill>
+        <a:gradFill rotWithShape="1">
+          <a:gsLst>
+            <a:gs pos="0">
+              <a:schemeClr val="phClr">
+                <a:tint val="50000"/>
+                <a:satMod val="300000"/>
+              </a:schemeClr>
+            </a:gs>
+            <a:gs pos="35000">
+              <a:schemeClr val="phClr">
+                <a:tint val="37000"/>
+                <a:satMod val="300000"/>
+              </a:schemeClr>
+            </a:gs>
+            <a:gs pos="100000">
+              <a:schemeClr val="phClr">
+                <a:tint val="15000"/>
+                <a:satMod val="350000"/>
+              </a:schemeClr>
+            </a:gs>
+          </a:gsLst>
+          <a:lin ang="16200000" scaled="1"/>
+        </a:gradFill>
+        <a:gradFill rotWithShape="1">
+          <a:gsLst>
+            <a:gs pos="0">
+              <a:schemeClr val="phClr">
+                <a:tint val="100000"/>
+                <a:shade val="100000"/>
+                <a:satMod val="130000"/>
+              </a:schemeClr>
+            </a:gs>
+            <a:gs pos="100000">
+              <a:schemeClr val="phClr">
+                <a:tint val="50000"/>
+                <a:shade val="100000"/>
+                <a:satMod val="350000"/>
+              </a:schemeClr>
+            </a:gs>
+          </a:gsLst>
+          <a:lin ang="16200000" scaled="0"/>
+        </a:gradFill>
+      </a:fillStyleLst>
+      <a:lnStyleLst>
+        <a:ln w="9525" cap="flat" cmpd="sng" algn="ctr">
+          <a:solidFill>
+            <a:schemeClr val="phClr">
+              <a:shade val="95000"/>
+              <a:satMod val="105000"/>
+            </a:schemeClr>
+          </a:solidFill>
+          <a:prstDash val="solid"/>
+        </a:ln>
+        <a:ln w="25400" cap="flat" cmpd="sng" algn="ctr">
+          <a:solidFill>
+            <a:schemeClr val="phClr"/>
+          </a:solidFill>
+          <a:prstDash val="solid"/>
+        </a:ln>
+        <a:ln w="38100" cap="flat" cmpd="sng" algn="ctr">
+          <a:solidFill>
+            <a:schemeClr val="phClr"/>
+          </a:solidFill>
+          <a:prstDash val="solid"/>
+        </a:ln>
+      </a:lnStyleLst>
+      <a:effectStyleLst>
+        <a:effectStyle>
+          <a:effectLst>
+            <a:outerShdw blurRad="40000" dist="20000" dir="5400000" rotWithShape="0">
+              <a:srgbClr val="000000">
+                <a:alpha val="38000"/>
+              </a:srgbClr>
+            </a:outerShdw>
+          </a:effectLst>
+        </a:effectStyle>
+        <a:effectStyle>
+          <a:effectLst>
+            <a:outerShdw blurRad="40000" dist="23000" dir="5400000" rotWithShape="0">
+              <a:srgbClr val="000000">
+                <a:alpha val="35000"/>
+              </a:srgbClr>
+            </a:outerShdw>
+          </a:effectLst>
+        </a:effectStyle>
+        <a:effectStyle>
+          <a:effectLst>
+            <a:outerShdw blurRad="40000" dist="23000" dir="5400000" rotWithShape="0">
+              <a:srgbClr val="000000">
+                <a:alpha val="35000"/>
+              </a:srgbClr>
+            </a:outerShdw>
+          </a:effectLst>
+          <a:scene3d>
+            <a:camera prst="orthographicFront">
+              <a:rot lat="0" lon="0" rev="0"/>
+            </a:camera>
+            <a:lightRig rig="threePt" dir="t">
+              <a:rot lat="0" lon="0" rev="1200000"/>
+            </a:lightRig>
+          </a:scene3d>
+          <a:sp3d>
+            <a:bevelT w="63500" h="25400"/>
+          </a:sp3d>
+        </a:effectStyle>
+      </a:effectStyleLst>
+      <a:bgFillStyleLst>
+        <a:solidFill>
+          <a:schemeClr val="phClr"/>
+        </a:solidFill>
+        <a:gradFill rotWithShape="1">
+          <a:gsLst>
+            <a:gs pos="0">
+              <a:schemeClr val="phClr">
+                <a:tint val="40000"/>
+                <a:satMod val="350000"/>
+              </a:schemeClr>
+            </a:gs>
+            <a:gs pos="40000">
+              <a:schemeClr val="phClr">
+                <a:tint val="45000"/>
+                <a:shade val="99000"/>
+                <a:satMod val="350000"/>
+              </a:schemeClr>
+            </a:gs>
+            <a:gs pos="100000">
+              <a:schemeClr val="phClr">
+                <a:shade val="20000"/>
+                <a:satMod val="255000"/>
+              </a:schemeClr>
+            </a:gs>
+          </a:gsLst>
+          <a:path path="circle">
+            <a:fillToRect l="50000" t="-80000" r="50000" b="180000"/>
+          </a:path>
+        </a:gradFill>
+        <a:gradFill rotWithShape="1">
+          <a:gsLst>
+            <a:gs pos="0">
+              <a:schemeClr val="phClr">
+                <a:tint val="80000"/>
+                <a:satMod val="300000"/>
+              </a:schemeClr>
+            </a:gs>
+            <a:gs pos="100000">
+              <a:schemeClr val="phClr">
+                <a:shade val="30000"/>
+                <a:satMod val="200000"/>
+              </a:schemeClr>
+            </a:gs>
+          </a:gsLst>
+          <a:path path="circle">
+            <a:fillToRect l="50000" t="50000" r="50000" b="50000"/>
+          </a:path>
+        </a:gradFill>
+      </a:bgFillStyleLst>
+    </a:fmtScheme>
+  </a:themeElements>
+  <a:objectDefaults>
+    <a:spDef>
+      <a:spPr/>
+      <a:bodyPr/>
+      <a:lstStyle/>
+      <a:style>
+        <a:lnRef idx="1">
+          <a:schemeClr val="accent1"/>
+        </a:lnRef>
+        <a:fillRef idx="3">
+          <a:schemeClr val="accent1"/>
+        </a:fillRef>
+        <a:effectRef idx="2">
+          <a:schemeClr val="accent1"/>
+        </a:effectRef>
+        <a:fontRef idx="minor">
+          <a:schemeClr val="lt1"/>
+        </a:fontRef>
+      </a:style>
+    </a:spDef>
+    <a:lnDef>
+      <a:spPr/>
+      <a:bodyPr/>
+      <a:lstStyle/>
+      <a:style>
+        <a:lnRef idx="2">
+          <a:schemeClr val="accent1"/>
+        </a:lnRef>
+        <a:fillRef idx="0">
+          <a:schemeClr val="accent1"/>
+        </a:fillRef>
+        <a:effectRef idx="1">
+          <a:schemeClr val="accent1"/>
+        </a:effectRef>
+        <a:fontRef idx="minor">
+          <a:schemeClr val="tx1"/>
+        </a:fontRef>
+      </a:style>
+    </a:lnDef>
+  </a:objectDefaults>
+  <a:extraClrSchemeLst/>
+</a:theme>
 </file>
--- a/Seminario de Sistemas/Clases/Clase 8 - Introduccion a UML/Presentacion.pptx
+++ b/Seminario de Sistemas/Clases/Clase 8 - Introduccion a UML/Presentacion.pptx
@@ -529,7 +529,7 @@
           <a:p/>
           <a:p>
             <a:r>
-              <a:t>En VetCare vamos a usar clases hoy, casos de uso y secuencia mas adelante, y el resto se menciona para que sepan que existen.</a:t>
+              <a:t>En el sistema de la clinica vamos a usar clases hoy, casos de uso y secuencia mas adelante, y el resto se menciona para que sepan que existen.</a:t>
             </a:r>
           </a:p>
         </p:txBody>
@@ -4012,7 +4012,7 @@
                 </a:solidFill>
                 <a:latin typeface="Calibri"/>
               </a:rPr>
-              <a:t>El idioma comun para dibujar los planos de VetCare</a:t>
+              <a:t>El idioma comun para dibujar los planos del sistema de la clinica</a:t>
             </a:r>
           </a:p>
         </p:txBody>
@@ -4232,7 +4232,7 @@
                 </a:solidFill>
                 <a:latin typeface="Calibri"/>
               </a:rPr>
-              <a:t>–   La composicion (rombo relleno) se usa cuando la parte no vive sin el todo: en VetCare las Atenciones de una Mascota son parte de su historia clinica y no tienen sentido si se elimina la ficha de la mascota.</a:t>
+              <a:t>–   La composicion (rombo relleno) se usa cuando la parte no vive sin el todo: en el sistema de la clinica las Atenciones de una Mascota son parte de su historia clinica y no tienen sentido si se elimina la ficha de la mascota.</a:t>
             </a:r>
           </a:p>
           <a:p>
@@ -4484,7 +4484,7 @@
                 </a:solidFill>
                 <a:latin typeface="Calibri"/>
               </a:rPr>
-              <a:t>–   El diagrama que dibujamos hoy no se queda en la clase: es la pieza que viaja mas lejos del Proyecto Integrador.</a:t>
+              <a:t>–   El diagrama que dibujamos hoy no se queda en la clase: es la pieza que viaja mas lejos del proyecto.</a:t>
             </a:r>
           </a:p>
           <a:p>
@@ -4548,7 +4548,7 @@
                 </a:solidFill>
                 <a:latin typeface="Calibri"/>
               </a:rPr>
-              <a:t>–   Y para quien solo cursa Seminario, es el corazon del documento de diseno que se entrega al final junto con el prototipo navegable, una ruta completa y perfectamente valida donde el entregable profesional es el plano, no el ladrillo.</a:t>
+              <a:t>–   Y para quien solo cursa Seminario, es el corazon del documento de diseno que se entrega al final junto con el prototipo navegable, una ruta completa y perfectamente valida donde el producto profesional es el plano, no el ladrillo.</a:t>
             </a:r>
           </a:p>
         </p:txBody>
@@ -5160,7 +5160,7 @@
                 </a:solidFill>
                 <a:latin typeface="Calibri"/>
               </a:rPr>
-              <a:t>%% Complete con SUS clases. Lo que se califica: visibilidad (- privado,</a:t>
+              <a:t>%% Complete con SUS clases. Lo que importa: visibilidad (- privado,</a:t>
             </a:r>
           </a:p>
           <a:p>
@@ -5873,7 +5873,7 @@
                 </a:solidFill>
                 <a:latin typeface="Calibri"/>
               </a:rPr>
-              <a:t>Modelo de dominio de VetCare en sintaxis Mermaid (diagrama, no codigo)</a:t>
+              <a:t>Modelo de dominio del sistema de la clinica en sintaxis Mermaid (diagrama, no codigo)</a:t>
             </a:r>
           </a:p>
         </p:txBody>
@@ -6826,7 +6826,7 @@
                 </a:solidFill>
                 <a:latin typeface="Calibri"/>
               </a:rPr>
-              <a:t>–   Mismo dominio VetCare — no otro ejemplo. Aqui se diseña, no se programa.</a:t>
+              <a:t>–   Mismo dominio: la clinica veterinaria — no otro ejemplo. Aqui se diseña, no se programa.</a:t>
             </a:r>
           </a:p>
         </p:txBody>
@@ -7026,7 +7026,7 @@
                 </a:solidFill>
                 <a:latin typeface="Calibri"/>
               </a:rPr>
-              <a:t>El idioma comun para dibujar los planos de VetCare</a:t>
+              <a:t>El idioma comun para dibujar los planos del sistema de la clinica</a:t>
             </a:r>
           </a:p>
           <a:p>
@@ -7312,7 +7312,7 @@
                 </a:solidFill>
                 <a:latin typeface="Calibri"/>
               </a:rPr>
-              <a:t>–   El idioma comun para dibujar los planos de VetCare</a:t>
+              <a:t>–   El idioma comun para dibujar los planos del sistema de la clinica</a:t>
             </a:r>
           </a:p>
           <a:p>
@@ -7371,7 +7371,7 @@
                 </a:solidFill>
                 <a:latin typeface="Calibri"/>
               </a:rPr>
-              <a:t>–   Ejemplo de toda la clase: VetCare, el sistema de la clinica «Huellitas».</a:t>
+              <a:t>–   Ejemplo de toda la clase: el sistema de una clinica veterinaria.</a:t>
             </a:r>
           </a:p>
         </p:txBody>
@@ -7940,7 +7940,7 @@
                 </a:solidFill>
                 <a:latin typeface="Calibri"/>
               </a:rPr>
-              <a:t>Demo en vivo sobre VetCare</a:t>
+              <a:t>Demo en vivo sobre la clinica</a:t>
             </a:r>
           </a:p>
         </p:txBody>
@@ -8711,7 +8711,7 @@
                 </a:solidFill>
                 <a:latin typeface="Calibri"/>
               </a:rPr>
-              <a:t>–   En VetCare, la frase un dueno puede tener varias mascotas parece clarisima hasta que alguien pregunta si una mascota puede tener dos duenos, si el dueno existe antes de registrar la mascota o si al borrar el dueno desaparece la mascota</a:t>
+              <a:t>–   En el sistema de la clinica, la frase un dueno puede tener varias mascotas parece clarisima hasta que alguien pregunta si una mascota puede tener dos duenos, si el dueno existe antes de registrar la mascota o si al borrar el dueno desaparece la mascota</a:t>
             </a:r>
           </a:p>
           <a:p>
@@ -9499,7 +9499,23 @@
                 </a:solidFill>
                 <a:latin typeface="Calibri"/>
               </a:rPr>
-              <a:t>–   Hoy hacemos modelo de dominio, asi que en VetCare no aparece ninguna clase llamada MascotaDAO ni ConexionBD: aparecen Dueno, Mascota, Cita, Veterinario y Atencion, que son las cosas de las que habla el Dr. Ramirez cuando cuenta como funciona la clinica.</a:t>
+              <a:t>–   Hoy hacemos modelo de dominio, asi que en el sistema de la clinica no aparece ninguna clase llamada MascotaDAO ni ConexionBD: aparecen Dueno, Mascota, Cita, Veterinario y Atencion</a:t>
+            </a:r>
+          </a:p>
+          <a:p>
+            <a:pPr>
+              <a:spcAft>
+                <a:spcPts val="800"/>
+              </a:spcAft>
+            </a:pPr>
+            <a:r>
+              <a:rPr sz="2000" b="0" i="0">
+                <a:solidFill>
+                  <a:srgbClr val="333333"/>
+                </a:solidFill>
+                <a:latin typeface="Calibri"/>
+              </a:rPr>
+              <a:t>–   Que son las cosas de las que habla el Dr. Ramirez cuando cuenta como funciona la clinica.</a:t>
             </a:r>
           </a:p>
           <a:p>
@@ -9783,7 +9799,7 @@
                 </a:solidFill>
                 <a:latin typeface="Calibri"/>
               </a:rPr>
-              <a:t>–   En VetCare, Dueno 1 --- 0..* Mascota se lee un dueno puede tener cero o mas mascotas y una mascota pertenece a exactamente un dueno; ese 1 del lado del dueno es una decision de negocio que hay que confirmar con el cliente, no una suposicion.</a:t>
+              <a:t>–   En el sistema de la clinica, Dueno 1 --- 0..* Mascota se lee un dueno puede tener cero o mas mascotas y una mascota pertenece a exactamente un dueno; ese 1 del lado del dueno es una decision de negocio que hay que confirmar con el cliente, no una suposicion.</a:t>
             </a:r>
           </a:p>
         </p:txBody>

--- a/Seminario de Sistemas/Clases/Clase 8 - Introduccion a UML/Presentacion.pptx
+++ b/Seminario de Sistemas/Clases/Clase 8 - Introduccion a UML/Presentacion.pptx
@@ -529,7 +529,7 @@
           <a:p/>
           <a:p>
             <a:r>
-              <a:t>En el sistema de la clinica vamos a usar clases hoy, casos de uso y secuencia mas adelante, y el resto se menciona para que sepan que existen.</a:t>
+              <a:t>En la clinica vamos a usar clases hoy, casos de uso y secuencia mas adelante, y el resto se menciona para que sepan que existen.</a:t>
             </a:r>
           </a:p>
         </p:txBody>
@@ -4012,7 +4012,7 @@
                 </a:solidFill>
                 <a:latin typeface="Calibri"/>
               </a:rPr>
-              <a:t>El idioma comun para dibujar los planos del sistema de la clinica</a:t>
+              <a:t>El idioma comun para dibujar los planos de la clinica</a:t>
             </a:r>
           </a:p>
         </p:txBody>
@@ -4232,7 +4232,7 @@
                 </a:solidFill>
                 <a:latin typeface="Calibri"/>
               </a:rPr>
-              <a:t>–   La composicion (rombo relleno) se usa cuando la parte no vive sin el todo: en el sistema de la clinica las Atenciones de una Mascota son parte de su historia clinica y no tienen sentido si se elimina la ficha de la mascota.</a:t>
+              <a:t>–   La composicion (rombo relleno) se usa cuando la parte no vive sin el todo: en la clinica las Atenciones de una Mascota son parte de su historia clinica y no tienen sentido si se elimina la ficha de la mascota.</a:t>
             </a:r>
           </a:p>
           <a:p>
@@ -5873,7 +5873,7 @@
                 </a:solidFill>
                 <a:latin typeface="Calibri"/>
               </a:rPr>
-              <a:t>Modelo de dominio del sistema de la clinica en sintaxis Mermaid (diagrama, no codigo)</a:t>
+              <a:t>Modelo de dominio de la clinica en sintaxis Mermaid (diagrama, no codigo)</a:t>
             </a:r>
           </a:p>
         </p:txBody>
@@ -6810,7 +6810,7 @@
                 </a:solidFill>
                 <a:latin typeface="Calibri"/>
               </a:rPr>
-              <a:t> El docente dibuja en vivo Dueno, Mascota y Cita en draw.io y borra tres atributos mal ubicados explicando a que clase pertenecen de verdad.</a:t>
+              <a:t> Se dibuja en vivo Dueno, Mascota y Cita en draw.io y borra tres atributos mal ubicados explicando a que clase pertenecen de verdad.</a:t>
             </a:r>
           </a:p>
           <a:p>
@@ -7026,7 +7026,7 @@
                 </a:solidFill>
                 <a:latin typeface="Calibri"/>
               </a:rPr>
-              <a:t>El idioma comun para dibujar los planos del sistema de la clinica</a:t>
+              <a:t>El idioma comun para dibujar los planos de la clinica</a:t>
             </a:r>
           </a:p>
           <a:p>
@@ -7312,7 +7312,7 @@
                 </a:solidFill>
                 <a:latin typeface="Calibri"/>
               </a:rPr>
-              <a:t>–   El idioma comun para dibujar los planos del sistema de la clinica</a:t>
+              <a:t>–   El idioma comun para dibujar los planos de la clinica</a:t>
             </a:r>
           </a:p>
           <a:p>
@@ -8711,7 +8711,7 @@
                 </a:solidFill>
                 <a:latin typeface="Calibri"/>
               </a:rPr>
-              <a:t>–   En el sistema de la clinica, la frase un dueno puede tener varias mascotas parece clarisima hasta que alguien pregunta si una mascota puede tener dos duenos, si el dueno existe antes de registrar la mascota o si al borrar el dueno desaparece la mascota</a:t>
+              <a:t>–   En la clinica, la frase un dueno puede tener varias mascotas parece clarisima hasta que alguien pregunta si una mascota puede tener dos duenos, si el dueno existe antes de registrar la mascota o si al borrar el dueno desaparece la mascota</a:t>
             </a:r>
           </a:p>
           <a:p>
@@ -9499,23 +9499,7 @@
                 </a:solidFill>
                 <a:latin typeface="Calibri"/>
               </a:rPr>
-              <a:t>–   Hoy hacemos modelo de dominio, asi que en el sistema de la clinica no aparece ninguna clase llamada MascotaDAO ni ConexionBD: aparecen Dueno, Mascota, Cita, Veterinario y Atencion</a:t>
-            </a:r>
-          </a:p>
-          <a:p>
-            <a:pPr>
-              <a:spcAft>
-                <a:spcPts val="800"/>
-              </a:spcAft>
-            </a:pPr>
-            <a:r>
-              <a:rPr sz="2000" b="0" i="0">
-                <a:solidFill>
-                  <a:srgbClr val="333333"/>
-                </a:solidFill>
-                <a:latin typeface="Calibri"/>
-              </a:rPr>
-              <a:t>–   Que son las cosas de las que habla el Dr. Ramirez cuando cuenta como funciona la clinica.</a:t>
+              <a:t>–   Hoy hacemos modelo de dominio, asi que en la clinica no aparece ninguna clase llamada MascotaDAO ni ConexionBD: aparecen Dueno, Mascota, Cita, Veterinario y Atencion, que son las cosas de las que habla el Dr. Ramirez cuando cuenta como funciona la clinica.</a:t>
             </a:r>
           </a:p>
           <a:p>
@@ -9799,7 +9783,7 @@
                 </a:solidFill>
                 <a:latin typeface="Calibri"/>
               </a:rPr>
-              <a:t>–   En el sistema de la clinica, Dueno 1 --- 0..* Mascota se lee un dueno puede tener cero o mas mascotas y una mascota pertenece a exactamente un dueno; ese 1 del lado del dueno es una decision de negocio que hay que confirmar con el cliente, no una suposicion.</a:t>
+              <a:t>–   En la clinica, Dueno 1 --- 0..* Mascota se lee un dueno puede tener cero o mas mascotas y una mascota pertenece a exactamente un dueno; ese 1 del lado del dueno es una decision de negocio que hay que confirmar con el cliente, no una suposicion.</a:t>
             </a:r>
           </a:p>
         </p:txBody>

--- a/Seminario de Sistemas/Clases/Clase 8 - Introduccion a UML/Presentacion.pptx
+++ b/Seminario de Sistemas/Clases/Clase 8 - Introduccion a UML/Presentacion.pptx
@@ -9,8 +9,8 @@
     <p:sldId id="257" r:id="rId8"/>
     <p:sldId id="258" r:id="rId9"/>
     <p:sldId id="259" r:id="rId10"/>
-    <p:sldId id="260" r:id="rId11"/>
-    <p:sldId id="261" r:id="rId12"/>
+    <p:sldId id="260" r:id="rId12"/>
+    <p:sldId id="261" r:id="rId13"/>
     <p:sldId id="262" r:id="rId14"/>
     <p:sldId id="263" r:id="rId15"/>
     <p:sldId id="264" r:id="rId16"/>
@@ -18,9 +18,6 @@
     <p:sldId id="266" r:id="rId18"/>
     <p:sldId id="267" r:id="rId19"/>
     <p:sldId id="268" r:id="rId20"/>
-    <p:sldId id="269" r:id="rId21"/>
-    <p:sldId id="270" r:id="rId22"/>
-    <p:sldId id="271" r:id="rId23"/>
   </p:sldIdLst>
   <p:sldSz cx="12191695" cy="6858000" type="screen4x3"/>
   <p:notesSz cx="6858000" cy="9144000"/>
@@ -517,19 +514,43 @@
           <a:lstStyle/>
           <a:p>
             <a:r>
-              <a:t>Los diagramas se agrupan en dos grandes vistas.</a:t>
+              <a:t>DESARROLLO (para explicarlo, no se proyecta):</a:t>
             </a:r>
           </a:p>
           <a:p/>
           <a:p>
             <a:r>
-              <a:t>Un mismo sistema necesita las dos, igual que una casa necesita el plano de plantas y tambien el plano de instalaciones.</a:t>
+              <a:t>UML significa Lenguaje Unificado de Modelado y nacio en los anos noventa para resolver un problema muy concreto: tres personas leian la misma frase en espanol y entendian tres sistemas distintos.</a:t>
             </a:r>
           </a:p>
           <a:p/>
           <a:p>
             <a:r>
-              <a:t>En la clinica vamos a usar clases hoy, casos de uso y secuencia mas adelante, y el resto se menciona para que sepan que existen.</a:t>
+              <a:t>La especificacion tiene catorce tipos de diagrama, pero en la vida real de un analista se usan cuatro o cinco de forma constante y los demas se consultan cuando se necesitan; querer aprender los catorce es la manera mas rapida de no aprender ninguno.</a:t>
+            </a:r>
+          </a:p>
+          <a:p/>
+          <a:p>
+            <a:r>
+              <a:t>En la clinica, la frase un dueno puede tener varias mascotas parece clarisima hasta que alguien pregunta si una mascota puede tener dos duenos, si el dueno existe antes de registrar la mascota o si al borrar el dueno desaparece la mascota</a:t>
+            </a:r>
+          </a:p>
+          <a:p/>
+          <a:p>
+            <a:r>
+              <a:t>El diagrama contesta esas tres preguntas con dos numeros y una linea, y ahi es donde UML se gana el sueldo.</a:t>
+            </a:r>
+          </a:p>
+          <a:p/>
+          <a:p>
+            <a:r>
+              <a:t>NOTAS:</a:t>
+            </a:r>
+          </a:p>
+          <a:p/>
+          <a:p>
+            <a:r>
+              <a:t>Es un lenguaje grafico estandarizado, no un lenguaje de programacion y no una herramienta; usted puede dibujar UML valido en draw.io, en Mermaid o en el tablero con marcador, porque lo que esta normalizado es el significado de las cajas, las lineas y los numeros, no el programa donde se pintan.</a:t>
             </a:r>
           </a:p>
         </p:txBody>
@@ -599,7 +620,55 @@
           <a:lstStyle/>
           <a:p>
             <a:r>
-              <a:t>Cita relaciona a Mascota y a Veterinario, cada cita con exactamente una mascota y un veterinario, y cada veterinario con muchas citas.</a:t>
+              <a:t>DESARROLLO (para explicarlo, no se proyecta):</a:t>
+            </a:r>
+          </a:p>
+          <a:p/>
+          <a:p>
+            <a:r>
+              <a:t>La vista estructural muestra de que esta hecho el sistema y no cambia con el tiempo: diagrama de clases, de objetos, de componentes y de despliegue.</a:t>
+            </a:r>
+          </a:p>
+          <a:p/>
+          <a:p>
+            <a:r>
+              <a:t>La vista de comportamiento muestra que pasa y en que orden: casos de uso, actividades, secuencia y maquina de estados.</a:t>
+            </a:r>
+          </a:p>
+          <a:p/>
+          <a:p>
+            <a:r>
+              <a:t>Aclaracion importante: los diagramas no reemplazan el documento de requisitos, lo dibujan; cada clase que aparezca hoy debe poder rastrearse a un RF o a una historia del backlog.</a:t>
+            </a:r>
+          </a:p>
+          <a:p/>
+          <a:p>
+            <a:r>
+              <a:t>NOTAS:</a:t>
+            </a:r>
+          </a:p>
+          <a:p/>
+          <a:p>
+            <a:r>
+              <a:t>Los diagramas se agrupan en dos grandes vistas.</a:t>
+            </a:r>
+          </a:p>
+          <a:p/>
+          <a:p>
+            <a:r>
+              <a:t>Un mismo sistema necesita las dos, igual que una casa necesita el plano de plantas y tambien el plano de instalaciones.</a:t>
+            </a:r>
+          </a:p>
+          <a:p/>
+          <a:p>
+            <a:r>
+              <a:t>En la practica profesional los que sobreviven son cinco: casos de uso para acordar el alcance con el cliente, clases para el modelo del dominio, secuencia para entender un flujo complicado paso a paso, actividades para procesos de negocio con decisiones, y despliegue cuando hay que explicar donde vive cada cosa.</a:t>
+            </a:r>
+          </a:p>
+          <a:p/>
+          <a:p>
+            <a:r>
+              <a:t>En la clinica vamos a usar clases hoy, casos de uso y secuencia mas adelante, y el resto se menciona para que sepan que existen.</a:t>
             </a:r>
           </a:p>
         </p:txBody>
@@ -667,6 +736,278 @@
         <p:txBody>
           <a:bodyPr/>
           <a:lstStyle/>
+          <a:p>
+            <a:r>
+              <a:t>DESARROLLO (para explicarlo, no se proyecta):</a:t>
+            </a:r>
+          </a:p>
+          <a:p/>
+          <a:p>
+            <a:r>
+              <a:t>El diagrama de clases se dibuja con una caja de tres compartimentos: arriba el nombre de la clase en singular y con mayuscula inicial (Mascota, no mascotas), en el medio los atributos y abajo los metodos.</a:t>
+            </a:r>
+          </a:p>
+          <a:p/>
+          <a:p>
+            <a:r>
+              <a:t>Un atributo se escribe con visibilidad, nombre y tipo, por ejemplo -nombre: String o -fechaNacimiento: Date, donde el guion significa privado y el mas significa publico.</a:t>
+            </a:r>
+          </a:p>
+          <a:p/>
+          <a:p>
+            <a:r>
+              <a:t>Un metodo se escribe con su firma y su tipo de retorno, por ejemplo +calcularEdad(): int.</a:t>
+            </a:r>
+          </a:p>
+          <a:p/>
+          <a:p>
+            <a:r>
+              <a:t>Aqui hay que distinguir dos cosas que los estudiantes mezclan: el modelo de dominio, que solo tiene los conceptos del negocio y sus datos, y el modelo de diseno, que ya incluye clases tecnicas como controladores o repositorios.</a:t>
+            </a:r>
+          </a:p>
+          <a:p/>
+          <a:p>
+            <a:r>
+              <a:t>Hoy hacemos modelo de dominio, asi que en la clinica no aparece ninguna clase llamada MascotaDAO ni ConexionBD: aparecen Dueno, Mascota, Cita, Veterinario y Atencion, que son las cosas de las que habla el Dr. Ramirez cuando cuenta como funciona la clinica.</a:t>
+            </a:r>
+          </a:p>
+          <a:p/>
+          <a:p>
+            <a:r>
+              <a:t>Los metodos, en el modelo de dominio, son solo los que pertenecen naturalmente al concepto, como calcularEdad en Mascota.</a:t>
+            </a:r>
+          </a:p>
+        </p:txBody>
+      </p:sp>
+      <p:sp>
+        <p:nvSpPr>
+          <p:cNvPr id="4" name="Slide Number Placeholder 3"/>
+          <p:cNvSpPr>
+            <a:spLocks noGrp="1"/>
+          </p:cNvSpPr>
+          <p:nvPr>
+            <p:ph type="sldNum" idx="5" sz="quarter"/>
+          </p:nvPr>
+        </p:nvSpPr>
+        <p:spPr/>
+      </p:sp>
+    </p:spTree>
+  </p:cSld>
+  <p:clrMapOvr>
+    <a:masterClrMapping/>
+  </p:clrMapOvr>
+</p:notes>
+</file>
+
+<file path=ppt/notesSlides/notesSlide4.xml><?xml version="1.0" encoding="utf-8"?>
+<p:notes xmlns:a="http://schemas.openxmlformats.org/drawingml/2006/main" xmlns:p="http://schemas.openxmlformats.org/presentationml/2006/main" xmlns:r="http://schemas.openxmlformats.org/officeDocument/2006/relationships">
+  <p:cSld>
+    <p:spTree>
+      <p:nvGrpSpPr>
+        <p:cNvPr id="1" name=""/>
+        <p:cNvGrpSpPr/>
+        <p:nvPr/>
+      </p:nvGrpSpPr>
+      <p:grpSpPr>
+        <a:xfrm>
+          <a:off x="0" y="0"/>
+          <a:ext cx="0" cy="0"/>
+          <a:chOff x="0" y="0"/>
+          <a:chExt cx="0" cy="0"/>
+        </a:xfrm>
+      </p:grpSpPr>
+      <p:sp>
+        <p:nvSpPr>
+          <p:cNvPr id="2" name="Slide Image Placeholder 1"/>
+          <p:cNvSpPr>
+            <a:spLocks noGrp="1"/>
+          </p:cNvSpPr>
+          <p:nvPr>
+            <p:ph type="sldImg" idx="2"/>
+          </p:nvPr>
+        </p:nvSpPr>
+        <p:spPr/>
+      </p:sp>
+      <p:sp>
+        <p:nvSpPr>
+          <p:cNvPr id="3" name="Notes Placeholder 2"/>
+          <p:cNvSpPr>
+            <a:spLocks noGrp="1"/>
+          </p:cNvSpPr>
+          <p:nvPr>
+            <p:ph type="body" idx="3" sz="quarter"/>
+          </p:nvPr>
+        </p:nvSpPr>
+        <p:spPr/>
+        <p:txBody>
+          <a:bodyPr/>
+          <a:lstStyle/>
+          <a:p>
+            <a:r>
+              <a:t>DESARROLLO (para explicarlo, no se proyecta):</a:t>
+            </a:r>
+          </a:p>
+          <a:p/>
+          <a:p>
+            <a:r>
+              <a:t>Las lineas entre clases son la mitad del valor del diagrama.</a:t>
+            </a:r>
+          </a:p>
+          <a:p/>
+          <a:p>
+            <a:r>
+              <a:t>Una asociacion es una relacion estable entre dos conceptos y se dibuja con una linea recta, un nombre que se lee como frase (Dueno tiene Mascota) y</a:t>
+            </a:r>
+          </a:p>
+          <a:p/>
+          <a:p>
+            <a:r>
+              <a:t>En cada extremo, una multiplicidad que responde cuantos: 1 exactamente uno, 0..1 opcional, 1..* uno o mas, 0..* cero o mas.</a:t>
+            </a:r>
+          </a:p>
+          <a:p/>
+          <a:p>
+            <a:r>
+              <a:t>En la clinica, Dueno 1 --- 0..* Mascota se lee un dueno puede tener cero o mas mascotas y una mascota pertenece a exactamente un dueno; ese 1 del lado del dueno es una decision de negocio que hay que confirmar con el cliente, no una suposicion.</a:t>
+            </a:r>
+          </a:p>
+          <a:p/>
+          <a:p>
+            <a:r>
+              <a:t>La composicion (rombo relleno) se usa cuando la parte no vive sin el todo: en la clinica las Atenciones de una Mascota son parte de su historia clinica y no tienen sentido si se elimina la ficha de la mascota.</a:t>
+            </a:r>
+          </a:p>
+          <a:p/>
+          <a:p>
+            <a:r>
+              <a:t>La agregacion (rombo vacio) se usa cuando la parte sobrevive por su cuenta, como un Veterinario que pertenece a una Sede pero sigue existiendo si la sede cierra.</a:t>
+            </a:r>
+          </a:p>
+          <a:p/>
+          <a:p>
+            <a:r>
+              <a:t>La herencia (triangulo) solo cuando hay un es-un verdadero, por ejemplo Persona con Dueno y Veterinario como especializaciones, decision que solo vale la pena si comparten varios atributos.</a:t>
+            </a:r>
+          </a:p>
+          <a:p/>
+          <a:p>
+            <a:r>
+              <a:t>NOTAS:</a:t>
+            </a:r>
+          </a:p>
+          <a:p/>
+          <a:p>
+            <a:r>
+              <a:t>Cita relaciona a Mascota y a Veterinario, cada cita con exactamente una mascota y un veterinario, y cada veterinario con muchas citas.</a:t>
+            </a:r>
+          </a:p>
+        </p:txBody>
+      </p:sp>
+      <p:sp>
+        <p:nvSpPr>
+          <p:cNvPr id="4" name="Slide Number Placeholder 3"/>
+          <p:cNvSpPr>
+            <a:spLocks noGrp="1"/>
+          </p:cNvSpPr>
+          <p:nvPr>
+            <p:ph type="sldNum" idx="5" sz="quarter"/>
+          </p:nvPr>
+        </p:nvSpPr>
+        <p:spPr/>
+      </p:sp>
+    </p:spTree>
+  </p:cSld>
+  <p:clrMapOvr>
+    <a:masterClrMapping/>
+  </p:clrMapOvr>
+</p:notes>
+</file>
+
+<file path=ppt/notesSlides/notesSlide5.xml><?xml version="1.0" encoding="utf-8"?>
+<p:notes xmlns:a="http://schemas.openxmlformats.org/drawingml/2006/main" xmlns:p="http://schemas.openxmlformats.org/presentationml/2006/main" xmlns:r="http://schemas.openxmlformats.org/officeDocument/2006/relationships">
+  <p:cSld>
+    <p:spTree>
+      <p:nvGrpSpPr>
+        <p:cNvPr id="1" name=""/>
+        <p:cNvGrpSpPr/>
+        <p:nvPr/>
+      </p:nvGrpSpPr>
+      <p:grpSpPr>
+        <a:xfrm>
+          <a:off x="0" y="0"/>
+          <a:ext cx="0" cy="0"/>
+          <a:chOff x="0" y="0"/>
+          <a:chExt cx="0" cy="0"/>
+        </a:xfrm>
+      </p:grpSpPr>
+      <p:sp>
+        <p:nvSpPr>
+          <p:cNvPr id="2" name="Slide Image Placeholder 1"/>
+          <p:cNvSpPr>
+            <a:spLocks noGrp="1"/>
+          </p:cNvSpPr>
+          <p:nvPr>
+            <p:ph type="sldImg" idx="2"/>
+          </p:nvPr>
+        </p:nvSpPr>
+        <p:spPr/>
+      </p:sp>
+      <p:sp>
+        <p:nvSpPr>
+          <p:cNvPr id="3" name="Notes Placeholder 2"/>
+          <p:cNvSpPr>
+            <a:spLocks noGrp="1"/>
+          </p:cNvSpPr>
+          <p:nvPr>
+            <p:ph type="body" idx="3" sz="quarter"/>
+          </p:nvPr>
+        </p:nvSpPr>
+        <p:spPr/>
+        <p:txBody>
+          <a:bodyPr/>
+          <a:lstStyle/>
+          <a:p>
+            <a:r>
+              <a:t>DESARROLLO (para explicarlo, no se proyecta):</a:t>
+            </a:r>
+          </a:p>
+          <a:p/>
+          <a:p>
+            <a:r>
+              <a:t>El diagrama que dibujamos hoy no se queda en la clase: es la pieza que viaja mas lejos del proyecto.</a:t>
+            </a:r>
+          </a:p>
+          <a:p/>
+          <a:p>
+            <a:r>
+              <a:t>De cada clase salen los campos del diccionario de datos y, mas adelante, las tablas de la base de datos: la clase Mascota con sus atributos se convierte en la tabla mascota, la asociacion 1 a 0..* se convierte en una llave foranea</a:t>
+            </a:r>
+          </a:p>
+          <a:p/>
+          <a:p>
+            <a:r>
+              <a:t>Y las multiplicidades muchos a muchos se convierten en una tabla intermedia.</a:t>
+            </a:r>
+          </a:p>
+          <a:p/>
+          <a:p>
+            <a:r>
+              <a:t>Para quien cursa tambien Programacion II, este diagrama es el mapa que le dice que clases crear y que atributos poner; para quien solo cursa Programacion II, es lo que recibe ya hecho y debe respetar</a:t>
+            </a:r>
+          </a:p>
+          <a:p/>
+          <a:p>
+            <a:r>
+              <a:t>Y para quien solo cursa Seminario, es el corazon del documento de diseno que se entrega al final junto con el prototipo navegable, una ruta completa y perfectamente valida donde el producto profesional es el plano, no el ladrillo.</a:t>
+            </a:r>
+          </a:p>
+          <a:p/>
+          <a:p>
+            <a:r>
+              <a:t>NOTAS:</a:t>
+            </a:r>
+          </a:p>
+          <a:p/>
           <a:p>
             <a:r>
               <a:t>Por eso el diagrama debe estar limpio: nombres en singular, sin atributos repetidos en dos clases, sin lineas sueltas y sin cajas que no correspondan a ningun requisito.</a:t>
@@ -4193,21 +4534,197 @@
                 </a:solidFill>
                 <a:latin typeface="Calibri"/>
               </a:rPr>
-              <a:t>Las lineas entre clases son la mitad del valor del diagrama (2/2)</a:t>
-            </a:r>
-          </a:p>
-        </p:txBody>
-      </p:sp>
-      <p:sp>
-        <p:nvSpPr>
-          <p:cNvPr id="5" name="TextBox 4"/>
+              <a:t>Asociaciones y multiplicidades</a:t>
+            </a:r>
+          </a:p>
+        </p:txBody>
+      </p:sp>
+      <p:sp>
+        <p:nvSpPr>
+          <p:cNvPr id="5" name="Rounded Rectangle 4"/>
+          <p:cNvSpPr/>
+          <p:nvPr/>
+        </p:nvSpPr>
+        <p:spPr>
+          <a:xfrm>
+            <a:off x="5803166" y="1188719"/>
+            <a:ext cx="5998464" cy="4828032"/>
+          </a:xfrm>
+          <a:prstGeom prst="roundRect">
+            <a:avLst>
+              <a:gd name="adj" fmla="val 4000"/>
+            </a:avLst>
+          </a:prstGeom>
+          <a:solidFill>
+            <a:srgbClr val="E8EEF4"/>
+          </a:solidFill>
+          <a:ln>
+            <a:noFill/>
+          </a:ln>
+        </p:spPr>
+        <p:style>
+          <a:lnRef idx="1">
+            <a:schemeClr val="accent1"/>
+          </a:lnRef>
+          <a:fillRef idx="3">
+            <a:schemeClr val="accent1"/>
+          </a:fillRef>
+          <a:effectRef idx="2">
+            <a:schemeClr val="accent1"/>
+          </a:effectRef>
+          <a:fontRef idx="minor">
+            <a:schemeClr val="lt1"/>
+          </a:fontRef>
+        </p:style>
+        <p:txBody>
+          <a:bodyPr rtlCol="0" anchor="ctr"/>
+          <a:lstStyle/>
+          <a:p>
+            <a:pPr algn="ctr"/>
+          </a:p>
+        </p:txBody>
+      </p:sp>
+      <p:pic>
+        <p:nvPicPr>
+          <p:cNvPr id="6" name="Picture 5" descr="relaciones-uml-paso1.png"/>
+          <p:cNvPicPr>
+            <a:picLocks noChangeAspect="1"/>
+          </p:cNvPicPr>
+          <p:nvPr/>
+        </p:nvPicPr>
+        <p:blipFill>
+          <a:blip r:embed="rId2"/>
+          <a:stretch>
+            <a:fillRect/>
+          </a:stretch>
+        </p:blipFill>
+        <p:spPr>
+          <a:xfrm>
+            <a:off x="5876318" y="1261872"/>
+            <a:ext cx="5852160" cy="4681728"/>
+          </a:xfrm>
+          <a:prstGeom prst="rect">
+            <a:avLst/>
+          </a:prstGeom>
+        </p:spPr>
+      </p:pic>
+      <p:pic>
+        <p:nvPicPr>
+          <p:cNvPr id="7" name="Picture 6" descr="relaciones-uml-paso2.png"/>
+          <p:cNvPicPr>
+            <a:picLocks noChangeAspect="1"/>
+          </p:cNvPicPr>
+          <p:nvPr/>
+        </p:nvPicPr>
+        <p:blipFill>
+          <a:blip r:embed="rId3"/>
+          <a:stretch>
+            <a:fillRect/>
+          </a:stretch>
+        </p:blipFill>
+        <p:spPr>
+          <a:xfrm>
+            <a:off x="5876318" y="1261872"/>
+            <a:ext cx="5852160" cy="4681728"/>
+          </a:xfrm>
+          <a:prstGeom prst="rect">
+            <a:avLst/>
+          </a:prstGeom>
+        </p:spPr>
+      </p:pic>
+      <p:pic>
+        <p:nvPicPr>
+          <p:cNvPr id="8" name="Picture 7" descr="relaciones-uml-paso3.png"/>
+          <p:cNvPicPr>
+            <a:picLocks noChangeAspect="1"/>
+          </p:cNvPicPr>
+          <p:nvPr/>
+        </p:nvPicPr>
+        <p:blipFill>
+          <a:blip r:embed="rId4"/>
+          <a:stretch>
+            <a:fillRect/>
+          </a:stretch>
+        </p:blipFill>
+        <p:spPr>
+          <a:xfrm>
+            <a:off x="5876318" y="1261872"/>
+            <a:ext cx="5852160" cy="4681728"/>
+          </a:xfrm>
+          <a:prstGeom prst="rect">
+            <a:avLst/>
+          </a:prstGeom>
+        </p:spPr>
+      </p:pic>
+      <p:pic>
+        <p:nvPicPr>
+          <p:cNvPr id="9" name="Picture 8" descr="relaciones-uml-paso4.png"/>
+          <p:cNvPicPr>
+            <a:picLocks noChangeAspect="1"/>
+          </p:cNvPicPr>
+          <p:nvPr/>
+        </p:nvPicPr>
+        <p:blipFill>
+          <a:blip r:embed="rId5"/>
+          <a:stretch>
+            <a:fillRect/>
+          </a:stretch>
+        </p:blipFill>
+        <p:spPr>
+          <a:xfrm>
+            <a:off x="5876318" y="1261872"/>
+            <a:ext cx="5852160" cy="4681728"/>
+          </a:xfrm>
+          <a:prstGeom prst="rect">
+            <a:avLst/>
+          </a:prstGeom>
+        </p:spPr>
+      </p:pic>
+      <p:sp>
+        <p:nvSpPr>
+          <p:cNvPr id="18" name="TextBox 17"/>
           <p:cNvSpPr txBox="1"/>
           <p:nvPr/>
         </p:nvSpPr>
         <p:spPr>
           <a:xfrm>
-            <a:off x="457200" y="1170432"/>
-            <a:ext cx="11277295" cy="5230368"/>
+            <a:off x="5870301" y="5961888"/>
+            <a:ext cx="5864193" cy="320040"/>
+          </a:xfrm>
+          <a:prstGeom prst="rect">
+            <a:avLst/>
+          </a:prstGeom>
+          <a:noFill/>
+        </p:spPr>
+        <p:txBody>
+          <a:bodyPr wrap="square">
+            <a:spAutoFit/>
+          </a:bodyPr>
+          <a:lstStyle/>
+          <a:p>
+            <a:pPr algn="ctr"/>
+            <a:r>
+              <a:rPr sz="1100" b="0" i="1">
+                <a:solidFill>
+                  <a:srgbClr val="666666"/>
+                </a:solidFill>
+                <a:latin typeface="Calibri"/>
+              </a:rPr>
+              <a:t>Clic para avanzar la animación</a:t>
+            </a:r>
+          </a:p>
+        </p:txBody>
+      </p:sp>
+      <p:sp>
+        <p:nvSpPr>
+          <p:cNvPr id="19" name="TextBox 18"/>
+          <p:cNvSpPr txBox="1"/>
+          <p:nvPr/>
+        </p:nvSpPr>
+        <p:spPr>
+          <a:xfrm>
+            <a:off x="457200" y="1353312"/>
+            <a:ext cx="5093061" cy="5047488"/>
           </a:xfrm>
           <a:prstGeom prst="rect">
             <a:avLst/>
@@ -4232,7 +4749,7 @@
                 </a:solidFill>
                 <a:latin typeface="Calibri"/>
               </a:rPr>
-              <a:t>–   La composicion (rombo relleno) se usa cuando la parte no vive sin el todo: en la clinica las Atenciones de una Mascota son parte de su historia clinica y no tienen sentido si se elimina la ficha de la mascota.</a:t>
+              <a:t>–   Asociación: línea con un nombre que se lee como frase y una multiplicidad en cada extremo.</a:t>
             </a:r>
           </a:p>
           <a:p>
@@ -4248,7 +4765,7 @@
                 </a:solidFill>
                 <a:latin typeface="Calibri"/>
               </a:rPr>
-              <a:t>–   La agregacion (rombo vacio) se usa cuando la parte sobrevive por su cuenta, como un Veterinario que pertenece a una Sede pero sigue existiendo si la sede cierra.</a:t>
+              <a:t>–   1 exactamente uno · 0..1 opcional · 1..* uno o más · 0..* cero o más.</a:t>
             </a:r>
           </a:p>
           <a:p>
@@ -4264,14 +4781,30 @@
                 </a:solidFill>
                 <a:latin typeface="Calibri"/>
               </a:rPr>
-              <a:t>–   La herencia (triangulo) solo cuando hay un es-un verdadero, por ejemplo Persona con Dueno y Veterinario como especializaciones, decision que solo vale la pena si comparten varios atributos.</a:t>
-            </a:r>
-          </a:p>
-        </p:txBody>
-      </p:sp>
-      <p:sp>
-        <p:nvSpPr>
-          <p:cNvPr id="6" name="TextBox 5"/>
+              <a:t>–   Dueño 1 — 0..* Mascota: el 1 es una decisión de negocio que se confirma con el cliente.</a:t>
+            </a:r>
+          </a:p>
+          <a:p>
+            <a:pPr>
+              <a:spcAft>
+                <a:spcPts val="800"/>
+              </a:spcAft>
+            </a:pPr>
+            <a:r>
+              <a:rPr sz="2000" b="0" i="0">
+                <a:solidFill>
+                  <a:srgbClr val="333333"/>
+                </a:solidFill>
+                <a:latin typeface="Calibri"/>
+              </a:rPr>
+              <a:t>–   Composición (rombo relleno), agregación (rombo vacío) y herencia (triángulo), solo si hay un es-un.</a:t>
+            </a:r>
+          </a:p>
+        </p:txBody>
+      </p:sp>
+      <p:sp>
+        <p:nvSpPr>
+          <p:cNvPr id="20" name="TextBox 19"/>
           <p:cNvSpPr txBox="1"/>
           <p:nvPr/>
         </p:nvSpPr>
@@ -4309,6 +4842,195 @@
   <p:clrMapOvr>
     <a:masterClrMapping/>
   </p:clrMapOvr>
+  <p:timing>
+    <p:tnLst>
+      <p:par>
+        <p:cTn id="1" dur="indefinite" restart="never" nodeType="tmRoot">
+          <p:childTnLst>
+            <p:seq concurrent="1" nextAc="seek">
+              <p:cTn id="2" dur="indefinite" nodeType="mainSeq">
+                <p:childTnLst>
+                  <p:par>
+                    <p:cTn id="3" fill="hold">
+                      <p:stCondLst>
+                        <p:cond delay="indefinite"/>
+                      </p:stCondLst>
+                      <p:childTnLst>
+                        <p:par>
+                          <p:cTn id="4" fill="hold">
+                            <p:stCondLst>
+                              <p:cond delay="0"/>
+                            </p:stCondLst>
+                            <p:childTnLst>
+                              <p:par>
+                                <p:cTn id="5" presetID="10" presetClass="entr" presetSubtype="0" fill="hold" nodeType="clickEffect">
+                                  <p:stCondLst>
+                                    <p:cond delay="0"/>
+                                  </p:stCondLst>
+                                  <p:childTnLst>
+                                    <p:set>
+                                      <p:cBhvr>
+                                        <p:cTn id="6" dur="1" fill="hold">
+                                          <p:stCondLst>
+                                            <p:cond delay="0"/>
+                                          </p:stCondLst>
+                                        </p:cTn>
+                                        <p:tgtEl>
+                                          <p:spTgt spid="7"/>
+                                        </p:tgtEl>
+                                        <p:attrNameLst>
+                                          <p:attrName>style.visibility</p:attrName>
+                                        </p:attrNameLst>
+                                      </p:cBhvr>
+                                      <p:to>
+                                        <p:strVal val="visible"/>
+                                      </p:to>
+                                    </p:set>
+                                    <p:animEffect transition="in" filter="fade">
+                                      <p:cBhvr>
+                                        <p:cTn id="7" dur="450"/>
+                                        <p:tgtEl>
+                                          <p:spTgt spid="7"/>
+                                        </p:tgtEl>
+                                      </p:cBhvr>
+                                    </p:animEffect>
+                                  </p:childTnLst>
+                                </p:cTn>
+                              </p:par>
+                            </p:childTnLst>
+                          </p:cTn>
+                        </p:par>
+                      </p:childTnLst>
+                    </p:cTn>
+                  </p:par>
+                  <p:par>
+                    <p:cTn id="8" fill="hold">
+                      <p:stCondLst>
+                        <p:cond delay="indefinite"/>
+                      </p:stCondLst>
+                      <p:childTnLst>
+                        <p:par>
+                          <p:cTn id="9" fill="hold">
+                            <p:stCondLst>
+                              <p:cond delay="0"/>
+                            </p:stCondLst>
+                            <p:childTnLst>
+                              <p:par>
+                                <p:cTn id="10" presetID="10" presetClass="entr" presetSubtype="0" fill="hold" nodeType="clickEffect">
+                                  <p:stCondLst>
+                                    <p:cond delay="0"/>
+                                  </p:stCondLst>
+                                  <p:childTnLst>
+                                    <p:set>
+                                      <p:cBhvr>
+                                        <p:cTn id="11" dur="1" fill="hold">
+                                          <p:stCondLst>
+                                            <p:cond delay="0"/>
+                                          </p:stCondLst>
+                                        </p:cTn>
+                                        <p:tgtEl>
+                                          <p:spTgt spid="8"/>
+                                        </p:tgtEl>
+                                        <p:attrNameLst>
+                                          <p:attrName>style.visibility</p:attrName>
+                                        </p:attrNameLst>
+                                      </p:cBhvr>
+                                      <p:to>
+                                        <p:strVal val="visible"/>
+                                      </p:to>
+                                    </p:set>
+                                    <p:animEffect transition="in" filter="fade">
+                                      <p:cBhvr>
+                                        <p:cTn id="12" dur="450"/>
+                                        <p:tgtEl>
+                                          <p:spTgt spid="8"/>
+                                        </p:tgtEl>
+                                      </p:cBhvr>
+                                    </p:animEffect>
+                                  </p:childTnLst>
+                                </p:cTn>
+                              </p:par>
+                            </p:childTnLst>
+                          </p:cTn>
+                        </p:par>
+                      </p:childTnLst>
+                    </p:cTn>
+                  </p:par>
+                  <p:par>
+                    <p:cTn id="13" fill="hold">
+                      <p:stCondLst>
+                        <p:cond delay="indefinite"/>
+                      </p:stCondLst>
+                      <p:childTnLst>
+                        <p:par>
+                          <p:cTn id="14" fill="hold">
+                            <p:stCondLst>
+                              <p:cond delay="0"/>
+                            </p:stCondLst>
+                            <p:childTnLst>
+                              <p:par>
+                                <p:cTn id="15" presetID="10" presetClass="entr" presetSubtype="0" fill="hold" nodeType="clickEffect">
+                                  <p:stCondLst>
+                                    <p:cond delay="0"/>
+                                  </p:stCondLst>
+                                  <p:childTnLst>
+                                    <p:set>
+                                      <p:cBhvr>
+                                        <p:cTn id="16" dur="1" fill="hold">
+                                          <p:stCondLst>
+                                            <p:cond delay="0"/>
+                                          </p:stCondLst>
+                                        </p:cTn>
+                                        <p:tgtEl>
+                                          <p:spTgt spid="9"/>
+                                        </p:tgtEl>
+                                        <p:attrNameLst>
+                                          <p:attrName>style.visibility</p:attrName>
+                                        </p:attrNameLst>
+                                      </p:cBhvr>
+                                      <p:to>
+                                        <p:strVal val="visible"/>
+                                      </p:to>
+                                    </p:set>
+                                    <p:animEffect transition="in" filter="fade">
+                                      <p:cBhvr>
+                                        <p:cTn id="17" dur="450"/>
+                                        <p:tgtEl>
+                                          <p:spTgt spid="9"/>
+                                        </p:tgtEl>
+                                      </p:cBhvr>
+                                    </p:animEffect>
+                                  </p:childTnLst>
+                                </p:cTn>
+                              </p:par>
+                            </p:childTnLst>
+                          </p:cTn>
+                        </p:par>
+                      </p:childTnLst>
+                    </p:cTn>
+                  </p:par>
+                </p:childTnLst>
+              </p:cTn>
+              <p:prevCondLst>
+                <p:cond evt="onPrev" delay="0">
+                  <p:tgtEl>
+                    <p:sldTgt/>
+                  </p:tgtEl>
+                </p:cond>
+              </p:prevCondLst>
+              <p:nextCondLst>
+                <p:cond evt="onNext" delay="0">
+                  <p:tgtEl>
+                    <p:sldTgt/>
+                  </p:tgtEl>
+                </p:cond>
+              </p:nextCondLst>
+            </p:seq>
+          </p:childTnLst>
+        </p:cTn>
+      </p:par>
+    </p:tnLst>
+  </p:timing>
 </p:sld>
 </file>
 
@@ -4445,21 +5167,173 @@
                 </a:solidFill>
                 <a:latin typeface="Calibri"/>
               </a:rPr>
-              <a:t>El diagrama que dibujamos hoy no se queda en la clase: es la pieza que...</a:t>
-            </a:r>
-          </a:p>
-        </p:txBody>
-      </p:sp>
-      <p:sp>
-        <p:nvSpPr>
-          <p:cNvPr id="5" name="TextBox 4"/>
+              <a:t>Del diagrama de clases a la base de datos</a:t>
+            </a:r>
+          </a:p>
+        </p:txBody>
+      </p:sp>
+      <p:sp>
+        <p:nvSpPr>
+          <p:cNvPr id="5" name="Rounded Rectangle 4"/>
+          <p:cNvSpPr/>
+          <p:nvPr/>
+        </p:nvSpPr>
+        <p:spPr>
+          <a:xfrm>
+            <a:off x="5803166" y="1188719"/>
+            <a:ext cx="5998464" cy="4828032"/>
+          </a:xfrm>
+          <a:prstGeom prst="roundRect">
+            <a:avLst>
+              <a:gd name="adj" fmla="val 4000"/>
+            </a:avLst>
+          </a:prstGeom>
+          <a:solidFill>
+            <a:srgbClr val="E8EEF4"/>
+          </a:solidFill>
+          <a:ln>
+            <a:noFill/>
+          </a:ln>
+        </p:spPr>
+        <p:style>
+          <a:lnRef idx="1">
+            <a:schemeClr val="accent1"/>
+          </a:lnRef>
+          <a:fillRef idx="3">
+            <a:schemeClr val="accent1"/>
+          </a:fillRef>
+          <a:effectRef idx="2">
+            <a:schemeClr val="accent1"/>
+          </a:effectRef>
+          <a:fontRef idx="minor">
+            <a:schemeClr val="lt1"/>
+          </a:fontRef>
+        </p:style>
+        <p:txBody>
+          <a:bodyPr rtlCol="0" anchor="ctr"/>
+          <a:lstStyle/>
+          <a:p>
+            <a:pPr algn="ctr"/>
+          </a:p>
+        </p:txBody>
+      </p:sp>
+      <p:pic>
+        <p:nvPicPr>
+          <p:cNvPr id="6" name="Picture 5" descr="clase-a-tabla-paso1.png"/>
+          <p:cNvPicPr>
+            <a:picLocks noChangeAspect="1"/>
+          </p:cNvPicPr>
+          <p:nvPr/>
+        </p:nvPicPr>
+        <p:blipFill>
+          <a:blip r:embed="rId2"/>
+          <a:stretch>
+            <a:fillRect/>
+          </a:stretch>
+        </p:blipFill>
+        <p:spPr>
+          <a:xfrm>
+            <a:off x="5876318" y="1261872"/>
+            <a:ext cx="5852160" cy="4681728"/>
+          </a:xfrm>
+          <a:prstGeom prst="rect">
+            <a:avLst/>
+          </a:prstGeom>
+        </p:spPr>
+      </p:pic>
+      <p:pic>
+        <p:nvPicPr>
+          <p:cNvPr id="7" name="Picture 6" descr="clase-a-tabla-paso2.png"/>
+          <p:cNvPicPr>
+            <a:picLocks noChangeAspect="1"/>
+          </p:cNvPicPr>
+          <p:nvPr/>
+        </p:nvPicPr>
+        <p:blipFill>
+          <a:blip r:embed="rId3"/>
+          <a:stretch>
+            <a:fillRect/>
+          </a:stretch>
+        </p:blipFill>
+        <p:spPr>
+          <a:xfrm>
+            <a:off x="5876318" y="1261872"/>
+            <a:ext cx="5852160" cy="4681728"/>
+          </a:xfrm>
+          <a:prstGeom prst="rect">
+            <a:avLst/>
+          </a:prstGeom>
+        </p:spPr>
+      </p:pic>
+      <p:pic>
+        <p:nvPicPr>
+          <p:cNvPr id="8" name="Picture 7" descr="clase-a-tabla-paso3.png"/>
+          <p:cNvPicPr>
+            <a:picLocks noChangeAspect="1"/>
+          </p:cNvPicPr>
+          <p:nvPr/>
+        </p:nvPicPr>
+        <p:blipFill>
+          <a:blip r:embed="rId4"/>
+          <a:stretch>
+            <a:fillRect/>
+          </a:stretch>
+        </p:blipFill>
+        <p:spPr>
+          <a:xfrm>
+            <a:off x="5876318" y="1261872"/>
+            <a:ext cx="5852160" cy="4681728"/>
+          </a:xfrm>
+          <a:prstGeom prst="rect">
+            <a:avLst/>
+          </a:prstGeom>
+        </p:spPr>
+      </p:pic>
+      <p:sp>
+        <p:nvSpPr>
+          <p:cNvPr id="13" name="TextBox 12"/>
           <p:cNvSpPr txBox="1"/>
           <p:nvPr/>
         </p:nvSpPr>
         <p:spPr>
           <a:xfrm>
-            <a:off x="457200" y="1170432"/>
-            <a:ext cx="11277295" cy="5230368"/>
+            <a:off x="5870301" y="5961888"/>
+            <a:ext cx="5864193" cy="320040"/>
+          </a:xfrm>
+          <a:prstGeom prst="rect">
+            <a:avLst/>
+          </a:prstGeom>
+          <a:noFill/>
+        </p:spPr>
+        <p:txBody>
+          <a:bodyPr wrap="square">
+            <a:spAutoFit/>
+          </a:bodyPr>
+          <a:lstStyle/>
+          <a:p>
+            <a:pPr algn="ctr"/>
+            <a:r>
+              <a:rPr sz="1100" b="0" i="1">
+                <a:solidFill>
+                  <a:srgbClr val="666666"/>
+                </a:solidFill>
+                <a:latin typeface="Calibri"/>
+              </a:rPr>
+              <a:t>Clic para avanzar la animación</a:t>
+            </a:r>
+          </a:p>
+        </p:txBody>
+      </p:sp>
+      <p:sp>
+        <p:nvSpPr>
+          <p:cNvPr id="14" name="TextBox 13"/>
+          <p:cNvSpPr txBox="1"/>
+          <p:nvPr/>
+        </p:nvSpPr>
+        <p:spPr>
+          <a:xfrm>
+            <a:off x="457200" y="1353312"/>
+            <a:ext cx="5093061" cy="5047488"/>
           </a:xfrm>
           <a:prstGeom prst="rect">
             <a:avLst/>
@@ -4484,7 +5358,7 @@
                 </a:solidFill>
                 <a:latin typeface="Calibri"/>
               </a:rPr>
-              <a:t>–   El diagrama que dibujamos hoy no se queda en la clase: es la pieza que viaja mas lejos del proyecto.</a:t>
+              <a:t>–   De cada clase salen los campos del diccionario de datos y después las tablas.</a:t>
             </a:r>
           </a:p>
           <a:p>
@@ -4500,7 +5374,7 @@
                 </a:solidFill>
                 <a:latin typeface="Calibri"/>
               </a:rPr>
-              <a:t>–   De cada clase salen los campos del diccionario de datos y, mas adelante, las tablas de la base de datos: la clase Mascota con sus atributos se convierte en la tabla mascota, la asociacion 1 a 0..* se convierte en una llave foranea</a:t>
+              <a:t>–   La clase Mascota → la tabla mascota; la asociación 1 a 0..* → una llave foránea.</a:t>
             </a:r>
           </a:p>
           <a:p>
@@ -4516,7 +5390,7 @@
                 </a:solidFill>
                 <a:latin typeface="Calibri"/>
               </a:rPr>
-              <a:t>–   Y las multiplicidades muchos a muchos se convierten en una tabla intermedia.</a:t>
+              <a:t>–   Muchos a muchos → una tabla intermedia.</a:t>
             </a:r>
           </a:p>
           <a:p>
@@ -4532,30 +5406,14 @@
                 </a:solidFill>
                 <a:latin typeface="Calibri"/>
               </a:rPr>
-              <a:t>–   Para quien cursa tambien Programacion II, este diagrama es el mapa que le dice que clases crear y que atributos poner; para quien solo cursa Programacion II, es lo que recibe ya hecho y debe respetar</a:t>
-            </a:r>
-          </a:p>
-          <a:p>
-            <a:pPr>
-              <a:spcAft>
-                <a:spcPts val="800"/>
-              </a:spcAft>
-            </a:pPr>
-            <a:r>
-              <a:rPr sz="2000" b="0" i="0">
-                <a:solidFill>
-                  <a:srgbClr val="333333"/>
-                </a:solidFill>
-                <a:latin typeface="Calibri"/>
-              </a:rPr>
-              <a:t>–   Y para quien solo cursa Seminario, es el corazon del documento de diseno que se entrega al final junto con el prototipo navegable, una ruta completa y perfectamente valida donde el producto profesional es el plano, no el ladrillo.</a:t>
-            </a:r>
-          </a:p>
-        </p:txBody>
-      </p:sp>
-      <p:sp>
-        <p:nvSpPr>
-          <p:cNvPr id="6" name="TextBox 5"/>
+              <a:t>–   Por eso va limpio: nombres en singular, sin atributos repetidos, sin cajas sin requisito.</a:t>
+            </a:r>
+          </a:p>
+        </p:txBody>
+      </p:sp>
+      <p:sp>
+        <p:nvSpPr>
+          <p:cNvPr id="15" name="TextBox 14"/>
           <p:cNvSpPr txBox="1"/>
           <p:nvPr/>
         </p:nvSpPr>
@@ -4593,6 +5451,142 @@
   <p:clrMapOvr>
     <a:masterClrMapping/>
   </p:clrMapOvr>
+  <p:timing>
+    <p:tnLst>
+      <p:par>
+        <p:cTn id="1" dur="indefinite" restart="never" nodeType="tmRoot">
+          <p:childTnLst>
+            <p:seq concurrent="1" nextAc="seek">
+              <p:cTn id="2" dur="indefinite" nodeType="mainSeq">
+                <p:childTnLst>
+                  <p:par>
+                    <p:cTn id="3" fill="hold">
+                      <p:stCondLst>
+                        <p:cond delay="indefinite"/>
+                      </p:stCondLst>
+                      <p:childTnLst>
+                        <p:par>
+                          <p:cTn id="4" fill="hold">
+                            <p:stCondLst>
+                              <p:cond delay="0"/>
+                            </p:stCondLst>
+                            <p:childTnLst>
+                              <p:par>
+                                <p:cTn id="5" presetID="10" presetClass="entr" presetSubtype="0" fill="hold" nodeType="clickEffect">
+                                  <p:stCondLst>
+                                    <p:cond delay="0"/>
+                                  </p:stCondLst>
+                                  <p:childTnLst>
+                                    <p:set>
+                                      <p:cBhvr>
+                                        <p:cTn id="6" dur="1" fill="hold">
+                                          <p:stCondLst>
+                                            <p:cond delay="0"/>
+                                          </p:stCondLst>
+                                        </p:cTn>
+                                        <p:tgtEl>
+                                          <p:spTgt spid="7"/>
+                                        </p:tgtEl>
+                                        <p:attrNameLst>
+                                          <p:attrName>style.visibility</p:attrName>
+                                        </p:attrNameLst>
+                                      </p:cBhvr>
+                                      <p:to>
+                                        <p:strVal val="visible"/>
+                                      </p:to>
+                                    </p:set>
+                                    <p:animEffect transition="in" filter="fade">
+                                      <p:cBhvr>
+                                        <p:cTn id="7" dur="450"/>
+                                        <p:tgtEl>
+                                          <p:spTgt spid="7"/>
+                                        </p:tgtEl>
+                                      </p:cBhvr>
+                                    </p:animEffect>
+                                  </p:childTnLst>
+                                </p:cTn>
+                              </p:par>
+                            </p:childTnLst>
+                          </p:cTn>
+                        </p:par>
+                      </p:childTnLst>
+                    </p:cTn>
+                  </p:par>
+                  <p:par>
+                    <p:cTn id="8" fill="hold">
+                      <p:stCondLst>
+                        <p:cond delay="indefinite"/>
+                      </p:stCondLst>
+                      <p:childTnLst>
+                        <p:par>
+                          <p:cTn id="9" fill="hold">
+                            <p:stCondLst>
+                              <p:cond delay="0"/>
+                            </p:stCondLst>
+                            <p:childTnLst>
+                              <p:par>
+                                <p:cTn id="10" presetID="10" presetClass="entr" presetSubtype="0" fill="hold" nodeType="clickEffect">
+                                  <p:stCondLst>
+                                    <p:cond delay="0"/>
+                                  </p:stCondLst>
+                                  <p:childTnLst>
+                                    <p:set>
+                                      <p:cBhvr>
+                                        <p:cTn id="11" dur="1" fill="hold">
+                                          <p:stCondLst>
+                                            <p:cond delay="0"/>
+                                          </p:stCondLst>
+                                        </p:cTn>
+                                        <p:tgtEl>
+                                          <p:spTgt spid="8"/>
+                                        </p:tgtEl>
+                                        <p:attrNameLst>
+                                          <p:attrName>style.visibility</p:attrName>
+                                        </p:attrNameLst>
+                                      </p:cBhvr>
+                                      <p:to>
+                                        <p:strVal val="visible"/>
+                                      </p:to>
+                                    </p:set>
+                                    <p:animEffect transition="in" filter="fade">
+                                      <p:cBhvr>
+                                        <p:cTn id="12" dur="450"/>
+                                        <p:tgtEl>
+                                          <p:spTgt spid="8"/>
+                                        </p:tgtEl>
+                                      </p:cBhvr>
+                                    </p:animEffect>
+                                  </p:childTnLst>
+                                </p:cTn>
+                              </p:par>
+                            </p:childTnLst>
+                          </p:cTn>
+                        </p:par>
+                      </p:childTnLst>
+                    </p:cTn>
+                  </p:par>
+                </p:childTnLst>
+              </p:cTn>
+              <p:prevCondLst>
+                <p:cond evt="onPrev" delay="0">
+                  <p:tgtEl>
+                    <p:sldTgt/>
+                  </p:tgtEl>
+                </p:cond>
+              </p:prevCondLst>
+              <p:nextCondLst>
+                <p:cond evt="onNext" delay="0">
+                  <p:tgtEl>
+                    <p:sldTgt/>
+                  </p:tgtEl>
+                </p:cond>
+              </p:nextCondLst>
+            </p:seq>
+          </p:childTnLst>
+        </p:cTn>
+      </p:par>
+    </p:tnLst>
+  </p:timing>
 </p:sld>
 </file>
 
@@ -4729,7 +5723,7 @@
                 </a:solidFill>
                 <a:latin typeface="Calibri"/>
               </a:rPr>
-              <a:t>El diagrama de clases en Mermaid: la sintaxis completa</a:t>
+              <a:t>Demo del dia</a:t>
             </a:r>
           </a:p>
         </p:txBody>
@@ -4742,16 +5736,16 @@
         </p:nvSpPr>
         <p:spPr>
           <a:xfrm>
-            <a:off x="457200" y="1261872"/>
-            <a:ext cx="11277295" cy="5093208"/>
+            <a:off x="5797149" y="1573813"/>
+            <a:ext cx="6010497" cy="4057845"/>
           </a:xfrm>
           <a:prstGeom prst="roundRect">
             <a:avLst>
-              <a:gd name="adj" fmla="val 12000"/>
+              <a:gd name="adj" fmla="val 4000"/>
             </a:avLst>
           </a:prstGeom>
           <a:solidFill>
-            <a:srgbClr val="1E2A38"/>
+            <a:srgbClr val="E8EEF4"/>
           </a:solidFill>
           <a:ln>
             <a:noFill/>
@@ -4779,49 +5773,30 @@
           </a:p>
         </p:txBody>
       </p:sp>
-      <p:sp>
-        <p:nvSpPr>
-          <p:cNvPr id="6" name="Rectangle 5"/>
-          <p:cNvSpPr/>
+      <p:pic>
+        <p:nvPicPr>
+          <p:cNvPr id="6" name="Picture 5" descr="laptop-code-live-demo.jpg"/>
+          <p:cNvPicPr>
+            <a:picLocks noChangeAspect="1"/>
+          </p:cNvPicPr>
           <p:nvPr/>
-        </p:nvSpPr>
-        <p:spPr>
-          <a:xfrm>
-            <a:off x="457200" y="1261872"/>
-            <a:ext cx="11277295" cy="320040"/>
+        </p:nvPicPr>
+        <p:blipFill>
+          <a:blip r:embed="rId2"/>
+          <a:stretch>
+            <a:fillRect/>
+          </a:stretch>
+        </p:blipFill>
+        <p:spPr>
+          <a:xfrm>
+            <a:off x="5870301" y="1646965"/>
+            <a:ext cx="5864193" cy="3911541"/>
           </a:xfrm>
           <a:prstGeom prst="rect">
             <a:avLst/>
           </a:prstGeom>
-          <a:solidFill>
-            <a:srgbClr val="095292"/>
-          </a:solidFill>
-          <a:ln>
-            <a:noFill/>
-          </a:ln>
-        </p:spPr>
-        <p:style>
-          <a:lnRef idx="1">
-            <a:schemeClr val="accent1"/>
-          </a:lnRef>
-          <a:fillRef idx="3">
-            <a:schemeClr val="accent1"/>
-          </a:fillRef>
-          <a:effectRef idx="2">
-            <a:schemeClr val="accent1"/>
-          </a:effectRef>
-          <a:fontRef idx="minor">
-            <a:schemeClr val="lt1"/>
-          </a:fontRef>
-        </p:style>
-        <p:txBody>
-          <a:bodyPr rtlCol="0" anchor="ctr"/>
-          <a:lstStyle/>
-          <a:p>
-            <a:pPr algn="ctr"/>
-          </a:p>
-        </p:txBody>
-      </p:sp>
+        </p:spPr>
+      </p:pic>
       <p:sp>
         <p:nvSpPr>
           <p:cNvPr id="7" name="TextBox 6"/>
@@ -4830,8 +5805,8 @@
         </p:nvSpPr>
         <p:spPr>
           <a:xfrm>
-            <a:off x="685800" y="1307592"/>
-            <a:ext cx="10820095" cy="256032"/>
+            <a:off x="5870301" y="5961888"/>
+            <a:ext cx="5864193" cy="320040"/>
           </a:xfrm>
           <a:prstGeom prst="rect">
             <a:avLst/>
@@ -4839,17 +5814,20 @@
           <a:noFill/>
         </p:spPr>
         <p:txBody>
-          <a:bodyPr wrap="square" anchor="ctr"/>
-          <a:lstStyle/>
-          <a:p>
-            <a:r>
-              <a:rPr sz="1000" b="1" i="0">
-                <a:solidFill>
-                  <a:srgbClr val="269CCB"/>
+          <a:bodyPr wrap="square">
+            <a:spAutoFit/>
+          </a:bodyPr>
+          <a:lstStyle/>
+          <a:p>
+            <a:pPr algn="ctr"/>
+            <a:r>
+              <a:rPr sz="1100" b="0" i="1">
+                <a:solidFill>
+                  <a:srgbClr val="666666"/>
                 </a:solidFill>
                 <a:latin typeface="Calibri"/>
               </a:rPr>
-              <a:t>● ● ●</a:t>
+              <a:t>Foto: olia danilevich · Pexels</a:t>
             </a:r>
           </a:p>
         </p:txBody>
@@ -4862,8 +5840,8 @@
         </p:nvSpPr>
         <p:spPr>
           <a:xfrm>
-            <a:off x="777240" y="1719072"/>
-            <a:ext cx="10637215" cy="4453128"/>
+            <a:off x="457200" y="1353312"/>
+            <a:ext cx="5093061" cy="5047488"/>
           </a:xfrm>
           <a:prstGeom prst="rect">
             <a:avLst/>
@@ -4878,305 +5856,85 @@
           <a:p>
             <a:pPr>
               <a:spcAft>
-                <a:spcPts val="314"/>
+                <a:spcPts val="800"/>
               </a:spcAft>
             </a:pPr>
             <a:r>
-              <a:rPr sz="1100" b="0" i="0">
-                <a:solidFill>
-                  <a:srgbClr val="FFFFFF"/>
+              <a:rPr sz="2000" b="0" i="0">
+                <a:solidFill>
+                  <a:srgbClr val="333333"/>
                 </a:solidFill>
                 <a:latin typeface="Calibri"/>
               </a:rPr>
-              <a:t>classDiagram</a:t>
+              <a:t>–   </a:t>
+            </a:r>
+            <a:r>
+              <a:rPr sz="2000" b="1" i="0">
+                <a:solidFill>
+                  <a:srgbClr val="333333"/>
+                </a:solidFill>
+                <a:latin typeface="Calibri"/>
+              </a:rPr>
+              <a:t>Herramienta:</a:t>
+            </a:r>
+            <a:r>
+              <a:rPr sz="2000" b="0" i="0">
+                <a:solidFill>
+                  <a:srgbClr val="333333"/>
+                </a:solidFill>
+                <a:latin typeface="Calibri"/>
+              </a:rPr>
+              <a:t> draw.io · Mermaid</a:t>
             </a:r>
           </a:p>
           <a:p>
             <a:pPr>
               <a:spcAft>
-                <a:spcPts val="314"/>
+                <a:spcPts val="800"/>
               </a:spcAft>
             </a:pPr>
             <a:r>
-              <a:rPr sz="1100" b="0" i="0">
-                <a:solidFill>
-                  <a:srgbClr val="FFFFFF"/>
+              <a:rPr sz="2000" b="0" i="0">
+                <a:solidFill>
+                  <a:srgbClr val="333333"/>
                 </a:solidFill>
                 <a:latin typeface="Calibri"/>
               </a:rPr>
-              <a:t>  class Dueno {</a:t>
+              <a:t>–   </a:t>
+            </a:r>
+            <a:r>
+              <a:rPr sz="2000" b="1" i="0">
+                <a:solidFill>
+                  <a:srgbClr val="333333"/>
+                </a:solidFill>
+                <a:latin typeface="Calibri"/>
+              </a:rPr>
+              <a:t>Demo:</a:t>
+            </a:r>
+            <a:r>
+              <a:rPr sz="2000" b="0" i="0">
+                <a:solidFill>
+                  <a:srgbClr val="333333"/>
+                </a:solidFill>
+                <a:latin typeface="Calibri"/>
+              </a:rPr>
+              <a:t> Se dibuja en vivo Dueno, Mascota y Cita en draw.io y borra tres atributos mal ubicados explicando a que clase pertenecen de verdad.</a:t>
             </a:r>
           </a:p>
           <a:p>
             <a:pPr>
               <a:spcAft>
-                <a:spcPts val="314"/>
+                <a:spcPts val="800"/>
               </a:spcAft>
             </a:pPr>
             <a:r>
-              <a:rPr sz="1100" b="0" i="0">
-                <a:solidFill>
-                  <a:srgbClr val="FFFFFF"/>
+              <a:rPr sz="2000" b="0" i="0">
+                <a:solidFill>
+                  <a:srgbClr val="333333"/>
                 </a:solidFill>
                 <a:latin typeface="Calibri"/>
               </a:rPr>
-              <a:t>    -int idDueno</a:t>
-            </a:r>
-          </a:p>
-          <a:p>
-            <a:pPr>
-              <a:spcAft>
-                <a:spcPts val="314"/>
-              </a:spcAft>
-            </a:pPr>
-            <a:r>
-              <a:rPr sz="1100" b="0" i="0">
-                <a:solidFill>
-                  <a:srgbClr val="FFFFFF"/>
-                </a:solidFill>
-                <a:latin typeface="Calibri"/>
-              </a:rPr>
-              <a:t>    -String nombre</a:t>
-            </a:r>
-          </a:p>
-          <a:p>
-            <a:pPr>
-              <a:spcAft>
-                <a:spcPts val="314"/>
-              </a:spcAft>
-            </a:pPr>
-            <a:r>
-              <a:rPr sz="1100" b="0" i="0">
-                <a:solidFill>
-                  <a:srgbClr val="FFFFFF"/>
-                </a:solidFill>
-                <a:latin typeface="Calibri"/>
-              </a:rPr>
-              <a:t>    -String telefono</a:t>
-            </a:r>
-          </a:p>
-          <a:p>
-            <a:pPr>
-              <a:spcAft>
-                <a:spcPts val="314"/>
-              </a:spcAft>
-            </a:pPr>
-            <a:r>
-              <a:rPr sz="1100" b="0" i="0">
-                <a:solidFill>
-                  <a:srgbClr val="FFFFFF"/>
-                </a:solidFill>
-                <a:latin typeface="Calibri"/>
-              </a:rPr>
-              <a:t>    +registrar()</a:t>
-            </a:r>
-          </a:p>
-          <a:p>
-            <a:pPr>
-              <a:spcAft>
-                <a:spcPts val="314"/>
-              </a:spcAft>
-            </a:pPr>
-            <a:r>
-              <a:rPr sz="1100" b="0" i="0">
-                <a:solidFill>
-                  <a:srgbClr val="FFFFFF"/>
-                </a:solidFill>
-                <a:latin typeface="Calibri"/>
-              </a:rPr>
-              <a:t>  }</a:t>
-            </a:r>
-          </a:p>
-          <a:p>
-            <a:pPr>
-              <a:spcAft>
-                <a:spcPts val="314"/>
-              </a:spcAft>
-            </a:pPr>
-            <a:r>
-              <a:rPr sz="1100" b="0" i="0">
-                <a:solidFill>
-                  <a:srgbClr val="FFFFFF"/>
-                </a:solidFill>
-                <a:latin typeface="Calibri"/>
-              </a:rPr>
-              <a:t>  class Mascota {</a:t>
-            </a:r>
-          </a:p>
-          <a:p>
-            <a:pPr>
-              <a:spcAft>
-                <a:spcPts val="314"/>
-              </a:spcAft>
-            </a:pPr>
-            <a:r>
-              <a:rPr sz="1100" b="0" i="0">
-                <a:solidFill>
-                  <a:srgbClr val="FFFFFF"/>
-                </a:solidFill>
-                <a:latin typeface="Calibri"/>
-              </a:rPr>
-              <a:t>    -int idMascota</a:t>
-            </a:r>
-          </a:p>
-          <a:p>
-            <a:pPr>
-              <a:spcAft>
-                <a:spcPts val="314"/>
-              </a:spcAft>
-            </a:pPr>
-            <a:r>
-              <a:rPr sz="1100" b="0" i="0">
-                <a:solidFill>
-                  <a:srgbClr val="FFFFFF"/>
-                </a:solidFill>
-                <a:latin typeface="Calibri"/>
-              </a:rPr>
-              <a:t>    -String nombre</a:t>
-            </a:r>
-          </a:p>
-          <a:p>
-            <a:pPr>
-              <a:spcAft>
-                <a:spcPts val="314"/>
-              </a:spcAft>
-            </a:pPr>
-            <a:r>
-              <a:rPr sz="1100" b="0" i="0">
-                <a:solidFill>
-                  <a:srgbClr val="FFFFFF"/>
-                </a:solidFill>
-                <a:latin typeface="Calibri"/>
-              </a:rPr>
-              <a:t>    -String especie</a:t>
-            </a:r>
-          </a:p>
-          <a:p>
-            <a:pPr>
-              <a:spcAft>
-                <a:spcPts val="314"/>
-              </a:spcAft>
-            </a:pPr>
-            <a:r>
-              <a:rPr sz="1100" b="0" i="0">
-                <a:solidFill>
-                  <a:srgbClr val="FFFFFF"/>
-                </a:solidFill>
-                <a:latin typeface="Calibri"/>
-              </a:rPr>
-              <a:t>    -char activa</a:t>
-            </a:r>
-          </a:p>
-          <a:p>
-            <a:pPr>
-              <a:spcAft>
-                <a:spcPts val="314"/>
-              </a:spcAft>
-            </a:pPr>
-            <a:r>
-              <a:rPr sz="1100" b="0" i="0">
-                <a:solidFill>
-                  <a:srgbClr val="FFFFFF"/>
-                </a:solidFill>
-                <a:latin typeface="Calibri"/>
-              </a:rPr>
-              <a:t>    +abrirExpediente()</a:t>
-            </a:r>
-          </a:p>
-          <a:p>
-            <a:pPr>
-              <a:spcAft>
-                <a:spcPts val="314"/>
-              </a:spcAft>
-            </a:pPr>
-            <a:r>
-              <a:rPr sz="1100" b="0" i="0">
-                <a:solidFill>
-                  <a:srgbClr val="FFFFFF"/>
-                </a:solidFill>
-                <a:latin typeface="Calibri"/>
-              </a:rPr>
-              <a:t>  }</a:t>
-            </a:r>
-          </a:p>
-          <a:p>
-            <a:pPr>
-              <a:spcAft>
-                <a:spcPts val="314"/>
-              </a:spcAft>
-            </a:pPr>
-            <a:r>
-              <a:rPr sz="1100" b="0" i="0">
-                <a:solidFill>
-                  <a:srgbClr val="FFFFFF"/>
-                </a:solidFill>
-                <a:latin typeface="Calibri"/>
-              </a:rPr>
-              <a:t/>
-            </a:r>
-          </a:p>
-          <a:p>
-            <a:pPr>
-              <a:spcAft>
-                <a:spcPts val="314"/>
-              </a:spcAft>
-            </a:pPr>
-            <a:r>
-              <a:rPr sz="1100" b="0" i="0">
-                <a:solidFill>
-                  <a:srgbClr val="FFFFFF"/>
-                </a:solidFill>
-                <a:latin typeface="Calibri"/>
-              </a:rPr>
-              <a:t>  Dueno "1" --&gt; "0..*" Mascota: posee</a:t>
-            </a:r>
-          </a:p>
-          <a:p>
-            <a:pPr>
-              <a:spcAft>
-                <a:spcPts val="314"/>
-              </a:spcAft>
-            </a:pPr>
-            <a:r>
-              <a:rPr sz="1100" b="0" i="0">
-                <a:solidFill>
-                  <a:srgbClr val="FFFFFF"/>
-                </a:solidFill>
-                <a:latin typeface="Calibri"/>
-              </a:rPr>
-              <a:t/>
-            </a:r>
-          </a:p>
-          <a:p>
-            <a:pPr>
-              <a:spcAft>
-                <a:spcPts val="314"/>
-              </a:spcAft>
-            </a:pPr>
-            <a:r>
-              <a:rPr sz="1100" b="0" i="0">
-                <a:solidFill>
-                  <a:srgbClr val="FFFFFF"/>
-                </a:solidFill>
-                <a:latin typeface="Calibri"/>
-              </a:rPr>
-              <a:t>%% Complete con SUS clases. Lo que importa: visibilidad (- privado,</a:t>
-            </a:r>
-          </a:p>
-          <a:p>
-            <a:pPr>
-              <a:spcAft>
-                <a:spcPts val="314"/>
-              </a:spcAft>
-            </a:pPr>
-            <a:r>
-              <a:rPr sz="1100" b="0" i="0">
-                <a:solidFill>
-                  <a:srgbClr val="FFFFFF"/>
-                </a:solidFill>
-                <a:latin typeface="Calibri"/>
-              </a:rPr>
-              <a:t>%% + publico), TIPO de cada atributo, y multiplicidad en LOS DOS extremos.</a:t>
+              <a:t>–   Mismo dominio: la clinica veterinaria — no otro ejemplo. Aqui se diseña, no se programa.</a:t>
             </a:r>
           </a:p>
         </p:txBody>
@@ -5251,1656 +6009,6 @@
         <p:spPr>
           <a:xfrm>
             <a:off x="0" y="0"/>
-            <a:ext cx="12191695" cy="960120"/>
-          </a:xfrm>
-          <a:prstGeom prst="rect">
-            <a:avLst/>
-          </a:prstGeom>
-          <a:solidFill>
-            <a:srgbClr val="095292"/>
-          </a:solidFill>
-          <a:ln>
-            <a:noFill/>
-          </a:ln>
-        </p:spPr>
-        <p:style>
-          <a:lnRef idx="1">
-            <a:schemeClr val="accent1"/>
-          </a:lnRef>
-          <a:fillRef idx="3">
-            <a:schemeClr val="accent1"/>
-          </a:fillRef>
-          <a:effectRef idx="2">
-            <a:schemeClr val="accent1"/>
-          </a:effectRef>
-          <a:fontRef idx="minor">
-            <a:schemeClr val="lt1"/>
-          </a:fontRef>
-        </p:style>
-        <p:txBody>
-          <a:bodyPr rtlCol="0" anchor="ctr"/>
-          <a:lstStyle/>
-          <a:p>
-            <a:pPr algn="ctr"/>
-          </a:p>
-        </p:txBody>
-      </p:sp>
-      <p:sp>
-        <p:nvSpPr>
-          <p:cNvPr id="3" name="Rectangle 2"/>
-          <p:cNvSpPr/>
-          <p:nvPr/>
-        </p:nvSpPr>
-        <p:spPr>
-          <a:xfrm>
-            <a:off x="0" y="960120"/>
-            <a:ext cx="12191695" cy="41148"/>
-          </a:xfrm>
-          <a:prstGeom prst="rect">
-            <a:avLst/>
-          </a:prstGeom>
-          <a:solidFill>
-            <a:srgbClr val="FFD000"/>
-          </a:solidFill>
-          <a:ln>
-            <a:noFill/>
-          </a:ln>
-        </p:spPr>
-        <p:style>
-          <a:lnRef idx="1">
-            <a:schemeClr val="accent1"/>
-          </a:lnRef>
-          <a:fillRef idx="3">
-            <a:schemeClr val="accent1"/>
-          </a:fillRef>
-          <a:effectRef idx="2">
-            <a:schemeClr val="accent1"/>
-          </a:effectRef>
-          <a:fontRef idx="minor">
-            <a:schemeClr val="lt1"/>
-          </a:fontRef>
-        </p:style>
-        <p:txBody>
-          <a:bodyPr rtlCol="0" anchor="ctr"/>
-          <a:lstStyle/>
-          <a:p>
-            <a:pPr algn="ctr"/>
-          </a:p>
-        </p:txBody>
-      </p:sp>
-      <p:sp>
-        <p:nvSpPr>
-          <p:cNvPr id="4" name="TextBox 3"/>
-          <p:cNvSpPr txBox="1"/>
-          <p:nvPr/>
-        </p:nvSpPr>
-        <p:spPr>
-          <a:xfrm>
-            <a:off x="457200" y="164592"/>
-            <a:ext cx="11277295" cy="502920"/>
-          </a:xfrm>
-          <a:prstGeom prst="rect">
-            <a:avLst/>
-          </a:prstGeom>
-          <a:noFill/>
-        </p:spPr>
-        <p:txBody>
-          <a:bodyPr wrap="square">
-            <a:spAutoFit/>
-          </a:bodyPr>
-          <a:lstStyle/>
-          <a:p>
-            <a:r>
-              <a:rPr sz="2600" b="1" i="0">
-                <a:solidFill>
-                  <a:srgbClr val="FFFFFF"/>
-                </a:solidFill>
-                <a:latin typeface="Calibri"/>
-              </a:rPr>
-              <a:t>Lo que NO es una clase del dominio</a:t>
-            </a:r>
-          </a:p>
-        </p:txBody>
-      </p:sp>
-      <p:sp>
-        <p:nvSpPr>
-          <p:cNvPr id="5" name="Rounded Rectangle 4"/>
-          <p:cNvSpPr/>
-          <p:nvPr/>
-        </p:nvSpPr>
-        <p:spPr>
-          <a:xfrm>
-            <a:off x="457200" y="1261872"/>
-            <a:ext cx="11277295" cy="5093208"/>
-          </a:xfrm>
-          <a:prstGeom prst="roundRect">
-            <a:avLst>
-              <a:gd name="adj" fmla="val 12000"/>
-            </a:avLst>
-          </a:prstGeom>
-          <a:solidFill>
-            <a:srgbClr val="1E2A38"/>
-          </a:solidFill>
-          <a:ln>
-            <a:noFill/>
-          </a:ln>
-        </p:spPr>
-        <p:style>
-          <a:lnRef idx="1">
-            <a:schemeClr val="accent1"/>
-          </a:lnRef>
-          <a:fillRef idx="3">
-            <a:schemeClr val="accent1"/>
-          </a:fillRef>
-          <a:effectRef idx="2">
-            <a:schemeClr val="accent1"/>
-          </a:effectRef>
-          <a:fontRef idx="minor">
-            <a:schemeClr val="lt1"/>
-          </a:fontRef>
-        </p:style>
-        <p:txBody>
-          <a:bodyPr rtlCol="0" anchor="ctr"/>
-          <a:lstStyle/>
-          <a:p>
-            <a:pPr algn="ctr"/>
-          </a:p>
-        </p:txBody>
-      </p:sp>
-      <p:sp>
-        <p:nvSpPr>
-          <p:cNvPr id="6" name="Rectangle 5"/>
-          <p:cNvSpPr/>
-          <p:nvPr/>
-        </p:nvSpPr>
-        <p:spPr>
-          <a:xfrm>
-            <a:off x="457200" y="1261872"/>
-            <a:ext cx="11277295" cy="320040"/>
-          </a:xfrm>
-          <a:prstGeom prst="rect">
-            <a:avLst/>
-          </a:prstGeom>
-          <a:solidFill>
-            <a:srgbClr val="095292"/>
-          </a:solidFill>
-          <a:ln>
-            <a:noFill/>
-          </a:ln>
-        </p:spPr>
-        <p:style>
-          <a:lnRef idx="1">
-            <a:schemeClr val="accent1"/>
-          </a:lnRef>
-          <a:fillRef idx="3">
-            <a:schemeClr val="accent1"/>
-          </a:fillRef>
-          <a:effectRef idx="2">
-            <a:schemeClr val="accent1"/>
-          </a:effectRef>
-          <a:fontRef idx="minor">
-            <a:schemeClr val="lt1"/>
-          </a:fontRef>
-        </p:style>
-        <p:txBody>
-          <a:bodyPr rtlCol="0" anchor="ctr"/>
-          <a:lstStyle/>
-          <a:p>
-            <a:pPr algn="ctr"/>
-          </a:p>
-        </p:txBody>
-      </p:sp>
-      <p:sp>
-        <p:nvSpPr>
-          <p:cNvPr id="7" name="TextBox 6"/>
-          <p:cNvSpPr txBox="1"/>
-          <p:nvPr/>
-        </p:nvSpPr>
-        <p:spPr>
-          <a:xfrm>
-            <a:off x="685800" y="1307592"/>
-            <a:ext cx="10820095" cy="256032"/>
-          </a:xfrm>
-          <a:prstGeom prst="rect">
-            <a:avLst/>
-          </a:prstGeom>
-          <a:noFill/>
-        </p:spPr>
-        <p:txBody>
-          <a:bodyPr wrap="square" anchor="ctr"/>
-          <a:lstStyle/>
-          <a:p>
-            <a:r>
-              <a:rPr sz="1000" b="1" i="0">
-                <a:solidFill>
-                  <a:srgbClr val="269CCB"/>
-                </a:solidFill>
-                <a:latin typeface="Calibri"/>
-              </a:rPr>
-              <a:t>● ● ●</a:t>
-            </a:r>
-          </a:p>
-        </p:txBody>
-      </p:sp>
-      <p:sp>
-        <p:nvSpPr>
-          <p:cNvPr id="8" name="TextBox 7"/>
-          <p:cNvSpPr txBox="1"/>
-          <p:nvPr/>
-        </p:nvSpPr>
-        <p:spPr>
-          <a:xfrm>
-            <a:off x="777240" y="1719072"/>
-            <a:ext cx="10637215" cy="4453128"/>
-          </a:xfrm>
-          <a:prstGeom prst="rect">
-            <a:avLst/>
-          </a:prstGeom>
-          <a:noFill/>
-        </p:spPr>
-        <p:txBody>
-          <a:bodyPr wrap="square">
-            <a:spAutoFit/>
-          </a:bodyPr>
-          <a:lstStyle/>
-          <a:p>
-            <a:pPr>
-              <a:spcAft>
-                <a:spcPts val="400"/>
-              </a:spcAft>
-            </a:pPr>
-            <a:r>
-              <a:rPr sz="1400" b="0" i="0">
-                <a:solidFill>
-                  <a:srgbClr val="FFFFFF"/>
-                </a:solidFill>
-                <a:latin typeface="Calibri"/>
-              </a:rPr>
-              <a:t>%% NO son clases del dominio, y es el error mas comun:</a:t>
-            </a:r>
-          </a:p>
-          <a:p>
-            <a:pPr>
-              <a:spcAft>
-                <a:spcPts val="400"/>
-              </a:spcAft>
-            </a:pPr>
-            <a:r>
-              <a:rPr sz="1400" b="0" i="0">
-                <a:solidFill>
-                  <a:srgbClr val="FFFFFF"/>
-                </a:solidFill>
-                <a:latin typeface="Calibri"/>
-              </a:rPr>
-              <a:t>%%   FormularioRegistroMascota   -&gt; es una PANTALLA (Clase 13)</a:t>
-            </a:r>
-          </a:p>
-          <a:p>
-            <a:pPr>
-              <a:spcAft>
-                <a:spcPts val="400"/>
-              </a:spcAft>
-            </a:pPr>
-            <a:r>
-              <a:rPr sz="1400" b="0" i="0">
-                <a:solidFill>
-                  <a:srgbClr val="FFFFFF"/>
-                </a:solidFill>
-                <a:latin typeface="Calibri"/>
-              </a:rPr>
-              <a:t>%%   ConexionBaseDatos           -&gt; es INFRAESTRUCTURA</a:t>
-            </a:r>
-          </a:p>
-          <a:p>
-            <a:pPr>
-              <a:spcAft>
-                <a:spcPts val="400"/>
-              </a:spcAft>
-            </a:pPr>
-            <a:r>
-              <a:rPr sz="1400" b="0" i="0">
-                <a:solidFill>
-                  <a:srgbClr val="FFFFFF"/>
-                </a:solidFill>
-                <a:latin typeface="Calibri"/>
-              </a:rPr>
-              <a:t>%%   GestorDeMascotas            -&gt; es un «gestor» que solo mueve datos</a:t>
-            </a:r>
-          </a:p>
-          <a:p>
-            <a:pPr>
-              <a:spcAft>
-                <a:spcPts val="400"/>
-              </a:spcAft>
-            </a:pPr>
-            <a:r>
-              <a:rPr sz="1400" b="0" i="0">
-                <a:solidFill>
-                  <a:srgbClr val="FFFFFF"/>
-                </a:solidFill>
-                <a:latin typeface="Calibri"/>
-              </a:rPr>
-              <a:t>%%   BotonGuardar                -&gt; es un control de interfaz</a:t>
-            </a:r>
-          </a:p>
-          <a:p>
-            <a:pPr>
-              <a:spcAft>
-                <a:spcPts val="400"/>
-              </a:spcAft>
-            </a:pPr>
-            <a:r>
-              <a:rPr sz="1400" b="0" i="0">
-                <a:solidFill>
-                  <a:srgbClr val="FFFFFF"/>
-                </a:solidFill>
-                <a:latin typeface="Calibri"/>
-              </a:rPr>
-              <a:t/>
-            </a:r>
-          </a:p>
-          <a:p>
-            <a:pPr>
-              <a:spcAft>
-                <a:spcPts val="400"/>
-              </a:spcAft>
-            </a:pPr>
-            <a:r>
-              <a:rPr sz="1400" b="0" i="0">
-                <a:solidFill>
-                  <a:srgbClr val="FFFFFF"/>
-                </a:solidFill>
-                <a:latin typeface="Calibri"/>
-              </a:rPr>
-              <a:t>%% SI son clases del dominio: los sustantivos que el CLIENTE nombra y</a:t>
-            </a:r>
-          </a:p>
-          <a:p>
-            <a:pPr>
-              <a:spcAft>
-                <a:spcPts val="400"/>
-              </a:spcAft>
-            </a:pPr>
-            <a:r>
-              <a:rPr sz="1400" b="0" i="0">
-                <a:solidFill>
-                  <a:srgbClr val="FFFFFF"/>
-                </a:solidFill>
-                <a:latin typeface="Calibri"/>
-              </a:rPr>
-              <a:t>%% que tienen estado propio y reglas propias.</a:t>
-            </a:r>
-          </a:p>
-          <a:p>
-            <a:pPr>
-              <a:spcAft>
-                <a:spcPts val="400"/>
-              </a:spcAft>
-            </a:pPr>
-            <a:r>
-              <a:rPr sz="1400" b="0" i="0">
-                <a:solidFill>
-                  <a:srgbClr val="FFFFFF"/>
-                </a:solidFill>
-                <a:latin typeface="Calibri"/>
-              </a:rPr>
-              <a:t>%%   Dueno, Mascota, Cita, Veterinario, Consulta, Factura</a:t>
-            </a:r>
-          </a:p>
-          <a:p>
-            <a:pPr>
-              <a:spcAft>
-                <a:spcPts val="400"/>
-              </a:spcAft>
-            </a:pPr>
-            <a:r>
-              <a:rPr sz="1400" b="0" i="0">
-                <a:solidFill>
-                  <a:srgbClr val="FFFFFF"/>
-                </a:solidFill>
-                <a:latin typeface="Calibri"/>
-              </a:rPr>
-              <a:t/>
-            </a:r>
-          </a:p>
-          <a:p>
-            <a:pPr>
-              <a:spcAft>
-                <a:spcPts val="400"/>
-              </a:spcAft>
-            </a:pPr>
-            <a:r>
-              <a:rPr sz="1400" b="0" i="0">
-                <a:solidFill>
-                  <a:srgbClr val="FFFFFF"/>
-                </a:solidFill>
-                <a:latin typeface="Calibri"/>
-              </a:rPr>
-              <a:t>%% La prueba: si el sistema no existiera, la clinica seguiria hablando</a:t>
-            </a:r>
-          </a:p>
-          <a:p>
-            <a:pPr>
-              <a:spcAft>
-                <a:spcPts val="400"/>
-              </a:spcAft>
-            </a:pPr>
-            <a:r>
-              <a:rPr sz="1400" b="0" i="0">
-                <a:solidFill>
-                  <a:srgbClr val="FFFFFF"/>
-                </a:solidFill>
-                <a:latin typeface="Calibri"/>
-              </a:rPr>
-              <a:t>%% de «la mascota» y «la cita». De «GestorDeMascotas» no.</a:t>
-            </a:r>
-          </a:p>
-        </p:txBody>
-      </p:sp>
-      <p:sp>
-        <p:nvSpPr>
-          <p:cNvPr id="9" name="TextBox 8"/>
-          <p:cNvSpPr txBox="1"/>
-          <p:nvPr/>
-        </p:nvSpPr>
-        <p:spPr>
-          <a:xfrm>
-            <a:off x="11185855" y="6473952"/>
-            <a:ext cx="640080" cy="274320"/>
-          </a:xfrm>
-          <a:prstGeom prst="rect">
-            <a:avLst/>
-          </a:prstGeom>
-          <a:noFill/>
-        </p:spPr>
-        <p:txBody>
-          <a:bodyPr wrap="square">
-            <a:spAutoFit/>
-          </a:bodyPr>
-          <a:lstStyle/>
-          <a:p>
-            <a:pPr algn="r"/>
-            <a:r>
-              <a:rPr sz="1100" b="0" i="0">
-                <a:solidFill>
-                  <a:srgbClr val="666666"/>
-                </a:solidFill>
-                <a:latin typeface="Calibri"/>
-              </a:rPr>
-              <a:t>13</a:t>
-            </a:r>
-          </a:p>
-        </p:txBody>
-      </p:sp>
-    </p:spTree>
-  </p:cSld>
-  <p:clrMapOvr>
-    <a:masterClrMapping/>
-  </p:clrMapOvr>
-</p:sld>
-</file>
-
-<file path=ppt/slides/slide14.xml><?xml version="1.0" encoding="utf-8"?>
-<p:sld xmlns:a="http://schemas.openxmlformats.org/drawingml/2006/main" xmlns:p="http://schemas.openxmlformats.org/presentationml/2006/main" xmlns:r="http://schemas.openxmlformats.org/officeDocument/2006/relationships">
-  <p:cSld>
-    <p:bg>
-      <p:bgPr>
-        <a:solidFill>
-          <a:srgbClr val="FFFFFF"/>
-        </a:solidFill>
-        <a:effectLst/>
-      </p:bgPr>
-    </p:bg>
-    <p:spTree>
-      <p:nvGrpSpPr>
-        <p:cNvPr id="1" name=""/>
-        <p:cNvGrpSpPr/>
-        <p:nvPr/>
-      </p:nvGrpSpPr>
-      <p:grpSpPr/>
-      <p:sp>
-        <p:nvSpPr>
-          <p:cNvPr id="2" name="Rectangle 1"/>
-          <p:cNvSpPr/>
-          <p:nvPr/>
-        </p:nvSpPr>
-        <p:spPr>
-          <a:xfrm>
-            <a:off x="0" y="0"/>
-            <a:ext cx="12191695" cy="960120"/>
-          </a:xfrm>
-          <a:prstGeom prst="rect">
-            <a:avLst/>
-          </a:prstGeom>
-          <a:solidFill>
-            <a:srgbClr val="095292"/>
-          </a:solidFill>
-          <a:ln>
-            <a:noFill/>
-          </a:ln>
-        </p:spPr>
-        <p:style>
-          <a:lnRef idx="1">
-            <a:schemeClr val="accent1"/>
-          </a:lnRef>
-          <a:fillRef idx="3">
-            <a:schemeClr val="accent1"/>
-          </a:fillRef>
-          <a:effectRef idx="2">
-            <a:schemeClr val="accent1"/>
-          </a:effectRef>
-          <a:fontRef idx="minor">
-            <a:schemeClr val="lt1"/>
-          </a:fontRef>
-        </p:style>
-        <p:txBody>
-          <a:bodyPr rtlCol="0" anchor="ctr"/>
-          <a:lstStyle/>
-          <a:p>
-            <a:pPr algn="ctr"/>
-          </a:p>
-        </p:txBody>
-      </p:sp>
-      <p:sp>
-        <p:nvSpPr>
-          <p:cNvPr id="3" name="Rectangle 2"/>
-          <p:cNvSpPr/>
-          <p:nvPr/>
-        </p:nvSpPr>
-        <p:spPr>
-          <a:xfrm>
-            <a:off x="0" y="960120"/>
-            <a:ext cx="12191695" cy="41148"/>
-          </a:xfrm>
-          <a:prstGeom prst="rect">
-            <a:avLst/>
-          </a:prstGeom>
-          <a:solidFill>
-            <a:srgbClr val="FFD000"/>
-          </a:solidFill>
-          <a:ln>
-            <a:noFill/>
-          </a:ln>
-        </p:spPr>
-        <p:style>
-          <a:lnRef idx="1">
-            <a:schemeClr val="accent1"/>
-          </a:lnRef>
-          <a:fillRef idx="3">
-            <a:schemeClr val="accent1"/>
-          </a:fillRef>
-          <a:effectRef idx="2">
-            <a:schemeClr val="accent1"/>
-          </a:effectRef>
-          <a:fontRef idx="minor">
-            <a:schemeClr val="lt1"/>
-          </a:fontRef>
-        </p:style>
-        <p:txBody>
-          <a:bodyPr rtlCol="0" anchor="ctr"/>
-          <a:lstStyle/>
-          <a:p>
-            <a:pPr algn="ctr"/>
-          </a:p>
-        </p:txBody>
-      </p:sp>
-      <p:sp>
-        <p:nvSpPr>
-          <p:cNvPr id="4" name="TextBox 3"/>
-          <p:cNvSpPr txBox="1"/>
-          <p:nvPr/>
-        </p:nvSpPr>
-        <p:spPr>
-          <a:xfrm>
-            <a:off x="457200" y="164592"/>
-            <a:ext cx="11277295" cy="502920"/>
-          </a:xfrm>
-          <a:prstGeom prst="rect">
-            <a:avLst/>
-          </a:prstGeom>
-          <a:noFill/>
-        </p:spPr>
-        <p:txBody>
-          <a:bodyPr wrap="square">
-            <a:spAutoFit/>
-          </a:bodyPr>
-          <a:lstStyle/>
-          <a:p>
-            <a:r>
-              <a:rPr sz="2600" b="1" i="0">
-                <a:solidFill>
-                  <a:srgbClr val="FFFFFF"/>
-                </a:solidFill>
-                <a:latin typeface="Calibri"/>
-              </a:rPr>
-              <a:t>Modelo de dominio de la clinica en sintaxis Mermaid (diagrama, no codigo)</a:t>
-            </a:r>
-          </a:p>
-        </p:txBody>
-      </p:sp>
-      <p:sp>
-        <p:nvSpPr>
-          <p:cNvPr id="5" name="Rounded Rectangle 4"/>
-          <p:cNvSpPr/>
-          <p:nvPr/>
-        </p:nvSpPr>
-        <p:spPr>
-          <a:xfrm>
-            <a:off x="457200" y="1261872"/>
-            <a:ext cx="11277295" cy="4773168"/>
-          </a:xfrm>
-          <a:prstGeom prst="roundRect">
-            <a:avLst>
-              <a:gd name="adj" fmla="val 12000"/>
-            </a:avLst>
-          </a:prstGeom>
-          <a:solidFill>
-            <a:srgbClr val="1E2A38"/>
-          </a:solidFill>
-          <a:ln>
-            <a:noFill/>
-          </a:ln>
-        </p:spPr>
-        <p:style>
-          <a:lnRef idx="1">
-            <a:schemeClr val="accent1"/>
-          </a:lnRef>
-          <a:fillRef idx="3">
-            <a:schemeClr val="accent1"/>
-          </a:fillRef>
-          <a:effectRef idx="2">
-            <a:schemeClr val="accent1"/>
-          </a:effectRef>
-          <a:fontRef idx="minor">
-            <a:schemeClr val="lt1"/>
-          </a:fontRef>
-        </p:style>
-        <p:txBody>
-          <a:bodyPr rtlCol="0" anchor="ctr"/>
-          <a:lstStyle/>
-          <a:p>
-            <a:pPr algn="ctr"/>
-          </a:p>
-        </p:txBody>
-      </p:sp>
-      <p:sp>
-        <p:nvSpPr>
-          <p:cNvPr id="6" name="Rectangle 5"/>
-          <p:cNvSpPr/>
-          <p:nvPr/>
-        </p:nvSpPr>
-        <p:spPr>
-          <a:xfrm>
-            <a:off x="457200" y="1261872"/>
-            <a:ext cx="11277295" cy="320040"/>
-          </a:xfrm>
-          <a:prstGeom prst="rect">
-            <a:avLst/>
-          </a:prstGeom>
-          <a:solidFill>
-            <a:srgbClr val="095292"/>
-          </a:solidFill>
-          <a:ln>
-            <a:noFill/>
-          </a:ln>
-        </p:spPr>
-        <p:style>
-          <a:lnRef idx="1">
-            <a:schemeClr val="accent1"/>
-          </a:lnRef>
-          <a:fillRef idx="3">
-            <a:schemeClr val="accent1"/>
-          </a:fillRef>
-          <a:effectRef idx="2">
-            <a:schemeClr val="accent1"/>
-          </a:effectRef>
-          <a:fontRef idx="minor">
-            <a:schemeClr val="lt1"/>
-          </a:fontRef>
-        </p:style>
-        <p:txBody>
-          <a:bodyPr rtlCol="0" anchor="ctr"/>
-          <a:lstStyle/>
-          <a:p>
-            <a:pPr algn="ctr"/>
-          </a:p>
-        </p:txBody>
-      </p:sp>
-      <p:sp>
-        <p:nvSpPr>
-          <p:cNvPr id="7" name="TextBox 6"/>
-          <p:cNvSpPr txBox="1"/>
-          <p:nvPr/>
-        </p:nvSpPr>
-        <p:spPr>
-          <a:xfrm>
-            <a:off x="685800" y="1307592"/>
-            <a:ext cx="10820095" cy="256032"/>
-          </a:xfrm>
-          <a:prstGeom prst="rect">
-            <a:avLst/>
-          </a:prstGeom>
-          <a:noFill/>
-        </p:spPr>
-        <p:txBody>
-          <a:bodyPr wrap="square" anchor="ctr"/>
-          <a:lstStyle/>
-          <a:p>
-            <a:r>
-              <a:rPr sz="1000" b="1" i="0">
-                <a:solidFill>
-                  <a:srgbClr val="269CCB"/>
-                </a:solidFill>
-                <a:latin typeface="Calibri"/>
-              </a:rPr>
-              <a:t>● ● ●</a:t>
-            </a:r>
-          </a:p>
-        </p:txBody>
-      </p:sp>
-      <p:sp>
-        <p:nvSpPr>
-          <p:cNvPr id="8" name="TextBox 7"/>
-          <p:cNvSpPr txBox="1"/>
-          <p:nvPr/>
-        </p:nvSpPr>
-        <p:spPr>
-          <a:xfrm>
-            <a:off x="777240" y="1719072"/>
-            <a:ext cx="5181447" cy="4133087"/>
-          </a:xfrm>
-          <a:prstGeom prst="rect">
-            <a:avLst/>
-          </a:prstGeom>
-          <a:noFill/>
-        </p:spPr>
-        <p:txBody>
-          <a:bodyPr wrap="square">
-            <a:spAutoFit/>
-          </a:bodyPr>
-          <a:lstStyle/>
-          <a:p>
-            <a:pPr>
-              <a:spcAft>
-                <a:spcPts val="371"/>
-              </a:spcAft>
-            </a:pPr>
-            <a:r>
-              <a:rPr sz="1300" b="0" i="0">
-                <a:solidFill>
-                  <a:srgbClr val="FFFFFF"/>
-                </a:solidFill>
-                <a:latin typeface="Calibri"/>
-              </a:rPr>
-              <a:t>classDiagram</a:t>
-            </a:r>
-          </a:p>
-          <a:p>
-            <a:pPr>
-              <a:spcAft>
-                <a:spcPts val="371"/>
-              </a:spcAft>
-            </a:pPr>
-            <a:r>
-              <a:rPr sz="1300" b="0" i="0">
-                <a:solidFill>
-                  <a:srgbClr val="FFFFFF"/>
-                </a:solidFill>
-                <a:latin typeface="Calibri"/>
-              </a:rPr>
-              <a:t>  class Dueno {</a:t>
-            </a:r>
-          </a:p>
-          <a:p>
-            <a:pPr>
-              <a:spcAft>
-                <a:spcPts val="371"/>
-              </a:spcAft>
-            </a:pPr>
-            <a:r>
-              <a:rPr sz="1300" b="0" i="0">
-                <a:solidFill>
-                  <a:srgbClr val="FFFFFF"/>
-                </a:solidFill>
-                <a:latin typeface="Calibri"/>
-              </a:rPr>
-              <a:t>    -documento: String</a:t>
-            </a:r>
-          </a:p>
-          <a:p>
-            <a:pPr>
-              <a:spcAft>
-                <a:spcPts val="371"/>
-              </a:spcAft>
-            </a:pPr>
-            <a:r>
-              <a:rPr sz="1300" b="0" i="0">
-                <a:solidFill>
-                  <a:srgbClr val="FFFFFF"/>
-                </a:solidFill>
-                <a:latin typeface="Calibri"/>
-              </a:rPr>
-              <a:t>    -nombre: String</a:t>
-            </a:r>
-          </a:p>
-          <a:p>
-            <a:pPr>
-              <a:spcAft>
-                <a:spcPts val="371"/>
-              </a:spcAft>
-            </a:pPr>
-            <a:r>
-              <a:rPr sz="1300" b="0" i="0">
-                <a:solidFill>
-                  <a:srgbClr val="FFFFFF"/>
-                </a:solidFill>
-                <a:latin typeface="Calibri"/>
-              </a:rPr>
-              <a:t>    +registrarMascota(m: Mascota): void</a:t>
-            </a:r>
-          </a:p>
-          <a:p>
-            <a:pPr>
-              <a:spcAft>
-                <a:spcPts val="371"/>
-              </a:spcAft>
-            </a:pPr>
-            <a:r>
-              <a:rPr sz="1300" b="0" i="0">
-                <a:solidFill>
-                  <a:srgbClr val="FFFFFF"/>
-                </a:solidFill>
-                <a:latin typeface="Calibri"/>
-              </a:rPr>
-              <a:t>  }</a:t>
-            </a:r>
-          </a:p>
-          <a:p>
-            <a:pPr>
-              <a:spcAft>
-                <a:spcPts val="371"/>
-              </a:spcAft>
-            </a:pPr>
-            <a:r>
-              <a:rPr sz="1300" b="0" i="0">
-                <a:solidFill>
-                  <a:srgbClr val="FFFFFF"/>
-                </a:solidFill>
-                <a:latin typeface="Calibri"/>
-              </a:rPr>
-              <a:t>  class Mascota {</a:t>
-            </a:r>
-          </a:p>
-          <a:p>
-            <a:pPr>
-              <a:spcAft>
-                <a:spcPts val="371"/>
-              </a:spcAft>
-            </a:pPr>
-            <a:r>
-              <a:rPr sz="1300" b="0" i="0">
-                <a:solidFill>
-                  <a:srgbClr val="FFFFFF"/>
-                </a:solidFill>
-                <a:latin typeface="Calibri"/>
-              </a:rPr>
-              <a:t>    -codigo: String</a:t>
-            </a:r>
-          </a:p>
-          <a:p>
-            <a:pPr>
-              <a:spcAft>
-                <a:spcPts val="371"/>
-              </a:spcAft>
-            </a:pPr>
-            <a:r>
-              <a:rPr sz="1300" b="0" i="0">
-                <a:solidFill>
-                  <a:srgbClr val="FFFFFF"/>
-                </a:solidFill>
-                <a:latin typeface="Calibri"/>
-              </a:rPr>
-              <a:t>    -especie: String</a:t>
-            </a:r>
-          </a:p>
-          <a:p>
-            <a:pPr>
-              <a:spcAft>
-                <a:spcPts val="371"/>
-              </a:spcAft>
-            </a:pPr>
-            <a:r>
-              <a:rPr sz="1300" b="0" i="0">
-                <a:solidFill>
-                  <a:srgbClr val="FFFFFF"/>
-                </a:solidFill>
-                <a:latin typeface="Calibri"/>
-              </a:rPr>
-              <a:t>    -fechaNacimiento: Date</a:t>
-            </a:r>
-          </a:p>
-          <a:p>
-            <a:pPr>
-              <a:spcAft>
-                <a:spcPts val="371"/>
-              </a:spcAft>
-            </a:pPr>
-            <a:r>
-              <a:rPr sz="1300" b="0" i="0">
-                <a:solidFill>
-                  <a:srgbClr val="FFFFFF"/>
-                </a:solidFill>
-                <a:latin typeface="Calibri"/>
-              </a:rPr>
-              <a:t>    +calcularEdad(): int</a:t>
-            </a:r>
-          </a:p>
-          <a:p>
-            <a:pPr>
-              <a:spcAft>
-                <a:spcPts val="371"/>
-              </a:spcAft>
-            </a:pPr>
-            <a:r>
-              <a:rPr sz="1300" b="0" i="0">
-                <a:solidFill>
-                  <a:srgbClr val="FFFFFF"/>
-                </a:solidFill>
-                <a:latin typeface="Calibri"/>
-              </a:rPr>
-              <a:t>  }</a:t>
-            </a:r>
-          </a:p>
-          <a:p>
-            <a:pPr>
-              <a:spcAft>
-                <a:spcPts val="371"/>
-              </a:spcAft>
-            </a:pPr>
-            <a:r>
-              <a:rPr sz="1300" b="0" i="0">
-                <a:solidFill>
-                  <a:srgbClr val="FFFFFF"/>
-                </a:solidFill>
-                <a:latin typeface="Calibri"/>
-              </a:rPr>
-              <a:t>  class Veterinario {</a:t>
-            </a:r>
-          </a:p>
-          <a:p>
-            <a:pPr>
-              <a:spcAft>
-                <a:spcPts val="371"/>
-              </a:spcAft>
-            </a:pPr>
-            <a:r>
-              <a:rPr sz="1300" b="0" i="0">
-                <a:solidFill>
-                  <a:srgbClr val="FFFFFF"/>
-                </a:solidFill>
-                <a:latin typeface="Calibri"/>
-              </a:rPr>
-              <a:t>    -tarjetaProfesional: String</a:t>
-            </a:r>
-          </a:p>
-          <a:p>
-            <a:pPr>
-              <a:spcAft>
-                <a:spcPts val="371"/>
-              </a:spcAft>
-            </a:pPr>
-            <a:r>
-              <a:rPr sz="1300" b="0" i="0">
-                <a:solidFill>
-                  <a:srgbClr val="FFFFFF"/>
-                </a:solidFill>
-                <a:latin typeface="Calibri"/>
-              </a:rPr>
-              <a:t>    -especialidad: String</a:t>
-            </a:r>
-          </a:p>
-          <a:p>
-            <a:pPr>
-              <a:spcAft>
-                <a:spcPts val="371"/>
-              </a:spcAft>
-            </a:pPr>
-            <a:r>
-              <a:rPr sz="1300" b="0" i="0">
-                <a:solidFill>
-                  <a:srgbClr val="FFFFFF"/>
-                </a:solidFill>
-                <a:latin typeface="Calibri"/>
-              </a:rPr>
-              <a:t>  }</a:t>
-            </a:r>
-          </a:p>
-        </p:txBody>
-      </p:sp>
-      <p:sp>
-        <p:nvSpPr>
-          <p:cNvPr id="9" name="TextBox 8"/>
-          <p:cNvSpPr txBox="1"/>
-          <p:nvPr/>
-        </p:nvSpPr>
-        <p:spPr>
-          <a:xfrm>
-            <a:off x="6233007" y="1719072"/>
-            <a:ext cx="5181447" cy="4133087"/>
-          </a:xfrm>
-          <a:prstGeom prst="rect">
-            <a:avLst/>
-          </a:prstGeom>
-          <a:noFill/>
-        </p:spPr>
-        <p:txBody>
-          <a:bodyPr wrap="square">
-            <a:spAutoFit/>
-          </a:bodyPr>
-          <a:lstStyle/>
-          <a:p>
-            <a:pPr>
-              <a:spcAft>
-                <a:spcPts val="371"/>
-              </a:spcAft>
-            </a:pPr>
-            <a:r>
-              <a:rPr sz="1300" b="0" i="0">
-                <a:solidFill>
-                  <a:srgbClr val="FFFFFF"/>
-                </a:solidFill>
-                <a:latin typeface="Calibri"/>
-              </a:rPr>
-              <a:t>  class Cita {</a:t>
-            </a:r>
-          </a:p>
-          <a:p>
-            <a:pPr>
-              <a:spcAft>
-                <a:spcPts val="371"/>
-              </a:spcAft>
-            </a:pPr>
-            <a:r>
-              <a:rPr sz="1300" b="0" i="0">
-                <a:solidFill>
-                  <a:srgbClr val="FFFFFF"/>
-                </a:solidFill>
-                <a:latin typeface="Calibri"/>
-              </a:rPr>
-              <a:t>    -fechaHora: DateTime</a:t>
-            </a:r>
-          </a:p>
-          <a:p>
-            <a:pPr>
-              <a:spcAft>
-                <a:spcPts val="371"/>
-              </a:spcAft>
-            </a:pPr>
-            <a:r>
-              <a:rPr sz="1300" b="0" i="0">
-                <a:solidFill>
-                  <a:srgbClr val="FFFFFF"/>
-                </a:solidFill>
-                <a:latin typeface="Calibri"/>
-              </a:rPr>
-              <a:t>    -estado: String</a:t>
-            </a:r>
-          </a:p>
-          <a:p>
-            <a:pPr>
-              <a:spcAft>
-                <a:spcPts val="371"/>
-              </a:spcAft>
-            </a:pPr>
-            <a:r>
-              <a:rPr sz="1300" b="0" i="0">
-                <a:solidFill>
-                  <a:srgbClr val="FFFFFF"/>
-                </a:solidFill>
-                <a:latin typeface="Calibri"/>
-              </a:rPr>
-              <a:t>    +reprogramar(nuevaFecha: DateTime): void</a:t>
-            </a:r>
-          </a:p>
-          <a:p>
-            <a:pPr>
-              <a:spcAft>
-                <a:spcPts val="371"/>
-              </a:spcAft>
-            </a:pPr>
-            <a:r>
-              <a:rPr sz="1300" b="0" i="0">
-                <a:solidFill>
-                  <a:srgbClr val="FFFFFF"/>
-                </a:solidFill>
-                <a:latin typeface="Calibri"/>
-              </a:rPr>
-              <a:t>  }</a:t>
-            </a:r>
-          </a:p>
-          <a:p>
-            <a:pPr>
-              <a:spcAft>
-                <a:spcPts val="371"/>
-              </a:spcAft>
-            </a:pPr>
-            <a:r>
-              <a:rPr sz="1300" b="0" i="0">
-                <a:solidFill>
-                  <a:srgbClr val="FFFFFF"/>
-                </a:solidFill>
-                <a:latin typeface="Calibri"/>
-              </a:rPr>
-              <a:t>  class Atencion {</a:t>
-            </a:r>
-          </a:p>
-          <a:p>
-            <a:pPr>
-              <a:spcAft>
-                <a:spcPts val="371"/>
-              </a:spcAft>
-            </a:pPr>
-            <a:r>
-              <a:rPr sz="1300" b="0" i="0">
-                <a:solidFill>
-                  <a:srgbClr val="FFFFFF"/>
-                </a:solidFill>
-                <a:latin typeface="Calibri"/>
-              </a:rPr>
-              <a:t>    -diagnostico: String</a:t>
-            </a:r>
-          </a:p>
-          <a:p>
-            <a:pPr>
-              <a:spcAft>
-                <a:spcPts val="371"/>
-              </a:spcAft>
-            </a:pPr>
-            <a:r>
-              <a:rPr sz="1300" b="0" i="0">
-                <a:solidFill>
-                  <a:srgbClr val="FFFFFF"/>
-                </a:solidFill>
-                <a:latin typeface="Calibri"/>
-              </a:rPr>
-              <a:t>    -tratamiento: String</a:t>
-            </a:r>
-          </a:p>
-          <a:p>
-            <a:pPr>
-              <a:spcAft>
-                <a:spcPts val="371"/>
-              </a:spcAft>
-            </a:pPr>
-            <a:r>
-              <a:rPr sz="1300" b="0" i="0">
-                <a:solidFill>
-                  <a:srgbClr val="FFFFFF"/>
-                </a:solidFill>
-                <a:latin typeface="Calibri"/>
-              </a:rPr>
-              <a:t>  }</a:t>
-            </a:r>
-          </a:p>
-          <a:p>
-            <a:pPr>
-              <a:spcAft>
-                <a:spcPts val="371"/>
-              </a:spcAft>
-            </a:pPr>
-            <a:r>
-              <a:rPr sz="1300" b="0" i="0">
-                <a:solidFill>
-                  <a:srgbClr val="FFFFFF"/>
-                </a:solidFill>
-                <a:latin typeface="Calibri"/>
-              </a:rPr>
-              <a:t>  Dueno "1" --&gt; "0..*" Mascota: es dueno de</a:t>
-            </a:r>
-          </a:p>
-          <a:p>
-            <a:pPr>
-              <a:spcAft>
-                <a:spcPts val="371"/>
-              </a:spcAft>
-            </a:pPr>
-            <a:r>
-              <a:rPr sz="1300" b="0" i="0">
-                <a:solidFill>
-                  <a:srgbClr val="FFFFFF"/>
-                </a:solidFill>
-                <a:latin typeface="Calibri"/>
-              </a:rPr>
-              <a:t>  Mascota "1" --&gt; "0..*" Cita: tiene agendada</a:t>
-            </a:r>
-          </a:p>
-          <a:p>
-            <a:pPr>
-              <a:spcAft>
-                <a:spcPts val="371"/>
-              </a:spcAft>
-            </a:pPr>
-            <a:r>
-              <a:rPr sz="1300" b="0" i="0">
-                <a:solidFill>
-                  <a:srgbClr val="FFFFFF"/>
-                </a:solidFill>
-                <a:latin typeface="Calibri"/>
-              </a:rPr>
-              <a:t>  Veterinario "1" --&gt; "0..*" Cita: atiende</a:t>
-            </a:r>
-          </a:p>
-          <a:p>
-            <a:pPr>
-              <a:spcAft>
-                <a:spcPts val="371"/>
-              </a:spcAft>
-            </a:pPr>
-            <a:r>
-              <a:rPr sz="1300" b="0" i="0">
-                <a:solidFill>
-                  <a:srgbClr val="FFFFFF"/>
-                </a:solidFill>
-                <a:latin typeface="Calibri"/>
-              </a:rPr>
-              <a:t>  Cita "1" --&gt; "0..1" Atencion: genera</a:t>
-            </a:r>
-          </a:p>
-        </p:txBody>
-      </p:sp>
-      <p:sp>
-        <p:nvSpPr>
-          <p:cNvPr id="10" name="TextBox 9"/>
-          <p:cNvSpPr txBox="1"/>
-          <p:nvPr/>
-        </p:nvSpPr>
-        <p:spPr>
-          <a:xfrm>
-            <a:off x="457200" y="6080760"/>
-            <a:ext cx="11277295" cy="320040"/>
-          </a:xfrm>
-          <a:prstGeom prst="rect">
-            <a:avLst/>
-          </a:prstGeom>
-          <a:noFill/>
-        </p:spPr>
-        <p:txBody>
-          <a:bodyPr wrap="square">
-            <a:spAutoFit/>
-          </a:bodyPr>
-          <a:lstStyle/>
-          <a:p>
-            <a:pPr algn="ctr"/>
-            <a:r>
-              <a:rPr sz="1200" b="0" i="1">
-                <a:solidFill>
-                  <a:srgbClr val="666666"/>
-                </a:solidFill>
-                <a:latin typeface="Calibri"/>
-              </a:rPr>
-              <a:t>Las multiplicidades son las que contestan las preguntas que el espanol deja abiertas: un dueno, muchas mascotas.</a:t>
-            </a:r>
-          </a:p>
-        </p:txBody>
-      </p:sp>
-      <p:sp>
-        <p:nvSpPr>
-          <p:cNvPr id="11" name="TextBox 10"/>
-          <p:cNvSpPr txBox="1"/>
-          <p:nvPr/>
-        </p:nvSpPr>
-        <p:spPr>
-          <a:xfrm>
-            <a:off x="11185855" y="6473952"/>
-            <a:ext cx="640080" cy="274320"/>
-          </a:xfrm>
-          <a:prstGeom prst="rect">
-            <a:avLst/>
-          </a:prstGeom>
-          <a:noFill/>
-        </p:spPr>
-        <p:txBody>
-          <a:bodyPr wrap="square">
-            <a:spAutoFit/>
-          </a:bodyPr>
-          <a:lstStyle/>
-          <a:p>
-            <a:pPr algn="r"/>
-            <a:r>
-              <a:rPr sz="1100" b="0" i="0">
-                <a:solidFill>
-                  <a:srgbClr val="666666"/>
-                </a:solidFill>
-                <a:latin typeface="Calibri"/>
-              </a:rPr>
-              <a:t>14</a:t>
-            </a:r>
-          </a:p>
-        </p:txBody>
-      </p:sp>
-    </p:spTree>
-  </p:cSld>
-  <p:clrMapOvr>
-    <a:masterClrMapping/>
-  </p:clrMapOvr>
-</p:sld>
-</file>
-
-<file path=ppt/slides/slide15.xml><?xml version="1.0" encoding="utf-8"?>
-<p:sld xmlns:a="http://schemas.openxmlformats.org/drawingml/2006/main" xmlns:p="http://schemas.openxmlformats.org/presentationml/2006/main" xmlns:r="http://schemas.openxmlformats.org/officeDocument/2006/relationships">
-  <p:cSld>
-    <p:bg>
-      <p:bgPr>
-        <a:solidFill>
-          <a:srgbClr val="FFFFFF"/>
-        </a:solidFill>
-        <a:effectLst/>
-      </p:bgPr>
-    </p:bg>
-    <p:spTree>
-      <p:nvGrpSpPr>
-        <p:cNvPr id="1" name=""/>
-        <p:cNvGrpSpPr/>
-        <p:nvPr/>
-      </p:nvGrpSpPr>
-      <p:grpSpPr/>
-      <p:sp>
-        <p:nvSpPr>
-          <p:cNvPr id="2" name="Rectangle 1"/>
-          <p:cNvSpPr/>
-          <p:nvPr/>
-        </p:nvSpPr>
-        <p:spPr>
-          <a:xfrm>
-            <a:off x="0" y="0"/>
-            <a:ext cx="12191695" cy="960120"/>
-          </a:xfrm>
-          <a:prstGeom prst="rect">
-            <a:avLst/>
-          </a:prstGeom>
-          <a:solidFill>
-            <a:srgbClr val="095292"/>
-          </a:solidFill>
-          <a:ln>
-            <a:noFill/>
-          </a:ln>
-        </p:spPr>
-        <p:style>
-          <a:lnRef idx="1">
-            <a:schemeClr val="accent1"/>
-          </a:lnRef>
-          <a:fillRef idx="3">
-            <a:schemeClr val="accent1"/>
-          </a:fillRef>
-          <a:effectRef idx="2">
-            <a:schemeClr val="accent1"/>
-          </a:effectRef>
-          <a:fontRef idx="minor">
-            <a:schemeClr val="lt1"/>
-          </a:fontRef>
-        </p:style>
-        <p:txBody>
-          <a:bodyPr rtlCol="0" anchor="ctr"/>
-          <a:lstStyle/>
-          <a:p>
-            <a:pPr algn="ctr"/>
-          </a:p>
-        </p:txBody>
-      </p:sp>
-      <p:sp>
-        <p:nvSpPr>
-          <p:cNvPr id="3" name="Rectangle 2"/>
-          <p:cNvSpPr/>
-          <p:nvPr/>
-        </p:nvSpPr>
-        <p:spPr>
-          <a:xfrm>
-            <a:off x="0" y="960120"/>
-            <a:ext cx="12191695" cy="41148"/>
-          </a:xfrm>
-          <a:prstGeom prst="rect">
-            <a:avLst/>
-          </a:prstGeom>
-          <a:solidFill>
-            <a:srgbClr val="FFD000"/>
-          </a:solidFill>
-          <a:ln>
-            <a:noFill/>
-          </a:ln>
-        </p:spPr>
-        <p:style>
-          <a:lnRef idx="1">
-            <a:schemeClr val="accent1"/>
-          </a:lnRef>
-          <a:fillRef idx="3">
-            <a:schemeClr val="accent1"/>
-          </a:fillRef>
-          <a:effectRef idx="2">
-            <a:schemeClr val="accent1"/>
-          </a:effectRef>
-          <a:fontRef idx="minor">
-            <a:schemeClr val="lt1"/>
-          </a:fontRef>
-        </p:style>
-        <p:txBody>
-          <a:bodyPr rtlCol="0" anchor="ctr"/>
-          <a:lstStyle/>
-          <a:p>
-            <a:pPr algn="ctr"/>
-          </a:p>
-        </p:txBody>
-      </p:sp>
-      <p:sp>
-        <p:nvSpPr>
-          <p:cNvPr id="4" name="TextBox 3"/>
-          <p:cNvSpPr txBox="1"/>
-          <p:nvPr/>
-        </p:nvSpPr>
-        <p:spPr>
-          <a:xfrm>
-            <a:off x="457200" y="164592"/>
-            <a:ext cx="11277295" cy="502920"/>
-          </a:xfrm>
-          <a:prstGeom prst="rect">
-            <a:avLst/>
-          </a:prstGeom>
-          <a:noFill/>
-        </p:spPr>
-        <p:txBody>
-          <a:bodyPr wrap="square">
-            <a:spAutoFit/>
-          </a:bodyPr>
-          <a:lstStyle/>
-          <a:p>
-            <a:r>
-              <a:rPr sz="2600" b="1" i="0">
-                <a:solidFill>
-                  <a:srgbClr val="FFFFFF"/>
-                </a:solidFill>
-                <a:latin typeface="Calibri"/>
-              </a:rPr>
-              <a:t>Demo del dia</a:t>
-            </a:r>
-          </a:p>
-        </p:txBody>
-      </p:sp>
-      <p:sp>
-        <p:nvSpPr>
-          <p:cNvPr id="5" name="TextBox 4"/>
-          <p:cNvSpPr txBox="1"/>
-          <p:nvPr/>
-        </p:nvSpPr>
-        <p:spPr>
-          <a:xfrm>
-            <a:off x="457200" y="1170432"/>
-            <a:ext cx="11277295" cy="5230368"/>
-          </a:xfrm>
-          <a:prstGeom prst="rect">
-            <a:avLst/>
-          </a:prstGeom>
-          <a:noFill/>
-        </p:spPr>
-        <p:txBody>
-          <a:bodyPr wrap="square">
-            <a:spAutoFit/>
-          </a:bodyPr>
-          <a:lstStyle/>
-          <a:p>
-            <a:pPr>
-              <a:spcAft>
-                <a:spcPts val="800"/>
-              </a:spcAft>
-            </a:pPr>
-            <a:r>
-              <a:rPr sz="2000" b="0" i="0">
-                <a:solidFill>
-                  <a:srgbClr val="333333"/>
-                </a:solidFill>
-                <a:latin typeface="Calibri"/>
-              </a:rPr>
-              <a:t>–   </a:t>
-            </a:r>
-            <a:r>
-              <a:rPr sz="2000" b="1" i="0">
-                <a:solidFill>
-                  <a:srgbClr val="333333"/>
-                </a:solidFill>
-                <a:latin typeface="Calibri"/>
-              </a:rPr>
-              <a:t>Herramienta:</a:t>
-            </a:r>
-            <a:r>
-              <a:rPr sz="2000" b="0" i="0">
-                <a:solidFill>
-                  <a:srgbClr val="333333"/>
-                </a:solidFill>
-                <a:latin typeface="Calibri"/>
-              </a:rPr>
-              <a:t> draw.io · Mermaid</a:t>
-            </a:r>
-          </a:p>
-          <a:p>
-            <a:pPr>
-              <a:spcAft>
-                <a:spcPts val="800"/>
-              </a:spcAft>
-            </a:pPr>
-            <a:r>
-              <a:rPr sz="2000" b="0" i="0">
-                <a:solidFill>
-                  <a:srgbClr val="333333"/>
-                </a:solidFill>
-                <a:latin typeface="Calibri"/>
-              </a:rPr>
-              <a:t>–   </a:t>
-            </a:r>
-            <a:r>
-              <a:rPr sz="2000" b="1" i="0">
-                <a:solidFill>
-                  <a:srgbClr val="333333"/>
-                </a:solidFill>
-                <a:latin typeface="Calibri"/>
-              </a:rPr>
-              <a:t>Demo:</a:t>
-            </a:r>
-            <a:r>
-              <a:rPr sz="2000" b="0" i="0">
-                <a:solidFill>
-                  <a:srgbClr val="333333"/>
-                </a:solidFill>
-                <a:latin typeface="Calibri"/>
-              </a:rPr>
-              <a:t> Se dibuja en vivo Dueno, Mascota y Cita en draw.io y borra tres atributos mal ubicados explicando a que clase pertenecen de verdad.</a:t>
-            </a:r>
-          </a:p>
-          <a:p>
-            <a:pPr>
-              <a:spcAft>
-                <a:spcPts val="800"/>
-              </a:spcAft>
-            </a:pPr>
-            <a:r>
-              <a:rPr sz="2000" b="0" i="0">
-                <a:solidFill>
-                  <a:srgbClr val="333333"/>
-                </a:solidFill>
-                <a:latin typeface="Calibri"/>
-              </a:rPr>
-              <a:t>–   Mismo dominio: la clinica veterinaria — no otro ejemplo. Aqui se diseña, no se programa.</a:t>
-            </a:r>
-          </a:p>
-        </p:txBody>
-      </p:sp>
-      <p:sp>
-        <p:nvSpPr>
-          <p:cNvPr id="6" name="TextBox 5"/>
-          <p:cNvSpPr txBox="1"/>
-          <p:nvPr/>
-        </p:nvSpPr>
-        <p:spPr>
-          <a:xfrm>
-            <a:off x="11185855" y="6473952"/>
-            <a:ext cx="640080" cy="274320"/>
-          </a:xfrm>
-          <a:prstGeom prst="rect">
-            <a:avLst/>
-          </a:prstGeom>
-          <a:noFill/>
-        </p:spPr>
-        <p:txBody>
-          <a:bodyPr wrap="square">
-            <a:spAutoFit/>
-          </a:bodyPr>
-          <a:lstStyle/>
-          <a:p>
-            <a:pPr algn="r"/>
-            <a:r>
-              <a:rPr sz="1100" b="0" i="0">
-                <a:solidFill>
-                  <a:srgbClr val="666666"/>
-                </a:solidFill>
-                <a:latin typeface="Calibri"/>
-              </a:rPr>
-              <a:t>15</a:t>
-            </a:r>
-          </a:p>
-        </p:txBody>
-      </p:sp>
-    </p:spTree>
-  </p:cSld>
-  <p:clrMapOvr>
-    <a:masterClrMapping/>
-  </p:clrMapOvr>
-</p:sld>
-</file>
-
-<file path=ppt/slides/slide16.xml><?xml version="1.0" encoding="utf-8"?>
-<p:sld xmlns:a="http://schemas.openxmlformats.org/drawingml/2006/main" xmlns:p="http://schemas.openxmlformats.org/presentationml/2006/main" xmlns:r="http://schemas.openxmlformats.org/officeDocument/2006/relationships">
-  <p:cSld>
-    <p:bg>
-      <p:bgPr>
-        <a:solidFill>
-          <a:srgbClr val="FFFFFF"/>
-        </a:solidFill>
-        <a:effectLst/>
-      </p:bgPr>
-    </p:bg>
-    <p:spTree>
-      <p:nvGrpSpPr>
-        <p:cNvPr id="1" name=""/>
-        <p:cNvGrpSpPr/>
-        <p:nvPr/>
-      </p:nvGrpSpPr>
-      <p:grpSpPr/>
-      <p:sp>
-        <p:nvSpPr>
-          <p:cNvPr id="2" name="Rectangle 1"/>
-          <p:cNvSpPr/>
-          <p:nvPr/>
-        </p:nvSpPr>
-        <p:spPr>
-          <a:xfrm>
-            <a:off x="0" y="0"/>
             <a:ext cx="12191695" cy="164592"/>
           </a:xfrm>
           <a:prstGeom prst="rect">
@@ -7246,14 +6354,118 @@
       </p:sp>
       <p:sp>
         <p:nvSpPr>
-          <p:cNvPr id="5" name="TextBox 4"/>
+          <p:cNvPr id="5" name="Rounded Rectangle 4"/>
+          <p:cNvSpPr/>
+          <p:nvPr/>
+        </p:nvSpPr>
+        <p:spPr>
+          <a:xfrm>
+            <a:off x="5797149" y="1573813"/>
+            <a:ext cx="6010497" cy="4057845"/>
+          </a:xfrm>
+          <a:prstGeom prst="roundRect">
+            <a:avLst>
+              <a:gd name="adj" fmla="val 4000"/>
+            </a:avLst>
+          </a:prstGeom>
+          <a:solidFill>
+            <a:srgbClr val="E8EEF4"/>
+          </a:solidFill>
+          <a:ln>
+            <a:noFill/>
+          </a:ln>
+        </p:spPr>
+        <p:style>
+          <a:lnRef idx="1">
+            <a:schemeClr val="accent1"/>
+          </a:lnRef>
+          <a:fillRef idx="3">
+            <a:schemeClr val="accent1"/>
+          </a:fillRef>
+          <a:effectRef idx="2">
+            <a:schemeClr val="accent1"/>
+          </a:effectRef>
+          <a:fontRef idx="minor">
+            <a:schemeClr val="lt1"/>
+          </a:fontRef>
+        </p:style>
+        <p:txBody>
+          <a:bodyPr rtlCol="0" anchor="ctr"/>
+          <a:lstStyle/>
+          <a:p>
+            <a:pPr algn="ctr"/>
+          </a:p>
+        </p:txBody>
+      </p:sp>
+      <p:pic>
+        <p:nvPicPr>
+          <p:cNvPr id="6" name="Picture 5" descr="notebook-planning-desk-coffee.jpg"/>
+          <p:cNvPicPr>
+            <a:picLocks noChangeAspect="1"/>
+          </p:cNvPicPr>
+          <p:nvPr/>
+        </p:nvPicPr>
+        <p:blipFill>
+          <a:blip r:embed="rId2"/>
+          <a:stretch>
+            <a:fillRect/>
+          </a:stretch>
+        </p:blipFill>
+        <p:spPr>
+          <a:xfrm>
+            <a:off x="5870301" y="1646965"/>
+            <a:ext cx="5864193" cy="3911541"/>
+          </a:xfrm>
+          <a:prstGeom prst="rect">
+            <a:avLst/>
+          </a:prstGeom>
+        </p:spPr>
+      </p:pic>
+      <p:sp>
+        <p:nvSpPr>
+          <p:cNvPr id="7" name="TextBox 6"/>
           <p:cNvSpPr txBox="1"/>
           <p:nvPr/>
         </p:nvSpPr>
         <p:spPr>
           <a:xfrm>
-            <a:off x="457200" y="1170432"/>
-            <a:ext cx="11277295" cy="5230368"/>
+            <a:off x="5870301" y="5961888"/>
+            <a:ext cx="5864193" cy="320040"/>
+          </a:xfrm>
+          <a:prstGeom prst="rect">
+            <a:avLst/>
+          </a:prstGeom>
+          <a:noFill/>
+        </p:spPr>
+        <p:txBody>
+          <a:bodyPr wrap="square">
+            <a:spAutoFit/>
+          </a:bodyPr>
+          <a:lstStyle/>
+          <a:p>
+            <a:pPr algn="ctr"/>
+            <a:r>
+              <a:rPr sz="1100" b="0" i="1">
+                <a:solidFill>
+                  <a:srgbClr val="666666"/>
+                </a:solidFill>
+                <a:latin typeface="Calibri"/>
+              </a:rPr>
+              <a:t>Foto: Cup of  Couple · Pexels</a:t>
+            </a:r>
+          </a:p>
+        </p:txBody>
+      </p:sp>
+      <p:sp>
+        <p:nvSpPr>
+          <p:cNvPr id="8" name="TextBox 7"/>
+          <p:cNvSpPr txBox="1"/>
+          <p:nvPr/>
+        </p:nvSpPr>
+        <p:spPr>
+          <a:xfrm>
+            <a:off x="457200" y="1353312"/>
+            <a:ext cx="5093061" cy="5047488"/>
           </a:xfrm>
           <a:prstGeom prst="rect">
             <a:avLst/>
@@ -7378,7 +6590,7 @@
       </p:sp>
       <p:sp>
         <p:nvSpPr>
-          <p:cNvPr id="6" name="TextBox 5"/>
+          <p:cNvPr id="9" name="TextBox 8"/>
           <p:cNvSpPr txBox="1"/>
           <p:nvPr/>
         </p:nvSpPr>
@@ -8404,21 +7616,173 @@
                 </a:solidFill>
                 <a:latin typeface="Calibri"/>
               </a:rPr>
-              <a:t>UML significa Lenguaje Unificado de Modelado y nacio en los anos... (1/2)</a:t>
-            </a:r>
-          </a:p>
-        </p:txBody>
-      </p:sp>
-      <p:sp>
-        <p:nvSpPr>
-          <p:cNvPr id="5" name="TextBox 4"/>
+              <a:t>Qué es UML</a:t>
+            </a:r>
+          </a:p>
+        </p:txBody>
+      </p:sp>
+      <p:sp>
+        <p:nvSpPr>
+          <p:cNvPr id="5" name="Rounded Rectangle 4"/>
+          <p:cNvSpPr/>
+          <p:nvPr/>
+        </p:nvSpPr>
+        <p:spPr>
+          <a:xfrm>
+            <a:off x="5803166" y="1188719"/>
+            <a:ext cx="5998464" cy="4828032"/>
+          </a:xfrm>
+          <a:prstGeom prst="roundRect">
+            <a:avLst>
+              <a:gd name="adj" fmla="val 4000"/>
+            </a:avLst>
+          </a:prstGeom>
+          <a:solidFill>
+            <a:srgbClr val="E8EEF4"/>
+          </a:solidFill>
+          <a:ln>
+            <a:noFill/>
+          </a:ln>
+        </p:spPr>
+        <p:style>
+          <a:lnRef idx="1">
+            <a:schemeClr val="accent1"/>
+          </a:lnRef>
+          <a:fillRef idx="3">
+            <a:schemeClr val="accent1"/>
+          </a:fillRef>
+          <a:effectRef idx="2">
+            <a:schemeClr val="accent1"/>
+          </a:effectRef>
+          <a:fontRef idx="minor">
+            <a:schemeClr val="lt1"/>
+          </a:fontRef>
+        </p:style>
+        <p:txBody>
+          <a:bodyPr rtlCol="0" anchor="ctr"/>
+          <a:lstStyle/>
+          <a:p>
+            <a:pPr algn="ctr"/>
+          </a:p>
+        </p:txBody>
+      </p:sp>
+      <p:pic>
+        <p:nvPicPr>
+          <p:cNvPr id="6" name="Picture 5" descr="uml-pregunta-paso1.png"/>
+          <p:cNvPicPr>
+            <a:picLocks noChangeAspect="1"/>
+          </p:cNvPicPr>
+          <p:nvPr/>
+        </p:nvPicPr>
+        <p:blipFill>
+          <a:blip r:embed="rId2"/>
+          <a:stretch>
+            <a:fillRect/>
+          </a:stretch>
+        </p:blipFill>
+        <p:spPr>
+          <a:xfrm>
+            <a:off x="5876318" y="1261872"/>
+            <a:ext cx="5852160" cy="4681728"/>
+          </a:xfrm>
+          <a:prstGeom prst="rect">
+            <a:avLst/>
+          </a:prstGeom>
+        </p:spPr>
+      </p:pic>
+      <p:pic>
+        <p:nvPicPr>
+          <p:cNvPr id="7" name="Picture 6" descr="uml-pregunta-paso2.png"/>
+          <p:cNvPicPr>
+            <a:picLocks noChangeAspect="1"/>
+          </p:cNvPicPr>
+          <p:nvPr/>
+        </p:nvPicPr>
+        <p:blipFill>
+          <a:blip r:embed="rId3"/>
+          <a:stretch>
+            <a:fillRect/>
+          </a:stretch>
+        </p:blipFill>
+        <p:spPr>
+          <a:xfrm>
+            <a:off x="5876318" y="1261872"/>
+            <a:ext cx="5852160" cy="4681728"/>
+          </a:xfrm>
+          <a:prstGeom prst="rect">
+            <a:avLst/>
+          </a:prstGeom>
+        </p:spPr>
+      </p:pic>
+      <p:pic>
+        <p:nvPicPr>
+          <p:cNvPr id="8" name="Picture 7" descr="uml-pregunta-paso3.png"/>
+          <p:cNvPicPr>
+            <a:picLocks noChangeAspect="1"/>
+          </p:cNvPicPr>
+          <p:nvPr/>
+        </p:nvPicPr>
+        <p:blipFill>
+          <a:blip r:embed="rId4"/>
+          <a:stretch>
+            <a:fillRect/>
+          </a:stretch>
+        </p:blipFill>
+        <p:spPr>
+          <a:xfrm>
+            <a:off x="5876318" y="1261872"/>
+            <a:ext cx="5852160" cy="4681728"/>
+          </a:xfrm>
+          <a:prstGeom prst="rect">
+            <a:avLst/>
+          </a:prstGeom>
+        </p:spPr>
+      </p:pic>
+      <p:sp>
+        <p:nvSpPr>
+          <p:cNvPr id="13" name="TextBox 12"/>
           <p:cNvSpPr txBox="1"/>
           <p:nvPr/>
         </p:nvSpPr>
         <p:spPr>
           <a:xfrm>
-            <a:off x="457200" y="1170432"/>
-            <a:ext cx="11277295" cy="5230368"/>
+            <a:off x="5870301" y="5961888"/>
+            <a:ext cx="5864193" cy="320040"/>
+          </a:xfrm>
+          <a:prstGeom prst="rect">
+            <a:avLst/>
+          </a:prstGeom>
+          <a:noFill/>
+        </p:spPr>
+        <p:txBody>
+          <a:bodyPr wrap="square">
+            <a:spAutoFit/>
+          </a:bodyPr>
+          <a:lstStyle/>
+          <a:p>
+            <a:pPr algn="ctr"/>
+            <a:r>
+              <a:rPr sz="1100" b="0" i="1">
+                <a:solidFill>
+                  <a:srgbClr val="666666"/>
+                </a:solidFill>
+                <a:latin typeface="Calibri"/>
+              </a:rPr>
+              <a:t>Clic para avanzar la animación</a:t>
+            </a:r>
+          </a:p>
+        </p:txBody>
+      </p:sp>
+      <p:sp>
+        <p:nvSpPr>
+          <p:cNvPr id="14" name="TextBox 13"/>
+          <p:cNvSpPr txBox="1"/>
+          <p:nvPr/>
+        </p:nvSpPr>
+        <p:spPr>
+          <a:xfrm>
+            <a:off x="457200" y="1353312"/>
+            <a:ext cx="5093061" cy="5047488"/>
           </a:xfrm>
           <a:prstGeom prst="rect">
             <a:avLst/>
@@ -8443,7 +7807,7 @@
                 </a:solidFill>
                 <a:latin typeface="Calibri"/>
               </a:rPr>
-              <a:t>–   UML significa Lenguaje Unificado de Modelado y nacio en los anos noventa para resolver un problema muy concreto: tres personas leian la misma frase en espanol y entendian tres sistemas distintos.</a:t>
+              <a:t>–   Lenguaje Unificado de Modelado: gráfico y estandarizado, ni de programación ni una herramienta.</a:t>
             </a:r>
           </a:p>
           <a:p>
@@ -8459,7 +7823,7 @@
                 </a:solidFill>
                 <a:latin typeface="Calibri"/>
               </a:rPr>
-              <a:t>–   Es un lenguaje grafico estandarizado, no un lenguaje de programacion y no una herramienta; usted puede dibujar UML valido en draw.io, en Mermaid o en el tablero con marcador</a:t>
+              <a:t>–   Lo normalizado es el significado de cajas, líneas y números, no el programa donde se pintan.</a:t>
             </a:r>
           </a:p>
           <a:p>
@@ -8475,7 +7839,7 @@
                 </a:solidFill>
                 <a:latin typeface="Calibri"/>
               </a:rPr>
-              <a:t>–   Porque lo que esta normalizado es el significado de las cajas, las lineas y los numeros, no el programa donde se pintan.</a:t>
+              <a:t>–   Tiene catorce diagramas; un analista usa cuatro o cinco.</a:t>
             </a:r>
           </a:p>
           <a:p>
@@ -8491,14 +7855,14 @@
                 </a:solidFill>
                 <a:latin typeface="Calibri"/>
               </a:rPr>
-              <a:t>–   La especificacion tiene catorce tipos de diagrama, pero en la vida real de un analista se usan cuatro o cinco de forma constante y los demas se consultan cuando se necesitan; querer aprender los catorce es la manera mas rapida de no aprender ninguno.</a:t>
-            </a:r>
-          </a:p>
-        </p:txBody>
-      </p:sp>
-      <p:sp>
-        <p:nvSpPr>
-          <p:cNvPr id="6" name="TextBox 5"/>
+              <a:t>–   «Un dueño puede tener varias mascotas» deja preguntas que el diagrama contesta con dos números y una línea.</a:t>
+            </a:r>
+          </a:p>
+        </p:txBody>
+      </p:sp>
+      <p:sp>
+        <p:nvSpPr>
+          <p:cNvPr id="15" name="TextBox 14"/>
           <p:cNvSpPr txBox="1"/>
           <p:nvPr/>
         </p:nvSpPr>
@@ -8536,6 +7900,142 @@
   <p:clrMapOvr>
     <a:masterClrMapping/>
   </p:clrMapOvr>
+  <p:timing>
+    <p:tnLst>
+      <p:par>
+        <p:cTn id="1" dur="indefinite" restart="never" nodeType="tmRoot">
+          <p:childTnLst>
+            <p:seq concurrent="1" nextAc="seek">
+              <p:cTn id="2" dur="indefinite" nodeType="mainSeq">
+                <p:childTnLst>
+                  <p:par>
+                    <p:cTn id="3" fill="hold">
+                      <p:stCondLst>
+                        <p:cond delay="indefinite"/>
+                      </p:stCondLst>
+                      <p:childTnLst>
+                        <p:par>
+                          <p:cTn id="4" fill="hold">
+                            <p:stCondLst>
+                              <p:cond delay="0"/>
+                            </p:stCondLst>
+                            <p:childTnLst>
+                              <p:par>
+                                <p:cTn id="5" presetID="10" presetClass="entr" presetSubtype="0" fill="hold" nodeType="clickEffect">
+                                  <p:stCondLst>
+                                    <p:cond delay="0"/>
+                                  </p:stCondLst>
+                                  <p:childTnLst>
+                                    <p:set>
+                                      <p:cBhvr>
+                                        <p:cTn id="6" dur="1" fill="hold">
+                                          <p:stCondLst>
+                                            <p:cond delay="0"/>
+                                          </p:stCondLst>
+                                        </p:cTn>
+                                        <p:tgtEl>
+                                          <p:spTgt spid="7"/>
+                                        </p:tgtEl>
+                                        <p:attrNameLst>
+                                          <p:attrName>style.visibility</p:attrName>
+                                        </p:attrNameLst>
+                                      </p:cBhvr>
+                                      <p:to>
+                                        <p:strVal val="visible"/>
+                                      </p:to>
+                                    </p:set>
+                                    <p:animEffect transition="in" filter="fade">
+                                      <p:cBhvr>
+                                        <p:cTn id="7" dur="450"/>
+                                        <p:tgtEl>
+                                          <p:spTgt spid="7"/>
+                                        </p:tgtEl>
+                                      </p:cBhvr>
+                                    </p:animEffect>
+                                  </p:childTnLst>
+                                </p:cTn>
+                              </p:par>
+                            </p:childTnLst>
+                          </p:cTn>
+                        </p:par>
+                      </p:childTnLst>
+                    </p:cTn>
+                  </p:par>
+                  <p:par>
+                    <p:cTn id="8" fill="hold">
+                      <p:stCondLst>
+                        <p:cond delay="indefinite"/>
+                      </p:stCondLst>
+                      <p:childTnLst>
+                        <p:par>
+                          <p:cTn id="9" fill="hold">
+                            <p:stCondLst>
+                              <p:cond delay="0"/>
+                            </p:stCondLst>
+                            <p:childTnLst>
+                              <p:par>
+                                <p:cTn id="10" presetID="10" presetClass="entr" presetSubtype="0" fill="hold" nodeType="clickEffect">
+                                  <p:stCondLst>
+                                    <p:cond delay="0"/>
+                                  </p:stCondLst>
+                                  <p:childTnLst>
+                                    <p:set>
+                                      <p:cBhvr>
+                                        <p:cTn id="11" dur="1" fill="hold">
+                                          <p:stCondLst>
+                                            <p:cond delay="0"/>
+                                          </p:stCondLst>
+                                        </p:cTn>
+                                        <p:tgtEl>
+                                          <p:spTgt spid="8"/>
+                                        </p:tgtEl>
+                                        <p:attrNameLst>
+                                          <p:attrName>style.visibility</p:attrName>
+                                        </p:attrNameLst>
+                                      </p:cBhvr>
+                                      <p:to>
+                                        <p:strVal val="visible"/>
+                                      </p:to>
+                                    </p:set>
+                                    <p:animEffect transition="in" filter="fade">
+                                      <p:cBhvr>
+                                        <p:cTn id="12" dur="450"/>
+                                        <p:tgtEl>
+                                          <p:spTgt spid="8"/>
+                                        </p:tgtEl>
+                                      </p:cBhvr>
+                                    </p:animEffect>
+                                  </p:childTnLst>
+                                </p:cTn>
+                              </p:par>
+                            </p:childTnLst>
+                          </p:cTn>
+                        </p:par>
+                      </p:childTnLst>
+                    </p:cTn>
+                  </p:par>
+                </p:childTnLst>
+              </p:cTn>
+              <p:prevCondLst>
+                <p:cond evt="onPrev" delay="0">
+                  <p:tgtEl>
+                    <p:sldTgt/>
+                  </p:tgtEl>
+                </p:cond>
+              </p:prevCondLst>
+              <p:nextCondLst>
+                <p:cond evt="onNext" delay="0">
+                  <p:tgtEl>
+                    <p:sldTgt/>
+                  </p:tgtEl>
+                </p:cond>
+              </p:nextCondLst>
+            </p:seq>
+          </p:childTnLst>
+        </p:cTn>
+      </p:par>
+    </p:tnLst>
+  </p:timing>
 </p:sld>
 </file>
 
@@ -8672,21 +8172,173 @@
                 </a:solidFill>
                 <a:latin typeface="Calibri"/>
               </a:rPr>
-              <a:t>UML significa Lenguaje Unificado de Modelado y nacio en los anos... (2/2)</a:t>
-            </a:r>
-          </a:p>
-        </p:txBody>
-      </p:sp>
-      <p:sp>
-        <p:nvSpPr>
-          <p:cNvPr id="5" name="TextBox 4"/>
+              <a:t>Vista estructural y vista de comportamiento</a:t>
+            </a:r>
+          </a:p>
+        </p:txBody>
+      </p:sp>
+      <p:sp>
+        <p:nvSpPr>
+          <p:cNvPr id="5" name="Rounded Rectangle 4"/>
+          <p:cNvSpPr/>
+          <p:nvPr/>
+        </p:nvSpPr>
+        <p:spPr>
+          <a:xfrm>
+            <a:off x="5803166" y="1188719"/>
+            <a:ext cx="5998464" cy="4828032"/>
+          </a:xfrm>
+          <a:prstGeom prst="roundRect">
+            <a:avLst>
+              <a:gd name="adj" fmla="val 4000"/>
+            </a:avLst>
+          </a:prstGeom>
+          <a:solidFill>
+            <a:srgbClr val="E8EEF4"/>
+          </a:solidFill>
+          <a:ln>
+            <a:noFill/>
+          </a:ln>
+        </p:spPr>
+        <p:style>
+          <a:lnRef idx="1">
+            <a:schemeClr val="accent1"/>
+          </a:lnRef>
+          <a:fillRef idx="3">
+            <a:schemeClr val="accent1"/>
+          </a:fillRef>
+          <a:effectRef idx="2">
+            <a:schemeClr val="accent1"/>
+          </a:effectRef>
+          <a:fontRef idx="minor">
+            <a:schemeClr val="lt1"/>
+          </a:fontRef>
+        </p:style>
+        <p:txBody>
+          <a:bodyPr rtlCol="0" anchor="ctr"/>
+          <a:lstStyle/>
+          <a:p>
+            <a:pPr algn="ctr"/>
+          </a:p>
+        </p:txBody>
+      </p:sp>
+      <p:pic>
+        <p:nvPicPr>
+          <p:cNvPr id="6" name="Picture 5" descr="dos-vistas-paso1.png"/>
+          <p:cNvPicPr>
+            <a:picLocks noChangeAspect="1"/>
+          </p:cNvPicPr>
+          <p:nvPr/>
+        </p:nvPicPr>
+        <p:blipFill>
+          <a:blip r:embed="rId2"/>
+          <a:stretch>
+            <a:fillRect/>
+          </a:stretch>
+        </p:blipFill>
+        <p:spPr>
+          <a:xfrm>
+            <a:off x="5876318" y="1261872"/>
+            <a:ext cx="5852160" cy="4681728"/>
+          </a:xfrm>
+          <a:prstGeom prst="rect">
+            <a:avLst/>
+          </a:prstGeom>
+        </p:spPr>
+      </p:pic>
+      <p:pic>
+        <p:nvPicPr>
+          <p:cNvPr id="7" name="Picture 6" descr="dos-vistas-paso2.png"/>
+          <p:cNvPicPr>
+            <a:picLocks noChangeAspect="1"/>
+          </p:cNvPicPr>
+          <p:nvPr/>
+        </p:nvPicPr>
+        <p:blipFill>
+          <a:blip r:embed="rId3"/>
+          <a:stretch>
+            <a:fillRect/>
+          </a:stretch>
+        </p:blipFill>
+        <p:spPr>
+          <a:xfrm>
+            <a:off x="5876318" y="1261872"/>
+            <a:ext cx="5852160" cy="4681728"/>
+          </a:xfrm>
+          <a:prstGeom prst="rect">
+            <a:avLst/>
+          </a:prstGeom>
+        </p:spPr>
+      </p:pic>
+      <p:pic>
+        <p:nvPicPr>
+          <p:cNvPr id="8" name="Picture 7" descr="dos-vistas-paso3.png"/>
+          <p:cNvPicPr>
+            <a:picLocks noChangeAspect="1"/>
+          </p:cNvPicPr>
+          <p:nvPr/>
+        </p:nvPicPr>
+        <p:blipFill>
+          <a:blip r:embed="rId4"/>
+          <a:stretch>
+            <a:fillRect/>
+          </a:stretch>
+        </p:blipFill>
+        <p:spPr>
+          <a:xfrm>
+            <a:off x="5876318" y="1261872"/>
+            <a:ext cx="5852160" cy="4681728"/>
+          </a:xfrm>
+          <a:prstGeom prst="rect">
+            <a:avLst/>
+          </a:prstGeom>
+        </p:spPr>
+      </p:pic>
+      <p:sp>
+        <p:nvSpPr>
+          <p:cNvPr id="13" name="TextBox 12"/>
           <p:cNvSpPr txBox="1"/>
           <p:nvPr/>
         </p:nvSpPr>
         <p:spPr>
           <a:xfrm>
-            <a:off x="457200" y="1170432"/>
-            <a:ext cx="11277295" cy="5230368"/>
+            <a:off x="5870301" y="5961888"/>
+            <a:ext cx="5864193" cy="320040"/>
+          </a:xfrm>
+          <a:prstGeom prst="rect">
+            <a:avLst/>
+          </a:prstGeom>
+          <a:noFill/>
+        </p:spPr>
+        <p:txBody>
+          <a:bodyPr wrap="square">
+            <a:spAutoFit/>
+          </a:bodyPr>
+          <a:lstStyle/>
+          <a:p>
+            <a:pPr algn="ctr"/>
+            <a:r>
+              <a:rPr sz="1100" b="0" i="1">
+                <a:solidFill>
+                  <a:srgbClr val="666666"/>
+                </a:solidFill>
+                <a:latin typeface="Calibri"/>
+              </a:rPr>
+              <a:t>Clic para avanzar la animación</a:t>
+            </a:r>
+          </a:p>
+        </p:txBody>
+      </p:sp>
+      <p:sp>
+        <p:nvSpPr>
+          <p:cNvPr id="14" name="TextBox 13"/>
+          <p:cNvSpPr txBox="1"/>
+          <p:nvPr/>
+        </p:nvSpPr>
+        <p:spPr>
+          <a:xfrm>
+            <a:off x="457200" y="1353312"/>
+            <a:ext cx="5093061" cy="5047488"/>
           </a:xfrm>
           <a:prstGeom prst="rect">
             <a:avLst/>
@@ -8711,7 +8363,7 @@
                 </a:solidFill>
                 <a:latin typeface="Calibri"/>
               </a:rPr>
-              <a:t>–   En la clinica, la frase un dueno puede tener varias mascotas parece clarisima hasta que alguien pregunta si una mascota puede tener dos duenos, si el dueno existe antes de registrar la mascota o si al borrar el dueno desaparece la mascota</a:t>
+              <a:t>–   Estructural: de qué está hecho el sistema (clases, objetos, componentes, despliegue).</a:t>
             </a:r>
           </a:p>
           <a:p>
@@ -8727,14 +8379,46 @@
                 </a:solidFill>
                 <a:latin typeface="Calibri"/>
               </a:rPr>
-              <a:t>–   El diagrama contesta esas tres preguntas con dos numeros y una linea, y ahi es donde UML se gana el sueldo.</a:t>
-            </a:r>
-          </a:p>
-        </p:txBody>
-      </p:sp>
-      <p:sp>
-        <p:nvSpPr>
-          <p:cNvPr id="6" name="TextBox 5"/>
+              <a:t>–   Comportamiento: qué pasa y en qué orden (casos de uso, actividades, secuencia, estados).</a:t>
+            </a:r>
+          </a:p>
+          <a:p>
+            <a:pPr>
+              <a:spcAft>
+                <a:spcPts val="800"/>
+              </a:spcAft>
+            </a:pPr>
+            <a:r>
+              <a:rPr sz="2000" b="0" i="0">
+                <a:solidFill>
+                  <a:srgbClr val="333333"/>
+                </a:solidFill>
+                <a:latin typeface="Calibri"/>
+              </a:rPr>
+              <a:t>–   Un sistema necesita las dos, como una casa el plano de plantas y el de instalaciones.</a:t>
+            </a:r>
+          </a:p>
+          <a:p>
+            <a:pPr>
+              <a:spcAft>
+                <a:spcPts val="800"/>
+              </a:spcAft>
+            </a:pPr>
+            <a:r>
+              <a:rPr sz="2000" b="0" i="0">
+                <a:solidFill>
+                  <a:srgbClr val="333333"/>
+                </a:solidFill>
+                <a:latin typeface="Calibri"/>
+              </a:rPr>
+              <a:t>–   Los diagramas no reemplazan los requisitos: los dibujan.</a:t>
+            </a:r>
+          </a:p>
+        </p:txBody>
+      </p:sp>
+      <p:sp>
+        <p:nvSpPr>
+          <p:cNvPr id="15" name="TextBox 14"/>
           <p:cNvSpPr txBox="1"/>
           <p:nvPr/>
         </p:nvSpPr>
@@ -8772,6 +8456,142 @@
   <p:clrMapOvr>
     <a:masterClrMapping/>
   </p:clrMapOvr>
+  <p:timing>
+    <p:tnLst>
+      <p:par>
+        <p:cTn id="1" dur="indefinite" restart="never" nodeType="tmRoot">
+          <p:childTnLst>
+            <p:seq concurrent="1" nextAc="seek">
+              <p:cTn id="2" dur="indefinite" nodeType="mainSeq">
+                <p:childTnLst>
+                  <p:par>
+                    <p:cTn id="3" fill="hold">
+                      <p:stCondLst>
+                        <p:cond delay="indefinite"/>
+                      </p:stCondLst>
+                      <p:childTnLst>
+                        <p:par>
+                          <p:cTn id="4" fill="hold">
+                            <p:stCondLst>
+                              <p:cond delay="0"/>
+                            </p:stCondLst>
+                            <p:childTnLst>
+                              <p:par>
+                                <p:cTn id="5" presetID="10" presetClass="entr" presetSubtype="0" fill="hold" nodeType="clickEffect">
+                                  <p:stCondLst>
+                                    <p:cond delay="0"/>
+                                  </p:stCondLst>
+                                  <p:childTnLst>
+                                    <p:set>
+                                      <p:cBhvr>
+                                        <p:cTn id="6" dur="1" fill="hold">
+                                          <p:stCondLst>
+                                            <p:cond delay="0"/>
+                                          </p:stCondLst>
+                                        </p:cTn>
+                                        <p:tgtEl>
+                                          <p:spTgt spid="7"/>
+                                        </p:tgtEl>
+                                        <p:attrNameLst>
+                                          <p:attrName>style.visibility</p:attrName>
+                                        </p:attrNameLst>
+                                      </p:cBhvr>
+                                      <p:to>
+                                        <p:strVal val="visible"/>
+                                      </p:to>
+                                    </p:set>
+                                    <p:animEffect transition="in" filter="fade">
+                                      <p:cBhvr>
+                                        <p:cTn id="7" dur="450"/>
+                                        <p:tgtEl>
+                                          <p:spTgt spid="7"/>
+                                        </p:tgtEl>
+                                      </p:cBhvr>
+                                    </p:animEffect>
+                                  </p:childTnLst>
+                                </p:cTn>
+                              </p:par>
+                            </p:childTnLst>
+                          </p:cTn>
+                        </p:par>
+                      </p:childTnLst>
+                    </p:cTn>
+                  </p:par>
+                  <p:par>
+                    <p:cTn id="8" fill="hold">
+                      <p:stCondLst>
+                        <p:cond delay="indefinite"/>
+                      </p:stCondLst>
+                      <p:childTnLst>
+                        <p:par>
+                          <p:cTn id="9" fill="hold">
+                            <p:stCondLst>
+                              <p:cond delay="0"/>
+                            </p:stCondLst>
+                            <p:childTnLst>
+                              <p:par>
+                                <p:cTn id="10" presetID="10" presetClass="entr" presetSubtype="0" fill="hold" nodeType="clickEffect">
+                                  <p:stCondLst>
+                                    <p:cond delay="0"/>
+                                  </p:stCondLst>
+                                  <p:childTnLst>
+                                    <p:set>
+                                      <p:cBhvr>
+                                        <p:cTn id="11" dur="1" fill="hold">
+                                          <p:stCondLst>
+                                            <p:cond delay="0"/>
+                                          </p:stCondLst>
+                                        </p:cTn>
+                                        <p:tgtEl>
+                                          <p:spTgt spid="8"/>
+                                        </p:tgtEl>
+                                        <p:attrNameLst>
+                                          <p:attrName>style.visibility</p:attrName>
+                                        </p:attrNameLst>
+                                      </p:cBhvr>
+                                      <p:to>
+                                        <p:strVal val="visible"/>
+                                      </p:to>
+                                    </p:set>
+                                    <p:animEffect transition="in" filter="fade">
+                                      <p:cBhvr>
+                                        <p:cTn id="12" dur="450"/>
+                                        <p:tgtEl>
+                                          <p:spTgt spid="8"/>
+                                        </p:tgtEl>
+                                      </p:cBhvr>
+                                    </p:animEffect>
+                                  </p:childTnLst>
+                                </p:cTn>
+                              </p:par>
+                            </p:childTnLst>
+                          </p:cTn>
+                        </p:par>
+                      </p:childTnLst>
+                    </p:cTn>
+                  </p:par>
+                </p:childTnLst>
+              </p:cTn>
+              <p:prevCondLst>
+                <p:cond evt="onPrev" delay="0">
+                  <p:tgtEl>
+                    <p:sldTgt/>
+                  </p:tgtEl>
+                </p:cond>
+              </p:prevCondLst>
+              <p:nextCondLst>
+                <p:cond evt="onNext" delay="0">
+                  <p:tgtEl>
+                    <p:sldTgt/>
+                  </p:tgtEl>
+                </p:cond>
+              </p:nextCondLst>
+            </p:seq>
+          </p:childTnLst>
+        </p:cTn>
+      </p:par>
+    </p:tnLst>
+  </p:timing>
 </p:sld>
 </file>
 
@@ -8908,21 +8728,173 @@
                 </a:solidFill>
                 <a:latin typeface="Calibri"/>
               </a:rPr>
-              <a:t>Los diagramas se agrupan en dos grandes vistas</a:t>
-            </a:r>
-          </a:p>
-        </p:txBody>
-      </p:sp>
-      <p:sp>
-        <p:nvSpPr>
-          <p:cNvPr id="5" name="TextBox 4"/>
+              <a:t>La clase: tres compartimentos</a:t>
+            </a:r>
+          </a:p>
+        </p:txBody>
+      </p:sp>
+      <p:sp>
+        <p:nvSpPr>
+          <p:cNvPr id="5" name="Rounded Rectangle 4"/>
+          <p:cNvSpPr/>
+          <p:nvPr/>
+        </p:nvSpPr>
+        <p:spPr>
+          <a:xfrm>
+            <a:off x="5803166" y="1188719"/>
+            <a:ext cx="5998464" cy="4828032"/>
+          </a:xfrm>
+          <a:prstGeom prst="roundRect">
+            <a:avLst>
+              <a:gd name="adj" fmla="val 4000"/>
+            </a:avLst>
+          </a:prstGeom>
+          <a:solidFill>
+            <a:srgbClr val="E8EEF4"/>
+          </a:solidFill>
+          <a:ln>
+            <a:noFill/>
+          </a:ln>
+        </p:spPr>
+        <p:style>
+          <a:lnRef idx="1">
+            <a:schemeClr val="accent1"/>
+          </a:lnRef>
+          <a:fillRef idx="3">
+            <a:schemeClr val="accent1"/>
+          </a:fillRef>
+          <a:effectRef idx="2">
+            <a:schemeClr val="accent1"/>
+          </a:effectRef>
+          <a:fontRef idx="minor">
+            <a:schemeClr val="lt1"/>
+          </a:fontRef>
+        </p:style>
+        <p:txBody>
+          <a:bodyPr rtlCol="0" anchor="ctr"/>
+          <a:lstStyle/>
+          <a:p>
+            <a:pPr algn="ctr"/>
+          </a:p>
+        </p:txBody>
+      </p:sp>
+      <p:pic>
+        <p:nvPicPr>
+          <p:cNvPr id="6" name="Picture 5" descr="clase-compartimentos-paso1.png"/>
+          <p:cNvPicPr>
+            <a:picLocks noChangeAspect="1"/>
+          </p:cNvPicPr>
+          <p:nvPr/>
+        </p:nvPicPr>
+        <p:blipFill>
+          <a:blip r:embed="rId2"/>
+          <a:stretch>
+            <a:fillRect/>
+          </a:stretch>
+        </p:blipFill>
+        <p:spPr>
+          <a:xfrm>
+            <a:off x="5876318" y="1261872"/>
+            <a:ext cx="5852160" cy="4681728"/>
+          </a:xfrm>
+          <a:prstGeom prst="rect">
+            <a:avLst/>
+          </a:prstGeom>
+        </p:spPr>
+      </p:pic>
+      <p:pic>
+        <p:nvPicPr>
+          <p:cNvPr id="7" name="Picture 6" descr="clase-compartimentos-paso2.png"/>
+          <p:cNvPicPr>
+            <a:picLocks noChangeAspect="1"/>
+          </p:cNvPicPr>
+          <p:nvPr/>
+        </p:nvPicPr>
+        <p:blipFill>
+          <a:blip r:embed="rId3"/>
+          <a:stretch>
+            <a:fillRect/>
+          </a:stretch>
+        </p:blipFill>
+        <p:spPr>
+          <a:xfrm>
+            <a:off x="5876318" y="1261872"/>
+            <a:ext cx="5852160" cy="4681728"/>
+          </a:xfrm>
+          <a:prstGeom prst="rect">
+            <a:avLst/>
+          </a:prstGeom>
+        </p:spPr>
+      </p:pic>
+      <p:pic>
+        <p:nvPicPr>
+          <p:cNvPr id="8" name="Picture 7" descr="clase-compartimentos-paso3.png"/>
+          <p:cNvPicPr>
+            <a:picLocks noChangeAspect="1"/>
+          </p:cNvPicPr>
+          <p:nvPr/>
+        </p:nvPicPr>
+        <p:blipFill>
+          <a:blip r:embed="rId4"/>
+          <a:stretch>
+            <a:fillRect/>
+          </a:stretch>
+        </p:blipFill>
+        <p:spPr>
+          <a:xfrm>
+            <a:off x="5876318" y="1261872"/>
+            <a:ext cx="5852160" cy="4681728"/>
+          </a:xfrm>
+          <a:prstGeom prst="rect">
+            <a:avLst/>
+          </a:prstGeom>
+        </p:spPr>
+      </p:pic>
+      <p:sp>
+        <p:nvSpPr>
+          <p:cNvPr id="13" name="TextBox 12"/>
           <p:cNvSpPr txBox="1"/>
           <p:nvPr/>
         </p:nvSpPr>
         <p:spPr>
           <a:xfrm>
-            <a:off x="457200" y="1170432"/>
-            <a:ext cx="11277295" cy="5230368"/>
+            <a:off x="5870301" y="5961888"/>
+            <a:ext cx="5864193" cy="320040"/>
+          </a:xfrm>
+          <a:prstGeom prst="rect">
+            <a:avLst/>
+          </a:prstGeom>
+          <a:noFill/>
+        </p:spPr>
+        <p:txBody>
+          <a:bodyPr wrap="square">
+            <a:spAutoFit/>
+          </a:bodyPr>
+          <a:lstStyle/>
+          <a:p>
+            <a:pPr algn="ctr"/>
+            <a:r>
+              <a:rPr sz="1100" b="0" i="1">
+                <a:solidFill>
+                  <a:srgbClr val="666666"/>
+                </a:solidFill>
+                <a:latin typeface="Calibri"/>
+              </a:rPr>
+              <a:t>Clic para avanzar la animación</a:t>
+            </a:r>
+          </a:p>
+        </p:txBody>
+      </p:sp>
+      <p:sp>
+        <p:nvSpPr>
+          <p:cNvPr id="14" name="TextBox 13"/>
+          <p:cNvSpPr txBox="1"/>
+          <p:nvPr/>
+        </p:nvSpPr>
+        <p:spPr>
+          <a:xfrm>
+            <a:off x="457200" y="1353312"/>
+            <a:ext cx="5093061" cy="5047488"/>
           </a:xfrm>
           <a:prstGeom prst="rect">
             <a:avLst/>
@@ -8947,7 +8919,7 @@
                 </a:solidFill>
                 <a:latin typeface="Calibri"/>
               </a:rPr>
-              <a:t>–   La vista estructural muestra de que esta hecho el sistema y no cambia con el tiempo: diagrama de clases, de objetos, de componentes y de despliegue.</a:t>
+              <a:t>–   Arriba el nombre en singular (Mascota), en medio los atributos, abajo los métodos.</a:t>
             </a:r>
           </a:p>
           <a:p>
@@ -8963,7 +8935,7 @@
                 </a:solidFill>
                 <a:latin typeface="Calibri"/>
               </a:rPr>
-              <a:t>–   La vista de comportamiento muestra que pasa y en que orden: casos de uso, actividades, secuencia y maquina de estados.</a:t>
+              <a:t>–   Atributo: visibilidad, nombre y tipo: -nombre: String (- privado, + público).</a:t>
             </a:r>
           </a:p>
           <a:p>
@@ -8979,7 +8951,7 @@
                 </a:solidFill>
                 <a:latin typeface="Calibri"/>
               </a:rPr>
-              <a:t>–   En la practica profesional los que sobreviven son cinco: casos de uso para acordar el alcance con el cliente, clases para el modelo del dominio</a:t>
+              <a:t>–   Método: firma y retorno: +calcularEdad(): int.</a:t>
             </a:r>
           </a:p>
           <a:p>
@@ -8995,30 +8967,14 @@
                 </a:solidFill>
                 <a:latin typeface="Calibri"/>
               </a:rPr>
-              <a:t>–   Secuencia para entender un flujo complicado paso a paso, actividades para procesos de negocio con decisiones, y despliegue cuando hay que explicar donde vive cada cosa.</a:t>
-            </a:r>
-          </a:p>
-          <a:p>
-            <a:pPr>
-              <a:spcAft>
-                <a:spcPts val="800"/>
-              </a:spcAft>
-            </a:pPr>
-            <a:r>
-              <a:rPr sz="2000" b="0" i="0">
-                <a:solidFill>
-                  <a:srgbClr val="333333"/>
-                </a:solidFill>
-                <a:latin typeface="Calibri"/>
-              </a:rPr>
-              <a:t>–   Aclaracion importante: los diagramas no reemplazan el documento de requisitos, lo dibujan; cada clase que aparezca hoy debe poder rastrearse a un RF o a una historia del backlog.</a:t>
-            </a:r>
-          </a:p>
-        </p:txBody>
-      </p:sp>
-      <p:sp>
-        <p:nvSpPr>
-          <p:cNvPr id="6" name="TextBox 5"/>
+              <a:t>–   Modelo de dominio: solo conceptos del negocio; nada de MascotaDAO ni ConexionBD.</a:t>
+            </a:r>
+          </a:p>
+        </p:txBody>
+      </p:sp>
+      <p:sp>
+        <p:nvSpPr>
+          <p:cNvPr id="15" name="TextBox 14"/>
           <p:cNvSpPr txBox="1"/>
           <p:nvPr/>
         </p:nvSpPr>
@@ -9056,6 +9012,142 @@
   <p:clrMapOvr>
     <a:masterClrMapping/>
   </p:clrMapOvr>
+  <p:timing>
+    <p:tnLst>
+      <p:par>
+        <p:cTn id="1" dur="indefinite" restart="never" nodeType="tmRoot">
+          <p:childTnLst>
+            <p:seq concurrent="1" nextAc="seek">
+              <p:cTn id="2" dur="indefinite" nodeType="mainSeq">
+                <p:childTnLst>
+                  <p:par>
+                    <p:cTn id="3" fill="hold">
+                      <p:stCondLst>
+                        <p:cond delay="indefinite"/>
+                      </p:stCondLst>
+                      <p:childTnLst>
+                        <p:par>
+                          <p:cTn id="4" fill="hold">
+                            <p:stCondLst>
+                              <p:cond delay="0"/>
+                            </p:stCondLst>
+                            <p:childTnLst>
+                              <p:par>
+                                <p:cTn id="5" presetID="10" presetClass="entr" presetSubtype="0" fill="hold" nodeType="clickEffect">
+                                  <p:stCondLst>
+                                    <p:cond delay="0"/>
+                                  </p:stCondLst>
+                                  <p:childTnLst>
+                                    <p:set>
+                                      <p:cBhvr>
+                                        <p:cTn id="6" dur="1" fill="hold">
+                                          <p:stCondLst>
+                                            <p:cond delay="0"/>
+                                          </p:stCondLst>
+                                        </p:cTn>
+                                        <p:tgtEl>
+                                          <p:spTgt spid="7"/>
+                                        </p:tgtEl>
+                                        <p:attrNameLst>
+                                          <p:attrName>style.visibility</p:attrName>
+                                        </p:attrNameLst>
+                                      </p:cBhvr>
+                                      <p:to>
+                                        <p:strVal val="visible"/>
+                                      </p:to>
+                                    </p:set>
+                                    <p:animEffect transition="in" filter="fade">
+                                      <p:cBhvr>
+                                        <p:cTn id="7" dur="450"/>
+                                        <p:tgtEl>
+                                          <p:spTgt spid="7"/>
+                                        </p:tgtEl>
+                                      </p:cBhvr>
+                                    </p:animEffect>
+                                  </p:childTnLst>
+                                </p:cTn>
+                              </p:par>
+                            </p:childTnLst>
+                          </p:cTn>
+                        </p:par>
+                      </p:childTnLst>
+                    </p:cTn>
+                  </p:par>
+                  <p:par>
+                    <p:cTn id="8" fill="hold">
+                      <p:stCondLst>
+                        <p:cond delay="indefinite"/>
+                      </p:stCondLst>
+                      <p:childTnLst>
+                        <p:par>
+                          <p:cTn id="9" fill="hold">
+                            <p:stCondLst>
+                              <p:cond delay="0"/>
+                            </p:stCondLst>
+                            <p:childTnLst>
+                              <p:par>
+                                <p:cTn id="10" presetID="10" presetClass="entr" presetSubtype="0" fill="hold" nodeType="clickEffect">
+                                  <p:stCondLst>
+                                    <p:cond delay="0"/>
+                                  </p:stCondLst>
+                                  <p:childTnLst>
+                                    <p:set>
+                                      <p:cBhvr>
+                                        <p:cTn id="11" dur="1" fill="hold">
+                                          <p:stCondLst>
+                                            <p:cond delay="0"/>
+                                          </p:stCondLst>
+                                        </p:cTn>
+                                        <p:tgtEl>
+                                          <p:spTgt spid="8"/>
+                                        </p:tgtEl>
+                                        <p:attrNameLst>
+                                          <p:attrName>style.visibility</p:attrName>
+                                        </p:attrNameLst>
+                                      </p:cBhvr>
+                                      <p:to>
+                                        <p:strVal val="visible"/>
+                                      </p:to>
+                                    </p:set>
+                                    <p:animEffect transition="in" filter="fade">
+                                      <p:cBhvr>
+                                        <p:cTn id="12" dur="450"/>
+                                        <p:tgtEl>
+                                          <p:spTgt spid="8"/>
+                                        </p:tgtEl>
+                                      </p:cBhvr>
+                                    </p:animEffect>
+                                  </p:childTnLst>
+                                </p:cTn>
+                              </p:par>
+                            </p:childTnLst>
+                          </p:cTn>
+                        </p:par>
+                      </p:childTnLst>
+                    </p:cTn>
+                  </p:par>
+                </p:childTnLst>
+              </p:cTn>
+              <p:prevCondLst>
+                <p:cond evt="onPrev" delay="0">
+                  <p:tgtEl>
+                    <p:sldTgt/>
+                  </p:tgtEl>
+                </p:cond>
+              </p:prevCondLst>
+              <p:nextCondLst>
+                <p:cond evt="onNext" delay="0">
+                  <p:tgtEl>
+                    <p:sldTgt/>
+                  </p:tgtEl>
+                </p:cond>
+              </p:nextCondLst>
+            </p:seq>
+          </p:childTnLst>
+        </p:cTn>
+      </p:par>
+    </p:tnLst>
+  </p:timing>
 </p:sld>
 </file>
 
@@ -9192,21 +9284,271 @@
                 </a:solidFill>
                 <a:latin typeface="Calibri"/>
               </a:rPr>
-              <a:t>El diagrama de clases se dibuja con una caja de tres compartimentos:... (1/2)</a:t>
-            </a:r>
-          </a:p>
-        </p:txBody>
-      </p:sp>
-      <p:sp>
-        <p:nvSpPr>
-          <p:cNvPr id="5" name="TextBox 4"/>
+              <a:t>El diagrama de clases en Mermaid</a:t>
+            </a:r>
+          </a:p>
+        </p:txBody>
+      </p:sp>
+      <p:sp>
+        <p:nvSpPr>
+          <p:cNvPr id="5" name="Rounded Rectangle 4"/>
+          <p:cNvSpPr/>
+          <p:nvPr/>
+        </p:nvSpPr>
+        <p:spPr>
+          <a:xfrm>
+            <a:off x="457200" y="1261872"/>
+            <a:ext cx="11277295" cy="4997707"/>
+          </a:xfrm>
+          <a:prstGeom prst="roundRect">
+            <a:avLst>
+              <a:gd name="adj" fmla="val 4000"/>
+            </a:avLst>
+          </a:prstGeom>
+          <a:solidFill>
+            <a:srgbClr val="1E1E1E"/>
+          </a:solidFill>
+          <a:ln>
+            <a:noFill/>
+          </a:ln>
+        </p:spPr>
+        <p:style>
+          <a:lnRef idx="1">
+            <a:schemeClr val="accent1"/>
+          </a:lnRef>
+          <a:fillRef idx="3">
+            <a:schemeClr val="accent1"/>
+          </a:fillRef>
+          <a:effectRef idx="2">
+            <a:schemeClr val="accent1"/>
+          </a:effectRef>
+          <a:fontRef idx="minor">
+            <a:schemeClr val="lt1"/>
+          </a:fontRef>
+        </p:style>
+        <p:txBody>
+          <a:bodyPr rtlCol="0" anchor="ctr"/>
+          <a:lstStyle/>
+          <a:p>
+            <a:pPr algn="ctr"/>
+          </a:p>
+        </p:txBody>
+      </p:sp>
+      <p:sp>
+        <p:nvSpPr>
+          <p:cNvPr id="6" name="Rectangle 5"/>
+          <p:cNvSpPr/>
+          <p:nvPr/>
+        </p:nvSpPr>
+        <p:spPr>
+          <a:xfrm>
+            <a:off x="457200" y="1261872"/>
+            <a:ext cx="11277295" cy="365760"/>
+          </a:xfrm>
+          <a:prstGeom prst="rect">
+            <a:avLst/>
+          </a:prstGeom>
+          <a:solidFill>
+            <a:srgbClr val="2D2D30"/>
+          </a:solidFill>
+          <a:ln>
+            <a:noFill/>
+          </a:ln>
+        </p:spPr>
+        <p:style>
+          <a:lnRef idx="1">
+            <a:schemeClr val="accent1"/>
+          </a:lnRef>
+          <a:fillRef idx="3">
+            <a:schemeClr val="accent1"/>
+          </a:fillRef>
+          <a:effectRef idx="2">
+            <a:schemeClr val="accent1"/>
+          </a:effectRef>
+          <a:fontRef idx="minor">
+            <a:schemeClr val="lt1"/>
+          </a:fontRef>
+        </p:style>
+        <p:txBody>
+          <a:bodyPr rtlCol="0" anchor="ctr"/>
+          <a:lstStyle/>
+          <a:p>
+            <a:pPr algn="ctr"/>
+          </a:p>
+        </p:txBody>
+      </p:sp>
+      <p:sp>
+        <p:nvSpPr>
+          <p:cNvPr id="7" name="Oval 6"/>
+          <p:cNvSpPr/>
+          <p:nvPr/>
+        </p:nvSpPr>
+        <p:spPr>
+          <a:xfrm>
+            <a:off x="658368" y="1380743"/>
+            <a:ext cx="128016" cy="128016"/>
+          </a:xfrm>
+          <a:prstGeom prst="ellipse">
+            <a:avLst/>
+          </a:prstGeom>
+          <a:solidFill>
+            <a:srgbClr val="FF5F56"/>
+          </a:solidFill>
+          <a:ln>
+            <a:noFill/>
+          </a:ln>
+        </p:spPr>
+        <p:style>
+          <a:lnRef idx="1">
+            <a:schemeClr val="accent1"/>
+          </a:lnRef>
+          <a:fillRef idx="3">
+            <a:schemeClr val="accent1"/>
+          </a:fillRef>
+          <a:effectRef idx="2">
+            <a:schemeClr val="accent1"/>
+          </a:effectRef>
+          <a:fontRef idx="minor">
+            <a:schemeClr val="lt1"/>
+          </a:fontRef>
+        </p:style>
+        <p:txBody>
+          <a:bodyPr rtlCol="0" anchor="ctr"/>
+          <a:lstStyle/>
+          <a:p>
+            <a:pPr algn="ctr"/>
+          </a:p>
+        </p:txBody>
+      </p:sp>
+      <p:sp>
+        <p:nvSpPr>
+          <p:cNvPr id="8" name="Oval 7"/>
+          <p:cNvSpPr/>
+          <p:nvPr/>
+        </p:nvSpPr>
+        <p:spPr>
+          <a:xfrm>
+            <a:off x="877824" y="1380743"/>
+            <a:ext cx="128016" cy="128016"/>
+          </a:xfrm>
+          <a:prstGeom prst="ellipse">
+            <a:avLst/>
+          </a:prstGeom>
+          <a:solidFill>
+            <a:srgbClr val="FFBD2E"/>
+          </a:solidFill>
+          <a:ln>
+            <a:noFill/>
+          </a:ln>
+        </p:spPr>
+        <p:style>
+          <a:lnRef idx="1">
+            <a:schemeClr val="accent1"/>
+          </a:lnRef>
+          <a:fillRef idx="3">
+            <a:schemeClr val="accent1"/>
+          </a:fillRef>
+          <a:effectRef idx="2">
+            <a:schemeClr val="accent1"/>
+          </a:effectRef>
+          <a:fontRef idx="minor">
+            <a:schemeClr val="lt1"/>
+          </a:fontRef>
+        </p:style>
+        <p:txBody>
+          <a:bodyPr rtlCol="0" anchor="ctr"/>
+          <a:lstStyle/>
+          <a:p>
+            <a:pPr algn="ctr"/>
+          </a:p>
+        </p:txBody>
+      </p:sp>
+      <p:sp>
+        <p:nvSpPr>
+          <p:cNvPr id="9" name="Oval 8"/>
+          <p:cNvSpPr/>
+          <p:nvPr/>
+        </p:nvSpPr>
+        <p:spPr>
+          <a:xfrm>
+            <a:off x="1097280" y="1380743"/>
+            <a:ext cx="128016" cy="128016"/>
+          </a:xfrm>
+          <a:prstGeom prst="ellipse">
+            <a:avLst/>
+          </a:prstGeom>
+          <a:solidFill>
+            <a:srgbClr val="27C93F"/>
+          </a:solidFill>
+          <a:ln>
+            <a:noFill/>
+          </a:ln>
+        </p:spPr>
+        <p:style>
+          <a:lnRef idx="1">
+            <a:schemeClr val="accent1"/>
+          </a:lnRef>
+          <a:fillRef idx="3">
+            <a:schemeClr val="accent1"/>
+          </a:fillRef>
+          <a:effectRef idx="2">
+            <a:schemeClr val="accent1"/>
+          </a:effectRef>
+          <a:fontRef idx="minor">
+            <a:schemeClr val="lt1"/>
+          </a:fontRef>
+        </p:style>
+        <p:txBody>
+          <a:bodyPr rtlCol="0" anchor="ctr"/>
+          <a:lstStyle/>
+          <a:p>
+            <a:pPr algn="ctr"/>
+          </a:p>
+        </p:txBody>
+      </p:sp>
+      <p:sp>
+        <p:nvSpPr>
+          <p:cNvPr id="10" name="TextBox 9"/>
           <p:cNvSpPr txBox="1"/>
           <p:nvPr/>
         </p:nvSpPr>
         <p:spPr>
           <a:xfrm>
-            <a:off x="457200" y="1170432"/>
-            <a:ext cx="11277295" cy="5230368"/>
+            <a:off x="1371600" y="1298448"/>
+            <a:ext cx="10180015" cy="292608"/>
+          </a:xfrm>
+          <a:prstGeom prst="rect">
+            <a:avLst/>
+          </a:prstGeom>
+          <a:noFill/>
+        </p:spPr>
+        <p:txBody>
+          <a:bodyPr wrap="square" anchor="ctr"/>
+          <a:lstStyle/>
+          <a:p>
+            <a:pPr algn="r"/>
+            <a:r>
+              <a:rPr sz="1100" b="1" i="0">
+                <a:solidFill>
+                  <a:srgbClr val="BBBBBB"/>
+                </a:solidFill>
+                <a:latin typeface="Calibri"/>
+              </a:rPr>
+              <a:t>Mermaid</a:t>
+            </a:r>
+          </a:p>
+        </p:txBody>
+      </p:sp>
+      <p:sp>
+        <p:nvSpPr>
+          <p:cNvPr id="11" name="TextBox 10"/>
+          <p:cNvSpPr txBox="1"/>
+          <p:nvPr/>
+        </p:nvSpPr>
+        <p:spPr>
+          <a:xfrm>
+            <a:off x="685800" y="1719072"/>
+            <a:ext cx="502920" cy="4403347"/>
           </a:xfrm>
           <a:prstGeom prst="rect">
             <a:avLst/>
@@ -9219,74 +9561,1019 @@
           </a:bodyPr>
           <a:lstStyle/>
           <a:p>
+            <a:pPr algn="r">
+              <a:spcAft>
+                <a:spcPts val="257"/>
+              </a:spcAft>
+            </a:pPr>
+            <a:r>
+              <a:rPr sz="1200" i="0" b="0">
+                <a:solidFill>
+                  <a:srgbClr val="858585"/>
+                </a:solidFill>
+                <a:latin typeface="Consolas"/>
+              </a:rPr>
+              <a:t>1</a:t>
+            </a:r>
+          </a:p>
+          <a:p>
+            <a:pPr algn="r">
+              <a:spcAft>
+                <a:spcPts val="257"/>
+              </a:spcAft>
+            </a:pPr>
+            <a:r>
+              <a:rPr sz="1200" i="0" b="0">
+                <a:solidFill>
+                  <a:srgbClr val="858585"/>
+                </a:solidFill>
+                <a:latin typeface="Consolas"/>
+              </a:rPr>
+              <a:t>2</a:t>
+            </a:r>
+          </a:p>
+          <a:p>
+            <a:pPr algn="r">
+              <a:spcAft>
+                <a:spcPts val="257"/>
+              </a:spcAft>
+            </a:pPr>
+            <a:r>
+              <a:rPr sz="1200" i="0" b="0">
+                <a:solidFill>
+                  <a:srgbClr val="858585"/>
+                </a:solidFill>
+                <a:latin typeface="Consolas"/>
+              </a:rPr>
+              <a:t>3</a:t>
+            </a:r>
+          </a:p>
+          <a:p>
+            <a:pPr algn="r">
+              <a:spcAft>
+                <a:spcPts val="257"/>
+              </a:spcAft>
+            </a:pPr>
+            <a:r>
+              <a:rPr sz="1200" i="0" b="0">
+                <a:solidFill>
+                  <a:srgbClr val="858585"/>
+                </a:solidFill>
+                <a:latin typeface="Consolas"/>
+              </a:rPr>
+              <a:t>4</a:t>
+            </a:r>
+          </a:p>
+          <a:p>
+            <a:pPr algn="r">
+              <a:spcAft>
+                <a:spcPts val="257"/>
+              </a:spcAft>
+            </a:pPr>
+            <a:r>
+              <a:rPr sz="1200" i="0" b="0">
+                <a:solidFill>
+                  <a:srgbClr val="858585"/>
+                </a:solidFill>
+                <a:latin typeface="Consolas"/>
+              </a:rPr>
+              <a:t>5</a:t>
+            </a:r>
+          </a:p>
+          <a:p>
+            <a:pPr algn="r">
+              <a:spcAft>
+                <a:spcPts val="257"/>
+              </a:spcAft>
+            </a:pPr>
+            <a:r>
+              <a:rPr sz="1200" i="0" b="0">
+                <a:solidFill>
+                  <a:srgbClr val="858585"/>
+                </a:solidFill>
+                <a:latin typeface="Consolas"/>
+              </a:rPr>
+              <a:t>6</a:t>
+            </a:r>
+          </a:p>
+          <a:p>
+            <a:pPr algn="r">
+              <a:spcAft>
+                <a:spcPts val="257"/>
+              </a:spcAft>
+            </a:pPr>
+            <a:r>
+              <a:rPr sz="1200" i="0" b="0">
+                <a:solidFill>
+                  <a:srgbClr val="858585"/>
+                </a:solidFill>
+                <a:latin typeface="Consolas"/>
+              </a:rPr>
+              <a:t>7</a:t>
+            </a:r>
+          </a:p>
+          <a:p>
+            <a:pPr algn="r">
+              <a:spcAft>
+                <a:spcPts val="257"/>
+              </a:spcAft>
+            </a:pPr>
+            <a:r>
+              <a:rPr sz="1200" i="0" b="0">
+                <a:solidFill>
+                  <a:srgbClr val="858585"/>
+                </a:solidFill>
+                <a:latin typeface="Consolas"/>
+              </a:rPr>
+              <a:t>8</a:t>
+            </a:r>
+          </a:p>
+          <a:p>
+            <a:pPr algn="r">
+              <a:spcAft>
+                <a:spcPts val="257"/>
+              </a:spcAft>
+            </a:pPr>
+            <a:r>
+              <a:rPr sz="1200" i="0" b="0">
+                <a:solidFill>
+                  <a:srgbClr val="858585"/>
+                </a:solidFill>
+                <a:latin typeface="Consolas"/>
+              </a:rPr>
+              <a:t>9</a:t>
+            </a:r>
+          </a:p>
+          <a:p>
+            <a:pPr algn="r">
+              <a:spcAft>
+                <a:spcPts val="257"/>
+              </a:spcAft>
+            </a:pPr>
+            <a:r>
+              <a:rPr sz="1200" i="0" b="0">
+                <a:solidFill>
+                  <a:srgbClr val="858585"/>
+                </a:solidFill>
+                <a:latin typeface="Consolas"/>
+              </a:rPr>
+              <a:t>10</a:t>
+            </a:r>
+          </a:p>
+          <a:p>
+            <a:pPr algn="r">
+              <a:spcAft>
+                <a:spcPts val="257"/>
+              </a:spcAft>
+            </a:pPr>
+            <a:r>
+              <a:rPr sz="1200" i="0" b="0">
+                <a:solidFill>
+                  <a:srgbClr val="858585"/>
+                </a:solidFill>
+                <a:latin typeface="Consolas"/>
+              </a:rPr>
+              <a:t>11</a:t>
+            </a:r>
+          </a:p>
+          <a:p>
+            <a:pPr algn="r">
+              <a:spcAft>
+                <a:spcPts val="257"/>
+              </a:spcAft>
+            </a:pPr>
+            <a:r>
+              <a:rPr sz="1200" i="0" b="0">
+                <a:solidFill>
+                  <a:srgbClr val="858585"/>
+                </a:solidFill>
+                <a:latin typeface="Consolas"/>
+              </a:rPr>
+              <a:t>12</a:t>
+            </a:r>
+          </a:p>
+          <a:p>
+            <a:pPr algn="r">
+              <a:spcAft>
+                <a:spcPts val="257"/>
+              </a:spcAft>
+            </a:pPr>
+            <a:r>
+              <a:rPr sz="1200" i="0" b="0">
+                <a:solidFill>
+                  <a:srgbClr val="858585"/>
+                </a:solidFill>
+                <a:latin typeface="Consolas"/>
+              </a:rPr>
+              <a:t>13</a:t>
+            </a:r>
+          </a:p>
+          <a:p>
+            <a:pPr algn="r">
+              <a:spcAft>
+                <a:spcPts val="257"/>
+              </a:spcAft>
+            </a:pPr>
+            <a:r>
+              <a:rPr sz="1200" i="0" b="0">
+                <a:solidFill>
+                  <a:srgbClr val="858585"/>
+                </a:solidFill>
+                <a:latin typeface="Consolas"/>
+              </a:rPr>
+              <a:t>14</a:t>
+            </a:r>
+          </a:p>
+          <a:p>
+            <a:pPr algn="r">
+              <a:spcAft>
+                <a:spcPts val="257"/>
+              </a:spcAft>
+            </a:pPr>
+            <a:r>
+              <a:rPr sz="1200" i="0" b="0">
+                <a:solidFill>
+                  <a:srgbClr val="858585"/>
+                </a:solidFill>
+                <a:latin typeface="Consolas"/>
+              </a:rPr>
+              <a:t>15</a:t>
+            </a:r>
+          </a:p>
+          <a:p>
+            <a:pPr algn="r">
+              <a:spcAft>
+                <a:spcPts val="257"/>
+              </a:spcAft>
+            </a:pPr>
+            <a:r>
+              <a:rPr sz="1200" i="0" b="0">
+                <a:solidFill>
+                  <a:srgbClr val="858585"/>
+                </a:solidFill>
+                <a:latin typeface="Consolas"/>
+              </a:rPr>
+              <a:t>16</a:t>
+            </a:r>
+          </a:p>
+          <a:p>
+            <a:pPr algn="r">
+              <a:spcAft>
+                <a:spcPts val="257"/>
+              </a:spcAft>
+            </a:pPr>
+            <a:r>
+              <a:rPr sz="1200" i="0" b="0">
+                <a:solidFill>
+                  <a:srgbClr val="858585"/>
+                </a:solidFill>
+                <a:latin typeface="Consolas"/>
+              </a:rPr>
+              <a:t>17</a:t>
+            </a:r>
+          </a:p>
+          <a:p>
+            <a:pPr algn="r">
+              <a:spcAft>
+                <a:spcPts val="257"/>
+              </a:spcAft>
+            </a:pPr>
+            <a:r>
+              <a:rPr sz="1200" i="0" b="0">
+                <a:solidFill>
+                  <a:srgbClr val="858585"/>
+                </a:solidFill>
+                <a:latin typeface="Consolas"/>
+              </a:rPr>
+              <a:t>18</a:t>
+            </a:r>
+          </a:p>
+          <a:p>
+            <a:pPr algn="r">
+              <a:spcAft>
+                <a:spcPts val="257"/>
+              </a:spcAft>
+            </a:pPr>
+            <a:r>
+              <a:rPr sz="1200" i="0" b="0">
+                <a:solidFill>
+                  <a:srgbClr val="858585"/>
+                </a:solidFill>
+                <a:latin typeface="Consolas"/>
+              </a:rPr>
+              <a:t>19</a:t>
+            </a:r>
+          </a:p>
+        </p:txBody>
+      </p:sp>
+      <p:sp>
+        <p:nvSpPr>
+          <p:cNvPr id="12" name="TextBox 11"/>
+          <p:cNvSpPr txBox="1"/>
+          <p:nvPr/>
+        </p:nvSpPr>
+        <p:spPr>
+          <a:xfrm>
+            <a:off x="1188720" y="1719072"/>
+            <a:ext cx="10271455" cy="4403347"/>
+          </a:xfrm>
+          <a:prstGeom prst="rect">
+            <a:avLst/>
+          </a:prstGeom>
+          <a:noFill/>
+        </p:spPr>
+        <p:txBody>
+          <a:bodyPr wrap="square">
+            <a:spAutoFit/>
+          </a:bodyPr>
+          <a:lstStyle/>
+          <a:p>
             <a:pPr>
               <a:spcAft>
-                <a:spcPts val="800"/>
+                <a:spcPts val="257"/>
               </a:spcAft>
             </a:pPr>
             <a:r>
-              <a:rPr sz="2000" b="0" i="0">
-                <a:solidFill>
-                  <a:srgbClr val="333333"/>
-                </a:solidFill>
-                <a:latin typeface="Calibri"/>
-              </a:rPr>
-              <a:t>–   El diagrama de clases se dibuja con una caja de tres compartimentos: arriba el nombre de la clase en singular y con mayuscula inicial (Mascota, no mascotas), en el medio los atributos y abajo los metodos.</a:t>
+              <a:rPr sz="1200" i="0" b="0">
+                <a:solidFill>
+                  <a:srgbClr val="D4D4D4"/>
+                </a:solidFill>
+                <a:latin typeface="Consolas"/>
+              </a:rPr>
+              <a:t>classDiagram</a:t>
             </a:r>
           </a:p>
           <a:p>
             <a:pPr>
               <a:spcAft>
-                <a:spcPts val="800"/>
+                <a:spcPts val="257"/>
               </a:spcAft>
             </a:pPr>
             <a:r>
-              <a:rPr sz="2000" b="0" i="0">
-                <a:solidFill>
-                  <a:srgbClr val="333333"/>
-                </a:solidFill>
-                <a:latin typeface="Calibri"/>
-              </a:rPr>
-              <a:t>–   Un atributo se escribe con visibilidad, nombre y tipo, por ejemplo -nombre: String o -fechaNacimiento: Date, donde el guion significa privado y el mas significa publico.</a:t>
+              <a:rPr sz="1200" i="0" b="0">
+                <a:solidFill>
+                  <a:srgbClr val="D4D4D4"/>
+                </a:solidFill>
+                <a:latin typeface="Consolas"/>
+              </a:rPr>
+              <a:t>  </a:t>
+            </a:r>
+            <a:r>
+              <a:rPr sz="1200" i="0" b="0">
+                <a:solidFill>
+                  <a:srgbClr val="D4D4D4"/>
+                </a:solidFill>
+                <a:latin typeface="Consolas"/>
+              </a:rPr>
+              <a:t>class</a:t>
+            </a:r>
+            <a:r>
+              <a:rPr sz="1200" i="0" b="0">
+                <a:solidFill>
+                  <a:srgbClr val="D4D4D4"/>
+                </a:solidFill>
+                <a:latin typeface="Consolas"/>
+              </a:rPr>
+              <a:t> </a:t>
+            </a:r>
+            <a:r>
+              <a:rPr sz="1200" i="0" b="0">
+                <a:solidFill>
+                  <a:srgbClr val="4EC9B0"/>
+                </a:solidFill>
+                <a:latin typeface="Consolas"/>
+              </a:rPr>
+              <a:t>Dueno</a:t>
+            </a:r>
+            <a:r>
+              <a:rPr sz="1200" i="0" b="0">
+                <a:solidFill>
+                  <a:srgbClr val="D4D4D4"/>
+                </a:solidFill>
+                <a:latin typeface="Consolas"/>
+              </a:rPr>
+              <a:t> {</a:t>
             </a:r>
           </a:p>
           <a:p>
             <a:pPr>
               <a:spcAft>
-                <a:spcPts val="800"/>
+                <a:spcPts val="257"/>
               </a:spcAft>
             </a:pPr>
             <a:r>
-              <a:rPr sz="2000" b="0" i="0">
-                <a:solidFill>
-                  <a:srgbClr val="333333"/>
-                </a:solidFill>
-                <a:latin typeface="Calibri"/>
-              </a:rPr>
-              <a:t>–   Un metodo se escribe con su firma y su tipo de retorno, por ejemplo +calcularEdad(): int.</a:t>
+              <a:rPr sz="1200" i="0" b="0">
+                <a:solidFill>
+                  <a:srgbClr val="D4D4D4"/>
+                </a:solidFill>
+                <a:latin typeface="Consolas"/>
+              </a:rPr>
+              <a:t>    -</a:t>
+            </a:r>
+            <a:r>
+              <a:rPr sz="1200" i="0" b="0">
+                <a:solidFill>
+                  <a:srgbClr val="D4D4D4"/>
+                </a:solidFill>
+                <a:latin typeface="Consolas"/>
+              </a:rPr>
+              <a:t>int</a:t>
+            </a:r>
+            <a:r>
+              <a:rPr sz="1200" i="0" b="0">
+                <a:solidFill>
+                  <a:srgbClr val="D4D4D4"/>
+                </a:solidFill>
+                <a:latin typeface="Consolas"/>
+              </a:rPr>
+              <a:t> </a:t>
+            </a:r>
+            <a:r>
+              <a:rPr sz="1200" i="0" b="0">
+                <a:solidFill>
+                  <a:srgbClr val="D4D4D4"/>
+                </a:solidFill>
+                <a:latin typeface="Consolas"/>
+              </a:rPr>
+              <a:t>idDueno</a:t>
             </a:r>
           </a:p>
           <a:p>
             <a:pPr>
               <a:spcAft>
-                <a:spcPts val="800"/>
+                <a:spcPts val="257"/>
               </a:spcAft>
             </a:pPr>
             <a:r>
-              <a:rPr sz="2000" b="0" i="0">
-                <a:solidFill>
-                  <a:srgbClr val="333333"/>
-                </a:solidFill>
-                <a:latin typeface="Calibri"/>
-              </a:rPr>
-              <a:t>–   Aqui hay que distinguir dos cosas que los estudiantes mezclan: el modelo de dominio, que solo tiene los conceptos del negocio y sus datos, y el modelo de diseno, que ya incluye clases tecnicas como controladores o repositorios.</a:t>
-            </a:r>
-          </a:p>
-        </p:txBody>
-      </p:sp>
-      <p:sp>
-        <p:nvSpPr>
-          <p:cNvPr id="6" name="TextBox 5"/>
+              <a:rPr sz="1200" i="0" b="0">
+                <a:solidFill>
+                  <a:srgbClr val="D4D4D4"/>
+                </a:solidFill>
+                <a:latin typeface="Consolas"/>
+              </a:rPr>
+              <a:t>    -</a:t>
+            </a:r>
+            <a:r>
+              <a:rPr sz="1200" i="0" b="0">
+                <a:solidFill>
+                  <a:srgbClr val="D4D4D4"/>
+                </a:solidFill>
+                <a:latin typeface="Consolas"/>
+              </a:rPr>
+              <a:t>String</a:t>
+            </a:r>
+            <a:r>
+              <a:rPr sz="1200" i="0" b="0">
+                <a:solidFill>
+                  <a:srgbClr val="D4D4D4"/>
+                </a:solidFill>
+                <a:latin typeface="Consolas"/>
+              </a:rPr>
+              <a:t> </a:t>
+            </a:r>
+            <a:r>
+              <a:rPr sz="1200" i="0" b="0">
+                <a:solidFill>
+                  <a:srgbClr val="D4D4D4"/>
+                </a:solidFill>
+                <a:latin typeface="Consolas"/>
+              </a:rPr>
+              <a:t>nombre</a:t>
+            </a:r>
+          </a:p>
+          <a:p>
+            <a:pPr>
+              <a:spcAft>
+                <a:spcPts val="257"/>
+              </a:spcAft>
+            </a:pPr>
+            <a:r>
+              <a:rPr sz="1200" i="0" b="0">
+                <a:solidFill>
+                  <a:srgbClr val="D4D4D4"/>
+                </a:solidFill>
+                <a:latin typeface="Consolas"/>
+              </a:rPr>
+              <a:t>    -</a:t>
+            </a:r>
+            <a:r>
+              <a:rPr sz="1200" i="0" b="0">
+                <a:solidFill>
+                  <a:srgbClr val="D4D4D4"/>
+                </a:solidFill>
+                <a:latin typeface="Consolas"/>
+              </a:rPr>
+              <a:t>String</a:t>
+            </a:r>
+            <a:r>
+              <a:rPr sz="1200" i="0" b="0">
+                <a:solidFill>
+                  <a:srgbClr val="D4D4D4"/>
+                </a:solidFill>
+                <a:latin typeface="Consolas"/>
+              </a:rPr>
+              <a:t> </a:t>
+            </a:r>
+            <a:r>
+              <a:rPr sz="1200" i="0" b="0">
+                <a:solidFill>
+                  <a:srgbClr val="D4D4D4"/>
+                </a:solidFill>
+                <a:latin typeface="Consolas"/>
+              </a:rPr>
+              <a:t>telefono</a:t>
+            </a:r>
+          </a:p>
+          <a:p>
+            <a:pPr>
+              <a:spcAft>
+                <a:spcPts val="257"/>
+              </a:spcAft>
+            </a:pPr>
+            <a:r>
+              <a:rPr sz="1200" i="0" b="0">
+                <a:solidFill>
+                  <a:srgbClr val="D4D4D4"/>
+                </a:solidFill>
+                <a:latin typeface="Consolas"/>
+              </a:rPr>
+              <a:t>    +</a:t>
+            </a:r>
+            <a:r>
+              <a:rPr sz="1200" i="0" b="0">
+                <a:solidFill>
+                  <a:srgbClr val="DCDCAA"/>
+                </a:solidFill>
+                <a:latin typeface="Consolas"/>
+              </a:rPr>
+              <a:t>registrar</a:t>
+            </a:r>
+            <a:r>
+              <a:rPr sz="1200" i="0" b="0">
+                <a:solidFill>
+                  <a:srgbClr val="D4D4D4"/>
+                </a:solidFill>
+                <a:latin typeface="Consolas"/>
+              </a:rPr>
+              <a:t>()</a:t>
+            </a:r>
+          </a:p>
+          <a:p>
+            <a:pPr>
+              <a:spcAft>
+                <a:spcPts val="257"/>
+              </a:spcAft>
+            </a:pPr>
+            <a:r>
+              <a:rPr sz="1200" i="0" b="0">
+                <a:solidFill>
+                  <a:srgbClr val="D4D4D4"/>
+                </a:solidFill>
+                <a:latin typeface="Consolas"/>
+              </a:rPr>
+              <a:t>  }</a:t>
+            </a:r>
+          </a:p>
+          <a:p>
+            <a:pPr>
+              <a:spcAft>
+                <a:spcPts val="257"/>
+              </a:spcAft>
+            </a:pPr>
+            <a:r>
+              <a:rPr sz="1200" i="0" b="0">
+                <a:solidFill>
+                  <a:srgbClr val="D4D4D4"/>
+                </a:solidFill>
+                <a:latin typeface="Consolas"/>
+              </a:rPr>
+              <a:t>  </a:t>
+            </a:r>
+            <a:r>
+              <a:rPr sz="1200" i="0" b="0">
+                <a:solidFill>
+                  <a:srgbClr val="D4D4D4"/>
+                </a:solidFill>
+                <a:latin typeface="Consolas"/>
+              </a:rPr>
+              <a:t>class</a:t>
+            </a:r>
+            <a:r>
+              <a:rPr sz="1200" i="0" b="0">
+                <a:solidFill>
+                  <a:srgbClr val="D4D4D4"/>
+                </a:solidFill>
+                <a:latin typeface="Consolas"/>
+              </a:rPr>
+              <a:t> </a:t>
+            </a:r>
+            <a:r>
+              <a:rPr sz="1200" i="0" b="0">
+                <a:solidFill>
+                  <a:srgbClr val="4EC9B0"/>
+                </a:solidFill>
+                <a:latin typeface="Consolas"/>
+              </a:rPr>
+              <a:t>Mascota</a:t>
+            </a:r>
+            <a:r>
+              <a:rPr sz="1200" i="0" b="0">
+                <a:solidFill>
+                  <a:srgbClr val="D4D4D4"/>
+                </a:solidFill>
+                <a:latin typeface="Consolas"/>
+              </a:rPr>
+              <a:t> {</a:t>
+            </a:r>
+          </a:p>
+          <a:p>
+            <a:pPr>
+              <a:spcAft>
+                <a:spcPts val="257"/>
+              </a:spcAft>
+            </a:pPr>
+            <a:r>
+              <a:rPr sz="1200" i="0" b="0">
+                <a:solidFill>
+                  <a:srgbClr val="D4D4D4"/>
+                </a:solidFill>
+                <a:latin typeface="Consolas"/>
+              </a:rPr>
+              <a:t>    -</a:t>
+            </a:r>
+            <a:r>
+              <a:rPr sz="1200" i="0" b="0">
+                <a:solidFill>
+                  <a:srgbClr val="D4D4D4"/>
+                </a:solidFill>
+                <a:latin typeface="Consolas"/>
+              </a:rPr>
+              <a:t>int</a:t>
+            </a:r>
+            <a:r>
+              <a:rPr sz="1200" i="0" b="0">
+                <a:solidFill>
+                  <a:srgbClr val="D4D4D4"/>
+                </a:solidFill>
+                <a:latin typeface="Consolas"/>
+              </a:rPr>
+              <a:t> </a:t>
+            </a:r>
+            <a:r>
+              <a:rPr sz="1200" i="0" b="0">
+                <a:solidFill>
+                  <a:srgbClr val="D4D4D4"/>
+                </a:solidFill>
+                <a:latin typeface="Consolas"/>
+              </a:rPr>
+              <a:t>idMascota</a:t>
+            </a:r>
+          </a:p>
+          <a:p>
+            <a:pPr>
+              <a:spcAft>
+                <a:spcPts val="257"/>
+              </a:spcAft>
+            </a:pPr>
+            <a:r>
+              <a:rPr sz="1200" i="0" b="0">
+                <a:solidFill>
+                  <a:srgbClr val="D4D4D4"/>
+                </a:solidFill>
+                <a:latin typeface="Consolas"/>
+              </a:rPr>
+              <a:t>    -</a:t>
+            </a:r>
+            <a:r>
+              <a:rPr sz="1200" i="0" b="0">
+                <a:solidFill>
+                  <a:srgbClr val="D4D4D4"/>
+                </a:solidFill>
+                <a:latin typeface="Consolas"/>
+              </a:rPr>
+              <a:t>String</a:t>
+            </a:r>
+            <a:r>
+              <a:rPr sz="1200" i="0" b="0">
+                <a:solidFill>
+                  <a:srgbClr val="D4D4D4"/>
+                </a:solidFill>
+                <a:latin typeface="Consolas"/>
+              </a:rPr>
+              <a:t> </a:t>
+            </a:r>
+            <a:r>
+              <a:rPr sz="1200" i="0" b="0">
+                <a:solidFill>
+                  <a:srgbClr val="D4D4D4"/>
+                </a:solidFill>
+                <a:latin typeface="Consolas"/>
+              </a:rPr>
+              <a:t>nombre</a:t>
+            </a:r>
+          </a:p>
+          <a:p>
+            <a:pPr>
+              <a:spcAft>
+                <a:spcPts val="257"/>
+              </a:spcAft>
+            </a:pPr>
+            <a:r>
+              <a:rPr sz="1200" i="0" b="0">
+                <a:solidFill>
+                  <a:srgbClr val="D4D4D4"/>
+                </a:solidFill>
+                <a:latin typeface="Consolas"/>
+              </a:rPr>
+              <a:t>    -</a:t>
+            </a:r>
+            <a:r>
+              <a:rPr sz="1200" i="0" b="0">
+                <a:solidFill>
+                  <a:srgbClr val="D4D4D4"/>
+                </a:solidFill>
+                <a:latin typeface="Consolas"/>
+              </a:rPr>
+              <a:t>String</a:t>
+            </a:r>
+            <a:r>
+              <a:rPr sz="1200" i="0" b="0">
+                <a:solidFill>
+                  <a:srgbClr val="D4D4D4"/>
+                </a:solidFill>
+                <a:latin typeface="Consolas"/>
+              </a:rPr>
+              <a:t> </a:t>
+            </a:r>
+            <a:r>
+              <a:rPr sz="1200" i="0" b="0">
+                <a:solidFill>
+                  <a:srgbClr val="D4D4D4"/>
+                </a:solidFill>
+                <a:latin typeface="Consolas"/>
+              </a:rPr>
+              <a:t>especie</a:t>
+            </a:r>
+          </a:p>
+          <a:p>
+            <a:pPr>
+              <a:spcAft>
+                <a:spcPts val="257"/>
+              </a:spcAft>
+            </a:pPr>
+            <a:r>
+              <a:rPr sz="1200" i="0" b="0">
+                <a:solidFill>
+                  <a:srgbClr val="D4D4D4"/>
+                </a:solidFill>
+                <a:latin typeface="Consolas"/>
+              </a:rPr>
+              <a:t>    -</a:t>
+            </a:r>
+            <a:r>
+              <a:rPr sz="1200" i="0" b="0">
+                <a:solidFill>
+                  <a:srgbClr val="D4D4D4"/>
+                </a:solidFill>
+                <a:latin typeface="Consolas"/>
+              </a:rPr>
+              <a:t>char</a:t>
+            </a:r>
+            <a:r>
+              <a:rPr sz="1200" i="0" b="0">
+                <a:solidFill>
+                  <a:srgbClr val="D4D4D4"/>
+                </a:solidFill>
+                <a:latin typeface="Consolas"/>
+              </a:rPr>
+              <a:t> </a:t>
+            </a:r>
+            <a:r>
+              <a:rPr sz="1200" i="0" b="0">
+                <a:solidFill>
+                  <a:srgbClr val="D4D4D4"/>
+                </a:solidFill>
+                <a:latin typeface="Consolas"/>
+              </a:rPr>
+              <a:t>activa</a:t>
+            </a:r>
+          </a:p>
+          <a:p>
+            <a:pPr>
+              <a:spcAft>
+                <a:spcPts val="257"/>
+              </a:spcAft>
+            </a:pPr>
+            <a:r>
+              <a:rPr sz="1200" i="0" b="0">
+                <a:solidFill>
+                  <a:srgbClr val="D4D4D4"/>
+                </a:solidFill>
+                <a:latin typeface="Consolas"/>
+              </a:rPr>
+              <a:t>    +</a:t>
+            </a:r>
+            <a:r>
+              <a:rPr sz="1200" i="0" b="0">
+                <a:solidFill>
+                  <a:srgbClr val="DCDCAA"/>
+                </a:solidFill>
+                <a:latin typeface="Consolas"/>
+              </a:rPr>
+              <a:t>abrirExpediente</a:t>
+            </a:r>
+            <a:r>
+              <a:rPr sz="1200" i="0" b="0">
+                <a:solidFill>
+                  <a:srgbClr val="D4D4D4"/>
+                </a:solidFill>
+                <a:latin typeface="Consolas"/>
+              </a:rPr>
+              <a:t>()</a:t>
+            </a:r>
+          </a:p>
+          <a:p>
+            <a:pPr>
+              <a:spcAft>
+                <a:spcPts val="257"/>
+              </a:spcAft>
+            </a:pPr>
+            <a:r>
+              <a:rPr sz="1200" i="0" b="0">
+                <a:solidFill>
+                  <a:srgbClr val="D4D4D4"/>
+                </a:solidFill>
+                <a:latin typeface="Consolas"/>
+              </a:rPr>
+              <a:t>  }</a:t>
+            </a:r>
+          </a:p>
+          <a:p>
+            <a:pPr>
+              <a:spcAft>
+                <a:spcPts val="257"/>
+              </a:spcAft>
+            </a:pPr>
+            <a:r>
+              <a:rPr sz="1200" i="0" b="0">
+                <a:solidFill>
+                  <a:srgbClr val="D4D4D4"/>
+                </a:solidFill>
+                <a:latin typeface="Consolas"/>
+              </a:rPr>
+              <a:t/>
+            </a:r>
+          </a:p>
+          <a:p>
+            <a:pPr>
+              <a:spcAft>
+                <a:spcPts val="257"/>
+              </a:spcAft>
+            </a:pPr>
+            <a:r>
+              <a:rPr sz="1200" i="0" b="0">
+                <a:solidFill>
+                  <a:srgbClr val="D4D4D4"/>
+                </a:solidFill>
+                <a:latin typeface="Consolas"/>
+              </a:rPr>
+              <a:t>  </a:t>
+            </a:r>
+            <a:r>
+              <a:rPr sz="1200" i="0" b="0">
+                <a:solidFill>
+                  <a:srgbClr val="D4D4D4"/>
+                </a:solidFill>
+                <a:latin typeface="Consolas"/>
+              </a:rPr>
+              <a:t>Dueno</a:t>
+            </a:r>
+            <a:r>
+              <a:rPr sz="1200" i="0" b="0">
+                <a:solidFill>
+                  <a:srgbClr val="D4D4D4"/>
+                </a:solidFill>
+                <a:latin typeface="Consolas"/>
+              </a:rPr>
+              <a:t> </a:t>
+            </a:r>
+            <a:r>
+              <a:rPr sz="1200" i="0" b="0">
+                <a:solidFill>
+                  <a:srgbClr val="CE9178"/>
+                </a:solidFill>
+                <a:latin typeface="Consolas"/>
+              </a:rPr>
+              <a:t>"1"</a:t>
+            </a:r>
+            <a:r>
+              <a:rPr sz="1200" i="0" b="0">
+                <a:solidFill>
+                  <a:srgbClr val="D4D4D4"/>
+                </a:solidFill>
+                <a:latin typeface="Consolas"/>
+              </a:rPr>
+              <a:t> --&gt; </a:t>
+            </a:r>
+            <a:r>
+              <a:rPr sz="1200" i="0" b="0">
+                <a:solidFill>
+                  <a:srgbClr val="CE9178"/>
+                </a:solidFill>
+                <a:latin typeface="Consolas"/>
+              </a:rPr>
+              <a:t>"0..*"</a:t>
+            </a:r>
+            <a:r>
+              <a:rPr sz="1200" i="0" b="0">
+                <a:solidFill>
+                  <a:srgbClr val="D4D4D4"/>
+                </a:solidFill>
+                <a:latin typeface="Consolas"/>
+              </a:rPr>
+              <a:t> </a:t>
+            </a:r>
+            <a:r>
+              <a:rPr sz="1200" i="0" b="0">
+                <a:solidFill>
+                  <a:srgbClr val="D4D4D4"/>
+                </a:solidFill>
+                <a:latin typeface="Consolas"/>
+              </a:rPr>
+              <a:t>Mascota</a:t>
+            </a:r>
+            <a:r>
+              <a:rPr sz="1200" i="0" b="0">
+                <a:solidFill>
+                  <a:srgbClr val="D4D4D4"/>
+                </a:solidFill>
+                <a:latin typeface="Consolas"/>
+              </a:rPr>
+              <a:t> : </a:t>
+            </a:r>
+            <a:r>
+              <a:rPr sz="1200" i="0" b="0">
+                <a:solidFill>
+                  <a:srgbClr val="D4D4D4"/>
+                </a:solidFill>
+                <a:latin typeface="Consolas"/>
+              </a:rPr>
+              <a:t>posee</a:t>
+            </a:r>
+          </a:p>
+          <a:p>
+            <a:pPr>
+              <a:spcAft>
+                <a:spcPts val="257"/>
+              </a:spcAft>
+            </a:pPr>
+            <a:r>
+              <a:rPr sz="1200" i="0" b="0">
+                <a:solidFill>
+                  <a:srgbClr val="D4D4D4"/>
+                </a:solidFill>
+                <a:latin typeface="Consolas"/>
+              </a:rPr>
+              <a:t/>
+            </a:r>
+          </a:p>
+          <a:p>
+            <a:pPr>
+              <a:spcAft>
+                <a:spcPts val="257"/>
+              </a:spcAft>
+            </a:pPr>
+            <a:r>
+              <a:rPr sz="1200" i="1" b="0">
+                <a:solidFill>
+                  <a:srgbClr val="6A9955"/>
+                </a:solidFill>
+                <a:latin typeface="Consolas"/>
+              </a:rPr>
+              <a:t>%% Complete con SUS clases. Lo que importa: visibilidad (- privado,</a:t>
+            </a:r>
+          </a:p>
+          <a:p>
+            <a:pPr>
+              <a:spcAft>
+                <a:spcPts val="257"/>
+              </a:spcAft>
+            </a:pPr>
+            <a:r>
+              <a:rPr sz="1200" i="1" b="0">
+                <a:solidFill>
+                  <a:srgbClr val="6A9955"/>
+                </a:solidFill>
+                <a:latin typeface="Consolas"/>
+              </a:rPr>
+              <a:t>%% + publico), TIPO de cada atributo, y multiplicidad en LOS DOS extremos.</a:t>
+            </a:r>
+          </a:p>
+        </p:txBody>
+      </p:sp>
+      <p:sp>
+        <p:nvSpPr>
+          <p:cNvPr id="13" name="TextBox 12"/>
           <p:cNvSpPr txBox="1"/>
           <p:nvPr/>
         </p:nvSpPr>
@@ -9460,21 +10747,271 @@
                 </a:solidFill>
                 <a:latin typeface="Calibri"/>
               </a:rPr>
-              <a:t>El diagrama de clases se dibuja con una caja de tres compartimentos:... (2/2)</a:t>
-            </a:r>
-          </a:p>
-        </p:txBody>
-      </p:sp>
-      <p:sp>
-        <p:nvSpPr>
-          <p:cNvPr id="5" name="TextBox 4"/>
+              <a:t>Lo que NO es una clase del dominio</a:t>
+            </a:r>
+          </a:p>
+        </p:txBody>
+      </p:sp>
+      <p:sp>
+        <p:nvSpPr>
+          <p:cNvPr id="5" name="Rounded Rectangle 4"/>
+          <p:cNvSpPr/>
+          <p:nvPr/>
+        </p:nvSpPr>
+        <p:spPr>
+          <a:xfrm>
+            <a:off x="457200" y="1261872"/>
+            <a:ext cx="11277295" cy="5031343"/>
+          </a:xfrm>
+          <a:prstGeom prst="roundRect">
+            <a:avLst>
+              <a:gd name="adj" fmla="val 4000"/>
+            </a:avLst>
+          </a:prstGeom>
+          <a:solidFill>
+            <a:srgbClr val="1E1E1E"/>
+          </a:solidFill>
+          <a:ln>
+            <a:noFill/>
+          </a:ln>
+        </p:spPr>
+        <p:style>
+          <a:lnRef idx="1">
+            <a:schemeClr val="accent1"/>
+          </a:lnRef>
+          <a:fillRef idx="3">
+            <a:schemeClr val="accent1"/>
+          </a:fillRef>
+          <a:effectRef idx="2">
+            <a:schemeClr val="accent1"/>
+          </a:effectRef>
+          <a:fontRef idx="minor">
+            <a:schemeClr val="lt1"/>
+          </a:fontRef>
+        </p:style>
+        <p:txBody>
+          <a:bodyPr rtlCol="0" anchor="ctr"/>
+          <a:lstStyle/>
+          <a:p>
+            <a:pPr algn="ctr"/>
+          </a:p>
+        </p:txBody>
+      </p:sp>
+      <p:sp>
+        <p:nvSpPr>
+          <p:cNvPr id="6" name="Rectangle 5"/>
+          <p:cNvSpPr/>
+          <p:nvPr/>
+        </p:nvSpPr>
+        <p:spPr>
+          <a:xfrm>
+            <a:off x="457200" y="1261872"/>
+            <a:ext cx="11277295" cy="365760"/>
+          </a:xfrm>
+          <a:prstGeom prst="rect">
+            <a:avLst/>
+          </a:prstGeom>
+          <a:solidFill>
+            <a:srgbClr val="2D2D30"/>
+          </a:solidFill>
+          <a:ln>
+            <a:noFill/>
+          </a:ln>
+        </p:spPr>
+        <p:style>
+          <a:lnRef idx="1">
+            <a:schemeClr val="accent1"/>
+          </a:lnRef>
+          <a:fillRef idx="3">
+            <a:schemeClr val="accent1"/>
+          </a:fillRef>
+          <a:effectRef idx="2">
+            <a:schemeClr val="accent1"/>
+          </a:effectRef>
+          <a:fontRef idx="minor">
+            <a:schemeClr val="lt1"/>
+          </a:fontRef>
+        </p:style>
+        <p:txBody>
+          <a:bodyPr rtlCol="0" anchor="ctr"/>
+          <a:lstStyle/>
+          <a:p>
+            <a:pPr algn="ctr"/>
+          </a:p>
+        </p:txBody>
+      </p:sp>
+      <p:sp>
+        <p:nvSpPr>
+          <p:cNvPr id="7" name="Oval 6"/>
+          <p:cNvSpPr/>
+          <p:nvPr/>
+        </p:nvSpPr>
+        <p:spPr>
+          <a:xfrm>
+            <a:off x="658368" y="1380743"/>
+            <a:ext cx="128016" cy="128016"/>
+          </a:xfrm>
+          <a:prstGeom prst="ellipse">
+            <a:avLst/>
+          </a:prstGeom>
+          <a:solidFill>
+            <a:srgbClr val="FF5F56"/>
+          </a:solidFill>
+          <a:ln>
+            <a:noFill/>
+          </a:ln>
+        </p:spPr>
+        <p:style>
+          <a:lnRef idx="1">
+            <a:schemeClr val="accent1"/>
+          </a:lnRef>
+          <a:fillRef idx="3">
+            <a:schemeClr val="accent1"/>
+          </a:fillRef>
+          <a:effectRef idx="2">
+            <a:schemeClr val="accent1"/>
+          </a:effectRef>
+          <a:fontRef idx="minor">
+            <a:schemeClr val="lt1"/>
+          </a:fontRef>
+        </p:style>
+        <p:txBody>
+          <a:bodyPr rtlCol="0" anchor="ctr"/>
+          <a:lstStyle/>
+          <a:p>
+            <a:pPr algn="ctr"/>
+          </a:p>
+        </p:txBody>
+      </p:sp>
+      <p:sp>
+        <p:nvSpPr>
+          <p:cNvPr id="8" name="Oval 7"/>
+          <p:cNvSpPr/>
+          <p:nvPr/>
+        </p:nvSpPr>
+        <p:spPr>
+          <a:xfrm>
+            <a:off x="877824" y="1380743"/>
+            <a:ext cx="128016" cy="128016"/>
+          </a:xfrm>
+          <a:prstGeom prst="ellipse">
+            <a:avLst/>
+          </a:prstGeom>
+          <a:solidFill>
+            <a:srgbClr val="FFBD2E"/>
+          </a:solidFill>
+          <a:ln>
+            <a:noFill/>
+          </a:ln>
+        </p:spPr>
+        <p:style>
+          <a:lnRef idx="1">
+            <a:schemeClr val="accent1"/>
+          </a:lnRef>
+          <a:fillRef idx="3">
+            <a:schemeClr val="accent1"/>
+          </a:fillRef>
+          <a:effectRef idx="2">
+            <a:schemeClr val="accent1"/>
+          </a:effectRef>
+          <a:fontRef idx="minor">
+            <a:schemeClr val="lt1"/>
+          </a:fontRef>
+        </p:style>
+        <p:txBody>
+          <a:bodyPr rtlCol="0" anchor="ctr"/>
+          <a:lstStyle/>
+          <a:p>
+            <a:pPr algn="ctr"/>
+          </a:p>
+        </p:txBody>
+      </p:sp>
+      <p:sp>
+        <p:nvSpPr>
+          <p:cNvPr id="9" name="Oval 8"/>
+          <p:cNvSpPr/>
+          <p:nvPr/>
+        </p:nvSpPr>
+        <p:spPr>
+          <a:xfrm>
+            <a:off x="1097280" y="1380743"/>
+            <a:ext cx="128016" cy="128016"/>
+          </a:xfrm>
+          <a:prstGeom prst="ellipse">
+            <a:avLst/>
+          </a:prstGeom>
+          <a:solidFill>
+            <a:srgbClr val="27C93F"/>
+          </a:solidFill>
+          <a:ln>
+            <a:noFill/>
+          </a:ln>
+        </p:spPr>
+        <p:style>
+          <a:lnRef idx="1">
+            <a:schemeClr val="accent1"/>
+          </a:lnRef>
+          <a:fillRef idx="3">
+            <a:schemeClr val="accent1"/>
+          </a:fillRef>
+          <a:effectRef idx="2">
+            <a:schemeClr val="accent1"/>
+          </a:effectRef>
+          <a:fontRef idx="minor">
+            <a:schemeClr val="lt1"/>
+          </a:fontRef>
+        </p:style>
+        <p:txBody>
+          <a:bodyPr rtlCol="0" anchor="ctr"/>
+          <a:lstStyle/>
+          <a:p>
+            <a:pPr algn="ctr"/>
+          </a:p>
+        </p:txBody>
+      </p:sp>
+      <p:sp>
+        <p:nvSpPr>
+          <p:cNvPr id="10" name="TextBox 9"/>
           <p:cNvSpPr txBox="1"/>
           <p:nvPr/>
         </p:nvSpPr>
         <p:spPr>
           <a:xfrm>
-            <a:off x="457200" y="1170432"/>
-            <a:ext cx="11277295" cy="5230368"/>
+            <a:off x="1371600" y="1298448"/>
+            <a:ext cx="10180015" cy="292608"/>
+          </a:xfrm>
+          <a:prstGeom prst="rect">
+            <a:avLst/>
+          </a:prstGeom>
+          <a:noFill/>
+        </p:spPr>
+        <p:txBody>
+          <a:bodyPr wrap="square" anchor="ctr"/>
+          <a:lstStyle/>
+          <a:p>
+            <a:pPr algn="r"/>
+            <a:r>
+              <a:rPr sz="1100" b="1" i="0">
+                <a:solidFill>
+                  <a:srgbClr val="BBBBBB"/>
+                </a:solidFill>
+                <a:latin typeface="Calibri"/>
+              </a:rPr>
+              <a:t>Mermaid</a:t>
+            </a:r>
+          </a:p>
+        </p:txBody>
+      </p:sp>
+      <p:sp>
+        <p:nvSpPr>
+          <p:cNvPr id="11" name="TextBox 10"/>
+          <p:cNvSpPr txBox="1"/>
+          <p:nvPr/>
+        </p:nvSpPr>
+        <p:spPr>
+          <a:xfrm>
+            <a:off x="685800" y="1719072"/>
+            <a:ext cx="502920" cy="4436983"/>
           </a:xfrm>
           <a:prstGeom prst="rect">
             <a:avLst/>
@@ -9487,42 +11024,819 @@
           </a:bodyPr>
           <a:lstStyle/>
           <a:p>
+            <a:pPr algn="r">
+              <a:spcAft>
+                <a:spcPts val="342"/>
+              </a:spcAft>
+            </a:pPr>
+            <a:r>
+              <a:rPr sz="1600" i="0" b="0">
+                <a:solidFill>
+                  <a:srgbClr val="858585"/>
+                </a:solidFill>
+                <a:latin typeface="Consolas"/>
+              </a:rPr>
+              <a:t>1</a:t>
+            </a:r>
+          </a:p>
+          <a:p>
+            <a:pPr algn="r">
+              <a:spcAft>
+                <a:spcPts val="342"/>
+              </a:spcAft>
+            </a:pPr>
+            <a:r>
+              <a:rPr sz="1600" i="0" b="0">
+                <a:solidFill>
+                  <a:srgbClr val="858585"/>
+                </a:solidFill>
+                <a:latin typeface="Consolas"/>
+              </a:rPr>
+              <a:t>2</a:t>
+            </a:r>
+          </a:p>
+          <a:p>
+            <a:pPr algn="r">
+              <a:spcAft>
+                <a:spcPts val="342"/>
+              </a:spcAft>
+            </a:pPr>
+            <a:r>
+              <a:rPr sz="1600" i="0" b="0">
+                <a:solidFill>
+                  <a:srgbClr val="858585"/>
+                </a:solidFill>
+                <a:latin typeface="Consolas"/>
+              </a:rPr>
+              <a:t>3</a:t>
+            </a:r>
+          </a:p>
+          <a:p>
+            <a:pPr algn="r">
+              <a:spcAft>
+                <a:spcPts val="342"/>
+              </a:spcAft>
+            </a:pPr>
+            <a:r>
+              <a:rPr sz="1600" i="0" b="0">
+                <a:solidFill>
+                  <a:srgbClr val="858585"/>
+                </a:solidFill>
+                <a:latin typeface="Consolas"/>
+              </a:rPr>
+              <a:t>4</a:t>
+            </a:r>
+          </a:p>
+          <a:p>
+            <a:pPr algn="r">
+              <a:spcAft>
+                <a:spcPts val="342"/>
+              </a:spcAft>
+            </a:pPr>
+            <a:r>
+              <a:rPr sz="1600" i="0" b="0">
+                <a:solidFill>
+                  <a:srgbClr val="858585"/>
+                </a:solidFill>
+                <a:latin typeface="Consolas"/>
+              </a:rPr>
+              <a:t>5</a:t>
+            </a:r>
+          </a:p>
+          <a:p>
+            <a:pPr algn="r">
+              <a:spcAft>
+                <a:spcPts val="342"/>
+              </a:spcAft>
+            </a:pPr>
+            <a:r>
+              <a:rPr sz="1600" i="0" b="0">
+                <a:solidFill>
+                  <a:srgbClr val="858585"/>
+                </a:solidFill>
+                <a:latin typeface="Consolas"/>
+              </a:rPr>
+              <a:t>6</a:t>
+            </a:r>
+          </a:p>
+          <a:p>
+            <a:pPr algn="r">
+              <a:spcAft>
+                <a:spcPts val="342"/>
+              </a:spcAft>
+            </a:pPr>
+            <a:r>
+              <a:rPr sz="1600" i="0" b="0">
+                <a:solidFill>
+                  <a:srgbClr val="858585"/>
+                </a:solidFill>
+                <a:latin typeface="Consolas"/>
+              </a:rPr>
+              <a:t>7</a:t>
+            </a:r>
+          </a:p>
+          <a:p>
+            <a:pPr algn="r">
+              <a:spcAft>
+                <a:spcPts val="342"/>
+              </a:spcAft>
+            </a:pPr>
+            <a:r>
+              <a:rPr sz="1600" i="0" b="0">
+                <a:solidFill>
+                  <a:srgbClr val="858585"/>
+                </a:solidFill>
+                <a:latin typeface="Consolas"/>
+              </a:rPr>
+              <a:t>8</a:t>
+            </a:r>
+          </a:p>
+          <a:p>
+            <a:pPr algn="r">
+              <a:spcAft>
+                <a:spcPts val="342"/>
+              </a:spcAft>
+            </a:pPr>
+            <a:r>
+              <a:rPr sz="1600" i="0" b="0">
+                <a:solidFill>
+                  <a:srgbClr val="858585"/>
+                </a:solidFill>
+                <a:latin typeface="Consolas"/>
+              </a:rPr>
+              <a:t>9</a:t>
+            </a:r>
+          </a:p>
+          <a:p>
+            <a:pPr algn="r">
+              <a:spcAft>
+                <a:spcPts val="342"/>
+              </a:spcAft>
+            </a:pPr>
+            <a:r>
+              <a:rPr sz="1600" i="0" b="0">
+                <a:solidFill>
+                  <a:srgbClr val="858585"/>
+                </a:solidFill>
+                <a:latin typeface="Consolas"/>
+              </a:rPr>
+              <a:t>10</a:t>
+            </a:r>
+          </a:p>
+          <a:p>
+            <a:pPr algn="r">
+              <a:spcAft>
+                <a:spcPts val="342"/>
+              </a:spcAft>
+            </a:pPr>
+            <a:r>
+              <a:rPr sz="1600" i="0" b="0">
+                <a:solidFill>
+                  <a:srgbClr val="858585"/>
+                </a:solidFill>
+                <a:latin typeface="Consolas"/>
+              </a:rPr>
+              <a:t>11</a:t>
+            </a:r>
+          </a:p>
+          <a:p>
+            <a:pPr algn="r">
+              <a:spcAft>
+                <a:spcPts val="342"/>
+              </a:spcAft>
+            </a:pPr>
+            <a:r>
+              <a:rPr sz="1600" i="0" b="0">
+                <a:solidFill>
+                  <a:srgbClr val="858585"/>
+                </a:solidFill>
+                <a:latin typeface="Consolas"/>
+              </a:rPr>
+              <a:t>12</a:t>
+            </a:r>
+          </a:p>
+          <a:p>
+            <a:pPr algn="r">
+              <a:spcAft>
+                <a:spcPts val="342"/>
+              </a:spcAft>
+            </a:pPr>
+            <a:r>
+              <a:rPr sz="1600" i="0" b="0">
+                <a:solidFill>
+                  <a:srgbClr val="858585"/>
+                </a:solidFill>
+                <a:latin typeface="Consolas"/>
+              </a:rPr>
+              <a:t>13</a:t>
+            </a:r>
+          </a:p>
+          <a:p>
+            <a:pPr algn="r">
+              <a:spcAft>
+                <a:spcPts val="342"/>
+              </a:spcAft>
+            </a:pPr>
+            <a:r>
+              <a:rPr sz="1600" i="0" b="0">
+                <a:solidFill>
+                  <a:srgbClr val="858585"/>
+                </a:solidFill>
+                <a:latin typeface="Consolas"/>
+              </a:rPr>
+              <a:t>14</a:t>
+            </a:r>
+          </a:p>
+          <a:p>
+            <a:pPr algn="r">
+              <a:spcAft>
+                <a:spcPts val="342"/>
+              </a:spcAft>
+            </a:pPr>
+            <a:r>
+              <a:rPr sz="1600" i="0" b="0">
+                <a:solidFill>
+                  <a:srgbClr val="858585"/>
+                </a:solidFill>
+                <a:latin typeface="Consolas"/>
+              </a:rPr>
+              <a:t>15</a:t>
+            </a:r>
+          </a:p>
+        </p:txBody>
+      </p:sp>
+      <p:sp>
+        <p:nvSpPr>
+          <p:cNvPr id="12" name="TextBox 11"/>
+          <p:cNvSpPr txBox="1"/>
+          <p:nvPr/>
+        </p:nvSpPr>
+        <p:spPr>
+          <a:xfrm>
+            <a:off x="1188720" y="1719072"/>
+            <a:ext cx="10271455" cy="4436983"/>
+          </a:xfrm>
+          <a:prstGeom prst="rect">
+            <a:avLst/>
+          </a:prstGeom>
+          <a:noFill/>
+        </p:spPr>
+        <p:txBody>
+          <a:bodyPr wrap="square">
+            <a:spAutoFit/>
+          </a:bodyPr>
+          <a:lstStyle/>
+          <a:p>
             <a:pPr>
               <a:spcAft>
-                <a:spcPts val="800"/>
+                <a:spcPts val="342"/>
               </a:spcAft>
             </a:pPr>
             <a:r>
-              <a:rPr sz="2000" b="0" i="0">
-                <a:solidFill>
-                  <a:srgbClr val="333333"/>
-                </a:solidFill>
-                <a:latin typeface="Calibri"/>
-              </a:rPr>
-              <a:t>–   Hoy hacemos modelo de dominio, asi que en la clinica no aparece ninguna clase llamada MascotaDAO ni ConexionBD: aparecen Dueno, Mascota, Cita, Veterinario y Atencion, que son las cosas de las que habla el Dr. Ramirez cuando cuenta como funciona la clinica.</a:t>
+              <a:rPr sz="1600" i="0" b="0">
+                <a:solidFill>
+                  <a:srgbClr val="D4D4D4"/>
+                </a:solidFill>
+                <a:latin typeface="Consolas"/>
+              </a:rPr>
+              <a:t>classDiagram</a:t>
             </a:r>
           </a:p>
           <a:p>
             <a:pPr>
               <a:spcAft>
-                <a:spcPts val="800"/>
+                <a:spcPts val="342"/>
               </a:spcAft>
             </a:pPr>
             <a:r>
-              <a:rPr sz="2000" b="0" i="0">
-                <a:solidFill>
-                  <a:srgbClr val="333333"/>
-                </a:solidFill>
-                <a:latin typeface="Calibri"/>
-              </a:rPr>
-              <a:t>–   Los metodos, en el modelo de dominio, son solo los que pertenecen naturalmente al concepto, como calcularEdad en Mascota.</a:t>
-            </a:r>
-          </a:p>
-        </p:txBody>
-      </p:sp>
-      <p:sp>
-        <p:nvSpPr>
-          <p:cNvPr id="6" name="TextBox 5"/>
+              <a:rPr sz="1600" i="0" b="0">
+                <a:solidFill>
+                  <a:srgbClr val="D4D4D4"/>
+                </a:solidFill>
+                <a:latin typeface="Consolas"/>
+              </a:rPr>
+              <a:t>  </a:t>
+            </a:r>
+            <a:r>
+              <a:rPr sz="1600" i="0" b="0">
+                <a:solidFill>
+                  <a:srgbClr val="D4D4D4"/>
+                </a:solidFill>
+                <a:latin typeface="Consolas"/>
+              </a:rPr>
+              <a:t>class</a:t>
+            </a:r>
+            <a:r>
+              <a:rPr sz="1600" i="0" b="0">
+                <a:solidFill>
+                  <a:srgbClr val="D4D4D4"/>
+                </a:solidFill>
+                <a:latin typeface="Consolas"/>
+              </a:rPr>
+              <a:t> </a:t>
+            </a:r>
+            <a:r>
+              <a:rPr sz="1600" i="0" b="0">
+                <a:solidFill>
+                  <a:srgbClr val="4EC9B0"/>
+                </a:solidFill>
+                <a:latin typeface="Consolas"/>
+              </a:rPr>
+              <a:t>Dueno</a:t>
+            </a:r>
+          </a:p>
+          <a:p>
+            <a:pPr>
+              <a:spcAft>
+                <a:spcPts val="342"/>
+              </a:spcAft>
+            </a:pPr>
+            <a:r>
+              <a:rPr sz="1600" i="0" b="0">
+                <a:solidFill>
+                  <a:srgbClr val="D4D4D4"/>
+                </a:solidFill>
+                <a:latin typeface="Consolas"/>
+              </a:rPr>
+              <a:t>  </a:t>
+            </a:r>
+            <a:r>
+              <a:rPr sz="1600" i="0" b="0">
+                <a:solidFill>
+                  <a:srgbClr val="D4D4D4"/>
+                </a:solidFill>
+                <a:latin typeface="Consolas"/>
+              </a:rPr>
+              <a:t>class</a:t>
+            </a:r>
+            <a:r>
+              <a:rPr sz="1600" i="0" b="0">
+                <a:solidFill>
+                  <a:srgbClr val="D4D4D4"/>
+                </a:solidFill>
+                <a:latin typeface="Consolas"/>
+              </a:rPr>
+              <a:t> </a:t>
+            </a:r>
+            <a:r>
+              <a:rPr sz="1600" i="0" b="0">
+                <a:solidFill>
+                  <a:srgbClr val="4EC9B0"/>
+                </a:solidFill>
+                <a:latin typeface="Consolas"/>
+              </a:rPr>
+              <a:t>Mascota</a:t>
+            </a:r>
+          </a:p>
+          <a:p>
+            <a:pPr>
+              <a:spcAft>
+                <a:spcPts val="342"/>
+              </a:spcAft>
+            </a:pPr>
+            <a:r>
+              <a:rPr sz="1600" i="0" b="0">
+                <a:solidFill>
+                  <a:srgbClr val="D4D4D4"/>
+                </a:solidFill>
+                <a:latin typeface="Consolas"/>
+              </a:rPr>
+              <a:t>  </a:t>
+            </a:r>
+            <a:r>
+              <a:rPr sz="1600" i="0" b="0">
+                <a:solidFill>
+                  <a:srgbClr val="D4D4D4"/>
+                </a:solidFill>
+                <a:latin typeface="Consolas"/>
+              </a:rPr>
+              <a:t>class</a:t>
+            </a:r>
+            <a:r>
+              <a:rPr sz="1600" i="0" b="0">
+                <a:solidFill>
+                  <a:srgbClr val="D4D4D4"/>
+                </a:solidFill>
+                <a:latin typeface="Consolas"/>
+              </a:rPr>
+              <a:t> </a:t>
+            </a:r>
+            <a:r>
+              <a:rPr sz="1600" i="0" b="0">
+                <a:solidFill>
+                  <a:srgbClr val="4EC9B0"/>
+                </a:solidFill>
+                <a:latin typeface="Consolas"/>
+              </a:rPr>
+              <a:t>Cita</a:t>
+            </a:r>
+          </a:p>
+          <a:p>
+            <a:pPr>
+              <a:spcAft>
+                <a:spcPts val="342"/>
+              </a:spcAft>
+            </a:pPr>
+            <a:r>
+              <a:rPr sz="1600" i="0" b="0">
+                <a:solidFill>
+                  <a:srgbClr val="D4D4D4"/>
+                </a:solidFill>
+                <a:latin typeface="Consolas"/>
+              </a:rPr>
+              <a:t>  </a:t>
+            </a:r>
+            <a:r>
+              <a:rPr sz="1600" i="0" b="0">
+                <a:solidFill>
+                  <a:srgbClr val="D4D4D4"/>
+                </a:solidFill>
+                <a:latin typeface="Consolas"/>
+              </a:rPr>
+              <a:t>Dueno</a:t>
+            </a:r>
+            <a:r>
+              <a:rPr sz="1600" i="0" b="0">
+                <a:solidFill>
+                  <a:srgbClr val="D4D4D4"/>
+                </a:solidFill>
+                <a:latin typeface="Consolas"/>
+              </a:rPr>
+              <a:t> </a:t>
+            </a:r>
+            <a:r>
+              <a:rPr sz="1600" i="0" b="0">
+                <a:solidFill>
+                  <a:srgbClr val="CE9178"/>
+                </a:solidFill>
+                <a:latin typeface="Consolas"/>
+              </a:rPr>
+              <a:t>"1"</a:t>
+            </a:r>
+            <a:r>
+              <a:rPr sz="1600" i="0" b="0">
+                <a:solidFill>
+                  <a:srgbClr val="D4D4D4"/>
+                </a:solidFill>
+                <a:latin typeface="Consolas"/>
+              </a:rPr>
+              <a:t> --&gt; </a:t>
+            </a:r>
+            <a:r>
+              <a:rPr sz="1600" i="0" b="0">
+                <a:solidFill>
+                  <a:srgbClr val="CE9178"/>
+                </a:solidFill>
+                <a:latin typeface="Consolas"/>
+              </a:rPr>
+              <a:t>"0..*"</a:t>
+            </a:r>
+            <a:r>
+              <a:rPr sz="1600" i="0" b="0">
+                <a:solidFill>
+                  <a:srgbClr val="D4D4D4"/>
+                </a:solidFill>
+                <a:latin typeface="Consolas"/>
+              </a:rPr>
+              <a:t> </a:t>
+            </a:r>
+            <a:r>
+              <a:rPr sz="1600" i="0" b="0">
+                <a:solidFill>
+                  <a:srgbClr val="D4D4D4"/>
+                </a:solidFill>
+                <a:latin typeface="Consolas"/>
+              </a:rPr>
+              <a:t>Mascota</a:t>
+            </a:r>
+            <a:r>
+              <a:rPr sz="1600" i="0" b="0">
+                <a:solidFill>
+                  <a:srgbClr val="D4D4D4"/>
+                </a:solidFill>
+                <a:latin typeface="Consolas"/>
+              </a:rPr>
+              <a:t> : </a:t>
+            </a:r>
+            <a:r>
+              <a:rPr sz="1600" i="0" b="0">
+                <a:solidFill>
+                  <a:srgbClr val="D4D4D4"/>
+                </a:solidFill>
+                <a:latin typeface="Consolas"/>
+              </a:rPr>
+              <a:t>posee</a:t>
+            </a:r>
+          </a:p>
+          <a:p>
+            <a:pPr>
+              <a:spcAft>
+                <a:spcPts val="342"/>
+              </a:spcAft>
+            </a:pPr>
+            <a:r>
+              <a:rPr sz="1600" i="0" b="0">
+                <a:solidFill>
+                  <a:srgbClr val="D4D4D4"/>
+                </a:solidFill>
+                <a:latin typeface="Consolas"/>
+              </a:rPr>
+              <a:t>  </a:t>
+            </a:r>
+            <a:r>
+              <a:rPr sz="1600" i="0" b="0">
+                <a:solidFill>
+                  <a:srgbClr val="D4D4D4"/>
+                </a:solidFill>
+                <a:latin typeface="Consolas"/>
+              </a:rPr>
+              <a:t>Mascota</a:t>
+            </a:r>
+            <a:r>
+              <a:rPr sz="1600" i="0" b="0">
+                <a:solidFill>
+                  <a:srgbClr val="D4D4D4"/>
+                </a:solidFill>
+                <a:latin typeface="Consolas"/>
+              </a:rPr>
+              <a:t> </a:t>
+            </a:r>
+            <a:r>
+              <a:rPr sz="1600" i="0" b="0">
+                <a:solidFill>
+                  <a:srgbClr val="CE9178"/>
+                </a:solidFill>
+                <a:latin typeface="Consolas"/>
+              </a:rPr>
+              <a:t>"1"</a:t>
+            </a:r>
+            <a:r>
+              <a:rPr sz="1600" i="0" b="0">
+                <a:solidFill>
+                  <a:srgbClr val="D4D4D4"/>
+                </a:solidFill>
+                <a:latin typeface="Consolas"/>
+              </a:rPr>
+              <a:t> --&gt; </a:t>
+            </a:r>
+            <a:r>
+              <a:rPr sz="1600" i="0" b="0">
+                <a:solidFill>
+                  <a:srgbClr val="CE9178"/>
+                </a:solidFill>
+                <a:latin typeface="Consolas"/>
+              </a:rPr>
+              <a:t>"0..*"</a:t>
+            </a:r>
+            <a:r>
+              <a:rPr sz="1600" i="0" b="0">
+                <a:solidFill>
+                  <a:srgbClr val="D4D4D4"/>
+                </a:solidFill>
+                <a:latin typeface="Consolas"/>
+              </a:rPr>
+              <a:t> </a:t>
+            </a:r>
+            <a:r>
+              <a:rPr sz="1600" i="0" b="0">
+                <a:solidFill>
+                  <a:srgbClr val="D4D4D4"/>
+                </a:solidFill>
+                <a:latin typeface="Consolas"/>
+              </a:rPr>
+              <a:t>Cita</a:t>
+            </a:r>
+            <a:r>
+              <a:rPr sz="1600" i="0" b="0">
+                <a:solidFill>
+                  <a:srgbClr val="D4D4D4"/>
+                </a:solidFill>
+                <a:latin typeface="Consolas"/>
+              </a:rPr>
+              <a:t> : </a:t>
+            </a:r>
+            <a:r>
+              <a:rPr sz="1600" i="0" b="0">
+                <a:solidFill>
+                  <a:srgbClr val="D4D4D4"/>
+                </a:solidFill>
+                <a:latin typeface="Consolas"/>
+              </a:rPr>
+              <a:t>tiene</a:t>
+            </a:r>
+          </a:p>
+          <a:p>
+            <a:pPr>
+              <a:spcAft>
+                <a:spcPts val="342"/>
+              </a:spcAft>
+            </a:pPr>
+            <a:r>
+              <a:rPr sz="1600" i="0" b="0">
+                <a:solidFill>
+                  <a:srgbClr val="D4D4D4"/>
+                </a:solidFill>
+                <a:latin typeface="Consolas"/>
+              </a:rPr>
+              <a:t>  </a:t>
+            </a:r>
+            <a:r>
+              <a:rPr sz="1600" i="0" b="0">
+                <a:solidFill>
+                  <a:srgbClr val="D4D4D4"/>
+                </a:solidFill>
+                <a:latin typeface="Consolas"/>
+              </a:rPr>
+              <a:t>note</a:t>
+            </a:r>
+            <a:r>
+              <a:rPr sz="1600" i="0" b="0">
+                <a:solidFill>
+                  <a:srgbClr val="D4D4D4"/>
+                </a:solidFill>
+                <a:latin typeface="Consolas"/>
+              </a:rPr>
+              <a:t> </a:t>
+            </a:r>
+            <a:r>
+              <a:rPr sz="1600" i="0" b="0">
+                <a:solidFill>
+                  <a:srgbClr val="D4D4D4"/>
+                </a:solidFill>
+                <a:latin typeface="Consolas"/>
+              </a:rPr>
+              <a:t>for</a:t>
+            </a:r>
+            <a:r>
+              <a:rPr sz="1600" i="0" b="0">
+                <a:solidFill>
+                  <a:srgbClr val="D4D4D4"/>
+                </a:solidFill>
+                <a:latin typeface="Consolas"/>
+              </a:rPr>
+              <a:t> </a:t>
+            </a:r>
+            <a:r>
+              <a:rPr sz="1600" i="0" b="0">
+                <a:solidFill>
+                  <a:srgbClr val="D4D4D4"/>
+                </a:solidFill>
+                <a:latin typeface="Consolas"/>
+              </a:rPr>
+              <a:t>Mascota</a:t>
+            </a:r>
+            <a:r>
+              <a:rPr sz="1600" i="0" b="0">
+                <a:solidFill>
+                  <a:srgbClr val="D4D4D4"/>
+                </a:solidFill>
+                <a:latin typeface="Consolas"/>
+              </a:rPr>
+              <a:t> </a:t>
+            </a:r>
+            <a:r>
+              <a:rPr sz="1600" i="0" b="0">
+                <a:solidFill>
+                  <a:srgbClr val="CE9178"/>
+                </a:solidFill>
+                <a:latin typeface="Consolas"/>
+              </a:rPr>
+              <a:t>"Del dominio: el cliente la nombra\ny tiene estado y reglas propias"</a:t>
+            </a:r>
+          </a:p>
+          <a:p>
+            <a:pPr>
+              <a:spcAft>
+                <a:spcPts val="342"/>
+              </a:spcAft>
+            </a:pPr>
+            <a:r>
+              <a:rPr sz="1600" i="0" b="0">
+                <a:solidFill>
+                  <a:srgbClr val="D4D4D4"/>
+                </a:solidFill>
+                <a:latin typeface="Consolas"/>
+              </a:rPr>
+              <a:t/>
+            </a:r>
+          </a:p>
+          <a:p>
+            <a:pPr>
+              <a:spcAft>
+                <a:spcPts val="342"/>
+              </a:spcAft>
+            </a:pPr>
+            <a:r>
+              <a:rPr sz="1600" i="1" b="0">
+                <a:solidFill>
+                  <a:srgbClr val="6A9955"/>
+                </a:solidFill>
+                <a:latin typeface="Consolas"/>
+              </a:rPr>
+              <a:t>%% NO van en el modelo de dominio, y es el error mas comun:</a:t>
+            </a:r>
+          </a:p>
+          <a:p>
+            <a:pPr>
+              <a:spcAft>
+                <a:spcPts val="342"/>
+              </a:spcAft>
+            </a:pPr>
+            <a:r>
+              <a:rPr sz="1600" i="1" b="0">
+                <a:solidFill>
+                  <a:srgbClr val="6A9955"/>
+                </a:solidFill>
+                <a:latin typeface="Consolas"/>
+              </a:rPr>
+              <a:t>%%   FormularioRegistroMascota -&gt; una PANTALLA (Clase 13)</a:t>
+            </a:r>
+          </a:p>
+          <a:p>
+            <a:pPr>
+              <a:spcAft>
+                <a:spcPts val="342"/>
+              </a:spcAft>
+            </a:pPr>
+            <a:r>
+              <a:rPr sz="1600" i="1" b="0">
+                <a:solidFill>
+                  <a:srgbClr val="6A9955"/>
+                </a:solidFill>
+                <a:latin typeface="Consolas"/>
+              </a:rPr>
+              <a:t>%%   ConexionBaseDatos         -&gt; INFRAESTRUCTURA</a:t>
+            </a:r>
+          </a:p>
+          <a:p>
+            <a:pPr>
+              <a:spcAft>
+                <a:spcPts val="342"/>
+              </a:spcAft>
+            </a:pPr>
+            <a:r>
+              <a:rPr sz="1600" i="1" b="0">
+                <a:solidFill>
+                  <a:srgbClr val="6A9955"/>
+                </a:solidFill>
+                <a:latin typeface="Consolas"/>
+              </a:rPr>
+              <a:t>%%   GestorDeMascotas          -&gt; un «gestor» que solo mueve datos</a:t>
+            </a:r>
+          </a:p>
+          <a:p>
+            <a:pPr>
+              <a:spcAft>
+                <a:spcPts val="342"/>
+              </a:spcAft>
+            </a:pPr>
+            <a:r>
+              <a:rPr sz="1600" i="1" b="0">
+                <a:solidFill>
+                  <a:srgbClr val="6A9955"/>
+                </a:solidFill>
+                <a:latin typeface="Consolas"/>
+              </a:rPr>
+              <a:t>%%   BotonGuardar              -&gt; un control de interfaz</a:t>
+            </a:r>
+          </a:p>
+          <a:p>
+            <a:pPr>
+              <a:spcAft>
+                <a:spcPts val="342"/>
+              </a:spcAft>
+            </a:pPr>
+            <a:r>
+              <a:rPr sz="1600" i="1" b="0">
+                <a:solidFill>
+                  <a:srgbClr val="6A9955"/>
+                </a:solidFill>
+                <a:latin typeface="Consolas"/>
+              </a:rPr>
+              <a:t>%% La prueba: sin sistema, la clinica seguiria hablando de «la mascota»</a:t>
+            </a:r>
+          </a:p>
+          <a:p>
+            <a:pPr>
+              <a:spcAft>
+                <a:spcPts val="342"/>
+              </a:spcAft>
+            </a:pPr>
+            <a:r>
+              <a:rPr sz="1600" i="1" b="0">
+                <a:solidFill>
+                  <a:srgbClr val="6A9955"/>
+                </a:solidFill>
+                <a:latin typeface="Consolas"/>
+              </a:rPr>
+              <a:t>%% y de «la cita». De «GestorDeMascotas», no.</a:t>
+            </a:r>
+          </a:p>
+        </p:txBody>
+      </p:sp>
+      <p:sp>
+        <p:nvSpPr>
+          <p:cNvPr id="13" name="TextBox 12"/>
           <p:cNvSpPr txBox="1"/>
           <p:nvPr/>
         </p:nvSpPr>
@@ -9696,21 +12010,271 @@
                 </a:solidFill>
                 <a:latin typeface="Calibri"/>
               </a:rPr>
-              <a:t>Las lineas entre clases son la mitad del valor del diagrama (1/2)</a:t>
-            </a:r>
-          </a:p>
-        </p:txBody>
-      </p:sp>
-      <p:sp>
-        <p:nvSpPr>
-          <p:cNvPr id="5" name="TextBox 4"/>
+              <a:t>Modelo de dominio completo en Mermaid</a:t>
+            </a:r>
+          </a:p>
+        </p:txBody>
+      </p:sp>
+      <p:sp>
+        <p:nvSpPr>
+          <p:cNvPr id="5" name="Rounded Rectangle 4"/>
+          <p:cNvSpPr/>
+          <p:nvPr/>
+        </p:nvSpPr>
+        <p:spPr>
+          <a:xfrm>
+            <a:off x="457200" y="1261872"/>
+            <a:ext cx="11277295" cy="4727448"/>
+          </a:xfrm>
+          <a:prstGeom prst="roundRect">
+            <a:avLst>
+              <a:gd name="adj" fmla="val 4000"/>
+            </a:avLst>
+          </a:prstGeom>
+          <a:solidFill>
+            <a:srgbClr val="1E1E1E"/>
+          </a:solidFill>
+          <a:ln>
+            <a:noFill/>
+          </a:ln>
+        </p:spPr>
+        <p:style>
+          <a:lnRef idx="1">
+            <a:schemeClr val="accent1"/>
+          </a:lnRef>
+          <a:fillRef idx="3">
+            <a:schemeClr val="accent1"/>
+          </a:fillRef>
+          <a:effectRef idx="2">
+            <a:schemeClr val="accent1"/>
+          </a:effectRef>
+          <a:fontRef idx="minor">
+            <a:schemeClr val="lt1"/>
+          </a:fontRef>
+        </p:style>
+        <p:txBody>
+          <a:bodyPr rtlCol="0" anchor="ctr"/>
+          <a:lstStyle/>
+          <a:p>
+            <a:pPr algn="ctr"/>
+          </a:p>
+        </p:txBody>
+      </p:sp>
+      <p:sp>
+        <p:nvSpPr>
+          <p:cNvPr id="6" name="Rectangle 5"/>
+          <p:cNvSpPr/>
+          <p:nvPr/>
+        </p:nvSpPr>
+        <p:spPr>
+          <a:xfrm>
+            <a:off x="457200" y="1261872"/>
+            <a:ext cx="11277295" cy="365760"/>
+          </a:xfrm>
+          <a:prstGeom prst="rect">
+            <a:avLst/>
+          </a:prstGeom>
+          <a:solidFill>
+            <a:srgbClr val="2D2D30"/>
+          </a:solidFill>
+          <a:ln>
+            <a:noFill/>
+          </a:ln>
+        </p:spPr>
+        <p:style>
+          <a:lnRef idx="1">
+            <a:schemeClr val="accent1"/>
+          </a:lnRef>
+          <a:fillRef idx="3">
+            <a:schemeClr val="accent1"/>
+          </a:fillRef>
+          <a:effectRef idx="2">
+            <a:schemeClr val="accent1"/>
+          </a:effectRef>
+          <a:fontRef idx="minor">
+            <a:schemeClr val="lt1"/>
+          </a:fontRef>
+        </p:style>
+        <p:txBody>
+          <a:bodyPr rtlCol="0" anchor="ctr"/>
+          <a:lstStyle/>
+          <a:p>
+            <a:pPr algn="ctr"/>
+          </a:p>
+        </p:txBody>
+      </p:sp>
+      <p:sp>
+        <p:nvSpPr>
+          <p:cNvPr id="7" name="Oval 6"/>
+          <p:cNvSpPr/>
+          <p:nvPr/>
+        </p:nvSpPr>
+        <p:spPr>
+          <a:xfrm>
+            <a:off x="658368" y="1380743"/>
+            <a:ext cx="128016" cy="128016"/>
+          </a:xfrm>
+          <a:prstGeom prst="ellipse">
+            <a:avLst/>
+          </a:prstGeom>
+          <a:solidFill>
+            <a:srgbClr val="FF5F56"/>
+          </a:solidFill>
+          <a:ln>
+            <a:noFill/>
+          </a:ln>
+        </p:spPr>
+        <p:style>
+          <a:lnRef idx="1">
+            <a:schemeClr val="accent1"/>
+          </a:lnRef>
+          <a:fillRef idx="3">
+            <a:schemeClr val="accent1"/>
+          </a:fillRef>
+          <a:effectRef idx="2">
+            <a:schemeClr val="accent1"/>
+          </a:effectRef>
+          <a:fontRef idx="minor">
+            <a:schemeClr val="lt1"/>
+          </a:fontRef>
+        </p:style>
+        <p:txBody>
+          <a:bodyPr rtlCol="0" anchor="ctr"/>
+          <a:lstStyle/>
+          <a:p>
+            <a:pPr algn="ctr"/>
+          </a:p>
+        </p:txBody>
+      </p:sp>
+      <p:sp>
+        <p:nvSpPr>
+          <p:cNvPr id="8" name="Oval 7"/>
+          <p:cNvSpPr/>
+          <p:nvPr/>
+        </p:nvSpPr>
+        <p:spPr>
+          <a:xfrm>
+            <a:off x="877824" y="1380743"/>
+            <a:ext cx="128016" cy="128016"/>
+          </a:xfrm>
+          <a:prstGeom prst="ellipse">
+            <a:avLst/>
+          </a:prstGeom>
+          <a:solidFill>
+            <a:srgbClr val="FFBD2E"/>
+          </a:solidFill>
+          <a:ln>
+            <a:noFill/>
+          </a:ln>
+        </p:spPr>
+        <p:style>
+          <a:lnRef idx="1">
+            <a:schemeClr val="accent1"/>
+          </a:lnRef>
+          <a:fillRef idx="3">
+            <a:schemeClr val="accent1"/>
+          </a:fillRef>
+          <a:effectRef idx="2">
+            <a:schemeClr val="accent1"/>
+          </a:effectRef>
+          <a:fontRef idx="minor">
+            <a:schemeClr val="lt1"/>
+          </a:fontRef>
+        </p:style>
+        <p:txBody>
+          <a:bodyPr rtlCol="0" anchor="ctr"/>
+          <a:lstStyle/>
+          <a:p>
+            <a:pPr algn="ctr"/>
+          </a:p>
+        </p:txBody>
+      </p:sp>
+      <p:sp>
+        <p:nvSpPr>
+          <p:cNvPr id="9" name="Oval 8"/>
+          <p:cNvSpPr/>
+          <p:nvPr/>
+        </p:nvSpPr>
+        <p:spPr>
+          <a:xfrm>
+            <a:off x="1097280" y="1380743"/>
+            <a:ext cx="128016" cy="128016"/>
+          </a:xfrm>
+          <a:prstGeom prst="ellipse">
+            <a:avLst/>
+          </a:prstGeom>
+          <a:solidFill>
+            <a:srgbClr val="27C93F"/>
+          </a:solidFill>
+          <a:ln>
+            <a:noFill/>
+          </a:ln>
+        </p:spPr>
+        <p:style>
+          <a:lnRef idx="1">
+            <a:schemeClr val="accent1"/>
+          </a:lnRef>
+          <a:fillRef idx="3">
+            <a:schemeClr val="accent1"/>
+          </a:fillRef>
+          <a:effectRef idx="2">
+            <a:schemeClr val="accent1"/>
+          </a:effectRef>
+          <a:fontRef idx="minor">
+            <a:schemeClr val="lt1"/>
+          </a:fontRef>
+        </p:style>
+        <p:txBody>
+          <a:bodyPr rtlCol="0" anchor="ctr"/>
+          <a:lstStyle/>
+          <a:p>
+            <a:pPr algn="ctr"/>
+          </a:p>
+        </p:txBody>
+      </p:sp>
+      <p:sp>
+        <p:nvSpPr>
+          <p:cNvPr id="10" name="TextBox 9"/>
           <p:cNvSpPr txBox="1"/>
           <p:nvPr/>
         </p:nvSpPr>
         <p:spPr>
           <a:xfrm>
-            <a:off x="457200" y="1170432"/>
-            <a:ext cx="11277295" cy="5230368"/>
+            <a:off x="1371600" y="1298448"/>
+            <a:ext cx="10180015" cy="292608"/>
+          </a:xfrm>
+          <a:prstGeom prst="rect">
+            <a:avLst/>
+          </a:prstGeom>
+          <a:noFill/>
+        </p:spPr>
+        <p:txBody>
+          <a:bodyPr wrap="square" anchor="ctr"/>
+          <a:lstStyle/>
+          <a:p>
+            <a:pPr algn="r"/>
+            <a:r>
+              <a:rPr sz="1100" b="1" i="0">
+                <a:solidFill>
+                  <a:srgbClr val="BBBBBB"/>
+                </a:solidFill>
+                <a:latin typeface="Calibri"/>
+              </a:rPr>
+              <a:t>Mermaid</a:t>
+            </a:r>
+          </a:p>
+        </p:txBody>
+      </p:sp>
+      <p:sp>
+        <p:nvSpPr>
+          <p:cNvPr id="11" name="TextBox 10"/>
+          <p:cNvSpPr txBox="1"/>
+          <p:nvPr/>
+        </p:nvSpPr>
+        <p:spPr>
+          <a:xfrm>
+            <a:off x="1188720" y="1719072"/>
+            <a:ext cx="4747107" cy="4133087"/>
           </a:xfrm>
           <a:prstGeom prst="rect">
             <a:avLst/>
@@ -9725,72 +12289,1570 @@
           <a:p>
             <a:pPr>
               <a:spcAft>
-                <a:spcPts val="800"/>
+                <a:spcPts val="278"/>
               </a:spcAft>
             </a:pPr>
             <a:r>
-              <a:rPr sz="2000" b="0" i="0">
-                <a:solidFill>
-                  <a:srgbClr val="333333"/>
-                </a:solidFill>
-                <a:latin typeface="Calibri"/>
-              </a:rPr>
-              <a:t>–   Las lineas entre clases son la mitad del valor del diagrama.</a:t>
+              <a:rPr sz="1300" i="0" b="0">
+                <a:solidFill>
+                  <a:srgbClr val="D4D4D4"/>
+                </a:solidFill>
+                <a:latin typeface="Consolas"/>
+              </a:rPr>
+              <a:t>classDiagram</a:t>
             </a:r>
           </a:p>
           <a:p>
             <a:pPr>
               <a:spcAft>
-                <a:spcPts val="800"/>
+                <a:spcPts val="278"/>
               </a:spcAft>
             </a:pPr>
             <a:r>
-              <a:rPr sz="2000" b="0" i="0">
-                <a:solidFill>
-                  <a:srgbClr val="333333"/>
-                </a:solidFill>
-                <a:latin typeface="Calibri"/>
-              </a:rPr>
-              <a:t>–   Una asociacion es una relacion estable entre dos conceptos y se dibuja con una linea recta, un nombre que se lee como frase (Dueno tiene Mascota) y</a:t>
+              <a:rPr sz="1300" i="0" b="0">
+                <a:solidFill>
+                  <a:srgbClr val="D4D4D4"/>
+                </a:solidFill>
+                <a:latin typeface="Consolas"/>
+              </a:rPr>
+              <a:t>  </a:t>
+            </a:r>
+            <a:r>
+              <a:rPr sz="1300" i="0" b="0">
+                <a:solidFill>
+                  <a:srgbClr val="D4D4D4"/>
+                </a:solidFill>
+                <a:latin typeface="Consolas"/>
+              </a:rPr>
+              <a:t>class</a:t>
+            </a:r>
+            <a:r>
+              <a:rPr sz="1300" i="0" b="0">
+                <a:solidFill>
+                  <a:srgbClr val="D4D4D4"/>
+                </a:solidFill>
+                <a:latin typeface="Consolas"/>
+              </a:rPr>
+              <a:t> </a:t>
+            </a:r>
+            <a:r>
+              <a:rPr sz="1300" i="0" b="0">
+                <a:solidFill>
+                  <a:srgbClr val="4EC9B0"/>
+                </a:solidFill>
+                <a:latin typeface="Consolas"/>
+              </a:rPr>
+              <a:t>Dueno</a:t>
+            </a:r>
+            <a:r>
+              <a:rPr sz="1300" i="0" b="0">
+                <a:solidFill>
+                  <a:srgbClr val="D4D4D4"/>
+                </a:solidFill>
+                <a:latin typeface="Consolas"/>
+              </a:rPr>
+              <a:t> {</a:t>
             </a:r>
           </a:p>
           <a:p>
             <a:pPr>
               <a:spcAft>
-                <a:spcPts val="800"/>
+                <a:spcPts val="278"/>
               </a:spcAft>
             </a:pPr>
             <a:r>
-              <a:rPr sz="2000" b="0" i="0">
-                <a:solidFill>
-                  <a:srgbClr val="333333"/>
-                </a:solidFill>
-                <a:latin typeface="Calibri"/>
-              </a:rPr>
-              <a:t>–   En cada extremo, una multiplicidad que responde cuantos: 1 exactamente uno, 0..1 opcional, 1..* uno o mas, 0..* cero o mas.</a:t>
+              <a:rPr sz="1300" i="0" b="0">
+                <a:solidFill>
+                  <a:srgbClr val="D4D4D4"/>
+                </a:solidFill>
+                <a:latin typeface="Consolas"/>
+              </a:rPr>
+              <a:t>    -</a:t>
+            </a:r>
+            <a:r>
+              <a:rPr sz="1300" i="0" b="0">
+                <a:solidFill>
+                  <a:srgbClr val="D4D4D4"/>
+                </a:solidFill>
+                <a:latin typeface="Consolas"/>
+              </a:rPr>
+              <a:t>documento</a:t>
+            </a:r>
+            <a:r>
+              <a:rPr sz="1300" i="0" b="0">
+                <a:solidFill>
+                  <a:srgbClr val="D4D4D4"/>
+                </a:solidFill>
+                <a:latin typeface="Consolas"/>
+              </a:rPr>
+              <a:t>: </a:t>
+            </a:r>
+            <a:r>
+              <a:rPr sz="1300" i="0" b="0">
+                <a:solidFill>
+                  <a:srgbClr val="D4D4D4"/>
+                </a:solidFill>
+                <a:latin typeface="Consolas"/>
+              </a:rPr>
+              <a:t>String</a:t>
             </a:r>
           </a:p>
           <a:p>
             <a:pPr>
               <a:spcAft>
-                <a:spcPts val="800"/>
+                <a:spcPts val="278"/>
               </a:spcAft>
             </a:pPr>
             <a:r>
-              <a:rPr sz="2000" b="0" i="0">
-                <a:solidFill>
-                  <a:srgbClr val="333333"/>
+              <a:rPr sz="1300" i="0" b="0">
+                <a:solidFill>
+                  <a:srgbClr val="D4D4D4"/>
+                </a:solidFill>
+                <a:latin typeface="Consolas"/>
+              </a:rPr>
+              <a:t>    -</a:t>
+            </a:r>
+            <a:r>
+              <a:rPr sz="1300" i="0" b="0">
+                <a:solidFill>
+                  <a:srgbClr val="D4D4D4"/>
+                </a:solidFill>
+                <a:latin typeface="Consolas"/>
+              </a:rPr>
+              <a:t>nombre</a:t>
+            </a:r>
+            <a:r>
+              <a:rPr sz="1300" i="0" b="0">
+                <a:solidFill>
+                  <a:srgbClr val="D4D4D4"/>
+                </a:solidFill>
+                <a:latin typeface="Consolas"/>
+              </a:rPr>
+              <a:t>: </a:t>
+            </a:r>
+            <a:r>
+              <a:rPr sz="1300" i="0" b="0">
+                <a:solidFill>
+                  <a:srgbClr val="D4D4D4"/>
+                </a:solidFill>
+                <a:latin typeface="Consolas"/>
+              </a:rPr>
+              <a:t>String</a:t>
+            </a:r>
+          </a:p>
+          <a:p>
+            <a:pPr>
+              <a:spcAft>
+                <a:spcPts val="278"/>
+              </a:spcAft>
+            </a:pPr>
+            <a:r>
+              <a:rPr sz="1300" i="0" b="0">
+                <a:solidFill>
+                  <a:srgbClr val="D4D4D4"/>
+                </a:solidFill>
+                <a:latin typeface="Consolas"/>
+              </a:rPr>
+              <a:t>    +</a:t>
+            </a:r>
+            <a:r>
+              <a:rPr sz="1300" i="0" b="0">
+                <a:solidFill>
+                  <a:srgbClr val="DCDCAA"/>
+                </a:solidFill>
+                <a:latin typeface="Consolas"/>
+              </a:rPr>
+              <a:t>registrarMascota</a:t>
+            </a:r>
+            <a:r>
+              <a:rPr sz="1300" i="0" b="0">
+                <a:solidFill>
+                  <a:srgbClr val="D4D4D4"/>
+                </a:solidFill>
+                <a:latin typeface="Consolas"/>
+              </a:rPr>
+              <a:t>(</a:t>
+            </a:r>
+            <a:r>
+              <a:rPr sz="1300" i="0" b="0">
+                <a:solidFill>
+                  <a:srgbClr val="D4D4D4"/>
+                </a:solidFill>
+                <a:latin typeface="Consolas"/>
+              </a:rPr>
+              <a:t>m</a:t>
+            </a:r>
+            <a:r>
+              <a:rPr sz="1300" i="0" b="0">
+                <a:solidFill>
+                  <a:srgbClr val="D4D4D4"/>
+                </a:solidFill>
+                <a:latin typeface="Consolas"/>
+              </a:rPr>
+              <a:t>: </a:t>
+            </a:r>
+            <a:r>
+              <a:rPr sz="1300" i="0" b="0">
+                <a:solidFill>
+                  <a:srgbClr val="D4D4D4"/>
+                </a:solidFill>
+                <a:latin typeface="Consolas"/>
+              </a:rPr>
+              <a:t>Mascota</a:t>
+            </a:r>
+            <a:r>
+              <a:rPr sz="1300" i="0" b="0">
+                <a:solidFill>
+                  <a:srgbClr val="D4D4D4"/>
+                </a:solidFill>
+                <a:latin typeface="Consolas"/>
+              </a:rPr>
+              <a:t>) </a:t>
+            </a:r>
+            <a:r>
+              <a:rPr sz="1300" i="0" b="0">
+                <a:solidFill>
+                  <a:srgbClr val="D4D4D4"/>
+                </a:solidFill>
+                <a:latin typeface="Consolas"/>
+              </a:rPr>
+              <a:t>void</a:t>
+            </a:r>
+          </a:p>
+          <a:p>
+            <a:pPr>
+              <a:spcAft>
+                <a:spcPts val="278"/>
+              </a:spcAft>
+            </a:pPr>
+            <a:r>
+              <a:rPr sz="1300" i="0" b="0">
+                <a:solidFill>
+                  <a:srgbClr val="D4D4D4"/>
+                </a:solidFill>
+                <a:latin typeface="Consolas"/>
+              </a:rPr>
+              <a:t>  }</a:t>
+            </a:r>
+          </a:p>
+          <a:p>
+            <a:pPr>
+              <a:spcAft>
+                <a:spcPts val="278"/>
+              </a:spcAft>
+            </a:pPr>
+            <a:r>
+              <a:rPr sz="1300" i="0" b="0">
+                <a:solidFill>
+                  <a:srgbClr val="D4D4D4"/>
+                </a:solidFill>
+                <a:latin typeface="Consolas"/>
+              </a:rPr>
+              <a:t>  </a:t>
+            </a:r>
+            <a:r>
+              <a:rPr sz="1300" i="0" b="0">
+                <a:solidFill>
+                  <a:srgbClr val="D4D4D4"/>
+                </a:solidFill>
+                <a:latin typeface="Consolas"/>
+              </a:rPr>
+              <a:t>class</a:t>
+            </a:r>
+            <a:r>
+              <a:rPr sz="1300" i="0" b="0">
+                <a:solidFill>
+                  <a:srgbClr val="D4D4D4"/>
+                </a:solidFill>
+                <a:latin typeface="Consolas"/>
+              </a:rPr>
+              <a:t> </a:t>
+            </a:r>
+            <a:r>
+              <a:rPr sz="1300" i="0" b="0">
+                <a:solidFill>
+                  <a:srgbClr val="4EC9B0"/>
+                </a:solidFill>
+                <a:latin typeface="Consolas"/>
+              </a:rPr>
+              <a:t>Mascota</a:t>
+            </a:r>
+            <a:r>
+              <a:rPr sz="1300" i="0" b="0">
+                <a:solidFill>
+                  <a:srgbClr val="D4D4D4"/>
+                </a:solidFill>
+                <a:latin typeface="Consolas"/>
+              </a:rPr>
+              <a:t> {</a:t>
+            </a:r>
+          </a:p>
+          <a:p>
+            <a:pPr>
+              <a:spcAft>
+                <a:spcPts val="278"/>
+              </a:spcAft>
+            </a:pPr>
+            <a:r>
+              <a:rPr sz="1300" i="0" b="0">
+                <a:solidFill>
+                  <a:srgbClr val="D4D4D4"/>
+                </a:solidFill>
+                <a:latin typeface="Consolas"/>
+              </a:rPr>
+              <a:t>    -</a:t>
+            </a:r>
+            <a:r>
+              <a:rPr sz="1300" i="0" b="0">
+                <a:solidFill>
+                  <a:srgbClr val="D4D4D4"/>
+                </a:solidFill>
+                <a:latin typeface="Consolas"/>
+              </a:rPr>
+              <a:t>codigo</a:t>
+            </a:r>
+            <a:r>
+              <a:rPr sz="1300" i="0" b="0">
+                <a:solidFill>
+                  <a:srgbClr val="D4D4D4"/>
+                </a:solidFill>
+                <a:latin typeface="Consolas"/>
+              </a:rPr>
+              <a:t>: </a:t>
+            </a:r>
+            <a:r>
+              <a:rPr sz="1300" i="0" b="0">
+                <a:solidFill>
+                  <a:srgbClr val="D4D4D4"/>
+                </a:solidFill>
+                <a:latin typeface="Consolas"/>
+              </a:rPr>
+              <a:t>String</a:t>
+            </a:r>
+          </a:p>
+          <a:p>
+            <a:pPr>
+              <a:spcAft>
+                <a:spcPts val="278"/>
+              </a:spcAft>
+            </a:pPr>
+            <a:r>
+              <a:rPr sz="1300" i="0" b="0">
+                <a:solidFill>
+                  <a:srgbClr val="D4D4D4"/>
+                </a:solidFill>
+                <a:latin typeface="Consolas"/>
+              </a:rPr>
+              <a:t>    -</a:t>
+            </a:r>
+            <a:r>
+              <a:rPr sz="1300" i="0" b="0">
+                <a:solidFill>
+                  <a:srgbClr val="D4D4D4"/>
+                </a:solidFill>
+                <a:latin typeface="Consolas"/>
+              </a:rPr>
+              <a:t>especie</a:t>
+            </a:r>
+            <a:r>
+              <a:rPr sz="1300" i="0" b="0">
+                <a:solidFill>
+                  <a:srgbClr val="D4D4D4"/>
+                </a:solidFill>
+                <a:latin typeface="Consolas"/>
+              </a:rPr>
+              <a:t>: </a:t>
+            </a:r>
+            <a:r>
+              <a:rPr sz="1300" i="0" b="0">
+                <a:solidFill>
+                  <a:srgbClr val="D4D4D4"/>
+                </a:solidFill>
+                <a:latin typeface="Consolas"/>
+              </a:rPr>
+              <a:t>String</a:t>
+            </a:r>
+          </a:p>
+          <a:p>
+            <a:pPr>
+              <a:spcAft>
+                <a:spcPts val="278"/>
+              </a:spcAft>
+            </a:pPr>
+            <a:r>
+              <a:rPr sz="1300" i="0" b="0">
+                <a:solidFill>
+                  <a:srgbClr val="D4D4D4"/>
+                </a:solidFill>
+                <a:latin typeface="Consolas"/>
+              </a:rPr>
+              <a:t>    -</a:t>
+            </a:r>
+            <a:r>
+              <a:rPr sz="1300" i="0" b="0">
+                <a:solidFill>
+                  <a:srgbClr val="D4D4D4"/>
+                </a:solidFill>
+                <a:latin typeface="Consolas"/>
+              </a:rPr>
+              <a:t>fechaNacimiento</a:t>
+            </a:r>
+            <a:r>
+              <a:rPr sz="1300" i="0" b="0">
+                <a:solidFill>
+                  <a:srgbClr val="D4D4D4"/>
+                </a:solidFill>
+                <a:latin typeface="Consolas"/>
+              </a:rPr>
+              <a:t>: </a:t>
+            </a:r>
+            <a:r>
+              <a:rPr sz="1300" i="0" b="0">
+                <a:solidFill>
+                  <a:srgbClr val="D4D4D4"/>
+                </a:solidFill>
+                <a:latin typeface="Consolas"/>
+              </a:rPr>
+              <a:t>Date</a:t>
+            </a:r>
+          </a:p>
+          <a:p>
+            <a:pPr>
+              <a:spcAft>
+                <a:spcPts val="278"/>
+              </a:spcAft>
+            </a:pPr>
+            <a:r>
+              <a:rPr sz="1300" i="0" b="0">
+                <a:solidFill>
+                  <a:srgbClr val="D4D4D4"/>
+                </a:solidFill>
+                <a:latin typeface="Consolas"/>
+              </a:rPr>
+              <a:t>    +</a:t>
+            </a:r>
+            <a:r>
+              <a:rPr sz="1300" i="0" b="0">
+                <a:solidFill>
+                  <a:srgbClr val="DCDCAA"/>
+                </a:solidFill>
+                <a:latin typeface="Consolas"/>
+              </a:rPr>
+              <a:t>calcularEdad</a:t>
+            </a:r>
+            <a:r>
+              <a:rPr sz="1300" i="0" b="0">
+                <a:solidFill>
+                  <a:srgbClr val="D4D4D4"/>
+                </a:solidFill>
+                <a:latin typeface="Consolas"/>
+              </a:rPr>
+              <a:t>() </a:t>
+            </a:r>
+            <a:r>
+              <a:rPr sz="1300" i="0" b="0">
+                <a:solidFill>
+                  <a:srgbClr val="D4D4D4"/>
+                </a:solidFill>
+                <a:latin typeface="Consolas"/>
+              </a:rPr>
+              <a:t>int</a:t>
+            </a:r>
+          </a:p>
+          <a:p>
+            <a:pPr>
+              <a:spcAft>
+                <a:spcPts val="278"/>
+              </a:spcAft>
+            </a:pPr>
+            <a:r>
+              <a:rPr sz="1300" i="0" b="0">
+                <a:solidFill>
+                  <a:srgbClr val="D4D4D4"/>
+                </a:solidFill>
+                <a:latin typeface="Consolas"/>
+              </a:rPr>
+              <a:t>  }</a:t>
+            </a:r>
+          </a:p>
+          <a:p>
+            <a:pPr>
+              <a:spcAft>
+                <a:spcPts val="278"/>
+              </a:spcAft>
+            </a:pPr>
+            <a:r>
+              <a:rPr sz="1300" i="0" b="0">
+                <a:solidFill>
+                  <a:srgbClr val="D4D4D4"/>
+                </a:solidFill>
+                <a:latin typeface="Consolas"/>
+              </a:rPr>
+              <a:t>  </a:t>
+            </a:r>
+            <a:r>
+              <a:rPr sz="1300" i="0" b="0">
+                <a:solidFill>
+                  <a:srgbClr val="D4D4D4"/>
+                </a:solidFill>
+                <a:latin typeface="Consolas"/>
+              </a:rPr>
+              <a:t>class</a:t>
+            </a:r>
+            <a:r>
+              <a:rPr sz="1300" i="0" b="0">
+                <a:solidFill>
+                  <a:srgbClr val="D4D4D4"/>
+                </a:solidFill>
+                <a:latin typeface="Consolas"/>
+              </a:rPr>
+              <a:t> </a:t>
+            </a:r>
+            <a:r>
+              <a:rPr sz="1300" i="0" b="0">
+                <a:solidFill>
+                  <a:srgbClr val="4EC9B0"/>
+                </a:solidFill>
+                <a:latin typeface="Consolas"/>
+              </a:rPr>
+              <a:t>Veterinario</a:t>
+            </a:r>
+            <a:r>
+              <a:rPr sz="1300" i="0" b="0">
+                <a:solidFill>
+                  <a:srgbClr val="D4D4D4"/>
+                </a:solidFill>
+                <a:latin typeface="Consolas"/>
+              </a:rPr>
+              <a:t> {</a:t>
+            </a:r>
+          </a:p>
+          <a:p>
+            <a:pPr>
+              <a:spcAft>
+                <a:spcPts val="278"/>
+              </a:spcAft>
+            </a:pPr>
+            <a:r>
+              <a:rPr sz="1300" i="0" b="0">
+                <a:solidFill>
+                  <a:srgbClr val="D4D4D4"/>
+                </a:solidFill>
+                <a:latin typeface="Consolas"/>
+              </a:rPr>
+              <a:t>    -</a:t>
+            </a:r>
+            <a:r>
+              <a:rPr sz="1300" i="0" b="0">
+                <a:solidFill>
+                  <a:srgbClr val="D4D4D4"/>
+                </a:solidFill>
+                <a:latin typeface="Consolas"/>
+              </a:rPr>
+              <a:t>tarjetaProfesional</a:t>
+            </a:r>
+            <a:r>
+              <a:rPr sz="1300" i="0" b="0">
+                <a:solidFill>
+                  <a:srgbClr val="D4D4D4"/>
+                </a:solidFill>
+                <a:latin typeface="Consolas"/>
+              </a:rPr>
+              <a:t>: </a:t>
+            </a:r>
+            <a:r>
+              <a:rPr sz="1300" i="0" b="0">
+                <a:solidFill>
+                  <a:srgbClr val="D4D4D4"/>
+                </a:solidFill>
+                <a:latin typeface="Consolas"/>
+              </a:rPr>
+              <a:t>String</a:t>
+            </a:r>
+          </a:p>
+          <a:p>
+            <a:pPr>
+              <a:spcAft>
+                <a:spcPts val="278"/>
+              </a:spcAft>
+            </a:pPr>
+            <a:r>
+              <a:rPr sz="1300" i="0" b="0">
+                <a:solidFill>
+                  <a:srgbClr val="D4D4D4"/>
+                </a:solidFill>
+                <a:latin typeface="Consolas"/>
+              </a:rPr>
+              <a:t>    -</a:t>
+            </a:r>
+            <a:r>
+              <a:rPr sz="1300" i="0" b="0">
+                <a:solidFill>
+                  <a:srgbClr val="D4D4D4"/>
+                </a:solidFill>
+                <a:latin typeface="Consolas"/>
+              </a:rPr>
+              <a:t>especialidad</a:t>
+            </a:r>
+            <a:r>
+              <a:rPr sz="1300" i="0" b="0">
+                <a:solidFill>
+                  <a:srgbClr val="D4D4D4"/>
+                </a:solidFill>
+                <a:latin typeface="Consolas"/>
+              </a:rPr>
+              <a:t>: </a:t>
+            </a:r>
+            <a:r>
+              <a:rPr sz="1300" i="0" b="0">
+                <a:solidFill>
+                  <a:srgbClr val="D4D4D4"/>
+                </a:solidFill>
+                <a:latin typeface="Consolas"/>
+              </a:rPr>
+              <a:t>String</a:t>
+            </a:r>
+          </a:p>
+          <a:p>
+            <a:pPr>
+              <a:spcAft>
+                <a:spcPts val="278"/>
+              </a:spcAft>
+            </a:pPr>
+            <a:r>
+              <a:rPr sz="1300" i="0" b="0">
+                <a:solidFill>
+                  <a:srgbClr val="D4D4D4"/>
+                </a:solidFill>
+                <a:latin typeface="Consolas"/>
+              </a:rPr>
+              <a:t>  }</a:t>
+            </a:r>
+          </a:p>
+        </p:txBody>
+      </p:sp>
+      <p:sp>
+        <p:nvSpPr>
+          <p:cNvPr id="12" name="TextBox 11"/>
+          <p:cNvSpPr txBox="1"/>
+          <p:nvPr/>
+        </p:nvSpPr>
+        <p:spPr>
+          <a:xfrm>
+            <a:off x="6713067" y="1719072"/>
+            <a:ext cx="4747107" cy="4133087"/>
+          </a:xfrm>
+          <a:prstGeom prst="rect">
+            <a:avLst/>
+          </a:prstGeom>
+          <a:noFill/>
+        </p:spPr>
+        <p:txBody>
+          <a:bodyPr wrap="square">
+            <a:spAutoFit/>
+          </a:bodyPr>
+          <a:lstStyle/>
+          <a:p>
+            <a:pPr>
+              <a:spcAft>
+                <a:spcPts val="278"/>
+              </a:spcAft>
+            </a:pPr>
+            <a:r>
+              <a:rPr sz="1300" i="0" b="0">
+                <a:solidFill>
+                  <a:srgbClr val="D4D4D4"/>
+                </a:solidFill>
+                <a:latin typeface="Consolas"/>
+              </a:rPr>
+              <a:t>  </a:t>
+            </a:r>
+            <a:r>
+              <a:rPr sz="1300" i="0" b="0">
+                <a:solidFill>
+                  <a:srgbClr val="D4D4D4"/>
+                </a:solidFill>
+                <a:latin typeface="Consolas"/>
+              </a:rPr>
+              <a:t>class</a:t>
+            </a:r>
+            <a:r>
+              <a:rPr sz="1300" i="0" b="0">
+                <a:solidFill>
+                  <a:srgbClr val="D4D4D4"/>
+                </a:solidFill>
+                <a:latin typeface="Consolas"/>
+              </a:rPr>
+              <a:t> </a:t>
+            </a:r>
+            <a:r>
+              <a:rPr sz="1300" i="0" b="0">
+                <a:solidFill>
+                  <a:srgbClr val="4EC9B0"/>
+                </a:solidFill>
+                <a:latin typeface="Consolas"/>
+              </a:rPr>
+              <a:t>Cita</a:t>
+            </a:r>
+            <a:r>
+              <a:rPr sz="1300" i="0" b="0">
+                <a:solidFill>
+                  <a:srgbClr val="D4D4D4"/>
+                </a:solidFill>
+                <a:latin typeface="Consolas"/>
+              </a:rPr>
+              <a:t> {</a:t>
+            </a:r>
+          </a:p>
+          <a:p>
+            <a:pPr>
+              <a:spcAft>
+                <a:spcPts val="278"/>
+              </a:spcAft>
+            </a:pPr>
+            <a:r>
+              <a:rPr sz="1300" i="0" b="0">
+                <a:solidFill>
+                  <a:srgbClr val="D4D4D4"/>
+                </a:solidFill>
+                <a:latin typeface="Consolas"/>
+              </a:rPr>
+              <a:t>    -</a:t>
+            </a:r>
+            <a:r>
+              <a:rPr sz="1300" i="0" b="0">
+                <a:solidFill>
+                  <a:srgbClr val="D4D4D4"/>
+                </a:solidFill>
+                <a:latin typeface="Consolas"/>
+              </a:rPr>
+              <a:t>fechaHora</a:t>
+            </a:r>
+            <a:r>
+              <a:rPr sz="1300" i="0" b="0">
+                <a:solidFill>
+                  <a:srgbClr val="D4D4D4"/>
+                </a:solidFill>
+                <a:latin typeface="Consolas"/>
+              </a:rPr>
+              <a:t>: </a:t>
+            </a:r>
+            <a:r>
+              <a:rPr sz="1300" i="0" b="0">
+                <a:solidFill>
+                  <a:srgbClr val="D4D4D4"/>
+                </a:solidFill>
+                <a:latin typeface="Consolas"/>
+              </a:rPr>
+              <a:t>DateTime</a:t>
+            </a:r>
+          </a:p>
+          <a:p>
+            <a:pPr>
+              <a:spcAft>
+                <a:spcPts val="278"/>
+              </a:spcAft>
+            </a:pPr>
+            <a:r>
+              <a:rPr sz="1300" i="0" b="0">
+                <a:solidFill>
+                  <a:srgbClr val="D4D4D4"/>
+                </a:solidFill>
+                <a:latin typeface="Consolas"/>
+              </a:rPr>
+              <a:t>    -</a:t>
+            </a:r>
+            <a:r>
+              <a:rPr sz="1300" i="0" b="0">
+                <a:solidFill>
+                  <a:srgbClr val="D4D4D4"/>
+                </a:solidFill>
+                <a:latin typeface="Consolas"/>
+              </a:rPr>
+              <a:t>estado</a:t>
+            </a:r>
+            <a:r>
+              <a:rPr sz="1300" i="0" b="0">
+                <a:solidFill>
+                  <a:srgbClr val="D4D4D4"/>
+                </a:solidFill>
+                <a:latin typeface="Consolas"/>
+              </a:rPr>
+              <a:t>: </a:t>
+            </a:r>
+            <a:r>
+              <a:rPr sz="1300" i="0" b="0">
+                <a:solidFill>
+                  <a:srgbClr val="D4D4D4"/>
+                </a:solidFill>
+                <a:latin typeface="Consolas"/>
+              </a:rPr>
+              <a:t>String</a:t>
+            </a:r>
+          </a:p>
+          <a:p>
+            <a:pPr>
+              <a:spcAft>
+                <a:spcPts val="278"/>
+              </a:spcAft>
+            </a:pPr>
+            <a:r>
+              <a:rPr sz="1300" i="0" b="0">
+                <a:solidFill>
+                  <a:srgbClr val="D4D4D4"/>
+                </a:solidFill>
+                <a:latin typeface="Consolas"/>
+              </a:rPr>
+              <a:t>    +</a:t>
+            </a:r>
+            <a:r>
+              <a:rPr sz="1300" i="0" b="0">
+                <a:solidFill>
+                  <a:srgbClr val="DCDCAA"/>
+                </a:solidFill>
+                <a:latin typeface="Consolas"/>
+              </a:rPr>
+              <a:t>reprogramar</a:t>
+            </a:r>
+            <a:r>
+              <a:rPr sz="1300" i="0" b="0">
+                <a:solidFill>
+                  <a:srgbClr val="D4D4D4"/>
+                </a:solidFill>
+                <a:latin typeface="Consolas"/>
+              </a:rPr>
+              <a:t>(</a:t>
+            </a:r>
+            <a:r>
+              <a:rPr sz="1300" i="0" b="0">
+                <a:solidFill>
+                  <a:srgbClr val="D4D4D4"/>
+                </a:solidFill>
+                <a:latin typeface="Consolas"/>
+              </a:rPr>
+              <a:t>nuevaFecha</a:t>
+            </a:r>
+            <a:r>
+              <a:rPr sz="1300" i="0" b="0">
+                <a:solidFill>
+                  <a:srgbClr val="D4D4D4"/>
+                </a:solidFill>
+                <a:latin typeface="Consolas"/>
+              </a:rPr>
+              <a:t>: </a:t>
+            </a:r>
+            <a:r>
+              <a:rPr sz="1300" i="0" b="0">
+                <a:solidFill>
+                  <a:srgbClr val="D4D4D4"/>
+                </a:solidFill>
+                <a:latin typeface="Consolas"/>
+              </a:rPr>
+              <a:t>DateTime</a:t>
+            </a:r>
+            <a:r>
+              <a:rPr sz="1300" i="0" b="0">
+                <a:solidFill>
+                  <a:srgbClr val="D4D4D4"/>
+                </a:solidFill>
+                <a:latin typeface="Consolas"/>
+              </a:rPr>
+              <a:t>) </a:t>
+            </a:r>
+            <a:r>
+              <a:rPr sz="1300" i="0" b="0">
+                <a:solidFill>
+                  <a:srgbClr val="D4D4D4"/>
+                </a:solidFill>
+                <a:latin typeface="Consolas"/>
+              </a:rPr>
+              <a:t>void</a:t>
+            </a:r>
+          </a:p>
+          <a:p>
+            <a:pPr>
+              <a:spcAft>
+                <a:spcPts val="278"/>
+              </a:spcAft>
+            </a:pPr>
+            <a:r>
+              <a:rPr sz="1300" i="0" b="0">
+                <a:solidFill>
+                  <a:srgbClr val="D4D4D4"/>
+                </a:solidFill>
+                <a:latin typeface="Consolas"/>
+              </a:rPr>
+              <a:t>  }</a:t>
+            </a:r>
+          </a:p>
+          <a:p>
+            <a:pPr>
+              <a:spcAft>
+                <a:spcPts val="278"/>
+              </a:spcAft>
+            </a:pPr>
+            <a:r>
+              <a:rPr sz="1300" i="0" b="0">
+                <a:solidFill>
+                  <a:srgbClr val="D4D4D4"/>
+                </a:solidFill>
+                <a:latin typeface="Consolas"/>
+              </a:rPr>
+              <a:t>  </a:t>
+            </a:r>
+            <a:r>
+              <a:rPr sz="1300" i="0" b="0">
+                <a:solidFill>
+                  <a:srgbClr val="D4D4D4"/>
+                </a:solidFill>
+                <a:latin typeface="Consolas"/>
+              </a:rPr>
+              <a:t>class</a:t>
+            </a:r>
+            <a:r>
+              <a:rPr sz="1300" i="0" b="0">
+                <a:solidFill>
+                  <a:srgbClr val="D4D4D4"/>
+                </a:solidFill>
+                <a:latin typeface="Consolas"/>
+              </a:rPr>
+              <a:t> </a:t>
+            </a:r>
+            <a:r>
+              <a:rPr sz="1300" i="0" b="0">
+                <a:solidFill>
+                  <a:srgbClr val="4EC9B0"/>
+                </a:solidFill>
+                <a:latin typeface="Consolas"/>
+              </a:rPr>
+              <a:t>Atencion</a:t>
+            </a:r>
+            <a:r>
+              <a:rPr sz="1300" i="0" b="0">
+                <a:solidFill>
+                  <a:srgbClr val="D4D4D4"/>
+                </a:solidFill>
+                <a:latin typeface="Consolas"/>
+              </a:rPr>
+              <a:t> {</a:t>
+            </a:r>
+          </a:p>
+          <a:p>
+            <a:pPr>
+              <a:spcAft>
+                <a:spcPts val="278"/>
+              </a:spcAft>
+            </a:pPr>
+            <a:r>
+              <a:rPr sz="1300" i="0" b="0">
+                <a:solidFill>
+                  <a:srgbClr val="D4D4D4"/>
+                </a:solidFill>
+                <a:latin typeface="Consolas"/>
+              </a:rPr>
+              <a:t>    -</a:t>
+            </a:r>
+            <a:r>
+              <a:rPr sz="1300" i="0" b="0">
+                <a:solidFill>
+                  <a:srgbClr val="D4D4D4"/>
+                </a:solidFill>
+                <a:latin typeface="Consolas"/>
+              </a:rPr>
+              <a:t>diagnostico</a:t>
+            </a:r>
+            <a:r>
+              <a:rPr sz="1300" i="0" b="0">
+                <a:solidFill>
+                  <a:srgbClr val="D4D4D4"/>
+                </a:solidFill>
+                <a:latin typeface="Consolas"/>
+              </a:rPr>
+              <a:t>: </a:t>
+            </a:r>
+            <a:r>
+              <a:rPr sz="1300" i="0" b="0">
+                <a:solidFill>
+                  <a:srgbClr val="D4D4D4"/>
+                </a:solidFill>
+                <a:latin typeface="Consolas"/>
+              </a:rPr>
+              <a:t>String</a:t>
+            </a:r>
+          </a:p>
+          <a:p>
+            <a:pPr>
+              <a:spcAft>
+                <a:spcPts val="278"/>
+              </a:spcAft>
+            </a:pPr>
+            <a:r>
+              <a:rPr sz="1300" i="0" b="0">
+                <a:solidFill>
+                  <a:srgbClr val="D4D4D4"/>
+                </a:solidFill>
+                <a:latin typeface="Consolas"/>
+              </a:rPr>
+              <a:t>    -</a:t>
+            </a:r>
+            <a:r>
+              <a:rPr sz="1300" i="0" b="0">
+                <a:solidFill>
+                  <a:srgbClr val="D4D4D4"/>
+                </a:solidFill>
+                <a:latin typeface="Consolas"/>
+              </a:rPr>
+              <a:t>tratamiento</a:t>
+            </a:r>
+            <a:r>
+              <a:rPr sz="1300" i="0" b="0">
+                <a:solidFill>
+                  <a:srgbClr val="D4D4D4"/>
+                </a:solidFill>
+                <a:latin typeface="Consolas"/>
+              </a:rPr>
+              <a:t>: </a:t>
+            </a:r>
+            <a:r>
+              <a:rPr sz="1300" i="0" b="0">
+                <a:solidFill>
+                  <a:srgbClr val="D4D4D4"/>
+                </a:solidFill>
+                <a:latin typeface="Consolas"/>
+              </a:rPr>
+              <a:t>String</a:t>
+            </a:r>
+          </a:p>
+          <a:p>
+            <a:pPr>
+              <a:spcAft>
+                <a:spcPts val="278"/>
+              </a:spcAft>
+            </a:pPr>
+            <a:r>
+              <a:rPr sz="1300" i="0" b="0">
+                <a:solidFill>
+                  <a:srgbClr val="D4D4D4"/>
+                </a:solidFill>
+                <a:latin typeface="Consolas"/>
+              </a:rPr>
+              <a:t>  }</a:t>
+            </a:r>
+          </a:p>
+          <a:p>
+            <a:pPr>
+              <a:spcAft>
+                <a:spcPts val="278"/>
+              </a:spcAft>
+            </a:pPr>
+            <a:r>
+              <a:rPr sz="1300" i="0" b="0">
+                <a:solidFill>
+                  <a:srgbClr val="D4D4D4"/>
+                </a:solidFill>
+                <a:latin typeface="Consolas"/>
+              </a:rPr>
+              <a:t>  </a:t>
+            </a:r>
+            <a:r>
+              <a:rPr sz="1300" i="0" b="0">
+                <a:solidFill>
+                  <a:srgbClr val="D4D4D4"/>
+                </a:solidFill>
+                <a:latin typeface="Consolas"/>
+              </a:rPr>
+              <a:t>Dueno</a:t>
+            </a:r>
+            <a:r>
+              <a:rPr sz="1300" i="0" b="0">
+                <a:solidFill>
+                  <a:srgbClr val="D4D4D4"/>
+                </a:solidFill>
+                <a:latin typeface="Consolas"/>
+              </a:rPr>
+              <a:t> </a:t>
+            </a:r>
+            <a:r>
+              <a:rPr sz="1300" i="0" b="0">
+                <a:solidFill>
+                  <a:srgbClr val="CE9178"/>
+                </a:solidFill>
+                <a:latin typeface="Consolas"/>
+              </a:rPr>
+              <a:t>"1"</a:t>
+            </a:r>
+            <a:r>
+              <a:rPr sz="1300" i="0" b="0">
+                <a:solidFill>
+                  <a:srgbClr val="D4D4D4"/>
+                </a:solidFill>
+                <a:latin typeface="Consolas"/>
+              </a:rPr>
+              <a:t> --&gt; </a:t>
+            </a:r>
+            <a:r>
+              <a:rPr sz="1300" i="0" b="0">
+                <a:solidFill>
+                  <a:srgbClr val="CE9178"/>
+                </a:solidFill>
+                <a:latin typeface="Consolas"/>
+              </a:rPr>
+              <a:t>"0..*"</a:t>
+            </a:r>
+            <a:r>
+              <a:rPr sz="1300" i="0" b="0">
+                <a:solidFill>
+                  <a:srgbClr val="D4D4D4"/>
+                </a:solidFill>
+                <a:latin typeface="Consolas"/>
+              </a:rPr>
+              <a:t> </a:t>
+            </a:r>
+            <a:r>
+              <a:rPr sz="1300" i="0" b="0">
+                <a:solidFill>
+                  <a:srgbClr val="D4D4D4"/>
+                </a:solidFill>
+                <a:latin typeface="Consolas"/>
+              </a:rPr>
+              <a:t>Mascota</a:t>
+            </a:r>
+            <a:r>
+              <a:rPr sz="1300" i="0" b="0">
+                <a:solidFill>
+                  <a:srgbClr val="D4D4D4"/>
+                </a:solidFill>
+                <a:latin typeface="Consolas"/>
+              </a:rPr>
+              <a:t> : </a:t>
+            </a:r>
+            <a:r>
+              <a:rPr sz="1300" i="0" b="0">
+                <a:solidFill>
+                  <a:srgbClr val="D4D4D4"/>
+                </a:solidFill>
+                <a:latin typeface="Consolas"/>
+              </a:rPr>
+              <a:t>es</a:t>
+            </a:r>
+            <a:r>
+              <a:rPr sz="1300" i="0" b="0">
+                <a:solidFill>
+                  <a:srgbClr val="D4D4D4"/>
+                </a:solidFill>
+                <a:latin typeface="Consolas"/>
+              </a:rPr>
+              <a:t> </a:t>
+            </a:r>
+            <a:r>
+              <a:rPr sz="1300" i="0" b="0">
+                <a:solidFill>
+                  <a:srgbClr val="D4D4D4"/>
+                </a:solidFill>
+                <a:latin typeface="Consolas"/>
+              </a:rPr>
+              <a:t>dueno</a:t>
+            </a:r>
+            <a:r>
+              <a:rPr sz="1300" i="0" b="0">
+                <a:solidFill>
+                  <a:srgbClr val="D4D4D4"/>
+                </a:solidFill>
+                <a:latin typeface="Consolas"/>
+              </a:rPr>
+              <a:t> </a:t>
+            </a:r>
+            <a:r>
+              <a:rPr sz="1300" i="0" b="0">
+                <a:solidFill>
+                  <a:srgbClr val="D4D4D4"/>
+                </a:solidFill>
+                <a:latin typeface="Consolas"/>
+              </a:rPr>
+              <a:t>de</a:t>
+            </a:r>
+          </a:p>
+          <a:p>
+            <a:pPr>
+              <a:spcAft>
+                <a:spcPts val="278"/>
+              </a:spcAft>
+            </a:pPr>
+            <a:r>
+              <a:rPr sz="1300" i="0" b="0">
+                <a:solidFill>
+                  <a:srgbClr val="D4D4D4"/>
+                </a:solidFill>
+                <a:latin typeface="Consolas"/>
+              </a:rPr>
+              <a:t>  </a:t>
+            </a:r>
+            <a:r>
+              <a:rPr sz="1300" i="0" b="0">
+                <a:solidFill>
+                  <a:srgbClr val="D4D4D4"/>
+                </a:solidFill>
+                <a:latin typeface="Consolas"/>
+              </a:rPr>
+              <a:t>Mascota</a:t>
+            </a:r>
+            <a:r>
+              <a:rPr sz="1300" i="0" b="0">
+                <a:solidFill>
+                  <a:srgbClr val="D4D4D4"/>
+                </a:solidFill>
+                <a:latin typeface="Consolas"/>
+              </a:rPr>
+              <a:t> </a:t>
+            </a:r>
+            <a:r>
+              <a:rPr sz="1300" i="0" b="0">
+                <a:solidFill>
+                  <a:srgbClr val="CE9178"/>
+                </a:solidFill>
+                <a:latin typeface="Consolas"/>
+              </a:rPr>
+              <a:t>"1"</a:t>
+            </a:r>
+            <a:r>
+              <a:rPr sz="1300" i="0" b="0">
+                <a:solidFill>
+                  <a:srgbClr val="D4D4D4"/>
+                </a:solidFill>
+                <a:latin typeface="Consolas"/>
+              </a:rPr>
+              <a:t> --&gt; </a:t>
+            </a:r>
+            <a:r>
+              <a:rPr sz="1300" i="0" b="0">
+                <a:solidFill>
+                  <a:srgbClr val="CE9178"/>
+                </a:solidFill>
+                <a:latin typeface="Consolas"/>
+              </a:rPr>
+              <a:t>"0..*"</a:t>
+            </a:r>
+            <a:r>
+              <a:rPr sz="1300" i="0" b="0">
+                <a:solidFill>
+                  <a:srgbClr val="D4D4D4"/>
+                </a:solidFill>
+                <a:latin typeface="Consolas"/>
+              </a:rPr>
+              <a:t> </a:t>
+            </a:r>
+            <a:r>
+              <a:rPr sz="1300" i="0" b="0">
+                <a:solidFill>
+                  <a:srgbClr val="D4D4D4"/>
+                </a:solidFill>
+                <a:latin typeface="Consolas"/>
+              </a:rPr>
+              <a:t>Cita</a:t>
+            </a:r>
+            <a:r>
+              <a:rPr sz="1300" i="0" b="0">
+                <a:solidFill>
+                  <a:srgbClr val="D4D4D4"/>
+                </a:solidFill>
+                <a:latin typeface="Consolas"/>
+              </a:rPr>
+              <a:t> : </a:t>
+            </a:r>
+            <a:r>
+              <a:rPr sz="1300" i="0" b="0">
+                <a:solidFill>
+                  <a:srgbClr val="D4D4D4"/>
+                </a:solidFill>
+                <a:latin typeface="Consolas"/>
+              </a:rPr>
+              <a:t>tiene</a:t>
+            </a:r>
+            <a:r>
+              <a:rPr sz="1300" i="0" b="0">
+                <a:solidFill>
+                  <a:srgbClr val="D4D4D4"/>
+                </a:solidFill>
+                <a:latin typeface="Consolas"/>
+              </a:rPr>
+              <a:t> </a:t>
+            </a:r>
+            <a:r>
+              <a:rPr sz="1300" i="0" b="0">
+                <a:solidFill>
+                  <a:srgbClr val="D4D4D4"/>
+                </a:solidFill>
+                <a:latin typeface="Consolas"/>
+              </a:rPr>
+              <a:t>agendada</a:t>
+            </a:r>
+          </a:p>
+          <a:p>
+            <a:pPr>
+              <a:spcAft>
+                <a:spcPts val="278"/>
+              </a:spcAft>
+            </a:pPr>
+            <a:r>
+              <a:rPr sz="1300" i="0" b="0">
+                <a:solidFill>
+                  <a:srgbClr val="D4D4D4"/>
+                </a:solidFill>
+                <a:latin typeface="Consolas"/>
+              </a:rPr>
+              <a:t>  </a:t>
+            </a:r>
+            <a:r>
+              <a:rPr sz="1300" i="0" b="0">
+                <a:solidFill>
+                  <a:srgbClr val="D4D4D4"/>
+                </a:solidFill>
+                <a:latin typeface="Consolas"/>
+              </a:rPr>
+              <a:t>Veterinario</a:t>
+            </a:r>
+            <a:r>
+              <a:rPr sz="1300" i="0" b="0">
+                <a:solidFill>
+                  <a:srgbClr val="D4D4D4"/>
+                </a:solidFill>
+                <a:latin typeface="Consolas"/>
+              </a:rPr>
+              <a:t> </a:t>
+            </a:r>
+            <a:r>
+              <a:rPr sz="1300" i="0" b="0">
+                <a:solidFill>
+                  <a:srgbClr val="CE9178"/>
+                </a:solidFill>
+                <a:latin typeface="Consolas"/>
+              </a:rPr>
+              <a:t>"1"</a:t>
+            </a:r>
+            <a:r>
+              <a:rPr sz="1300" i="0" b="0">
+                <a:solidFill>
+                  <a:srgbClr val="D4D4D4"/>
+                </a:solidFill>
+                <a:latin typeface="Consolas"/>
+              </a:rPr>
+              <a:t> --&gt; </a:t>
+            </a:r>
+            <a:r>
+              <a:rPr sz="1300" i="0" b="0">
+                <a:solidFill>
+                  <a:srgbClr val="CE9178"/>
+                </a:solidFill>
+                <a:latin typeface="Consolas"/>
+              </a:rPr>
+              <a:t>"0..*"</a:t>
+            </a:r>
+            <a:r>
+              <a:rPr sz="1300" i="0" b="0">
+                <a:solidFill>
+                  <a:srgbClr val="D4D4D4"/>
+                </a:solidFill>
+                <a:latin typeface="Consolas"/>
+              </a:rPr>
+              <a:t> </a:t>
+            </a:r>
+            <a:r>
+              <a:rPr sz="1300" i="0" b="0">
+                <a:solidFill>
+                  <a:srgbClr val="D4D4D4"/>
+                </a:solidFill>
+                <a:latin typeface="Consolas"/>
+              </a:rPr>
+              <a:t>Cita</a:t>
+            </a:r>
+            <a:r>
+              <a:rPr sz="1300" i="0" b="0">
+                <a:solidFill>
+                  <a:srgbClr val="D4D4D4"/>
+                </a:solidFill>
+                <a:latin typeface="Consolas"/>
+              </a:rPr>
+              <a:t> : </a:t>
+            </a:r>
+            <a:r>
+              <a:rPr sz="1300" i="0" b="0">
+                <a:solidFill>
+                  <a:srgbClr val="D4D4D4"/>
+                </a:solidFill>
+                <a:latin typeface="Consolas"/>
+              </a:rPr>
+              <a:t>atiende</a:t>
+            </a:r>
+          </a:p>
+          <a:p>
+            <a:pPr>
+              <a:spcAft>
+                <a:spcPts val="278"/>
+              </a:spcAft>
+            </a:pPr>
+            <a:r>
+              <a:rPr sz="1300" i="0" b="0">
+                <a:solidFill>
+                  <a:srgbClr val="D4D4D4"/>
+                </a:solidFill>
+                <a:latin typeface="Consolas"/>
+              </a:rPr>
+              <a:t>  </a:t>
+            </a:r>
+            <a:r>
+              <a:rPr sz="1300" i="0" b="0">
+                <a:solidFill>
+                  <a:srgbClr val="D4D4D4"/>
+                </a:solidFill>
+                <a:latin typeface="Consolas"/>
+              </a:rPr>
+              <a:t>Cita</a:t>
+            </a:r>
+            <a:r>
+              <a:rPr sz="1300" i="0" b="0">
+                <a:solidFill>
+                  <a:srgbClr val="D4D4D4"/>
+                </a:solidFill>
+                <a:latin typeface="Consolas"/>
+              </a:rPr>
+              <a:t> </a:t>
+            </a:r>
+            <a:r>
+              <a:rPr sz="1300" i="0" b="0">
+                <a:solidFill>
+                  <a:srgbClr val="CE9178"/>
+                </a:solidFill>
+                <a:latin typeface="Consolas"/>
+              </a:rPr>
+              <a:t>"1"</a:t>
+            </a:r>
+            <a:r>
+              <a:rPr sz="1300" i="0" b="0">
+                <a:solidFill>
+                  <a:srgbClr val="D4D4D4"/>
+                </a:solidFill>
+                <a:latin typeface="Consolas"/>
+              </a:rPr>
+              <a:t> --&gt; </a:t>
+            </a:r>
+            <a:r>
+              <a:rPr sz="1300" i="0" b="0">
+                <a:solidFill>
+                  <a:srgbClr val="CE9178"/>
+                </a:solidFill>
+                <a:latin typeface="Consolas"/>
+              </a:rPr>
+              <a:t>"0..1"</a:t>
+            </a:r>
+            <a:r>
+              <a:rPr sz="1300" i="0" b="0">
+                <a:solidFill>
+                  <a:srgbClr val="D4D4D4"/>
+                </a:solidFill>
+                <a:latin typeface="Consolas"/>
+              </a:rPr>
+              <a:t> </a:t>
+            </a:r>
+            <a:r>
+              <a:rPr sz="1300" i="0" b="0">
+                <a:solidFill>
+                  <a:srgbClr val="D4D4D4"/>
+                </a:solidFill>
+                <a:latin typeface="Consolas"/>
+              </a:rPr>
+              <a:t>Atencion</a:t>
+            </a:r>
+            <a:r>
+              <a:rPr sz="1300" i="0" b="0">
+                <a:solidFill>
+                  <a:srgbClr val="D4D4D4"/>
+                </a:solidFill>
+                <a:latin typeface="Consolas"/>
+              </a:rPr>
+              <a:t> : </a:t>
+            </a:r>
+            <a:r>
+              <a:rPr sz="1300" i="0" b="0">
+                <a:solidFill>
+                  <a:srgbClr val="D4D4D4"/>
+                </a:solidFill>
+                <a:latin typeface="Consolas"/>
+              </a:rPr>
+              <a:t>genera</a:t>
+            </a:r>
+          </a:p>
+          <a:p>
+            <a:pPr>
+              <a:spcAft>
+                <a:spcPts val="278"/>
+              </a:spcAft>
+            </a:pPr>
+            <a:r>
+              <a:rPr sz="1300" i="1" b="0">
+                <a:solidFill>
+                  <a:srgbClr val="6A9955"/>
+                </a:solidFill>
+                <a:latin typeface="Consolas"/>
+              </a:rPr>
+              <a:t>%% En Mermaid el retorno va tras el parentesis y sin dos puntos:</a:t>
+            </a:r>
+          </a:p>
+          <a:p>
+            <a:pPr>
+              <a:spcAft>
+                <a:spcPts val="278"/>
+              </a:spcAft>
+            </a:pPr>
+            <a:r>
+              <a:rPr sz="1300" i="1" b="0">
+                <a:solidFill>
+                  <a:srgbClr val="6A9955"/>
+                </a:solidFill>
+                <a:latin typeface="Consolas"/>
+              </a:rPr>
+              <a:t>%% +calcularEdad() int  se dibuja como el UML  +calcularEdad(): int</a:t>
+            </a:r>
+          </a:p>
+        </p:txBody>
+      </p:sp>
+      <p:sp>
+        <p:nvSpPr>
+          <p:cNvPr id="13" name="TextBox 12"/>
+          <p:cNvSpPr txBox="1"/>
+          <p:nvPr/>
+        </p:nvSpPr>
+        <p:spPr>
+          <a:xfrm>
+            <a:off x="457200" y="6035040"/>
+            <a:ext cx="11277295" cy="365760"/>
+          </a:xfrm>
+          <a:prstGeom prst="rect">
+            <a:avLst/>
+          </a:prstGeom>
+          <a:noFill/>
+        </p:spPr>
+        <p:txBody>
+          <a:bodyPr wrap="square">
+            <a:spAutoFit/>
+          </a:bodyPr>
+          <a:lstStyle/>
+          <a:p>
+            <a:pPr algn="ctr"/>
+            <a:r>
+              <a:rPr sz="1300" b="0" i="1">
+                <a:solidFill>
+                  <a:srgbClr val="666666"/>
                 </a:solidFill>
                 <a:latin typeface="Calibri"/>
               </a:rPr>
-              <a:t>–   En la clinica, Dueno 1 --- 0..* Mascota se lee un dueno puede tener cero o mas mascotas y una mascota pertenece a exactamente un dueno; ese 1 del lado del dueno es una decision de negocio que hay que confirmar con el cliente, no una suposicion.</a:t>
-            </a:r>
-          </a:p>
-        </p:txBody>
-      </p:sp>
-      <p:sp>
-        <p:nvSpPr>
-          <p:cNvPr id="6" name="TextBox 5"/>
+              <a:t>Las multiplicidades son las que contestan las preguntas que el espanol deja abiertas: un dueno, muchas mascotas.</a:t>
+            </a:r>
+          </a:p>
+        </p:txBody>
+      </p:sp>
+      <p:sp>
+        <p:nvSpPr>
+          <p:cNvPr id="14" name="TextBox 13"/>
           <p:cNvSpPr txBox="1"/>
           <p:nvPr/>
         </p:nvSpPr>

--- a/Seminario de Sistemas/Clases/Clase 8 - Introduccion a UML/Presentacion.pptx
+++ b/Seminario de Sistemas/Clases/Clase 8 - Introduccion a UML/Presentacion.pptx
@@ -5730,118 +5730,14 @@
       </p:sp>
       <p:sp>
         <p:nvSpPr>
-          <p:cNvPr id="5" name="Rounded Rectangle 4"/>
-          <p:cNvSpPr/>
-          <p:nvPr/>
-        </p:nvSpPr>
-        <p:spPr>
-          <a:xfrm>
-            <a:off x="5797149" y="1573813"/>
-            <a:ext cx="6010497" cy="4057845"/>
-          </a:xfrm>
-          <a:prstGeom prst="roundRect">
-            <a:avLst>
-              <a:gd name="adj" fmla="val 4000"/>
-            </a:avLst>
-          </a:prstGeom>
-          <a:solidFill>
-            <a:srgbClr val="E8EEF4"/>
-          </a:solidFill>
-          <a:ln>
-            <a:noFill/>
-          </a:ln>
-        </p:spPr>
-        <p:style>
-          <a:lnRef idx="1">
-            <a:schemeClr val="accent1"/>
-          </a:lnRef>
-          <a:fillRef idx="3">
-            <a:schemeClr val="accent1"/>
-          </a:fillRef>
-          <a:effectRef idx="2">
-            <a:schemeClr val="accent1"/>
-          </a:effectRef>
-          <a:fontRef idx="minor">
-            <a:schemeClr val="lt1"/>
-          </a:fontRef>
-        </p:style>
-        <p:txBody>
-          <a:bodyPr rtlCol="0" anchor="ctr"/>
-          <a:lstStyle/>
-          <a:p>
-            <a:pPr algn="ctr"/>
-          </a:p>
-        </p:txBody>
-      </p:sp>
-      <p:pic>
-        <p:nvPicPr>
-          <p:cNvPr id="6" name="Picture 5" descr="laptop-code-live-demo.jpg"/>
-          <p:cNvPicPr>
-            <a:picLocks noChangeAspect="1"/>
-          </p:cNvPicPr>
-          <p:nvPr/>
-        </p:nvPicPr>
-        <p:blipFill>
-          <a:blip r:embed="rId2"/>
-          <a:stretch>
-            <a:fillRect/>
-          </a:stretch>
-        </p:blipFill>
-        <p:spPr>
-          <a:xfrm>
-            <a:off x="5870301" y="1646965"/>
-            <a:ext cx="5864193" cy="3911541"/>
-          </a:xfrm>
-          <a:prstGeom prst="rect">
-            <a:avLst/>
-          </a:prstGeom>
-        </p:spPr>
-      </p:pic>
-      <p:sp>
-        <p:nvSpPr>
-          <p:cNvPr id="7" name="TextBox 6"/>
+          <p:cNvPr id="5" name="TextBox 4"/>
           <p:cNvSpPr txBox="1"/>
           <p:nvPr/>
         </p:nvSpPr>
         <p:spPr>
           <a:xfrm>
-            <a:off x="5870301" y="5961888"/>
-            <a:ext cx="5864193" cy="320040"/>
-          </a:xfrm>
-          <a:prstGeom prst="rect">
-            <a:avLst/>
-          </a:prstGeom>
-          <a:noFill/>
-        </p:spPr>
-        <p:txBody>
-          <a:bodyPr wrap="square">
-            <a:spAutoFit/>
-          </a:bodyPr>
-          <a:lstStyle/>
-          <a:p>
-            <a:pPr algn="ctr"/>
-            <a:r>
-              <a:rPr sz="1100" b="0" i="1">
-                <a:solidFill>
-                  <a:srgbClr val="666666"/>
-                </a:solidFill>
-                <a:latin typeface="Calibri"/>
-              </a:rPr>
-              <a:t>Foto: olia danilevich · Pexels</a:t>
-            </a:r>
-          </a:p>
-        </p:txBody>
-      </p:sp>
-      <p:sp>
-        <p:nvSpPr>
-          <p:cNvPr id="8" name="TextBox 7"/>
-          <p:cNvSpPr txBox="1"/>
-          <p:nvPr/>
-        </p:nvSpPr>
-        <p:spPr>
-          <a:xfrm>
-            <a:off x="457200" y="1353312"/>
-            <a:ext cx="5093061" cy="5047488"/>
+            <a:off x="457200" y="1170432"/>
+            <a:ext cx="11277295" cy="5230368"/>
           </a:xfrm>
           <a:prstGeom prst="rect">
             <a:avLst/>
@@ -5941,7 +5837,7 @@
       </p:sp>
       <p:sp>
         <p:nvSpPr>
-          <p:cNvPr id="9" name="TextBox 8"/>
+          <p:cNvPr id="6" name="TextBox 5"/>
           <p:cNvSpPr txBox="1"/>
           <p:nvPr/>
         </p:nvSpPr>
@@ -6354,118 +6250,14 @@
       </p:sp>
       <p:sp>
         <p:nvSpPr>
-          <p:cNvPr id="5" name="Rounded Rectangle 4"/>
-          <p:cNvSpPr/>
-          <p:nvPr/>
-        </p:nvSpPr>
-        <p:spPr>
-          <a:xfrm>
-            <a:off x="5797149" y="1573813"/>
-            <a:ext cx="6010497" cy="4057845"/>
-          </a:xfrm>
-          <a:prstGeom prst="roundRect">
-            <a:avLst>
-              <a:gd name="adj" fmla="val 4000"/>
-            </a:avLst>
-          </a:prstGeom>
-          <a:solidFill>
-            <a:srgbClr val="E8EEF4"/>
-          </a:solidFill>
-          <a:ln>
-            <a:noFill/>
-          </a:ln>
-        </p:spPr>
-        <p:style>
-          <a:lnRef idx="1">
-            <a:schemeClr val="accent1"/>
-          </a:lnRef>
-          <a:fillRef idx="3">
-            <a:schemeClr val="accent1"/>
-          </a:fillRef>
-          <a:effectRef idx="2">
-            <a:schemeClr val="accent1"/>
-          </a:effectRef>
-          <a:fontRef idx="minor">
-            <a:schemeClr val="lt1"/>
-          </a:fontRef>
-        </p:style>
-        <p:txBody>
-          <a:bodyPr rtlCol="0" anchor="ctr"/>
-          <a:lstStyle/>
-          <a:p>
-            <a:pPr algn="ctr"/>
-          </a:p>
-        </p:txBody>
-      </p:sp>
-      <p:pic>
-        <p:nvPicPr>
-          <p:cNvPr id="6" name="Picture 5" descr="notebook-planning-desk-coffee.jpg"/>
-          <p:cNvPicPr>
-            <a:picLocks noChangeAspect="1"/>
-          </p:cNvPicPr>
-          <p:nvPr/>
-        </p:nvPicPr>
-        <p:blipFill>
-          <a:blip r:embed="rId2"/>
-          <a:stretch>
-            <a:fillRect/>
-          </a:stretch>
-        </p:blipFill>
-        <p:spPr>
-          <a:xfrm>
-            <a:off x="5870301" y="1646965"/>
-            <a:ext cx="5864193" cy="3911541"/>
-          </a:xfrm>
-          <a:prstGeom prst="rect">
-            <a:avLst/>
-          </a:prstGeom>
-        </p:spPr>
-      </p:pic>
-      <p:sp>
-        <p:nvSpPr>
-          <p:cNvPr id="7" name="TextBox 6"/>
+          <p:cNvPr id="5" name="TextBox 4"/>
           <p:cNvSpPr txBox="1"/>
           <p:nvPr/>
         </p:nvSpPr>
         <p:spPr>
           <a:xfrm>
-            <a:off x="5870301" y="5961888"/>
-            <a:ext cx="5864193" cy="320040"/>
-          </a:xfrm>
-          <a:prstGeom prst="rect">
-            <a:avLst/>
-          </a:prstGeom>
-          <a:noFill/>
-        </p:spPr>
-        <p:txBody>
-          <a:bodyPr wrap="square">
-            <a:spAutoFit/>
-          </a:bodyPr>
-          <a:lstStyle/>
-          <a:p>
-            <a:pPr algn="ctr"/>
-            <a:r>
-              <a:rPr sz="1100" b="0" i="1">
-                <a:solidFill>
-                  <a:srgbClr val="666666"/>
-                </a:solidFill>
-                <a:latin typeface="Calibri"/>
-              </a:rPr>
-              <a:t>Foto: Cup of  Couple · Pexels</a:t>
-            </a:r>
-          </a:p>
-        </p:txBody>
-      </p:sp>
-      <p:sp>
-        <p:nvSpPr>
-          <p:cNvPr id="8" name="TextBox 7"/>
-          <p:cNvSpPr txBox="1"/>
-          <p:nvPr/>
-        </p:nvSpPr>
-        <p:spPr>
-          <a:xfrm>
-            <a:off x="457200" y="1353312"/>
-            <a:ext cx="5093061" cy="5047488"/>
+            <a:off x="457200" y="1170432"/>
+            <a:ext cx="11277295" cy="5230368"/>
           </a:xfrm>
           <a:prstGeom prst="rect">
             <a:avLst/>
@@ -6590,7 +6382,7 @@
       </p:sp>
       <p:sp>
         <p:nvSpPr>
-          <p:cNvPr id="9" name="TextBox 8"/>
+          <p:cNvPr id="6" name="TextBox 5"/>
           <p:cNvSpPr txBox="1"/>
           <p:nvPr/>
         </p:nvSpPr>

--- a/Seminario de Sistemas/Clases/Clase 8 - Introduccion a UML/Presentacion.pptx
+++ b/Seminario de Sistemas/Clases/Clase 8 - Introduccion a UML/Presentacion.pptx
@@ -5730,14 +5730,83 @@
       </p:sp>
       <p:sp>
         <p:nvSpPr>
-          <p:cNvPr id="5" name="TextBox 4"/>
+          <p:cNvPr id="5" name="Rounded Rectangle 4"/>
+          <p:cNvSpPr/>
+          <p:nvPr/>
+        </p:nvSpPr>
+        <p:spPr>
+          <a:xfrm>
+            <a:off x="5797149" y="1343926"/>
+            <a:ext cx="6010497" cy="4837658"/>
+          </a:xfrm>
+          <a:prstGeom prst="roundRect">
+            <a:avLst>
+              <a:gd name="adj" fmla="val 4000"/>
+            </a:avLst>
+          </a:prstGeom>
+          <a:solidFill>
+            <a:srgbClr val="E8EEF4"/>
+          </a:solidFill>
+          <a:ln>
+            <a:noFill/>
+          </a:ln>
+        </p:spPr>
+        <p:style>
+          <a:lnRef idx="1">
+            <a:schemeClr val="accent1"/>
+          </a:lnRef>
+          <a:fillRef idx="3">
+            <a:schemeClr val="accent1"/>
+          </a:fillRef>
+          <a:effectRef idx="2">
+            <a:schemeClr val="accent1"/>
+          </a:effectRef>
+          <a:fontRef idx="minor">
+            <a:schemeClr val="lt1"/>
+          </a:fontRef>
+        </p:style>
+        <p:txBody>
+          <a:bodyPr rtlCol="0" anchor="ctr"/>
+          <a:lstStyle/>
+          <a:p>
+            <a:pPr algn="ctr"/>
+          </a:p>
+        </p:txBody>
+      </p:sp>
+      <p:pic>
+        <p:nvPicPr>
+          <p:cNvPr id="6" name="Picture 5" descr="ilus-demo-paso1.png"/>
+          <p:cNvPicPr>
+            <a:picLocks noChangeAspect="1"/>
+          </p:cNvPicPr>
+          <p:nvPr/>
+        </p:nvPicPr>
+        <p:blipFill>
+          <a:blip r:embed="rId2"/>
+          <a:stretch>
+            <a:fillRect/>
+          </a:stretch>
+        </p:blipFill>
+        <p:spPr>
+          <a:xfrm>
+            <a:off x="5870301" y="1417078"/>
+            <a:ext cx="5864193" cy="4691354"/>
+          </a:xfrm>
+          <a:prstGeom prst="rect">
+            <a:avLst/>
+          </a:prstGeom>
+        </p:spPr>
+      </p:pic>
+      <p:sp>
+        <p:nvSpPr>
+          <p:cNvPr id="7" name="TextBox 6"/>
           <p:cNvSpPr txBox="1"/>
           <p:nvPr/>
         </p:nvSpPr>
         <p:spPr>
           <a:xfrm>
-            <a:off x="457200" y="1170432"/>
-            <a:ext cx="11277295" cy="5230368"/>
+            <a:off x="457200" y="1353312"/>
+            <a:ext cx="5093061" cy="5047488"/>
           </a:xfrm>
           <a:prstGeom prst="rect">
             <a:avLst/>
@@ -5837,7 +5906,7 @@
       </p:sp>
       <p:sp>
         <p:nvSpPr>
-          <p:cNvPr id="6" name="TextBox 5"/>
+          <p:cNvPr id="8" name="TextBox 7"/>
           <p:cNvSpPr txBox="1"/>
           <p:nvPr/>
         </p:nvSpPr>
@@ -9090,7 +9159,7 @@
         <p:spPr>
           <a:xfrm>
             <a:off x="457200" y="1261872"/>
-            <a:ext cx="11277295" cy="4997707"/>
+            <a:ext cx="6991923" cy="4573349"/>
           </a:xfrm>
           <a:prstGeom prst="roundRect">
             <a:avLst>
@@ -9135,7 +9204,7 @@
         <p:spPr>
           <a:xfrm>
             <a:off x="457200" y="1261872"/>
-            <a:ext cx="11277295" cy="365760"/>
+            <a:ext cx="6991923" cy="365760"/>
           </a:xfrm>
           <a:prstGeom prst="rect">
             <a:avLst/>
@@ -9307,7 +9376,7 @@
         <p:spPr>
           <a:xfrm>
             <a:off x="1371600" y="1298448"/>
-            <a:ext cx="10180015" cy="292608"/>
+            <a:ext cx="5894643" cy="292608"/>
           </a:xfrm>
           <a:prstGeom prst="rect">
             <a:avLst/>
@@ -9340,7 +9409,7 @@
         <p:spPr>
           <a:xfrm>
             <a:off x="685800" y="1719072"/>
-            <a:ext cx="502920" cy="4403347"/>
+            <a:ext cx="502920" cy="3978989"/>
           </a:xfrm>
           <a:prstGeom prst="rect">
             <a:avLst/>
@@ -9355,11 +9424,11 @@
           <a:p>
             <a:pPr algn="r">
               <a:spcAft>
-                <a:spcPts val="257"/>
+                <a:spcPts val="278"/>
               </a:spcAft>
             </a:pPr>
             <a:r>
-              <a:rPr sz="1200" i="0" b="0">
+              <a:rPr sz="1300" i="0" b="0">
                 <a:solidFill>
                   <a:srgbClr val="858585"/>
                 </a:solidFill>
@@ -9371,11 +9440,11 @@
           <a:p>
             <a:pPr algn="r">
               <a:spcAft>
-                <a:spcPts val="257"/>
+                <a:spcPts val="278"/>
               </a:spcAft>
             </a:pPr>
             <a:r>
-              <a:rPr sz="1200" i="0" b="0">
+              <a:rPr sz="1300" i="0" b="0">
                 <a:solidFill>
                   <a:srgbClr val="858585"/>
                 </a:solidFill>
@@ -9387,11 +9456,11 @@
           <a:p>
             <a:pPr algn="r">
               <a:spcAft>
-                <a:spcPts val="257"/>
+                <a:spcPts val="278"/>
               </a:spcAft>
             </a:pPr>
             <a:r>
-              <a:rPr sz="1200" i="0" b="0">
+              <a:rPr sz="1300" i="0" b="0">
                 <a:solidFill>
                   <a:srgbClr val="858585"/>
                 </a:solidFill>
@@ -9403,11 +9472,11 @@
           <a:p>
             <a:pPr algn="r">
               <a:spcAft>
-                <a:spcPts val="257"/>
+                <a:spcPts val="278"/>
               </a:spcAft>
             </a:pPr>
             <a:r>
-              <a:rPr sz="1200" i="0" b="0">
+              <a:rPr sz="1300" i="0" b="0">
                 <a:solidFill>
                   <a:srgbClr val="858585"/>
                 </a:solidFill>
@@ -9419,11 +9488,11 @@
           <a:p>
             <a:pPr algn="r">
               <a:spcAft>
-                <a:spcPts val="257"/>
+                <a:spcPts val="278"/>
               </a:spcAft>
             </a:pPr>
             <a:r>
-              <a:rPr sz="1200" i="0" b="0">
+              <a:rPr sz="1300" i="0" b="0">
                 <a:solidFill>
                   <a:srgbClr val="858585"/>
                 </a:solidFill>
@@ -9435,11 +9504,11 @@
           <a:p>
             <a:pPr algn="r">
               <a:spcAft>
-                <a:spcPts val="257"/>
+                <a:spcPts val="278"/>
               </a:spcAft>
             </a:pPr>
             <a:r>
-              <a:rPr sz="1200" i="0" b="0">
+              <a:rPr sz="1300" i="0" b="0">
                 <a:solidFill>
                   <a:srgbClr val="858585"/>
                 </a:solidFill>
@@ -9451,11 +9520,11 @@
           <a:p>
             <a:pPr algn="r">
               <a:spcAft>
-                <a:spcPts val="257"/>
+                <a:spcPts val="278"/>
               </a:spcAft>
             </a:pPr>
             <a:r>
-              <a:rPr sz="1200" i="0" b="0">
+              <a:rPr sz="1300" i="0" b="0">
                 <a:solidFill>
                   <a:srgbClr val="858585"/>
                 </a:solidFill>
@@ -9467,11 +9536,11 @@
           <a:p>
             <a:pPr algn="r">
               <a:spcAft>
-                <a:spcPts val="257"/>
+                <a:spcPts val="278"/>
               </a:spcAft>
             </a:pPr>
             <a:r>
-              <a:rPr sz="1200" i="0" b="0">
+              <a:rPr sz="1300" i="0" b="0">
                 <a:solidFill>
                   <a:srgbClr val="858585"/>
                 </a:solidFill>
@@ -9483,11 +9552,11 @@
           <a:p>
             <a:pPr algn="r">
               <a:spcAft>
-                <a:spcPts val="257"/>
+                <a:spcPts val="278"/>
               </a:spcAft>
             </a:pPr>
             <a:r>
-              <a:rPr sz="1200" i="0" b="0">
+              <a:rPr sz="1300" i="0" b="0">
                 <a:solidFill>
                   <a:srgbClr val="858585"/>
                 </a:solidFill>
@@ -9499,11 +9568,11 @@
           <a:p>
             <a:pPr algn="r">
               <a:spcAft>
-                <a:spcPts val="257"/>
+                <a:spcPts val="278"/>
               </a:spcAft>
             </a:pPr>
             <a:r>
-              <a:rPr sz="1200" i="0" b="0">
+              <a:rPr sz="1300" i="0" b="0">
                 <a:solidFill>
                   <a:srgbClr val="858585"/>
                 </a:solidFill>
@@ -9515,11 +9584,11 @@
           <a:p>
             <a:pPr algn="r">
               <a:spcAft>
-                <a:spcPts val="257"/>
+                <a:spcPts val="278"/>
               </a:spcAft>
             </a:pPr>
             <a:r>
-              <a:rPr sz="1200" i="0" b="0">
+              <a:rPr sz="1300" i="0" b="0">
                 <a:solidFill>
                   <a:srgbClr val="858585"/>
                 </a:solidFill>
@@ -9531,11 +9600,11 @@
           <a:p>
             <a:pPr algn="r">
               <a:spcAft>
-                <a:spcPts val="257"/>
+                <a:spcPts val="278"/>
               </a:spcAft>
             </a:pPr>
             <a:r>
-              <a:rPr sz="1200" i="0" b="0">
+              <a:rPr sz="1300" i="0" b="0">
                 <a:solidFill>
                   <a:srgbClr val="858585"/>
                 </a:solidFill>
@@ -9547,11 +9616,11 @@
           <a:p>
             <a:pPr algn="r">
               <a:spcAft>
-                <a:spcPts val="257"/>
+                <a:spcPts val="278"/>
               </a:spcAft>
             </a:pPr>
             <a:r>
-              <a:rPr sz="1200" i="0" b="0">
+              <a:rPr sz="1300" i="0" b="0">
                 <a:solidFill>
                   <a:srgbClr val="858585"/>
                 </a:solidFill>
@@ -9563,11 +9632,11 @@
           <a:p>
             <a:pPr algn="r">
               <a:spcAft>
-                <a:spcPts val="257"/>
+                <a:spcPts val="278"/>
               </a:spcAft>
             </a:pPr>
             <a:r>
-              <a:rPr sz="1200" i="0" b="0">
+              <a:rPr sz="1300" i="0" b="0">
                 <a:solidFill>
                   <a:srgbClr val="858585"/>
                 </a:solidFill>
@@ -9579,11 +9648,11 @@
           <a:p>
             <a:pPr algn="r">
               <a:spcAft>
-                <a:spcPts val="257"/>
+                <a:spcPts val="278"/>
               </a:spcAft>
             </a:pPr>
             <a:r>
-              <a:rPr sz="1200" i="0" b="0">
+              <a:rPr sz="1300" i="0" b="0">
                 <a:solidFill>
                   <a:srgbClr val="858585"/>
                 </a:solidFill>
@@ -9595,65 +9664,17 @@
           <a:p>
             <a:pPr algn="r">
               <a:spcAft>
-                <a:spcPts val="257"/>
+                <a:spcPts val="278"/>
               </a:spcAft>
             </a:pPr>
             <a:r>
-              <a:rPr sz="1200" i="0" b="0">
+              <a:rPr sz="1300" i="0" b="0">
                 <a:solidFill>
                   <a:srgbClr val="858585"/>
                 </a:solidFill>
                 <a:latin typeface="Consolas"/>
               </a:rPr>
               <a:t>16</a:t>
-            </a:r>
-          </a:p>
-          <a:p>
-            <a:pPr algn="r">
-              <a:spcAft>
-                <a:spcPts val="257"/>
-              </a:spcAft>
-            </a:pPr>
-            <a:r>
-              <a:rPr sz="1200" i="0" b="0">
-                <a:solidFill>
-                  <a:srgbClr val="858585"/>
-                </a:solidFill>
-                <a:latin typeface="Consolas"/>
-              </a:rPr>
-              <a:t>17</a:t>
-            </a:r>
-          </a:p>
-          <a:p>
-            <a:pPr algn="r">
-              <a:spcAft>
-                <a:spcPts val="257"/>
-              </a:spcAft>
-            </a:pPr>
-            <a:r>
-              <a:rPr sz="1200" i="0" b="0">
-                <a:solidFill>
-                  <a:srgbClr val="858585"/>
-                </a:solidFill>
-                <a:latin typeface="Consolas"/>
-              </a:rPr>
-              <a:t>18</a:t>
-            </a:r>
-          </a:p>
-          <a:p>
-            <a:pPr algn="r">
-              <a:spcAft>
-                <a:spcPts val="257"/>
-              </a:spcAft>
-            </a:pPr>
-            <a:r>
-              <a:rPr sz="1200" i="0" b="0">
-                <a:solidFill>
-                  <a:srgbClr val="858585"/>
-                </a:solidFill>
-                <a:latin typeface="Consolas"/>
-              </a:rPr>
-              <a:t>19</a:t>
             </a:r>
           </a:p>
         </p:txBody>
@@ -9667,7 +9688,7 @@
         <p:spPr>
           <a:xfrm>
             <a:off x="1188720" y="1719072"/>
-            <a:ext cx="10271455" cy="4403347"/>
+            <a:ext cx="5986083" cy="3978989"/>
           </a:xfrm>
           <a:prstGeom prst="rect">
             <a:avLst/>
@@ -9682,11 +9703,11 @@
           <a:p>
             <a:pPr>
               <a:spcAft>
-                <a:spcPts val="257"/>
+                <a:spcPts val="278"/>
               </a:spcAft>
             </a:pPr>
             <a:r>
-              <a:rPr sz="1200" i="0" b="0">
+              <a:rPr sz="1300" i="0" b="0">
                 <a:solidFill>
                   <a:srgbClr val="D4D4D4"/>
                 </a:solidFill>
@@ -9698,11 +9719,11 @@
           <a:p>
             <a:pPr>
               <a:spcAft>
-                <a:spcPts val="257"/>
+                <a:spcPts val="278"/>
               </a:spcAft>
             </a:pPr>
             <a:r>
-              <a:rPr sz="1200" i="0" b="0">
+              <a:rPr sz="1300" i="0" b="0">
                 <a:solidFill>
                   <a:srgbClr val="D4D4D4"/>
                 </a:solidFill>
@@ -9711,7 +9732,7 @@
               <a:t>  </a:t>
             </a:r>
             <a:r>
-              <a:rPr sz="1200" i="0" b="0">
+              <a:rPr sz="1300" i="0" b="0">
                 <a:solidFill>
                   <a:srgbClr val="D4D4D4"/>
                 </a:solidFill>
@@ -9720,7 +9741,7 @@
               <a:t>class</a:t>
             </a:r>
             <a:r>
-              <a:rPr sz="1200" i="0" b="0">
+              <a:rPr sz="1300" i="0" b="0">
                 <a:solidFill>
                   <a:srgbClr val="D4D4D4"/>
                 </a:solidFill>
@@ -9729,7 +9750,7 @@
               <a:t> </a:t>
             </a:r>
             <a:r>
-              <a:rPr sz="1200" i="0" b="0">
+              <a:rPr sz="1300" i="0" b="0">
                 <a:solidFill>
                   <a:srgbClr val="4EC9B0"/>
                 </a:solidFill>
@@ -9738,7 +9759,7 @@
               <a:t>Dueno</a:t>
             </a:r>
             <a:r>
-              <a:rPr sz="1200" i="0" b="0">
+              <a:rPr sz="1300" i="0" b="0">
                 <a:solidFill>
                   <a:srgbClr val="D4D4D4"/>
                 </a:solidFill>
@@ -9750,11 +9771,11 @@
           <a:p>
             <a:pPr>
               <a:spcAft>
-                <a:spcPts val="257"/>
+                <a:spcPts val="278"/>
               </a:spcAft>
             </a:pPr>
             <a:r>
-              <a:rPr sz="1200" i="0" b="0">
+              <a:rPr sz="1300" i="0" b="0">
                 <a:solidFill>
                   <a:srgbClr val="D4D4D4"/>
                 </a:solidFill>
@@ -9763,7 +9784,7 @@
               <a:t>    -</a:t>
             </a:r>
             <a:r>
-              <a:rPr sz="1200" i="0" b="0">
+              <a:rPr sz="1300" i="0" b="0">
                 <a:solidFill>
                   <a:srgbClr val="D4D4D4"/>
                 </a:solidFill>
@@ -9772,7 +9793,7 @@
               <a:t>int</a:t>
             </a:r>
             <a:r>
-              <a:rPr sz="1200" i="0" b="0">
+              <a:rPr sz="1300" i="0" b="0">
                 <a:solidFill>
                   <a:srgbClr val="D4D4D4"/>
                 </a:solidFill>
@@ -9781,7 +9802,7 @@
               <a:t> </a:t>
             </a:r>
             <a:r>
-              <a:rPr sz="1200" i="0" b="0">
+              <a:rPr sz="1300" i="0" b="0">
                 <a:solidFill>
                   <a:srgbClr val="D4D4D4"/>
                 </a:solidFill>
@@ -9793,11 +9814,11 @@
           <a:p>
             <a:pPr>
               <a:spcAft>
-                <a:spcPts val="257"/>
+                <a:spcPts val="278"/>
               </a:spcAft>
             </a:pPr>
             <a:r>
-              <a:rPr sz="1200" i="0" b="0">
+              <a:rPr sz="1300" i="0" b="0">
                 <a:solidFill>
                   <a:srgbClr val="D4D4D4"/>
                 </a:solidFill>
@@ -9806,7 +9827,7 @@
               <a:t>    -</a:t>
             </a:r>
             <a:r>
-              <a:rPr sz="1200" i="0" b="0">
+              <a:rPr sz="1300" i="0" b="0">
                 <a:solidFill>
                   <a:srgbClr val="D4D4D4"/>
                 </a:solidFill>
@@ -9815,7 +9836,7 @@
               <a:t>String</a:t>
             </a:r>
             <a:r>
-              <a:rPr sz="1200" i="0" b="0">
+              <a:rPr sz="1300" i="0" b="0">
                 <a:solidFill>
                   <a:srgbClr val="D4D4D4"/>
                 </a:solidFill>
@@ -9824,7 +9845,7 @@
               <a:t> </a:t>
             </a:r>
             <a:r>
-              <a:rPr sz="1200" i="0" b="0">
+              <a:rPr sz="1300" i="0" b="0">
                 <a:solidFill>
                   <a:srgbClr val="D4D4D4"/>
                 </a:solidFill>
@@ -9836,11 +9857,11 @@
           <a:p>
             <a:pPr>
               <a:spcAft>
-                <a:spcPts val="257"/>
+                <a:spcPts val="278"/>
               </a:spcAft>
             </a:pPr>
             <a:r>
-              <a:rPr sz="1200" i="0" b="0">
+              <a:rPr sz="1300" i="0" b="0">
                 <a:solidFill>
                   <a:srgbClr val="D4D4D4"/>
                 </a:solidFill>
@@ -9849,7 +9870,7 @@
               <a:t>    -</a:t>
             </a:r>
             <a:r>
-              <a:rPr sz="1200" i="0" b="0">
+              <a:rPr sz="1300" i="0" b="0">
                 <a:solidFill>
                   <a:srgbClr val="D4D4D4"/>
                 </a:solidFill>
@@ -9858,7 +9879,7 @@
               <a:t>String</a:t>
             </a:r>
             <a:r>
-              <a:rPr sz="1200" i="0" b="0">
+              <a:rPr sz="1300" i="0" b="0">
                 <a:solidFill>
                   <a:srgbClr val="D4D4D4"/>
                 </a:solidFill>
@@ -9867,7 +9888,7 @@
               <a:t> </a:t>
             </a:r>
             <a:r>
-              <a:rPr sz="1200" i="0" b="0">
+              <a:rPr sz="1300" i="0" b="0">
                 <a:solidFill>
                   <a:srgbClr val="D4D4D4"/>
                 </a:solidFill>
@@ -9879,11 +9900,11 @@
           <a:p>
             <a:pPr>
               <a:spcAft>
-                <a:spcPts val="257"/>
+                <a:spcPts val="278"/>
               </a:spcAft>
             </a:pPr>
             <a:r>
-              <a:rPr sz="1200" i="0" b="0">
+              <a:rPr sz="1300" i="0" b="0">
                 <a:solidFill>
                   <a:srgbClr val="D4D4D4"/>
                 </a:solidFill>
@@ -9892,7 +9913,7 @@
               <a:t>    +</a:t>
             </a:r>
             <a:r>
-              <a:rPr sz="1200" i="0" b="0">
+              <a:rPr sz="1300" i="0" b="0">
                 <a:solidFill>
                   <a:srgbClr val="DCDCAA"/>
                 </a:solidFill>
@@ -9901,7 +9922,7 @@
               <a:t>registrar</a:t>
             </a:r>
             <a:r>
-              <a:rPr sz="1200" i="0" b="0">
+              <a:rPr sz="1300" i="0" b="0">
                 <a:solidFill>
                   <a:srgbClr val="D4D4D4"/>
                 </a:solidFill>
@@ -9913,11 +9934,11 @@
           <a:p>
             <a:pPr>
               <a:spcAft>
-                <a:spcPts val="257"/>
+                <a:spcPts val="278"/>
               </a:spcAft>
             </a:pPr>
             <a:r>
-              <a:rPr sz="1200" i="0" b="0">
+              <a:rPr sz="1300" i="0" b="0">
                 <a:solidFill>
                   <a:srgbClr val="D4D4D4"/>
                 </a:solidFill>
@@ -9929,11 +9950,11 @@
           <a:p>
             <a:pPr>
               <a:spcAft>
-                <a:spcPts val="257"/>
+                <a:spcPts val="278"/>
               </a:spcAft>
             </a:pPr>
             <a:r>
-              <a:rPr sz="1200" i="0" b="0">
+              <a:rPr sz="1300" i="0" b="0">
                 <a:solidFill>
                   <a:srgbClr val="D4D4D4"/>
                 </a:solidFill>
@@ -9942,7 +9963,7 @@
               <a:t>  </a:t>
             </a:r>
             <a:r>
-              <a:rPr sz="1200" i="0" b="0">
+              <a:rPr sz="1300" i="0" b="0">
                 <a:solidFill>
                   <a:srgbClr val="D4D4D4"/>
                 </a:solidFill>
@@ -9951,7 +9972,7 @@
               <a:t>class</a:t>
             </a:r>
             <a:r>
-              <a:rPr sz="1200" i="0" b="0">
+              <a:rPr sz="1300" i="0" b="0">
                 <a:solidFill>
                   <a:srgbClr val="D4D4D4"/>
                 </a:solidFill>
@@ -9960,7 +9981,7 @@
               <a:t> </a:t>
             </a:r>
             <a:r>
-              <a:rPr sz="1200" i="0" b="0">
+              <a:rPr sz="1300" i="0" b="0">
                 <a:solidFill>
                   <a:srgbClr val="4EC9B0"/>
                 </a:solidFill>
@@ -9969,7 +9990,7 @@
               <a:t>Mascota</a:t>
             </a:r>
             <a:r>
-              <a:rPr sz="1200" i="0" b="0">
+              <a:rPr sz="1300" i="0" b="0">
                 <a:solidFill>
                   <a:srgbClr val="D4D4D4"/>
                 </a:solidFill>
@@ -9981,11 +10002,11 @@
           <a:p>
             <a:pPr>
               <a:spcAft>
-                <a:spcPts val="257"/>
+                <a:spcPts val="278"/>
               </a:spcAft>
             </a:pPr>
             <a:r>
-              <a:rPr sz="1200" i="0" b="0">
+              <a:rPr sz="1300" i="0" b="0">
                 <a:solidFill>
                   <a:srgbClr val="D4D4D4"/>
                 </a:solidFill>
@@ -9994,7 +10015,7 @@
               <a:t>    -</a:t>
             </a:r>
             <a:r>
-              <a:rPr sz="1200" i="0" b="0">
+              <a:rPr sz="1300" i="0" b="0">
                 <a:solidFill>
                   <a:srgbClr val="D4D4D4"/>
                 </a:solidFill>
@@ -10003,7 +10024,7 @@
               <a:t>int</a:t>
             </a:r>
             <a:r>
-              <a:rPr sz="1200" i="0" b="0">
+              <a:rPr sz="1300" i="0" b="0">
                 <a:solidFill>
                   <a:srgbClr val="D4D4D4"/>
                 </a:solidFill>
@@ -10012,7 +10033,7 @@
               <a:t> </a:t>
             </a:r>
             <a:r>
-              <a:rPr sz="1200" i="0" b="0">
+              <a:rPr sz="1300" i="0" b="0">
                 <a:solidFill>
                   <a:srgbClr val="D4D4D4"/>
                 </a:solidFill>
@@ -10024,11 +10045,11 @@
           <a:p>
             <a:pPr>
               <a:spcAft>
-                <a:spcPts val="257"/>
+                <a:spcPts val="278"/>
               </a:spcAft>
             </a:pPr>
             <a:r>
-              <a:rPr sz="1200" i="0" b="0">
+              <a:rPr sz="1300" i="0" b="0">
                 <a:solidFill>
                   <a:srgbClr val="D4D4D4"/>
                 </a:solidFill>
@@ -10037,7 +10058,7 @@
               <a:t>    -</a:t>
             </a:r>
             <a:r>
-              <a:rPr sz="1200" i="0" b="0">
+              <a:rPr sz="1300" i="0" b="0">
                 <a:solidFill>
                   <a:srgbClr val="D4D4D4"/>
                 </a:solidFill>
@@ -10046,7 +10067,7 @@
               <a:t>String</a:t>
             </a:r>
             <a:r>
-              <a:rPr sz="1200" i="0" b="0">
+              <a:rPr sz="1300" i="0" b="0">
                 <a:solidFill>
                   <a:srgbClr val="D4D4D4"/>
                 </a:solidFill>
@@ -10055,7 +10076,7 @@
               <a:t> </a:t>
             </a:r>
             <a:r>
-              <a:rPr sz="1200" i="0" b="0">
+              <a:rPr sz="1300" i="0" b="0">
                 <a:solidFill>
                   <a:srgbClr val="D4D4D4"/>
                 </a:solidFill>
@@ -10067,11 +10088,11 @@
           <a:p>
             <a:pPr>
               <a:spcAft>
-                <a:spcPts val="257"/>
+                <a:spcPts val="278"/>
               </a:spcAft>
             </a:pPr>
             <a:r>
-              <a:rPr sz="1200" i="0" b="0">
+              <a:rPr sz="1300" i="0" b="0">
                 <a:solidFill>
                   <a:srgbClr val="D4D4D4"/>
                 </a:solidFill>
@@ -10080,7 +10101,7 @@
               <a:t>    -</a:t>
             </a:r>
             <a:r>
-              <a:rPr sz="1200" i="0" b="0">
+              <a:rPr sz="1300" i="0" b="0">
                 <a:solidFill>
                   <a:srgbClr val="D4D4D4"/>
                 </a:solidFill>
@@ -10089,7 +10110,7 @@
               <a:t>String</a:t>
             </a:r>
             <a:r>
-              <a:rPr sz="1200" i="0" b="0">
+              <a:rPr sz="1300" i="0" b="0">
                 <a:solidFill>
                   <a:srgbClr val="D4D4D4"/>
                 </a:solidFill>
@@ -10098,7 +10119,7 @@
               <a:t> </a:t>
             </a:r>
             <a:r>
-              <a:rPr sz="1200" i="0" b="0">
+              <a:rPr sz="1300" i="0" b="0">
                 <a:solidFill>
                   <a:srgbClr val="D4D4D4"/>
                 </a:solidFill>
@@ -10110,11 +10131,11 @@
           <a:p>
             <a:pPr>
               <a:spcAft>
-                <a:spcPts val="257"/>
+                <a:spcPts val="278"/>
               </a:spcAft>
             </a:pPr>
             <a:r>
-              <a:rPr sz="1200" i="0" b="0">
+              <a:rPr sz="1300" i="0" b="0">
                 <a:solidFill>
                   <a:srgbClr val="D4D4D4"/>
                 </a:solidFill>
@@ -10123,7 +10144,7 @@
               <a:t>    -</a:t>
             </a:r>
             <a:r>
-              <a:rPr sz="1200" i="0" b="0">
+              <a:rPr sz="1300" i="0" b="0">
                 <a:solidFill>
                   <a:srgbClr val="D4D4D4"/>
                 </a:solidFill>
@@ -10132,7 +10153,7 @@
               <a:t>char</a:t>
             </a:r>
             <a:r>
-              <a:rPr sz="1200" i="0" b="0">
+              <a:rPr sz="1300" i="0" b="0">
                 <a:solidFill>
                   <a:srgbClr val="D4D4D4"/>
                 </a:solidFill>
@@ -10141,7 +10162,7 @@
               <a:t> </a:t>
             </a:r>
             <a:r>
-              <a:rPr sz="1200" i="0" b="0">
+              <a:rPr sz="1300" i="0" b="0">
                 <a:solidFill>
                   <a:srgbClr val="D4D4D4"/>
                 </a:solidFill>
@@ -10153,11 +10174,11 @@
           <a:p>
             <a:pPr>
               <a:spcAft>
-                <a:spcPts val="257"/>
+                <a:spcPts val="278"/>
               </a:spcAft>
             </a:pPr>
             <a:r>
-              <a:rPr sz="1200" i="0" b="0">
+              <a:rPr sz="1300" i="0" b="0">
                 <a:solidFill>
                   <a:srgbClr val="D4D4D4"/>
                 </a:solidFill>
@@ -10166,7 +10187,7 @@
               <a:t>    +</a:t>
             </a:r>
             <a:r>
-              <a:rPr sz="1200" i="0" b="0">
+              <a:rPr sz="1300" i="0" b="0">
                 <a:solidFill>
                   <a:srgbClr val="DCDCAA"/>
                 </a:solidFill>
@@ -10175,7 +10196,7 @@
               <a:t>abrirExpediente</a:t>
             </a:r>
             <a:r>
-              <a:rPr sz="1200" i="0" b="0">
+              <a:rPr sz="1300" i="0" b="0">
                 <a:solidFill>
                   <a:srgbClr val="D4D4D4"/>
                 </a:solidFill>
@@ -10187,11 +10208,11 @@
           <a:p>
             <a:pPr>
               <a:spcAft>
-                <a:spcPts val="257"/>
+                <a:spcPts val="278"/>
               </a:spcAft>
             </a:pPr>
             <a:r>
-              <a:rPr sz="1200" i="0" b="0">
+              <a:rPr sz="1300" i="0" b="0">
                 <a:solidFill>
                   <a:srgbClr val="D4D4D4"/>
                 </a:solidFill>
@@ -10203,11 +10224,11 @@
           <a:p>
             <a:pPr>
               <a:spcAft>
-                <a:spcPts val="257"/>
+                <a:spcPts val="278"/>
               </a:spcAft>
             </a:pPr>
             <a:r>
-              <a:rPr sz="1200" i="0" b="0">
+              <a:rPr sz="1300" i="0" b="0">
                 <a:solidFill>
                   <a:srgbClr val="D4D4D4"/>
                 </a:solidFill>
@@ -10219,11 +10240,11 @@
           <a:p>
             <a:pPr>
               <a:spcAft>
-                <a:spcPts val="257"/>
+                <a:spcPts val="278"/>
               </a:spcAft>
             </a:pPr>
             <a:r>
-              <a:rPr sz="1200" i="0" b="0">
+              <a:rPr sz="1300" i="0" b="0">
                 <a:solidFill>
                   <a:srgbClr val="D4D4D4"/>
                 </a:solidFill>
@@ -10232,7 +10253,7 @@
               <a:t>  </a:t>
             </a:r>
             <a:r>
-              <a:rPr sz="1200" i="0" b="0">
+              <a:rPr sz="1300" i="0" b="0">
                 <a:solidFill>
                   <a:srgbClr val="D4D4D4"/>
                 </a:solidFill>
@@ -10241,7 +10262,7 @@
               <a:t>Dueno</a:t>
             </a:r>
             <a:r>
-              <a:rPr sz="1200" i="0" b="0">
+              <a:rPr sz="1300" i="0" b="0">
                 <a:solidFill>
                   <a:srgbClr val="D4D4D4"/>
                 </a:solidFill>
@@ -10250,7 +10271,7 @@
               <a:t> </a:t>
             </a:r>
             <a:r>
-              <a:rPr sz="1200" i="0" b="0">
+              <a:rPr sz="1300" i="0" b="0">
                 <a:solidFill>
                   <a:srgbClr val="CE9178"/>
                 </a:solidFill>
@@ -10259,7 +10280,7 @@
               <a:t>"1"</a:t>
             </a:r>
             <a:r>
-              <a:rPr sz="1200" i="0" b="0">
+              <a:rPr sz="1300" i="0" b="0">
                 <a:solidFill>
                   <a:srgbClr val="D4D4D4"/>
                 </a:solidFill>
@@ -10268,7 +10289,7 @@
               <a:t> --&gt; </a:t>
             </a:r>
             <a:r>
-              <a:rPr sz="1200" i="0" b="0">
+              <a:rPr sz="1300" i="0" b="0">
                 <a:solidFill>
                   <a:srgbClr val="CE9178"/>
                 </a:solidFill>
@@ -10277,7 +10298,7 @@
               <a:t>"0..*"</a:t>
             </a:r>
             <a:r>
-              <a:rPr sz="1200" i="0" b="0">
+              <a:rPr sz="1300" i="0" b="0">
                 <a:solidFill>
                   <a:srgbClr val="D4D4D4"/>
                 </a:solidFill>
@@ -10286,7 +10307,7 @@
               <a:t> </a:t>
             </a:r>
             <a:r>
-              <a:rPr sz="1200" i="0" b="0">
+              <a:rPr sz="1300" i="0" b="0">
                 <a:solidFill>
                   <a:srgbClr val="D4D4D4"/>
                 </a:solidFill>
@@ -10295,7 +10316,7 @@
               <a:t>Mascota</a:t>
             </a:r>
             <a:r>
-              <a:rPr sz="1200" i="0" b="0">
+              <a:rPr sz="1300" i="0" b="0">
                 <a:solidFill>
                   <a:srgbClr val="D4D4D4"/>
                 </a:solidFill>
@@ -10304,7 +10325,7 @@
               <a:t> : </a:t>
             </a:r>
             <a:r>
-              <a:rPr sz="1200" i="0" b="0">
+              <a:rPr sz="1300" i="0" b="0">
                 <a:solidFill>
                   <a:srgbClr val="D4D4D4"/>
                 </a:solidFill>
@@ -10313,59 +10334,150 @@
               <a:t>posee</a:t>
             </a:r>
           </a:p>
-          <a:p>
-            <a:pPr>
-              <a:spcAft>
-                <a:spcPts val="257"/>
-              </a:spcAft>
-            </a:pPr>
-            <a:r>
-              <a:rPr sz="1200" i="0" b="0">
-                <a:solidFill>
-                  <a:srgbClr val="D4D4D4"/>
-                </a:solidFill>
-                <a:latin typeface="Consolas"/>
-              </a:rPr>
-              <a:t/>
-            </a:r>
-          </a:p>
-          <a:p>
-            <a:pPr>
-              <a:spcAft>
-                <a:spcPts val="257"/>
-              </a:spcAft>
-            </a:pPr>
-            <a:r>
-              <a:rPr sz="1200" i="1" b="0">
-                <a:solidFill>
-                  <a:srgbClr val="6A9955"/>
-                </a:solidFill>
-                <a:latin typeface="Consolas"/>
-              </a:rPr>
-              <a:t>%% Complete con SUS clases. Lo que importa: visibilidad (- privado,</a:t>
-            </a:r>
-          </a:p>
-          <a:p>
-            <a:pPr>
-              <a:spcAft>
-                <a:spcPts val="257"/>
-              </a:spcAft>
-            </a:pPr>
-            <a:r>
-              <a:rPr sz="1200" i="1" b="0">
-                <a:solidFill>
-                  <a:srgbClr val="6A9955"/>
-                </a:solidFill>
-                <a:latin typeface="Consolas"/>
-              </a:rPr>
-              <a:t>%% + publico), TIPO de cada atributo, y multiplicidad en LOS DOS extremos.</a:t>
-            </a:r>
-          </a:p>
-        </p:txBody>
-      </p:sp>
-      <p:sp>
-        <p:nvSpPr>
-          <p:cNvPr id="13" name="TextBox 12"/>
+        </p:txBody>
+      </p:sp>
+      <p:sp>
+        <p:nvSpPr>
+          <p:cNvPr id="13" name="Rounded Rectangle 12"/>
+          <p:cNvSpPr/>
+          <p:nvPr/>
+        </p:nvSpPr>
+        <p:spPr>
+          <a:xfrm>
+            <a:off x="7668579" y="1261872"/>
+            <a:ext cx="4120780" cy="3318569"/>
+          </a:xfrm>
+          <a:prstGeom prst="roundRect">
+            <a:avLst>
+              <a:gd name="adj" fmla="val 4000"/>
+            </a:avLst>
+          </a:prstGeom>
+          <a:solidFill>
+            <a:srgbClr val="E8EEF4"/>
+          </a:solidFill>
+          <a:ln>
+            <a:noFill/>
+          </a:ln>
+        </p:spPr>
+        <p:style>
+          <a:lnRef idx="1">
+            <a:schemeClr val="accent1"/>
+          </a:lnRef>
+          <a:fillRef idx="3">
+            <a:schemeClr val="accent1"/>
+          </a:fillRef>
+          <a:effectRef idx="2">
+            <a:schemeClr val="accent1"/>
+          </a:effectRef>
+          <a:fontRef idx="minor">
+            <a:schemeClr val="lt1"/>
+          </a:fontRef>
+        </p:style>
+        <p:txBody>
+          <a:bodyPr rtlCol="0" anchor="ctr"/>
+          <a:lstStyle/>
+          <a:p>
+            <a:pPr algn="ctr"/>
+          </a:p>
+        </p:txBody>
+      </p:sp>
+      <p:pic>
+        <p:nvPicPr>
+          <p:cNvPr id="14" name="Picture 13" descr="dg-clases-paso1.png"/>
+          <p:cNvPicPr>
+            <a:picLocks noChangeAspect="1"/>
+          </p:cNvPicPr>
+          <p:nvPr/>
+        </p:nvPicPr>
+        <p:blipFill>
+          <a:blip r:embed="rId2"/>
+          <a:stretch>
+            <a:fillRect/>
+          </a:stretch>
+        </p:blipFill>
+        <p:spPr>
+          <a:xfrm>
+            <a:off x="7723443" y="1316736"/>
+            <a:ext cx="4011052" cy="3208841"/>
+          </a:xfrm>
+          <a:prstGeom prst="rect">
+            <a:avLst/>
+          </a:prstGeom>
+        </p:spPr>
+      </p:pic>
+      <p:sp>
+        <p:nvSpPr>
+          <p:cNvPr id="15" name="TextBox 14"/>
+          <p:cNvSpPr txBox="1"/>
+          <p:nvPr/>
+        </p:nvSpPr>
+        <p:spPr>
+          <a:xfrm>
+            <a:off x="7723443" y="4580441"/>
+            <a:ext cx="4011052" cy="320040"/>
+          </a:xfrm>
+          <a:prstGeom prst="rect">
+            <a:avLst/>
+          </a:prstGeom>
+          <a:noFill/>
+        </p:spPr>
+        <p:txBody>
+          <a:bodyPr wrap="square">
+            <a:spAutoFit/>
+          </a:bodyPr>
+          <a:lstStyle/>
+          <a:p>
+            <a:pPr algn="ctr"/>
+            <a:r>
+              <a:rPr sz="1200" b="0" i="1">
+                <a:solidFill>
+                  <a:srgbClr val="666666"/>
+                </a:solidFill>
+                <a:latin typeface="Calibri"/>
+              </a:rPr>
+              <a:t>Lo que dibuja este código</a:t>
+            </a:r>
+          </a:p>
+        </p:txBody>
+      </p:sp>
+      <p:sp>
+        <p:nvSpPr>
+          <p:cNvPr id="16" name="TextBox 15"/>
+          <p:cNvSpPr txBox="1"/>
+          <p:nvPr/>
+        </p:nvSpPr>
+        <p:spPr>
+          <a:xfrm>
+            <a:off x="457200" y="6035040"/>
+            <a:ext cx="11277295" cy="365760"/>
+          </a:xfrm>
+          <a:prstGeom prst="rect">
+            <a:avLst/>
+          </a:prstGeom>
+          <a:noFill/>
+        </p:spPr>
+        <p:txBody>
+          <a:bodyPr wrap="square">
+            <a:spAutoFit/>
+          </a:bodyPr>
+          <a:lstStyle/>
+          <a:p>
+            <a:pPr algn="ctr"/>
+            <a:r>
+              <a:rPr sz="1300" b="0" i="1">
+                <a:solidFill>
+                  <a:srgbClr val="666666"/>
+                </a:solidFill>
+                <a:latin typeface="Calibri"/>
+              </a:rPr>
+              <a:t>Visibilidad (- privado, + publico), tipo de cada atributo y multiplicidad en los dos extremos.</a:t>
+            </a:r>
+          </a:p>
+        </p:txBody>
+      </p:sp>
+      <p:sp>
+        <p:nvSpPr>
+          <p:cNvPr id="17" name="TextBox 16"/>
           <p:cNvSpPr txBox="1"/>
           <p:nvPr/>
         </p:nvSpPr>
@@ -10553,7 +10665,7 @@
         <p:spPr>
           <a:xfrm>
             <a:off x="457200" y="1261872"/>
-            <a:ext cx="11277295" cy="5031343"/>
+            <a:ext cx="6991923" cy="2525127"/>
           </a:xfrm>
           <a:prstGeom prst="roundRect">
             <a:avLst>
@@ -10598,7 +10710,7 @@
         <p:spPr>
           <a:xfrm>
             <a:off x="457200" y="1261872"/>
-            <a:ext cx="11277295" cy="365760"/>
+            <a:ext cx="6991923" cy="365760"/>
           </a:xfrm>
           <a:prstGeom prst="rect">
             <a:avLst/>
@@ -10770,7 +10882,7 @@
         <p:spPr>
           <a:xfrm>
             <a:off x="1371600" y="1298448"/>
-            <a:ext cx="10180015" cy="292608"/>
+            <a:ext cx="5894643" cy="292608"/>
           </a:xfrm>
           <a:prstGeom prst="rect">
             <a:avLst/>
@@ -10803,7 +10915,7 @@
         <p:spPr>
           <a:xfrm>
             <a:off x="685800" y="1719072"/>
-            <a:ext cx="502920" cy="4436983"/>
+            <a:ext cx="502920" cy="1930767"/>
           </a:xfrm>
           <a:prstGeom prst="rect">
             <a:avLst/>
@@ -10818,11 +10930,11 @@
           <a:p>
             <a:pPr algn="r">
               <a:spcAft>
-                <a:spcPts val="342"/>
+                <a:spcPts val="300"/>
               </a:spcAft>
             </a:pPr>
             <a:r>
-              <a:rPr sz="1600" i="0" b="0">
+              <a:rPr sz="1400" i="0" b="0">
                 <a:solidFill>
                   <a:srgbClr val="858585"/>
                 </a:solidFill>
@@ -10834,11 +10946,11 @@
           <a:p>
             <a:pPr algn="r">
               <a:spcAft>
-                <a:spcPts val="342"/>
+                <a:spcPts val="300"/>
               </a:spcAft>
             </a:pPr>
             <a:r>
-              <a:rPr sz="1600" i="0" b="0">
+              <a:rPr sz="1400" i="0" b="0">
                 <a:solidFill>
                   <a:srgbClr val="858585"/>
                 </a:solidFill>
@@ -10850,11 +10962,11 @@
           <a:p>
             <a:pPr algn="r">
               <a:spcAft>
-                <a:spcPts val="342"/>
+                <a:spcPts val="300"/>
               </a:spcAft>
             </a:pPr>
             <a:r>
-              <a:rPr sz="1600" i="0" b="0">
+              <a:rPr sz="1400" i="0" b="0">
                 <a:solidFill>
                   <a:srgbClr val="858585"/>
                 </a:solidFill>
@@ -10866,11 +10978,11 @@
           <a:p>
             <a:pPr algn="r">
               <a:spcAft>
-                <a:spcPts val="342"/>
+                <a:spcPts val="300"/>
               </a:spcAft>
             </a:pPr>
             <a:r>
-              <a:rPr sz="1600" i="0" b="0">
+              <a:rPr sz="1400" i="0" b="0">
                 <a:solidFill>
                   <a:srgbClr val="858585"/>
                 </a:solidFill>
@@ -10882,11 +10994,11 @@
           <a:p>
             <a:pPr algn="r">
               <a:spcAft>
-                <a:spcPts val="342"/>
+                <a:spcPts val="300"/>
               </a:spcAft>
             </a:pPr>
             <a:r>
-              <a:rPr sz="1600" i="0" b="0">
+              <a:rPr sz="1400" i="0" b="0">
                 <a:solidFill>
                   <a:srgbClr val="858585"/>
                 </a:solidFill>
@@ -10898,11 +11010,11 @@
           <a:p>
             <a:pPr algn="r">
               <a:spcAft>
-                <a:spcPts val="342"/>
+                <a:spcPts val="300"/>
               </a:spcAft>
             </a:pPr>
             <a:r>
-              <a:rPr sz="1600" i="0" b="0">
+              <a:rPr sz="1400" i="0" b="0">
                 <a:solidFill>
                   <a:srgbClr val="858585"/>
                 </a:solidFill>
@@ -10914,145 +11026,17 @@
           <a:p>
             <a:pPr algn="r">
               <a:spcAft>
-                <a:spcPts val="342"/>
+                <a:spcPts val="300"/>
               </a:spcAft>
             </a:pPr>
             <a:r>
-              <a:rPr sz="1600" i="0" b="0">
+              <a:rPr sz="1400" i="0" b="0">
                 <a:solidFill>
                   <a:srgbClr val="858585"/>
                 </a:solidFill>
                 <a:latin typeface="Consolas"/>
               </a:rPr>
               <a:t>7</a:t>
-            </a:r>
-          </a:p>
-          <a:p>
-            <a:pPr algn="r">
-              <a:spcAft>
-                <a:spcPts val="342"/>
-              </a:spcAft>
-            </a:pPr>
-            <a:r>
-              <a:rPr sz="1600" i="0" b="0">
-                <a:solidFill>
-                  <a:srgbClr val="858585"/>
-                </a:solidFill>
-                <a:latin typeface="Consolas"/>
-              </a:rPr>
-              <a:t>8</a:t>
-            </a:r>
-          </a:p>
-          <a:p>
-            <a:pPr algn="r">
-              <a:spcAft>
-                <a:spcPts val="342"/>
-              </a:spcAft>
-            </a:pPr>
-            <a:r>
-              <a:rPr sz="1600" i="0" b="0">
-                <a:solidFill>
-                  <a:srgbClr val="858585"/>
-                </a:solidFill>
-                <a:latin typeface="Consolas"/>
-              </a:rPr>
-              <a:t>9</a:t>
-            </a:r>
-          </a:p>
-          <a:p>
-            <a:pPr algn="r">
-              <a:spcAft>
-                <a:spcPts val="342"/>
-              </a:spcAft>
-            </a:pPr>
-            <a:r>
-              <a:rPr sz="1600" i="0" b="0">
-                <a:solidFill>
-                  <a:srgbClr val="858585"/>
-                </a:solidFill>
-                <a:latin typeface="Consolas"/>
-              </a:rPr>
-              <a:t>10</a:t>
-            </a:r>
-          </a:p>
-          <a:p>
-            <a:pPr algn="r">
-              <a:spcAft>
-                <a:spcPts val="342"/>
-              </a:spcAft>
-            </a:pPr>
-            <a:r>
-              <a:rPr sz="1600" i="0" b="0">
-                <a:solidFill>
-                  <a:srgbClr val="858585"/>
-                </a:solidFill>
-                <a:latin typeface="Consolas"/>
-              </a:rPr>
-              <a:t>11</a:t>
-            </a:r>
-          </a:p>
-          <a:p>
-            <a:pPr algn="r">
-              <a:spcAft>
-                <a:spcPts val="342"/>
-              </a:spcAft>
-            </a:pPr>
-            <a:r>
-              <a:rPr sz="1600" i="0" b="0">
-                <a:solidFill>
-                  <a:srgbClr val="858585"/>
-                </a:solidFill>
-                <a:latin typeface="Consolas"/>
-              </a:rPr>
-              <a:t>12</a:t>
-            </a:r>
-          </a:p>
-          <a:p>
-            <a:pPr algn="r">
-              <a:spcAft>
-                <a:spcPts val="342"/>
-              </a:spcAft>
-            </a:pPr>
-            <a:r>
-              <a:rPr sz="1600" i="0" b="0">
-                <a:solidFill>
-                  <a:srgbClr val="858585"/>
-                </a:solidFill>
-                <a:latin typeface="Consolas"/>
-              </a:rPr>
-              <a:t>13</a:t>
-            </a:r>
-          </a:p>
-          <a:p>
-            <a:pPr algn="r">
-              <a:spcAft>
-                <a:spcPts val="342"/>
-              </a:spcAft>
-            </a:pPr>
-            <a:r>
-              <a:rPr sz="1600" i="0" b="0">
-                <a:solidFill>
-                  <a:srgbClr val="858585"/>
-                </a:solidFill>
-                <a:latin typeface="Consolas"/>
-              </a:rPr>
-              <a:t>14</a:t>
-            </a:r>
-          </a:p>
-          <a:p>
-            <a:pPr algn="r">
-              <a:spcAft>
-                <a:spcPts val="342"/>
-              </a:spcAft>
-            </a:pPr>
-            <a:r>
-              <a:rPr sz="1600" i="0" b="0">
-                <a:solidFill>
-                  <a:srgbClr val="858585"/>
-                </a:solidFill>
-                <a:latin typeface="Consolas"/>
-              </a:rPr>
-              <a:t>15</a:t>
             </a:r>
           </a:p>
         </p:txBody>
@@ -11066,7 +11050,7 @@
         <p:spPr>
           <a:xfrm>
             <a:off x="1188720" y="1719072"/>
-            <a:ext cx="10271455" cy="4436983"/>
+            <a:ext cx="5986083" cy="1930767"/>
           </a:xfrm>
           <a:prstGeom prst="rect">
             <a:avLst/>
@@ -11081,11 +11065,11 @@
           <a:p>
             <a:pPr>
               <a:spcAft>
-                <a:spcPts val="342"/>
+                <a:spcPts val="300"/>
               </a:spcAft>
             </a:pPr>
             <a:r>
-              <a:rPr sz="1600" i="0" b="0">
+              <a:rPr sz="1400" i="0" b="0">
                 <a:solidFill>
                   <a:srgbClr val="D4D4D4"/>
                 </a:solidFill>
@@ -11097,11 +11081,11 @@
           <a:p>
             <a:pPr>
               <a:spcAft>
-                <a:spcPts val="342"/>
+                <a:spcPts val="300"/>
               </a:spcAft>
             </a:pPr>
             <a:r>
-              <a:rPr sz="1600" i="0" b="0">
+              <a:rPr sz="1400" i="0" b="0">
                 <a:solidFill>
                   <a:srgbClr val="D4D4D4"/>
                 </a:solidFill>
@@ -11110,7 +11094,7 @@
               <a:t>  </a:t>
             </a:r>
             <a:r>
-              <a:rPr sz="1600" i="0" b="0">
+              <a:rPr sz="1400" i="0" b="0">
                 <a:solidFill>
                   <a:srgbClr val="D4D4D4"/>
                 </a:solidFill>
@@ -11119,7 +11103,7 @@
               <a:t>class</a:t>
             </a:r>
             <a:r>
-              <a:rPr sz="1600" i="0" b="0">
+              <a:rPr sz="1400" i="0" b="0">
                 <a:solidFill>
                   <a:srgbClr val="D4D4D4"/>
                 </a:solidFill>
@@ -11128,7 +11112,7 @@
               <a:t> </a:t>
             </a:r>
             <a:r>
-              <a:rPr sz="1600" i="0" b="0">
+              <a:rPr sz="1400" i="0" b="0">
                 <a:solidFill>
                   <a:srgbClr val="4EC9B0"/>
                 </a:solidFill>
@@ -11140,11 +11124,11 @@
           <a:p>
             <a:pPr>
               <a:spcAft>
-                <a:spcPts val="342"/>
+                <a:spcPts val="300"/>
               </a:spcAft>
             </a:pPr>
             <a:r>
-              <a:rPr sz="1600" i="0" b="0">
+              <a:rPr sz="1400" i="0" b="0">
                 <a:solidFill>
                   <a:srgbClr val="D4D4D4"/>
                 </a:solidFill>
@@ -11153,7 +11137,7 @@
               <a:t>  </a:t>
             </a:r>
             <a:r>
-              <a:rPr sz="1600" i="0" b="0">
+              <a:rPr sz="1400" i="0" b="0">
                 <a:solidFill>
                   <a:srgbClr val="D4D4D4"/>
                 </a:solidFill>
@@ -11162,7 +11146,7 @@
               <a:t>class</a:t>
             </a:r>
             <a:r>
-              <a:rPr sz="1600" i="0" b="0">
+              <a:rPr sz="1400" i="0" b="0">
                 <a:solidFill>
                   <a:srgbClr val="D4D4D4"/>
                 </a:solidFill>
@@ -11171,7 +11155,7 @@
               <a:t> </a:t>
             </a:r>
             <a:r>
-              <a:rPr sz="1600" i="0" b="0">
+              <a:rPr sz="1400" i="0" b="0">
                 <a:solidFill>
                   <a:srgbClr val="4EC9B0"/>
                 </a:solidFill>
@@ -11183,11 +11167,11 @@
           <a:p>
             <a:pPr>
               <a:spcAft>
-                <a:spcPts val="342"/>
+                <a:spcPts val="300"/>
               </a:spcAft>
             </a:pPr>
             <a:r>
-              <a:rPr sz="1600" i="0" b="0">
+              <a:rPr sz="1400" i="0" b="0">
                 <a:solidFill>
                   <a:srgbClr val="D4D4D4"/>
                 </a:solidFill>
@@ -11196,7 +11180,7 @@
               <a:t>  </a:t>
             </a:r>
             <a:r>
-              <a:rPr sz="1600" i="0" b="0">
+              <a:rPr sz="1400" i="0" b="0">
                 <a:solidFill>
                   <a:srgbClr val="D4D4D4"/>
                 </a:solidFill>
@@ -11205,7 +11189,7 @@
               <a:t>class</a:t>
             </a:r>
             <a:r>
-              <a:rPr sz="1600" i="0" b="0">
+              <a:rPr sz="1400" i="0" b="0">
                 <a:solidFill>
                   <a:srgbClr val="D4D4D4"/>
                 </a:solidFill>
@@ -11214,7 +11198,7 @@
               <a:t> </a:t>
             </a:r>
             <a:r>
-              <a:rPr sz="1600" i="0" b="0">
+              <a:rPr sz="1400" i="0" b="0">
                 <a:solidFill>
                   <a:srgbClr val="4EC9B0"/>
                 </a:solidFill>
@@ -11226,11 +11210,11 @@
           <a:p>
             <a:pPr>
               <a:spcAft>
-                <a:spcPts val="342"/>
+                <a:spcPts val="300"/>
               </a:spcAft>
             </a:pPr>
             <a:r>
-              <a:rPr sz="1600" i="0" b="0">
+              <a:rPr sz="1400" i="0" b="0">
                 <a:solidFill>
                   <a:srgbClr val="D4D4D4"/>
                 </a:solidFill>
@@ -11239,7 +11223,7 @@
               <a:t>  </a:t>
             </a:r>
             <a:r>
-              <a:rPr sz="1600" i="0" b="0">
+              <a:rPr sz="1400" i="0" b="0">
                 <a:solidFill>
                   <a:srgbClr val="D4D4D4"/>
                 </a:solidFill>
@@ -11248,7 +11232,7 @@
               <a:t>Dueno</a:t>
             </a:r>
             <a:r>
-              <a:rPr sz="1600" i="0" b="0">
+              <a:rPr sz="1400" i="0" b="0">
                 <a:solidFill>
                   <a:srgbClr val="D4D4D4"/>
                 </a:solidFill>
@@ -11257,7 +11241,7 @@
               <a:t> </a:t>
             </a:r>
             <a:r>
-              <a:rPr sz="1600" i="0" b="0">
+              <a:rPr sz="1400" i="0" b="0">
                 <a:solidFill>
                   <a:srgbClr val="CE9178"/>
                 </a:solidFill>
@@ -11266,7 +11250,7 @@
               <a:t>"1"</a:t>
             </a:r>
             <a:r>
-              <a:rPr sz="1600" i="0" b="0">
+              <a:rPr sz="1400" i="0" b="0">
                 <a:solidFill>
                   <a:srgbClr val="D4D4D4"/>
                 </a:solidFill>
@@ -11275,7 +11259,7 @@
               <a:t> --&gt; </a:t>
             </a:r>
             <a:r>
-              <a:rPr sz="1600" i="0" b="0">
+              <a:rPr sz="1400" i="0" b="0">
                 <a:solidFill>
                   <a:srgbClr val="CE9178"/>
                 </a:solidFill>
@@ -11284,7 +11268,7 @@
               <a:t>"0..*"</a:t>
             </a:r>
             <a:r>
-              <a:rPr sz="1600" i="0" b="0">
+              <a:rPr sz="1400" i="0" b="0">
                 <a:solidFill>
                   <a:srgbClr val="D4D4D4"/>
                 </a:solidFill>
@@ -11293,7 +11277,7 @@
               <a:t> </a:t>
             </a:r>
             <a:r>
-              <a:rPr sz="1600" i="0" b="0">
+              <a:rPr sz="1400" i="0" b="0">
                 <a:solidFill>
                   <a:srgbClr val="D4D4D4"/>
                 </a:solidFill>
@@ -11302,7 +11286,7 @@
               <a:t>Mascota</a:t>
             </a:r>
             <a:r>
-              <a:rPr sz="1600" i="0" b="0">
+              <a:rPr sz="1400" i="0" b="0">
                 <a:solidFill>
                   <a:srgbClr val="D4D4D4"/>
                 </a:solidFill>
@@ -11311,7 +11295,7 @@
               <a:t> : </a:t>
             </a:r>
             <a:r>
-              <a:rPr sz="1600" i="0" b="0">
+              <a:rPr sz="1400" i="0" b="0">
                 <a:solidFill>
                   <a:srgbClr val="D4D4D4"/>
                 </a:solidFill>
@@ -11323,11 +11307,11 @@
           <a:p>
             <a:pPr>
               <a:spcAft>
-                <a:spcPts val="342"/>
+                <a:spcPts val="300"/>
               </a:spcAft>
             </a:pPr>
             <a:r>
-              <a:rPr sz="1600" i="0" b="0">
+              <a:rPr sz="1400" i="0" b="0">
                 <a:solidFill>
                   <a:srgbClr val="D4D4D4"/>
                 </a:solidFill>
@@ -11336,7 +11320,7 @@
               <a:t>  </a:t>
             </a:r>
             <a:r>
-              <a:rPr sz="1600" i="0" b="0">
+              <a:rPr sz="1400" i="0" b="0">
                 <a:solidFill>
                   <a:srgbClr val="D4D4D4"/>
                 </a:solidFill>
@@ -11345,7 +11329,7 @@
               <a:t>Mascota</a:t>
             </a:r>
             <a:r>
-              <a:rPr sz="1600" i="0" b="0">
+              <a:rPr sz="1400" i="0" b="0">
                 <a:solidFill>
                   <a:srgbClr val="D4D4D4"/>
                 </a:solidFill>
@@ -11354,7 +11338,7 @@
               <a:t> </a:t>
             </a:r>
             <a:r>
-              <a:rPr sz="1600" i="0" b="0">
+              <a:rPr sz="1400" i="0" b="0">
                 <a:solidFill>
                   <a:srgbClr val="CE9178"/>
                 </a:solidFill>
@@ -11363,7 +11347,7 @@
               <a:t>"1"</a:t>
             </a:r>
             <a:r>
-              <a:rPr sz="1600" i="0" b="0">
+              <a:rPr sz="1400" i="0" b="0">
                 <a:solidFill>
                   <a:srgbClr val="D4D4D4"/>
                 </a:solidFill>
@@ -11372,7 +11356,7 @@
               <a:t> --&gt; </a:t>
             </a:r>
             <a:r>
-              <a:rPr sz="1600" i="0" b="0">
+              <a:rPr sz="1400" i="0" b="0">
                 <a:solidFill>
                   <a:srgbClr val="CE9178"/>
                 </a:solidFill>
@@ -11381,7 +11365,7 @@
               <a:t>"0..*"</a:t>
             </a:r>
             <a:r>
-              <a:rPr sz="1600" i="0" b="0">
+              <a:rPr sz="1400" i="0" b="0">
                 <a:solidFill>
                   <a:srgbClr val="D4D4D4"/>
                 </a:solidFill>
@@ -11390,7 +11374,7 @@
               <a:t> </a:t>
             </a:r>
             <a:r>
-              <a:rPr sz="1600" i="0" b="0">
+              <a:rPr sz="1400" i="0" b="0">
                 <a:solidFill>
                   <a:srgbClr val="D4D4D4"/>
                 </a:solidFill>
@@ -11399,7 +11383,7 @@
               <a:t>Cita</a:t>
             </a:r>
             <a:r>
-              <a:rPr sz="1600" i="0" b="0">
+              <a:rPr sz="1400" i="0" b="0">
                 <a:solidFill>
                   <a:srgbClr val="D4D4D4"/>
                 </a:solidFill>
@@ -11408,7 +11392,7 @@
               <a:t> : </a:t>
             </a:r>
             <a:r>
-              <a:rPr sz="1600" i="0" b="0">
+              <a:rPr sz="1400" i="0" b="0">
                 <a:solidFill>
                   <a:srgbClr val="D4D4D4"/>
                 </a:solidFill>
@@ -11420,11 +11404,11 @@
           <a:p>
             <a:pPr>
               <a:spcAft>
-                <a:spcPts val="342"/>
+                <a:spcPts val="300"/>
               </a:spcAft>
             </a:pPr>
             <a:r>
-              <a:rPr sz="1600" i="0" b="0">
+              <a:rPr sz="1400" i="0" b="0">
                 <a:solidFill>
                   <a:srgbClr val="D4D4D4"/>
                 </a:solidFill>
@@ -11433,7 +11417,7 @@
               <a:t>  </a:t>
             </a:r>
             <a:r>
-              <a:rPr sz="1600" i="0" b="0">
+              <a:rPr sz="1400" i="0" b="0">
                 <a:solidFill>
                   <a:srgbClr val="D4D4D4"/>
                 </a:solidFill>
@@ -11442,7 +11426,7 @@
               <a:t>note</a:t>
             </a:r>
             <a:r>
-              <a:rPr sz="1600" i="0" b="0">
+              <a:rPr sz="1400" i="0" b="0">
                 <a:solidFill>
                   <a:srgbClr val="D4D4D4"/>
                 </a:solidFill>
@@ -11451,7 +11435,7 @@
               <a:t> </a:t>
             </a:r>
             <a:r>
-              <a:rPr sz="1600" i="0" b="0">
+              <a:rPr sz="1400" i="0" b="0">
                 <a:solidFill>
                   <a:srgbClr val="D4D4D4"/>
                 </a:solidFill>
@@ -11460,7 +11444,7 @@
               <a:t>for</a:t>
             </a:r>
             <a:r>
-              <a:rPr sz="1600" i="0" b="0">
+              <a:rPr sz="1400" i="0" b="0">
                 <a:solidFill>
                   <a:srgbClr val="D4D4D4"/>
                 </a:solidFill>
@@ -11469,7 +11453,7 @@
               <a:t> </a:t>
             </a:r>
             <a:r>
-              <a:rPr sz="1600" i="0" b="0">
+              <a:rPr sz="1400" i="0" b="0">
                 <a:solidFill>
                   <a:srgbClr val="D4D4D4"/>
                 </a:solidFill>
@@ -11478,7 +11462,7 @@
               <a:t>Mascota</a:t>
             </a:r>
             <a:r>
-              <a:rPr sz="1600" i="0" b="0">
+              <a:rPr sz="1400" i="0" b="0">
                 <a:solidFill>
                   <a:srgbClr val="D4D4D4"/>
                 </a:solidFill>
@@ -11487,148 +11471,159 @@
               <a:t> </a:t>
             </a:r>
             <a:r>
-              <a:rPr sz="1600" i="0" b="0">
+              <a:rPr sz="1400" i="0" b="0">
                 <a:solidFill>
                   <a:srgbClr val="CE9178"/>
                 </a:solidFill>
                 <a:latin typeface="Consolas"/>
               </a:rPr>
-              <a:t>"Del dominio: el cliente la nombra\ny tiene estado y reglas propias"</a:t>
-            </a:r>
-          </a:p>
-          <a:p>
-            <a:pPr>
-              <a:spcAft>
-                <a:spcPts val="342"/>
-              </a:spcAft>
-            </a:pPr>
-            <a:r>
-              <a:rPr sz="1600" i="0" b="0">
-                <a:solidFill>
-                  <a:srgbClr val="D4D4D4"/>
-                </a:solidFill>
-                <a:latin typeface="Consolas"/>
-              </a:rPr>
-              <a:t/>
-            </a:r>
-          </a:p>
-          <a:p>
-            <a:pPr>
-              <a:spcAft>
-                <a:spcPts val="342"/>
-              </a:spcAft>
-            </a:pPr>
-            <a:r>
-              <a:rPr sz="1600" i="1" b="0">
-                <a:solidFill>
-                  <a:srgbClr val="6A9955"/>
-                </a:solidFill>
-                <a:latin typeface="Consolas"/>
-              </a:rPr>
-              <a:t>%% NO van en el modelo de dominio, y es el error mas comun:</a:t>
-            </a:r>
-          </a:p>
-          <a:p>
-            <a:pPr>
-              <a:spcAft>
-                <a:spcPts val="342"/>
-              </a:spcAft>
-            </a:pPr>
-            <a:r>
-              <a:rPr sz="1600" i="1" b="0">
-                <a:solidFill>
-                  <a:srgbClr val="6A9955"/>
-                </a:solidFill>
-                <a:latin typeface="Consolas"/>
-              </a:rPr>
-              <a:t>%%   FormularioRegistroMascota -&gt; una PANTALLA (Clase 13)</a:t>
-            </a:r>
-          </a:p>
-          <a:p>
-            <a:pPr>
-              <a:spcAft>
-                <a:spcPts val="342"/>
-              </a:spcAft>
-            </a:pPr>
-            <a:r>
-              <a:rPr sz="1600" i="1" b="0">
-                <a:solidFill>
-                  <a:srgbClr val="6A9955"/>
-                </a:solidFill>
-                <a:latin typeface="Consolas"/>
-              </a:rPr>
-              <a:t>%%   ConexionBaseDatos         -&gt; INFRAESTRUCTURA</a:t>
-            </a:r>
-          </a:p>
-          <a:p>
-            <a:pPr>
-              <a:spcAft>
-                <a:spcPts val="342"/>
-              </a:spcAft>
-            </a:pPr>
-            <a:r>
-              <a:rPr sz="1600" i="1" b="0">
-                <a:solidFill>
-                  <a:srgbClr val="6A9955"/>
-                </a:solidFill>
-                <a:latin typeface="Consolas"/>
-              </a:rPr>
-              <a:t>%%   GestorDeMascotas          -&gt; un «gestor» que solo mueve datos</a:t>
-            </a:r>
-          </a:p>
-          <a:p>
-            <a:pPr>
-              <a:spcAft>
-                <a:spcPts val="342"/>
-              </a:spcAft>
-            </a:pPr>
-            <a:r>
-              <a:rPr sz="1600" i="1" b="0">
-                <a:solidFill>
-                  <a:srgbClr val="6A9955"/>
-                </a:solidFill>
-                <a:latin typeface="Consolas"/>
-              </a:rPr>
-              <a:t>%%   BotonGuardar              -&gt; un control de interfaz</a:t>
-            </a:r>
-          </a:p>
-          <a:p>
-            <a:pPr>
-              <a:spcAft>
-                <a:spcPts val="342"/>
-              </a:spcAft>
-            </a:pPr>
-            <a:r>
-              <a:rPr sz="1600" i="1" b="0">
-                <a:solidFill>
-                  <a:srgbClr val="6A9955"/>
-                </a:solidFill>
-                <a:latin typeface="Consolas"/>
-              </a:rPr>
-              <a:t>%% La prueba: sin sistema, la clinica seguiria hablando de «la mascota»</a:t>
-            </a:r>
-          </a:p>
-          <a:p>
-            <a:pPr>
-              <a:spcAft>
-                <a:spcPts val="342"/>
-              </a:spcAft>
-            </a:pPr>
-            <a:r>
-              <a:rPr sz="1600" i="1" b="0">
-                <a:solidFill>
-                  <a:srgbClr val="6A9955"/>
-                </a:solidFill>
-                <a:latin typeface="Consolas"/>
-              </a:rPr>
-              <a:t>%% y de «la cita». De «GestorDeMascotas», no.</a:t>
-            </a:r>
-          </a:p>
-        </p:txBody>
-      </p:sp>
-      <p:sp>
-        <p:nvSpPr>
-          <p:cNvPr id="13" name="TextBox 12"/>
+              <a:t>"La nombra el cliente\ny tiene reglas"</a:t>
+            </a:r>
+          </a:p>
+        </p:txBody>
+      </p:sp>
+      <p:sp>
+        <p:nvSpPr>
+          <p:cNvPr id="13" name="Rounded Rectangle 12"/>
+          <p:cNvSpPr/>
+          <p:nvPr/>
+        </p:nvSpPr>
+        <p:spPr>
+          <a:xfrm>
+            <a:off x="7668579" y="1261872"/>
+            <a:ext cx="4120780" cy="3318569"/>
+          </a:xfrm>
+          <a:prstGeom prst="roundRect">
+            <a:avLst>
+              <a:gd name="adj" fmla="val 4000"/>
+            </a:avLst>
+          </a:prstGeom>
+          <a:solidFill>
+            <a:srgbClr val="E8EEF4"/>
+          </a:solidFill>
+          <a:ln>
+            <a:noFill/>
+          </a:ln>
+        </p:spPr>
+        <p:style>
+          <a:lnRef idx="1">
+            <a:schemeClr val="accent1"/>
+          </a:lnRef>
+          <a:fillRef idx="3">
+            <a:schemeClr val="accent1"/>
+          </a:fillRef>
+          <a:effectRef idx="2">
+            <a:schemeClr val="accent1"/>
+          </a:effectRef>
+          <a:fontRef idx="minor">
+            <a:schemeClr val="lt1"/>
+          </a:fontRef>
+        </p:style>
+        <p:txBody>
+          <a:bodyPr rtlCol="0" anchor="ctr"/>
+          <a:lstStyle/>
+          <a:p>
+            <a:pPr algn="ctr"/>
+          </a:p>
+        </p:txBody>
+      </p:sp>
+      <p:pic>
+        <p:nvPicPr>
+          <p:cNvPr id="14" name="Picture 13" descr="dg-no-es-clase-paso1.png"/>
+          <p:cNvPicPr>
+            <a:picLocks noChangeAspect="1"/>
+          </p:cNvPicPr>
+          <p:nvPr/>
+        </p:nvPicPr>
+        <p:blipFill>
+          <a:blip r:embed="rId2"/>
+          <a:stretch>
+            <a:fillRect/>
+          </a:stretch>
+        </p:blipFill>
+        <p:spPr>
+          <a:xfrm>
+            <a:off x="7723443" y="1316736"/>
+            <a:ext cx="4011052" cy="3208841"/>
+          </a:xfrm>
+          <a:prstGeom prst="rect">
+            <a:avLst/>
+          </a:prstGeom>
+        </p:spPr>
+      </p:pic>
+      <p:sp>
+        <p:nvSpPr>
+          <p:cNvPr id="15" name="TextBox 14"/>
+          <p:cNvSpPr txBox="1"/>
+          <p:nvPr/>
+        </p:nvSpPr>
+        <p:spPr>
+          <a:xfrm>
+            <a:off x="7723443" y="4580441"/>
+            <a:ext cx="4011052" cy="320040"/>
+          </a:xfrm>
+          <a:prstGeom prst="rect">
+            <a:avLst/>
+          </a:prstGeom>
+          <a:noFill/>
+        </p:spPr>
+        <p:txBody>
+          <a:bodyPr wrap="square">
+            <a:spAutoFit/>
+          </a:bodyPr>
+          <a:lstStyle/>
+          <a:p>
+            <a:pPr algn="ctr"/>
+            <a:r>
+              <a:rPr sz="1200" b="0" i="1">
+                <a:solidFill>
+                  <a:srgbClr val="666666"/>
+                </a:solidFill>
+                <a:latin typeface="Calibri"/>
+              </a:rPr>
+              <a:t>Lo que dibuja este código</a:t>
+            </a:r>
+          </a:p>
+        </p:txBody>
+      </p:sp>
+      <p:sp>
+        <p:nvSpPr>
+          <p:cNvPr id="16" name="TextBox 15"/>
+          <p:cNvSpPr txBox="1"/>
+          <p:nvPr/>
+        </p:nvSpPr>
+        <p:spPr>
+          <a:xfrm>
+            <a:off x="457200" y="6035040"/>
+            <a:ext cx="11277295" cy="365760"/>
+          </a:xfrm>
+          <a:prstGeom prst="rect">
+            <a:avLst/>
+          </a:prstGeom>
+          <a:noFill/>
+        </p:spPr>
+        <p:txBody>
+          <a:bodyPr wrap="square">
+            <a:spAutoFit/>
+          </a:bodyPr>
+          <a:lstStyle/>
+          <a:p>
+            <a:pPr algn="ctr"/>
+            <a:r>
+              <a:rPr sz="1300" b="0" i="1">
+                <a:solidFill>
+                  <a:srgbClr val="666666"/>
+                </a:solidFill>
+                <a:latin typeface="Calibri"/>
+              </a:rPr>
+              <a:t>No son del dominio: FormularioRegistroMascota (pantalla), ConexionBaseDatos (infraestructura), GestorDeMascotas, BotonGuardar.</a:t>
+            </a:r>
+          </a:p>
+        </p:txBody>
+      </p:sp>
+      <p:sp>
+        <p:nvSpPr>
+          <p:cNvPr id="17" name="TextBox 16"/>
           <p:cNvSpPr txBox="1"/>
           <p:nvPr/>
         </p:nvSpPr>
@@ -11816,7 +11811,7 @@
         <p:spPr>
           <a:xfrm>
             <a:off x="457200" y="1261872"/>
-            <a:ext cx="11277295" cy="4727448"/>
+            <a:ext cx="6991923" cy="4703152"/>
           </a:xfrm>
           <a:prstGeom prst="roundRect">
             <a:avLst>
@@ -11861,7 +11856,7 @@
         <p:spPr>
           <a:xfrm>
             <a:off x="457200" y="1261872"/>
-            <a:ext cx="11277295" cy="365760"/>
+            <a:ext cx="6991923" cy="365760"/>
           </a:xfrm>
           <a:prstGeom prst="rect">
             <a:avLst/>
@@ -12033,7 +12028,7 @@
         <p:spPr>
           <a:xfrm>
             <a:off x="1371600" y="1298448"/>
-            <a:ext cx="10180015" cy="292608"/>
+            <a:ext cx="5894643" cy="292608"/>
           </a:xfrm>
           <a:prstGeom prst="rect">
             <a:avLst/>
@@ -12065,8 +12060,8 @@
         </p:nvSpPr>
         <p:spPr>
           <a:xfrm>
-            <a:off x="1188720" y="1719072"/>
-            <a:ext cx="4747107" cy="4133087"/>
+            <a:off x="685800" y="1719072"/>
+            <a:ext cx="502920" cy="4108792"/>
           </a:xfrm>
           <a:prstGeom prst="rect">
             <a:avLst/>
@@ -12079,646 +12074,307 @@
           </a:bodyPr>
           <a:lstStyle/>
           <a:p>
-            <a:pPr>
+            <a:pPr algn="r">
               <a:spcAft>
-                <a:spcPts val="278"/>
+                <a:spcPts val="235"/>
               </a:spcAft>
             </a:pPr>
             <a:r>
-              <a:rPr sz="1300" i="0" b="0">
-                <a:solidFill>
-                  <a:srgbClr val="D4D4D4"/>
-                </a:solidFill>
-                <a:latin typeface="Consolas"/>
-              </a:rPr>
-              <a:t>classDiagram</a:t>
-            </a:r>
-          </a:p>
-          <a:p>
-            <a:pPr>
+              <a:rPr sz="1100" i="0" b="0">
+                <a:solidFill>
+                  <a:srgbClr val="858585"/>
+                </a:solidFill>
+                <a:latin typeface="Consolas"/>
+              </a:rPr>
+              <a:t>1</a:t>
+            </a:r>
+          </a:p>
+          <a:p>
+            <a:pPr algn="r">
               <a:spcAft>
-                <a:spcPts val="278"/>
+                <a:spcPts val="235"/>
               </a:spcAft>
             </a:pPr>
             <a:r>
-              <a:rPr sz="1300" i="0" b="0">
-                <a:solidFill>
-                  <a:srgbClr val="D4D4D4"/>
-                </a:solidFill>
-                <a:latin typeface="Consolas"/>
-              </a:rPr>
-              <a:t>  </a:t>
-            </a:r>
-            <a:r>
-              <a:rPr sz="1300" i="0" b="0">
-                <a:solidFill>
-                  <a:srgbClr val="D4D4D4"/>
-                </a:solidFill>
-                <a:latin typeface="Consolas"/>
-              </a:rPr>
-              <a:t>class</a:t>
-            </a:r>
-            <a:r>
-              <a:rPr sz="1300" i="0" b="0">
-                <a:solidFill>
-                  <a:srgbClr val="D4D4D4"/>
-                </a:solidFill>
-                <a:latin typeface="Consolas"/>
-              </a:rPr>
-              <a:t> </a:t>
-            </a:r>
-            <a:r>
-              <a:rPr sz="1300" i="0" b="0">
-                <a:solidFill>
-                  <a:srgbClr val="4EC9B0"/>
-                </a:solidFill>
-                <a:latin typeface="Consolas"/>
-              </a:rPr>
-              <a:t>Dueno</a:t>
-            </a:r>
-            <a:r>
-              <a:rPr sz="1300" i="0" b="0">
-                <a:solidFill>
-                  <a:srgbClr val="D4D4D4"/>
-                </a:solidFill>
-                <a:latin typeface="Consolas"/>
-              </a:rPr>
-              <a:t> {</a:t>
-            </a:r>
-          </a:p>
-          <a:p>
-            <a:pPr>
+              <a:rPr sz="1100" i="0" b="0">
+                <a:solidFill>
+                  <a:srgbClr val="858585"/>
+                </a:solidFill>
+                <a:latin typeface="Consolas"/>
+              </a:rPr>
+              <a:t>2</a:t>
+            </a:r>
+          </a:p>
+          <a:p>
+            <a:pPr algn="r">
               <a:spcAft>
-                <a:spcPts val="278"/>
+                <a:spcPts val="235"/>
               </a:spcAft>
             </a:pPr>
             <a:r>
-              <a:rPr sz="1300" i="0" b="0">
-                <a:solidFill>
-                  <a:srgbClr val="D4D4D4"/>
-                </a:solidFill>
-                <a:latin typeface="Consolas"/>
-              </a:rPr>
-              <a:t>    -</a:t>
-            </a:r>
-            <a:r>
-              <a:rPr sz="1300" i="0" b="0">
-                <a:solidFill>
-                  <a:srgbClr val="D4D4D4"/>
-                </a:solidFill>
-                <a:latin typeface="Consolas"/>
-              </a:rPr>
-              <a:t>documento</a:t>
-            </a:r>
-            <a:r>
-              <a:rPr sz="1300" i="0" b="0">
-                <a:solidFill>
-                  <a:srgbClr val="D4D4D4"/>
-                </a:solidFill>
-                <a:latin typeface="Consolas"/>
-              </a:rPr>
-              <a:t>: </a:t>
-            </a:r>
-            <a:r>
-              <a:rPr sz="1300" i="0" b="0">
-                <a:solidFill>
-                  <a:srgbClr val="D4D4D4"/>
-                </a:solidFill>
-                <a:latin typeface="Consolas"/>
-              </a:rPr>
-              <a:t>String</a:t>
-            </a:r>
-          </a:p>
-          <a:p>
-            <a:pPr>
+              <a:rPr sz="1100" i="0" b="0">
+                <a:solidFill>
+                  <a:srgbClr val="858585"/>
+                </a:solidFill>
+                <a:latin typeface="Consolas"/>
+              </a:rPr>
+              <a:t>3</a:t>
+            </a:r>
+          </a:p>
+          <a:p>
+            <a:pPr algn="r">
               <a:spcAft>
-                <a:spcPts val="278"/>
+                <a:spcPts val="235"/>
               </a:spcAft>
             </a:pPr>
             <a:r>
-              <a:rPr sz="1300" i="0" b="0">
-                <a:solidFill>
-                  <a:srgbClr val="D4D4D4"/>
-                </a:solidFill>
-                <a:latin typeface="Consolas"/>
-              </a:rPr>
-              <a:t>    -</a:t>
-            </a:r>
-            <a:r>
-              <a:rPr sz="1300" i="0" b="0">
-                <a:solidFill>
-                  <a:srgbClr val="D4D4D4"/>
-                </a:solidFill>
-                <a:latin typeface="Consolas"/>
-              </a:rPr>
-              <a:t>nombre</a:t>
-            </a:r>
-            <a:r>
-              <a:rPr sz="1300" i="0" b="0">
-                <a:solidFill>
-                  <a:srgbClr val="D4D4D4"/>
-                </a:solidFill>
-                <a:latin typeface="Consolas"/>
-              </a:rPr>
-              <a:t>: </a:t>
-            </a:r>
-            <a:r>
-              <a:rPr sz="1300" i="0" b="0">
-                <a:solidFill>
-                  <a:srgbClr val="D4D4D4"/>
-                </a:solidFill>
-                <a:latin typeface="Consolas"/>
-              </a:rPr>
-              <a:t>String</a:t>
-            </a:r>
-          </a:p>
-          <a:p>
-            <a:pPr>
+              <a:rPr sz="1100" i="0" b="0">
+                <a:solidFill>
+                  <a:srgbClr val="858585"/>
+                </a:solidFill>
+                <a:latin typeface="Consolas"/>
+              </a:rPr>
+              <a:t>4</a:t>
+            </a:r>
+          </a:p>
+          <a:p>
+            <a:pPr algn="r">
               <a:spcAft>
-                <a:spcPts val="278"/>
+                <a:spcPts val="235"/>
               </a:spcAft>
             </a:pPr>
             <a:r>
-              <a:rPr sz="1300" i="0" b="0">
-                <a:solidFill>
-                  <a:srgbClr val="D4D4D4"/>
-                </a:solidFill>
-                <a:latin typeface="Consolas"/>
-              </a:rPr>
-              <a:t>    +</a:t>
-            </a:r>
-            <a:r>
-              <a:rPr sz="1300" i="0" b="0">
-                <a:solidFill>
-                  <a:srgbClr val="DCDCAA"/>
-                </a:solidFill>
-                <a:latin typeface="Consolas"/>
-              </a:rPr>
-              <a:t>registrarMascota</a:t>
-            </a:r>
-            <a:r>
-              <a:rPr sz="1300" i="0" b="0">
-                <a:solidFill>
-                  <a:srgbClr val="D4D4D4"/>
-                </a:solidFill>
-                <a:latin typeface="Consolas"/>
-              </a:rPr>
-              <a:t>(</a:t>
-            </a:r>
-            <a:r>
-              <a:rPr sz="1300" i="0" b="0">
-                <a:solidFill>
-                  <a:srgbClr val="D4D4D4"/>
-                </a:solidFill>
-                <a:latin typeface="Consolas"/>
-              </a:rPr>
-              <a:t>m</a:t>
-            </a:r>
-            <a:r>
-              <a:rPr sz="1300" i="0" b="0">
-                <a:solidFill>
-                  <a:srgbClr val="D4D4D4"/>
-                </a:solidFill>
-                <a:latin typeface="Consolas"/>
-              </a:rPr>
-              <a:t>: </a:t>
-            </a:r>
-            <a:r>
-              <a:rPr sz="1300" i="0" b="0">
-                <a:solidFill>
-                  <a:srgbClr val="D4D4D4"/>
-                </a:solidFill>
-                <a:latin typeface="Consolas"/>
-              </a:rPr>
-              <a:t>Mascota</a:t>
-            </a:r>
-            <a:r>
-              <a:rPr sz="1300" i="0" b="0">
-                <a:solidFill>
-                  <a:srgbClr val="D4D4D4"/>
-                </a:solidFill>
-                <a:latin typeface="Consolas"/>
-              </a:rPr>
-              <a:t>) </a:t>
-            </a:r>
-            <a:r>
-              <a:rPr sz="1300" i="0" b="0">
-                <a:solidFill>
-                  <a:srgbClr val="D4D4D4"/>
-                </a:solidFill>
-                <a:latin typeface="Consolas"/>
-              </a:rPr>
-              <a:t>void</a:t>
-            </a:r>
-          </a:p>
-          <a:p>
-            <a:pPr>
+              <a:rPr sz="1100" i="0" b="0">
+                <a:solidFill>
+                  <a:srgbClr val="858585"/>
+                </a:solidFill>
+                <a:latin typeface="Consolas"/>
+              </a:rPr>
+              <a:t>5</a:t>
+            </a:r>
+          </a:p>
+          <a:p>
+            <a:pPr algn="r">
               <a:spcAft>
-                <a:spcPts val="278"/>
+                <a:spcPts val="235"/>
               </a:spcAft>
             </a:pPr>
             <a:r>
-              <a:rPr sz="1300" i="0" b="0">
-                <a:solidFill>
-                  <a:srgbClr val="D4D4D4"/>
-                </a:solidFill>
-                <a:latin typeface="Consolas"/>
-              </a:rPr>
-              <a:t>  }</a:t>
-            </a:r>
-          </a:p>
-          <a:p>
-            <a:pPr>
+              <a:rPr sz="1100" i="0" b="0">
+                <a:solidFill>
+                  <a:srgbClr val="858585"/>
+                </a:solidFill>
+                <a:latin typeface="Consolas"/>
+              </a:rPr>
+              <a:t>6</a:t>
+            </a:r>
+          </a:p>
+          <a:p>
+            <a:pPr algn="r">
               <a:spcAft>
-                <a:spcPts val="278"/>
+                <a:spcPts val="235"/>
               </a:spcAft>
             </a:pPr>
             <a:r>
-              <a:rPr sz="1300" i="0" b="0">
-                <a:solidFill>
-                  <a:srgbClr val="D4D4D4"/>
-                </a:solidFill>
-                <a:latin typeface="Consolas"/>
-              </a:rPr>
-              <a:t>  </a:t>
-            </a:r>
-            <a:r>
-              <a:rPr sz="1300" i="0" b="0">
-                <a:solidFill>
-                  <a:srgbClr val="D4D4D4"/>
-                </a:solidFill>
-                <a:latin typeface="Consolas"/>
-              </a:rPr>
-              <a:t>class</a:t>
-            </a:r>
-            <a:r>
-              <a:rPr sz="1300" i="0" b="0">
-                <a:solidFill>
-                  <a:srgbClr val="D4D4D4"/>
-                </a:solidFill>
-                <a:latin typeface="Consolas"/>
-              </a:rPr>
-              <a:t> </a:t>
-            </a:r>
-            <a:r>
-              <a:rPr sz="1300" i="0" b="0">
-                <a:solidFill>
-                  <a:srgbClr val="4EC9B0"/>
-                </a:solidFill>
-                <a:latin typeface="Consolas"/>
-              </a:rPr>
-              <a:t>Mascota</a:t>
-            </a:r>
-            <a:r>
-              <a:rPr sz="1300" i="0" b="0">
-                <a:solidFill>
-                  <a:srgbClr val="D4D4D4"/>
-                </a:solidFill>
-                <a:latin typeface="Consolas"/>
-              </a:rPr>
-              <a:t> {</a:t>
-            </a:r>
-          </a:p>
-          <a:p>
-            <a:pPr>
+              <a:rPr sz="1100" i="0" b="0">
+                <a:solidFill>
+                  <a:srgbClr val="858585"/>
+                </a:solidFill>
+                <a:latin typeface="Consolas"/>
+              </a:rPr>
+              <a:t>7</a:t>
+            </a:r>
+          </a:p>
+          <a:p>
+            <a:pPr algn="r">
               <a:spcAft>
-                <a:spcPts val="278"/>
+                <a:spcPts val="235"/>
               </a:spcAft>
             </a:pPr>
             <a:r>
-              <a:rPr sz="1300" i="0" b="0">
-                <a:solidFill>
-                  <a:srgbClr val="D4D4D4"/>
-                </a:solidFill>
-                <a:latin typeface="Consolas"/>
-              </a:rPr>
-              <a:t>    -</a:t>
-            </a:r>
-            <a:r>
-              <a:rPr sz="1300" i="0" b="0">
-                <a:solidFill>
-                  <a:srgbClr val="D4D4D4"/>
-                </a:solidFill>
-                <a:latin typeface="Consolas"/>
-              </a:rPr>
-              <a:t>codigo</a:t>
-            </a:r>
-            <a:r>
-              <a:rPr sz="1300" i="0" b="0">
-                <a:solidFill>
-                  <a:srgbClr val="D4D4D4"/>
-                </a:solidFill>
-                <a:latin typeface="Consolas"/>
-              </a:rPr>
-              <a:t>: </a:t>
-            </a:r>
-            <a:r>
-              <a:rPr sz="1300" i="0" b="0">
-                <a:solidFill>
-                  <a:srgbClr val="D4D4D4"/>
-                </a:solidFill>
-                <a:latin typeface="Consolas"/>
-              </a:rPr>
-              <a:t>String</a:t>
-            </a:r>
-          </a:p>
-          <a:p>
-            <a:pPr>
+              <a:rPr sz="1100" i="0" b="0">
+                <a:solidFill>
+                  <a:srgbClr val="858585"/>
+                </a:solidFill>
+                <a:latin typeface="Consolas"/>
+              </a:rPr>
+              <a:t>8</a:t>
+            </a:r>
+          </a:p>
+          <a:p>
+            <a:pPr algn="r">
               <a:spcAft>
-                <a:spcPts val="278"/>
+                <a:spcPts val="235"/>
               </a:spcAft>
             </a:pPr>
             <a:r>
-              <a:rPr sz="1300" i="0" b="0">
-                <a:solidFill>
-                  <a:srgbClr val="D4D4D4"/>
-                </a:solidFill>
-                <a:latin typeface="Consolas"/>
-              </a:rPr>
-              <a:t>    -</a:t>
-            </a:r>
-            <a:r>
-              <a:rPr sz="1300" i="0" b="0">
-                <a:solidFill>
-                  <a:srgbClr val="D4D4D4"/>
-                </a:solidFill>
-                <a:latin typeface="Consolas"/>
-              </a:rPr>
-              <a:t>especie</a:t>
-            </a:r>
-            <a:r>
-              <a:rPr sz="1300" i="0" b="0">
-                <a:solidFill>
-                  <a:srgbClr val="D4D4D4"/>
-                </a:solidFill>
-                <a:latin typeface="Consolas"/>
-              </a:rPr>
-              <a:t>: </a:t>
-            </a:r>
-            <a:r>
-              <a:rPr sz="1300" i="0" b="0">
-                <a:solidFill>
-                  <a:srgbClr val="D4D4D4"/>
-                </a:solidFill>
-                <a:latin typeface="Consolas"/>
-              </a:rPr>
-              <a:t>String</a:t>
-            </a:r>
-          </a:p>
-          <a:p>
-            <a:pPr>
+              <a:rPr sz="1100" i="0" b="0">
+                <a:solidFill>
+                  <a:srgbClr val="858585"/>
+                </a:solidFill>
+                <a:latin typeface="Consolas"/>
+              </a:rPr>
+              <a:t>9</a:t>
+            </a:r>
+          </a:p>
+          <a:p>
+            <a:pPr algn="r">
               <a:spcAft>
-                <a:spcPts val="278"/>
+                <a:spcPts val="235"/>
               </a:spcAft>
             </a:pPr>
             <a:r>
-              <a:rPr sz="1300" i="0" b="0">
-                <a:solidFill>
-                  <a:srgbClr val="D4D4D4"/>
-                </a:solidFill>
-                <a:latin typeface="Consolas"/>
-              </a:rPr>
-              <a:t>    -</a:t>
-            </a:r>
-            <a:r>
-              <a:rPr sz="1300" i="0" b="0">
-                <a:solidFill>
-                  <a:srgbClr val="D4D4D4"/>
-                </a:solidFill>
-                <a:latin typeface="Consolas"/>
-              </a:rPr>
-              <a:t>fechaNacimiento</a:t>
-            </a:r>
-            <a:r>
-              <a:rPr sz="1300" i="0" b="0">
-                <a:solidFill>
-                  <a:srgbClr val="D4D4D4"/>
-                </a:solidFill>
-                <a:latin typeface="Consolas"/>
-              </a:rPr>
-              <a:t>: </a:t>
-            </a:r>
-            <a:r>
-              <a:rPr sz="1300" i="0" b="0">
-                <a:solidFill>
-                  <a:srgbClr val="D4D4D4"/>
-                </a:solidFill>
-                <a:latin typeface="Consolas"/>
-              </a:rPr>
-              <a:t>Date</a:t>
-            </a:r>
-          </a:p>
-          <a:p>
-            <a:pPr>
+              <a:rPr sz="1100" i="0" b="0">
+                <a:solidFill>
+                  <a:srgbClr val="858585"/>
+                </a:solidFill>
+                <a:latin typeface="Consolas"/>
+              </a:rPr>
+              <a:t>10</a:t>
+            </a:r>
+          </a:p>
+          <a:p>
+            <a:pPr algn="r">
               <a:spcAft>
-                <a:spcPts val="278"/>
+                <a:spcPts val="235"/>
               </a:spcAft>
             </a:pPr>
             <a:r>
-              <a:rPr sz="1300" i="0" b="0">
-                <a:solidFill>
-                  <a:srgbClr val="D4D4D4"/>
-                </a:solidFill>
-                <a:latin typeface="Consolas"/>
-              </a:rPr>
-              <a:t>    +</a:t>
-            </a:r>
-            <a:r>
-              <a:rPr sz="1300" i="0" b="0">
-                <a:solidFill>
-                  <a:srgbClr val="DCDCAA"/>
-                </a:solidFill>
-                <a:latin typeface="Consolas"/>
-              </a:rPr>
-              <a:t>calcularEdad</a:t>
-            </a:r>
-            <a:r>
-              <a:rPr sz="1300" i="0" b="0">
-                <a:solidFill>
-                  <a:srgbClr val="D4D4D4"/>
-                </a:solidFill>
-                <a:latin typeface="Consolas"/>
-              </a:rPr>
-              <a:t>() </a:t>
-            </a:r>
-            <a:r>
-              <a:rPr sz="1300" i="0" b="0">
-                <a:solidFill>
-                  <a:srgbClr val="D4D4D4"/>
-                </a:solidFill>
-                <a:latin typeface="Consolas"/>
-              </a:rPr>
-              <a:t>int</a:t>
-            </a:r>
-          </a:p>
-          <a:p>
-            <a:pPr>
+              <a:rPr sz="1100" i="0" b="0">
+                <a:solidFill>
+                  <a:srgbClr val="858585"/>
+                </a:solidFill>
+                <a:latin typeface="Consolas"/>
+              </a:rPr>
+              <a:t>11</a:t>
+            </a:r>
+          </a:p>
+          <a:p>
+            <a:pPr algn="r">
               <a:spcAft>
-                <a:spcPts val="278"/>
+                <a:spcPts val="235"/>
               </a:spcAft>
             </a:pPr>
             <a:r>
-              <a:rPr sz="1300" i="0" b="0">
-                <a:solidFill>
-                  <a:srgbClr val="D4D4D4"/>
-                </a:solidFill>
-                <a:latin typeface="Consolas"/>
-              </a:rPr>
-              <a:t>  }</a:t>
-            </a:r>
-          </a:p>
-          <a:p>
-            <a:pPr>
+              <a:rPr sz="1100" i="0" b="0">
+                <a:solidFill>
+                  <a:srgbClr val="858585"/>
+                </a:solidFill>
+                <a:latin typeface="Consolas"/>
+              </a:rPr>
+              <a:t>12</a:t>
+            </a:r>
+          </a:p>
+          <a:p>
+            <a:pPr algn="r">
               <a:spcAft>
-                <a:spcPts val="278"/>
+                <a:spcPts val="235"/>
               </a:spcAft>
             </a:pPr>
             <a:r>
-              <a:rPr sz="1300" i="0" b="0">
-                <a:solidFill>
-                  <a:srgbClr val="D4D4D4"/>
-                </a:solidFill>
-                <a:latin typeface="Consolas"/>
-              </a:rPr>
-              <a:t>  </a:t>
-            </a:r>
-            <a:r>
-              <a:rPr sz="1300" i="0" b="0">
-                <a:solidFill>
-                  <a:srgbClr val="D4D4D4"/>
-                </a:solidFill>
-                <a:latin typeface="Consolas"/>
-              </a:rPr>
-              <a:t>class</a:t>
-            </a:r>
-            <a:r>
-              <a:rPr sz="1300" i="0" b="0">
-                <a:solidFill>
-                  <a:srgbClr val="D4D4D4"/>
-                </a:solidFill>
-                <a:latin typeface="Consolas"/>
-              </a:rPr>
-              <a:t> </a:t>
-            </a:r>
-            <a:r>
-              <a:rPr sz="1300" i="0" b="0">
-                <a:solidFill>
-                  <a:srgbClr val="4EC9B0"/>
-                </a:solidFill>
-                <a:latin typeface="Consolas"/>
-              </a:rPr>
-              <a:t>Veterinario</a:t>
-            </a:r>
-            <a:r>
-              <a:rPr sz="1300" i="0" b="0">
-                <a:solidFill>
-                  <a:srgbClr val="D4D4D4"/>
-                </a:solidFill>
-                <a:latin typeface="Consolas"/>
-              </a:rPr>
-              <a:t> {</a:t>
-            </a:r>
-          </a:p>
-          <a:p>
-            <a:pPr>
+              <a:rPr sz="1100" i="0" b="0">
+                <a:solidFill>
+                  <a:srgbClr val="858585"/>
+                </a:solidFill>
+                <a:latin typeface="Consolas"/>
+              </a:rPr>
+              <a:t>13</a:t>
+            </a:r>
+          </a:p>
+          <a:p>
+            <a:pPr algn="r">
               <a:spcAft>
-                <a:spcPts val="278"/>
+                <a:spcPts val="235"/>
               </a:spcAft>
             </a:pPr>
             <a:r>
-              <a:rPr sz="1300" i="0" b="0">
-                <a:solidFill>
-                  <a:srgbClr val="D4D4D4"/>
-                </a:solidFill>
-                <a:latin typeface="Consolas"/>
-              </a:rPr>
-              <a:t>    -</a:t>
-            </a:r>
-            <a:r>
-              <a:rPr sz="1300" i="0" b="0">
-                <a:solidFill>
-                  <a:srgbClr val="D4D4D4"/>
-                </a:solidFill>
-                <a:latin typeface="Consolas"/>
-              </a:rPr>
-              <a:t>tarjetaProfesional</a:t>
-            </a:r>
-            <a:r>
-              <a:rPr sz="1300" i="0" b="0">
-                <a:solidFill>
-                  <a:srgbClr val="D4D4D4"/>
-                </a:solidFill>
-                <a:latin typeface="Consolas"/>
-              </a:rPr>
-              <a:t>: </a:t>
-            </a:r>
-            <a:r>
-              <a:rPr sz="1300" i="0" b="0">
-                <a:solidFill>
-                  <a:srgbClr val="D4D4D4"/>
-                </a:solidFill>
-                <a:latin typeface="Consolas"/>
-              </a:rPr>
-              <a:t>String</a:t>
-            </a:r>
-          </a:p>
-          <a:p>
-            <a:pPr>
+              <a:rPr sz="1100" i="0" b="0">
+                <a:solidFill>
+                  <a:srgbClr val="858585"/>
+                </a:solidFill>
+                <a:latin typeface="Consolas"/>
+              </a:rPr>
+              <a:t>14</a:t>
+            </a:r>
+          </a:p>
+          <a:p>
+            <a:pPr algn="r">
               <a:spcAft>
-                <a:spcPts val="278"/>
+                <a:spcPts val="235"/>
               </a:spcAft>
             </a:pPr>
             <a:r>
-              <a:rPr sz="1300" i="0" b="0">
-                <a:solidFill>
-                  <a:srgbClr val="D4D4D4"/>
-                </a:solidFill>
-                <a:latin typeface="Consolas"/>
-              </a:rPr>
-              <a:t>    -</a:t>
-            </a:r>
-            <a:r>
-              <a:rPr sz="1300" i="0" b="0">
-                <a:solidFill>
-                  <a:srgbClr val="D4D4D4"/>
-                </a:solidFill>
-                <a:latin typeface="Consolas"/>
-              </a:rPr>
-              <a:t>especialidad</a:t>
-            </a:r>
-            <a:r>
-              <a:rPr sz="1300" i="0" b="0">
-                <a:solidFill>
-                  <a:srgbClr val="D4D4D4"/>
-                </a:solidFill>
-                <a:latin typeface="Consolas"/>
-              </a:rPr>
-              <a:t>: </a:t>
-            </a:r>
-            <a:r>
-              <a:rPr sz="1300" i="0" b="0">
-                <a:solidFill>
-                  <a:srgbClr val="D4D4D4"/>
-                </a:solidFill>
-                <a:latin typeface="Consolas"/>
-              </a:rPr>
-              <a:t>String</a:t>
-            </a:r>
-          </a:p>
-          <a:p>
-            <a:pPr>
+              <a:rPr sz="1100" i="0" b="0">
+                <a:solidFill>
+                  <a:srgbClr val="858585"/>
+                </a:solidFill>
+                <a:latin typeface="Consolas"/>
+              </a:rPr>
+              <a:t>15</a:t>
+            </a:r>
+          </a:p>
+          <a:p>
+            <a:pPr algn="r">
               <a:spcAft>
-                <a:spcPts val="278"/>
+                <a:spcPts val="235"/>
               </a:spcAft>
             </a:pPr>
             <a:r>
-              <a:rPr sz="1300" i="0" b="0">
-                <a:solidFill>
-                  <a:srgbClr val="D4D4D4"/>
-                </a:solidFill>
-                <a:latin typeface="Consolas"/>
-              </a:rPr>
-              <a:t>  }</a:t>
+              <a:rPr sz="1100" i="0" b="0">
+                <a:solidFill>
+                  <a:srgbClr val="858585"/>
+                </a:solidFill>
+                <a:latin typeface="Consolas"/>
+              </a:rPr>
+              <a:t>16</a:t>
+            </a:r>
+          </a:p>
+          <a:p>
+            <a:pPr algn="r">
+              <a:spcAft>
+                <a:spcPts val="235"/>
+              </a:spcAft>
+            </a:pPr>
+            <a:r>
+              <a:rPr sz="1100" i="0" b="0">
+                <a:solidFill>
+                  <a:srgbClr val="858585"/>
+                </a:solidFill>
+                <a:latin typeface="Consolas"/>
+              </a:rPr>
+              <a:t>17</a:t>
+            </a:r>
+          </a:p>
+          <a:p>
+            <a:pPr algn="r">
+              <a:spcAft>
+                <a:spcPts val="235"/>
+              </a:spcAft>
+            </a:pPr>
+            <a:r>
+              <a:rPr sz="1100" i="0" b="0">
+                <a:solidFill>
+                  <a:srgbClr val="858585"/>
+                </a:solidFill>
+                <a:latin typeface="Consolas"/>
+              </a:rPr>
+              <a:t>18</a:t>
+            </a:r>
+          </a:p>
+          <a:p>
+            <a:pPr algn="r">
+              <a:spcAft>
+                <a:spcPts val="235"/>
+              </a:spcAft>
+            </a:pPr>
+            <a:r>
+              <a:rPr sz="1100" i="0" b="0">
+                <a:solidFill>
+                  <a:srgbClr val="858585"/>
+                </a:solidFill>
+                <a:latin typeface="Consolas"/>
+              </a:rPr>
+              <a:t>19</a:t>
             </a:r>
           </a:p>
         </p:txBody>
@@ -12731,8 +12387,8 @@
         </p:nvSpPr>
         <p:spPr>
           <a:xfrm>
-            <a:off x="6713067" y="1719072"/>
-            <a:ext cx="4747107" cy="4133087"/>
+            <a:off x="1188720" y="1719072"/>
+            <a:ext cx="5986083" cy="4108792"/>
           </a:xfrm>
           <a:prstGeom prst="rect">
             <a:avLst/>
@@ -12747,81 +12403,63 @@
           <a:p>
             <a:pPr>
               <a:spcAft>
-                <a:spcPts val="278"/>
+                <a:spcPts val="235"/>
               </a:spcAft>
             </a:pPr>
             <a:r>
-              <a:rPr sz="1300" i="0" b="0">
-                <a:solidFill>
-                  <a:srgbClr val="D4D4D4"/>
-                </a:solidFill>
-                <a:latin typeface="Consolas"/>
-              </a:rPr>
-              <a:t>  </a:t>
-            </a:r>
-            <a:r>
-              <a:rPr sz="1300" i="0" b="0">
-                <a:solidFill>
-                  <a:srgbClr val="D4D4D4"/>
-                </a:solidFill>
-                <a:latin typeface="Consolas"/>
-              </a:rPr>
-              <a:t>class</a:t>
-            </a:r>
-            <a:r>
-              <a:rPr sz="1300" i="0" b="0">
-                <a:solidFill>
-                  <a:srgbClr val="D4D4D4"/>
-                </a:solidFill>
-                <a:latin typeface="Consolas"/>
-              </a:rPr>
-              <a:t> </a:t>
-            </a:r>
-            <a:r>
-              <a:rPr sz="1300" i="0" b="0">
-                <a:solidFill>
-                  <a:srgbClr val="4EC9B0"/>
-                </a:solidFill>
-                <a:latin typeface="Consolas"/>
-              </a:rPr>
-              <a:t>Cita</a:t>
-            </a:r>
-            <a:r>
-              <a:rPr sz="1300" i="0" b="0">
-                <a:solidFill>
-                  <a:srgbClr val="D4D4D4"/>
-                </a:solidFill>
-                <a:latin typeface="Consolas"/>
-              </a:rPr>
-              <a:t> {</a:t>
+              <a:rPr sz="1100" i="0" b="0">
+                <a:solidFill>
+                  <a:srgbClr val="D4D4D4"/>
+                </a:solidFill>
+                <a:latin typeface="Consolas"/>
+              </a:rPr>
+              <a:t>classDiagram</a:t>
             </a:r>
           </a:p>
           <a:p>
             <a:pPr>
               <a:spcAft>
-                <a:spcPts val="278"/>
+                <a:spcPts val="235"/>
               </a:spcAft>
             </a:pPr>
             <a:r>
-              <a:rPr sz="1300" i="0" b="0">
-                <a:solidFill>
-                  <a:srgbClr val="D4D4D4"/>
-                </a:solidFill>
-                <a:latin typeface="Consolas"/>
-              </a:rPr>
-              <a:t>    -</a:t>
-            </a:r>
-            <a:r>
-              <a:rPr sz="1300" i="0" b="0">
-                <a:solidFill>
-                  <a:srgbClr val="D4D4D4"/>
-                </a:solidFill>
-                <a:latin typeface="Consolas"/>
-              </a:rPr>
-              <a:t>fechaHora</a:t>
-            </a:r>
-            <a:r>
-              <a:rPr sz="1300" i="0" b="0">
+              <a:rPr sz="1100" i="0" b="0">
+                <a:solidFill>
+                  <a:srgbClr val="D4D4D4"/>
+                </a:solidFill>
+                <a:latin typeface="Consolas"/>
+              </a:rPr>
+              <a:t>  </a:t>
+            </a:r>
+            <a:r>
+              <a:rPr sz="1100" i="0" b="0">
+                <a:solidFill>
+                  <a:srgbClr val="D4D4D4"/>
+                </a:solidFill>
+                <a:latin typeface="Consolas"/>
+              </a:rPr>
+              <a:t>Dueno</a:t>
+            </a:r>
+            <a:r>
+              <a:rPr sz="1100" i="0" b="0">
+                <a:solidFill>
+                  <a:srgbClr val="D4D4D4"/>
+                </a:solidFill>
+                <a:latin typeface="Consolas"/>
+              </a:rPr>
+              <a:t> : -</a:t>
+            </a:r>
+            <a:r>
+              <a:rPr sz="1100" i="0" b="0">
+                <a:solidFill>
+                  <a:srgbClr val="D4D4D4"/>
+                </a:solidFill>
+                <a:latin typeface="Consolas"/>
+              </a:rPr>
+              <a:t>documento</a:t>
+            </a:r>
+            <a:r>
+              <a:rPr sz="1100" i="0" b="0">
                 <a:solidFill>
                   <a:srgbClr val="D4D4D4"/>
                 </a:solidFill>
@@ -12830,41 +12468,59 @@
               <a:t>: </a:t>
             </a:r>
             <a:r>
-              <a:rPr sz="1300" i="0" b="0">
-                <a:solidFill>
-                  <a:srgbClr val="D4D4D4"/>
-                </a:solidFill>
-                <a:latin typeface="Consolas"/>
-              </a:rPr>
-              <a:t>DateTime</a:t>
+              <a:rPr sz="1100" i="0" b="0">
+                <a:solidFill>
+                  <a:srgbClr val="D4D4D4"/>
+                </a:solidFill>
+                <a:latin typeface="Consolas"/>
+              </a:rPr>
+              <a:t>String</a:t>
             </a:r>
           </a:p>
           <a:p>
             <a:pPr>
               <a:spcAft>
-                <a:spcPts val="278"/>
+                <a:spcPts val="235"/>
               </a:spcAft>
             </a:pPr>
             <a:r>
-              <a:rPr sz="1300" i="0" b="0">
-                <a:solidFill>
-                  <a:srgbClr val="D4D4D4"/>
-                </a:solidFill>
-                <a:latin typeface="Consolas"/>
-              </a:rPr>
-              <a:t>    -</a:t>
-            </a:r>
-            <a:r>
-              <a:rPr sz="1300" i="0" b="0">
-                <a:solidFill>
-                  <a:srgbClr val="D4D4D4"/>
-                </a:solidFill>
-                <a:latin typeface="Consolas"/>
-              </a:rPr>
-              <a:t>estado</a:t>
-            </a:r>
-            <a:r>
-              <a:rPr sz="1300" i="0" b="0">
+              <a:rPr sz="1100" i="0" b="0">
+                <a:solidFill>
+                  <a:srgbClr val="D4D4D4"/>
+                </a:solidFill>
+                <a:latin typeface="Consolas"/>
+              </a:rPr>
+              <a:t>  </a:t>
+            </a:r>
+            <a:r>
+              <a:rPr sz="1100" i="0" b="0">
+                <a:solidFill>
+                  <a:srgbClr val="D4D4D4"/>
+                </a:solidFill>
+                <a:latin typeface="Consolas"/>
+              </a:rPr>
+              <a:t>Dueno</a:t>
+            </a:r>
+            <a:r>
+              <a:rPr sz="1100" i="0" b="0">
+                <a:solidFill>
+                  <a:srgbClr val="D4D4D4"/>
+                </a:solidFill>
+                <a:latin typeface="Consolas"/>
+              </a:rPr>
+              <a:t> : -</a:t>
+            </a:r>
+            <a:r>
+              <a:rPr sz="1100" i="0" b="0">
+                <a:solidFill>
+                  <a:srgbClr val="D4D4D4"/>
+                </a:solidFill>
+                <a:latin typeface="Consolas"/>
+              </a:rPr>
+              <a:t>nombre</a:t>
+            </a:r>
+            <a:r>
+              <a:rPr sz="1100" i="0" b="0">
                 <a:solidFill>
                   <a:srgbClr val="D4D4D4"/>
                 </a:solidFill>
@@ -12873,7 +12529,7 @@
               <a:t>: </a:t>
             </a:r>
             <a:r>
-              <a:rPr sz="1300" i="0" b="0">
+              <a:rPr sz="1100" i="0" b="0">
                 <a:solidFill>
                   <a:srgbClr val="D4D4D4"/>
                 </a:solidFill>
@@ -12885,29 +12541,47 @@
           <a:p>
             <a:pPr>
               <a:spcAft>
-                <a:spcPts val="278"/>
+                <a:spcPts val="235"/>
               </a:spcAft>
             </a:pPr>
             <a:r>
-              <a:rPr sz="1300" i="0" b="0">
-                <a:solidFill>
-                  <a:srgbClr val="D4D4D4"/>
-                </a:solidFill>
-                <a:latin typeface="Consolas"/>
-              </a:rPr>
-              <a:t>    +</a:t>
-            </a:r>
-            <a:r>
-              <a:rPr sz="1300" i="0" b="0">
+              <a:rPr sz="1100" i="0" b="0">
+                <a:solidFill>
+                  <a:srgbClr val="D4D4D4"/>
+                </a:solidFill>
+                <a:latin typeface="Consolas"/>
+              </a:rPr>
+              <a:t>  </a:t>
+            </a:r>
+            <a:r>
+              <a:rPr sz="1100" i="0" b="0">
+                <a:solidFill>
+                  <a:srgbClr val="D4D4D4"/>
+                </a:solidFill>
+                <a:latin typeface="Consolas"/>
+              </a:rPr>
+              <a:t>Dueno</a:t>
+            </a:r>
+            <a:r>
+              <a:rPr sz="1100" i="0" b="0">
+                <a:solidFill>
+                  <a:srgbClr val="D4D4D4"/>
+                </a:solidFill>
+                <a:latin typeface="Consolas"/>
+              </a:rPr>
+              <a:t> : +</a:t>
+            </a:r>
+            <a:r>
+              <a:rPr sz="1100" i="0" b="0">
                 <a:solidFill>
                   <a:srgbClr val="DCDCAA"/>
                 </a:solidFill>
                 <a:latin typeface="Consolas"/>
               </a:rPr>
-              <a:t>reprogramar</a:t>
-            </a:r>
-            <a:r>
-              <a:rPr sz="1300" i="0" b="0">
+              <a:t>registrarMascota</a:t>
+            </a:r>
+            <a:r>
+              <a:rPr sz="1100" i="0" b="0">
                 <a:solidFill>
                   <a:srgbClr val="D4D4D4"/>
                 </a:solidFill>
@@ -12916,16 +12590,16 @@
               <a:t>(</a:t>
             </a:r>
             <a:r>
-              <a:rPr sz="1300" i="0" b="0">
-                <a:solidFill>
-                  <a:srgbClr val="D4D4D4"/>
-                </a:solidFill>
-                <a:latin typeface="Consolas"/>
-              </a:rPr>
-              <a:t>nuevaFecha</a:t>
-            </a:r>
-            <a:r>
-              <a:rPr sz="1300" i="0" b="0">
+              <a:rPr sz="1100" i="0" b="0">
+                <a:solidFill>
+                  <a:srgbClr val="D4D4D4"/>
+                </a:solidFill>
+                <a:latin typeface="Consolas"/>
+              </a:rPr>
+              <a:t>m</a:t>
+            </a:r>
+            <a:r>
+              <a:rPr sz="1100" i="0" b="0">
                 <a:solidFill>
                   <a:srgbClr val="D4D4D4"/>
                 </a:solidFill>
@@ -12934,16 +12608,16 @@
               <a:t>: </a:t>
             </a:r>
             <a:r>
-              <a:rPr sz="1300" i="0" b="0">
-                <a:solidFill>
-                  <a:srgbClr val="D4D4D4"/>
-                </a:solidFill>
-                <a:latin typeface="Consolas"/>
-              </a:rPr>
-              <a:t>DateTime</a:t>
-            </a:r>
-            <a:r>
-              <a:rPr sz="1300" i="0" b="0">
+              <a:rPr sz="1100" i="0" b="0">
+                <a:solidFill>
+                  <a:srgbClr val="D4D4D4"/>
+                </a:solidFill>
+                <a:latin typeface="Consolas"/>
+              </a:rPr>
+              <a:t>Mascota</a:t>
+            </a:r>
+            <a:r>
+              <a:rPr sz="1100" i="0" b="0">
                 <a:solidFill>
                   <a:srgbClr val="D4D4D4"/>
                 </a:solidFill>
@@ -12952,7 +12626,7 @@
               <a:t>) </a:t>
             </a:r>
             <a:r>
-              <a:rPr sz="1300" i="0" b="0">
+              <a:rPr sz="1100" i="0" b="0">
                 <a:solidFill>
                   <a:srgbClr val="D4D4D4"/>
                 </a:solidFill>
@@ -12964,27 +12638,72 @@
           <a:p>
             <a:pPr>
               <a:spcAft>
-                <a:spcPts val="278"/>
+                <a:spcPts val="235"/>
               </a:spcAft>
             </a:pPr>
             <a:r>
-              <a:rPr sz="1300" i="0" b="0">
-                <a:solidFill>
-                  <a:srgbClr val="D4D4D4"/>
-                </a:solidFill>
-                <a:latin typeface="Consolas"/>
-              </a:rPr>
-              <a:t>  }</a:t>
+              <a:rPr sz="1100" i="0" b="0">
+                <a:solidFill>
+                  <a:srgbClr val="D4D4D4"/>
+                </a:solidFill>
+                <a:latin typeface="Consolas"/>
+              </a:rPr>
+              <a:t>  </a:t>
+            </a:r>
+            <a:r>
+              <a:rPr sz="1100" i="0" b="0">
+                <a:solidFill>
+                  <a:srgbClr val="D4D4D4"/>
+                </a:solidFill>
+                <a:latin typeface="Consolas"/>
+              </a:rPr>
+              <a:t>Mascota</a:t>
+            </a:r>
+            <a:r>
+              <a:rPr sz="1100" i="0" b="0">
+                <a:solidFill>
+                  <a:srgbClr val="D4D4D4"/>
+                </a:solidFill>
+                <a:latin typeface="Consolas"/>
+              </a:rPr>
+              <a:t> : -</a:t>
+            </a:r>
+            <a:r>
+              <a:rPr sz="1100" i="0" b="0">
+                <a:solidFill>
+                  <a:srgbClr val="D4D4D4"/>
+                </a:solidFill>
+                <a:latin typeface="Consolas"/>
+              </a:rPr>
+              <a:t>codigo</a:t>
+            </a:r>
+            <a:r>
+              <a:rPr sz="1100" i="0" b="0">
+                <a:solidFill>
+                  <a:srgbClr val="D4D4D4"/>
+                </a:solidFill>
+                <a:latin typeface="Consolas"/>
+              </a:rPr>
+              <a:t>: </a:t>
+            </a:r>
+            <a:r>
+              <a:rPr sz="1100" i="0" b="0">
+                <a:solidFill>
+                  <a:srgbClr val="D4D4D4"/>
+                </a:solidFill>
+                <a:latin typeface="Consolas"/>
+              </a:rPr>
+              <a:t>String</a:t>
             </a:r>
           </a:p>
           <a:p>
             <a:pPr>
               <a:spcAft>
-                <a:spcPts val="278"/>
+                <a:spcPts val="235"/>
               </a:spcAft>
             </a:pPr>
             <a:r>
-              <a:rPr sz="1300" i="0" b="0">
+              <a:rPr sz="1100" i="0" b="0">
                 <a:solidFill>
                   <a:srgbClr val="D4D4D4"/>
                 </a:solidFill>
@@ -12993,68 +12712,95 @@
               <a:t>  </a:t>
             </a:r>
             <a:r>
-              <a:rPr sz="1300" i="0" b="0">
-                <a:solidFill>
-                  <a:srgbClr val="D4D4D4"/>
-                </a:solidFill>
-                <a:latin typeface="Consolas"/>
-              </a:rPr>
-              <a:t>class</a:t>
-            </a:r>
-            <a:r>
-              <a:rPr sz="1300" i="0" b="0">
-                <a:solidFill>
-                  <a:srgbClr val="D4D4D4"/>
-                </a:solidFill>
-                <a:latin typeface="Consolas"/>
-              </a:rPr>
-              <a:t> </a:t>
-            </a:r>
-            <a:r>
-              <a:rPr sz="1300" i="0" b="0">
-                <a:solidFill>
-                  <a:srgbClr val="4EC9B0"/>
-                </a:solidFill>
-                <a:latin typeface="Consolas"/>
-              </a:rPr>
-              <a:t>Atencion</a:t>
-            </a:r>
-            <a:r>
-              <a:rPr sz="1300" i="0" b="0">
-                <a:solidFill>
-                  <a:srgbClr val="D4D4D4"/>
-                </a:solidFill>
-                <a:latin typeface="Consolas"/>
-              </a:rPr>
-              <a:t> {</a:t>
+              <a:rPr sz="1100" i="0" b="0">
+                <a:solidFill>
+                  <a:srgbClr val="D4D4D4"/>
+                </a:solidFill>
+                <a:latin typeface="Consolas"/>
+              </a:rPr>
+              <a:t>Mascota</a:t>
+            </a:r>
+            <a:r>
+              <a:rPr sz="1100" i="0" b="0">
+                <a:solidFill>
+                  <a:srgbClr val="D4D4D4"/>
+                </a:solidFill>
+                <a:latin typeface="Consolas"/>
+              </a:rPr>
+              <a:t> : -</a:t>
+            </a:r>
+            <a:r>
+              <a:rPr sz="1100" i="0" b="0">
+                <a:solidFill>
+                  <a:srgbClr val="D4D4D4"/>
+                </a:solidFill>
+                <a:latin typeface="Consolas"/>
+              </a:rPr>
+              <a:t>especie</a:t>
+            </a:r>
+            <a:r>
+              <a:rPr sz="1100" i="0" b="0">
+                <a:solidFill>
+                  <a:srgbClr val="D4D4D4"/>
+                </a:solidFill>
+                <a:latin typeface="Consolas"/>
+              </a:rPr>
+              <a:t>: </a:t>
+            </a:r>
+            <a:r>
+              <a:rPr sz="1100" i="0" b="0">
+                <a:solidFill>
+                  <a:srgbClr val="D4D4D4"/>
+                </a:solidFill>
+                <a:latin typeface="Consolas"/>
+              </a:rPr>
+              <a:t>String</a:t>
             </a:r>
           </a:p>
           <a:p>
             <a:pPr>
               <a:spcAft>
-                <a:spcPts val="278"/>
+                <a:spcPts val="235"/>
               </a:spcAft>
             </a:pPr>
             <a:r>
-              <a:rPr sz="1300" i="0" b="0">
-                <a:solidFill>
-                  <a:srgbClr val="D4D4D4"/>
-                </a:solidFill>
-                <a:latin typeface="Consolas"/>
-              </a:rPr>
-              <a:t>    -</a:t>
-            </a:r>
-            <a:r>
-              <a:rPr sz="1300" i="0" b="0">
-                <a:solidFill>
-                  <a:srgbClr val="D4D4D4"/>
-                </a:solidFill>
-                <a:latin typeface="Consolas"/>
-              </a:rPr>
-              <a:t>diagnostico</a:t>
-            </a:r>
-            <a:r>
-              <a:rPr sz="1300" i="0" b="0">
+              <a:rPr sz="1100" i="0" b="0">
+                <a:solidFill>
+                  <a:srgbClr val="D4D4D4"/>
+                </a:solidFill>
+                <a:latin typeface="Consolas"/>
+              </a:rPr>
+              <a:t>  </a:t>
+            </a:r>
+            <a:r>
+              <a:rPr sz="1100" i="0" b="0">
+                <a:solidFill>
+                  <a:srgbClr val="D4D4D4"/>
+                </a:solidFill>
+                <a:latin typeface="Consolas"/>
+              </a:rPr>
+              <a:t>Mascota</a:t>
+            </a:r>
+            <a:r>
+              <a:rPr sz="1100" i="0" b="0">
+                <a:solidFill>
+                  <a:srgbClr val="D4D4D4"/>
+                </a:solidFill>
+                <a:latin typeface="Consolas"/>
+              </a:rPr>
+              <a:t> : -</a:t>
+            </a:r>
+            <a:r>
+              <a:rPr sz="1100" i="0" b="0">
+                <a:solidFill>
+                  <a:srgbClr val="D4D4D4"/>
+                </a:solidFill>
+                <a:latin typeface="Consolas"/>
+              </a:rPr>
+              <a:t>fechaNacimiento</a:t>
+            </a:r>
+            <a:r>
+              <a:rPr sz="1100" i="0" b="0">
                 <a:solidFill>
                   <a:srgbClr val="D4D4D4"/>
                 </a:solidFill>
@@ -13063,82 +12809,145 @@
               <a:t>: </a:t>
             </a:r>
             <a:r>
-              <a:rPr sz="1300" i="0" b="0">
-                <a:solidFill>
-                  <a:srgbClr val="D4D4D4"/>
-                </a:solidFill>
-                <a:latin typeface="Consolas"/>
-              </a:rPr>
-              <a:t>String</a:t>
+              <a:rPr sz="1100" i="0" b="0">
+                <a:solidFill>
+                  <a:srgbClr val="D4D4D4"/>
+                </a:solidFill>
+                <a:latin typeface="Consolas"/>
+              </a:rPr>
+              <a:t>Date</a:t>
             </a:r>
           </a:p>
           <a:p>
             <a:pPr>
               <a:spcAft>
-                <a:spcPts val="278"/>
+                <a:spcPts val="235"/>
               </a:spcAft>
             </a:pPr>
             <a:r>
-              <a:rPr sz="1300" i="0" b="0">
-                <a:solidFill>
-                  <a:srgbClr val="D4D4D4"/>
-                </a:solidFill>
-                <a:latin typeface="Consolas"/>
-              </a:rPr>
-              <a:t>    -</a:t>
-            </a:r>
-            <a:r>
-              <a:rPr sz="1300" i="0" b="0">
-                <a:solidFill>
-                  <a:srgbClr val="D4D4D4"/>
-                </a:solidFill>
-                <a:latin typeface="Consolas"/>
-              </a:rPr>
-              <a:t>tratamiento</a:t>
-            </a:r>
-            <a:r>
-              <a:rPr sz="1300" i="0" b="0">
-                <a:solidFill>
-                  <a:srgbClr val="D4D4D4"/>
-                </a:solidFill>
-                <a:latin typeface="Consolas"/>
-              </a:rPr>
-              <a:t>: </a:t>
-            </a:r>
-            <a:r>
-              <a:rPr sz="1300" i="0" b="0">
-                <a:solidFill>
-                  <a:srgbClr val="D4D4D4"/>
-                </a:solidFill>
-                <a:latin typeface="Consolas"/>
-              </a:rPr>
-              <a:t>String</a:t>
+              <a:rPr sz="1100" i="0" b="0">
+                <a:solidFill>
+                  <a:srgbClr val="D4D4D4"/>
+                </a:solidFill>
+                <a:latin typeface="Consolas"/>
+              </a:rPr>
+              <a:t>  </a:t>
+            </a:r>
+            <a:r>
+              <a:rPr sz="1100" i="0" b="0">
+                <a:solidFill>
+                  <a:srgbClr val="D4D4D4"/>
+                </a:solidFill>
+                <a:latin typeface="Consolas"/>
+              </a:rPr>
+              <a:t>Mascota</a:t>
+            </a:r>
+            <a:r>
+              <a:rPr sz="1100" i="0" b="0">
+                <a:solidFill>
+                  <a:srgbClr val="D4D4D4"/>
+                </a:solidFill>
+                <a:latin typeface="Consolas"/>
+              </a:rPr>
+              <a:t> : +</a:t>
+            </a:r>
+            <a:r>
+              <a:rPr sz="1100" i="0" b="0">
+                <a:solidFill>
+                  <a:srgbClr val="DCDCAA"/>
+                </a:solidFill>
+                <a:latin typeface="Consolas"/>
+              </a:rPr>
+              <a:t>calcularEdad</a:t>
+            </a:r>
+            <a:r>
+              <a:rPr sz="1100" i="0" b="0">
+                <a:solidFill>
+                  <a:srgbClr val="D4D4D4"/>
+                </a:solidFill>
+                <a:latin typeface="Consolas"/>
+              </a:rPr>
+              <a:t>() </a:t>
+            </a:r>
+            <a:r>
+              <a:rPr sz="1100" i="0" b="0">
+                <a:solidFill>
+                  <a:srgbClr val="D4D4D4"/>
+                </a:solidFill>
+                <a:latin typeface="Consolas"/>
+              </a:rPr>
+              <a:t>int</a:t>
             </a:r>
           </a:p>
           <a:p>
             <a:pPr>
               <a:spcAft>
-                <a:spcPts val="278"/>
+                <a:spcPts val="235"/>
               </a:spcAft>
             </a:pPr>
             <a:r>
-              <a:rPr sz="1300" i="0" b="0">
-                <a:solidFill>
-                  <a:srgbClr val="D4D4D4"/>
-                </a:solidFill>
-                <a:latin typeface="Consolas"/>
-              </a:rPr>
-              <a:t>  }</a:t>
+              <a:rPr sz="1100" i="0" b="0">
+                <a:solidFill>
+                  <a:srgbClr val="D4D4D4"/>
+                </a:solidFill>
+                <a:latin typeface="Consolas"/>
+              </a:rPr>
+              <a:t>  </a:t>
+            </a:r>
+            <a:r>
+              <a:rPr sz="1100" i="0" b="0">
+                <a:solidFill>
+                  <a:srgbClr val="D4D4D4"/>
+                </a:solidFill>
+                <a:latin typeface="Consolas"/>
+              </a:rPr>
+              <a:t>Veterinario</a:t>
+            </a:r>
+            <a:r>
+              <a:rPr sz="1100" i="0" b="0">
+                <a:solidFill>
+                  <a:srgbClr val="D4D4D4"/>
+                </a:solidFill>
+                <a:latin typeface="Consolas"/>
+              </a:rPr>
+              <a:t> : -</a:t>
+            </a:r>
+            <a:r>
+              <a:rPr sz="1100" i="0" b="0">
+                <a:solidFill>
+                  <a:srgbClr val="D4D4D4"/>
+                </a:solidFill>
+                <a:latin typeface="Consolas"/>
+              </a:rPr>
+              <a:t>tarjetaProfesional</a:t>
+            </a:r>
+            <a:r>
+              <a:rPr sz="1100" i="0" b="0">
+                <a:solidFill>
+                  <a:srgbClr val="D4D4D4"/>
+                </a:solidFill>
+                <a:latin typeface="Consolas"/>
+              </a:rPr>
+              <a:t>: </a:t>
+            </a:r>
+            <a:r>
+              <a:rPr sz="1100" i="0" b="0">
+                <a:solidFill>
+                  <a:srgbClr val="D4D4D4"/>
+                </a:solidFill>
+                <a:latin typeface="Consolas"/>
+              </a:rPr>
+              <a:t>String</a:t>
             </a:r>
           </a:p>
           <a:p>
             <a:pPr>
               <a:spcAft>
-                <a:spcPts val="278"/>
+                <a:spcPts val="235"/>
               </a:spcAft>
             </a:pPr>
             <a:r>
-              <a:rPr sz="1300" i="0" b="0">
+              <a:rPr sz="1100" i="0" b="0">
                 <a:solidFill>
                   <a:srgbClr val="D4D4D4"/>
                 </a:solidFill>
@@ -13147,131 +12956,59 @@
               <a:t>  </a:t>
             </a:r>
             <a:r>
-              <a:rPr sz="1300" i="0" b="0">
-                <a:solidFill>
-                  <a:srgbClr val="D4D4D4"/>
-                </a:solidFill>
-                <a:latin typeface="Consolas"/>
-              </a:rPr>
-              <a:t>Dueno</a:t>
-            </a:r>
-            <a:r>
-              <a:rPr sz="1300" i="0" b="0">
-                <a:solidFill>
-                  <a:srgbClr val="D4D4D4"/>
-                </a:solidFill>
-                <a:latin typeface="Consolas"/>
-              </a:rPr>
-              <a:t> </a:t>
-            </a:r>
-            <a:r>
-              <a:rPr sz="1300" i="0" b="0">
-                <a:solidFill>
-                  <a:srgbClr val="CE9178"/>
-                </a:solidFill>
-                <a:latin typeface="Consolas"/>
-              </a:rPr>
-              <a:t>"1"</a:t>
-            </a:r>
-            <a:r>
-              <a:rPr sz="1300" i="0" b="0">
-                <a:solidFill>
-                  <a:srgbClr val="D4D4D4"/>
-                </a:solidFill>
-                <a:latin typeface="Consolas"/>
-              </a:rPr>
-              <a:t> --&gt; </a:t>
-            </a:r>
-            <a:r>
-              <a:rPr sz="1300" i="0" b="0">
-                <a:solidFill>
-                  <a:srgbClr val="CE9178"/>
-                </a:solidFill>
-                <a:latin typeface="Consolas"/>
-              </a:rPr>
-              <a:t>"0..*"</a:t>
-            </a:r>
-            <a:r>
-              <a:rPr sz="1300" i="0" b="0">
-                <a:solidFill>
-                  <a:srgbClr val="D4D4D4"/>
-                </a:solidFill>
-                <a:latin typeface="Consolas"/>
-              </a:rPr>
-              <a:t> </a:t>
-            </a:r>
-            <a:r>
-              <a:rPr sz="1300" i="0" b="0">
-                <a:solidFill>
-                  <a:srgbClr val="D4D4D4"/>
-                </a:solidFill>
-                <a:latin typeface="Consolas"/>
-              </a:rPr>
-              <a:t>Mascota</a:t>
-            </a:r>
-            <a:r>
-              <a:rPr sz="1300" i="0" b="0">
-                <a:solidFill>
-                  <a:srgbClr val="D4D4D4"/>
-                </a:solidFill>
-                <a:latin typeface="Consolas"/>
-              </a:rPr>
-              <a:t> : </a:t>
-            </a:r>
-            <a:r>
-              <a:rPr sz="1300" i="0" b="0">
-                <a:solidFill>
-                  <a:srgbClr val="D4D4D4"/>
-                </a:solidFill>
-                <a:latin typeface="Consolas"/>
-              </a:rPr>
-              <a:t>es</a:t>
-            </a:r>
-            <a:r>
-              <a:rPr sz="1300" i="0" b="0">
-                <a:solidFill>
-                  <a:srgbClr val="D4D4D4"/>
-                </a:solidFill>
-                <a:latin typeface="Consolas"/>
-              </a:rPr>
-              <a:t> </a:t>
-            </a:r>
-            <a:r>
-              <a:rPr sz="1300" i="0" b="0">
-                <a:solidFill>
-                  <a:srgbClr val="D4D4D4"/>
-                </a:solidFill>
-                <a:latin typeface="Consolas"/>
-              </a:rPr>
-              <a:t>dueno</a:t>
-            </a:r>
-            <a:r>
-              <a:rPr sz="1300" i="0" b="0">
-                <a:solidFill>
-                  <a:srgbClr val="D4D4D4"/>
-                </a:solidFill>
-                <a:latin typeface="Consolas"/>
-              </a:rPr>
-              <a:t> </a:t>
-            </a:r>
-            <a:r>
-              <a:rPr sz="1300" i="0" b="0">
-                <a:solidFill>
-                  <a:srgbClr val="D4D4D4"/>
-                </a:solidFill>
-                <a:latin typeface="Consolas"/>
-              </a:rPr>
-              <a:t>de</a:t>
+              <a:rPr sz="1100" i="0" b="0">
+                <a:solidFill>
+                  <a:srgbClr val="D4D4D4"/>
+                </a:solidFill>
+                <a:latin typeface="Consolas"/>
+              </a:rPr>
+              <a:t>Veterinario</a:t>
+            </a:r>
+            <a:r>
+              <a:rPr sz="1100" i="0" b="0">
+                <a:solidFill>
+                  <a:srgbClr val="D4D4D4"/>
+                </a:solidFill>
+                <a:latin typeface="Consolas"/>
+              </a:rPr>
+              <a:t> : -</a:t>
+            </a:r>
+            <a:r>
+              <a:rPr sz="1100" i="0" b="0">
+                <a:solidFill>
+                  <a:srgbClr val="D4D4D4"/>
+                </a:solidFill>
+                <a:latin typeface="Consolas"/>
+              </a:rPr>
+              <a:t>especialidad</a:t>
+            </a:r>
+            <a:r>
+              <a:rPr sz="1100" i="0" b="0">
+                <a:solidFill>
+                  <a:srgbClr val="D4D4D4"/>
+                </a:solidFill>
+                <a:latin typeface="Consolas"/>
+              </a:rPr>
+              <a:t>: </a:t>
+            </a:r>
+            <a:r>
+              <a:rPr sz="1100" i="0" b="0">
+                <a:solidFill>
+                  <a:srgbClr val="D4D4D4"/>
+                </a:solidFill>
+                <a:latin typeface="Consolas"/>
+              </a:rPr>
+              <a:t>String</a:t>
             </a:r>
           </a:p>
           <a:p>
             <a:pPr>
               <a:spcAft>
-                <a:spcPts val="278"/>
+                <a:spcPts val="235"/>
               </a:spcAft>
             </a:pPr>
             <a:r>
-              <a:rPr sz="1300" i="0" b="0">
+              <a:rPr sz="1100" i="0" b="0">
                 <a:solidFill>
                   <a:srgbClr val="D4D4D4"/>
                 </a:solidFill>
@@ -13280,61 +13017,7 @@
               <a:t>  </a:t>
             </a:r>
             <a:r>
-              <a:rPr sz="1300" i="0" b="0">
-                <a:solidFill>
-                  <a:srgbClr val="D4D4D4"/>
-                </a:solidFill>
-                <a:latin typeface="Consolas"/>
-              </a:rPr>
-              <a:t>Mascota</a:t>
-            </a:r>
-            <a:r>
-              <a:rPr sz="1300" i="0" b="0">
-                <a:solidFill>
-                  <a:srgbClr val="D4D4D4"/>
-                </a:solidFill>
-                <a:latin typeface="Consolas"/>
-              </a:rPr>
-              <a:t> </a:t>
-            </a:r>
-            <a:r>
-              <a:rPr sz="1300" i="0" b="0">
-                <a:solidFill>
-                  <a:srgbClr val="CE9178"/>
-                </a:solidFill>
-                <a:latin typeface="Consolas"/>
-              </a:rPr>
-              <a:t>"1"</a:t>
-            </a:r>
-            <a:r>
-              <a:rPr sz="1300" i="0" b="0">
-                <a:solidFill>
-                  <a:srgbClr val="D4D4D4"/>
-                </a:solidFill>
-                <a:latin typeface="Consolas"/>
-              </a:rPr>
-              <a:t> --&gt; </a:t>
-            </a:r>
-            <a:r>
-              <a:rPr sz="1300" i="0" b="0">
-                <a:solidFill>
-                  <a:srgbClr val="CE9178"/>
-                </a:solidFill>
-                <a:latin typeface="Consolas"/>
-              </a:rPr>
-              <a:t>"0..*"</a:t>
-            </a:r>
-            <a:r>
-              <a:rPr sz="1300" i="0" b="0">
-                <a:solidFill>
-                  <a:srgbClr val="D4D4D4"/>
-                </a:solidFill>
-                <a:latin typeface="Consolas"/>
-              </a:rPr>
-              <a:t> </a:t>
-            </a:r>
-            <a:r>
-              <a:rPr sz="1300" i="0" b="0">
+              <a:rPr sz="1100" i="0" b="0">
                 <a:solidFill>
                   <a:srgbClr val="D4D4D4"/>
                 </a:solidFill>
@@ -13343,50 +13026,50 @@
               <a:t>Cita</a:t>
             </a:r>
             <a:r>
-              <a:rPr sz="1300" i="0" b="0">
-                <a:solidFill>
-                  <a:srgbClr val="D4D4D4"/>
-                </a:solidFill>
-                <a:latin typeface="Consolas"/>
-              </a:rPr>
-              <a:t> : </a:t>
-            </a:r>
-            <a:r>
-              <a:rPr sz="1300" i="0" b="0">
-                <a:solidFill>
-                  <a:srgbClr val="D4D4D4"/>
-                </a:solidFill>
-                <a:latin typeface="Consolas"/>
-              </a:rPr>
-              <a:t>tiene</a:t>
-            </a:r>
-            <a:r>
-              <a:rPr sz="1300" i="0" b="0">
-                <a:solidFill>
-                  <a:srgbClr val="D4D4D4"/>
-                </a:solidFill>
-                <a:latin typeface="Consolas"/>
-              </a:rPr>
-              <a:t> </a:t>
-            </a:r>
-            <a:r>
-              <a:rPr sz="1300" i="0" b="0">
-                <a:solidFill>
-                  <a:srgbClr val="D4D4D4"/>
-                </a:solidFill>
-                <a:latin typeface="Consolas"/>
-              </a:rPr>
-              <a:t>agendada</a:t>
+              <a:rPr sz="1100" i="0" b="0">
+                <a:solidFill>
+                  <a:srgbClr val="D4D4D4"/>
+                </a:solidFill>
+                <a:latin typeface="Consolas"/>
+              </a:rPr>
+              <a:t> : -</a:t>
+            </a:r>
+            <a:r>
+              <a:rPr sz="1100" i="0" b="0">
+                <a:solidFill>
+                  <a:srgbClr val="D4D4D4"/>
+                </a:solidFill>
+                <a:latin typeface="Consolas"/>
+              </a:rPr>
+              <a:t>fechaHora</a:t>
+            </a:r>
+            <a:r>
+              <a:rPr sz="1100" i="0" b="0">
+                <a:solidFill>
+                  <a:srgbClr val="D4D4D4"/>
+                </a:solidFill>
+                <a:latin typeface="Consolas"/>
+              </a:rPr>
+              <a:t>: </a:t>
+            </a:r>
+            <a:r>
+              <a:rPr sz="1100" i="0" b="0">
+                <a:solidFill>
+                  <a:srgbClr val="D4D4D4"/>
+                </a:solidFill>
+                <a:latin typeface="Consolas"/>
+              </a:rPr>
+              <a:t>DateTime</a:t>
             </a:r>
           </a:p>
           <a:p>
             <a:pPr>
               <a:spcAft>
-                <a:spcPts val="278"/>
+                <a:spcPts val="235"/>
               </a:spcAft>
             </a:pPr>
             <a:r>
-              <a:rPr sz="1300" i="0" b="0">
+              <a:rPr sz="1100" i="0" b="0">
                 <a:solidFill>
                   <a:srgbClr val="D4D4D4"/>
                 </a:solidFill>
@@ -13395,61 +13078,7 @@
               <a:t>  </a:t>
             </a:r>
             <a:r>
-              <a:rPr sz="1300" i="0" b="0">
-                <a:solidFill>
-                  <a:srgbClr val="D4D4D4"/>
-                </a:solidFill>
-                <a:latin typeface="Consolas"/>
-              </a:rPr>
-              <a:t>Veterinario</a:t>
-            </a:r>
-            <a:r>
-              <a:rPr sz="1300" i="0" b="0">
-                <a:solidFill>
-                  <a:srgbClr val="D4D4D4"/>
-                </a:solidFill>
-                <a:latin typeface="Consolas"/>
-              </a:rPr>
-              <a:t> </a:t>
-            </a:r>
-            <a:r>
-              <a:rPr sz="1300" i="0" b="0">
-                <a:solidFill>
-                  <a:srgbClr val="CE9178"/>
-                </a:solidFill>
-                <a:latin typeface="Consolas"/>
-              </a:rPr>
-              <a:t>"1"</a:t>
-            </a:r>
-            <a:r>
-              <a:rPr sz="1300" i="0" b="0">
-                <a:solidFill>
-                  <a:srgbClr val="D4D4D4"/>
-                </a:solidFill>
-                <a:latin typeface="Consolas"/>
-              </a:rPr>
-              <a:t> --&gt; </a:t>
-            </a:r>
-            <a:r>
-              <a:rPr sz="1300" i="0" b="0">
-                <a:solidFill>
-                  <a:srgbClr val="CE9178"/>
-                </a:solidFill>
-                <a:latin typeface="Consolas"/>
-              </a:rPr>
-              <a:t>"0..*"</a:t>
-            </a:r>
-            <a:r>
-              <a:rPr sz="1300" i="0" b="0">
-                <a:solidFill>
-                  <a:srgbClr val="D4D4D4"/>
-                </a:solidFill>
-                <a:latin typeface="Consolas"/>
-              </a:rPr>
-              <a:t> </a:t>
-            </a:r>
-            <a:r>
-              <a:rPr sz="1300" i="0" b="0">
+              <a:rPr sz="1100" i="0" b="0">
                 <a:solidFill>
                   <a:srgbClr val="D4D4D4"/>
                 </a:solidFill>
@@ -13458,32 +13087,50 @@
               <a:t>Cita</a:t>
             </a:r>
             <a:r>
-              <a:rPr sz="1300" i="0" b="0">
-                <a:solidFill>
-                  <a:srgbClr val="D4D4D4"/>
-                </a:solidFill>
-                <a:latin typeface="Consolas"/>
-              </a:rPr>
-              <a:t> : </a:t>
-            </a:r>
-            <a:r>
-              <a:rPr sz="1300" i="0" b="0">
-                <a:solidFill>
-                  <a:srgbClr val="D4D4D4"/>
-                </a:solidFill>
-                <a:latin typeface="Consolas"/>
-              </a:rPr>
-              <a:t>atiende</a:t>
+              <a:rPr sz="1100" i="0" b="0">
+                <a:solidFill>
+                  <a:srgbClr val="D4D4D4"/>
+                </a:solidFill>
+                <a:latin typeface="Consolas"/>
+              </a:rPr>
+              <a:t> : -</a:t>
+            </a:r>
+            <a:r>
+              <a:rPr sz="1100" i="0" b="0">
+                <a:solidFill>
+                  <a:srgbClr val="D4D4D4"/>
+                </a:solidFill>
+                <a:latin typeface="Consolas"/>
+              </a:rPr>
+              <a:t>estado</a:t>
+            </a:r>
+            <a:r>
+              <a:rPr sz="1100" i="0" b="0">
+                <a:solidFill>
+                  <a:srgbClr val="D4D4D4"/>
+                </a:solidFill>
+                <a:latin typeface="Consolas"/>
+              </a:rPr>
+              <a:t>: </a:t>
+            </a:r>
+            <a:r>
+              <a:rPr sz="1100" i="0" b="0">
+                <a:solidFill>
+                  <a:srgbClr val="D4D4D4"/>
+                </a:solidFill>
+                <a:latin typeface="Consolas"/>
+              </a:rPr>
+              <a:t>String</a:t>
             </a:r>
           </a:p>
           <a:p>
             <a:pPr>
               <a:spcAft>
-                <a:spcPts val="278"/>
+                <a:spcPts val="235"/>
               </a:spcAft>
             </a:pPr>
             <a:r>
-              <a:rPr sz="1300" i="0" b="0">
+              <a:rPr sz="1100" i="0" b="0">
                 <a:solidFill>
                   <a:srgbClr val="D4D4D4"/>
                 </a:solidFill>
@@ -13492,7 +13139,7 @@
               <a:t>  </a:t>
             </a:r>
             <a:r>
-              <a:rPr sz="1300" i="0" b="0">
+              <a:rPr sz="1100" i="0" b="0">
                 <a:solidFill>
                   <a:srgbClr val="D4D4D4"/>
                 </a:solidFill>
@@ -13501,122 +13148,723 @@
               <a:t>Cita</a:t>
             </a:r>
             <a:r>
-              <a:rPr sz="1300" i="0" b="0">
-                <a:solidFill>
-                  <a:srgbClr val="D4D4D4"/>
-                </a:solidFill>
-                <a:latin typeface="Consolas"/>
-              </a:rPr>
-              <a:t> </a:t>
-            </a:r>
-            <a:r>
-              <a:rPr sz="1300" i="0" b="0">
-                <a:solidFill>
-                  <a:srgbClr val="CE9178"/>
-                </a:solidFill>
-                <a:latin typeface="Consolas"/>
-              </a:rPr>
-              <a:t>"1"</a:t>
-            </a:r>
-            <a:r>
-              <a:rPr sz="1300" i="0" b="0">
-                <a:solidFill>
-                  <a:srgbClr val="D4D4D4"/>
-                </a:solidFill>
-                <a:latin typeface="Consolas"/>
-              </a:rPr>
-              <a:t> --&gt; </a:t>
-            </a:r>
-            <a:r>
-              <a:rPr sz="1300" i="0" b="0">
-                <a:solidFill>
-                  <a:srgbClr val="CE9178"/>
-                </a:solidFill>
-                <a:latin typeface="Consolas"/>
-              </a:rPr>
-              <a:t>"0..1"</a:t>
-            </a:r>
-            <a:r>
-              <a:rPr sz="1300" i="0" b="0">
-                <a:solidFill>
-                  <a:srgbClr val="D4D4D4"/>
-                </a:solidFill>
-                <a:latin typeface="Consolas"/>
-              </a:rPr>
-              <a:t> </a:t>
-            </a:r>
-            <a:r>
-              <a:rPr sz="1300" i="0" b="0">
-                <a:solidFill>
-                  <a:srgbClr val="D4D4D4"/>
-                </a:solidFill>
-                <a:latin typeface="Consolas"/>
-              </a:rPr>
-              <a:t>Atencion</a:t>
-            </a:r>
-            <a:r>
-              <a:rPr sz="1300" i="0" b="0">
-                <a:solidFill>
-                  <a:srgbClr val="D4D4D4"/>
-                </a:solidFill>
-                <a:latin typeface="Consolas"/>
-              </a:rPr>
-              <a:t> : </a:t>
-            </a:r>
-            <a:r>
-              <a:rPr sz="1300" i="0" b="0">
-                <a:solidFill>
-                  <a:srgbClr val="D4D4D4"/>
-                </a:solidFill>
-                <a:latin typeface="Consolas"/>
-              </a:rPr>
-              <a:t>genera</a:t>
+              <a:rPr sz="1100" i="0" b="0">
+                <a:solidFill>
+                  <a:srgbClr val="D4D4D4"/>
+                </a:solidFill>
+                <a:latin typeface="Consolas"/>
+              </a:rPr>
+              <a:t> : +</a:t>
+            </a:r>
+            <a:r>
+              <a:rPr sz="1100" i="0" b="0">
+                <a:solidFill>
+                  <a:srgbClr val="DCDCAA"/>
+                </a:solidFill>
+                <a:latin typeface="Consolas"/>
+              </a:rPr>
+              <a:t>reprogramar</a:t>
+            </a:r>
+            <a:r>
+              <a:rPr sz="1100" i="0" b="0">
+                <a:solidFill>
+                  <a:srgbClr val="D4D4D4"/>
+                </a:solidFill>
+                <a:latin typeface="Consolas"/>
+              </a:rPr>
+              <a:t>(</a:t>
+            </a:r>
+            <a:r>
+              <a:rPr sz="1100" i="0" b="0">
+                <a:solidFill>
+                  <a:srgbClr val="D4D4D4"/>
+                </a:solidFill>
+                <a:latin typeface="Consolas"/>
+              </a:rPr>
+              <a:t>nuevaFecha</a:t>
+            </a:r>
+            <a:r>
+              <a:rPr sz="1100" i="0" b="0">
+                <a:solidFill>
+                  <a:srgbClr val="D4D4D4"/>
+                </a:solidFill>
+                <a:latin typeface="Consolas"/>
+              </a:rPr>
+              <a:t>: </a:t>
+            </a:r>
+            <a:r>
+              <a:rPr sz="1100" i="0" b="0">
+                <a:solidFill>
+                  <a:srgbClr val="D4D4D4"/>
+                </a:solidFill>
+                <a:latin typeface="Consolas"/>
+              </a:rPr>
+              <a:t>DateTime</a:t>
+            </a:r>
+            <a:r>
+              <a:rPr sz="1100" i="0" b="0">
+                <a:solidFill>
+                  <a:srgbClr val="D4D4D4"/>
+                </a:solidFill>
+                <a:latin typeface="Consolas"/>
+              </a:rPr>
+              <a:t>) </a:t>
+            </a:r>
+            <a:r>
+              <a:rPr sz="1100" i="0" b="0">
+                <a:solidFill>
+                  <a:srgbClr val="D4D4D4"/>
+                </a:solidFill>
+                <a:latin typeface="Consolas"/>
+              </a:rPr>
+              <a:t>void</a:t>
             </a:r>
           </a:p>
           <a:p>
             <a:pPr>
               <a:spcAft>
-                <a:spcPts val="278"/>
+                <a:spcPts val="235"/>
               </a:spcAft>
             </a:pPr>
             <a:r>
-              <a:rPr sz="1300" i="1" b="0">
-                <a:solidFill>
-                  <a:srgbClr val="6A9955"/>
-                </a:solidFill>
-                <a:latin typeface="Consolas"/>
-              </a:rPr>
-              <a:t>%% En Mermaid el retorno va tras el parentesis y sin dos puntos:</a:t>
+              <a:rPr sz="1100" i="0" b="0">
+                <a:solidFill>
+                  <a:srgbClr val="D4D4D4"/>
+                </a:solidFill>
+                <a:latin typeface="Consolas"/>
+              </a:rPr>
+              <a:t>  </a:t>
+            </a:r>
+            <a:r>
+              <a:rPr sz="1100" i="0" b="0">
+                <a:solidFill>
+                  <a:srgbClr val="D4D4D4"/>
+                </a:solidFill>
+                <a:latin typeface="Consolas"/>
+              </a:rPr>
+              <a:t>Atencion</a:t>
+            </a:r>
+            <a:r>
+              <a:rPr sz="1100" i="0" b="0">
+                <a:solidFill>
+                  <a:srgbClr val="D4D4D4"/>
+                </a:solidFill>
+                <a:latin typeface="Consolas"/>
+              </a:rPr>
+              <a:t> : -</a:t>
+            </a:r>
+            <a:r>
+              <a:rPr sz="1100" i="0" b="0">
+                <a:solidFill>
+                  <a:srgbClr val="D4D4D4"/>
+                </a:solidFill>
+                <a:latin typeface="Consolas"/>
+              </a:rPr>
+              <a:t>diagnostico</a:t>
+            </a:r>
+            <a:r>
+              <a:rPr sz="1100" i="0" b="0">
+                <a:solidFill>
+                  <a:srgbClr val="D4D4D4"/>
+                </a:solidFill>
+                <a:latin typeface="Consolas"/>
+              </a:rPr>
+              <a:t>: </a:t>
+            </a:r>
+            <a:r>
+              <a:rPr sz="1100" i="0" b="0">
+                <a:solidFill>
+                  <a:srgbClr val="D4D4D4"/>
+                </a:solidFill>
+                <a:latin typeface="Consolas"/>
+              </a:rPr>
+              <a:t>String</a:t>
             </a:r>
           </a:p>
           <a:p>
             <a:pPr>
               <a:spcAft>
-                <a:spcPts val="278"/>
+                <a:spcPts val="235"/>
               </a:spcAft>
             </a:pPr>
             <a:r>
-              <a:rPr sz="1300" i="1" b="0">
-                <a:solidFill>
-                  <a:srgbClr val="6A9955"/>
-                </a:solidFill>
-                <a:latin typeface="Consolas"/>
-              </a:rPr>
-              <a:t>%% +calcularEdad() int  se dibuja como el UML  +calcularEdad(): int</a:t>
-            </a:r>
-          </a:p>
-        </p:txBody>
-      </p:sp>
-      <p:sp>
-        <p:nvSpPr>
-          <p:cNvPr id="13" name="TextBox 12"/>
+              <a:rPr sz="1100" i="0" b="0">
+                <a:solidFill>
+                  <a:srgbClr val="D4D4D4"/>
+                </a:solidFill>
+                <a:latin typeface="Consolas"/>
+              </a:rPr>
+              <a:t>  </a:t>
+            </a:r>
+            <a:r>
+              <a:rPr sz="1100" i="0" b="0">
+                <a:solidFill>
+                  <a:srgbClr val="D4D4D4"/>
+                </a:solidFill>
+                <a:latin typeface="Consolas"/>
+              </a:rPr>
+              <a:t>Atencion</a:t>
+            </a:r>
+            <a:r>
+              <a:rPr sz="1100" i="0" b="0">
+                <a:solidFill>
+                  <a:srgbClr val="D4D4D4"/>
+                </a:solidFill>
+                <a:latin typeface="Consolas"/>
+              </a:rPr>
+              <a:t> : -</a:t>
+            </a:r>
+            <a:r>
+              <a:rPr sz="1100" i="0" b="0">
+                <a:solidFill>
+                  <a:srgbClr val="D4D4D4"/>
+                </a:solidFill>
+                <a:latin typeface="Consolas"/>
+              </a:rPr>
+              <a:t>tratamiento</a:t>
+            </a:r>
+            <a:r>
+              <a:rPr sz="1100" i="0" b="0">
+                <a:solidFill>
+                  <a:srgbClr val="D4D4D4"/>
+                </a:solidFill>
+                <a:latin typeface="Consolas"/>
+              </a:rPr>
+              <a:t>: </a:t>
+            </a:r>
+            <a:r>
+              <a:rPr sz="1100" i="0" b="0">
+                <a:solidFill>
+                  <a:srgbClr val="D4D4D4"/>
+                </a:solidFill>
+                <a:latin typeface="Consolas"/>
+              </a:rPr>
+              <a:t>String</a:t>
+            </a:r>
+          </a:p>
+          <a:p>
+            <a:pPr>
+              <a:spcAft>
+                <a:spcPts val="235"/>
+              </a:spcAft>
+            </a:pPr>
+            <a:r>
+              <a:rPr sz="1100" i="0" b="0">
+                <a:solidFill>
+                  <a:srgbClr val="D4D4D4"/>
+                </a:solidFill>
+                <a:latin typeface="Consolas"/>
+              </a:rPr>
+              <a:t>  </a:t>
+            </a:r>
+            <a:r>
+              <a:rPr sz="1100" i="0" b="0">
+                <a:solidFill>
+                  <a:srgbClr val="D4D4D4"/>
+                </a:solidFill>
+                <a:latin typeface="Consolas"/>
+              </a:rPr>
+              <a:t>Dueno</a:t>
+            </a:r>
+            <a:r>
+              <a:rPr sz="1100" i="0" b="0">
+                <a:solidFill>
+                  <a:srgbClr val="D4D4D4"/>
+                </a:solidFill>
+                <a:latin typeface="Consolas"/>
+              </a:rPr>
+              <a:t> </a:t>
+            </a:r>
+            <a:r>
+              <a:rPr sz="1100" i="0" b="0">
+                <a:solidFill>
+                  <a:srgbClr val="CE9178"/>
+                </a:solidFill>
+                <a:latin typeface="Consolas"/>
+              </a:rPr>
+              <a:t>"1"</a:t>
+            </a:r>
+            <a:r>
+              <a:rPr sz="1100" i="0" b="0">
+                <a:solidFill>
+                  <a:srgbClr val="D4D4D4"/>
+                </a:solidFill>
+                <a:latin typeface="Consolas"/>
+              </a:rPr>
+              <a:t> --&gt; </a:t>
+            </a:r>
+            <a:r>
+              <a:rPr sz="1100" i="0" b="0">
+                <a:solidFill>
+                  <a:srgbClr val="CE9178"/>
+                </a:solidFill>
+                <a:latin typeface="Consolas"/>
+              </a:rPr>
+              <a:t>"0..*"</a:t>
+            </a:r>
+            <a:r>
+              <a:rPr sz="1100" i="0" b="0">
+                <a:solidFill>
+                  <a:srgbClr val="D4D4D4"/>
+                </a:solidFill>
+                <a:latin typeface="Consolas"/>
+              </a:rPr>
+              <a:t> </a:t>
+            </a:r>
+            <a:r>
+              <a:rPr sz="1100" i="0" b="0">
+                <a:solidFill>
+                  <a:srgbClr val="D4D4D4"/>
+                </a:solidFill>
+                <a:latin typeface="Consolas"/>
+              </a:rPr>
+              <a:t>Mascota</a:t>
+            </a:r>
+            <a:r>
+              <a:rPr sz="1100" i="0" b="0">
+                <a:solidFill>
+                  <a:srgbClr val="D4D4D4"/>
+                </a:solidFill>
+                <a:latin typeface="Consolas"/>
+              </a:rPr>
+              <a:t> : </a:t>
+            </a:r>
+            <a:r>
+              <a:rPr sz="1100" i="0" b="0">
+                <a:solidFill>
+                  <a:srgbClr val="D4D4D4"/>
+                </a:solidFill>
+                <a:latin typeface="Consolas"/>
+              </a:rPr>
+              <a:t>es</a:t>
+            </a:r>
+            <a:r>
+              <a:rPr sz="1100" i="0" b="0">
+                <a:solidFill>
+                  <a:srgbClr val="D4D4D4"/>
+                </a:solidFill>
+                <a:latin typeface="Consolas"/>
+              </a:rPr>
+              <a:t> </a:t>
+            </a:r>
+            <a:r>
+              <a:rPr sz="1100" i="0" b="0">
+                <a:solidFill>
+                  <a:srgbClr val="D4D4D4"/>
+                </a:solidFill>
+                <a:latin typeface="Consolas"/>
+              </a:rPr>
+              <a:t>dueno</a:t>
+            </a:r>
+            <a:r>
+              <a:rPr sz="1100" i="0" b="0">
+                <a:solidFill>
+                  <a:srgbClr val="D4D4D4"/>
+                </a:solidFill>
+                <a:latin typeface="Consolas"/>
+              </a:rPr>
+              <a:t> </a:t>
+            </a:r>
+            <a:r>
+              <a:rPr sz="1100" i="0" b="0">
+                <a:solidFill>
+                  <a:srgbClr val="D4D4D4"/>
+                </a:solidFill>
+                <a:latin typeface="Consolas"/>
+              </a:rPr>
+              <a:t>de</a:t>
+            </a:r>
+          </a:p>
+          <a:p>
+            <a:pPr>
+              <a:spcAft>
+                <a:spcPts val="235"/>
+              </a:spcAft>
+            </a:pPr>
+            <a:r>
+              <a:rPr sz="1100" i="0" b="0">
+                <a:solidFill>
+                  <a:srgbClr val="D4D4D4"/>
+                </a:solidFill>
+                <a:latin typeface="Consolas"/>
+              </a:rPr>
+              <a:t>  </a:t>
+            </a:r>
+            <a:r>
+              <a:rPr sz="1100" i="0" b="0">
+                <a:solidFill>
+                  <a:srgbClr val="D4D4D4"/>
+                </a:solidFill>
+                <a:latin typeface="Consolas"/>
+              </a:rPr>
+              <a:t>Mascota</a:t>
+            </a:r>
+            <a:r>
+              <a:rPr sz="1100" i="0" b="0">
+                <a:solidFill>
+                  <a:srgbClr val="D4D4D4"/>
+                </a:solidFill>
+                <a:latin typeface="Consolas"/>
+              </a:rPr>
+              <a:t> </a:t>
+            </a:r>
+            <a:r>
+              <a:rPr sz="1100" i="0" b="0">
+                <a:solidFill>
+                  <a:srgbClr val="CE9178"/>
+                </a:solidFill>
+                <a:latin typeface="Consolas"/>
+              </a:rPr>
+              <a:t>"1"</a:t>
+            </a:r>
+            <a:r>
+              <a:rPr sz="1100" i="0" b="0">
+                <a:solidFill>
+                  <a:srgbClr val="D4D4D4"/>
+                </a:solidFill>
+                <a:latin typeface="Consolas"/>
+              </a:rPr>
+              <a:t> --&gt; </a:t>
+            </a:r>
+            <a:r>
+              <a:rPr sz="1100" i="0" b="0">
+                <a:solidFill>
+                  <a:srgbClr val="CE9178"/>
+                </a:solidFill>
+                <a:latin typeface="Consolas"/>
+              </a:rPr>
+              <a:t>"0..*"</a:t>
+            </a:r>
+            <a:r>
+              <a:rPr sz="1100" i="0" b="0">
+                <a:solidFill>
+                  <a:srgbClr val="D4D4D4"/>
+                </a:solidFill>
+                <a:latin typeface="Consolas"/>
+              </a:rPr>
+              <a:t> </a:t>
+            </a:r>
+            <a:r>
+              <a:rPr sz="1100" i="0" b="0">
+                <a:solidFill>
+                  <a:srgbClr val="D4D4D4"/>
+                </a:solidFill>
+                <a:latin typeface="Consolas"/>
+              </a:rPr>
+              <a:t>Cita</a:t>
+            </a:r>
+            <a:r>
+              <a:rPr sz="1100" i="0" b="0">
+                <a:solidFill>
+                  <a:srgbClr val="D4D4D4"/>
+                </a:solidFill>
+                <a:latin typeface="Consolas"/>
+              </a:rPr>
+              <a:t> : </a:t>
+            </a:r>
+            <a:r>
+              <a:rPr sz="1100" i="0" b="0">
+                <a:solidFill>
+                  <a:srgbClr val="D4D4D4"/>
+                </a:solidFill>
+                <a:latin typeface="Consolas"/>
+              </a:rPr>
+              <a:t>tiene</a:t>
+            </a:r>
+            <a:r>
+              <a:rPr sz="1100" i="0" b="0">
+                <a:solidFill>
+                  <a:srgbClr val="D4D4D4"/>
+                </a:solidFill>
+                <a:latin typeface="Consolas"/>
+              </a:rPr>
+              <a:t> </a:t>
+            </a:r>
+            <a:r>
+              <a:rPr sz="1100" i="0" b="0">
+                <a:solidFill>
+                  <a:srgbClr val="D4D4D4"/>
+                </a:solidFill>
+                <a:latin typeface="Consolas"/>
+              </a:rPr>
+              <a:t>agendada</a:t>
+            </a:r>
+          </a:p>
+          <a:p>
+            <a:pPr>
+              <a:spcAft>
+                <a:spcPts val="235"/>
+              </a:spcAft>
+            </a:pPr>
+            <a:r>
+              <a:rPr sz="1100" i="0" b="0">
+                <a:solidFill>
+                  <a:srgbClr val="D4D4D4"/>
+                </a:solidFill>
+                <a:latin typeface="Consolas"/>
+              </a:rPr>
+              <a:t>  </a:t>
+            </a:r>
+            <a:r>
+              <a:rPr sz="1100" i="0" b="0">
+                <a:solidFill>
+                  <a:srgbClr val="D4D4D4"/>
+                </a:solidFill>
+                <a:latin typeface="Consolas"/>
+              </a:rPr>
+              <a:t>Veterinario</a:t>
+            </a:r>
+            <a:r>
+              <a:rPr sz="1100" i="0" b="0">
+                <a:solidFill>
+                  <a:srgbClr val="D4D4D4"/>
+                </a:solidFill>
+                <a:latin typeface="Consolas"/>
+              </a:rPr>
+              <a:t> </a:t>
+            </a:r>
+            <a:r>
+              <a:rPr sz="1100" i="0" b="0">
+                <a:solidFill>
+                  <a:srgbClr val="CE9178"/>
+                </a:solidFill>
+                <a:latin typeface="Consolas"/>
+              </a:rPr>
+              <a:t>"1"</a:t>
+            </a:r>
+            <a:r>
+              <a:rPr sz="1100" i="0" b="0">
+                <a:solidFill>
+                  <a:srgbClr val="D4D4D4"/>
+                </a:solidFill>
+                <a:latin typeface="Consolas"/>
+              </a:rPr>
+              <a:t> --&gt; </a:t>
+            </a:r>
+            <a:r>
+              <a:rPr sz="1100" i="0" b="0">
+                <a:solidFill>
+                  <a:srgbClr val="CE9178"/>
+                </a:solidFill>
+                <a:latin typeface="Consolas"/>
+              </a:rPr>
+              <a:t>"0..*"</a:t>
+            </a:r>
+            <a:r>
+              <a:rPr sz="1100" i="0" b="0">
+                <a:solidFill>
+                  <a:srgbClr val="D4D4D4"/>
+                </a:solidFill>
+                <a:latin typeface="Consolas"/>
+              </a:rPr>
+              <a:t> </a:t>
+            </a:r>
+            <a:r>
+              <a:rPr sz="1100" i="0" b="0">
+                <a:solidFill>
+                  <a:srgbClr val="D4D4D4"/>
+                </a:solidFill>
+                <a:latin typeface="Consolas"/>
+              </a:rPr>
+              <a:t>Cita</a:t>
+            </a:r>
+            <a:r>
+              <a:rPr sz="1100" i="0" b="0">
+                <a:solidFill>
+                  <a:srgbClr val="D4D4D4"/>
+                </a:solidFill>
+                <a:latin typeface="Consolas"/>
+              </a:rPr>
+              <a:t> : </a:t>
+            </a:r>
+            <a:r>
+              <a:rPr sz="1100" i="0" b="0">
+                <a:solidFill>
+                  <a:srgbClr val="D4D4D4"/>
+                </a:solidFill>
+                <a:latin typeface="Consolas"/>
+              </a:rPr>
+              <a:t>atiende</a:t>
+            </a:r>
+          </a:p>
+          <a:p>
+            <a:pPr>
+              <a:spcAft>
+                <a:spcPts val="235"/>
+              </a:spcAft>
+            </a:pPr>
+            <a:r>
+              <a:rPr sz="1100" i="0" b="0">
+                <a:solidFill>
+                  <a:srgbClr val="D4D4D4"/>
+                </a:solidFill>
+                <a:latin typeface="Consolas"/>
+              </a:rPr>
+              <a:t>  </a:t>
+            </a:r>
+            <a:r>
+              <a:rPr sz="1100" i="0" b="0">
+                <a:solidFill>
+                  <a:srgbClr val="D4D4D4"/>
+                </a:solidFill>
+                <a:latin typeface="Consolas"/>
+              </a:rPr>
+              <a:t>Cita</a:t>
+            </a:r>
+            <a:r>
+              <a:rPr sz="1100" i="0" b="0">
+                <a:solidFill>
+                  <a:srgbClr val="D4D4D4"/>
+                </a:solidFill>
+                <a:latin typeface="Consolas"/>
+              </a:rPr>
+              <a:t> </a:t>
+            </a:r>
+            <a:r>
+              <a:rPr sz="1100" i="0" b="0">
+                <a:solidFill>
+                  <a:srgbClr val="CE9178"/>
+                </a:solidFill>
+                <a:latin typeface="Consolas"/>
+              </a:rPr>
+              <a:t>"1"</a:t>
+            </a:r>
+            <a:r>
+              <a:rPr sz="1100" i="0" b="0">
+                <a:solidFill>
+                  <a:srgbClr val="D4D4D4"/>
+                </a:solidFill>
+                <a:latin typeface="Consolas"/>
+              </a:rPr>
+              <a:t> --&gt; </a:t>
+            </a:r>
+            <a:r>
+              <a:rPr sz="1100" i="0" b="0">
+                <a:solidFill>
+                  <a:srgbClr val="CE9178"/>
+                </a:solidFill>
+                <a:latin typeface="Consolas"/>
+              </a:rPr>
+              <a:t>"0..1"</a:t>
+            </a:r>
+            <a:r>
+              <a:rPr sz="1100" i="0" b="0">
+                <a:solidFill>
+                  <a:srgbClr val="D4D4D4"/>
+                </a:solidFill>
+                <a:latin typeface="Consolas"/>
+              </a:rPr>
+              <a:t> </a:t>
+            </a:r>
+            <a:r>
+              <a:rPr sz="1100" i="0" b="0">
+                <a:solidFill>
+                  <a:srgbClr val="D4D4D4"/>
+                </a:solidFill>
+                <a:latin typeface="Consolas"/>
+              </a:rPr>
+              <a:t>Atencion</a:t>
+            </a:r>
+            <a:r>
+              <a:rPr sz="1100" i="0" b="0">
+                <a:solidFill>
+                  <a:srgbClr val="D4D4D4"/>
+                </a:solidFill>
+                <a:latin typeface="Consolas"/>
+              </a:rPr>
+              <a:t> : </a:t>
+            </a:r>
+            <a:r>
+              <a:rPr sz="1100" i="0" b="0">
+                <a:solidFill>
+                  <a:srgbClr val="D4D4D4"/>
+                </a:solidFill>
+                <a:latin typeface="Consolas"/>
+              </a:rPr>
+              <a:t>genera</a:t>
+            </a:r>
+          </a:p>
+        </p:txBody>
+      </p:sp>
+      <p:sp>
+        <p:nvSpPr>
+          <p:cNvPr id="13" name="Rounded Rectangle 12"/>
+          <p:cNvSpPr/>
+          <p:nvPr/>
+        </p:nvSpPr>
+        <p:spPr>
+          <a:xfrm>
+            <a:off x="7668579" y="1261872"/>
+            <a:ext cx="4120780" cy="3318569"/>
+          </a:xfrm>
+          <a:prstGeom prst="roundRect">
+            <a:avLst>
+              <a:gd name="adj" fmla="val 4000"/>
+            </a:avLst>
+          </a:prstGeom>
+          <a:solidFill>
+            <a:srgbClr val="E8EEF4"/>
+          </a:solidFill>
+          <a:ln>
+            <a:noFill/>
+          </a:ln>
+        </p:spPr>
+        <p:style>
+          <a:lnRef idx="1">
+            <a:schemeClr val="accent1"/>
+          </a:lnRef>
+          <a:fillRef idx="3">
+            <a:schemeClr val="accent1"/>
+          </a:fillRef>
+          <a:effectRef idx="2">
+            <a:schemeClr val="accent1"/>
+          </a:effectRef>
+          <a:fontRef idx="minor">
+            <a:schemeClr val="lt1"/>
+          </a:fontRef>
+        </p:style>
+        <p:txBody>
+          <a:bodyPr rtlCol="0" anchor="ctr"/>
+          <a:lstStyle/>
+          <a:p>
+            <a:pPr algn="ctr"/>
+          </a:p>
+        </p:txBody>
+      </p:sp>
+      <p:pic>
+        <p:nvPicPr>
+          <p:cNvPr id="14" name="Picture 13" descr="dg-dominio-completo-paso1.png"/>
+          <p:cNvPicPr>
+            <a:picLocks noChangeAspect="1"/>
+          </p:cNvPicPr>
+          <p:nvPr/>
+        </p:nvPicPr>
+        <p:blipFill>
+          <a:blip r:embed="rId2"/>
+          <a:stretch>
+            <a:fillRect/>
+          </a:stretch>
+        </p:blipFill>
+        <p:spPr>
+          <a:xfrm>
+            <a:off x="7723443" y="1316736"/>
+            <a:ext cx="4011052" cy="3208841"/>
+          </a:xfrm>
+          <a:prstGeom prst="rect">
+            <a:avLst/>
+          </a:prstGeom>
+        </p:spPr>
+      </p:pic>
+      <p:sp>
+        <p:nvSpPr>
+          <p:cNvPr id="15" name="TextBox 14"/>
           <p:cNvSpPr txBox="1"/>
           <p:nvPr/>
         </p:nvSpPr>
         <p:spPr>
           <a:xfrm>
-            <a:off x="457200" y="6035040"/>
-            <a:ext cx="11277295" cy="365760"/>
+            <a:off x="7723443" y="4580441"/>
+            <a:ext cx="4011052" cy="320040"/>
           </a:xfrm>
           <a:prstGeom prst="rect">
             <a:avLst/>
@@ -13631,6 +13879,41 @@
           <a:p>
             <a:pPr algn="ctr"/>
             <a:r>
+              <a:rPr sz="1200" b="0" i="1">
+                <a:solidFill>
+                  <a:srgbClr val="666666"/>
+                </a:solidFill>
+                <a:latin typeface="Calibri"/>
+              </a:rPr>
+              <a:t>Lo que dibuja este código</a:t>
+            </a:r>
+          </a:p>
+        </p:txBody>
+      </p:sp>
+      <p:sp>
+        <p:nvSpPr>
+          <p:cNvPr id="16" name="TextBox 15"/>
+          <p:cNvSpPr txBox="1"/>
+          <p:nvPr/>
+        </p:nvSpPr>
+        <p:spPr>
+          <a:xfrm>
+            <a:off x="457200" y="6035040"/>
+            <a:ext cx="11277295" cy="365760"/>
+          </a:xfrm>
+          <a:prstGeom prst="rect">
+            <a:avLst/>
+          </a:prstGeom>
+          <a:noFill/>
+        </p:spPr>
+        <p:txBody>
+          <a:bodyPr wrap="square">
+            <a:spAutoFit/>
+          </a:bodyPr>
+          <a:lstStyle/>
+          <a:p>
+            <a:pPr algn="ctr"/>
+            <a:r>
               <a:rPr sz="1300" b="0" i="1">
                 <a:solidFill>
                   <a:srgbClr val="666666"/>
@@ -13644,7 +13927,7 @@
       </p:sp>
       <p:sp>
         <p:nvSpPr>
-          <p:cNvPr id="14" name="TextBox 13"/>
+          <p:cNvPr id="17" name="TextBox 16"/>
           <p:cNvSpPr txBox="1"/>
           <p:nvPr/>
         </p:nvSpPr>
